--- a/submission/StudyRoute_Deck.pptx
+++ b/submission/StudyRoute_Deck.pptx
@@ -116,32 +116,32 @@
   <p:extLst>
     <p:ext uri="{521415D9-36F7-43E2-AB2F-B90AF26B5E84}">
       <p14:sectionLst xmlns:p14="http://schemas.microsoft.com/office/powerpoint/2010/main">
-        <p14:section name="Opening" id="{5fe96e16-0efc-7a3c-7182-c3a674d91c23}">
+        <p14:section name="Opening" id="{7f63dde5-eded-e319-570a-1d1a19fcbcc3}">
           <p14:sldIdLst>
             <p14:sldId id="256"/>
             <p14:sldId id="257"/>
           </p14:sldIdLst>
         </p14:section>
-        <p14:section name="The problem" id="{335d41aa-3549-e481-1f83-8500560ec38b}">
+        <p14:section name="The problem" id="{1fe8b8c4-49d3-9951-ad74-dd1bb36836c1}">
           <p14:sldIdLst>
             <p14:sldId id="258"/>
             <p14:sldId id="259"/>
           </p14:sldIdLst>
         </p14:section>
-        <p14:section name="The solution" id="{dbed8712-8882-3747-9354-23d2f1b9f005}">
+        <p14:section name="The solution" id="{a5ed70e0-0173-14dc-dbea-a4b1c8f43e1b}">
           <p14:sldIdLst>
             <p14:sldId id="260"/>
             <p14:sldId id="261"/>
           </p14:sldIdLst>
         </p14:section>
-        <p14:section name="Trust" id="{3fcd2050-f4e2-29ee-a9ba-2281ac9889f3}">
+        <p14:section name="Trust" id="{55ada93e-5a7f-0f7e-592f-4ad9ef56964f}">
           <p14:sldIdLst>
             <p14:sldId id="262"/>
             <p14:sldId id="263"/>
             <p14:sldId id="264"/>
           </p14:sldIdLst>
         </p14:section>
-        <p14:section name="Close" id="{3c886b98-ab1c-8308-b204-a91d82604b35}">
+        <p14:section name="Close" id="{da641730-c6d4-3dda-cde9-118e3700f2b3}">
           <p14:sldIdLst>
             <p14:sldId id="265"/>
           </p14:sldIdLst>
@@ -1287,7 +1287,7 @@
           <a:p>
             <a:r>
               <a:rPr lang="en-US" dirty="0"/>
-              <a:t>This is task completion. On the left is the compare screen. On the right, the agent and the person share the work. The agent ranks providers by true cost, plans the deadline and the document list, and then blocks the payment until KYC, the recipient allowlist and the sandbox caps all pass. The person creates the draft, chooses the recipient and approves with a fresh MFA code. The agent then tracks the payment to settled and every step is logged. The assistant can propose a draft or an approval request, but a person always clicks.</a:t>
+              <a:t>This is task completion. On the left, the parent typed one sentence into the chat: I need to pay ten thousand pounds of tuition by 28 October. The agent read it, made the quote, ranked the providers, planned the deadline and checked KYC, the recipient and the documents, and it built this plan card from the engine's output. On the right, the agent and the person share the work. The person creates the draft, chooses the recipient and approves with a fresh MFA code. The agent blocks the payment until KYC, the allowlist and the sandbox caps pass, then tracks it to settled and seals a compliance report. Look at what the agent did not do: it created no payment. It can propose a draft, but a person always clicks.</a:t>
             </a:r>
             <a:endParaRPr lang="en-US" dirty="0"/>
           </a:p>
@@ -1375,7 +1375,7 @@
           <a:p>
             <a:r>
               <a:rPr lang="en-US" dirty="0"/>
-              <a:t>Every number comes from a deterministic engine: integer minor units, decimal rates, no floats. For one provider, total cost is the FX margin plus the fixed fee, the SWIFT fee, any fees the sender pays under OUR, plus a shortfall when fees are deducted from the amount. We rank by that percentage. In our synthetic example, Provider B is first at 1.58 percent, Provider C looks cheap but it is quoted as SHA, so the university would receive 35 pounds less, and Provider A is third at 2.16 percent. On the right is where Provider B's 25,300 taka goes: 16,000 is the margin, 3,000 the fixed fee, 1,500 the SWIFT fee and 4,800 the fees we pay under OUR.</a:t>
+              <a:t>Every number comes from a deterministic engine: integer minor units, decimal rates, no floats. For one provider, total cost is the FX margin plus the fixed fee, the SWIFT fee, any fees the sender pays under OUR, plus a shortfall when fees are deducted from the amount. We rank by that percentage. In our synthetic example, Provider B is first at 1.58 percent, Provider C looks cheap but it is quoted as SHA, so the university would receive 35 pounds less, and Provider A is third at 2.16 percent. On the right is where Provider B's 25,300 taka goes: 16,000 is the margin, 3,000 the fixed fee, 1,500 the SWIFT fee and 4,800 the fees we pay under OUR. The same engine powers the smart send plan: fixed fees are paid on every transfer, so sending 12,000 pounds of living costs all at once costs 28,500 taka against 68,400 monthly. It does not predict exchange rates, and says so.</a:t>
             </a:r>
             <a:endParaRPr lang="en-US" dirty="0"/>
           </a:p>
@@ -1551,7 +1551,7 @@
           <a:p>
             <a:r>
               <a:rPr lang="en-US" dirty="0"/>
-              <a:t>Security and compliance is thirty percent of the score, so we made it checkable. On the left are the permission tiers, enforced in the domain layer, not just in the screens. Public, read, prepare, decide, and administer. Deciding, meaning approving a payment, is only for a human parent with a fresh MFA proof bound to that payment and to the hash of the summary they saw. The AI has no approve, cancel, limit or config permission at all. On the right, the numbers: 483 backend and 52 frontend tests, all 24 blueprint scenarios mapped to tests, and 17 known risks that we list openly in the self-assessment. The audit log is hash-chained: Verify passes, we edit one row behind the application's back, and Verify fails at exactly that event. The threat matrix with a proof for each row is in the repository.</a:t>
+              <a:t>Security and compliance is thirty percent of the score, so we made it checkable. On the left are the permission tiers, enforced in the domain layer, not just in the screens. Public, read, prepare, decide, and administer. Deciding, meaning approving a payment, is only for a human parent with a fresh MFA proof bound to that payment and to the hash of the summary they saw. The AI has no approve, cancel, limit or config permission at all. On the right, the numbers: 565 backend and 75 frontend tests, all 24 blueprint scenarios mapped to tests, and 18 known risks that we list openly in the self-assessment. The audit log is hash-chained: Verify passes, we edit one row behind the application's back, and Verify fails at exactly that event. Each payment also gets a compliance report whose hash your browser can recompute. The threat matrix with a proof for each row is in the repository.</a:t>
             </a:r>
             <a:endParaRPr lang="en-US" dirty="0"/>
           </a:p>
@@ -1639,7 +1639,7 @@
           <a:p>
             <a:r>
               <a:rPr lang="en-US" dirty="0"/>
-              <a:t>Honesty is a feature. A banner on every screen and an X-Sandbox header on every API response say this is a sandbox. The Sandbox screen on the left lists everything that is simulated and how to trigger the edge cases, such as a recipient named FAIL_TEST. Any rule that has not been checked against an official source carries a yellow Not verified badge and the sentence: indicative, confirm with your AD bank. On the right is the audit log with the hash chain verified. The sandbox operation logs from a real run, including the tamper demo, are in the repository under submission slash evidence.</a:t>
+              <a:t>Honesty is a feature. A banner on every screen and an X-Sandbox header on every API response say this is a sandbox. The Sandbox screen on the left lists everything that is simulated and how to trigger the edge cases, such as a recipient named FAIL_TEST. Any rule that has not been checked against an official source carries a yellow Not verified badge and the sentence: indicative, confirm with your AD bank. On the right is a payment's compliance report: the parties, ten controls with their evidence, the approval proof and the audit trail, sealed with a hash that the browser recomputes. Change a copy and it says does not match. The sandbox operation logs from a real run, including the tamper demo, are in the repository under submission slash evidence.</a:t>
             </a:r>
             <a:endParaRPr lang="en-US" dirty="0"/>
           </a:p>
@@ -5338,7 +5338,7 @@
       </p:sp>
       <p:pic>
         <p:nvPicPr>
-          <p:cNvPr id="4" name="content-5-image-2" descr="Compare screen ranking providers with a shortfall warning">    </p:cNvPr>
+          <p:cNvPr id="4" name="content-5-image-2" descr="The assistant's payment plan built from one sentence">    </p:cNvPr>
           <p:cNvPicPr>
             <a:picLocks noChangeAspect="1"/>
           </p:cNvPicPr>
@@ -5390,7 +5390,7 @@
                   <a:schemeClr val="tx2"/>
                 </a:solidFill>
               </a:rPr>
-              <a:t>Compare screen. Synthetic data.</a:t>
+              <a:t>One sentence in the chat. Synthetic data.</a:t>
             </a:r>
             <a:endParaRPr lang="en-US" sz="1100" dirty="0"/>
           </a:p>
@@ -5484,7 +5484,7 @@
                   <a:schemeClr val="tx1"/>
                 </a:solidFill>
               </a:rPr>
-              <a:t>Ranks providers by true cost</a:t>
+              <a:t>Reads one sentence, makes the quote</a:t>
             </a:r>
             <a:endParaRPr lang="en-US" sz="1400" dirty="0"/>
           </a:p>
@@ -5578,7 +5578,7 @@
                   <a:schemeClr val="tx1"/>
                 </a:solidFill>
               </a:rPr>
-              <a:t>Plans deadline and documents</a:t>
+              <a:t>Ranks, plans deadline, checks KYC</a:t>
             </a:r>
             <a:endParaRPr lang="en-US" sz="1400" dirty="0"/>
           </a:p>
@@ -5954,7 +5954,7 @@
                   <a:schemeClr val="tx1"/>
                 </a:solidFill>
               </a:rPr>
-              <a:t>Tracks to SETTLED, logs it all</a:t>
+              <a:t>Tracks to SETTLED, seals a report</a:t>
             </a:r>
             <a:endParaRPr lang="en-US" sz="1400" dirty="0"/>
           </a:p>
@@ -7354,12 +7354,12 @@
               <a:buNone/>
             </a:pPr>
             <a:r>
-              <a:rPr lang="en-US" sz="1200" dirty="0">
-                <a:solidFill>
-                  <a:schemeClr val="tx2"/>
-                </a:solidFill>
-              </a:rPr>
-              <a:t>Example: GBP 10,000 at a mid rate of 160.00 BDT per GBP. Synthetic rates and fees.</a:t>
+              <a:rPr lang="en-US" sz="1200" b="1" dirty="0">
+                <a:solidFill>
+                  <a:schemeClr val="tx1"/>
+                </a:solidFill>
+              </a:rPr>
+              <a:t>Smart send plan: the same GBP 12,000 costs BDT 68,400 sent monthly and BDT 28,500 sent at once. Synthetic rates.</a:t>
             </a:r>
             <a:endParaRPr lang="en-US" sz="1200" dirty="0"/>
           </a:p>
@@ -8367,7 +8367,7 @@
                   <a:schemeClr val="tx2"/>
                 </a:solidFill>
               </a:rPr>
-              <a:t>No tool can approve, submit, cancel or change limits. A human approves with MFA.</a:t>
+              <a:t>It may make a quote. It cannot create a payment, approve, submit or cancel. A human approves with MFA.</a:t>
             </a:r>
             <a:endParaRPr lang="en-US" sz="1400" dirty="0"/>
           </a:p>
@@ -9002,7 +9002,7 @@
                 <a:ea typeface="+mj-lt" pitchFamily="34" charset="-122"/>
                 <a:cs typeface="+mj-lt" pitchFamily="34" charset="-120"/>
               </a:rPr>
-              <a:t>483</a:t>
+              <a:t>565</a:t>
             </a:r>
             <a:endParaRPr lang="en-US" sz="3200" dirty="0"/>
           </a:p>
@@ -9099,7 +9099,7 @@
                 <a:ea typeface="+mj-lt" pitchFamily="34" charset="-122"/>
                 <a:cs typeface="+mj-lt" pitchFamily="34" charset="-120"/>
               </a:rPr>
-              <a:t>52</a:t>
+              <a:t>75</a:t>
             </a:r>
             <a:endParaRPr lang="en-US" sz="3200" dirty="0"/>
           </a:p>
@@ -9293,7 +9293,7 @@
                 <a:ea typeface="+mj-lt" pitchFamily="34" charset="-122"/>
                 <a:cs typeface="+mj-lt" pitchFamily="34" charset="-120"/>
               </a:rPr>
-              <a:t>17</a:t>
+              <a:t>18</a:t>
             </a:r>
             <a:endParaRPr lang="en-US" sz="3200" dirty="0"/>
           </a:p>
@@ -9365,7 +9365,7 @@
                   <a:schemeClr val="tx2"/>
                 </a:solidFill>
               </a:rPr>
-              <a:t>Audit chain: Verify PASS, edit one row, Verify FAIL at that event. Every threat has a test: docs/SECURITY.md</a:t>
+              <a:t>Each payment has a compliance report with a hash your browser can check. Every threat has a test: docs/SECURITY.md</a:t>
             </a:r>
             <a:endParaRPr lang="en-US" sz="1200" dirty="0"/>
           </a:p>
@@ -9567,7 +9567,7 @@
       </p:sp>
       <p:pic>
         <p:nvPicPr>
-          <p:cNvPr id="7" name="content-9-image-5" descr="Audit log with Verify showing PASS">    </p:cNvPr>
+          <p:cNvPr id="7" name="content-9-image-5" descr="Compliance report whose hash verifies in the browser">    </p:cNvPr>
           <p:cNvPicPr>
             <a:picLocks noChangeAspect="1"/>
           </p:cNvPicPr>
@@ -9655,7 +9655,7 @@
                   <a:schemeClr val="tx2"/>
                 </a:solidFill>
               </a:rPr>
-              <a:t>Audit log: the hash chain verifies</a:t>
+              <a:t>Compliance report: the hash verifies in the browser</a:t>
             </a:r>
             <a:endParaRPr lang="en-US" sz="1100" dirty="0"/>
           </a:p>

--- a/submission/StudyRoute_Deck.pptx
+++ b/submission/StudyRoute_Deck.pptx
@@ -116,32 +116,32 @@
   <p:extLst>
     <p:ext uri="{521415D9-36F7-43E2-AB2F-B90AF26B5E84}">
       <p14:sectionLst xmlns:p14="http://schemas.microsoft.com/office/powerpoint/2010/main">
-        <p14:section name="Opening" id="{7f63dde5-eded-e319-570a-1d1a19fcbcc3}">
+        <p14:section name="Opening" id="{2b1353e0-a432-3556-d824-ea20d787e8c1}">
           <p14:sldIdLst>
             <p14:sldId id="256"/>
             <p14:sldId id="257"/>
           </p14:sldIdLst>
         </p14:section>
-        <p14:section name="The problem" id="{1fe8b8c4-49d3-9951-ad74-dd1bb36836c1}">
+        <p14:section name="The problem" id="{5d143097-ae83-9559-e8de-7e81526cf57f}">
           <p14:sldIdLst>
             <p14:sldId id="258"/>
             <p14:sldId id="259"/>
           </p14:sldIdLst>
         </p14:section>
-        <p14:section name="The solution" id="{a5ed70e0-0173-14dc-dbea-a4b1c8f43e1b}">
+        <p14:section name="The solution" id="{0c624ef0-a17c-861f-9969-4218105457d3}">
           <p14:sldIdLst>
             <p14:sldId id="260"/>
             <p14:sldId id="261"/>
           </p14:sldIdLst>
         </p14:section>
-        <p14:section name="Trust" id="{55ada93e-5a7f-0f7e-592f-4ad9ef56964f}">
+        <p14:section name="Trust" id="{147f3bea-18c2-5dfb-04b9-88548ae260fa}">
           <p14:sldIdLst>
             <p14:sldId id="262"/>
             <p14:sldId id="263"/>
             <p14:sldId id="264"/>
           </p14:sldIdLst>
         </p14:section>
-        <p14:section name="Close" id="{da641730-c6d4-3dda-cde9-118e3700f2b3}">
+        <p14:section name="Close" id="{5567e6e9-e95d-01bd-0308-72ff0c12117f}">
           <p14:sldIdLst>
             <p14:sldId id="265"/>
           </p14:sldIdLst>
@@ -1551,7 +1551,7 @@
           <a:p>
             <a:r>
               <a:rPr lang="en-US" dirty="0"/>
-              <a:t>Security and compliance is thirty percent of the score, so we made it checkable. On the left are the permission tiers, enforced in the domain layer, not just in the screens. Public, read, prepare, decide, and administer. Deciding, meaning approving a payment, is only for a human parent with a fresh MFA proof bound to that payment and to the hash of the summary they saw. The AI has no approve, cancel, limit or config permission at all. On the right, the numbers: 565 backend and 75 frontend tests, all 24 blueprint scenarios mapped to tests, and 18 known risks that we list openly in the self-assessment. The audit log is hash-chained: Verify passes, we edit one row behind the application's back, and Verify fails at exactly that event. Each payment also gets a compliance report whose hash your browser can recompute. The threat matrix with a proof for each row is in the repository.</a:t>
+              <a:t>Security and compliance is thirty percent of the score, so we made it checkable. On the left are the permission tiers, enforced in the domain layer, not just in the screens. Public, read, prepare, decide, and administer. Deciding, meaning approving a payment, is only for a human parent with a fresh MFA proof bound to that payment and to the hash of the summary they saw. The AI has no approve, cancel, limit or config permission at all. On the right, the numbers: 601 backend and 75 frontend tests, all 24 blueprint scenarios mapped to tests, and 18 known risks that we list openly in the self-assessment. The audit log is hash-chained: Verify passes, we edit one row behind the application's back, and Verify fails at exactly that event. Each payment also gets a compliance report whose hash your browser can recompute. The threat matrix with a proof for each row is in the repository.</a:t>
             </a:r>
             <a:endParaRPr lang="en-US" dirty="0"/>
           </a:p>
@@ -9002,7 +9002,7 @@
                 <a:ea typeface="+mj-lt" pitchFamily="34" charset="-122"/>
                 <a:cs typeface="+mj-lt" pitchFamily="34" charset="-120"/>
               </a:rPr>
-              <a:t>565</a:t>
+              <a:t>601</a:t>
             </a:r>
             <a:endParaRPr lang="en-US" sz="3200" dirty="0"/>
           </a:p>

--- a/submission/StudyRoute_Deck.pptx
+++ b/submission/StudyRoute_Deck.pptx
@@ -116,32 +116,32 @@
   <p:extLst>
     <p:ext uri="{521415D9-36F7-43E2-AB2F-B90AF26B5E84}">
       <p14:sectionLst xmlns:p14="http://schemas.microsoft.com/office/powerpoint/2010/main">
-        <p14:section name="Opening" id="{2b1353e0-a432-3556-d824-ea20d787e8c1}">
+        <p14:section name="Opening" id="{74b84ad7-be87-3f38-e84d-66c73ce80a77}">
           <p14:sldIdLst>
             <p14:sldId id="256"/>
             <p14:sldId id="257"/>
           </p14:sldIdLst>
         </p14:section>
-        <p14:section name="The problem" id="{5d143097-ae83-9559-e8de-7e81526cf57f}">
+        <p14:section name="The problem" id="{c65efd78-683f-3a31-e67c-b98a33479af1}">
           <p14:sldIdLst>
             <p14:sldId id="258"/>
             <p14:sldId id="259"/>
           </p14:sldIdLst>
         </p14:section>
-        <p14:section name="The solution" id="{0c624ef0-a17c-861f-9969-4218105457d3}">
+        <p14:section name="The solution" id="{42318c76-641b-b2fe-2ef9-af44e38f8edf}">
           <p14:sldIdLst>
             <p14:sldId id="260"/>
             <p14:sldId id="261"/>
           </p14:sldIdLst>
         </p14:section>
-        <p14:section name="Trust" id="{147f3bea-18c2-5dfb-04b9-88548ae260fa}">
+        <p14:section name="Trust" id="{61219f83-cd16-2e92-0de2-642393dcb993}">
           <p14:sldIdLst>
             <p14:sldId id="262"/>
             <p14:sldId id="263"/>
             <p14:sldId id="264"/>
           </p14:sldIdLst>
         </p14:section>
-        <p14:section name="Close" id="{5567e6e9-e95d-01bd-0308-72ff0c12117f}">
+        <p14:section name="Close" id="{c4f75d66-98d9-f681-e33e-52df4bd76b4a}">
           <p14:sldIdLst>
             <p14:sldId id="265"/>
           </p14:sldIdLst>
@@ -1199,7 +1199,7 @@
           <a:p>
             <a:r>
               <a:rPr lang="en-US" dirty="0"/>
-              <a:t>This is the real chain. The parent pays in taka to an authorised dealer bank, which sells foreign currency and sends a SWIFT instruction carrying a UETR and a charge code. A correspondent bank may take a lifting fee, the receiving bank may take another, and the university matches the payment by reference. Each step has a typical failure, shown in red. SWIFT only carries the instruction; banks settle between their own accounts. StudyRoute simulates this chain end to end, and it never moves real money.</a:t>
+              <a:t>This is the real chain. The parent pays in taka to an authorised dealer bank, which sells foreign currency and sends a SWIFT instruction carrying a UETR and a charge code. A correspondent bank may take a lifting fee, the receiving bank may take another, and the university matches the payment by reference. Each step has a typical failure, shown in red. SWIFT only carries the instruction; banks settle between their own accounts. StudyRoute simulates this chain end to end with invented banks, a correspondent and a double-entry ledger where debits equal credits, and a failed payment is returned in full. It never moves real money.</a:t>
             </a:r>
             <a:endParaRPr lang="en-US" dirty="0"/>
           </a:p>
@@ -1551,7 +1551,7 @@
           <a:p>
             <a:r>
               <a:rPr lang="en-US" dirty="0"/>
-              <a:t>Security and compliance is thirty percent of the score, so we made it checkable. On the left are the permission tiers, enforced in the domain layer, not just in the screens. Public, read, prepare, decide, and administer. Deciding, meaning approving a payment, is only for a human parent with a fresh MFA proof bound to that payment and to the hash of the summary they saw. The AI has no approve, cancel, limit or config permission at all. On the right, the numbers: 601 backend and 75 frontend tests, all 24 blueprint scenarios mapped to tests, and 18 known risks that we list openly in the self-assessment. The audit log is hash-chained: Verify passes, we edit one row behind the application's back, and Verify fails at exactly that event. Each payment also gets a compliance report whose hash your browser can recompute. The threat matrix with a proof for each row is in the repository.</a:t>
+              <a:t>Security and compliance is thirty percent of the score, so we made it checkable. On the left are the permission tiers, enforced in the domain layer, not just in the screens. Public, read, prepare, decide, and administer. Deciding, meaning approving a payment, is only for a human parent with a fresh MFA proof bound to that payment and to the hash of the summary they saw. The AI has no approve, cancel, limit or config permission at all. On the right, the numbers: 709 backend and 89 frontend tests, all 24 blueprint scenarios mapped to tests, and 21 known risks that we list openly in the self-assessment. The audit log is hash-chained: Verify passes, we edit one row behind the application's back, and Verify fails at exactly that event. Each payment also gets a compliance report whose hash your browser can recompute. The threat matrix with a proof for each row is in the repository.</a:t>
             </a:r>
             <a:endParaRPr lang="en-US" dirty="0"/>
           </a:p>
@@ -5230,7 +5230,7 @@
                   <a:schemeClr val="accent1"/>
                 </a:solidFill>
               </a:rPr>
-              <a:t>StudyRoute simulates this chain. It never moves real money.</a:t>
+              <a:t>StudyRoute simulates this chain with invented banks. It moves no real money.</a:t>
             </a:r>
             <a:endParaRPr lang="en-US" sz="1400" dirty="0"/>
           </a:p>
@@ -9002,7 +9002,7 @@
                 <a:ea typeface="+mj-lt" pitchFamily="34" charset="-122"/>
                 <a:cs typeface="+mj-lt" pitchFamily="34" charset="-120"/>
               </a:rPr>
-              <a:t>601</a:t>
+              <a:t>709</a:t>
             </a:r>
             <a:endParaRPr lang="en-US" sz="3200" dirty="0"/>
           </a:p>
@@ -9099,7 +9099,7 @@
                 <a:ea typeface="+mj-lt" pitchFamily="34" charset="-122"/>
                 <a:cs typeface="+mj-lt" pitchFamily="34" charset="-120"/>
               </a:rPr>
-              <a:t>75</a:t>
+              <a:t>89</a:t>
             </a:r>
             <a:endParaRPr lang="en-US" sz="3200" dirty="0"/>
           </a:p>
@@ -9293,7 +9293,7 @@
                 <a:ea typeface="+mj-lt" pitchFamily="34" charset="-122"/>
                 <a:cs typeface="+mj-lt" pitchFamily="34" charset="-120"/>
               </a:rPr>
-              <a:t>18</a:t>
+              <a:t>21</a:t>
             </a:r>
             <a:endParaRPr lang="en-US" sz="3200" dirty="0"/>
           </a:p>

--- a/submission/StudyRoute_Deck.pptx
+++ b/submission/StudyRoute_Deck.pptx
@@ -116,32 +116,32 @@
   <p:extLst>
     <p:ext uri="{521415D9-36F7-43E2-AB2F-B90AF26B5E84}">
       <p14:sectionLst xmlns:p14="http://schemas.microsoft.com/office/powerpoint/2010/main">
-        <p14:section name="Opening" id="{74b84ad7-be87-3f38-e84d-66c73ce80a77}">
+        <p14:section name="Opening" id="{a5025290-ca18-7c34-6d8c-e25ca3ef9357}">
           <p14:sldIdLst>
             <p14:sldId id="256"/>
             <p14:sldId id="257"/>
           </p14:sldIdLst>
         </p14:section>
-        <p14:section name="The problem" id="{c65efd78-683f-3a31-e67c-b98a33479af1}">
+        <p14:section name="The problem" id="{ac47a9c9-3714-8f0e-b677-c0631f917d31}">
           <p14:sldIdLst>
             <p14:sldId id="258"/>
             <p14:sldId id="259"/>
           </p14:sldIdLst>
         </p14:section>
-        <p14:section name="The solution" id="{42318c76-641b-b2fe-2ef9-af44e38f8edf}">
+        <p14:section name="The solution" id="{2a9bbd95-4f7d-e707-845d-ffc6de58b9d3}">
           <p14:sldIdLst>
             <p14:sldId id="260"/>
             <p14:sldId id="261"/>
           </p14:sldIdLst>
         </p14:section>
-        <p14:section name="Trust" id="{61219f83-cd16-2e92-0de2-642393dcb993}">
+        <p14:section name="Trust" id="{9395864e-c9f2-b035-1148-f873a05bdbe4}">
           <p14:sldIdLst>
             <p14:sldId id="262"/>
             <p14:sldId id="263"/>
             <p14:sldId id="264"/>
           </p14:sldIdLst>
         </p14:section>
-        <p14:section name="Close" id="{c4f75d66-98d9-f681-e33e-52df4bd76b4a}">
+        <p14:section name="Close" id="{17e5a3e9-d64f-bbf2-f7b4-040c3ae1b9ef}">
           <p14:sldIdLst>
             <p14:sldId id="265"/>
           </p14:sldIdLst>
@@ -847,7 +847,7 @@
           <a:p>
             <a:r>
               <a:rPr lang="en-US" dirty="0"/>
-              <a:t>Good morning. We are team [team name], and this is StudyRoute, our entry for Topic C, the cross-border and student finance assistant. StudyRoute is a sandbox AI agent that helps a parent in Bangladesh pay a student's tuition abroad. Everything you will see is synthetic and no real money moves. Our design rule is on the slide, and the rest of the talk shows how we make each of those four sentences true and testable: the engine calculates, the AI explains, the human approves, and every step is logged.</a:t>
+              <a:t>Good morning. We are team [Team name], and this is StudyRoute, our entry for Topic C, the cross-border and student finance assistant. StudyRoute is a sandbox AI agent that helps a parent in Bangladesh pay a student's tuition abroad. Everything you will see is synthetic and no real money moves. Our design rule is on the slide, and the rest of the talk shows how we make each of those four sentences true and testable: the engine calculates, the AI explains, the human approves, and every step is logged.</a:t>
             </a:r>
             <a:endParaRPr lang="en-US" dirty="0"/>
           </a:p>
@@ -1551,7 +1551,7 @@
           <a:p>
             <a:r>
               <a:rPr lang="en-US" dirty="0"/>
-              <a:t>Security and compliance is thirty percent of the score, so we made it checkable. On the left are the permission tiers, enforced in the domain layer, not just in the screens. Public, read, prepare, decide, and administer. Deciding, meaning approving a payment, is only for a human parent with a fresh MFA proof bound to that payment and to the hash of the summary they saw. The AI has no approve, cancel, limit or config permission at all. On the right, the numbers: 709 backend and 89 frontend tests, all 24 blueprint scenarios mapped to tests, and 21 known risks that we list openly in the self-assessment. The audit log is hash-chained: Verify passes, we edit one row behind the application's back, and Verify fails at exactly that event. Each payment also gets a compliance report whose hash your browser can recompute. The threat matrix with a proof for each row is in the repository.</a:t>
+              <a:t>Security and compliance is thirty percent of the score, so we made it checkable. On the left are the permission tiers, enforced in the domain layer, not just in the screens. Public, read, prepare, decide, and administer. Deciding, meaning approving a payment, is only for a human parent with a fresh MFA proof bound to that payment and to the hash of the summary they saw. The AI has no approve, cancel, limit or config permission at all. On the right, the numbers: 760 backend and 93 frontend tests, all 24 blueprint scenarios mapped to tests, and 21 known risks that we list openly in the self-assessment. The audit log is hash-chained: Verify passes, we edit one row behind the application's back, and Verify fails at exactly that event. Each payment also gets a compliance report whose hash your browser can recompute. The threat matrix with a proof for each row is in the repository.</a:t>
             </a:r>
             <a:endParaRPr lang="en-US" dirty="0"/>
           </a:p>
@@ -9002,7 +9002,7 @@
                 <a:ea typeface="+mj-lt" pitchFamily="34" charset="-122"/>
                 <a:cs typeface="+mj-lt" pitchFamily="34" charset="-120"/>
               </a:rPr>
-              <a:t>709</a:t>
+              <a:t>760</a:t>
             </a:r>
             <a:endParaRPr lang="en-US" sz="3200" dirty="0"/>
           </a:p>
@@ -9099,7 +9099,7 @@
                 <a:ea typeface="+mj-lt" pitchFamily="34" charset="-122"/>
                 <a:cs typeface="+mj-lt" pitchFamily="34" charset="-120"/>
               </a:rPr>
-              <a:t>89</a:t>
+              <a:t>93</a:t>
             </a:r>
             <a:endParaRPr lang="en-US" sz="3200" dirty="0"/>
           </a:p>

--- a/submission/StudyRoute_Deck.pptx
+++ b/submission/StudyRoute_Deck.pptx
@@ -116,32 +116,32 @@
   <p:extLst>
     <p:ext uri="{521415D9-36F7-43E2-AB2F-B90AF26B5E84}">
       <p14:sectionLst xmlns:p14="http://schemas.microsoft.com/office/powerpoint/2010/main">
-        <p14:section name="Opening" id="{a5025290-ca18-7c34-6d8c-e25ca3ef9357}">
+        <p14:section name="Opening" id="{97f48a61-4743-e911-9f9b-00170eb8219d}">
           <p14:sldIdLst>
             <p14:sldId id="256"/>
             <p14:sldId id="257"/>
           </p14:sldIdLst>
         </p14:section>
-        <p14:section name="The problem" id="{ac47a9c9-3714-8f0e-b677-c0631f917d31}">
+        <p14:section name="The problem" id="{3ce6ef94-3e4f-e424-8f5c-9a3862a6b235}">
           <p14:sldIdLst>
             <p14:sldId id="258"/>
             <p14:sldId id="259"/>
           </p14:sldIdLst>
         </p14:section>
-        <p14:section name="The solution" id="{2a9bbd95-4f7d-e707-845d-ffc6de58b9d3}">
+        <p14:section name="The solution" id="{241160b3-fa9e-3b71-b760-acf5cb2c29c4}">
           <p14:sldIdLst>
             <p14:sldId id="260"/>
             <p14:sldId id="261"/>
           </p14:sldIdLst>
         </p14:section>
-        <p14:section name="Trust" id="{9395864e-c9f2-b035-1148-f873a05bdbe4}">
+        <p14:section name="Trust" id="{fc57ecf6-17b2-cef4-d74d-bc5ba7387a1e}">
           <p14:sldIdLst>
             <p14:sldId id="262"/>
             <p14:sldId id="263"/>
             <p14:sldId id="264"/>
           </p14:sldIdLst>
         </p14:section>
-        <p14:section name="Close" id="{17e5a3e9-d64f-bbf2-f7b4-040c3ae1b9ef}">
+        <p14:section name="Close" id="{6a0ee387-aa1b-cbfd-48be-6c4519868c24}">
           <p14:sldIdLst>
             <p14:sldId id="265"/>
           </p14:sldIdLst>

--- a/submission/StudyRoute_Deck.pptx
+++ b/submission/StudyRoute_Deck.pptx
@@ -15,9 +15,10 @@
     <p:sldId id="263" r:id="rId9"/>
     <p:sldId id="264" r:id="rId10"/>
     <p:sldId id="265" r:id="rId11"/>
+    <p:sldId id="266" r:id="rId12"/>
   </p:sldIdLst>
   <p:notesMasterIdLst>
-    <p:notesMasterId r:id="rId12"/>
+    <p:notesMasterId r:id="rId13"/>
   </p:notesMasterIdLst>
   <p:sldSz cx="9144000" cy="5143500"/>
   <p:notesSz cx="5143500" cy="9144000"/>
@@ -116,34 +117,35 @@
   <p:extLst>
     <p:ext uri="{521415D9-36F7-43E2-AB2F-B90AF26B5E84}">
       <p14:sectionLst xmlns:p14="http://schemas.microsoft.com/office/powerpoint/2010/main">
-        <p14:section name="Opening" id="{97f48a61-4743-e911-9f9b-00170eb8219d}">
+        <p14:section name="Opening" id="{1b41d1e7-7d96-5d78-9266-bd4c49342293}">
           <p14:sldIdLst>
             <p14:sldId id="256"/>
             <p14:sldId id="257"/>
           </p14:sldIdLst>
         </p14:section>
-        <p14:section name="The problem" id="{3ce6ef94-3e4f-e424-8f5c-9a3862a6b235}">
+        <p14:section name="The problem" id="{40048cad-9c50-749e-bbea-d6e46422baab}">
           <p14:sldIdLst>
             <p14:sldId id="258"/>
             <p14:sldId id="259"/>
           </p14:sldIdLst>
         </p14:section>
-        <p14:section name="The solution" id="{241160b3-fa9e-3b71-b760-acf5cb2c29c4}">
+        <p14:section name="The solution" id="{0022fe3d-4005-9fcc-7d2f-13ea3880ca86}">
           <p14:sldIdLst>
             <p14:sldId id="260"/>
             <p14:sldId id="261"/>
+            <p14:sldId id="262"/>
           </p14:sldIdLst>
         </p14:section>
-        <p14:section name="Trust" id="{fc57ecf6-17b2-cef4-d74d-bc5ba7387a1e}">
+        <p14:section name="Trust" id="{0b345073-deeb-a08e-211f-a99db0edcc03}">
           <p14:sldIdLst>
-            <p14:sldId id="262"/>
             <p14:sldId id="263"/>
             <p14:sldId id="264"/>
+            <p14:sldId id="265"/>
           </p14:sldIdLst>
         </p14:section>
-        <p14:section name="Close" id="{6a0ee387-aa1b-cbfd-48be-6c4519868c24}">
+        <p14:section name="Close" id="{deca463a-a4d5-b324-a66e-7e1402fac477}">
           <p14:sldIdLst>
-            <p14:sldId id="265"/>
+            <p14:sldId id="266"/>
           </p14:sldIdLst>
         </p14:section>
       </p14:sectionLst>
@@ -935,7 +937,7 @@
           <a:p>
             <a:r>
               <a:rPr lang="en-US" dirty="0"/>
-              <a:t>Next steps. First, replace every placeholder rule with an official Bangladesh Bank source and add the moon-dependent holidays. We would also add the moon-dependent holidays to the planner. Second, a partnership with an authorised dealer bank for real quotes and real KYC, and regulator-ready reports from the audit log. Topic C also mentions credit building and multi-currency management. We have not built those, and we would rather say so than pretend. To close: StudyRoute is clear, cheap and safe, because the engine calculates, the AI explains, the human approves, and every step is logged. Thank you.</a:t>
+              <a:t>Honesty is a feature. A banner on every screen and an X-Sandbox header on every API response say this is a sandbox. The Sandbox screen on the left lists everything that is simulated and how to trigger the edge cases, such as a recipient named FAIL_TEST. Any rule that has not been checked against an official source carries a yellow Not verified badge and the sentence: indicative, confirm with your AD bank. On the right is a payment's compliance report: the parties, ten controls with their evidence, the approval proof and the audit trail, sealed with a hash that the browser recomputes. Change a copy and it says does not match. The sandbox operation logs from a real run, including the tamper demo, are in the repository under submission slash evidence.</a:t>
             </a:r>
             <a:endParaRPr lang="en-US" dirty="0"/>
           </a:p>
@@ -959,6 +961,94 @@
             <a:fld id="{F7021451-1387-4CA6-816F-3879F97B5CBC}" type="slidenum">
               <a:rPr lang="en-US"/>
               <a:t>10</a:t>
+            </a:fld>
+            <a:endParaRPr lang="en-US"/>
+          </a:p>
+        </p:txBody>
+      </p:sp>
+    </p:spTree>
+    <p:extLst>
+      <p:ext uri="{BB962C8B-B14F-4D97-AF65-F5344CB8AC3E}">
+        <p14:creationId xmlns:p14="http://schemas.microsoft.com/office/powerpoint/2010/main" val="1024086991"/>
+      </p:ext>
+    </p:extLst>
+  </p:cSld>
+  <p:clrMapOvr>
+    <a:masterClrMapping/>
+  </p:clrMapOvr>
+</p:notes>
+</file>
+
+<file path=ppt/notesSlides/notesSlide11.xml><?xml version="1.0" encoding="utf-8"?>
+<p:notes xmlns:a="http://schemas.openxmlformats.org/drawingml/2006/main" xmlns:r="http://schemas.openxmlformats.org/officeDocument/2006/relationships" xmlns:p="http://schemas.openxmlformats.org/presentationml/2006/main">
+  <p:cSld>
+    <p:spTree>
+      <p:nvGrpSpPr>
+        <p:cNvPr id="1" name=""/>
+        <p:cNvGrpSpPr/>
+        <p:nvPr/>
+      </p:nvGrpSpPr>
+      <p:grpSpPr>
+        <a:xfrm>
+          <a:off x="0" y="0"/>
+          <a:ext cx="0" cy="0"/>
+          <a:chOff x="0" y="0"/>
+          <a:chExt cx="0" cy="0"/>
+        </a:xfrm>
+      </p:grpSpPr>
+      <p:sp>
+        <p:nvSpPr>
+          <p:cNvPr id="2" name="Slide Image Placeholder 1"/>
+          <p:cNvSpPr>
+            <a:spLocks noGrp="1" noRot="1" noChangeAspect="1"/>
+          </p:cNvSpPr>
+          <p:nvPr>
+            <p:ph type="sldImg"/>
+          </p:nvPr>
+        </p:nvSpPr>
+        <p:spPr/>
+      </p:sp>
+      <p:sp>
+        <p:nvSpPr>
+          <p:cNvPr id="3" name="Notes Placeholder 2"/>
+          <p:cNvSpPr>
+            <a:spLocks noGrp="1"/>
+          </p:cNvSpPr>
+          <p:nvPr>
+            <p:ph type="body" idx="1"/>
+          </p:nvPr>
+        </p:nvSpPr>
+        <p:spPr/>
+        <p:txBody>
+          <a:bodyPr/>
+          <a:lstStyle/>
+          <a:p>
+            <a:r>
+              <a:rPr lang="en-US" dirty="0"/>
+              <a:t>Next steps. First, replace every placeholder rule with an official Bangladesh Bank source and add the moon-dependent holidays. We would also add the moon-dependent holidays to the planner. Second, a partnership with an authorised dealer bank for real quotes and real KYC, and regulator-ready reports from the audit log. Third, the escrow contracts would move from our simulated chain to a permissioned one with a deposit token issued by a bank. Topic C also mentions credit building. We have not built it, and we would rather say so than pretend. We do show a household's money in every currency, but those are simulated accounts, not real ones. To close: StudyRoute is clear, cheap and safe, because the engine calculates, the AI explains, the human approves, and every step is logged. Thank you.</a:t>
+            </a:r>
+            <a:endParaRPr lang="en-US" dirty="0"/>
+          </a:p>
+        </p:txBody>
+      </p:sp>
+      <p:sp>
+        <p:nvSpPr>
+          <p:cNvPr id="4" name="Slide Number Placeholder 3"/>
+          <p:cNvSpPr>
+            <a:spLocks noGrp="1"/>
+          </p:cNvSpPr>
+          <p:nvPr>
+            <p:ph type="sldNum" sz="quarter" idx="10"/>
+          </p:nvPr>
+        </p:nvSpPr>
+        <p:spPr/>
+        <p:txBody>
+          <a:bodyPr/>
+          <a:lstStyle/>
+          <a:p>
+            <a:fld id="{F7021451-1387-4CA6-816F-3879F97B5CBC}" type="slidenum">
+              <a:rPr lang="en-US"/>
+              <a:t>11</a:t>
             </a:fld>
             <a:endParaRPr lang="en-US"/>
           </a:p>
@@ -1463,7 +1553,7 @@
           <a:p>
             <a:r>
               <a:rPr lang="en-US" dirty="0"/>
-              <a:t>The assistant follows a fixed pipeline. A policy check flags attempts to override rules, approve or reveal secrets, and a flagged message never reaches the model. Facts come only from the engine. Personal data is masked before any model call. The model is the only step that is not deterministic, and it is optional. Then a number guard checks every figure in the reply against the engine's facts and falls back to a template if anything is invented, a tool guard allows only proposals, and everything is audited. So: every number comes from the engine, the AI can only propose, and it works with no API key at all. Adding a model later is one command, check_ai.</a:t>
+              <a:t>Living costs are different from tuition: they are a payment every month. Smart escrow lets the parent lock the money in a smart contract that pays on the dates they choose. Planning locks nothing, the schedule is shown first. Locking needs a fresh MFA proof from the parent, and then each payment is released on its date. A bank reviewer can freeze an escrow with a written reason but can never move the funds. Only amounts, dates and hashes go on the chain, never a name or an account number, and the AI has no permission here at all. The chain is simulated: an in-memory EVM running real Solidity contracts, and the tokens are not money. We also anchor the head of the audit log on it, so rewriting history leaves a trace that someone editing the database cannot reach.</a:t>
             </a:r>
             <a:endParaRPr lang="en-US" dirty="0"/>
           </a:p>
@@ -1551,7 +1641,7 @@
           <a:p>
             <a:r>
               <a:rPr lang="en-US" dirty="0"/>
-              <a:t>Security and compliance is thirty percent of the score, so we made it checkable. On the left are the permission tiers, enforced in the domain layer, not just in the screens. Public, read, prepare, decide, and administer. Deciding, meaning approving a payment, is only for a human parent with a fresh MFA proof bound to that payment and to the hash of the summary they saw. The AI has no approve, cancel, limit or config permission at all. On the right, the numbers: 760 backend and 93 frontend tests, all 24 blueprint scenarios mapped to tests, and 21 known risks that we list openly in the self-assessment. The audit log is hash-chained: Verify passes, we edit one row behind the application's back, and Verify fails at exactly that event. Each payment also gets a compliance report whose hash your browser can recompute. The threat matrix with a proof for each row is in the repository.</a:t>
+              <a:t>The assistant follows a fixed pipeline. A policy check flags attempts to override rules, approve or reveal secrets, and a flagged message never reaches the model. Facts come only from the engine. Personal data is masked before any model call. The model is the only step that is not deterministic, and it is optional. Then a number guard checks every figure in the reply against the engine's facts and falls back to a template if anything is invented, a tool guard allows only proposals, and everything is audited. So: every number comes from the engine, the AI can only propose, and it works with no API key at all. Adding a model later is one command, check_ai.</a:t>
             </a:r>
             <a:endParaRPr lang="en-US" dirty="0"/>
           </a:p>
@@ -1639,7 +1729,7 @@
           <a:p>
             <a:r>
               <a:rPr lang="en-US" dirty="0"/>
-              <a:t>Honesty is a feature. A banner on every screen and an X-Sandbox header on every API response say this is a sandbox. The Sandbox screen on the left lists everything that is simulated and how to trigger the edge cases, such as a recipient named FAIL_TEST. Any rule that has not been checked against an official source carries a yellow Not verified badge and the sentence: indicative, confirm with your AD bank. On the right is a payment's compliance report: the parties, ten controls with their evidence, the approval proof and the audit trail, sealed with a hash that the browser recomputes. Change a copy and it says does not match. The sandbox operation logs from a real run, including the tamper demo, are in the repository under submission slash evidence.</a:t>
+              <a:t>Security and compliance is thirty percent of the score, so we made it checkable. On the left are the permission tiers, enforced in the domain layer, not just in the screens. Public, read, prepare, decide, and administer. Deciding, meaning approving a payment, is only for a human parent with a fresh MFA proof bound to that payment and to the hash of the summary they saw. The AI has no approve, cancel, limit or config permission at all. On the right, the numbers: 897 backend and 126 frontend tests, all 24 blueprint scenarios mapped to tests, and 31 known risks that we list openly in the self-assessment. The audit log is hash-chained: Verify passes, we edit one row behind the application's back, and Verify fails at exactly that event. Each payment also gets a compliance report whose hash your browser can recompute. The threat matrix with a proof for each row is in the repository.</a:t>
             </a:r>
             <a:endParaRPr lang="en-US" dirty="0"/>
           </a:p>
@@ -2585,12 +2675,302 @@
             <a:r>
               <a:rPr lang="en-US" sz="3600" b="1" dirty="0">
                 <a:solidFill>
-                  <a:schemeClr val="bg1"/>
+                  <a:schemeClr val="tx1"/>
                 </a:solidFill>
                 <a:latin typeface="+mj-lt" pitchFamily="34" charset="0"/>
                 <a:ea typeface="+mj-lt" pitchFamily="34" charset="-122"/>
                 <a:cs typeface="+mj-lt" pitchFamily="34" charset="-120"/>
               </a:rPr>
+              <a:t>Honest by design</a:t>
+            </a:r>
+            <a:endParaRPr lang="en-US" sz="3600" dirty="0"/>
+          </a:p>
+        </p:txBody>
+      </p:sp>
+      <p:sp>
+        <p:nvSpPr>
+          <p:cNvPr id="3" name="content-10-text-1"/>
+          <p:cNvSpPr txBox="1"/>
+          <p:nvPr/>
+        </p:nvSpPr>
+        <p:spPr>
+          <a:xfrm>
+            <a:off x="457200" y="1097280"/>
+            <a:ext cx="8229600" cy="365760"/>
+          </a:xfrm>
+          <a:prstGeom prst="rect">
+            <a:avLst/>
+          </a:prstGeom>
+          <a:noFill/>
+          <a:ln/>
+        </p:spPr>
+        <p:txBody>
+          <a:bodyPr wrap="square" lIns="0" tIns="0" rIns="0" bIns="0" rtlCol="0" anchor="ctr"/>
+          <a:lstStyle/>
+          <a:p>
+            <a:pPr algn="l" indent="0" marL="0">
+              <a:buNone/>
+            </a:pPr>
+            <a:r>
+              <a:rPr lang="en-US" sz="1600" b="1" dirty="0">
+                <a:solidFill>
+                  <a:schemeClr val="tx1"/>
+                </a:solidFill>
+              </a:rPr>
+              <a:t>Every simulated part is labelled. Every unverified rule carries a badge.</a:t>
+            </a:r>
+            <a:endParaRPr lang="en-US" sz="1600" dirty="0"/>
+          </a:p>
+        </p:txBody>
+      </p:sp>
+      <p:sp>
+        <p:nvSpPr>
+          <p:cNvPr id="4" name="content-10-rect-2"/>
+          <p:cNvSpPr/>
+          <p:nvPr/>
+        </p:nvSpPr>
+        <p:spPr>
+          <a:xfrm>
+            <a:off x="457200" y="1554480"/>
+            <a:ext cx="3803904" cy="2999232"/>
+          </a:xfrm>
+          <a:prstGeom prst="roundRect">
+            <a:avLst>
+              <a:gd name="adj" fmla="val 1829"/>
+            </a:avLst>
+          </a:prstGeom>
+          <a:solidFill>
+            <a:schemeClr val="bg1"/>
+          </a:solidFill>
+          <a:ln w="9525">
+            <a:solidFill>
+              <a:schemeClr val="accent5"/>
+            </a:solidFill>
+            <a:prstDash val="solid"/>
+          </a:ln>
+          <a:effectLst>
+            <a:outerShdw sx="100000" sy="100000" kx="0" ky="0" algn="bl" rotWithShape="0" blurRad="101600" dist="25400" dir="5400000">
+              <a:srgbClr val="0B2545">
+                <a:alpha val="18000"/>
+              </a:srgbClr>
+            </a:outerShdw>
+          </a:effectLst>
+        </p:spPr>
+      </p:sp>
+      <p:pic>
+        <p:nvPicPr>
+          <p:cNvPr id="5" name="content-10-image-3" descr="Sandbox screen listing what is simulated">    </p:cNvPr>
+          <p:cNvPicPr>
+            <a:picLocks noChangeAspect="1"/>
+          </p:cNvPicPr>
+          <p:nvPr/>
+        </p:nvPicPr>
+        <p:blipFill>
+          <a:blip r:embed="rId1"/>
+          <a:stretch>
+            <a:fillRect/>
+          </a:stretch>
+        </p:blipFill>
+        <p:spPr>
+          <a:xfrm>
+            <a:off x="530352" y="1627632"/>
+            <a:ext cx="3657600" cy="2852928"/>
+          </a:xfrm>
+          <a:prstGeom prst="rect">
+            <a:avLst/>
+          </a:prstGeom>
+        </p:spPr>
+      </p:pic>
+      <p:sp>
+        <p:nvSpPr>
+          <p:cNvPr id="6" name="content-10-rect-4"/>
+          <p:cNvSpPr/>
+          <p:nvPr/>
+        </p:nvSpPr>
+        <p:spPr>
+          <a:xfrm>
+            <a:off x="4882896" y="1554480"/>
+            <a:ext cx="3803904" cy="2999232"/>
+          </a:xfrm>
+          <a:prstGeom prst="roundRect">
+            <a:avLst>
+              <a:gd name="adj" fmla="val 1829"/>
+            </a:avLst>
+          </a:prstGeom>
+          <a:solidFill>
+            <a:schemeClr val="bg1"/>
+          </a:solidFill>
+          <a:ln w="9525">
+            <a:solidFill>
+              <a:schemeClr val="accent5"/>
+            </a:solidFill>
+            <a:prstDash val="solid"/>
+          </a:ln>
+          <a:effectLst>
+            <a:outerShdw sx="100000" sy="100000" kx="0" ky="0" algn="bl" rotWithShape="0" blurRad="101600" dist="25400" dir="5400000">
+              <a:srgbClr val="0B2545">
+                <a:alpha val="18000"/>
+              </a:srgbClr>
+            </a:outerShdw>
+          </a:effectLst>
+        </p:spPr>
+      </p:sp>
+      <p:pic>
+        <p:nvPicPr>
+          <p:cNvPr id="7" name="content-10-image-5" descr="Compliance report whose hash verifies in the browser">    </p:cNvPr>
+          <p:cNvPicPr>
+            <a:picLocks noChangeAspect="1"/>
+          </p:cNvPicPr>
+          <p:nvPr/>
+        </p:nvPicPr>
+        <p:blipFill>
+          <a:blip r:embed="rId2"/>
+          <a:stretch>
+            <a:fillRect/>
+          </a:stretch>
+        </p:blipFill>
+        <p:spPr>
+          <a:xfrm>
+            <a:off x="4956048" y="1627632"/>
+            <a:ext cx="3657600" cy="2852928"/>
+          </a:xfrm>
+          <a:prstGeom prst="rect">
+            <a:avLst/>
+          </a:prstGeom>
+        </p:spPr>
+      </p:pic>
+      <p:sp>
+        <p:nvSpPr>
+          <p:cNvPr id="8" name="content-10-text-6"/>
+          <p:cNvSpPr txBox="1"/>
+          <p:nvPr/>
+        </p:nvSpPr>
+        <p:spPr>
+          <a:xfrm>
+            <a:off x="457200" y="4590288"/>
+            <a:ext cx="3803904" cy="274320"/>
+          </a:xfrm>
+          <a:prstGeom prst="rect">
+            <a:avLst/>
+          </a:prstGeom>
+          <a:noFill/>
+          <a:ln/>
+        </p:spPr>
+        <p:txBody>
+          <a:bodyPr wrap="square" lIns="0" tIns="0" rIns="0" bIns="0" rtlCol="0" anchor="t"/>
+          <a:lstStyle/>
+          <a:p>
+            <a:pPr algn="l" indent="0" marL="0">
+              <a:buNone/>
+            </a:pPr>
+            <a:r>
+              <a:rPr lang="en-US" sz="1100" dirty="0">
+                <a:solidFill>
+                  <a:schemeClr val="tx2"/>
+                </a:solidFill>
+              </a:rPr>
+              <a:t>Sandbox screen: what is simulated, how to test it</a:t>
+            </a:r>
+            <a:endParaRPr lang="en-US" sz="1100" dirty="0"/>
+          </a:p>
+        </p:txBody>
+      </p:sp>
+      <p:sp>
+        <p:nvSpPr>
+          <p:cNvPr id="9" name="content-10-text-7"/>
+          <p:cNvSpPr txBox="1"/>
+          <p:nvPr/>
+        </p:nvSpPr>
+        <p:spPr>
+          <a:xfrm>
+            <a:off x="4882896" y="4590288"/>
+            <a:ext cx="3803904" cy="274320"/>
+          </a:xfrm>
+          <a:prstGeom prst="rect">
+            <a:avLst/>
+          </a:prstGeom>
+          <a:noFill/>
+          <a:ln/>
+        </p:spPr>
+        <p:txBody>
+          <a:bodyPr wrap="square" lIns="0" tIns="0" rIns="0" bIns="0" rtlCol="0" anchor="t"/>
+          <a:lstStyle/>
+          <a:p>
+            <a:pPr algn="l" indent="0" marL="0">
+              <a:buNone/>
+            </a:pPr>
+            <a:r>
+              <a:rPr lang="en-US" sz="1100" dirty="0">
+                <a:solidFill>
+                  <a:schemeClr val="tx2"/>
+                </a:solidFill>
+              </a:rPr>
+              <a:t>Compliance report: the hash verifies in the browser</a:t>
+            </a:r>
+            <a:endParaRPr lang="en-US" sz="1100" dirty="0"/>
+          </a:p>
+        </p:txBody>
+      </p:sp>
+    </p:spTree>
+  </p:cSld>
+  <p:clrMapOvr>
+    <a:masterClrMapping/>
+  </p:clrMapOvr>
+</p:sld>
+</file>
+
+<file path=ppt/slides/slide11.xml><?xml version="1.0" encoding="utf-8"?>
+<p:sld xmlns:a="http://schemas.openxmlformats.org/drawingml/2006/main" xmlns:r="http://schemas.openxmlformats.org/officeDocument/2006/relationships" xmlns:p="http://schemas.openxmlformats.org/presentationml/2006/main">
+  <p:cSld name="Slide 11">
+    <p:spTree>
+      <p:nvGrpSpPr>
+        <p:cNvPr id="1" name=""/>
+        <p:cNvGrpSpPr/>
+        <p:nvPr/>
+      </p:nvGrpSpPr>
+      <p:grpSpPr>
+        <a:xfrm>
+          <a:off x="0" y="0"/>
+          <a:ext cx="0" cy="0"/>
+          <a:chOff x="0" y="0"/>
+          <a:chExt cx="0" cy="0"/>
+        </a:xfrm>
+      </p:grpSpPr>
+      <p:sp>
+        <p:nvSpPr>
+          <p:cNvPr id="2" name="Text 0"/>
+          <p:cNvSpPr/>
+          <p:nvPr>
+            <p:ph idx="100" type="title" hasCustomPrompt="1"/>
+          </p:nvPr>
+        </p:nvSpPr>
+        <p:spPr>
+          <a:xfrm>
+            <a:off x="457200" y="274320"/>
+            <a:ext cx="8229600" cy="777240"/>
+          </a:xfrm>
+          <a:prstGeom prst="rect">
+            <a:avLst/>
+          </a:prstGeom>
+          <a:noFill/>
+          <a:ln/>
+        </p:spPr>
+        <p:txBody>
+          <a:bodyPr wrap="square" lIns="0" tIns="0" rIns="0" bIns="0" rtlCol="0" anchor="ctr"/>
+          <a:lstStyle/>
+          <a:p>
+            <a:pPr algn="l" indent="0" marL="0">
+              <a:buNone/>
+            </a:pPr>
+            <a:r>
+              <a:rPr lang="en-US" sz="3600" b="1" dirty="0">
+                <a:solidFill>
+                  <a:schemeClr val="bg1"/>
+                </a:solidFill>
+                <a:latin typeface="+mj-lt" pitchFamily="34" charset="0"/>
+                <a:ea typeface="+mj-lt" pitchFamily="34" charset="-122"/>
+                <a:cs typeface="+mj-lt" pitchFamily="34" charset="-120"/>
+              </a:rPr>
               <a:t>What comes next</a:t>
             </a:r>
             <a:endParaRPr lang="en-US" sz="3600" dirty="0"/>
@@ -2599,7 +2979,7 @@
       </p:sp>
       <p:sp>
         <p:nvSpPr>
-          <p:cNvPr id="3" name="closing-10-rect-1"/>
+          <p:cNvPr id="3" name="closing-11-rect-1"/>
           <p:cNvSpPr/>
           <p:nvPr/>
         </p:nvSpPr>
@@ -2621,7 +3001,7 @@
       </p:sp>
       <p:sp>
         <p:nvSpPr>
-          <p:cNvPr id="4" name="closing-10-text-2"/>
+          <p:cNvPr id="4" name="closing-11-text-2"/>
           <p:cNvSpPr txBox="1"/>
           <p:nvPr/>
         </p:nvSpPr>
@@ -2657,7 +3037,7 @@
       </p:sp>
       <p:sp>
         <p:nvSpPr>
-          <p:cNvPr id="5" name="closing-10-text-3"/>
+          <p:cNvPr id="5" name="closing-11-text-3"/>
           <p:cNvSpPr txBox="1"/>
           <p:nvPr/>
         </p:nvSpPr>
@@ -2693,7 +3073,7 @@
       </p:sp>
       <p:sp>
         <p:nvSpPr>
-          <p:cNvPr id="6" name="closing-10-rect-4"/>
+          <p:cNvPr id="6" name="closing-11-rect-4"/>
           <p:cNvSpPr/>
           <p:nvPr/>
         </p:nvSpPr>
@@ -2715,7 +3095,7 @@
       </p:sp>
       <p:sp>
         <p:nvSpPr>
-          <p:cNvPr id="7" name="closing-10-text-5"/>
+          <p:cNvPr id="7" name="closing-11-text-5"/>
           <p:cNvSpPr txBox="1"/>
           <p:nvPr/>
         </p:nvSpPr>
@@ -2751,7 +3131,7 @@
       </p:sp>
       <p:sp>
         <p:nvSpPr>
-          <p:cNvPr id="8" name="closing-10-text-6"/>
+          <p:cNvPr id="8" name="closing-11-text-6"/>
           <p:cNvSpPr txBox="1"/>
           <p:nvPr/>
         </p:nvSpPr>
@@ -2787,7 +3167,7 @@
       </p:sp>
       <p:sp>
         <p:nvSpPr>
-          <p:cNvPr id="9" name="closing-10-rect-7"/>
+          <p:cNvPr id="9" name="closing-11-rect-7"/>
           <p:cNvSpPr/>
           <p:nvPr/>
         </p:nvSpPr>
@@ -2809,7 +3189,7 @@
       </p:sp>
       <p:sp>
         <p:nvSpPr>
-          <p:cNvPr id="10" name="closing-10-text-8"/>
+          <p:cNvPr id="10" name="closing-11-text-8"/>
           <p:cNvSpPr txBox="1"/>
           <p:nvPr/>
         </p:nvSpPr>
@@ -2845,7 +3225,7 @@
       </p:sp>
       <p:sp>
         <p:nvSpPr>
-          <p:cNvPr id="11" name="closing-10-text-9"/>
+          <p:cNvPr id="11" name="closing-11-text-9"/>
           <p:cNvSpPr txBox="1"/>
           <p:nvPr/>
         </p:nvSpPr>
@@ -2881,7 +3261,7 @@
       </p:sp>
       <p:sp>
         <p:nvSpPr>
-          <p:cNvPr id="12" name="closing-10-rect-10"/>
+          <p:cNvPr id="12" name="closing-11-rect-10"/>
           <p:cNvSpPr/>
           <p:nvPr/>
         </p:nvSpPr>
@@ -2903,7 +3283,7 @@
       </p:sp>
       <p:sp>
         <p:nvSpPr>
-          <p:cNvPr id="13" name="closing-10-text-11"/>
+          <p:cNvPr id="13" name="closing-11-text-11"/>
           <p:cNvSpPr txBox="1"/>
           <p:nvPr/>
         </p:nvSpPr>
@@ -2931,7 +3311,7 @@
                   <a:schemeClr val="bg1"/>
                 </a:solidFill>
               </a:rPr>
-              <a:t>Multi-currency management</a:t>
+              <a:t>A real chain</a:t>
             </a:r>
             <a:endParaRPr lang="en-US" sz="1800" dirty="0"/>
           </a:p>
@@ -2939,7 +3319,7 @@
       </p:sp>
       <p:sp>
         <p:nvSpPr>
-          <p:cNvPr id="14" name="closing-10-text-12"/>
+          <p:cNvPr id="14" name="closing-11-text-12"/>
           <p:cNvSpPr txBox="1"/>
           <p:nvPr/>
         </p:nvSpPr>
@@ -2967,7 +3347,7 @@
                   <a:schemeClr val="bg2"/>
                 </a:solidFill>
               </a:rPr>
-              <a:t>One view of balances and costs across the six corridors.</a:t>
+              <a:t>Run the escrow contracts on a permissioned chain with a bank-issued deposit token.</a:t>
             </a:r>
             <a:endParaRPr lang="en-US" sz="1400" dirty="0"/>
           </a:p>
@@ -2975,7 +3355,7 @@
       </p:sp>
       <p:sp>
         <p:nvSpPr>
-          <p:cNvPr id="15" name="closing-10-text-13"/>
+          <p:cNvPr id="15" name="closing-11-text-13"/>
           <p:cNvSpPr txBox="1"/>
           <p:nvPr/>
         </p:nvSpPr>
@@ -3014,7 +3394,7 @@
       </p:sp>
       <p:sp>
         <p:nvSpPr>
-          <p:cNvPr id="16" name="closing-10-text-14"/>
+          <p:cNvPr id="16" name="closing-11-text-14"/>
           <p:cNvSpPr txBox="1"/>
           <p:nvPr/>
         </p:nvSpPr>
@@ -7737,7 +8117,7 @@
                 <a:ea typeface="+mj-lt" pitchFamily="34" charset="-122"/>
                 <a:cs typeface="+mj-lt" pitchFamily="34" charset="-120"/>
               </a:rPr>
-              <a:t>An AI that cannot cheat</a:t>
+              <a:t>Smart escrow for living costs</a:t>
             </a:r>
             <a:endParaRPr lang="en-US" sz="3600" dirty="0"/>
           </a:p>
@@ -7751,8 +8131,102 @@
         </p:nvSpPr>
         <p:spPr>
           <a:xfrm>
-            <a:off x="457200" y="1280160"/>
-            <a:ext cx="1051560" cy="731520"/>
+            <a:off x="457200" y="1234440"/>
+            <a:ext cx="4718304" cy="3218688"/>
+          </a:xfrm>
+          <a:prstGeom prst="roundRect">
+            <a:avLst>
+              <a:gd name="adj" fmla="val 1705"/>
+            </a:avLst>
+          </a:prstGeom>
+          <a:solidFill>
+            <a:schemeClr val="bg1"/>
+          </a:solidFill>
+          <a:ln w="9525">
+            <a:solidFill>
+              <a:schemeClr val="accent5"/>
+            </a:solidFill>
+            <a:prstDash val="solid"/>
+          </a:ln>
+          <a:effectLst>
+            <a:outerShdw sx="100000" sy="100000" kx="0" ky="0" algn="bl" rotWithShape="0" blurRad="101600" dist="25400" dir="5400000">
+              <a:srgbClr val="0B2545">
+                <a:alpha val="18000"/>
+              </a:srgbClr>
+            </a:outerShdw>
+          </a:effectLst>
+        </p:spPr>
+      </p:sp>
+      <p:pic>
+        <p:nvPicPr>
+          <p:cNvPr id="4" name="content-7-image-2" descr="An escrow with three monthly payments and its on-chain proof">    </p:cNvPr>
+          <p:cNvPicPr>
+            <a:picLocks noChangeAspect="1"/>
+          </p:cNvPicPr>
+          <p:nvPr/>
+        </p:nvPicPr>
+        <p:blipFill>
+          <a:blip r:embed="rId1"/>
+          <a:stretch>
+            <a:fillRect/>
+          </a:stretch>
+        </p:blipFill>
+        <p:spPr>
+          <a:xfrm>
+            <a:off x="530352" y="1307592"/>
+            <a:ext cx="4572000" cy="3072384"/>
+          </a:xfrm>
+          <a:prstGeom prst="rect">
+            <a:avLst/>
+          </a:prstGeom>
+        </p:spPr>
+      </p:pic>
+      <p:sp>
+        <p:nvSpPr>
+          <p:cNvPr id="5" name="content-7-text-3"/>
+          <p:cNvSpPr txBox="1"/>
+          <p:nvPr/>
+        </p:nvSpPr>
+        <p:spPr>
+          <a:xfrm>
+            <a:off x="457200" y="4526280"/>
+            <a:ext cx="4754880" cy="274320"/>
+          </a:xfrm>
+          <a:prstGeom prst="rect">
+            <a:avLst/>
+          </a:prstGeom>
+          <a:noFill/>
+          <a:ln/>
+        </p:spPr>
+        <p:txBody>
+          <a:bodyPr wrap="square" lIns="0" tIns="0" rIns="0" bIns="0" rtlCol="0" anchor="t"/>
+          <a:lstStyle/>
+          <a:p>
+            <a:pPr algn="l" indent="0" marL="0">
+              <a:buNone/>
+            </a:pPr>
+            <a:r>
+              <a:rPr lang="en-US" sz="1100" dirty="0">
+                <a:solidFill>
+                  <a:schemeClr val="tx2"/>
+                </a:solidFill>
+              </a:rPr>
+              <a:t>Simulated chain: the tokens are not money. Synthetic data.</a:t>
+            </a:r>
+            <a:endParaRPr lang="en-US" sz="1100" dirty="0"/>
+          </a:p>
+        </p:txBody>
+      </p:sp>
+      <p:sp>
+        <p:nvSpPr>
+          <p:cNvPr id="6" name="content-7-rect-4"/>
+          <p:cNvSpPr/>
+          <p:nvPr/>
+        </p:nvSpPr>
+        <p:spPr>
+          <a:xfrm>
+            <a:off x="5486400" y="1280160"/>
+            <a:ext cx="3200400" cy="731520"/>
           </a:xfrm>
           <a:prstGeom prst="roundRect">
             <a:avLst>
@@ -7760,57 +8234,93 @@
             </a:avLst>
           </a:prstGeom>
           <a:solidFill>
-            <a:schemeClr val="tx1"/>
+            <a:schemeClr val="bg2"/>
           </a:solidFill>
           <a:ln/>
         </p:spPr>
       </p:sp>
       <p:sp>
         <p:nvSpPr>
-          <p:cNvPr id="4" name="content-7-text-2"/>
-          <p:cNvSpPr txBox="1"/>
-          <p:nvPr/>
-        </p:nvSpPr>
-        <p:spPr>
-          <a:xfrm>
-            <a:off x="502920" y="1280160"/>
-            <a:ext cx="960120" cy="731520"/>
-          </a:xfrm>
-          <a:prstGeom prst="rect">
-            <a:avLst/>
-          </a:prstGeom>
-          <a:noFill/>
-          <a:ln/>
-        </p:spPr>
-        <p:txBody>
-          <a:bodyPr wrap="square" lIns="0" tIns="0" rIns="0" bIns="0" rtlCol="0" anchor="ctr"/>
-          <a:lstStyle/>
-          <a:p>
-            <a:pPr algn="ctr" indent="0" marL="0">
-              <a:buNone/>
-            </a:pPr>
-            <a:r>
-              <a:rPr lang="en-US" sz="1200" b="1" dirty="0">
-                <a:solidFill>
-                  <a:schemeClr val="bg1"/>
-                </a:solidFill>
-              </a:rPr>
-              <a:t>1  Policy check</a:t>
-            </a:r>
-            <a:endParaRPr lang="en-US" sz="1200" dirty="0"/>
-          </a:p>
-        </p:txBody>
-      </p:sp>
-      <p:sp>
-        <p:nvSpPr>
-          <p:cNvPr id="5" name="content-7-rect-3"/>
+          <p:cNvPr id="7" name="content-7-text-5"/>
+          <p:cNvSpPr txBox="1"/>
+          <p:nvPr/>
+        </p:nvSpPr>
+        <p:spPr>
+          <a:xfrm>
+            <a:off x="5623560" y="1316736"/>
+            <a:ext cx="2926080" cy="256032"/>
+          </a:xfrm>
+          <a:prstGeom prst="rect">
+            <a:avLst/>
+          </a:prstGeom>
+          <a:noFill/>
+          <a:ln/>
+        </p:spPr>
+        <p:txBody>
+          <a:bodyPr wrap="square" lIns="0" tIns="0" rIns="0" bIns="0" rtlCol="0" anchor="t"/>
+          <a:lstStyle/>
+          <a:p>
+            <a:pPr algn="l" indent="0" marL="0">
+              <a:buNone/>
+            </a:pPr>
+            <a:r>
+              <a:rPr lang="en-US" sz="1400" b="1" dirty="0">
+                <a:solidFill>
+                  <a:schemeClr val="accent1"/>
+                </a:solidFill>
+              </a:rPr>
+              <a:t>Plan</a:t>
+            </a:r>
+            <a:endParaRPr lang="en-US" sz="1400" dirty="0"/>
+          </a:p>
+        </p:txBody>
+      </p:sp>
+      <p:sp>
+        <p:nvSpPr>
+          <p:cNvPr id="8" name="content-7-text-6"/>
+          <p:cNvSpPr txBox="1"/>
+          <p:nvPr/>
+        </p:nvSpPr>
+        <p:spPr>
+          <a:xfrm>
+            <a:off x="5623560" y="1572768"/>
+            <a:ext cx="2971800" cy="420624"/>
+          </a:xfrm>
+          <a:prstGeom prst="rect">
+            <a:avLst/>
+          </a:prstGeom>
+          <a:noFill/>
+          <a:ln/>
+        </p:spPr>
+        <p:txBody>
+          <a:bodyPr wrap="square" lIns="0" tIns="0" rIns="0" bIns="0" rtlCol="0" anchor="t"/>
+          <a:lstStyle/>
+          <a:p>
+            <a:pPr algn="l" indent="0" marL="0">
+              <a:buNone/>
+            </a:pPr>
+            <a:r>
+              <a:rPr lang="en-US" sz="1100" dirty="0">
+                <a:solidFill>
+                  <a:schemeClr val="tx1"/>
+                </a:solidFill>
+              </a:rPr>
+              <a:t>The schedule is shown first. Nothing is locked.</a:t>
+            </a:r>
+            <a:endParaRPr lang="en-US" sz="1100" dirty="0"/>
+          </a:p>
+        </p:txBody>
+      </p:sp>
+      <p:sp>
+        <p:nvSpPr>
+          <p:cNvPr id="9" name="content-7-rect-7"/>
           <p:cNvSpPr/>
           <p:nvPr/>
         </p:nvSpPr>
         <p:spPr>
           <a:xfrm>
-            <a:off x="1645920" y="1280160"/>
-            <a:ext cx="1051560" cy="731520"/>
+            <a:off x="5486400" y="2103120"/>
+            <a:ext cx="3200400" cy="731520"/>
           </a:xfrm>
           <a:prstGeom prst="roundRect">
             <a:avLst>
@@ -7818,57 +8328,93 @@
             </a:avLst>
           </a:prstGeom>
           <a:solidFill>
-            <a:schemeClr val="tx1"/>
+            <a:schemeClr val="bg2"/>
           </a:solidFill>
           <a:ln/>
         </p:spPr>
       </p:sp>
       <p:sp>
         <p:nvSpPr>
-          <p:cNvPr id="6" name="content-7-text-4"/>
-          <p:cNvSpPr txBox="1"/>
-          <p:nvPr/>
-        </p:nvSpPr>
-        <p:spPr>
-          <a:xfrm>
-            <a:off x="1691640" y="1280160"/>
-            <a:ext cx="960120" cy="731520"/>
-          </a:xfrm>
-          <a:prstGeom prst="rect">
-            <a:avLst/>
-          </a:prstGeom>
-          <a:noFill/>
-          <a:ln/>
-        </p:spPr>
-        <p:txBody>
-          <a:bodyPr wrap="square" lIns="0" tIns="0" rIns="0" bIns="0" rtlCol="0" anchor="ctr"/>
-          <a:lstStyle/>
-          <a:p>
-            <a:pPr algn="ctr" indent="0" marL="0">
-              <a:buNone/>
-            </a:pPr>
-            <a:r>
-              <a:rPr lang="en-US" sz="1200" b="1" dirty="0">
-                <a:solidFill>
-                  <a:schemeClr val="bg1"/>
-                </a:solidFill>
-              </a:rPr>
-              <a:t>2  Engine facts</a:t>
-            </a:r>
-            <a:endParaRPr lang="en-US" sz="1200" dirty="0"/>
-          </a:p>
-        </p:txBody>
-      </p:sp>
-      <p:sp>
-        <p:nvSpPr>
-          <p:cNvPr id="7" name="content-7-rect-5"/>
+          <p:cNvPr id="10" name="content-7-text-8"/>
+          <p:cNvSpPr txBox="1"/>
+          <p:nvPr/>
+        </p:nvSpPr>
+        <p:spPr>
+          <a:xfrm>
+            <a:off x="5623560" y="2139696"/>
+            <a:ext cx="2926080" cy="256032"/>
+          </a:xfrm>
+          <a:prstGeom prst="rect">
+            <a:avLst/>
+          </a:prstGeom>
+          <a:noFill/>
+          <a:ln/>
+        </p:spPr>
+        <p:txBody>
+          <a:bodyPr wrap="square" lIns="0" tIns="0" rIns="0" bIns="0" rtlCol="0" anchor="t"/>
+          <a:lstStyle/>
+          <a:p>
+            <a:pPr algn="l" indent="0" marL="0">
+              <a:buNone/>
+            </a:pPr>
+            <a:r>
+              <a:rPr lang="en-US" sz="1400" b="1" dirty="0">
+                <a:solidFill>
+                  <a:schemeClr val="accent1"/>
+                </a:solidFill>
+              </a:rPr>
+              <a:t>Lock</a:t>
+            </a:r>
+            <a:endParaRPr lang="en-US" sz="1400" dirty="0"/>
+          </a:p>
+        </p:txBody>
+      </p:sp>
+      <p:sp>
+        <p:nvSpPr>
+          <p:cNvPr id="11" name="content-7-text-9"/>
+          <p:cNvSpPr txBox="1"/>
+          <p:nvPr/>
+        </p:nvSpPr>
+        <p:spPr>
+          <a:xfrm>
+            <a:off x="5623560" y="2395728"/>
+            <a:ext cx="2971800" cy="420624"/>
+          </a:xfrm>
+          <a:prstGeom prst="rect">
+            <a:avLst/>
+          </a:prstGeom>
+          <a:noFill/>
+          <a:ln/>
+        </p:spPr>
+        <p:txBody>
+          <a:bodyPr wrap="square" lIns="0" tIns="0" rIns="0" bIns="0" rtlCol="0" anchor="t"/>
+          <a:lstStyle/>
+          <a:p>
+            <a:pPr algn="l" indent="0" marL="0">
+              <a:buNone/>
+            </a:pPr>
+            <a:r>
+              <a:rPr lang="en-US" sz="1100" dirty="0">
+                <a:solidFill>
+                  <a:schemeClr val="tx1"/>
+                </a:solidFill>
+              </a:rPr>
+              <a:t>A fresh MFA proof from the parent. The funds wait in the contract.</a:t>
+            </a:r>
+            <a:endParaRPr lang="en-US" sz="1100" dirty="0"/>
+          </a:p>
+        </p:txBody>
+      </p:sp>
+      <p:sp>
+        <p:nvSpPr>
+          <p:cNvPr id="12" name="content-7-rect-10"/>
           <p:cNvSpPr/>
           <p:nvPr/>
         </p:nvSpPr>
         <p:spPr>
           <a:xfrm>
-            <a:off x="2834640" y="1280160"/>
-            <a:ext cx="1051560" cy="731520"/>
+            <a:off x="5486400" y="2926080"/>
+            <a:ext cx="3200400" cy="731520"/>
           </a:xfrm>
           <a:prstGeom prst="roundRect">
             <a:avLst>
@@ -7876,57 +8422,93 @@
             </a:avLst>
           </a:prstGeom>
           <a:solidFill>
-            <a:schemeClr val="tx1"/>
+            <a:schemeClr val="bg2"/>
           </a:solidFill>
           <a:ln/>
         </p:spPr>
       </p:sp>
       <p:sp>
         <p:nvSpPr>
-          <p:cNvPr id="8" name="content-7-text-6"/>
-          <p:cNvSpPr txBox="1"/>
-          <p:nvPr/>
-        </p:nvSpPr>
-        <p:spPr>
-          <a:xfrm>
-            <a:off x="2880360" y="1280160"/>
-            <a:ext cx="960120" cy="731520"/>
-          </a:xfrm>
-          <a:prstGeom prst="rect">
-            <a:avLst/>
-          </a:prstGeom>
-          <a:noFill/>
-          <a:ln/>
-        </p:spPr>
-        <p:txBody>
-          <a:bodyPr wrap="square" lIns="0" tIns="0" rIns="0" bIns="0" rtlCol="0" anchor="ctr"/>
-          <a:lstStyle/>
-          <a:p>
-            <a:pPr algn="ctr" indent="0" marL="0">
-              <a:buNone/>
-            </a:pPr>
-            <a:r>
-              <a:rPr lang="en-US" sz="1200" b="1" dirty="0">
-                <a:solidFill>
-                  <a:schemeClr val="bg1"/>
-                </a:solidFill>
-              </a:rPr>
-              <a:t>3  Mask personal data</a:t>
-            </a:r>
-            <a:endParaRPr lang="en-US" sz="1200" dirty="0"/>
-          </a:p>
-        </p:txBody>
-      </p:sp>
-      <p:sp>
-        <p:nvSpPr>
-          <p:cNvPr id="9" name="content-7-rect-7"/>
+          <p:cNvPr id="13" name="content-7-text-11"/>
+          <p:cNvSpPr txBox="1"/>
+          <p:nvPr/>
+        </p:nvSpPr>
+        <p:spPr>
+          <a:xfrm>
+            <a:off x="5623560" y="2962656"/>
+            <a:ext cx="2926080" cy="256032"/>
+          </a:xfrm>
+          <a:prstGeom prst="rect">
+            <a:avLst/>
+          </a:prstGeom>
+          <a:noFill/>
+          <a:ln/>
+        </p:spPr>
+        <p:txBody>
+          <a:bodyPr wrap="square" lIns="0" tIns="0" rIns="0" bIns="0" rtlCol="0" anchor="t"/>
+          <a:lstStyle/>
+          <a:p>
+            <a:pPr algn="l" indent="0" marL="0">
+              <a:buNone/>
+            </a:pPr>
+            <a:r>
+              <a:rPr lang="en-US" sz="1400" b="1" dirty="0">
+                <a:solidFill>
+                  <a:schemeClr val="accent1"/>
+                </a:solidFill>
+              </a:rPr>
+              <a:t>Release</a:t>
+            </a:r>
+            <a:endParaRPr lang="en-US" sz="1400" dirty="0"/>
+          </a:p>
+        </p:txBody>
+      </p:sp>
+      <p:sp>
+        <p:nvSpPr>
+          <p:cNvPr id="14" name="content-7-text-12"/>
+          <p:cNvSpPr txBox="1"/>
+          <p:nvPr/>
+        </p:nvSpPr>
+        <p:spPr>
+          <a:xfrm>
+            <a:off x="5623560" y="3218688"/>
+            <a:ext cx="2971800" cy="420624"/>
+          </a:xfrm>
+          <a:prstGeom prst="rect">
+            <a:avLst/>
+          </a:prstGeom>
+          <a:noFill/>
+          <a:ln/>
+        </p:spPr>
+        <p:txBody>
+          <a:bodyPr wrap="square" lIns="0" tIns="0" rIns="0" bIns="0" rtlCol="0" anchor="t"/>
+          <a:lstStyle/>
+          <a:p>
+            <a:pPr algn="l" indent="0" marL="0">
+              <a:buNone/>
+            </a:pPr>
+            <a:r>
+              <a:rPr lang="en-US" sz="1100" dirty="0">
+                <a:solidFill>
+                  <a:schemeClr val="tx1"/>
+                </a:solidFill>
+              </a:rPr>
+              <a:t>On the dates chosen. A reviewer can freeze it with a reason, never move the funds.</a:t>
+            </a:r>
+            <a:endParaRPr lang="en-US" sz="1100" dirty="0"/>
+          </a:p>
+        </p:txBody>
+      </p:sp>
+      <p:sp>
+        <p:nvSpPr>
+          <p:cNvPr id="15" name="content-7-rect-13"/>
           <p:cNvSpPr/>
           <p:nvPr/>
         </p:nvSpPr>
         <p:spPr>
           <a:xfrm>
-            <a:off x="4023360" y="1280160"/>
-            <a:ext cx="1051560" cy="731520"/>
+            <a:off x="5486400" y="3749040"/>
+            <a:ext cx="3200400" cy="731520"/>
           </a:xfrm>
           <a:prstGeom prst="roundRect">
             <a:avLst>
@@ -7934,274 +8516,6 @@
             </a:avLst>
           </a:prstGeom>
           <a:solidFill>
-            <a:schemeClr val="accent2"/>
-          </a:solidFill>
-          <a:ln/>
-        </p:spPr>
-      </p:sp>
-      <p:sp>
-        <p:nvSpPr>
-          <p:cNvPr id="10" name="content-7-text-8"/>
-          <p:cNvSpPr txBox="1"/>
-          <p:nvPr/>
-        </p:nvSpPr>
-        <p:spPr>
-          <a:xfrm>
-            <a:off x="4069080" y="1280160"/>
-            <a:ext cx="960120" cy="731520"/>
-          </a:xfrm>
-          <a:prstGeom prst="rect">
-            <a:avLst/>
-          </a:prstGeom>
-          <a:noFill/>
-          <a:ln/>
-        </p:spPr>
-        <p:txBody>
-          <a:bodyPr wrap="square" lIns="0" tIns="0" rIns="0" bIns="0" rtlCol="0" anchor="ctr"/>
-          <a:lstStyle/>
-          <a:p>
-            <a:pPr algn="ctr" indent="0" marL="0">
-              <a:buNone/>
-            </a:pPr>
-            <a:r>
-              <a:rPr lang="en-US" sz="1200" b="1" dirty="0">
-                <a:solidFill>
-                  <a:schemeClr val="tx1"/>
-                </a:solidFill>
-              </a:rPr>
-              <a:t>4  Model (optional)</a:t>
-            </a:r>
-            <a:endParaRPr lang="en-US" sz="1200" dirty="0"/>
-          </a:p>
-        </p:txBody>
-      </p:sp>
-      <p:sp>
-        <p:nvSpPr>
-          <p:cNvPr id="11" name="content-7-rect-9"/>
-          <p:cNvSpPr/>
-          <p:nvPr/>
-        </p:nvSpPr>
-        <p:spPr>
-          <a:xfrm>
-            <a:off x="5212080" y="1280160"/>
-            <a:ext cx="1051560" cy="731520"/>
-          </a:xfrm>
-          <a:prstGeom prst="roundRect">
-            <a:avLst>
-              <a:gd name="adj" fmla="val 10000"/>
-            </a:avLst>
-          </a:prstGeom>
-          <a:solidFill>
-            <a:schemeClr val="tx1"/>
-          </a:solidFill>
-          <a:ln/>
-        </p:spPr>
-      </p:sp>
-      <p:sp>
-        <p:nvSpPr>
-          <p:cNvPr id="12" name="content-7-text-10"/>
-          <p:cNvSpPr txBox="1"/>
-          <p:nvPr/>
-        </p:nvSpPr>
-        <p:spPr>
-          <a:xfrm>
-            <a:off x="5257800" y="1280160"/>
-            <a:ext cx="960120" cy="731520"/>
-          </a:xfrm>
-          <a:prstGeom prst="rect">
-            <a:avLst/>
-          </a:prstGeom>
-          <a:noFill/>
-          <a:ln/>
-        </p:spPr>
-        <p:txBody>
-          <a:bodyPr wrap="square" lIns="0" tIns="0" rIns="0" bIns="0" rtlCol="0" anchor="ctr"/>
-          <a:lstStyle/>
-          <a:p>
-            <a:pPr algn="ctr" indent="0" marL="0">
-              <a:buNone/>
-            </a:pPr>
-            <a:r>
-              <a:rPr lang="en-US" sz="1200" b="1" dirty="0">
-                <a:solidFill>
-                  <a:schemeClr val="bg1"/>
-                </a:solidFill>
-              </a:rPr>
-              <a:t>5  Number guard</a:t>
-            </a:r>
-            <a:endParaRPr lang="en-US" sz="1200" dirty="0"/>
-          </a:p>
-        </p:txBody>
-      </p:sp>
-      <p:sp>
-        <p:nvSpPr>
-          <p:cNvPr id="13" name="content-7-rect-11"/>
-          <p:cNvSpPr/>
-          <p:nvPr/>
-        </p:nvSpPr>
-        <p:spPr>
-          <a:xfrm>
-            <a:off x="6400800" y="1280160"/>
-            <a:ext cx="1051560" cy="731520"/>
-          </a:xfrm>
-          <a:prstGeom prst="roundRect">
-            <a:avLst>
-              <a:gd name="adj" fmla="val 10000"/>
-            </a:avLst>
-          </a:prstGeom>
-          <a:solidFill>
-            <a:schemeClr val="tx1"/>
-          </a:solidFill>
-          <a:ln/>
-        </p:spPr>
-      </p:sp>
-      <p:sp>
-        <p:nvSpPr>
-          <p:cNvPr id="14" name="content-7-text-12"/>
-          <p:cNvSpPr txBox="1"/>
-          <p:nvPr/>
-        </p:nvSpPr>
-        <p:spPr>
-          <a:xfrm>
-            <a:off x="6446520" y="1280160"/>
-            <a:ext cx="960120" cy="731520"/>
-          </a:xfrm>
-          <a:prstGeom prst="rect">
-            <a:avLst/>
-          </a:prstGeom>
-          <a:noFill/>
-          <a:ln/>
-        </p:spPr>
-        <p:txBody>
-          <a:bodyPr wrap="square" lIns="0" tIns="0" rIns="0" bIns="0" rtlCol="0" anchor="ctr"/>
-          <a:lstStyle/>
-          <a:p>
-            <a:pPr algn="ctr" indent="0" marL="0">
-              <a:buNone/>
-            </a:pPr>
-            <a:r>
-              <a:rPr lang="en-US" sz="1200" b="1" dirty="0">
-                <a:solidFill>
-                  <a:schemeClr val="bg1"/>
-                </a:solidFill>
-              </a:rPr>
-              <a:t>6  Tool guard</a:t>
-            </a:r>
-            <a:endParaRPr lang="en-US" sz="1200" dirty="0"/>
-          </a:p>
-        </p:txBody>
-      </p:sp>
-      <p:sp>
-        <p:nvSpPr>
-          <p:cNvPr id="15" name="content-7-rect-13"/>
-          <p:cNvSpPr/>
-          <p:nvPr/>
-        </p:nvSpPr>
-        <p:spPr>
-          <a:xfrm>
-            <a:off x="7589520" y="1280160"/>
-            <a:ext cx="1051560" cy="731520"/>
-          </a:xfrm>
-          <a:prstGeom prst="roundRect">
-            <a:avLst>
-              <a:gd name="adj" fmla="val 10000"/>
-            </a:avLst>
-          </a:prstGeom>
-          <a:solidFill>
-            <a:schemeClr val="tx1"/>
-          </a:solidFill>
-          <a:ln/>
-        </p:spPr>
-      </p:sp>
-      <p:sp>
-        <p:nvSpPr>
-          <p:cNvPr id="16" name="content-7-text-14"/>
-          <p:cNvSpPr txBox="1"/>
-          <p:nvPr/>
-        </p:nvSpPr>
-        <p:spPr>
-          <a:xfrm>
-            <a:off x="7635240" y="1280160"/>
-            <a:ext cx="960120" cy="731520"/>
-          </a:xfrm>
-          <a:prstGeom prst="rect">
-            <a:avLst/>
-          </a:prstGeom>
-          <a:noFill/>
-          <a:ln/>
-        </p:spPr>
-        <p:txBody>
-          <a:bodyPr wrap="square" lIns="0" tIns="0" rIns="0" bIns="0" rtlCol="0" anchor="ctr"/>
-          <a:lstStyle/>
-          <a:p>
-            <a:pPr algn="ctr" indent="0" marL="0">
-              <a:buNone/>
-            </a:pPr>
-            <a:r>
-              <a:rPr lang="en-US" sz="1200" b="1" dirty="0">
-                <a:solidFill>
-                  <a:schemeClr val="bg1"/>
-                </a:solidFill>
-              </a:rPr>
-              <a:t>7  Audit</a:t>
-            </a:r>
-            <a:endParaRPr lang="en-US" sz="1200" dirty="0"/>
-          </a:p>
-        </p:txBody>
-      </p:sp>
-      <p:sp>
-        <p:nvSpPr>
-          <p:cNvPr id="17" name="content-7-text-15"/>
-          <p:cNvSpPr txBox="1"/>
-          <p:nvPr/>
-        </p:nvSpPr>
-        <p:spPr>
-          <a:xfrm>
-            <a:off x="457200" y="2084832"/>
-            <a:ext cx="8229600" cy="292608"/>
-          </a:xfrm>
-          <a:prstGeom prst="rect">
-            <a:avLst/>
-          </a:prstGeom>
-          <a:noFill/>
-          <a:ln/>
-        </p:spPr>
-        <p:txBody>
-          <a:bodyPr wrap="square" lIns="0" tIns="0" rIns="0" bIns="0" rtlCol="0" anchor="t"/>
-          <a:lstStyle/>
-          <a:p>
-            <a:pPr algn="l" indent="0" marL="0">
-              <a:buNone/>
-            </a:pPr>
-            <a:r>
-              <a:rPr lang="en-US" sz="1200" dirty="0">
-                <a:solidFill>
-                  <a:schemeClr val="tx2"/>
-                </a:solidFill>
-              </a:rPr>
-              <a:t>Only step 4 is not deterministic, and it is optional. A flagged message never reaches it.</a:t>
-            </a:r>
-            <a:endParaRPr lang="en-US" sz="1200" dirty="0"/>
-          </a:p>
-        </p:txBody>
-      </p:sp>
-      <p:sp>
-        <p:nvSpPr>
-          <p:cNvPr id="18" name="content-7-rect-16"/>
-          <p:cNvSpPr/>
-          <p:nvPr/>
-        </p:nvSpPr>
-        <p:spPr>
-          <a:xfrm>
-            <a:off x="457200" y="2514600"/>
-            <a:ext cx="2651760" cy="2194560"/>
-          </a:xfrm>
-          <a:prstGeom prst="roundRect">
-            <a:avLst>
-              <a:gd name="adj" fmla="val 3333"/>
-            </a:avLst>
-          </a:prstGeom>
-          <a:solidFill>
             <a:schemeClr val="bg2"/>
           </a:solidFill>
           <a:ln/>
@@ -8209,14 +8523,14 @@
       </p:sp>
       <p:sp>
         <p:nvSpPr>
-          <p:cNvPr id="19" name="content-7-text-17"/>
-          <p:cNvSpPr txBox="1"/>
-          <p:nvPr/>
-        </p:nvSpPr>
-        <p:spPr>
-          <a:xfrm>
-            <a:off x="640080" y="2651760"/>
-            <a:ext cx="2286000" cy="640080"/>
+          <p:cNvPr id="16" name="content-7-text-14"/>
+          <p:cNvSpPr txBox="1"/>
+          <p:nvPr/>
+        </p:nvSpPr>
+        <p:spPr>
+          <a:xfrm>
+            <a:off x="5623560" y="3785616"/>
+            <a:ext cx="2926080" cy="256032"/>
           </a:xfrm>
           <a:prstGeom prst="rect">
             <a:avLst/>
@@ -8232,238 +8546,50 @@
               <a:buNone/>
             </a:pPr>
             <a:r>
-              <a:rPr lang="en-US" sz="1600" b="1" dirty="0">
+              <a:rPr lang="en-US" sz="1400" b="1" dirty="0">
+                <a:solidFill>
+                  <a:schemeClr val="accent1"/>
+                </a:solidFill>
+              </a:rPr>
+              <a:t>Privacy</a:t>
+            </a:r>
+            <a:endParaRPr lang="en-US" sz="1400" dirty="0"/>
+          </a:p>
+        </p:txBody>
+      </p:sp>
+      <p:sp>
+        <p:nvSpPr>
+          <p:cNvPr id="17" name="content-7-text-15"/>
+          <p:cNvSpPr txBox="1"/>
+          <p:nvPr/>
+        </p:nvSpPr>
+        <p:spPr>
+          <a:xfrm>
+            <a:off x="5623560" y="4041648"/>
+            <a:ext cx="2971800" cy="420624"/>
+          </a:xfrm>
+          <a:prstGeom prst="rect">
+            <a:avLst/>
+          </a:prstGeom>
+          <a:noFill/>
+          <a:ln/>
+        </p:spPr>
+        <p:txBody>
+          <a:bodyPr wrap="square" lIns="0" tIns="0" rIns="0" bIns="0" rtlCol="0" anchor="t"/>
+          <a:lstStyle/>
+          <a:p>
+            <a:pPr algn="l" indent="0" marL="0">
+              <a:buNone/>
+            </a:pPr>
+            <a:r>
+              <a:rPr lang="en-US" sz="1100" dirty="0">
                 <a:solidFill>
                   <a:schemeClr val="tx1"/>
                 </a:solidFill>
               </a:rPr>
-              <a:t>Every number comes from the engine</a:t>
-            </a:r>
-            <a:endParaRPr lang="en-US" sz="1600" dirty="0"/>
-          </a:p>
-        </p:txBody>
-      </p:sp>
-      <p:sp>
-        <p:nvSpPr>
-          <p:cNvPr id="20" name="content-7-text-18"/>
-          <p:cNvSpPr txBox="1"/>
-          <p:nvPr/>
-        </p:nvSpPr>
-        <p:spPr>
-          <a:xfrm>
-            <a:off x="640080" y="3337560"/>
-            <a:ext cx="2286000" cy="1280160"/>
-          </a:xfrm>
-          <a:prstGeom prst="rect">
-            <a:avLst/>
-          </a:prstGeom>
-          <a:noFill/>
-          <a:ln/>
-        </p:spPr>
-        <p:txBody>
-          <a:bodyPr wrap="square" lIns="0" tIns="0" rIns="0" bIns="0" rtlCol="0" anchor="t"/>
-          <a:lstStyle/>
-          <a:p>
-            <a:pPr algn="l" indent="0" marL="0">
-              <a:buNone/>
-            </a:pPr>
-            <a:r>
-              <a:rPr lang="en-US" sz="1400" dirty="0">
-                <a:solidFill>
-                  <a:schemeClr val="tx2"/>
-                </a:solidFill>
-              </a:rPr>
-              <a:t>A number guard rejects any figure the engine did not produce, then a template answer takes over.</a:t>
-            </a:r>
-            <a:endParaRPr lang="en-US" sz="1400" dirty="0"/>
-          </a:p>
-        </p:txBody>
-      </p:sp>
-      <p:sp>
-        <p:nvSpPr>
-          <p:cNvPr id="21" name="content-7-rect-19"/>
-          <p:cNvSpPr/>
-          <p:nvPr/>
-        </p:nvSpPr>
-        <p:spPr>
-          <a:xfrm>
-            <a:off x="3246120" y="2514600"/>
-            <a:ext cx="2651760" cy="2194560"/>
-          </a:xfrm>
-          <a:prstGeom prst="roundRect">
-            <a:avLst>
-              <a:gd name="adj" fmla="val 3333"/>
-            </a:avLst>
-          </a:prstGeom>
-          <a:solidFill>
-            <a:schemeClr val="bg2"/>
-          </a:solidFill>
-          <a:ln/>
-        </p:spPr>
-      </p:sp>
-      <p:sp>
-        <p:nvSpPr>
-          <p:cNvPr id="22" name="content-7-text-20"/>
-          <p:cNvSpPr txBox="1"/>
-          <p:nvPr/>
-        </p:nvSpPr>
-        <p:spPr>
-          <a:xfrm>
-            <a:off x="3429000" y="2651760"/>
-            <a:ext cx="2286000" cy="640080"/>
-          </a:xfrm>
-          <a:prstGeom prst="rect">
-            <a:avLst/>
-          </a:prstGeom>
-          <a:noFill/>
-          <a:ln/>
-        </p:spPr>
-        <p:txBody>
-          <a:bodyPr wrap="square" lIns="0" tIns="0" rIns="0" bIns="0" rtlCol="0" anchor="t"/>
-          <a:lstStyle/>
-          <a:p>
-            <a:pPr algn="l" indent="0" marL="0">
-              <a:buNone/>
-            </a:pPr>
-            <a:r>
-              <a:rPr lang="en-US" sz="1600" b="1" dirty="0">
-                <a:solidFill>
-                  <a:schemeClr val="tx1"/>
-                </a:solidFill>
-              </a:rPr>
-              <a:t>It can only propose</a:t>
-            </a:r>
-            <a:endParaRPr lang="en-US" sz="1600" dirty="0"/>
-          </a:p>
-        </p:txBody>
-      </p:sp>
-      <p:sp>
-        <p:nvSpPr>
-          <p:cNvPr id="23" name="content-7-text-21"/>
-          <p:cNvSpPr txBox="1"/>
-          <p:nvPr/>
-        </p:nvSpPr>
-        <p:spPr>
-          <a:xfrm>
-            <a:off x="3429000" y="3337560"/>
-            <a:ext cx="2286000" cy="1280160"/>
-          </a:xfrm>
-          <a:prstGeom prst="rect">
-            <a:avLst/>
-          </a:prstGeom>
-          <a:noFill/>
-          <a:ln/>
-        </p:spPr>
-        <p:txBody>
-          <a:bodyPr wrap="square" lIns="0" tIns="0" rIns="0" bIns="0" rtlCol="0" anchor="t"/>
-          <a:lstStyle/>
-          <a:p>
-            <a:pPr algn="l" indent="0" marL="0">
-              <a:buNone/>
-            </a:pPr>
-            <a:r>
-              <a:rPr lang="en-US" sz="1400" dirty="0">
-                <a:solidFill>
-                  <a:schemeClr val="tx2"/>
-                </a:solidFill>
-              </a:rPr>
-              <a:t>It may make a quote. It cannot create a payment, approve, submit or cancel. A human approves with MFA.</a:t>
-            </a:r>
-            <a:endParaRPr lang="en-US" sz="1400" dirty="0"/>
-          </a:p>
-        </p:txBody>
-      </p:sp>
-      <p:sp>
-        <p:nvSpPr>
-          <p:cNvPr id="24" name="content-7-rect-22"/>
-          <p:cNvSpPr/>
-          <p:nvPr/>
-        </p:nvSpPr>
-        <p:spPr>
-          <a:xfrm>
-            <a:off x="6035040" y="2514600"/>
-            <a:ext cx="2651760" cy="2194560"/>
-          </a:xfrm>
-          <a:prstGeom prst="roundRect">
-            <a:avLst>
-              <a:gd name="adj" fmla="val 3333"/>
-            </a:avLst>
-          </a:prstGeom>
-          <a:solidFill>
-            <a:schemeClr val="bg2"/>
-          </a:solidFill>
-          <a:ln/>
-        </p:spPr>
-      </p:sp>
-      <p:sp>
-        <p:nvSpPr>
-          <p:cNvPr id="25" name="content-7-text-23"/>
-          <p:cNvSpPr txBox="1"/>
-          <p:nvPr/>
-        </p:nvSpPr>
-        <p:spPr>
-          <a:xfrm>
-            <a:off x="6217920" y="2651760"/>
-            <a:ext cx="2286000" cy="640080"/>
-          </a:xfrm>
-          <a:prstGeom prst="rect">
-            <a:avLst/>
-          </a:prstGeom>
-          <a:noFill/>
-          <a:ln/>
-        </p:spPr>
-        <p:txBody>
-          <a:bodyPr wrap="square" lIns="0" tIns="0" rIns="0" bIns="0" rtlCol="0" anchor="t"/>
-          <a:lstStyle/>
-          <a:p>
-            <a:pPr algn="l" indent="0" marL="0">
-              <a:buNone/>
-            </a:pPr>
-            <a:r>
-              <a:rPr lang="en-US" sz="1600" b="1" dirty="0">
-                <a:solidFill>
-                  <a:schemeClr val="tx1"/>
-                </a:solidFill>
-              </a:rPr>
-              <a:t>Works with no key</a:t>
-            </a:r>
-            <a:endParaRPr lang="en-US" sz="1600" dirty="0"/>
-          </a:p>
-        </p:txBody>
-      </p:sp>
-      <p:sp>
-        <p:nvSpPr>
-          <p:cNvPr id="26" name="content-7-text-24"/>
-          <p:cNvSpPr txBox="1"/>
-          <p:nvPr/>
-        </p:nvSpPr>
-        <p:spPr>
-          <a:xfrm>
-            <a:off x="6217920" y="3337560"/>
-            <a:ext cx="2286000" cy="1280160"/>
-          </a:xfrm>
-          <a:prstGeom prst="rect">
-            <a:avLst/>
-          </a:prstGeom>
-          <a:noFill/>
-          <a:ln/>
-        </p:spPr>
-        <p:txBody>
-          <a:bodyPr wrap="square" lIns="0" tIns="0" rIns="0" bIns="0" rtlCol="0" anchor="t"/>
-          <a:lstStyle/>
-          <a:p>
-            <a:pPr algn="l" indent="0" marL="0">
-              <a:buNone/>
-            </a:pPr>
-            <a:r>
-              <a:rPr lang="en-US" sz="1400" dirty="0">
-                <a:solidFill>
-                  <a:schemeClr val="tx2"/>
-                </a:solidFill>
-              </a:rPr>
-              <a:t>Template mode runs the same checks. A real model is one command away: check_ai.</a:t>
-            </a:r>
-            <a:endParaRPr lang="en-US" sz="1400" dirty="0"/>
+              <a:t>Only amounts, dates and hashes go on the chain. The AI has no access.</a:t>
+            </a:r>
+            <a:endParaRPr lang="en-US" sz="1100" dirty="0"/>
           </a:p>
         </p:txBody>
       </p:sp>
@@ -8527,7 +8653,7 @@
                 <a:ea typeface="+mj-lt" pitchFamily="34" charset="-122"/>
                 <a:cs typeface="+mj-lt" pitchFamily="34" charset="-120"/>
               </a:rPr>
-              <a:t>Security you can verify</a:t>
+              <a:t>An AI that cannot cheat</a:t>
             </a:r>
             <a:endParaRPr lang="en-US" sz="3600" dirty="0"/>
           </a:p>
@@ -8542,11 +8668,453 @@
         <p:spPr>
           <a:xfrm>
             <a:off x="457200" y="1280160"/>
-            <a:ext cx="4023360" cy="402336"/>
+            <a:ext cx="1051560" cy="731520"/>
           </a:xfrm>
           <a:prstGeom prst="roundRect">
             <a:avLst>
-              <a:gd name="adj" fmla="val 13636"/>
+              <a:gd name="adj" fmla="val 10000"/>
+            </a:avLst>
+          </a:prstGeom>
+          <a:solidFill>
+            <a:schemeClr val="tx1"/>
+          </a:solidFill>
+          <a:ln/>
+        </p:spPr>
+      </p:sp>
+      <p:sp>
+        <p:nvSpPr>
+          <p:cNvPr id="4" name="content-8-text-2"/>
+          <p:cNvSpPr txBox="1"/>
+          <p:nvPr/>
+        </p:nvSpPr>
+        <p:spPr>
+          <a:xfrm>
+            <a:off x="502920" y="1280160"/>
+            <a:ext cx="960120" cy="731520"/>
+          </a:xfrm>
+          <a:prstGeom prst="rect">
+            <a:avLst/>
+          </a:prstGeom>
+          <a:noFill/>
+          <a:ln/>
+        </p:spPr>
+        <p:txBody>
+          <a:bodyPr wrap="square" lIns="0" tIns="0" rIns="0" bIns="0" rtlCol="0" anchor="ctr"/>
+          <a:lstStyle/>
+          <a:p>
+            <a:pPr algn="ctr" indent="0" marL="0">
+              <a:buNone/>
+            </a:pPr>
+            <a:r>
+              <a:rPr lang="en-US" sz="1200" b="1" dirty="0">
+                <a:solidFill>
+                  <a:schemeClr val="bg1"/>
+                </a:solidFill>
+              </a:rPr>
+              <a:t>1  Policy check</a:t>
+            </a:r>
+            <a:endParaRPr lang="en-US" sz="1200" dirty="0"/>
+          </a:p>
+        </p:txBody>
+      </p:sp>
+      <p:sp>
+        <p:nvSpPr>
+          <p:cNvPr id="5" name="content-8-rect-3"/>
+          <p:cNvSpPr/>
+          <p:nvPr/>
+        </p:nvSpPr>
+        <p:spPr>
+          <a:xfrm>
+            <a:off x="1645920" y="1280160"/>
+            <a:ext cx="1051560" cy="731520"/>
+          </a:xfrm>
+          <a:prstGeom prst="roundRect">
+            <a:avLst>
+              <a:gd name="adj" fmla="val 10000"/>
+            </a:avLst>
+          </a:prstGeom>
+          <a:solidFill>
+            <a:schemeClr val="tx1"/>
+          </a:solidFill>
+          <a:ln/>
+        </p:spPr>
+      </p:sp>
+      <p:sp>
+        <p:nvSpPr>
+          <p:cNvPr id="6" name="content-8-text-4"/>
+          <p:cNvSpPr txBox="1"/>
+          <p:nvPr/>
+        </p:nvSpPr>
+        <p:spPr>
+          <a:xfrm>
+            <a:off x="1691640" y="1280160"/>
+            <a:ext cx="960120" cy="731520"/>
+          </a:xfrm>
+          <a:prstGeom prst="rect">
+            <a:avLst/>
+          </a:prstGeom>
+          <a:noFill/>
+          <a:ln/>
+        </p:spPr>
+        <p:txBody>
+          <a:bodyPr wrap="square" lIns="0" tIns="0" rIns="0" bIns="0" rtlCol="0" anchor="ctr"/>
+          <a:lstStyle/>
+          <a:p>
+            <a:pPr algn="ctr" indent="0" marL="0">
+              <a:buNone/>
+            </a:pPr>
+            <a:r>
+              <a:rPr lang="en-US" sz="1200" b="1" dirty="0">
+                <a:solidFill>
+                  <a:schemeClr val="bg1"/>
+                </a:solidFill>
+              </a:rPr>
+              <a:t>2  Engine facts</a:t>
+            </a:r>
+            <a:endParaRPr lang="en-US" sz="1200" dirty="0"/>
+          </a:p>
+        </p:txBody>
+      </p:sp>
+      <p:sp>
+        <p:nvSpPr>
+          <p:cNvPr id="7" name="content-8-rect-5"/>
+          <p:cNvSpPr/>
+          <p:nvPr/>
+        </p:nvSpPr>
+        <p:spPr>
+          <a:xfrm>
+            <a:off x="2834640" y="1280160"/>
+            <a:ext cx="1051560" cy="731520"/>
+          </a:xfrm>
+          <a:prstGeom prst="roundRect">
+            <a:avLst>
+              <a:gd name="adj" fmla="val 10000"/>
+            </a:avLst>
+          </a:prstGeom>
+          <a:solidFill>
+            <a:schemeClr val="tx1"/>
+          </a:solidFill>
+          <a:ln/>
+        </p:spPr>
+      </p:sp>
+      <p:sp>
+        <p:nvSpPr>
+          <p:cNvPr id="8" name="content-8-text-6"/>
+          <p:cNvSpPr txBox="1"/>
+          <p:nvPr/>
+        </p:nvSpPr>
+        <p:spPr>
+          <a:xfrm>
+            <a:off x="2880360" y="1280160"/>
+            <a:ext cx="960120" cy="731520"/>
+          </a:xfrm>
+          <a:prstGeom prst="rect">
+            <a:avLst/>
+          </a:prstGeom>
+          <a:noFill/>
+          <a:ln/>
+        </p:spPr>
+        <p:txBody>
+          <a:bodyPr wrap="square" lIns="0" tIns="0" rIns="0" bIns="0" rtlCol="0" anchor="ctr"/>
+          <a:lstStyle/>
+          <a:p>
+            <a:pPr algn="ctr" indent="0" marL="0">
+              <a:buNone/>
+            </a:pPr>
+            <a:r>
+              <a:rPr lang="en-US" sz="1200" b="1" dirty="0">
+                <a:solidFill>
+                  <a:schemeClr val="bg1"/>
+                </a:solidFill>
+              </a:rPr>
+              <a:t>3  Mask personal data</a:t>
+            </a:r>
+            <a:endParaRPr lang="en-US" sz="1200" dirty="0"/>
+          </a:p>
+        </p:txBody>
+      </p:sp>
+      <p:sp>
+        <p:nvSpPr>
+          <p:cNvPr id="9" name="content-8-rect-7"/>
+          <p:cNvSpPr/>
+          <p:nvPr/>
+        </p:nvSpPr>
+        <p:spPr>
+          <a:xfrm>
+            <a:off x="4023360" y="1280160"/>
+            <a:ext cx="1051560" cy="731520"/>
+          </a:xfrm>
+          <a:prstGeom prst="roundRect">
+            <a:avLst>
+              <a:gd name="adj" fmla="val 10000"/>
+            </a:avLst>
+          </a:prstGeom>
+          <a:solidFill>
+            <a:schemeClr val="accent2"/>
+          </a:solidFill>
+          <a:ln/>
+        </p:spPr>
+      </p:sp>
+      <p:sp>
+        <p:nvSpPr>
+          <p:cNvPr id="10" name="content-8-text-8"/>
+          <p:cNvSpPr txBox="1"/>
+          <p:nvPr/>
+        </p:nvSpPr>
+        <p:spPr>
+          <a:xfrm>
+            <a:off x="4069080" y="1280160"/>
+            <a:ext cx="960120" cy="731520"/>
+          </a:xfrm>
+          <a:prstGeom prst="rect">
+            <a:avLst/>
+          </a:prstGeom>
+          <a:noFill/>
+          <a:ln/>
+        </p:spPr>
+        <p:txBody>
+          <a:bodyPr wrap="square" lIns="0" tIns="0" rIns="0" bIns="0" rtlCol="0" anchor="ctr"/>
+          <a:lstStyle/>
+          <a:p>
+            <a:pPr algn="ctr" indent="0" marL="0">
+              <a:buNone/>
+            </a:pPr>
+            <a:r>
+              <a:rPr lang="en-US" sz="1200" b="1" dirty="0">
+                <a:solidFill>
+                  <a:schemeClr val="tx1"/>
+                </a:solidFill>
+              </a:rPr>
+              <a:t>4  Model (optional)</a:t>
+            </a:r>
+            <a:endParaRPr lang="en-US" sz="1200" dirty="0"/>
+          </a:p>
+        </p:txBody>
+      </p:sp>
+      <p:sp>
+        <p:nvSpPr>
+          <p:cNvPr id="11" name="content-8-rect-9"/>
+          <p:cNvSpPr/>
+          <p:nvPr/>
+        </p:nvSpPr>
+        <p:spPr>
+          <a:xfrm>
+            <a:off x="5212080" y="1280160"/>
+            <a:ext cx="1051560" cy="731520"/>
+          </a:xfrm>
+          <a:prstGeom prst="roundRect">
+            <a:avLst>
+              <a:gd name="adj" fmla="val 10000"/>
+            </a:avLst>
+          </a:prstGeom>
+          <a:solidFill>
+            <a:schemeClr val="tx1"/>
+          </a:solidFill>
+          <a:ln/>
+        </p:spPr>
+      </p:sp>
+      <p:sp>
+        <p:nvSpPr>
+          <p:cNvPr id="12" name="content-8-text-10"/>
+          <p:cNvSpPr txBox="1"/>
+          <p:nvPr/>
+        </p:nvSpPr>
+        <p:spPr>
+          <a:xfrm>
+            <a:off x="5257800" y="1280160"/>
+            <a:ext cx="960120" cy="731520"/>
+          </a:xfrm>
+          <a:prstGeom prst="rect">
+            <a:avLst/>
+          </a:prstGeom>
+          <a:noFill/>
+          <a:ln/>
+        </p:spPr>
+        <p:txBody>
+          <a:bodyPr wrap="square" lIns="0" tIns="0" rIns="0" bIns="0" rtlCol="0" anchor="ctr"/>
+          <a:lstStyle/>
+          <a:p>
+            <a:pPr algn="ctr" indent="0" marL="0">
+              <a:buNone/>
+            </a:pPr>
+            <a:r>
+              <a:rPr lang="en-US" sz="1200" b="1" dirty="0">
+                <a:solidFill>
+                  <a:schemeClr val="bg1"/>
+                </a:solidFill>
+              </a:rPr>
+              <a:t>5  Number guard</a:t>
+            </a:r>
+            <a:endParaRPr lang="en-US" sz="1200" dirty="0"/>
+          </a:p>
+        </p:txBody>
+      </p:sp>
+      <p:sp>
+        <p:nvSpPr>
+          <p:cNvPr id="13" name="content-8-rect-11"/>
+          <p:cNvSpPr/>
+          <p:nvPr/>
+        </p:nvSpPr>
+        <p:spPr>
+          <a:xfrm>
+            <a:off x="6400800" y="1280160"/>
+            <a:ext cx="1051560" cy="731520"/>
+          </a:xfrm>
+          <a:prstGeom prst="roundRect">
+            <a:avLst>
+              <a:gd name="adj" fmla="val 10000"/>
+            </a:avLst>
+          </a:prstGeom>
+          <a:solidFill>
+            <a:schemeClr val="tx1"/>
+          </a:solidFill>
+          <a:ln/>
+        </p:spPr>
+      </p:sp>
+      <p:sp>
+        <p:nvSpPr>
+          <p:cNvPr id="14" name="content-8-text-12"/>
+          <p:cNvSpPr txBox="1"/>
+          <p:nvPr/>
+        </p:nvSpPr>
+        <p:spPr>
+          <a:xfrm>
+            <a:off x="6446520" y="1280160"/>
+            <a:ext cx="960120" cy="731520"/>
+          </a:xfrm>
+          <a:prstGeom prst="rect">
+            <a:avLst/>
+          </a:prstGeom>
+          <a:noFill/>
+          <a:ln/>
+        </p:spPr>
+        <p:txBody>
+          <a:bodyPr wrap="square" lIns="0" tIns="0" rIns="0" bIns="0" rtlCol="0" anchor="ctr"/>
+          <a:lstStyle/>
+          <a:p>
+            <a:pPr algn="ctr" indent="0" marL="0">
+              <a:buNone/>
+            </a:pPr>
+            <a:r>
+              <a:rPr lang="en-US" sz="1200" b="1" dirty="0">
+                <a:solidFill>
+                  <a:schemeClr val="bg1"/>
+                </a:solidFill>
+              </a:rPr>
+              <a:t>6  Tool guard</a:t>
+            </a:r>
+            <a:endParaRPr lang="en-US" sz="1200" dirty="0"/>
+          </a:p>
+        </p:txBody>
+      </p:sp>
+      <p:sp>
+        <p:nvSpPr>
+          <p:cNvPr id="15" name="content-8-rect-13"/>
+          <p:cNvSpPr/>
+          <p:nvPr/>
+        </p:nvSpPr>
+        <p:spPr>
+          <a:xfrm>
+            <a:off x="7589520" y="1280160"/>
+            <a:ext cx="1051560" cy="731520"/>
+          </a:xfrm>
+          <a:prstGeom prst="roundRect">
+            <a:avLst>
+              <a:gd name="adj" fmla="val 10000"/>
+            </a:avLst>
+          </a:prstGeom>
+          <a:solidFill>
+            <a:schemeClr val="tx1"/>
+          </a:solidFill>
+          <a:ln/>
+        </p:spPr>
+      </p:sp>
+      <p:sp>
+        <p:nvSpPr>
+          <p:cNvPr id="16" name="content-8-text-14"/>
+          <p:cNvSpPr txBox="1"/>
+          <p:nvPr/>
+        </p:nvSpPr>
+        <p:spPr>
+          <a:xfrm>
+            <a:off x="7635240" y="1280160"/>
+            <a:ext cx="960120" cy="731520"/>
+          </a:xfrm>
+          <a:prstGeom prst="rect">
+            <a:avLst/>
+          </a:prstGeom>
+          <a:noFill/>
+          <a:ln/>
+        </p:spPr>
+        <p:txBody>
+          <a:bodyPr wrap="square" lIns="0" tIns="0" rIns="0" bIns="0" rtlCol="0" anchor="ctr"/>
+          <a:lstStyle/>
+          <a:p>
+            <a:pPr algn="ctr" indent="0" marL="0">
+              <a:buNone/>
+            </a:pPr>
+            <a:r>
+              <a:rPr lang="en-US" sz="1200" b="1" dirty="0">
+                <a:solidFill>
+                  <a:schemeClr val="bg1"/>
+                </a:solidFill>
+              </a:rPr>
+              <a:t>7  Audit</a:t>
+            </a:r>
+            <a:endParaRPr lang="en-US" sz="1200" dirty="0"/>
+          </a:p>
+        </p:txBody>
+      </p:sp>
+      <p:sp>
+        <p:nvSpPr>
+          <p:cNvPr id="17" name="content-8-text-15"/>
+          <p:cNvSpPr txBox="1"/>
+          <p:nvPr/>
+        </p:nvSpPr>
+        <p:spPr>
+          <a:xfrm>
+            <a:off x="457200" y="2084832"/>
+            <a:ext cx="8229600" cy="292608"/>
+          </a:xfrm>
+          <a:prstGeom prst="rect">
+            <a:avLst/>
+          </a:prstGeom>
+          <a:noFill/>
+          <a:ln/>
+        </p:spPr>
+        <p:txBody>
+          <a:bodyPr wrap="square" lIns="0" tIns="0" rIns="0" bIns="0" rtlCol="0" anchor="t"/>
+          <a:lstStyle/>
+          <a:p>
+            <a:pPr algn="l" indent="0" marL="0">
+              <a:buNone/>
+            </a:pPr>
+            <a:r>
+              <a:rPr lang="en-US" sz="1200" dirty="0">
+                <a:solidFill>
+                  <a:schemeClr val="tx2"/>
+                </a:solidFill>
+              </a:rPr>
+              <a:t>Only step 4 is not deterministic, and it is optional. A flagged message never reaches it.</a:t>
+            </a:r>
+            <a:endParaRPr lang="en-US" sz="1200" dirty="0"/>
+          </a:p>
+        </p:txBody>
+      </p:sp>
+      <p:sp>
+        <p:nvSpPr>
+          <p:cNvPr id="18" name="content-8-rect-16"/>
+          <p:cNvSpPr/>
+          <p:nvPr/>
+        </p:nvSpPr>
+        <p:spPr>
+          <a:xfrm>
+            <a:off x="457200" y="2514600"/>
+            <a:ext cx="2651760" cy="2194560"/>
+          </a:xfrm>
+          <a:prstGeom prst="roundRect">
+            <a:avLst>
+              <a:gd name="adj" fmla="val 3333"/>
             </a:avLst>
           </a:prstGeom>
           <a:solidFill>
@@ -8557,46 +9125,71 @@
       </p:sp>
       <p:sp>
         <p:nvSpPr>
-          <p:cNvPr id="4" name="content-8-text-2"/>
-          <p:cNvSpPr txBox="1"/>
-          <p:nvPr/>
-        </p:nvSpPr>
-        <p:spPr>
-          <a:xfrm>
-            <a:off x="594360" y="1280160"/>
-            <a:ext cx="3794760" cy="402336"/>
-          </a:xfrm>
-          <a:prstGeom prst="rect">
-            <a:avLst/>
-          </a:prstGeom>
-          <a:noFill/>
-          <a:ln/>
-        </p:spPr>
-        <p:txBody>
-          <a:bodyPr wrap="square" lIns="0" tIns="0" rIns="0" bIns="0" rtlCol="0" anchor="ctr"/>
+          <p:cNvPr id="19" name="content-8-text-17"/>
+          <p:cNvSpPr txBox="1"/>
+          <p:nvPr/>
+        </p:nvSpPr>
+        <p:spPr>
+          <a:xfrm>
+            <a:off x="640080" y="2651760"/>
+            <a:ext cx="2286000" cy="640080"/>
+          </a:xfrm>
+          <a:prstGeom prst="rect">
+            <a:avLst/>
+          </a:prstGeom>
+          <a:noFill/>
+          <a:ln/>
+        </p:spPr>
+        <p:txBody>
+          <a:bodyPr wrap="square" lIns="0" tIns="0" rIns="0" bIns="0" rtlCol="0" anchor="t"/>
           <a:lstStyle/>
           <a:p>
             <a:pPr algn="l" indent="0" marL="0">
               <a:buNone/>
             </a:pPr>
             <a:r>
-              <a:rPr lang="en-US" sz="1400" b="1" dirty="0">
+              <a:rPr lang="en-US" sz="1600" b="1" dirty="0">
                 <a:solidFill>
                   <a:schemeClr val="tx1"/>
                 </a:solidFill>
               </a:rPr>
-              <a:t>Public:</a:t>
-            </a:r>
+              <a:t>Every number comes from the engine</a:t>
+            </a:r>
+            <a:endParaRPr lang="en-US" sz="1600" dirty="0"/>
+          </a:p>
+        </p:txBody>
+      </p:sp>
+      <p:sp>
+        <p:nvSpPr>
+          <p:cNvPr id="20" name="content-8-text-18"/>
+          <p:cNvSpPr txBox="1"/>
+          <p:nvPr/>
+        </p:nvSpPr>
+        <p:spPr>
+          <a:xfrm>
+            <a:off x="640080" y="3337560"/>
+            <a:ext cx="2286000" cy="1280160"/>
+          </a:xfrm>
+          <a:prstGeom prst="rect">
+            <a:avLst/>
+          </a:prstGeom>
+          <a:noFill/>
+          <a:ln/>
+        </p:spPr>
+        <p:txBody>
+          <a:bodyPr wrap="square" lIns="0" tIns="0" rIns="0" bIns="0" rtlCol="0" anchor="t"/>
+          <a:lstStyle/>
+          <a:p>
             <a:pPr algn="l" indent="0" marL="0">
               <a:buNone/>
             </a:pPr>
             <a:r>
               <a:rPr lang="en-US" sz="1400" dirty="0">
                 <a:solidFill>
-                  <a:schemeClr val="tx1"/>
-                </a:solidFill>
-              </a:rPr>
-              <a:t> sign in, health</a:t>
+                  <a:schemeClr val="tx2"/>
+                </a:solidFill>
+              </a:rPr>
+              <a:t>A number guard rejects any figure the engine did not produce, then a template answer takes over.</a:t>
             </a:r>
             <a:endParaRPr lang="en-US" sz="1400" dirty="0"/>
           </a:p>
@@ -8604,18 +9197,18 @@
       </p:sp>
       <p:sp>
         <p:nvSpPr>
-          <p:cNvPr id="5" name="content-8-rect-3"/>
+          <p:cNvPr id="21" name="content-8-rect-19"/>
           <p:cNvSpPr/>
           <p:nvPr/>
         </p:nvSpPr>
         <p:spPr>
           <a:xfrm>
-            <a:off x="457200" y="1755648"/>
-            <a:ext cx="4023360" cy="402336"/>
+            <a:off x="3246120" y="2514600"/>
+            <a:ext cx="2651760" cy="2194560"/>
           </a:xfrm>
           <a:prstGeom prst="roundRect">
             <a:avLst>
-              <a:gd name="adj" fmla="val 13636"/>
+              <a:gd name="adj" fmla="val 3333"/>
             </a:avLst>
           </a:prstGeom>
           <a:solidFill>
@@ -8626,46 +9219,71 @@
       </p:sp>
       <p:sp>
         <p:nvSpPr>
-          <p:cNvPr id="6" name="content-8-text-4"/>
-          <p:cNvSpPr txBox="1"/>
-          <p:nvPr/>
-        </p:nvSpPr>
-        <p:spPr>
-          <a:xfrm>
-            <a:off x="594360" y="1755648"/>
-            <a:ext cx="3794760" cy="402336"/>
-          </a:xfrm>
-          <a:prstGeom prst="rect">
-            <a:avLst/>
-          </a:prstGeom>
-          <a:noFill/>
-          <a:ln/>
-        </p:spPr>
-        <p:txBody>
-          <a:bodyPr wrap="square" lIns="0" tIns="0" rIns="0" bIns="0" rtlCol="0" anchor="ctr"/>
+          <p:cNvPr id="22" name="content-8-text-20"/>
+          <p:cNvSpPr txBox="1"/>
+          <p:nvPr/>
+        </p:nvSpPr>
+        <p:spPr>
+          <a:xfrm>
+            <a:off x="3429000" y="2651760"/>
+            <a:ext cx="2286000" cy="640080"/>
+          </a:xfrm>
+          <a:prstGeom prst="rect">
+            <a:avLst/>
+          </a:prstGeom>
+          <a:noFill/>
+          <a:ln/>
+        </p:spPr>
+        <p:txBody>
+          <a:bodyPr wrap="square" lIns="0" tIns="0" rIns="0" bIns="0" rtlCol="0" anchor="t"/>
           <a:lstStyle/>
           <a:p>
             <a:pPr algn="l" indent="0" marL="0">
               <a:buNone/>
             </a:pPr>
             <a:r>
-              <a:rPr lang="en-US" sz="1400" b="1" dirty="0">
+              <a:rPr lang="en-US" sz="1600" b="1" dirty="0">
                 <a:solidFill>
                   <a:schemeClr val="tx1"/>
                 </a:solidFill>
               </a:rPr>
-              <a:t>Read:</a:t>
-            </a:r>
+              <a:t>It can only propose</a:t>
+            </a:r>
+            <a:endParaRPr lang="en-US" sz="1600" dirty="0"/>
+          </a:p>
+        </p:txBody>
+      </p:sp>
+      <p:sp>
+        <p:nvSpPr>
+          <p:cNvPr id="23" name="content-8-text-21"/>
+          <p:cNvSpPr txBox="1"/>
+          <p:nvPr/>
+        </p:nvSpPr>
+        <p:spPr>
+          <a:xfrm>
+            <a:off x="3429000" y="3337560"/>
+            <a:ext cx="2286000" cy="1280160"/>
+          </a:xfrm>
+          <a:prstGeom prst="rect">
+            <a:avLst/>
+          </a:prstGeom>
+          <a:noFill/>
+          <a:ln/>
+        </p:spPr>
+        <p:txBody>
+          <a:bodyPr wrap="square" lIns="0" tIns="0" rIns="0" bIns="0" rtlCol="0" anchor="t"/>
+          <a:lstStyle/>
+          <a:p>
             <a:pPr algn="l" indent="0" marL="0">
               <a:buNone/>
             </a:pPr>
             <a:r>
               <a:rPr lang="en-US" sz="1400" dirty="0">
                 <a:solidFill>
-                  <a:schemeClr val="tx1"/>
-                </a:solidFill>
-              </a:rPr>
-              <a:t> own household only</a:t>
+                  <a:schemeClr val="tx2"/>
+                </a:solidFill>
+              </a:rPr>
+              <a:t>It may make a quote. It cannot create a payment, approve, submit or cancel. A human approves with MFA.</a:t>
             </a:r>
             <a:endParaRPr lang="en-US" sz="1400" dirty="0"/>
           </a:p>
@@ -8673,18 +9291,18 @@
       </p:sp>
       <p:sp>
         <p:nvSpPr>
-          <p:cNvPr id="7" name="content-8-rect-5"/>
+          <p:cNvPr id="24" name="content-8-rect-22"/>
           <p:cNvSpPr/>
           <p:nvPr/>
         </p:nvSpPr>
         <p:spPr>
           <a:xfrm>
-            <a:off x="457200" y="2231136"/>
-            <a:ext cx="4023360" cy="402336"/>
+            <a:off x="6035040" y="2514600"/>
+            <a:ext cx="2651760" cy="2194560"/>
           </a:xfrm>
           <a:prstGeom prst="roundRect">
             <a:avLst>
-              <a:gd name="adj" fmla="val 13636"/>
+              <a:gd name="adj" fmla="val 3333"/>
             </a:avLst>
           </a:prstGeom>
           <a:solidFill>
@@ -8695,679 +9313,73 @@
       </p:sp>
       <p:sp>
         <p:nvSpPr>
-          <p:cNvPr id="8" name="content-8-text-6"/>
-          <p:cNvSpPr txBox="1"/>
-          <p:nvPr/>
-        </p:nvSpPr>
-        <p:spPr>
-          <a:xfrm>
-            <a:off x="594360" y="2231136"/>
-            <a:ext cx="3794760" cy="402336"/>
-          </a:xfrm>
-          <a:prstGeom prst="rect">
-            <a:avLst/>
-          </a:prstGeom>
-          <a:noFill/>
-          <a:ln/>
-        </p:spPr>
-        <p:txBody>
-          <a:bodyPr wrap="square" lIns="0" tIns="0" rIns="0" bIns="0" rtlCol="0" anchor="ctr"/>
+          <p:cNvPr id="25" name="content-8-text-23"/>
+          <p:cNvSpPr txBox="1"/>
+          <p:nvPr/>
+        </p:nvSpPr>
+        <p:spPr>
+          <a:xfrm>
+            <a:off x="6217920" y="2651760"/>
+            <a:ext cx="2286000" cy="640080"/>
+          </a:xfrm>
+          <a:prstGeom prst="rect">
+            <a:avLst/>
+          </a:prstGeom>
+          <a:noFill/>
+          <a:ln/>
+        </p:spPr>
+        <p:txBody>
+          <a:bodyPr wrap="square" lIns="0" tIns="0" rIns="0" bIns="0" rtlCol="0" anchor="t"/>
           <a:lstStyle/>
           <a:p>
             <a:pPr algn="l" indent="0" marL="0">
               <a:buNone/>
             </a:pPr>
             <a:r>
-              <a:rPr lang="en-US" sz="1400" b="1" dirty="0">
+              <a:rPr lang="en-US" sz="1600" b="1" dirty="0">
                 <a:solidFill>
                   <a:schemeClr val="tx1"/>
                 </a:solidFill>
               </a:rPr>
-              <a:t>Prepare:</a:t>
-            </a:r>
+              <a:t>Works with no key</a:t>
+            </a:r>
+            <a:endParaRPr lang="en-US" sz="1600" dirty="0"/>
+          </a:p>
+        </p:txBody>
+      </p:sp>
+      <p:sp>
+        <p:nvSpPr>
+          <p:cNvPr id="26" name="content-8-text-24"/>
+          <p:cNvSpPr txBox="1"/>
+          <p:nvPr/>
+        </p:nvSpPr>
+        <p:spPr>
+          <a:xfrm>
+            <a:off x="6217920" y="3337560"/>
+            <a:ext cx="2286000" cy="1280160"/>
+          </a:xfrm>
+          <a:prstGeom prst="rect">
+            <a:avLst/>
+          </a:prstGeom>
+          <a:noFill/>
+          <a:ln/>
+        </p:spPr>
+        <p:txBody>
+          <a:bodyPr wrap="square" lIns="0" tIns="0" rIns="0" bIns="0" rtlCol="0" anchor="t"/>
+          <a:lstStyle/>
+          <a:p>
             <a:pPr algn="l" indent="0" marL="0">
               <a:buNone/>
             </a:pPr>
             <a:r>
               <a:rPr lang="en-US" sz="1400" dirty="0">
                 <a:solidFill>
-                  <a:schemeClr val="tx1"/>
-                </a:solidFill>
-              </a:rPr>
-              <a:t> drafts, recipients, documents</a:t>
+                  <a:schemeClr val="tx2"/>
+                </a:solidFill>
+              </a:rPr>
+              <a:t>Template mode runs the same checks. A real model is one command away: check_ai.</a:t>
             </a:r>
             <a:endParaRPr lang="en-US" sz="1400" dirty="0"/>
-          </a:p>
-        </p:txBody>
-      </p:sp>
-      <p:sp>
-        <p:nvSpPr>
-          <p:cNvPr id="9" name="content-8-rect-7"/>
-          <p:cNvSpPr/>
-          <p:nvPr/>
-        </p:nvSpPr>
-        <p:spPr>
-          <a:xfrm>
-            <a:off x="457200" y="2706624"/>
-            <a:ext cx="4023360" cy="402336"/>
-          </a:xfrm>
-          <a:prstGeom prst="roundRect">
-            <a:avLst>
-              <a:gd name="adj" fmla="val 13636"/>
-            </a:avLst>
-          </a:prstGeom>
-          <a:solidFill>
-            <a:schemeClr val="accent1"/>
-          </a:solidFill>
-          <a:ln/>
-        </p:spPr>
-      </p:sp>
-      <p:sp>
-        <p:nvSpPr>
-          <p:cNvPr id="10" name="content-8-text-8"/>
-          <p:cNvSpPr txBox="1"/>
-          <p:nvPr/>
-        </p:nvSpPr>
-        <p:spPr>
-          <a:xfrm>
-            <a:off x="594360" y="2706624"/>
-            <a:ext cx="3794760" cy="402336"/>
-          </a:xfrm>
-          <a:prstGeom prst="rect">
-            <a:avLst/>
-          </a:prstGeom>
-          <a:noFill/>
-          <a:ln/>
-        </p:spPr>
-        <p:txBody>
-          <a:bodyPr wrap="square" lIns="0" tIns="0" rIns="0" bIns="0" rtlCol="0" anchor="ctr"/>
-          <a:lstStyle/>
-          <a:p>
-            <a:pPr algn="l" indent="0" marL="0">
-              <a:buNone/>
-            </a:pPr>
-            <a:r>
-              <a:rPr lang="en-US" sz="1400" b="1" dirty="0">
-                <a:solidFill>
-                  <a:schemeClr val="bg1"/>
-                </a:solidFill>
-              </a:rPr>
-              <a:t>Decide:</a:t>
-            </a:r>
-            <a:pPr algn="l" indent="0" marL="0">
-              <a:buNone/>
-            </a:pPr>
-            <a:r>
-              <a:rPr lang="en-US" sz="1400" dirty="0">
-                <a:solidFill>
-                  <a:schemeClr val="bg1"/>
-                </a:solidFill>
-              </a:rPr>
-              <a:t> human parent with fresh MFA</a:t>
-            </a:r>
-            <a:endParaRPr lang="en-US" sz="1400" dirty="0"/>
-          </a:p>
-        </p:txBody>
-      </p:sp>
-      <p:sp>
-        <p:nvSpPr>
-          <p:cNvPr id="11" name="content-8-rect-9"/>
-          <p:cNvSpPr/>
-          <p:nvPr/>
-        </p:nvSpPr>
-        <p:spPr>
-          <a:xfrm>
-            <a:off x="457200" y="3182112"/>
-            <a:ext cx="4023360" cy="402336"/>
-          </a:xfrm>
-          <a:prstGeom prst="roundRect">
-            <a:avLst>
-              <a:gd name="adj" fmla="val 13636"/>
-            </a:avLst>
-          </a:prstGeom>
-          <a:solidFill>
-            <a:schemeClr val="bg2"/>
-          </a:solidFill>
-          <a:ln/>
-        </p:spPr>
-      </p:sp>
-      <p:sp>
-        <p:nvSpPr>
-          <p:cNvPr id="12" name="content-8-text-10"/>
-          <p:cNvSpPr txBox="1"/>
-          <p:nvPr/>
-        </p:nvSpPr>
-        <p:spPr>
-          <a:xfrm>
-            <a:off x="594360" y="3182112"/>
-            <a:ext cx="3794760" cy="402336"/>
-          </a:xfrm>
-          <a:prstGeom prst="rect">
-            <a:avLst/>
-          </a:prstGeom>
-          <a:noFill/>
-          <a:ln/>
-        </p:spPr>
-        <p:txBody>
-          <a:bodyPr wrap="square" lIns="0" tIns="0" rIns="0" bIns="0" rtlCol="0" anchor="ctr"/>
-          <a:lstStyle/>
-          <a:p>
-            <a:pPr algn="l" indent="0" marL="0">
-              <a:buNone/>
-            </a:pPr>
-            <a:r>
-              <a:rPr lang="en-US" sz="1400" b="1" dirty="0">
-                <a:solidFill>
-                  <a:schemeClr val="tx1"/>
-                </a:solidFill>
-              </a:rPr>
-              <a:t>Administer:</a:t>
-            </a:r>
-            <a:pPr algn="l" indent="0" marL="0">
-              <a:buNone/>
-            </a:pPr>
-            <a:r>
-              <a:rPr lang="en-US" sz="1400" dirty="0">
-                <a:solidFill>
-                  <a:schemeClr val="tx1"/>
-                </a:solidFill>
-              </a:rPr>
-              <a:t> reviewer rules and Verify</a:t>
-            </a:r>
-            <a:endParaRPr lang="en-US" sz="1400" dirty="0"/>
-          </a:p>
-        </p:txBody>
-      </p:sp>
-      <p:sp>
-        <p:nvSpPr>
-          <p:cNvPr id="13" name="content-8-rect-11"/>
-          <p:cNvSpPr/>
-          <p:nvPr/>
-        </p:nvSpPr>
-        <p:spPr>
-          <a:xfrm>
-            <a:off x="457200" y="3657600"/>
-            <a:ext cx="4023360" cy="402336"/>
-          </a:xfrm>
-          <a:prstGeom prst="roundRect">
-            <a:avLst>
-              <a:gd name="adj" fmla="val 13636"/>
-            </a:avLst>
-          </a:prstGeom>
-          <a:solidFill>
-            <a:schemeClr val="accent3"/>
-          </a:solidFill>
-          <a:ln/>
-        </p:spPr>
-      </p:sp>
-      <p:sp>
-        <p:nvSpPr>
-          <p:cNvPr id="14" name="content-8-text-12"/>
-          <p:cNvSpPr txBox="1"/>
-          <p:nvPr/>
-        </p:nvSpPr>
-        <p:spPr>
-          <a:xfrm>
-            <a:off x="594360" y="3657600"/>
-            <a:ext cx="3794760" cy="402336"/>
-          </a:xfrm>
-          <a:prstGeom prst="rect">
-            <a:avLst/>
-          </a:prstGeom>
-          <a:noFill/>
-          <a:ln/>
-        </p:spPr>
-        <p:txBody>
-          <a:bodyPr wrap="square" lIns="0" tIns="0" rIns="0" bIns="0" rtlCol="0" anchor="ctr"/>
-          <a:lstStyle/>
-          <a:p>
-            <a:pPr algn="l" indent="0" marL="0">
-              <a:buNone/>
-            </a:pPr>
-            <a:r>
-              <a:rPr lang="en-US" sz="1400" b="1" dirty="0">
-                <a:solidFill>
-                  <a:schemeClr val="bg1"/>
-                </a:solidFill>
-              </a:rPr>
-              <a:t>Never for the AI:</a:t>
-            </a:r>
-            <a:pPr algn="l" indent="0" marL="0">
-              <a:buNone/>
-            </a:pPr>
-            <a:r>
-              <a:rPr lang="en-US" sz="1400" dirty="0">
-                <a:solidFill>
-                  <a:schemeClr val="bg1"/>
-                </a:solidFill>
-              </a:rPr>
-              <a:t> approve, cancel, limits</a:t>
-            </a:r>
-            <a:endParaRPr lang="en-US" sz="1400" dirty="0"/>
-          </a:p>
-        </p:txBody>
-      </p:sp>
-      <p:sp>
-        <p:nvSpPr>
-          <p:cNvPr id="15" name="content-8-rect-13"/>
-          <p:cNvSpPr/>
-          <p:nvPr/>
-        </p:nvSpPr>
-        <p:spPr>
-          <a:xfrm>
-            <a:off x="4663440" y="1280160"/>
-            <a:ext cx="1920240" cy="1188720"/>
-          </a:xfrm>
-          <a:prstGeom prst="roundRect">
-            <a:avLst>
-              <a:gd name="adj" fmla="val 6154"/>
-            </a:avLst>
-          </a:prstGeom>
-          <a:solidFill>
-            <a:schemeClr val="bg2"/>
-          </a:solidFill>
-          <a:ln/>
-        </p:spPr>
-      </p:sp>
-      <p:sp>
-        <p:nvSpPr>
-          <p:cNvPr id="16" name="content-8-text-14"/>
-          <p:cNvSpPr txBox="1"/>
-          <p:nvPr/>
-        </p:nvSpPr>
-        <p:spPr>
-          <a:xfrm>
-            <a:off x="4800600" y="1371600"/>
-            <a:ext cx="1645920" cy="594360"/>
-          </a:xfrm>
-          <a:prstGeom prst="rect">
-            <a:avLst/>
-          </a:prstGeom>
-          <a:noFill/>
-          <a:ln/>
-        </p:spPr>
-        <p:txBody>
-          <a:bodyPr wrap="square" lIns="0" tIns="0" rIns="0" bIns="0" rtlCol="0" anchor="ctr"/>
-          <a:lstStyle/>
-          <a:p>
-            <a:pPr algn="l" indent="0" marL="0">
-              <a:buNone/>
-            </a:pPr>
-            <a:r>
-              <a:rPr lang="en-US" sz="3200" b="1" dirty="0">
-                <a:solidFill>
-                  <a:schemeClr val="accent1"/>
-                </a:solidFill>
-                <a:latin typeface="+mj-lt" pitchFamily="34" charset="0"/>
-                <a:ea typeface="+mj-lt" pitchFamily="34" charset="-122"/>
-                <a:cs typeface="+mj-lt" pitchFamily="34" charset="-120"/>
-              </a:rPr>
-              <a:t>760</a:t>
-            </a:r>
-            <a:endParaRPr lang="en-US" sz="3200" dirty="0"/>
-          </a:p>
-        </p:txBody>
-      </p:sp>
-      <p:sp>
-        <p:nvSpPr>
-          <p:cNvPr id="17" name="content-8-text-15"/>
-          <p:cNvSpPr txBox="1"/>
-          <p:nvPr/>
-        </p:nvSpPr>
-        <p:spPr>
-          <a:xfrm>
-            <a:off x="4800600" y="1965960"/>
-            <a:ext cx="1645920" cy="457200"/>
-          </a:xfrm>
-          <a:prstGeom prst="rect">
-            <a:avLst/>
-          </a:prstGeom>
-          <a:noFill/>
-          <a:ln/>
-        </p:spPr>
-        <p:txBody>
-          <a:bodyPr wrap="square" lIns="0" tIns="0" rIns="0" bIns="0" rtlCol="0" anchor="t"/>
-          <a:lstStyle/>
-          <a:p>
-            <a:pPr algn="l" indent="0" marL="0">
-              <a:buNone/>
-            </a:pPr>
-            <a:r>
-              <a:rPr lang="en-US" sz="1200" dirty="0">
-                <a:solidFill>
-                  <a:schemeClr val="tx2"/>
-                </a:solidFill>
-              </a:rPr>
-              <a:t>backend tests, all passing</a:t>
-            </a:r>
-            <a:endParaRPr lang="en-US" sz="1200" dirty="0"/>
-          </a:p>
-        </p:txBody>
-      </p:sp>
-      <p:sp>
-        <p:nvSpPr>
-          <p:cNvPr id="18" name="content-8-rect-16"/>
-          <p:cNvSpPr/>
-          <p:nvPr/>
-        </p:nvSpPr>
-        <p:spPr>
-          <a:xfrm>
-            <a:off x="6766560" y="1280160"/>
-            <a:ext cx="1920240" cy="1188720"/>
-          </a:xfrm>
-          <a:prstGeom prst="roundRect">
-            <a:avLst>
-              <a:gd name="adj" fmla="val 6154"/>
-            </a:avLst>
-          </a:prstGeom>
-          <a:solidFill>
-            <a:schemeClr val="bg2"/>
-          </a:solidFill>
-          <a:ln/>
-        </p:spPr>
-      </p:sp>
-      <p:sp>
-        <p:nvSpPr>
-          <p:cNvPr id="19" name="content-8-text-17"/>
-          <p:cNvSpPr txBox="1"/>
-          <p:nvPr/>
-        </p:nvSpPr>
-        <p:spPr>
-          <a:xfrm>
-            <a:off x="6903720" y="1371600"/>
-            <a:ext cx="1645920" cy="594360"/>
-          </a:xfrm>
-          <a:prstGeom prst="rect">
-            <a:avLst/>
-          </a:prstGeom>
-          <a:noFill/>
-          <a:ln/>
-        </p:spPr>
-        <p:txBody>
-          <a:bodyPr wrap="square" lIns="0" tIns="0" rIns="0" bIns="0" rtlCol="0" anchor="ctr"/>
-          <a:lstStyle/>
-          <a:p>
-            <a:pPr algn="l" indent="0" marL="0">
-              <a:buNone/>
-            </a:pPr>
-            <a:r>
-              <a:rPr lang="en-US" sz="3200" b="1" dirty="0">
-                <a:solidFill>
-                  <a:schemeClr val="accent1"/>
-                </a:solidFill>
-                <a:latin typeface="+mj-lt" pitchFamily="34" charset="0"/>
-                <a:ea typeface="+mj-lt" pitchFamily="34" charset="-122"/>
-                <a:cs typeface="+mj-lt" pitchFamily="34" charset="-120"/>
-              </a:rPr>
-              <a:t>93</a:t>
-            </a:r>
-            <a:endParaRPr lang="en-US" sz="3200" dirty="0"/>
-          </a:p>
-        </p:txBody>
-      </p:sp>
-      <p:sp>
-        <p:nvSpPr>
-          <p:cNvPr id="20" name="content-8-text-18"/>
-          <p:cNvSpPr txBox="1"/>
-          <p:nvPr/>
-        </p:nvSpPr>
-        <p:spPr>
-          <a:xfrm>
-            <a:off x="6903720" y="1965960"/>
-            <a:ext cx="1645920" cy="457200"/>
-          </a:xfrm>
-          <a:prstGeom prst="rect">
-            <a:avLst/>
-          </a:prstGeom>
-          <a:noFill/>
-          <a:ln/>
-        </p:spPr>
-        <p:txBody>
-          <a:bodyPr wrap="square" lIns="0" tIns="0" rIns="0" bIns="0" rtlCol="0" anchor="t"/>
-          <a:lstStyle/>
-          <a:p>
-            <a:pPr algn="l" indent="0" marL="0">
-              <a:buNone/>
-            </a:pPr>
-            <a:r>
-              <a:rPr lang="en-US" sz="1200" dirty="0">
-                <a:solidFill>
-                  <a:schemeClr val="tx2"/>
-                </a:solidFill>
-              </a:rPr>
-              <a:t>frontend tests</a:t>
-            </a:r>
-            <a:endParaRPr lang="en-US" sz="1200" dirty="0"/>
-          </a:p>
-        </p:txBody>
-      </p:sp>
-      <p:sp>
-        <p:nvSpPr>
-          <p:cNvPr id="21" name="content-8-rect-19"/>
-          <p:cNvSpPr/>
-          <p:nvPr/>
-        </p:nvSpPr>
-        <p:spPr>
-          <a:xfrm>
-            <a:off x="4663440" y="2651760"/>
-            <a:ext cx="1920240" cy="1188720"/>
-          </a:xfrm>
-          <a:prstGeom prst="roundRect">
-            <a:avLst>
-              <a:gd name="adj" fmla="val 6154"/>
-            </a:avLst>
-          </a:prstGeom>
-          <a:solidFill>
-            <a:schemeClr val="bg2"/>
-          </a:solidFill>
-          <a:ln/>
-        </p:spPr>
-      </p:sp>
-      <p:sp>
-        <p:nvSpPr>
-          <p:cNvPr id="22" name="content-8-text-20"/>
-          <p:cNvSpPr txBox="1"/>
-          <p:nvPr/>
-        </p:nvSpPr>
-        <p:spPr>
-          <a:xfrm>
-            <a:off x="4800600" y="2743200"/>
-            <a:ext cx="1645920" cy="594360"/>
-          </a:xfrm>
-          <a:prstGeom prst="rect">
-            <a:avLst/>
-          </a:prstGeom>
-          <a:noFill/>
-          <a:ln/>
-        </p:spPr>
-        <p:txBody>
-          <a:bodyPr wrap="square" lIns="0" tIns="0" rIns="0" bIns="0" rtlCol="0" anchor="ctr"/>
-          <a:lstStyle/>
-          <a:p>
-            <a:pPr algn="l" indent="0" marL="0">
-              <a:buNone/>
-            </a:pPr>
-            <a:r>
-              <a:rPr lang="en-US" sz="3200" b="1" dirty="0">
-                <a:solidFill>
-                  <a:schemeClr val="accent1"/>
-                </a:solidFill>
-                <a:latin typeface="+mj-lt" pitchFamily="34" charset="0"/>
-                <a:ea typeface="+mj-lt" pitchFamily="34" charset="-122"/>
-                <a:cs typeface="+mj-lt" pitchFamily="34" charset="-120"/>
-              </a:rPr>
-              <a:t>24 of 24</a:t>
-            </a:r>
-            <a:endParaRPr lang="en-US" sz="3200" dirty="0"/>
-          </a:p>
-        </p:txBody>
-      </p:sp>
-      <p:sp>
-        <p:nvSpPr>
-          <p:cNvPr id="23" name="content-8-text-21"/>
-          <p:cNvSpPr txBox="1"/>
-          <p:nvPr/>
-        </p:nvSpPr>
-        <p:spPr>
-          <a:xfrm>
-            <a:off x="4800600" y="3337560"/>
-            <a:ext cx="1645920" cy="457200"/>
-          </a:xfrm>
-          <a:prstGeom prst="rect">
-            <a:avLst/>
-          </a:prstGeom>
-          <a:noFill/>
-          <a:ln/>
-        </p:spPr>
-        <p:txBody>
-          <a:bodyPr wrap="square" lIns="0" tIns="0" rIns="0" bIns="0" rtlCol="0" anchor="t"/>
-          <a:lstStyle/>
-          <a:p>
-            <a:pPr algn="l" indent="0" marL="0">
-              <a:buNone/>
-            </a:pPr>
-            <a:r>
-              <a:rPr lang="en-US" sz="1200" dirty="0">
-                <a:solidFill>
-                  <a:schemeClr val="tx2"/>
-                </a:solidFill>
-              </a:rPr>
-              <a:t>blueprint scenarios mapped to tests</a:t>
-            </a:r>
-            <a:endParaRPr lang="en-US" sz="1200" dirty="0"/>
-          </a:p>
-        </p:txBody>
-      </p:sp>
-      <p:sp>
-        <p:nvSpPr>
-          <p:cNvPr id="24" name="content-8-rect-22"/>
-          <p:cNvSpPr/>
-          <p:nvPr/>
-        </p:nvSpPr>
-        <p:spPr>
-          <a:xfrm>
-            <a:off x="6766560" y="2651760"/>
-            <a:ext cx="1920240" cy="1188720"/>
-          </a:xfrm>
-          <a:prstGeom prst="roundRect">
-            <a:avLst>
-              <a:gd name="adj" fmla="val 6154"/>
-            </a:avLst>
-          </a:prstGeom>
-          <a:solidFill>
-            <a:schemeClr val="bg2"/>
-          </a:solidFill>
-          <a:ln/>
-        </p:spPr>
-      </p:sp>
-      <p:sp>
-        <p:nvSpPr>
-          <p:cNvPr id="25" name="content-8-text-23"/>
-          <p:cNvSpPr txBox="1"/>
-          <p:nvPr/>
-        </p:nvSpPr>
-        <p:spPr>
-          <a:xfrm>
-            <a:off x="6903720" y="2743200"/>
-            <a:ext cx="1645920" cy="594360"/>
-          </a:xfrm>
-          <a:prstGeom prst="rect">
-            <a:avLst/>
-          </a:prstGeom>
-          <a:noFill/>
-          <a:ln/>
-        </p:spPr>
-        <p:txBody>
-          <a:bodyPr wrap="square" lIns="0" tIns="0" rIns="0" bIns="0" rtlCol="0" anchor="ctr"/>
-          <a:lstStyle/>
-          <a:p>
-            <a:pPr algn="l" indent="0" marL="0">
-              <a:buNone/>
-            </a:pPr>
-            <a:r>
-              <a:rPr lang="en-US" sz="3200" b="1" dirty="0">
-                <a:solidFill>
-                  <a:schemeClr val="accent1"/>
-                </a:solidFill>
-                <a:latin typeface="+mj-lt" pitchFamily="34" charset="0"/>
-                <a:ea typeface="+mj-lt" pitchFamily="34" charset="-122"/>
-                <a:cs typeface="+mj-lt" pitchFamily="34" charset="-120"/>
-              </a:rPr>
-              <a:t>21</a:t>
-            </a:r>
-            <a:endParaRPr lang="en-US" sz="3200" dirty="0"/>
-          </a:p>
-        </p:txBody>
-      </p:sp>
-      <p:sp>
-        <p:nvSpPr>
-          <p:cNvPr id="26" name="content-8-text-24"/>
-          <p:cNvSpPr txBox="1"/>
-          <p:nvPr/>
-        </p:nvSpPr>
-        <p:spPr>
-          <a:xfrm>
-            <a:off x="6903720" y="3337560"/>
-            <a:ext cx="1645920" cy="457200"/>
-          </a:xfrm>
-          <a:prstGeom prst="rect">
-            <a:avLst/>
-          </a:prstGeom>
-          <a:noFill/>
-          <a:ln/>
-        </p:spPr>
-        <p:txBody>
-          <a:bodyPr wrap="square" lIns="0" tIns="0" rIns="0" bIns="0" rtlCol="0" anchor="t"/>
-          <a:lstStyle/>
-          <a:p>
-            <a:pPr algn="l" indent="0" marL="0">
-              <a:buNone/>
-            </a:pPr>
-            <a:r>
-              <a:rPr lang="en-US" sz="1200" dirty="0">
-                <a:solidFill>
-                  <a:schemeClr val="tx2"/>
-                </a:solidFill>
-              </a:rPr>
-              <a:t>known risks listed openly</a:t>
-            </a:r>
-            <a:endParaRPr lang="en-US" sz="1200" dirty="0"/>
-          </a:p>
-        </p:txBody>
-      </p:sp>
-      <p:sp>
-        <p:nvSpPr>
-          <p:cNvPr id="27" name="content-8-text-25"/>
-          <p:cNvSpPr txBox="1"/>
-          <p:nvPr/>
-        </p:nvSpPr>
-        <p:spPr>
-          <a:xfrm>
-            <a:off x="4663440" y="4069080"/>
-            <a:ext cx="4023360" cy="685800"/>
-          </a:xfrm>
-          <a:prstGeom prst="rect">
-            <a:avLst/>
-          </a:prstGeom>
-          <a:noFill/>
-          <a:ln/>
-        </p:spPr>
-        <p:txBody>
-          <a:bodyPr wrap="square" lIns="0" tIns="0" rIns="0" bIns="0" rtlCol="0" anchor="t"/>
-          <a:lstStyle/>
-          <a:p>
-            <a:pPr algn="l" indent="0" marL="0">
-              <a:buNone/>
-            </a:pPr>
-            <a:r>
-              <a:rPr lang="en-US" sz="1200" dirty="0">
-                <a:solidFill>
-                  <a:schemeClr val="tx2"/>
-                </a:solidFill>
-              </a:rPr>
-              <a:t>Each payment has a compliance report with a hash your browser can check. Every threat has a test: docs/SECURITY.md</a:t>
-            </a:r>
-            <a:endParaRPr lang="en-US" sz="1200" dirty="0"/>
           </a:p>
         </p:txBody>
       </p:sp>
@@ -9431,7 +9443,7 @@
                 <a:ea typeface="+mj-lt" pitchFamily="34" charset="-122"/>
                 <a:cs typeface="+mj-lt" pitchFamily="34" charset="-120"/>
               </a:rPr>
-              <a:t>Honest by design</a:t>
+              <a:t>Security you can verify</a:t>
             </a:r>
             <a:endParaRPr lang="en-US" sz="3600" dirty="0"/>
           </a:p>
@@ -9439,156 +9451,164 @@
       </p:sp>
       <p:sp>
         <p:nvSpPr>
-          <p:cNvPr id="3" name="content-9-text-1"/>
-          <p:cNvSpPr txBox="1"/>
-          <p:nvPr/>
-        </p:nvSpPr>
-        <p:spPr>
-          <a:xfrm>
-            <a:off x="457200" y="1097280"/>
-            <a:ext cx="8229600" cy="365760"/>
-          </a:xfrm>
-          <a:prstGeom prst="rect">
-            <a:avLst/>
-          </a:prstGeom>
-          <a:noFill/>
-          <a:ln/>
-        </p:spPr>
-        <p:txBody>
-          <a:bodyPr wrap="square" lIns="0" tIns="0" rIns="0" bIns="0" rtlCol="0" anchor="ctr"/>
-          <a:lstStyle/>
-          <a:p>
-            <a:pPr algn="l" indent="0" marL="0">
-              <a:buNone/>
-            </a:pPr>
-            <a:r>
-              <a:rPr lang="en-US" sz="1600" b="1" dirty="0">
-                <a:solidFill>
-                  <a:schemeClr val="tx1"/>
-                </a:solidFill>
-              </a:rPr>
-              <a:t>Every simulated part is labelled. Every unverified rule carries a badge.</a:t>
-            </a:r>
-            <a:endParaRPr lang="en-US" sz="1600" dirty="0"/>
-          </a:p>
-        </p:txBody>
-      </p:sp>
-      <p:sp>
-        <p:nvSpPr>
-          <p:cNvPr id="4" name="content-9-rect-2"/>
+          <p:cNvPr id="3" name="content-9-rect-1"/>
           <p:cNvSpPr/>
           <p:nvPr/>
         </p:nvSpPr>
         <p:spPr>
           <a:xfrm>
-            <a:off x="457200" y="1554480"/>
-            <a:ext cx="3803904" cy="2999232"/>
+            <a:off x="457200" y="1280160"/>
+            <a:ext cx="4023360" cy="402336"/>
           </a:xfrm>
           <a:prstGeom prst="roundRect">
             <a:avLst>
-              <a:gd name="adj" fmla="val 1829"/>
+              <a:gd name="adj" fmla="val 13636"/>
             </a:avLst>
           </a:prstGeom>
           <a:solidFill>
-            <a:schemeClr val="bg1"/>
+            <a:schemeClr val="bg2"/>
           </a:solidFill>
-          <a:ln w="9525">
-            <a:solidFill>
-              <a:schemeClr val="accent5"/>
-            </a:solidFill>
-            <a:prstDash val="solid"/>
-          </a:ln>
-          <a:effectLst>
-            <a:outerShdw sx="100000" sy="100000" kx="0" ky="0" algn="bl" rotWithShape="0" blurRad="101600" dist="25400" dir="5400000">
-              <a:srgbClr val="0B2545">
-                <a:alpha val="18000"/>
-              </a:srgbClr>
-            </a:outerShdw>
-          </a:effectLst>
-        </p:spPr>
-      </p:sp>
-      <p:pic>
-        <p:nvPicPr>
-          <p:cNvPr id="5" name="content-9-image-3" descr="Sandbox screen listing what is simulated">    </p:cNvPr>
-          <p:cNvPicPr>
-            <a:picLocks noChangeAspect="1"/>
-          </p:cNvPicPr>
-          <p:nvPr/>
-        </p:nvPicPr>
-        <p:blipFill>
-          <a:blip r:embed="rId1"/>
-          <a:stretch>
-            <a:fillRect/>
-          </a:stretch>
-        </p:blipFill>
-        <p:spPr>
-          <a:xfrm>
-            <a:off x="530352" y="1627632"/>
-            <a:ext cx="3657600" cy="2852928"/>
-          </a:xfrm>
-          <a:prstGeom prst="rect">
-            <a:avLst/>
-          </a:prstGeom>
-        </p:spPr>
-      </p:pic>
-      <p:sp>
-        <p:nvSpPr>
-          <p:cNvPr id="6" name="content-9-rect-4"/>
+          <a:ln/>
+        </p:spPr>
+      </p:sp>
+      <p:sp>
+        <p:nvSpPr>
+          <p:cNvPr id="4" name="content-9-text-2"/>
+          <p:cNvSpPr txBox="1"/>
+          <p:nvPr/>
+        </p:nvSpPr>
+        <p:spPr>
+          <a:xfrm>
+            <a:off x="594360" y="1280160"/>
+            <a:ext cx="3794760" cy="402336"/>
+          </a:xfrm>
+          <a:prstGeom prst="rect">
+            <a:avLst/>
+          </a:prstGeom>
+          <a:noFill/>
+          <a:ln/>
+        </p:spPr>
+        <p:txBody>
+          <a:bodyPr wrap="square" lIns="0" tIns="0" rIns="0" bIns="0" rtlCol="0" anchor="ctr"/>
+          <a:lstStyle/>
+          <a:p>
+            <a:pPr algn="l" indent="0" marL="0">
+              <a:buNone/>
+            </a:pPr>
+            <a:r>
+              <a:rPr lang="en-US" sz="1400" b="1" dirty="0">
+                <a:solidFill>
+                  <a:schemeClr val="tx1"/>
+                </a:solidFill>
+              </a:rPr>
+              <a:t>Public:</a:t>
+            </a:r>
+            <a:pPr algn="l" indent="0" marL="0">
+              <a:buNone/>
+            </a:pPr>
+            <a:r>
+              <a:rPr lang="en-US" sz="1400" dirty="0">
+                <a:solidFill>
+                  <a:schemeClr val="tx1"/>
+                </a:solidFill>
+              </a:rPr>
+              <a:t> sign in, health</a:t>
+            </a:r>
+            <a:endParaRPr lang="en-US" sz="1400" dirty="0"/>
+          </a:p>
+        </p:txBody>
+      </p:sp>
+      <p:sp>
+        <p:nvSpPr>
+          <p:cNvPr id="5" name="content-9-rect-3"/>
           <p:cNvSpPr/>
           <p:nvPr/>
         </p:nvSpPr>
         <p:spPr>
           <a:xfrm>
-            <a:off x="4882896" y="1554480"/>
-            <a:ext cx="3803904" cy="2999232"/>
+            <a:off x="457200" y="1755648"/>
+            <a:ext cx="4023360" cy="402336"/>
           </a:xfrm>
           <a:prstGeom prst="roundRect">
             <a:avLst>
-              <a:gd name="adj" fmla="val 1829"/>
+              <a:gd name="adj" fmla="val 13636"/>
             </a:avLst>
           </a:prstGeom>
           <a:solidFill>
-            <a:schemeClr val="bg1"/>
+            <a:schemeClr val="bg2"/>
           </a:solidFill>
-          <a:ln w="9525">
-            <a:solidFill>
-              <a:schemeClr val="accent5"/>
-            </a:solidFill>
-            <a:prstDash val="solid"/>
-          </a:ln>
-          <a:effectLst>
-            <a:outerShdw sx="100000" sy="100000" kx="0" ky="0" algn="bl" rotWithShape="0" blurRad="101600" dist="25400" dir="5400000">
-              <a:srgbClr val="0B2545">
-                <a:alpha val="18000"/>
-              </a:srgbClr>
-            </a:outerShdw>
-          </a:effectLst>
-        </p:spPr>
-      </p:sp>
-      <p:pic>
-        <p:nvPicPr>
-          <p:cNvPr id="7" name="content-9-image-5" descr="Compliance report whose hash verifies in the browser">    </p:cNvPr>
-          <p:cNvPicPr>
-            <a:picLocks noChangeAspect="1"/>
-          </p:cNvPicPr>
-          <p:nvPr/>
-        </p:nvPicPr>
-        <p:blipFill>
-          <a:blip r:embed="rId2"/>
-          <a:stretch>
-            <a:fillRect/>
-          </a:stretch>
-        </p:blipFill>
-        <p:spPr>
-          <a:xfrm>
-            <a:off x="4956048" y="1627632"/>
-            <a:ext cx="3657600" cy="2852928"/>
-          </a:xfrm>
-          <a:prstGeom prst="rect">
-            <a:avLst/>
-          </a:prstGeom>
-        </p:spPr>
-      </p:pic>
+          <a:ln/>
+        </p:spPr>
+      </p:sp>
+      <p:sp>
+        <p:nvSpPr>
+          <p:cNvPr id="6" name="content-9-text-4"/>
+          <p:cNvSpPr txBox="1"/>
+          <p:nvPr/>
+        </p:nvSpPr>
+        <p:spPr>
+          <a:xfrm>
+            <a:off x="594360" y="1755648"/>
+            <a:ext cx="3794760" cy="402336"/>
+          </a:xfrm>
+          <a:prstGeom prst="rect">
+            <a:avLst/>
+          </a:prstGeom>
+          <a:noFill/>
+          <a:ln/>
+        </p:spPr>
+        <p:txBody>
+          <a:bodyPr wrap="square" lIns="0" tIns="0" rIns="0" bIns="0" rtlCol="0" anchor="ctr"/>
+          <a:lstStyle/>
+          <a:p>
+            <a:pPr algn="l" indent="0" marL="0">
+              <a:buNone/>
+            </a:pPr>
+            <a:r>
+              <a:rPr lang="en-US" sz="1400" b="1" dirty="0">
+                <a:solidFill>
+                  <a:schemeClr val="tx1"/>
+                </a:solidFill>
+              </a:rPr>
+              <a:t>Read:</a:t>
+            </a:r>
+            <a:pPr algn="l" indent="0" marL="0">
+              <a:buNone/>
+            </a:pPr>
+            <a:r>
+              <a:rPr lang="en-US" sz="1400" dirty="0">
+                <a:solidFill>
+                  <a:schemeClr val="tx1"/>
+                </a:solidFill>
+              </a:rPr>
+              <a:t> own household only</a:t>
+            </a:r>
+            <a:endParaRPr lang="en-US" sz="1400" dirty="0"/>
+          </a:p>
+        </p:txBody>
+      </p:sp>
+      <p:sp>
+        <p:nvSpPr>
+          <p:cNvPr id="7" name="content-9-rect-5"/>
+          <p:cNvSpPr/>
+          <p:nvPr/>
+        </p:nvSpPr>
+        <p:spPr>
+          <a:xfrm>
+            <a:off x="457200" y="2231136"/>
+            <a:ext cx="4023360" cy="402336"/>
+          </a:xfrm>
+          <a:prstGeom prst="roundRect">
+            <a:avLst>
+              <a:gd name="adj" fmla="val 13636"/>
+            </a:avLst>
+          </a:prstGeom>
+          <a:solidFill>
+            <a:schemeClr val="bg2"/>
+          </a:solidFill>
+          <a:ln/>
+        </p:spPr>
+      </p:sp>
       <p:sp>
         <p:nvSpPr>
           <p:cNvPr id="8" name="content-9-text-6"/>
@@ -9597,8 +9617,323 @@
         </p:nvSpPr>
         <p:spPr>
           <a:xfrm>
-            <a:off x="457200" y="4590288"/>
-            <a:ext cx="3803904" cy="274320"/>
+            <a:off x="594360" y="2231136"/>
+            <a:ext cx="3794760" cy="402336"/>
+          </a:xfrm>
+          <a:prstGeom prst="rect">
+            <a:avLst/>
+          </a:prstGeom>
+          <a:noFill/>
+          <a:ln/>
+        </p:spPr>
+        <p:txBody>
+          <a:bodyPr wrap="square" lIns="0" tIns="0" rIns="0" bIns="0" rtlCol="0" anchor="ctr"/>
+          <a:lstStyle/>
+          <a:p>
+            <a:pPr algn="l" indent="0" marL="0">
+              <a:buNone/>
+            </a:pPr>
+            <a:r>
+              <a:rPr lang="en-US" sz="1400" b="1" dirty="0">
+                <a:solidFill>
+                  <a:schemeClr val="tx1"/>
+                </a:solidFill>
+              </a:rPr>
+              <a:t>Prepare:</a:t>
+            </a:r>
+            <a:pPr algn="l" indent="0" marL="0">
+              <a:buNone/>
+            </a:pPr>
+            <a:r>
+              <a:rPr lang="en-US" sz="1400" dirty="0">
+                <a:solidFill>
+                  <a:schemeClr val="tx1"/>
+                </a:solidFill>
+              </a:rPr>
+              <a:t> drafts, recipients, documents</a:t>
+            </a:r>
+            <a:endParaRPr lang="en-US" sz="1400" dirty="0"/>
+          </a:p>
+        </p:txBody>
+      </p:sp>
+      <p:sp>
+        <p:nvSpPr>
+          <p:cNvPr id="9" name="content-9-rect-7"/>
+          <p:cNvSpPr/>
+          <p:nvPr/>
+        </p:nvSpPr>
+        <p:spPr>
+          <a:xfrm>
+            <a:off x="457200" y="2706624"/>
+            <a:ext cx="4023360" cy="402336"/>
+          </a:xfrm>
+          <a:prstGeom prst="roundRect">
+            <a:avLst>
+              <a:gd name="adj" fmla="val 13636"/>
+            </a:avLst>
+          </a:prstGeom>
+          <a:solidFill>
+            <a:schemeClr val="accent1"/>
+          </a:solidFill>
+          <a:ln/>
+        </p:spPr>
+      </p:sp>
+      <p:sp>
+        <p:nvSpPr>
+          <p:cNvPr id="10" name="content-9-text-8"/>
+          <p:cNvSpPr txBox="1"/>
+          <p:nvPr/>
+        </p:nvSpPr>
+        <p:spPr>
+          <a:xfrm>
+            <a:off x="594360" y="2706624"/>
+            <a:ext cx="3794760" cy="402336"/>
+          </a:xfrm>
+          <a:prstGeom prst="rect">
+            <a:avLst/>
+          </a:prstGeom>
+          <a:noFill/>
+          <a:ln/>
+        </p:spPr>
+        <p:txBody>
+          <a:bodyPr wrap="square" lIns="0" tIns="0" rIns="0" bIns="0" rtlCol="0" anchor="ctr"/>
+          <a:lstStyle/>
+          <a:p>
+            <a:pPr algn="l" indent="0" marL="0">
+              <a:buNone/>
+            </a:pPr>
+            <a:r>
+              <a:rPr lang="en-US" sz="1400" b="1" dirty="0">
+                <a:solidFill>
+                  <a:schemeClr val="bg1"/>
+                </a:solidFill>
+              </a:rPr>
+              <a:t>Decide:</a:t>
+            </a:r>
+            <a:pPr algn="l" indent="0" marL="0">
+              <a:buNone/>
+            </a:pPr>
+            <a:r>
+              <a:rPr lang="en-US" sz="1400" dirty="0">
+                <a:solidFill>
+                  <a:schemeClr val="bg1"/>
+                </a:solidFill>
+              </a:rPr>
+              <a:t> human parent with fresh MFA</a:t>
+            </a:r>
+            <a:endParaRPr lang="en-US" sz="1400" dirty="0"/>
+          </a:p>
+        </p:txBody>
+      </p:sp>
+      <p:sp>
+        <p:nvSpPr>
+          <p:cNvPr id="11" name="content-9-rect-9"/>
+          <p:cNvSpPr/>
+          <p:nvPr/>
+        </p:nvSpPr>
+        <p:spPr>
+          <a:xfrm>
+            <a:off x="457200" y="3182112"/>
+            <a:ext cx="4023360" cy="402336"/>
+          </a:xfrm>
+          <a:prstGeom prst="roundRect">
+            <a:avLst>
+              <a:gd name="adj" fmla="val 13636"/>
+            </a:avLst>
+          </a:prstGeom>
+          <a:solidFill>
+            <a:schemeClr val="bg2"/>
+          </a:solidFill>
+          <a:ln/>
+        </p:spPr>
+      </p:sp>
+      <p:sp>
+        <p:nvSpPr>
+          <p:cNvPr id="12" name="content-9-text-10"/>
+          <p:cNvSpPr txBox="1"/>
+          <p:nvPr/>
+        </p:nvSpPr>
+        <p:spPr>
+          <a:xfrm>
+            <a:off x="594360" y="3182112"/>
+            <a:ext cx="3794760" cy="402336"/>
+          </a:xfrm>
+          <a:prstGeom prst="rect">
+            <a:avLst/>
+          </a:prstGeom>
+          <a:noFill/>
+          <a:ln/>
+        </p:spPr>
+        <p:txBody>
+          <a:bodyPr wrap="square" lIns="0" tIns="0" rIns="0" bIns="0" rtlCol="0" anchor="ctr"/>
+          <a:lstStyle/>
+          <a:p>
+            <a:pPr algn="l" indent="0" marL="0">
+              <a:buNone/>
+            </a:pPr>
+            <a:r>
+              <a:rPr lang="en-US" sz="1400" b="1" dirty="0">
+                <a:solidFill>
+                  <a:schemeClr val="tx1"/>
+                </a:solidFill>
+              </a:rPr>
+              <a:t>Administer:</a:t>
+            </a:r>
+            <a:pPr algn="l" indent="0" marL="0">
+              <a:buNone/>
+            </a:pPr>
+            <a:r>
+              <a:rPr lang="en-US" sz="1400" dirty="0">
+                <a:solidFill>
+                  <a:schemeClr val="tx1"/>
+                </a:solidFill>
+              </a:rPr>
+              <a:t> reviewer rules and Verify</a:t>
+            </a:r>
+            <a:endParaRPr lang="en-US" sz="1400" dirty="0"/>
+          </a:p>
+        </p:txBody>
+      </p:sp>
+      <p:sp>
+        <p:nvSpPr>
+          <p:cNvPr id="13" name="content-9-rect-11"/>
+          <p:cNvSpPr/>
+          <p:nvPr/>
+        </p:nvSpPr>
+        <p:spPr>
+          <a:xfrm>
+            <a:off x="457200" y="3657600"/>
+            <a:ext cx="4023360" cy="402336"/>
+          </a:xfrm>
+          <a:prstGeom prst="roundRect">
+            <a:avLst>
+              <a:gd name="adj" fmla="val 13636"/>
+            </a:avLst>
+          </a:prstGeom>
+          <a:solidFill>
+            <a:schemeClr val="accent3"/>
+          </a:solidFill>
+          <a:ln/>
+        </p:spPr>
+      </p:sp>
+      <p:sp>
+        <p:nvSpPr>
+          <p:cNvPr id="14" name="content-9-text-12"/>
+          <p:cNvSpPr txBox="1"/>
+          <p:nvPr/>
+        </p:nvSpPr>
+        <p:spPr>
+          <a:xfrm>
+            <a:off x="594360" y="3657600"/>
+            <a:ext cx="3794760" cy="402336"/>
+          </a:xfrm>
+          <a:prstGeom prst="rect">
+            <a:avLst/>
+          </a:prstGeom>
+          <a:noFill/>
+          <a:ln/>
+        </p:spPr>
+        <p:txBody>
+          <a:bodyPr wrap="square" lIns="0" tIns="0" rIns="0" bIns="0" rtlCol="0" anchor="ctr"/>
+          <a:lstStyle/>
+          <a:p>
+            <a:pPr algn="l" indent="0" marL="0">
+              <a:buNone/>
+            </a:pPr>
+            <a:r>
+              <a:rPr lang="en-US" sz="1400" b="1" dirty="0">
+                <a:solidFill>
+                  <a:schemeClr val="bg1"/>
+                </a:solidFill>
+              </a:rPr>
+              <a:t>Never for the AI:</a:t>
+            </a:r>
+            <a:pPr algn="l" indent="0" marL="0">
+              <a:buNone/>
+            </a:pPr>
+            <a:r>
+              <a:rPr lang="en-US" sz="1400" dirty="0">
+                <a:solidFill>
+                  <a:schemeClr val="bg1"/>
+                </a:solidFill>
+              </a:rPr>
+              <a:t> approve, cancel, limits</a:t>
+            </a:r>
+            <a:endParaRPr lang="en-US" sz="1400" dirty="0"/>
+          </a:p>
+        </p:txBody>
+      </p:sp>
+      <p:sp>
+        <p:nvSpPr>
+          <p:cNvPr id="15" name="content-9-rect-13"/>
+          <p:cNvSpPr/>
+          <p:nvPr/>
+        </p:nvSpPr>
+        <p:spPr>
+          <a:xfrm>
+            <a:off x="4663440" y="1280160"/>
+            <a:ext cx="1920240" cy="1188720"/>
+          </a:xfrm>
+          <a:prstGeom prst="roundRect">
+            <a:avLst>
+              <a:gd name="adj" fmla="val 6154"/>
+            </a:avLst>
+          </a:prstGeom>
+          <a:solidFill>
+            <a:schemeClr val="bg2"/>
+          </a:solidFill>
+          <a:ln/>
+        </p:spPr>
+      </p:sp>
+      <p:sp>
+        <p:nvSpPr>
+          <p:cNvPr id="16" name="content-9-text-14"/>
+          <p:cNvSpPr txBox="1"/>
+          <p:nvPr/>
+        </p:nvSpPr>
+        <p:spPr>
+          <a:xfrm>
+            <a:off x="4800600" y="1371600"/>
+            <a:ext cx="1645920" cy="594360"/>
+          </a:xfrm>
+          <a:prstGeom prst="rect">
+            <a:avLst/>
+          </a:prstGeom>
+          <a:noFill/>
+          <a:ln/>
+        </p:spPr>
+        <p:txBody>
+          <a:bodyPr wrap="square" lIns="0" tIns="0" rIns="0" bIns="0" rtlCol="0" anchor="ctr"/>
+          <a:lstStyle/>
+          <a:p>
+            <a:pPr algn="l" indent="0" marL="0">
+              <a:buNone/>
+            </a:pPr>
+            <a:r>
+              <a:rPr lang="en-US" sz="3200" b="1" dirty="0">
+                <a:solidFill>
+                  <a:schemeClr val="accent1"/>
+                </a:solidFill>
+                <a:latin typeface="+mj-lt" pitchFamily="34" charset="0"/>
+                <a:ea typeface="+mj-lt" pitchFamily="34" charset="-122"/>
+                <a:cs typeface="+mj-lt" pitchFamily="34" charset="-120"/>
+              </a:rPr>
+              <a:t>897</a:t>
+            </a:r>
+            <a:endParaRPr lang="en-US" sz="3200" dirty="0"/>
+          </a:p>
+        </p:txBody>
+      </p:sp>
+      <p:sp>
+        <p:nvSpPr>
+          <p:cNvPr id="17" name="content-9-text-15"/>
+          <p:cNvSpPr txBox="1"/>
+          <p:nvPr/>
+        </p:nvSpPr>
+        <p:spPr>
+          <a:xfrm>
+            <a:off x="4800600" y="1965960"/>
+            <a:ext cx="1645920" cy="457200"/>
           </a:xfrm>
           <a:prstGeom prst="rect">
             <a:avLst/>
@@ -9614,27 +9949,88 @@
               <a:buNone/>
             </a:pPr>
             <a:r>
-              <a:rPr lang="en-US" sz="1100" dirty="0">
+              <a:rPr lang="en-US" sz="1200" dirty="0">
                 <a:solidFill>
                   <a:schemeClr val="tx2"/>
                 </a:solidFill>
               </a:rPr>
-              <a:t>Sandbox screen: what is simulated, how to test it</a:t>
-            </a:r>
-            <a:endParaRPr lang="en-US" sz="1100" dirty="0"/>
-          </a:p>
-        </p:txBody>
-      </p:sp>
-      <p:sp>
-        <p:nvSpPr>
-          <p:cNvPr id="9" name="content-9-text-7"/>
-          <p:cNvSpPr txBox="1"/>
-          <p:nvPr/>
-        </p:nvSpPr>
-        <p:spPr>
-          <a:xfrm>
-            <a:off x="4882896" y="4590288"/>
-            <a:ext cx="3803904" cy="274320"/>
+              <a:t>backend tests, all passing</a:t>
+            </a:r>
+            <a:endParaRPr lang="en-US" sz="1200" dirty="0"/>
+          </a:p>
+        </p:txBody>
+      </p:sp>
+      <p:sp>
+        <p:nvSpPr>
+          <p:cNvPr id="18" name="content-9-rect-16"/>
+          <p:cNvSpPr/>
+          <p:nvPr/>
+        </p:nvSpPr>
+        <p:spPr>
+          <a:xfrm>
+            <a:off x="6766560" y="1280160"/>
+            <a:ext cx="1920240" cy="1188720"/>
+          </a:xfrm>
+          <a:prstGeom prst="roundRect">
+            <a:avLst>
+              <a:gd name="adj" fmla="val 6154"/>
+            </a:avLst>
+          </a:prstGeom>
+          <a:solidFill>
+            <a:schemeClr val="bg2"/>
+          </a:solidFill>
+          <a:ln/>
+        </p:spPr>
+      </p:sp>
+      <p:sp>
+        <p:nvSpPr>
+          <p:cNvPr id="19" name="content-9-text-17"/>
+          <p:cNvSpPr txBox="1"/>
+          <p:nvPr/>
+        </p:nvSpPr>
+        <p:spPr>
+          <a:xfrm>
+            <a:off x="6903720" y="1371600"/>
+            <a:ext cx="1645920" cy="594360"/>
+          </a:xfrm>
+          <a:prstGeom prst="rect">
+            <a:avLst/>
+          </a:prstGeom>
+          <a:noFill/>
+          <a:ln/>
+        </p:spPr>
+        <p:txBody>
+          <a:bodyPr wrap="square" lIns="0" tIns="0" rIns="0" bIns="0" rtlCol="0" anchor="ctr"/>
+          <a:lstStyle/>
+          <a:p>
+            <a:pPr algn="l" indent="0" marL="0">
+              <a:buNone/>
+            </a:pPr>
+            <a:r>
+              <a:rPr lang="en-US" sz="3200" b="1" dirty="0">
+                <a:solidFill>
+                  <a:schemeClr val="accent1"/>
+                </a:solidFill>
+                <a:latin typeface="+mj-lt" pitchFamily="34" charset="0"/>
+                <a:ea typeface="+mj-lt" pitchFamily="34" charset="-122"/>
+                <a:cs typeface="+mj-lt" pitchFamily="34" charset="-120"/>
+              </a:rPr>
+              <a:t>126</a:t>
+            </a:r>
+            <a:endParaRPr lang="en-US" sz="3200" dirty="0"/>
+          </a:p>
+        </p:txBody>
+      </p:sp>
+      <p:sp>
+        <p:nvSpPr>
+          <p:cNvPr id="20" name="content-9-text-18"/>
+          <p:cNvSpPr txBox="1"/>
+          <p:nvPr/>
+        </p:nvSpPr>
+        <p:spPr>
+          <a:xfrm>
+            <a:off x="6903720" y="1965960"/>
+            <a:ext cx="1645920" cy="457200"/>
           </a:xfrm>
           <a:prstGeom prst="rect">
             <a:avLst/>
@@ -9650,14 +10046,244 @@
               <a:buNone/>
             </a:pPr>
             <a:r>
-              <a:rPr lang="en-US" sz="1100" dirty="0">
+              <a:rPr lang="en-US" sz="1200" dirty="0">
                 <a:solidFill>
                   <a:schemeClr val="tx2"/>
                 </a:solidFill>
               </a:rPr>
-              <a:t>Compliance report: the hash verifies in the browser</a:t>
-            </a:r>
-            <a:endParaRPr lang="en-US" sz="1100" dirty="0"/>
+              <a:t>frontend tests</a:t>
+            </a:r>
+            <a:endParaRPr lang="en-US" sz="1200" dirty="0"/>
+          </a:p>
+        </p:txBody>
+      </p:sp>
+      <p:sp>
+        <p:nvSpPr>
+          <p:cNvPr id="21" name="content-9-rect-19"/>
+          <p:cNvSpPr/>
+          <p:nvPr/>
+        </p:nvSpPr>
+        <p:spPr>
+          <a:xfrm>
+            <a:off x="4663440" y="2651760"/>
+            <a:ext cx="1920240" cy="1188720"/>
+          </a:xfrm>
+          <a:prstGeom prst="roundRect">
+            <a:avLst>
+              <a:gd name="adj" fmla="val 6154"/>
+            </a:avLst>
+          </a:prstGeom>
+          <a:solidFill>
+            <a:schemeClr val="bg2"/>
+          </a:solidFill>
+          <a:ln/>
+        </p:spPr>
+      </p:sp>
+      <p:sp>
+        <p:nvSpPr>
+          <p:cNvPr id="22" name="content-9-text-20"/>
+          <p:cNvSpPr txBox="1"/>
+          <p:nvPr/>
+        </p:nvSpPr>
+        <p:spPr>
+          <a:xfrm>
+            <a:off x="4800600" y="2743200"/>
+            <a:ext cx="1645920" cy="594360"/>
+          </a:xfrm>
+          <a:prstGeom prst="rect">
+            <a:avLst/>
+          </a:prstGeom>
+          <a:noFill/>
+          <a:ln/>
+        </p:spPr>
+        <p:txBody>
+          <a:bodyPr wrap="square" lIns="0" tIns="0" rIns="0" bIns="0" rtlCol="0" anchor="ctr"/>
+          <a:lstStyle/>
+          <a:p>
+            <a:pPr algn="l" indent="0" marL="0">
+              <a:buNone/>
+            </a:pPr>
+            <a:r>
+              <a:rPr lang="en-US" sz="3200" b="1" dirty="0">
+                <a:solidFill>
+                  <a:schemeClr val="accent1"/>
+                </a:solidFill>
+                <a:latin typeface="+mj-lt" pitchFamily="34" charset="0"/>
+                <a:ea typeface="+mj-lt" pitchFamily="34" charset="-122"/>
+                <a:cs typeface="+mj-lt" pitchFamily="34" charset="-120"/>
+              </a:rPr>
+              <a:t>24 of 24</a:t>
+            </a:r>
+            <a:endParaRPr lang="en-US" sz="3200" dirty="0"/>
+          </a:p>
+        </p:txBody>
+      </p:sp>
+      <p:sp>
+        <p:nvSpPr>
+          <p:cNvPr id="23" name="content-9-text-21"/>
+          <p:cNvSpPr txBox="1"/>
+          <p:nvPr/>
+        </p:nvSpPr>
+        <p:spPr>
+          <a:xfrm>
+            <a:off x="4800600" y="3337560"/>
+            <a:ext cx="1645920" cy="457200"/>
+          </a:xfrm>
+          <a:prstGeom prst="rect">
+            <a:avLst/>
+          </a:prstGeom>
+          <a:noFill/>
+          <a:ln/>
+        </p:spPr>
+        <p:txBody>
+          <a:bodyPr wrap="square" lIns="0" tIns="0" rIns="0" bIns="0" rtlCol="0" anchor="t"/>
+          <a:lstStyle/>
+          <a:p>
+            <a:pPr algn="l" indent="0" marL="0">
+              <a:buNone/>
+            </a:pPr>
+            <a:r>
+              <a:rPr lang="en-US" sz="1200" dirty="0">
+                <a:solidFill>
+                  <a:schemeClr val="tx2"/>
+                </a:solidFill>
+              </a:rPr>
+              <a:t>blueprint scenarios mapped to tests</a:t>
+            </a:r>
+            <a:endParaRPr lang="en-US" sz="1200" dirty="0"/>
+          </a:p>
+        </p:txBody>
+      </p:sp>
+      <p:sp>
+        <p:nvSpPr>
+          <p:cNvPr id="24" name="content-9-rect-22"/>
+          <p:cNvSpPr/>
+          <p:nvPr/>
+        </p:nvSpPr>
+        <p:spPr>
+          <a:xfrm>
+            <a:off x="6766560" y="2651760"/>
+            <a:ext cx="1920240" cy="1188720"/>
+          </a:xfrm>
+          <a:prstGeom prst="roundRect">
+            <a:avLst>
+              <a:gd name="adj" fmla="val 6154"/>
+            </a:avLst>
+          </a:prstGeom>
+          <a:solidFill>
+            <a:schemeClr val="bg2"/>
+          </a:solidFill>
+          <a:ln/>
+        </p:spPr>
+      </p:sp>
+      <p:sp>
+        <p:nvSpPr>
+          <p:cNvPr id="25" name="content-9-text-23"/>
+          <p:cNvSpPr txBox="1"/>
+          <p:nvPr/>
+        </p:nvSpPr>
+        <p:spPr>
+          <a:xfrm>
+            <a:off x="6903720" y="2743200"/>
+            <a:ext cx="1645920" cy="594360"/>
+          </a:xfrm>
+          <a:prstGeom prst="rect">
+            <a:avLst/>
+          </a:prstGeom>
+          <a:noFill/>
+          <a:ln/>
+        </p:spPr>
+        <p:txBody>
+          <a:bodyPr wrap="square" lIns="0" tIns="0" rIns="0" bIns="0" rtlCol="0" anchor="ctr"/>
+          <a:lstStyle/>
+          <a:p>
+            <a:pPr algn="l" indent="0" marL="0">
+              <a:buNone/>
+            </a:pPr>
+            <a:r>
+              <a:rPr lang="en-US" sz="3200" b="1" dirty="0">
+                <a:solidFill>
+                  <a:schemeClr val="accent1"/>
+                </a:solidFill>
+                <a:latin typeface="+mj-lt" pitchFamily="34" charset="0"/>
+                <a:ea typeface="+mj-lt" pitchFamily="34" charset="-122"/>
+                <a:cs typeface="+mj-lt" pitchFamily="34" charset="-120"/>
+              </a:rPr>
+              <a:t>31</a:t>
+            </a:r>
+            <a:endParaRPr lang="en-US" sz="3200" dirty="0"/>
+          </a:p>
+        </p:txBody>
+      </p:sp>
+      <p:sp>
+        <p:nvSpPr>
+          <p:cNvPr id="26" name="content-9-text-24"/>
+          <p:cNvSpPr txBox="1"/>
+          <p:nvPr/>
+        </p:nvSpPr>
+        <p:spPr>
+          <a:xfrm>
+            <a:off x="6903720" y="3337560"/>
+            <a:ext cx="1645920" cy="457200"/>
+          </a:xfrm>
+          <a:prstGeom prst="rect">
+            <a:avLst/>
+          </a:prstGeom>
+          <a:noFill/>
+          <a:ln/>
+        </p:spPr>
+        <p:txBody>
+          <a:bodyPr wrap="square" lIns="0" tIns="0" rIns="0" bIns="0" rtlCol="0" anchor="t"/>
+          <a:lstStyle/>
+          <a:p>
+            <a:pPr algn="l" indent="0" marL="0">
+              <a:buNone/>
+            </a:pPr>
+            <a:r>
+              <a:rPr lang="en-US" sz="1200" dirty="0">
+                <a:solidFill>
+                  <a:schemeClr val="tx2"/>
+                </a:solidFill>
+              </a:rPr>
+              <a:t>known risks listed openly</a:t>
+            </a:r>
+            <a:endParaRPr lang="en-US" sz="1200" dirty="0"/>
+          </a:p>
+        </p:txBody>
+      </p:sp>
+      <p:sp>
+        <p:nvSpPr>
+          <p:cNvPr id="27" name="content-9-text-25"/>
+          <p:cNvSpPr txBox="1"/>
+          <p:nvPr/>
+        </p:nvSpPr>
+        <p:spPr>
+          <a:xfrm>
+            <a:off x="4663440" y="4069080"/>
+            <a:ext cx="4023360" cy="685800"/>
+          </a:xfrm>
+          <a:prstGeom prst="rect">
+            <a:avLst/>
+          </a:prstGeom>
+          <a:noFill/>
+          <a:ln/>
+        </p:spPr>
+        <p:txBody>
+          <a:bodyPr wrap="square" lIns="0" tIns="0" rIns="0" bIns="0" rtlCol="0" anchor="t"/>
+          <a:lstStyle/>
+          <a:p>
+            <a:pPr algn="l" indent="0" marL="0">
+              <a:buNone/>
+            </a:pPr>
+            <a:r>
+              <a:rPr lang="en-US" sz="1200" dirty="0">
+                <a:solidFill>
+                  <a:schemeClr val="tx2"/>
+                </a:solidFill>
+              </a:rPr>
+              <a:t>Each payment has a compliance report with a hash your browser can check. Every threat has a test: docs/SECURITY.md</a:t>
+            </a:r>
+            <a:endParaRPr lang="en-US" sz="1200" dirty="0"/>
           </a:p>
         </p:txBody>
       </p:sp>

--- a/submission/StudyRoute_Deck.pptx
+++ b/submission/StudyRoute_Deck.pptx
@@ -16,9 +16,10 @@
     <p:sldId id="264" r:id="rId10"/>
     <p:sldId id="265" r:id="rId11"/>
     <p:sldId id="266" r:id="rId12"/>
+    <p:sldId id="267" r:id="rId13"/>
   </p:sldIdLst>
   <p:notesMasterIdLst>
-    <p:notesMasterId r:id="rId13"/>
+    <p:notesMasterId r:id="rId14"/>
   </p:notesMasterIdLst>
   <p:sldSz cx="9144000" cy="5143500"/>
   <p:notesSz cx="5143500" cy="9144000"/>
@@ -117,35 +118,36 @@
   <p:extLst>
     <p:ext uri="{521415D9-36F7-43E2-AB2F-B90AF26B5E84}">
       <p14:sectionLst xmlns:p14="http://schemas.microsoft.com/office/powerpoint/2010/main">
-        <p14:section name="Opening" id="{1b41d1e7-7d96-5d78-9266-bd4c49342293}">
+        <p14:section name="Opening" id="{8f6a7cd2-70c4-350e-9924-854036d52042}">
           <p14:sldIdLst>
             <p14:sldId id="256"/>
             <p14:sldId id="257"/>
           </p14:sldIdLst>
         </p14:section>
-        <p14:section name="The problem" id="{40048cad-9c50-749e-bbea-d6e46422baab}">
+        <p14:section name="The problem" id="{43005f60-b882-30b3-a560-8157e69fa7f6}">
           <p14:sldIdLst>
             <p14:sldId id="258"/>
             <p14:sldId id="259"/>
           </p14:sldIdLst>
         </p14:section>
-        <p14:section name="The solution" id="{0022fe3d-4005-9fcc-7d2f-13ea3880ca86}">
+        <p14:section name="The solution" id="{43ad35d3-fe50-63ff-5e7e-5a739d8338fc}">
           <p14:sldIdLst>
             <p14:sldId id="260"/>
             <p14:sldId id="261"/>
             <p14:sldId id="262"/>
           </p14:sldIdLst>
         </p14:section>
-        <p14:section name="Trust" id="{0b345073-deeb-a08e-211f-a99db0edcc03}">
+        <p14:section name="Trust" id="{774c281b-b571-e099-1a59-21f1af5e227c}">
           <p14:sldIdLst>
             <p14:sldId id="263"/>
             <p14:sldId id="264"/>
             <p14:sldId id="265"/>
+            <p14:sldId id="266"/>
           </p14:sldIdLst>
         </p14:section>
-        <p14:section name="Close" id="{deca463a-a4d5-b324-a66e-7e1402fac477}">
+        <p14:section name="Close" id="{c6a16924-4fb5-be79-a393-d14675917a89}">
           <p14:sldIdLst>
-            <p14:sldId id="266"/>
+            <p14:sldId id="267"/>
           </p14:sldIdLst>
         </p14:section>
       </p14:sectionLst>
@@ -937,7 +939,7 @@
           <a:p>
             <a:r>
               <a:rPr lang="en-US" dirty="0"/>
-              <a:t>Honesty is a feature. A banner on every screen and an X-Sandbox header on every API response say this is a sandbox. The Sandbox screen on the left lists everything that is simulated and how to trigger the edge cases, such as a recipient named FAIL_TEST. Any rule that has not been checked against an official source carries a yellow Not verified badge and the sentence: indicative, confirm with your AD bank. On the right is a payment's compliance report: the parties, ten controls with their evidence, the approval proof and the audit trail, sealed with a hash that the browser recomputes. Change a copy and it says does not match. The sandbox operation logs from a real run, including the tamper demo, are in the repository under submission slash evidence.</a:t>
+              <a:t>Security and compliance is thirty percent of the score, so we made it checkable. On the left are the permission tiers, enforced in the domain layer, not just in the screens. Public, read, prepare, decide, and administer. Deciding, meaning approving a payment, is only for a human parent with a fresh MFA proof bound to that payment and to the hash of the summary they saw. The AI has no approve, cancel, limit or config permission at all. On the right, the numbers: 897 backend and 126 frontend tests, all 24 blueprint scenarios mapped to tests, and 37 known risks that we list openly in the self-assessment. The audit log is hash-chained: Verify passes, we edit one row behind the application's back, and Verify fails at exactly that event.</a:t>
             </a:r>
             <a:endParaRPr lang="en-US" dirty="0"/>
           </a:p>
@@ -1025,7 +1027,7 @@
           <a:p>
             <a:r>
               <a:rPr lang="en-US" dirty="0"/>
-              <a:t>Next steps. First, replace every placeholder rule with an official Bangladesh Bank source and add the moon-dependent holidays. We would also add the moon-dependent holidays to the planner. Second, a partnership with an authorised dealer bank for real quotes and real KYC, and regulator-ready reports from the audit log. Third, the escrow contracts would move from our simulated chain to a permissioned one with a deposit token issued by a bank. Topic C also mentions credit building. We have not built it, and we would rather say so than pretend. We do show a household's money in every currency, but those are simulated accounts, not real ones. To close: StudyRoute is clear, cheap and safe, because the engine calculates, the AI explains, the human approves, and every step is logged. Thank you.</a:t>
+              <a:t>Honesty is a feature. A banner on every screen and an X-Sandbox header on every API response say this is a sandbox. The Sandbox screen on the left lists everything that is simulated and how to trigger the edge cases, such as a recipient named FAIL_TEST. Any rule that has not been checked against an official source carries a yellow Not verified badge and the sentence: indicative, confirm with your AD bank. On the right is a payment's compliance report: the parties, ten controls with their evidence, the approval proof and the audit trail, sealed with a hash that the browser recomputes. Change a copy and it says does not match.</a:t>
             </a:r>
             <a:endParaRPr lang="en-US" dirty="0"/>
           </a:p>
@@ -1049,6 +1051,94 @@
             <a:fld id="{F7021451-1387-4CA6-816F-3879F97B5CBC}" type="slidenum">
               <a:rPr lang="en-US"/>
               <a:t>11</a:t>
+            </a:fld>
+            <a:endParaRPr lang="en-US"/>
+          </a:p>
+        </p:txBody>
+      </p:sp>
+    </p:spTree>
+    <p:extLst>
+      <p:ext uri="{BB962C8B-B14F-4D97-AF65-F5344CB8AC3E}">
+        <p14:creationId xmlns:p14="http://schemas.microsoft.com/office/powerpoint/2010/main" val="1024086991"/>
+      </p:ext>
+    </p:extLst>
+  </p:cSld>
+  <p:clrMapOvr>
+    <a:masterClrMapping/>
+  </p:clrMapOvr>
+</p:notes>
+</file>
+
+<file path=ppt/notesSlides/notesSlide12.xml><?xml version="1.0" encoding="utf-8"?>
+<p:notes xmlns:a="http://schemas.openxmlformats.org/drawingml/2006/main" xmlns:r="http://schemas.openxmlformats.org/officeDocument/2006/relationships" xmlns:p="http://schemas.openxmlformats.org/presentationml/2006/main">
+  <p:cSld>
+    <p:spTree>
+      <p:nvGrpSpPr>
+        <p:cNvPr id="1" name=""/>
+        <p:cNvGrpSpPr/>
+        <p:nvPr/>
+      </p:nvGrpSpPr>
+      <p:grpSpPr>
+        <a:xfrm>
+          <a:off x="0" y="0"/>
+          <a:ext cx="0" cy="0"/>
+          <a:chOff x="0" y="0"/>
+          <a:chExt cx="0" cy="0"/>
+        </a:xfrm>
+      </p:grpSpPr>
+      <p:sp>
+        <p:nvSpPr>
+          <p:cNvPr id="2" name="Slide Image Placeholder 1"/>
+          <p:cNvSpPr>
+            <a:spLocks noGrp="1" noRot="1" noChangeAspect="1"/>
+          </p:cNvSpPr>
+          <p:nvPr>
+            <p:ph type="sldImg"/>
+          </p:nvPr>
+        </p:nvSpPr>
+        <p:spPr/>
+      </p:sp>
+      <p:sp>
+        <p:nvSpPr>
+          <p:cNvPr id="3" name="Notes Placeholder 2"/>
+          <p:cNvSpPr>
+            <a:spLocks noGrp="1"/>
+          </p:cNvSpPr>
+          <p:nvPr>
+            <p:ph type="body" idx="1"/>
+          </p:nvPr>
+        </p:nvSpPr>
+        <p:spPr/>
+        <p:txBody>
+          <a:bodyPr/>
+          <a:lstStyle/>
+          <a:p>
+            <a:r>
+              <a:rPr lang="en-US" dirty="0"/>
+              <a:t>Next steps. First, replace every placeholder rule with an official Bangladesh Bank source and add the moon-dependent holidays. Second, a partnership with an authorised dealer bank for real quotes and real KYC, and regulator-ready reports from the audit log. Third, the escrow contracts would move from our simulated chain to a permissioned one with a deposit token issued by a bank. Topic C also mentions credit building. We have not built it, and we would rather say so than pretend. We do show a household's money in every currency, but those are simulated accounts, not real ones. To close: StudyRoute is clear, cheap and safe, because the engine calculates, the AI explains, the human approves, and every step is logged. Thank you.</a:t>
+            </a:r>
+            <a:endParaRPr lang="en-US" dirty="0"/>
+          </a:p>
+        </p:txBody>
+      </p:sp>
+      <p:sp>
+        <p:nvSpPr>
+          <p:cNvPr id="4" name="Slide Number Placeholder 3"/>
+          <p:cNvSpPr>
+            <a:spLocks noGrp="1"/>
+          </p:cNvSpPr>
+          <p:nvPr>
+            <p:ph type="sldNum" sz="quarter" idx="10"/>
+          </p:nvPr>
+        </p:nvSpPr>
+        <p:spPr/>
+        <p:txBody>
+          <a:bodyPr/>
+          <a:lstStyle/>
+          <a:p>
+            <a:fld id="{F7021451-1387-4CA6-816F-3879F97B5CBC}" type="slidenum">
+              <a:rPr lang="en-US"/>
+              <a:t>12</a:t>
             </a:fld>
             <a:endParaRPr lang="en-US"/>
           </a:p>
@@ -1289,7 +1379,7 @@
           <a:p>
             <a:r>
               <a:rPr lang="en-US" dirty="0"/>
-              <a:t>This is the real chain. The parent pays in taka to an authorised dealer bank, which sells foreign currency and sends a SWIFT instruction carrying a UETR and a charge code. A correspondent bank may take a lifting fee, the receiving bank may take another, and the university matches the payment by reference. Each step has a typical failure, shown in red. SWIFT only carries the instruction; banks settle between their own accounts. StudyRoute simulates this chain end to end with invented banks, a correspondent and a double-entry ledger where debits equal credits, and a failed payment is returned in full. It never moves real money.</a:t>
+              <a:t>This is the real chain. The parent pays in taka to an authorised dealer bank, which sells foreign currency and sends a SWIFT instruction carrying a UETR and a charge code. A correspondent bank may take a lifting fee, the receiving bank may take another, and the university matches the payment by reference. Each step has a typical failure, shown in red. StudyRoute simulates this chain end to end with invented banks, a correspondent and a double-entry ledger where debits equal credits, and a failed payment is returned in full. It never moves real money.</a:t>
             </a:r>
             <a:endParaRPr lang="en-US" dirty="0"/>
           </a:p>
@@ -1377,7 +1467,7 @@
           <a:p>
             <a:r>
               <a:rPr lang="en-US" dirty="0"/>
-              <a:t>This is task completion. On the left, the parent typed one sentence into the chat: I need to pay ten thousand pounds of tuition by 28 October. The agent read it, made the quote, ranked the providers, planned the deadline and checked KYC, the recipient and the documents, and it built this plan card from the engine's output. On the right, the agent and the person share the work. The person creates the draft, chooses the recipient and approves with a fresh MFA code. The agent blocks the payment until KYC, the allowlist and the sandbox caps pass, then tracks it to settled and seals a compliance report. Look at what the agent did not do: it created no payment. It can propose a draft, but a person always clicks.</a:t>
+              <a:t>This is task completion. On the left, the parent typed one sentence into the chat: I need to pay ten thousand pounds of tuition by 28 October. The agent read it, made the quote, ranked the providers, planned the deadline and checked KYC, the recipient and the documents, and it built this plan card from the engine's output. The person creates the draft, chooses the recipient and approves with a fresh MFA code. The agent blocks the payment until KYC, the allowlist and the sandbox caps pass, then tracks it to settled and seals a compliance report. Look at what the agent did not do: it created no payment. It can propose a draft, but a person always clicks.</a:t>
             </a:r>
             <a:endParaRPr lang="en-US" dirty="0"/>
           </a:p>
@@ -1465,7 +1555,7 @@
           <a:p>
             <a:r>
               <a:rPr lang="en-US" dirty="0"/>
-              <a:t>Every number comes from a deterministic engine: integer minor units, decimal rates, no floats. For one provider, total cost is the FX margin plus the fixed fee, the SWIFT fee, any fees the sender pays under OUR, plus a shortfall when fees are deducted from the amount. We rank by that percentage. In our synthetic example, Provider B is first at 1.58 percent, Provider C looks cheap but it is quoted as SHA, so the university would receive 35 pounds less, and Provider A is third at 2.16 percent. On the right is where Provider B's 25,300 taka goes: 16,000 is the margin, 3,000 the fixed fee, 1,500 the SWIFT fee and 4,800 the fees we pay under OUR. The same engine powers the smart send plan: fixed fees are paid on every transfer, so sending 12,000 pounds of living costs all at once costs 28,500 taka against 68,400 monthly. It does not predict exchange rates, and says so.</a:t>
+              <a:t>Every number comes from a deterministic engine: integer minor units, decimal rates, no floats. For one provider, total cost is the FX margin plus the fixed fee, the SWIFT fee, any fees the sender pays under OUR, plus a shortfall when fees are deducted from the amount. We rank by that percentage. In our synthetic example, Provider B is first at 1.58 percent, Provider C looks cheap but it is quoted as SHA, so the university would receive 35 pounds less, and Provider A is third at 2.16 percent. On the right is where Provider B's 25,300 taka goes: 16,000 is the margin, 3,000 the fixed fee, 1,500 the SWIFT fee and 4,800 the fees we pay under OUR. The same engine powers the smart send plan. It does not predict exchange rates, and says so.</a:t>
             </a:r>
             <a:endParaRPr lang="en-US" dirty="0"/>
           </a:p>
@@ -1641,7 +1731,7 @@
           <a:p>
             <a:r>
               <a:rPr lang="en-US" dirty="0"/>
-              <a:t>The assistant follows a fixed pipeline. A policy check flags attempts to override rules, approve or reveal secrets, and a flagged message never reaches the model. Facts come only from the engine. Personal data is masked before any model call. The model is the only step that is not deterministic, and it is optional. Then a number guard checks every figure in the reply against the engine's facts and falls back to a template if anything is invented, a tool guard allows only proposals, and everything is audited. So: every number comes from the engine, the AI can only propose, and it works with no API key at all. Adding a model later is one command, check_ai.</a:t>
+              <a:t>The assistant follows a fixed pipeline. A policy check flags attempts to override rules, approve or reveal secrets, and a flagged message never reaches the model. Facts come only from the engine. Personal data is masked before any model call. The model is the only step that is not deterministic, and it is optional. Then a number guard checks every figure in the reply against the engine's facts and falls back to a template if anything is invented, a tool guard allows only proposals, and everything is audited. So: every number comes from the engine, the AI can only propose, and it works with no API key at all.</a:t>
             </a:r>
             <a:endParaRPr lang="en-US" dirty="0"/>
           </a:p>
@@ -1729,7 +1819,7 @@
           <a:p>
             <a:r>
               <a:rPr lang="en-US" dirty="0"/>
-              <a:t>Security and compliance is thirty percent of the score, so we made it checkable. On the left are the permission tiers, enforced in the domain layer, not just in the screens. Public, read, prepare, decide, and administer. Deciding, meaning approving a payment, is only for a human parent with a fresh MFA proof bound to that payment and to the hash of the summary they saw. The AI has no approve, cancel, limit or config permission at all. On the right, the numbers: 897 backend and 126 frontend tests, all 24 blueprint scenarios mapped to tests, and 31 known risks that we list openly in the self-assessment. The audit log is hash-chained: Verify passes, we edit one row behind the application's back, and Verify fails at exactly that event. Each payment also gets a compliance report whose hash your browser can recompute. The threat matrix with a proof for each row is in the repository.</a:t>
+              <a:t>The assistant has a trained component, and we measured it. A small language model, fine-tuned on a gaming-class GPU in a few minutes, reads what a parent types: the intent, and the exact words that carry an amount, a currency or a date. It never produces a number. Plain code turns those words into values and refuses what it cannot read exactly, and if the old rules and the model disagree, the assistant asks. On messages we wrote by hand after the model was frozen, it chose the right intent 88.5% of the time against 61.1% for the old rules, read a plan request completely and exactly 100% against 57.6%, and blocked 92.9% of attacks against 28.6%. The sample is small and the training data is synthetic, and we say so on the slide.</a:t>
             </a:r>
             <a:endParaRPr lang="en-US" dirty="0"/>
           </a:p>
@@ -2681,7 +2771,7 @@
                 <a:ea typeface="+mj-lt" pitchFamily="34" charset="-122"/>
                 <a:cs typeface="+mj-lt" pitchFamily="34" charset="-120"/>
               </a:rPr>
-              <a:t>Honest by design</a:t>
+              <a:t>Security you can verify</a:t>
             </a:r>
             <a:endParaRPr lang="en-US" sz="3600" dirty="0"/>
           </a:p>
@@ -2689,156 +2779,164 @@
       </p:sp>
       <p:sp>
         <p:nvSpPr>
-          <p:cNvPr id="3" name="content-10-text-1"/>
-          <p:cNvSpPr txBox="1"/>
-          <p:nvPr/>
-        </p:nvSpPr>
-        <p:spPr>
-          <a:xfrm>
-            <a:off x="457200" y="1097280"/>
-            <a:ext cx="8229600" cy="365760"/>
-          </a:xfrm>
-          <a:prstGeom prst="rect">
-            <a:avLst/>
-          </a:prstGeom>
-          <a:noFill/>
-          <a:ln/>
-        </p:spPr>
-        <p:txBody>
-          <a:bodyPr wrap="square" lIns="0" tIns="0" rIns="0" bIns="0" rtlCol="0" anchor="ctr"/>
-          <a:lstStyle/>
-          <a:p>
-            <a:pPr algn="l" indent="0" marL="0">
-              <a:buNone/>
-            </a:pPr>
-            <a:r>
-              <a:rPr lang="en-US" sz="1600" b="1" dirty="0">
-                <a:solidFill>
-                  <a:schemeClr val="tx1"/>
-                </a:solidFill>
-              </a:rPr>
-              <a:t>Every simulated part is labelled. Every unverified rule carries a badge.</a:t>
-            </a:r>
-            <a:endParaRPr lang="en-US" sz="1600" dirty="0"/>
-          </a:p>
-        </p:txBody>
-      </p:sp>
-      <p:sp>
-        <p:nvSpPr>
-          <p:cNvPr id="4" name="content-10-rect-2"/>
+          <p:cNvPr id="3" name="content-10-rect-1"/>
           <p:cNvSpPr/>
           <p:nvPr/>
         </p:nvSpPr>
         <p:spPr>
           <a:xfrm>
-            <a:off x="457200" y="1554480"/>
-            <a:ext cx="3803904" cy="2999232"/>
+            <a:off x="457200" y="1280160"/>
+            <a:ext cx="4023360" cy="402336"/>
           </a:xfrm>
           <a:prstGeom prst="roundRect">
             <a:avLst>
-              <a:gd name="adj" fmla="val 1829"/>
+              <a:gd name="adj" fmla="val 13636"/>
             </a:avLst>
           </a:prstGeom>
           <a:solidFill>
-            <a:schemeClr val="bg1"/>
+            <a:schemeClr val="bg2"/>
           </a:solidFill>
-          <a:ln w="9525">
-            <a:solidFill>
-              <a:schemeClr val="accent5"/>
-            </a:solidFill>
-            <a:prstDash val="solid"/>
-          </a:ln>
-          <a:effectLst>
-            <a:outerShdw sx="100000" sy="100000" kx="0" ky="0" algn="bl" rotWithShape="0" blurRad="101600" dist="25400" dir="5400000">
-              <a:srgbClr val="0B2545">
-                <a:alpha val="18000"/>
-              </a:srgbClr>
-            </a:outerShdw>
-          </a:effectLst>
-        </p:spPr>
-      </p:sp>
-      <p:pic>
-        <p:nvPicPr>
-          <p:cNvPr id="5" name="content-10-image-3" descr="Sandbox screen listing what is simulated">    </p:cNvPr>
-          <p:cNvPicPr>
-            <a:picLocks noChangeAspect="1"/>
-          </p:cNvPicPr>
-          <p:nvPr/>
-        </p:nvPicPr>
-        <p:blipFill>
-          <a:blip r:embed="rId1"/>
-          <a:stretch>
-            <a:fillRect/>
-          </a:stretch>
-        </p:blipFill>
-        <p:spPr>
-          <a:xfrm>
-            <a:off x="530352" y="1627632"/>
-            <a:ext cx="3657600" cy="2852928"/>
-          </a:xfrm>
-          <a:prstGeom prst="rect">
-            <a:avLst/>
-          </a:prstGeom>
-        </p:spPr>
-      </p:pic>
-      <p:sp>
-        <p:nvSpPr>
-          <p:cNvPr id="6" name="content-10-rect-4"/>
+          <a:ln/>
+        </p:spPr>
+      </p:sp>
+      <p:sp>
+        <p:nvSpPr>
+          <p:cNvPr id="4" name="content-10-text-2"/>
+          <p:cNvSpPr txBox="1"/>
+          <p:nvPr/>
+        </p:nvSpPr>
+        <p:spPr>
+          <a:xfrm>
+            <a:off x="594360" y="1280160"/>
+            <a:ext cx="3794760" cy="402336"/>
+          </a:xfrm>
+          <a:prstGeom prst="rect">
+            <a:avLst/>
+          </a:prstGeom>
+          <a:noFill/>
+          <a:ln/>
+        </p:spPr>
+        <p:txBody>
+          <a:bodyPr wrap="square" lIns="0" tIns="0" rIns="0" bIns="0" rtlCol="0" anchor="ctr"/>
+          <a:lstStyle/>
+          <a:p>
+            <a:pPr algn="l" indent="0" marL="0">
+              <a:buNone/>
+            </a:pPr>
+            <a:r>
+              <a:rPr lang="en-US" sz="1400" b="1" dirty="0">
+                <a:solidFill>
+                  <a:schemeClr val="tx1"/>
+                </a:solidFill>
+              </a:rPr>
+              <a:t>Public:</a:t>
+            </a:r>
+            <a:pPr algn="l" indent="0" marL="0">
+              <a:buNone/>
+            </a:pPr>
+            <a:r>
+              <a:rPr lang="en-US" sz="1400" dirty="0">
+                <a:solidFill>
+                  <a:schemeClr val="tx1"/>
+                </a:solidFill>
+              </a:rPr>
+              <a:t> sign in, health</a:t>
+            </a:r>
+            <a:endParaRPr lang="en-US" sz="1400" dirty="0"/>
+          </a:p>
+        </p:txBody>
+      </p:sp>
+      <p:sp>
+        <p:nvSpPr>
+          <p:cNvPr id="5" name="content-10-rect-3"/>
           <p:cNvSpPr/>
           <p:nvPr/>
         </p:nvSpPr>
         <p:spPr>
           <a:xfrm>
-            <a:off x="4882896" y="1554480"/>
-            <a:ext cx="3803904" cy="2999232"/>
+            <a:off x="457200" y="1755648"/>
+            <a:ext cx="4023360" cy="402336"/>
           </a:xfrm>
           <a:prstGeom prst="roundRect">
             <a:avLst>
-              <a:gd name="adj" fmla="val 1829"/>
+              <a:gd name="adj" fmla="val 13636"/>
             </a:avLst>
           </a:prstGeom>
           <a:solidFill>
-            <a:schemeClr val="bg1"/>
+            <a:schemeClr val="bg2"/>
           </a:solidFill>
-          <a:ln w="9525">
-            <a:solidFill>
-              <a:schemeClr val="accent5"/>
-            </a:solidFill>
-            <a:prstDash val="solid"/>
-          </a:ln>
-          <a:effectLst>
-            <a:outerShdw sx="100000" sy="100000" kx="0" ky="0" algn="bl" rotWithShape="0" blurRad="101600" dist="25400" dir="5400000">
-              <a:srgbClr val="0B2545">
-                <a:alpha val="18000"/>
-              </a:srgbClr>
-            </a:outerShdw>
-          </a:effectLst>
-        </p:spPr>
-      </p:sp>
-      <p:pic>
-        <p:nvPicPr>
-          <p:cNvPr id="7" name="content-10-image-5" descr="Compliance report whose hash verifies in the browser">    </p:cNvPr>
-          <p:cNvPicPr>
-            <a:picLocks noChangeAspect="1"/>
-          </p:cNvPicPr>
-          <p:nvPr/>
-        </p:nvPicPr>
-        <p:blipFill>
-          <a:blip r:embed="rId2"/>
-          <a:stretch>
-            <a:fillRect/>
-          </a:stretch>
-        </p:blipFill>
-        <p:spPr>
-          <a:xfrm>
-            <a:off x="4956048" y="1627632"/>
-            <a:ext cx="3657600" cy="2852928"/>
-          </a:xfrm>
-          <a:prstGeom prst="rect">
-            <a:avLst/>
-          </a:prstGeom>
-        </p:spPr>
-      </p:pic>
+          <a:ln/>
+        </p:spPr>
+      </p:sp>
+      <p:sp>
+        <p:nvSpPr>
+          <p:cNvPr id="6" name="content-10-text-4"/>
+          <p:cNvSpPr txBox="1"/>
+          <p:nvPr/>
+        </p:nvSpPr>
+        <p:spPr>
+          <a:xfrm>
+            <a:off x="594360" y="1755648"/>
+            <a:ext cx="3794760" cy="402336"/>
+          </a:xfrm>
+          <a:prstGeom prst="rect">
+            <a:avLst/>
+          </a:prstGeom>
+          <a:noFill/>
+          <a:ln/>
+        </p:spPr>
+        <p:txBody>
+          <a:bodyPr wrap="square" lIns="0" tIns="0" rIns="0" bIns="0" rtlCol="0" anchor="ctr"/>
+          <a:lstStyle/>
+          <a:p>
+            <a:pPr algn="l" indent="0" marL="0">
+              <a:buNone/>
+            </a:pPr>
+            <a:r>
+              <a:rPr lang="en-US" sz="1400" b="1" dirty="0">
+                <a:solidFill>
+                  <a:schemeClr val="tx1"/>
+                </a:solidFill>
+              </a:rPr>
+              <a:t>Read:</a:t>
+            </a:r>
+            <a:pPr algn="l" indent="0" marL="0">
+              <a:buNone/>
+            </a:pPr>
+            <a:r>
+              <a:rPr lang="en-US" sz="1400" dirty="0">
+                <a:solidFill>
+                  <a:schemeClr val="tx1"/>
+                </a:solidFill>
+              </a:rPr>
+              <a:t> own household only</a:t>
+            </a:r>
+            <a:endParaRPr lang="en-US" sz="1400" dirty="0"/>
+          </a:p>
+        </p:txBody>
+      </p:sp>
+      <p:sp>
+        <p:nvSpPr>
+          <p:cNvPr id="7" name="content-10-rect-5"/>
+          <p:cNvSpPr/>
+          <p:nvPr/>
+        </p:nvSpPr>
+        <p:spPr>
+          <a:xfrm>
+            <a:off x="457200" y="2231136"/>
+            <a:ext cx="4023360" cy="402336"/>
+          </a:xfrm>
+          <a:prstGeom prst="roundRect">
+            <a:avLst>
+              <a:gd name="adj" fmla="val 13636"/>
+            </a:avLst>
+          </a:prstGeom>
+          <a:solidFill>
+            <a:schemeClr val="bg2"/>
+          </a:solidFill>
+          <a:ln/>
+        </p:spPr>
+      </p:sp>
       <p:sp>
         <p:nvSpPr>
           <p:cNvPr id="8" name="content-10-text-6"/>
@@ -2847,8 +2945,323 @@
         </p:nvSpPr>
         <p:spPr>
           <a:xfrm>
-            <a:off x="457200" y="4590288"/>
-            <a:ext cx="3803904" cy="274320"/>
+            <a:off x="594360" y="2231136"/>
+            <a:ext cx="3794760" cy="402336"/>
+          </a:xfrm>
+          <a:prstGeom prst="rect">
+            <a:avLst/>
+          </a:prstGeom>
+          <a:noFill/>
+          <a:ln/>
+        </p:spPr>
+        <p:txBody>
+          <a:bodyPr wrap="square" lIns="0" tIns="0" rIns="0" bIns="0" rtlCol="0" anchor="ctr"/>
+          <a:lstStyle/>
+          <a:p>
+            <a:pPr algn="l" indent="0" marL="0">
+              <a:buNone/>
+            </a:pPr>
+            <a:r>
+              <a:rPr lang="en-US" sz="1400" b="1" dirty="0">
+                <a:solidFill>
+                  <a:schemeClr val="tx1"/>
+                </a:solidFill>
+              </a:rPr>
+              <a:t>Prepare:</a:t>
+            </a:r>
+            <a:pPr algn="l" indent="0" marL="0">
+              <a:buNone/>
+            </a:pPr>
+            <a:r>
+              <a:rPr lang="en-US" sz="1400" dirty="0">
+                <a:solidFill>
+                  <a:schemeClr val="tx1"/>
+                </a:solidFill>
+              </a:rPr>
+              <a:t> drafts, recipients, documents</a:t>
+            </a:r>
+            <a:endParaRPr lang="en-US" sz="1400" dirty="0"/>
+          </a:p>
+        </p:txBody>
+      </p:sp>
+      <p:sp>
+        <p:nvSpPr>
+          <p:cNvPr id="9" name="content-10-rect-7"/>
+          <p:cNvSpPr/>
+          <p:nvPr/>
+        </p:nvSpPr>
+        <p:spPr>
+          <a:xfrm>
+            <a:off x="457200" y="2706624"/>
+            <a:ext cx="4023360" cy="402336"/>
+          </a:xfrm>
+          <a:prstGeom prst="roundRect">
+            <a:avLst>
+              <a:gd name="adj" fmla="val 13636"/>
+            </a:avLst>
+          </a:prstGeom>
+          <a:solidFill>
+            <a:schemeClr val="accent1"/>
+          </a:solidFill>
+          <a:ln/>
+        </p:spPr>
+      </p:sp>
+      <p:sp>
+        <p:nvSpPr>
+          <p:cNvPr id="10" name="content-10-text-8"/>
+          <p:cNvSpPr txBox="1"/>
+          <p:nvPr/>
+        </p:nvSpPr>
+        <p:spPr>
+          <a:xfrm>
+            <a:off x="594360" y="2706624"/>
+            <a:ext cx="3794760" cy="402336"/>
+          </a:xfrm>
+          <a:prstGeom prst="rect">
+            <a:avLst/>
+          </a:prstGeom>
+          <a:noFill/>
+          <a:ln/>
+        </p:spPr>
+        <p:txBody>
+          <a:bodyPr wrap="square" lIns="0" tIns="0" rIns="0" bIns="0" rtlCol="0" anchor="ctr"/>
+          <a:lstStyle/>
+          <a:p>
+            <a:pPr algn="l" indent="0" marL="0">
+              <a:buNone/>
+            </a:pPr>
+            <a:r>
+              <a:rPr lang="en-US" sz="1400" b="1" dirty="0">
+                <a:solidFill>
+                  <a:schemeClr val="bg1"/>
+                </a:solidFill>
+              </a:rPr>
+              <a:t>Decide:</a:t>
+            </a:r>
+            <a:pPr algn="l" indent="0" marL="0">
+              <a:buNone/>
+            </a:pPr>
+            <a:r>
+              <a:rPr lang="en-US" sz="1400" dirty="0">
+                <a:solidFill>
+                  <a:schemeClr val="bg1"/>
+                </a:solidFill>
+              </a:rPr>
+              <a:t> human parent with fresh MFA</a:t>
+            </a:r>
+            <a:endParaRPr lang="en-US" sz="1400" dirty="0"/>
+          </a:p>
+        </p:txBody>
+      </p:sp>
+      <p:sp>
+        <p:nvSpPr>
+          <p:cNvPr id="11" name="content-10-rect-9"/>
+          <p:cNvSpPr/>
+          <p:nvPr/>
+        </p:nvSpPr>
+        <p:spPr>
+          <a:xfrm>
+            <a:off x="457200" y="3182112"/>
+            <a:ext cx="4023360" cy="402336"/>
+          </a:xfrm>
+          <a:prstGeom prst="roundRect">
+            <a:avLst>
+              <a:gd name="adj" fmla="val 13636"/>
+            </a:avLst>
+          </a:prstGeom>
+          <a:solidFill>
+            <a:schemeClr val="bg2"/>
+          </a:solidFill>
+          <a:ln/>
+        </p:spPr>
+      </p:sp>
+      <p:sp>
+        <p:nvSpPr>
+          <p:cNvPr id="12" name="content-10-text-10"/>
+          <p:cNvSpPr txBox="1"/>
+          <p:nvPr/>
+        </p:nvSpPr>
+        <p:spPr>
+          <a:xfrm>
+            <a:off x="594360" y="3182112"/>
+            <a:ext cx="3794760" cy="402336"/>
+          </a:xfrm>
+          <a:prstGeom prst="rect">
+            <a:avLst/>
+          </a:prstGeom>
+          <a:noFill/>
+          <a:ln/>
+        </p:spPr>
+        <p:txBody>
+          <a:bodyPr wrap="square" lIns="0" tIns="0" rIns="0" bIns="0" rtlCol="0" anchor="ctr"/>
+          <a:lstStyle/>
+          <a:p>
+            <a:pPr algn="l" indent="0" marL="0">
+              <a:buNone/>
+            </a:pPr>
+            <a:r>
+              <a:rPr lang="en-US" sz="1400" b="1" dirty="0">
+                <a:solidFill>
+                  <a:schemeClr val="tx1"/>
+                </a:solidFill>
+              </a:rPr>
+              <a:t>Administer:</a:t>
+            </a:r>
+            <a:pPr algn="l" indent="0" marL="0">
+              <a:buNone/>
+            </a:pPr>
+            <a:r>
+              <a:rPr lang="en-US" sz="1400" dirty="0">
+                <a:solidFill>
+                  <a:schemeClr val="tx1"/>
+                </a:solidFill>
+              </a:rPr>
+              <a:t> reviewer rules and Verify</a:t>
+            </a:r>
+            <a:endParaRPr lang="en-US" sz="1400" dirty="0"/>
+          </a:p>
+        </p:txBody>
+      </p:sp>
+      <p:sp>
+        <p:nvSpPr>
+          <p:cNvPr id="13" name="content-10-rect-11"/>
+          <p:cNvSpPr/>
+          <p:nvPr/>
+        </p:nvSpPr>
+        <p:spPr>
+          <a:xfrm>
+            <a:off x="457200" y="3657600"/>
+            <a:ext cx="4023360" cy="402336"/>
+          </a:xfrm>
+          <a:prstGeom prst="roundRect">
+            <a:avLst>
+              <a:gd name="adj" fmla="val 13636"/>
+            </a:avLst>
+          </a:prstGeom>
+          <a:solidFill>
+            <a:schemeClr val="accent3"/>
+          </a:solidFill>
+          <a:ln/>
+        </p:spPr>
+      </p:sp>
+      <p:sp>
+        <p:nvSpPr>
+          <p:cNvPr id="14" name="content-10-text-12"/>
+          <p:cNvSpPr txBox="1"/>
+          <p:nvPr/>
+        </p:nvSpPr>
+        <p:spPr>
+          <a:xfrm>
+            <a:off x="594360" y="3657600"/>
+            <a:ext cx="3794760" cy="402336"/>
+          </a:xfrm>
+          <a:prstGeom prst="rect">
+            <a:avLst/>
+          </a:prstGeom>
+          <a:noFill/>
+          <a:ln/>
+        </p:spPr>
+        <p:txBody>
+          <a:bodyPr wrap="square" lIns="0" tIns="0" rIns="0" bIns="0" rtlCol="0" anchor="ctr"/>
+          <a:lstStyle/>
+          <a:p>
+            <a:pPr algn="l" indent="0" marL="0">
+              <a:buNone/>
+            </a:pPr>
+            <a:r>
+              <a:rPr lang="en-US" sz="1400" b="1" dirty="0">
+                <a:solidFill>
+                  <a:schemeClr val="bg1"/>
+                </a:solidFill>
+              </a:rPr>
+              <a:t>Never for the AI:</a:t>
+            </a:r>
+            <a:pPr algn="l" indent="0" marL="0">
+              <a:buNone/>
+            </a:pPr>
+            <a:r>
+              <a:rPr lang="en-US" sz="1400" dirty="0">
+                <a:solidFill>
+                  <a:schemeClr val="bg1"/>
+                </a:solidFill>
+              </a:rPr>
+              <a:t> approve, cancel, limits</a:t>
+            </a:r>
+            <a:endParaRPr lang="en-US" sz="1400" dirty="0"/>
+          </a:p>
+        </p:txBody>
+      </p:sp>
+      <p:sp>
+        <p:nvSpPr>
+          <p:cNvPr id="15" name="content-10-rect-13"/>
+          <p:cNvSpPr/>
+          <p:nvPr/>
+        </p:nvSpPr>
+        <p:spPr>
+          <a:xfrm>
+            <a:off x="4663440" y="1280160"/>
+            <a:ext cx="1920240" cy="1188720"/>
+          </a:xfrm>
+          <a:prstGeom prst="roundRect">
+            <a:avLst>
+              <a:gd name="adj" fmla="val 6154"/>
+            </a:avLst>
+          </a:prstGeom>
+          <a:solidFill>
+            <a:schemeClr val="bg2"/>
+          </a:solidFill>
+          <a:ln/>
+        </p:spPr>
+      </p:sp>
+      <p:sp>
+        <p:nvSpPr>
+          <p:cNvPr id="16" name="content-10-text-14"/>
+          <p:cNvSpPr txBox="1"/>
+          <p:nvPr/>
+        </p:nvSpPr>
+        <p:spPr>
+          <a:xfrm>
+            <a:off x="4800600" y="1371600"/>
+            <a:ext cx="1645920" cy="594360"/>
+          </a:xfrm>
+          <a:prstGeom prst="rect">
+            <a:avLst/>
+          </a:prstGeom>
+          <a:noFill/>
+          <a:ln/>
+        </p:spPr>
+        <p:txBody>
+          <a:bodyPr wrap="square" lIns="0" tIns="0" rIns="0" bIns="0" rtlCol="0" anchor="ctr"/>
+          <a:lstStyle/>
+          <a:p>
+            <a:pPr algn="l" indent="0" marL="0">
+              <a:buNone/>
+            </a:pPr>
+            <a:r>
+              <a:rPr lang="en-US" sz="3200" b="1" dirty="0">
+                <a:solidFill>
+                  <a:schemeClr val="accent1"/>
+                </a:solidFill>
+                <a:latin typeface="+mj-lt" pitchFamily="34" charset="0"/>
+                <a:ea typeface="+mj-lt" pitchFamily="34" charset="-122"/>
+                <a:cs typeface="+mj-lt" pitchFamily="34" charset="-120"/>
+              </a:rPr>
+              <a:t>897</a:t>
+            </a:r>
+            <a:endParaRPr lang="en-US" sz="3200" dirty="0"/>
+          </a:p>
+        </p:txBody>
+      </p:sp>
+      <p:sp>
+        <p:nvSpPr>
+          <p:cNvPr id="17" name="content-10-text-15"/>
+          <p:cNvSpPr txBox="1"/>
+          <p:nvPr/>
+        </p:nvSpPr>
+        <p:spPr>
+          <a:xfrm>
+            <a:off x="4800600" y="1965960"/>
+            <a:ext cx="1645920" cy="457200"/>
           </a:xfrm>
           <a:prstGeom prst="rect">
             <a:avLst/>
@@ -2864,27 +3277,88 @@
               <a:buNone/>
             </a:pPr>
             <a:r>
-              <a:rPr lang="en-US" sz="1100" dirty="0">
+              <a:rPr lang="en-US" sz="1200" dirty="0">
                 <a:solidFill>
                   <a:schemeClr val="tx2"/>
                 </a:solidFill>
               </a:rPr>
-              <a:t>Sandbox screen: what is simulated, how to test it</a:t>
-            </a:r>
-            <a:endParaRPr lang="en-US" sz="1100" dirty="0"/>
-          </a:p>
-        </p:txBody>
-      </p:sp>
-      <p:sp>
-        <p:nvSpPr>
-          <p:cNvPr id="9" name="content-10-text-7"/>
-          <p:cNvSpPr txBox="1"/>
-          <p:nvPr/>
-        </p:nvSpPr>
-        <p:spPr>
-          <a:xfrm>
-            <a:off x="4882896" y="4590288"/>
-            <a:ext cx="3803904" cy="274320"/>
+              <a:t>backend tests, all passing</a:t>
+            </a:r>
+            <a:endParaRPr lang="en-US" sz="1200" dirty="0"/>
+          </a:p>
+        </p:txBody>
+      </p:sp>
+      <p:sp>
+        <p:nvSpPr>
+          <p:cNvPr id="18" name="content-10-rect-16"/>
+          <p:cNvSpPr/>
+          <p:nvPr/>
+        </p:nvSpPr>
+        <p:spPr>
+          <a:xfrm>
+            <a:off x="6766560" y="1280160"/>
+            <a:ext cx="1920240" cy="1188720"/>
+          </a:xfrm>
+          <a:prstGeom prst="roundRect">
+            <a:avLst>
+              <a:gd name="adj" fmla="val 6154"/>
+            </a:avLst>
+          </a:prstGeom>
+          <a:solidFill>
+            <a:schemeClr val="bg2"/>
+          </a:solidFill>
+          <a:ln/>
+        </p:spPr>
+      </p:sp>
+      <p:sp>
+        <p:nvSpPr>
+          <p:cNvPr id="19" name="content-10-text-17"/>
+          <p:cNvSpPr txBox="1"/>
+          <p:nvPr/>
+        </p:nvSpPr>
+        <p:spPr>
+          <a:xfrm>
+            <a:off x="6903720" y="1371600"/>
+            <a:ext cx="1645920" cy="594360"/>
+          </a:xfrm>
+          <a:prstGeom prst="rect">
+            <a:avLst/>
+          </a:prstGeom>
+          <a:noFill/>
+          <a:ln/>
+        </p:spPr>
+        <p:txBody>
+          <a:bodyPr wrap="square" lIns="0" tIns="0" rIns="0" bIns="0" rtlCol="0" anchor="ctr"/>
+          <a:lstStyle/>
+          <a:p>
+            <a:pPr algn="l" indent="0" marL="0">
+              <a:buNone/>
+            </a:pPr>
+            <a:r>
+              <a:rPr lang="en-US" sz="3200" b="1" dirty="0">
+                <a:solidFill>
+                  <a:schemeClr val="accent1"/>
+                </a:solidFill>
+                <a:latin typeface="+mj-lt" pitchFamily="34" charset="0"/>
+                <a:ea typeface="+mj-lt" pitchFamily="34" charset="-122"/>
+                <a:cs typeface="+mj-lt" pitchFamily="34" charset="-120"/>
+              </a:rPr>
+              <a:t>126</a:t>
+            </a:r>
+            <a:endParaRPr lang="en-US" sz="3200" dirty="0"/>
+          </a:p>
+        </p:txBody>
+      </p:sp>
+      <p:sp>
+        <p:nvSpPr>
+          <p:cNvPr id="20" name="content-10-text-18"/>
+          <p:cNvSpPr txBox="1"/>
+          <p:nvPr/>
+        </p:nvSpPr>
+        <p:spPr>
+          <a:xfrm>
+            <a:off x="6903720" y="1965960"/>
+            <a:ext cx="1645920" cy="457200"/>
           </a:xfrm>
           <a:prstGeom prst="rect">
             <a:avLst/>
@@ -2900,14 +3374,244 @@
               <a:buNone/>
             </a:pPr>
             <a:r>
-              <a:rPr lang="en-US" sz="1100" dirty="0">
+              <a:rPr lang="en-US" sz="1200" dirty="0">
                 <a:solidFill>
                   <a:schemeClr val="tx2"/>
                 </a:solidFill>
               </a:rPr>
-              <a:t>Compliance report: the hash verifies in the browser</a:t>
-            </a:r>
-            <a:endParaRPr lang="en-US" sz="1100" dirty="0"/>
+              <a:t>frontend tests</a:t>
+            </a:r>
+            <a:endParaRPr lang="en-US" sz="1200" dirty="0"/>
+          </a:p>
+        </p:txBody>
+      </p:sp>
+      <p:sp>
+        <p:nvSpPr>
+          <p:cNvPr id="21" name="content-10-rect-19"/>
+          <p:cNvSpPr/>
+          <p:nvPr/>
+        </p:nvSpPr>
+        <p:spPr>
+          <a:xfrm>
+            <a:off x="4663440" y="2651760"/>
+            <a:ext cx="1920240" cy="1188720"/>
+          </a:xfrm>
+          <a:prstGeom prst="roundRect">
+            <a:avLst>
+              <a:gd name="adj" fmla="val 6154"/>
+            </a:avLst>
+          </a:prstGeom>
+          <a:solidFill>
+            <a:schemeClr val="bg2"/>
+          </a:solidFill>
+          <a:ln/>
+        </p:spPr>
+      </p:sp>
+      <p:sp>
+        <p:nvSpPr>
+          <p:cNvPr id="22" name="content-10-text-20"/>
+          <p:cNvSpPr txBox="1"/>
+          <p:nvPr/>
+        </p:nvSpPr>
+        <p:spPr>
+          <a:xfrm>
+            <a:off x="4800600" y="2743200"/>
+            <a:ext cx="1645920" cy="594360"/>
+          </a:xfrm>
+          <a:prstGeom prst="rect">
+            <a:avLst/>
+          </a:prstGeom>
+          <a:noFill/>
+          <a:ln/>
+        </p:spPr>
+        <p:txBody>
+          <a:bodyPr wrap="square" lIns="0" tIns="0" rIns="0" bIns="0" rtlCol="0" anchor="ctr"/>
+          <a:lstStyle/>
+          <a:p>
+            <a:pPr algn="l" indent="0" marL="0">
+              <a:buNone/>
+            </a:pPr>
+            <a:r>
+              <a:rPr lang="en-US" sz="3200" b="1" dirty="0">
+                <a:solidFill>
+                  <a:schemeClr val="accent1"/>
+                </a:solidFill>
+                <a:latin typeface="+mj-lt" pitchFamily="34" charset="0"/>
+                <a:ea typeface="+mj-lt" pitchFamily="34" charset="-122"/>
+                <a:cs typeface="+mj-lt" pitchFamily="34" charset="-120"/>
+              </a:rPr>
+              <a:t>24 of 24</a:t>
+            </a:r>
+            <a:endParaRPr lang="en-US" sz="3200" dirty="0"/>
+          </a:p>
+        </p:txBody>
+      </p:sp>
+      <p:sp>
+        <p:nvSpPr>
+          <p:cNvPr id="23" name="content-10-text-21"/>
+          <p:cNvSpPr txBox="1"/>
+          <p:nvPr/>
+        </p:nvSpPr>
+        <p:spPr>
+          <a:xfrm>
+            <a:off x="4800600" y="3337560"/>
+            <a:ext cx="1645920" cy="457200"/>
+          </a:xfrm>
+          <a:prstGeom prst="rect">
+            <a:avLst/>
+          </a:prstGeom>
+          <a:noFill/>
+          <a:ln/>
+        </p:spPr>
+        <p:txBody>
+          <a:bodyPr wrap="square" lIns="0" tIns="0" rIns="0" bIns="0" rtlCol="0" anchor="t"/>
+          <a:lstStyle/>
+          <a:p>
+            <a:pPr algn="l" indent="0" marL="0">
+              <a:buNone/>
+            </a:pPr>
+            <a:r>
+              <a:rPr lang="en-US" sz="1200" dirty="0">
+                <a:solidFill>
+                  <a:schemeClr val="tx2"/>
+                </a:solidFill>
+              </a:rPr>
+              <a:t>blueprint scenarios mapped to tests</a:t>
+            </a:r>
+            <a:endParaRPr lang="en-US" sz="1200" dirty="0"/>
+          </a:p>
+        </p:txBody>
+      </p:sp>
+      <p:sp>
+        <p:nvSpPr>
+          <p:cNvPr id="24" name="content-10-rect-22"/>
+          <p:cNvSpPr/>
+          <p:nvPr/>
+        </p:nvSpPr>
+        <p:spPr>
+          <a:xfrm>
+            <a:off x="6766560" y="2651760"/>
+            <a:ext cx="1920240" cy="1188720"/>
+          </a:xfrm>
+          <a:prstGeom prst="roundRect">
+            <a:avLst>
+              <a:gd name="adj" fmla="val 6154"/>
+            </a:avLst>
+          </a:prstGeom>
+          <a:solidFill>
+            <a:schemeClr val="bg2"/>
+          </a:solidFill>
+          <a:ln/>
+        </p:spPr>
+      </p:sp>
+      <p:sp>
+        <p:nvSpPr>
+          <p:cNvPr id="25" name="content-10-text-23"/>
+          <p:cNvSpPr txBox="1"/>
+          <p:nvPr/>
+        </p:nvSpPr>
+        <p:spPr>
+          <a:xfrm>
+            <a:off x="6903720" y="2743200"/>
+            <a:ext cx="1645920" cy="594360"/>
+          </a:xfrm>
+          <a:prstGeom prst="rect">
+            <a:avLst/>
+          </a:prstGeom>
+          <a:noFill/>
+          <a:ln/>
+        </p:spPr>
+        <p:txBody>
+          <a:bodyPr wrap="square" lIns="0" tIns="0" rIns="0" bIns="0" rtlCol="0" anchor="ctr"/>
+          <a:lstStyle/>
+          <a:p>
+            <a:pPr algn="l" indent="0" marL="0">
+              <a:buNone/>
+            </a:pPr>
+            <a:r>
+              <a:rPr lang="en-US" sz="3200" b="1" dirty="0">
+                <a:solidFill>
+                  <a:schemeClr val="accent1"/>
+                </a:solidFill>
+                <a:latin typeface="+mj-lt" pitchFamily="34" charset="0"/>
+                <a:ea typeface="+mj-lt" pitchFamily="34" charset="-122"/>
+                <a:cs typeface="+mj-lt" pitchFamily="34" charset="-120"/>
+              </a:rPr>
+              <a:t>37</a:t>
+            </a:r>
+            <a:endParaRPr lang="en-US" sz="3200" dirty="0"/>
+          </a:p>
+        </p:txBody>
+      </p:sp>
+      <p:sp>
+        <p:nvSpPr>
+          <p:cNvPr id="26" name="content-10-text-24"/>
+          <p:cNvSpPr txBox="1"/>
+          <p:nvPr/>
+        </p:nvSpPr>
+        <p:spPr>
+          <a:xfrm>
+            <a:off x="6903720" y="3337560"/>
+            <a:ext cx="1645920" cy="457200"/>
+          </a:xfrm>
+          <a:prstGeom prst="rect">
+            <a:avLst/>
+          </a:prstGeom>
+          <a:noFill/>
+          <a:ln/>
+        </p:spPr>
+        <p:txBody>
+          <a:bodyPr wrap="square" lIns="0" tIns="0" rIns="0" bIns="0" rtlCol="0" anchor="t"/>
+          <a:lstStyle/>
+          <a:p>
+            <a:pPr algn="l" indent="0" marL="0">
+              <a:buNone/>
+            </a:pPr>
+            <a:r>
+              <a:rPr lang="en-US" sz="1200" dirty="0">
+                <a:solidFill>
+                  <a:schemeClr val="tx2"/>
+                </a:solidFill>
+              </a:rPr>
+              <a:t>known risks listed openly</a:t>
+            </a:r>
+            <a:endParaRPr lang="en-US" sz="1200" dirty="0"/>
+          </a:p>
+        </p:txBody>
+      </p:sp>
+      <p:sp>
+        <p:nvSpPr>
+          <p:cNvPr id="27" name="content-10-text-25"/>
+          <p:cNvSpPr txBox="1"/>
+          <p:nvPr/>
+        </p:nvSpPr>
+        <p:spPr>
+          <a:xfrm>
+            <a:off x="4663440" y="4069080"/>
+            <a:ext cx="4023360" cy="685800"/>
+          </a:xfrm>
+          <a:prstGeom prst="rect">
+            <a:avLst/>
+          </a:prstGeom>
+          <a:noFill/>
+          <a:ln/>
+        </p:spPr>
+        <p:txBody>
+          <a:bodyPr wrap="square" lIns="0" tIns="0" rIns="0" bIns="0" rtlCol="0" anchor="t"/>
+          <a:lstStyle/>
+          <a:p>
+            <a:pPr algn="l" indent="0" marL="0">
+              <a:buNone/>
+            </a:pPr>
+            <a:r>
+              <a:rPr lang="en-US" sz="1200" dirty="0">
+                <a:solidFill>
+                  <a:schemeClr val="tx2"/>
+                </a:solidFill>
+              </a:rPr>
+              <a:t>Each payment has a compliance report with a hash your browser can check. Every threat has a test: docs/SECURITY.md</a:t>
+            </a:r>
+            <a:endParaRPr lang="en-US" sz="1200" dirty="0"/>
           </a:p>
         </p:txBody>
       </p:sp>
@@ -2965,12 +3669,302 @@
             <a:r>
               <a:rPr lang="en-US" sz="3600" b="1" dirty="0">
                 <a:solidFill>
-                  <a:schemeClr val="bg1"/>
+                  <a:schemeClr val="tx1"/>
                 </a:solidFill>
                 <a:latin typeface="+mj-lt" pitchFamily="34" charset="0"/>
                 <a:ea typeface="+mj-lt" pitchFamily="34" charset="-122"/>
                 <a:cs typeface="+mj-lt" pitchFamily="34" charset="-120"/>
               </a:rPr>
+              <a:t>Honest by design</a:t>
+            </a:r>
+            <a:endParaRPr lang="en-US" sz="3600" dirty="0"/>
+          </a:p>
+        </p:txBody>
+      </p:sp>
+      <p:sp>
+        <p:nvSpPr>
+          <p:cNvPr id="3" name="content-11-text-1"/>
+          <p:cNvSpPr txBox="1"/>
+          <p:nvPr/>
+        </p:nvSpPr>
+        <p:spPr>
+          <a:xfrm>
+            <a:off x="457200" y="1097280"/>
+            <a:ext cx="8229600" cy="365760"/>
+          </a:xfrm>
+          <a:prstGeom prst="rect">
+            <a:avLst/>
+          </a:prstGeom>
+          <a:noFill/>
+          <a:ln/>
+        </p:spPr>
+        <p:txBody>
+          <a:bodyPr wrap="square" lIns="0" tIns="0" rIns="0" bIns="0" rtlCol="0" anchor="ctr"/>
+          <a:lstStyle/>
+          <a:p>
+            <a:pPr algn="l" indent="0" marL="0">
+              <a:buNone/>
+            </a:pPr>
+            <a:r>
+              <a:rPr lang="en-US" sz="1600" b="1" dirty="0">
+                <a:solidFill>
+                  <a:schemeClr val="tx1"/>
+                </a:solidFill>
+              </a:rPr>
+              <a:t>Every simulated part is labelled. Every unverified rule carries a badge.</a:t>
+            </a:r>
+            <a:endParaRPr lang="en-US" sz="1600" dirty="0"/>
+          </a:p>
+        </p:txBody>
+      </p:sp>
+      <p:sp>
+        <p:nvSpPr>
+          <p:cNvPr id="4" name="content-11-rect-2"/>
+          <p:cNvSpPr/>
+          <p:nvPr/>
+        </p:nvSpPr>
+        <p:spPr>
+          <a:xfrm>
+            <a:off x="457200" y="1554480"/>
+            <a:ext cx="3803904" cy="2999232"/>
+          </a:xfrm>
+          <a:prstGeom prst="roundRect">
+            <a:avLst>
+              <a:gd name="adj" fmla="val 1829"/>
+            </a:avLst>
+          </a:prstGeom>
+          <a:solidFill>
+            <a:schemeClr val="bg1"/>
+          </a:solidFill>
+          <a:ln w="9525">
+            <a:solidFill>
+              <a:schemeClr val="accent5"/>
+            </a:solidFill>
+            <a:prstDash val="solid"/>
+          </a:ln>
+          <a:effectLst>
+            <a:outerShdw sx="100000" sy="100000" kx="0" ky="0" algn="bl" rotWithShape="0" blurRad="101600" dist="25400" dir="5400000">
+              <a:srgbClr val="0B2545">
+                <a:alpha val="18000"/>
+              </a:srgbClr>
+            </a:outerShdw>
+          </a:effectLst>
+        </p:spPr>
+      </p:sp>
+      <p:pic>
+        <p:nvPicPr>
+          <p:cNvPr id="5" name="content-11-image-3" descr="Sandbox screen listing what is simulated">    </p:cNvPr>
+          <p:cNvPicPr>
+            <a:picLocks noChangeAspect="1"/>
+          </p:cNvPicPr>
+          <p:nvPr/>
+        </p:nvPicPr>
+        <p:blipFill>
+          <a:blip r:embed="rId1"/>
+          <a:stretch>
+            <a:fillRect/>
+          </a:stretch>
+        </p:blipFill>
+        <p:spPr>
+          <a:xfrm>
+            <a:off x="530352" y="1627632"/>
+            <a:ext cx="3657600" cy="2852928"/>
+          </a:xfrm>
+          <a:prstGeom prst="rect">
+            <a:avLst/>
+          </a:prstGeom>
+        </p:spPr>
+      </p:pic>
+      <p:sp>
+        <p:nvSpPr>
+          <p:cNvPr id="6" name="content-11-rect-4"/>
+          <p:cNvSpPr/>
+          <p:nvPr/>
+        </p:nvSpPr>
+        <p:spPr>
+          <a:xfrm>
+            <a:off x="4882896" y="1554480"/>
+            <a:ext cx="3803904" cy="2999232"/>
+          </a:xfrm>
+          <a:prstGeom prst="roundRect">
+            <a:avLst>
+              <a:gd name="adj" fmla="val 1829"/>
+            </a:avLst>
+          </a:prstGeom>
+          <a:solidFill>
+            <a:schemeClr val="bg1"/>
+          </a:solidFill>
+          <a:ln w="9525">
+            <a:solidFill>
+              <a:schemeClr val="accent5"/>
+            </a:solidFill>
+            <a:prstDash val="solid"/>
+          </a:ln>
+          <a:effectLst>
+            <a:outerShdw sx="100000" sy="100000" kx="0" ky="0" algn="bl" rotWithShape="0" blurRad="101600" dist="25400" dir="5400000">
+              <a:srgbClr val="0B2545">
+                <a:alpha val="18000"/>
+              </a:srgbClr>
+            </a:outerShdw>
+          </a:effectLst>
+        </p:spPr>
+      </p:sp>
+      <p:pic>
+        <p:nvPicPr>
+          <p:cNvPr id="7" name="content-11-image-5" descr="Compliance report whose hash verifies in the browser">    </p:cNvPr>
+          <p:cNvPicPr>
+            <a:picLocks noChangeAspect="1"/>
+          </p:cNvPicPr>
+          <p:nvPr/>
+        </p:nvPicPr>
+        <p:blipFill>
+          <a:blip r:embed="rId2"/>
+          <a:stretch>
+            <a:fillRect/>
+          </a:stretch>
+        </p:blipFill>
+        <p:spPr>
+          <a:xfrm>
+            <a:off x="4956048" y="1627632"/>
+            <a:ext cx="3657600" cy="2852928"/>
+          </a:xfrm>
+          <a:prstGeom prst="rect">
+            <a:avLst/>
+          </a:prstGeom>
+        </p:spPr>
+      </p:pic>
+      <p:sp>
+        <p:nvSpPr>
+          <p:cNvPr id="8" name="content-11-text-6"/>
+          <p:cNvSpPr txBox="1"/>
+          <p:nvPr/>
+        </p:nvSpPr>
+        <p:spPr>
+          <a:xfrm>
+            <a:off x="457200" y="4590288"/>
+            <a:ext cx="3803904" cy="274320"/>
+          </a:xfrm>
+          <a:prstGeom prst="rect">
+            <a:avLst/>
+          </a:prstGeom>
+          <a:noFill/>
+          <a:ln/>
+        </p:spPr>
+        <p:txBody>
+          <a:bodyPr wrap="square" lIns="0" tIns="0" rIns="0" bIns="0" rtlCol="0" anchor="t"/>
+          <a:lstStyle/>
+          <a:p>
+            <a:pPr algn="l" indent="0" marL="0">
+              <a:buNone/>
+            </a:pPr>
+            <a:r>
+              <a:rPr lang="en-US" sz="1100" dirty="0">
+                <a:solidFill>
+                  <a:schemeClr val="tx2"/>
+                </a:solidFill>
+              </a:rPr>
+              <a:t>Sandbox screen: what is simulated, how to test it</a:t>
+            </a:r>
+            <a:endParaRPr lang="en-US" sz="1100" dirty="0"/>
+          </a:p>
+        </p:txBody>
+      </p:sp>
+      <p:sp>
+        <p:nvSpPr>
+          <p:cNvPr id="9" name="content-11-text-7"/>
+          <p:cNvSpPr txBox="1"/>
+          <p:nvPr/>
+        </p:nvSpPr>
+        <p:spPr>
+          <a:xfrm>
+            <a:off x="4882896" y="4590288"/>
+            <a:ext cx="3803904" cy="274320"/>
+          </a:xfrm>
+          <a:prstGeom prst="rect">
+            <a:avLst/>
+          </a:prstGeom>
+          <a:noFill/>
+          <a:ln/>
+        </p:spPr>
+        <p:txBody>
+          <a:bodyPr wrap="square" lIns="0" tIns="0" rIns="0" bIns="0" rtlCol="0" anchor="t"/>
+          <a:lstStyle/>
+          <a:p>
+            <a:pPr algn="l" indent="0" marL="0">
+              <a:buNone/>
+            </a:pPr>
+            <a:r>
+              <a:rPr lang="en-US" sz="1100" dirty="0">
+                <a:solidFill>
+                  <a:schemeClr val="tx2"/>
+                </a:solidFill>
+              </a:rPr>
+              <a:t>Compliance report: the hash verifies in the browser</a:t>
+            </a:r>
+            <a:endParaRPr lang="en-US" sz="1100" dirty="0"/>
+          </a:p>
+        </p:txBody>
+      </p:sp>
+    </p:spTree>
+  </p:cSld>
+  <p:clrMapOvr>
+    <a:masterClrMapping/>
+  </p:clrMapOvr>
+</p:sld>
+</file>
+
+<file path=ppt/slides/slide12.xml><?xml version="1.0" encoding="utf-8"?>
+<p:sld xmlns:a="http://schemas.openxmlformats.org/drawingml/2006/main" xmlns:r="http://schemas.openxmlformats.org/officeDocument/2006/relationships" xmlns:p="http://schemas.openxmlformats.org/presentationml/2006/main">
+  <p:cSld name="Slide 12">
+    <p:spTree>
+      <p:nvGrpSpPr>
+        <p:cNvPr id="1" name=""/>
+        <p:cNvGrpSpPr/>
+        <p:nvPr/>
+      </p:nvGrpSpPr>
+      <p:grpSpPr>
+        <a:xfrm>
+          <a:off x="0" y="0"/>
+          <a:ext cx="0" cy="0"/>
+          <a:chOff x="0" y="0"/>
+          <a:chExt cx="0" cy="0"/>
+        </a:xfrm>
+      </p:grpSpPr>
+      <p:sp>
+        <p:nvSpPr>
+          <p:cNvPr id="2" name="Text 0"/>
+          <p:cNvSpPr/>
+          <p:nvPr>
+            <p:ph idx="100" type="title" hasCustomPrompt="1"/>
+          </p:nvPr>
+        </p:nvSpPr>
+        <p:spPr>
+          <a:xfrm>
+            <a:off x="457200" y="274320"/>
+            <a:ext cx="8229600" cy="777240"/>
+          </a:xfrm>
+          <a:prstGeom prst="rect">
+            <a:avLst/>
+          </a:prstGeom>
+          <a:noFill/>
+          <a:ln/>
+        </p:spPr>
+        <p:txBody>
+          <a:bodyPr wrap="square" lIns="0" tIns="0" rIns="0" bIns="0" rtlCol="0" anchor="ctr"/>
+          <a:lstStyle/>
+          <a:p>
+            <a:pPr algn="l" indent="0" marL="0">
+              <a:buNone/>
+            </a:pPr>
+            <a:r>
+              <a:rPr lang="en-US" sz="3600" b="1" dirty="0">
+                <a:solidFill>
+                  <a:schemeClr val="bg1"/>
+                </a:solidFill>
+                <a:latin typeface="+mj-lt" pitchFamily="34" charset="0"/>
+                <a:ea typeface="+mj-lt" pitchFamily="34" charset="-122"/>
+                <a:cs typeface="+mj-lt" pitchFamily="34" charset="-120"/>
+              </a:rPr>
               <a:t>What comes next</a:t>
             </a:r>
             <a:endParaRPr lang="en-US" sz="3600" dirty="0"/>
@@ -2979,7 +3973,7 @@
       </p:sp>
       <p:sp>
         <p:nvSpPr>
-          <p:cNvPr id="3" name="closing-11-rect-1"/>
+          <p:cNvPr id="3" name="closing-12-rect-1"/>
           <p:cNvSpPr/>
           <p:nvPr/>
         </p:nvSpPr>
@@ -3001,7 +3995,7 @@
       </p:sp>
       <p:sp>
         <p:nvSpPr>
-          <p:cNvPr id="4" name="closing-11-text-2"/>
+          <p:cNvPr id="4" name="closing-12-text-2"/>
           <p:cNvSpPr txBox="1"/>
           <p:nvPr/>
         </p:nvSpPr>
@@ -3037,7 +4031,7 @@
       </p:sp>
       <p:sp>
         <p:nvSpPr>
-          <p:cNvPr id="5" name="closing-11-text-3"/>
+          <p:cNvPr id="5" name="closing-12-text-3"/>
           <p:cNvSpPr txBox="1"/>
           <p:nvPr/>
         </p:nvSpPr>
@@ -3073,7 +4067,7 @@
       </p:sp>
       <p:sp>
         <p:nvSpPr>
-          <p:cNvPr id="6" name="closing-11-rect-4"/>
+          <p:cNvPr id="6" name="closing-12-rect-4"/>
           <p:cNvSpPr/>
           <p:nvPr/>
         </p:nvSpPr>
@@ -3095,7 +4089,7 @@
       </p:sp>
       <p:sp>
         <p:nvSpPr>
-          <p:cNvPr id="7" name="closing-11-text-5"/>
+          <p:cNvPr id="7" name="closing-12-text-5"/>
           <p:cNvSpPr txBox="1"/>
           <p:nvPr/>
         </p:nvSpPr>
@@ -3131,7 +4125,7 @@
       </p:sp>
       <p:sp>
         <p:nvSpPr>
-          <p:cNvPr id="8" name="closing-11-text-6"/>
+          <p:cNvPr id="8" name="closing-12-text-6"/>
           <p:cNvSpPr txBox="1"/>
           <p:nvPr/>
         </p:nvSpPr>
@@ -3167,7 +4161,7 @@
       </p:sp>
       <p:sp>
         <p:nvSpPr>
-          <p:cNvPr id="9" name="closing-11-rect-7"/>
+          <p:cNvPr id="9" name="closing-12-rect-7"/>
           <p:cNvSpPr/>
           <p:nvPr/>
         </p:nvSpPr>
@@ -3189,7 +4183,7 @@
       </p:sp>
       <p:sp>
         <p:nvSpPr>
-          <p:cNvPr id="10" name="closing-11-text-8"/>
+          <p:cNvPr id="10" name="closing-12-text-8"/>
           <p:cNvSpPr txBox="1"/>
           <p:nvPr/>
         </p:nvSpPr>
@@ -3225,7 +4219,7 @@
       </p:sp>
       <p:sp>
         <p:nvSpPr>
-          <p:cNvPr id="11" name="closing-11-text-9"/>
+          <p:cNvPr id="11" name="closing-12-text-9"/>
           <p:cNvSpPr txBox="1"/>
           <p:nvPr/>
         </p:nvSpPr>
@@ -3261,7 +4255,7 @@
       </p:sp>
       <p:sp>
         <p:nvSpPr>
-          <p:cNvPr id="12" name="closing-11-rect-10"/>
+          <p:cNvPr id="12" name="closing-12-rect-10"/>
           <p:cNvSpPr/>
           <p:nvPr/>
         </p:nvSpPr>
@@ -3283,7 +4277,7 @@
       </p:sp>
       <p:sp>
         <p:nvSpPr>
-          <p:cNvPr id="13" name="closing-11-text-11"/>
+          <p:cNvPr id="13" name="closing-12-text-11"/>
           <p:cNvSpPr txBox="1"/>
           <p:nvPr/>
         </p:nvSpPr>
@@ -3319,7 +4313,7 @@
       </p:sp>
       <p:sp>
         <p:nvSpPr>
-          <p:cNvPr id="14" name="closing-11-text-12"/>
+          <p:cNvPr id="14" name="closing-12-text-12"/>
           <p:cNvSpPr txBox="1"/>
           <p:nvPr/>
         </p:nvSpPr>
@@ -3355,7 +4349,7 @@
       </p:sp>
       <p:sp>
         <p:nvSpPr>
-          <p:cNvPr id="15" name="closing-11-text-13"/>
+          <p:cNvPr id="15" name="closing-12-text-13"/>
           <p:cNvSpPr txBox="1"/>
           <p:nvPr/>
         </p:nvSpPr>
@@ -3394,7 +4388,7 @@
       </p:sp>
       <p:sp>
         <p:nvSpPr>
-          <p:cNvPr id="16" name="closing-11-text-14"/>
+          <p:cNvPr id="16" name="closing-12-text-14"/>
           <p:cNvSpPr txBox="1"/>
           <p:nvPr/>
         </p:nvSpPr>
@@ -9443,26 +10437,1000 @@
                 <a:ea typeface="+mj-lt" pitchFamily="34" charset="-122"/>
                 <a:cs typeface="+mj-lt" pitchFamily="34" charset="-120"/>
               </a:rPr>
-              <a:t>Security you can verify</a:t>
+              <a:t>A trained agent, measured</a:t>
             </a:r>
             <a:endParaRPr lang="en-US" sz="3600" dirty="0"/>
           </a:p>
         </p:txBody>
       </p:sp>
-      <p:sp>
-        <p:nvSpPr>
-          <p:cNvPr id="3" name="content-9-rect-1"/>
+      <p:graphicFrame>
+        <p:nvGraphicFramePr>
+          <p:cNvPr id="10" name="content-9-table-1"/>
+          <p:cNvGraphicFramePr>
+            <a:graphicFrameLocks noGrp="1"/>
+          </p:cNvGraphicFramePr>
+          <p:nvPr>
+            <p:extLst>
+              <p:ext uri="{D42A27DB-BD31-4B8C-83A1-F6EECF244321}">
+                <p14:modId xmlns:p14="http://schemas.microsoft.com/office/powerpoint/2010/main" val="1579011935"/>
+              </p:ext>
+            </p:extLst>
+          </p:nvPr>
+        </p:nvGraphicFramePr>
+        <p:xfrm>
+          <a:off x="457200" y="1280160"/>
+          <a:ext cx="3931920" cy="914400"/>
+        </p:xfrm>
+        <a:graphic>
+          <a:graphicData uri="http://schemas.openxmlformats.org/drawingml/2006/table">
+            <a:tbl>
+              <a:tblPr/>
+              <a:tblGrid>
+                <a:gridCol w="1920240"/>
+                <a:gridCol w="1005840"/>
+                <a:gridCol w="1005840"/>
+              </a:tblGrid>
+              <a:tr h="502920">
+                <a:tc>
+                  <a:txBody>
+                    <a:bodyPr/>
+                    <a:lstStyle/>
+                    <a:p>
+                      <a:pPr algn="l" indent="0" marL="0">
+                        <a:buNone/>
+                      </a:pPr>
+                      <a:r>
+                        <a:rPr lang="en-US" sz="1400" b="1" dirty="0">
+                          <a:solidFill>
+                            <a:schemeClr val="bg1"/>
+                          </a:solidFill>
+                        </a:rPr>
+                        <a:t>On 113 new messages</a:t>
+                      </a:r>
+                      <a:endParaRPr lang="en-US" sz="1400" dirty="0"/>
+                    </a:p>
+                  </a:txBody>
+                  <a:tcPr marL="91440" marR="91440" marT="45720" marB="45720" anchor="ctr">
+                    <a:lnL w="9525" cap="flat" cmpd="sng" algn="ctr">
+                      <a:solidFill>
+                        <a:srgbClr val="C9D6E3"/>
+                      </a:solidFill>
+                      <a:prstDash val="solid"/>
+                      <a:round/>
+                      <a:headEnd type="none" w="med" len="med"/>
+                      <a:tailEnd type="none" w="med" len="med"/>
+                    </a:lnL>
+                    <a:lnR w="9525" cap="flat" cmpd="sng" algn="ctr">
+                      <a:solidFill>
+                        <a:srgbClr val="C9D6E3"/>
+                      </a:solidFill>
+                      <a:prstDash val="solid"/>
+                      <a:round/>
+                      <a:headEnd type="none" w="med" len="med"/>
+                      <a:tailEnd type="none" w="med" len="med"/>
+                    </a:lnR>
+                    <a:lnT w="9525" cap="flat" cmpd="sng" algn="ctr">
+                      <a:solidFill>
+                        <a:srgbClr val="C9D6E3"/>
+                      </a:solidFill>
+                      <a:prstDash val="solid"/>
+                      <a:round/>
+                      <a:headEnd type="none" w="med" len="med"/>
+                      <a:tailEnd type="none" w="med" len="med"/>
+                    </a:lnT>
+                    <a:lnB w="9525" cap="flat" cmpd="sng" algn="ctr">
+                      <a:solidFill>
+                        <a:srgbClr val="C9D6E3"/>
+                      </a:solidFill>
+                      <a:prstDash val="solid"/>
+                      <a:round/>
+                      <a:headEnd type="none" w="med" len="med"/>
+                      <a:tailEnd type="none" w="med" len="med"/>
+                    </a:lnB>
+                    <a:solidFill>
+                      <a:schemeClr val="tx1"/>
+                    </a:solidFill>
+                  </a:tcPr>
+                </a:tc>
+                <a:tc>
+                  <a:txBody>
+                    <a:bodyPr/>
+                    <a:lstStyle/>
+                    <a:p>
+                      <a:pPr algn="l" indent="0" marL="0">
+                        <a:buNone/>
+                      </a:pPr>
+                      <a:r>
+                        <a:rPr lang="en-US" sz="1400" b="1" dirty="0">
+                          <a:solidFill>
+                            <a:schemeClr val="bg1"/>
+                          </a:solidFill>
+                        </a:rPr>
+                        <a:t>Rules</a:t>
+                      </a:r>
+                      <a:endParaRPr lang="en-US" sz="1400" dirty="0"/>
+                    </a:p>
+                  </a:txBody>
+                  <a:tcPr marL="91440" marR="91440" marT="45720" marB="45720" anchor="ctr">
+                    <a:lnL w="9525" cap="flat" cmpd="sng" algn="ctr">
+                      <a:solidFill>
+                        <a:srgbClr val="C9D6E3"/>
+                      </a:solidFill>
+                      <a:prstDash val="solid"/>
+                      <a:round/>
+                      <a:headEnd type="none" w="med" len="med"/>
+                      <a:tailEnd type="none" w="med" len="med"/>
+                    </a:lnL>
+                    <a:lnR w="9525" cap="flat" cmpd="sng" algn="ctr">
+                      <a:solidFill>
+                        <a:srgbClr val="C9D6E3"/>
+                      </a:solidFill>
+                      <a:prstDash val="solid"/>
+                      <a:round/>
+                      <a:headEnd type="none" w="med" len="med"/>
+                      <a:tailEnd type="none" w="med" len="med"/>
+                    </a:lnR>
+                    <a:lnT w="9525" cap="flat" cmpd="sng" algn="ctr">
+                      <a:solidFill>
+                        <a:srgbClr val="C9D6E3"/>
+                      </a:solidFill>
+                      <a:prstDash val="solid"/>
+                      <a:round/>
+                      <a:headEnd type="none" w="med" len="med"/>
+                      <a:tailEnd type="none" w="med" len="med"/>
+                    </a:lnT>
+                    <a:lnB w="9525" cap="flat" cmpd="sng" algn="ctr">
+                      <a:solidFill>
+                        <a:srgbClr val="C9D6E3"/>
+                      </a:solidFill>
+                      <a:prstDash val="solid"/>
+                      <a:round/>
+                      <a:headEnd type="none" w="med" len="med"/>
+                      <a:tailEnd type="none" w="med" len="med"/>
+                    </a:lnB>
+                    <a:solidFill>
+                      <a:schemeClr val="tx1"/>
+                    </a:solidFill>
+                  </a:tcPr>
+                </a:tc>
+                <a:tc>
+                  <a:txBody>
+                    <a:bodyPr/>
+                    <a:lstStyle/>
+                    <a:p>
+                      <a:pPr algn="l" indent="0" marL="0">
+                        <a:buNone/>
+                      </a:pPr>
+                      <a:r>
+                        <a:rPr lang="en-US" sz="1400" b="1" dirty="0">
+                          <a:solidFill>
+                            <a:schemeClr val="bg1"/>
+                          </a:solidFill>
+                        </a:rPr>
+                        <a:t>Agent</a:t>
+                      </a:r>
+                      <a:endParaRPr lang="en-US" sz="1400" dirty="0"/>
+                    </a:p>
+                  </a:txBody>
+                  <a:tcPr marL="91440" marR="91440" marT="45720" marB="45720" anchor="ctr">
+                    <a:lnL w="9525" cap="flat" cmpd="sng" algn="ctr">
+                      <a:solidFill>
+                        <a:srgbClr val="C9D6E3"/>
+                      </a:solidFill>
+                      <a:prstDash val="solid"/>
+                      <a:round/>
+                      <a:headEnd type="none" w="med" len="med"/>
+                      <a:tailEnd type="none" w="med" len="med"/>
+                    </a:lnL>
+                    <a:lnR w="9525" cap="flat" cmpd="sng" algn="ctr">
+                      <a:solidFill>
+                        <a:srgbClr val="C9D6E3"/>
+                      </a:solidFill>
+                      <a:prstDash val="solid"/>
+                      <a:round/>
+                      <a:headEnd type="none" w="med" len="med"/>
+                      <a:tailEnd type="none" w="med" len="med"/>
+                    </a:lnR>
+                    <a:lnT w="9525" cap="flat" cmpd="sng" algn="ctr">
+                      <a:solidFill>
+                        <a:srgbClr val="C9D6E3"/>
+                      </a:solidFill>
+                      <a:prstDash val="solid"/>
+                      <a:round/>
+                      <a:headEnd type="none" w="med" len="med"/>
+                      <a:tailEnd type="none" w="med" len="med"/>
+                    </a:lnT>
+                    <a:lnB w="9525" cap="flat" cmpd="sng" algn="ctr">
+                      <a:solidFill>
+                        <a:srgbClr val="C9D6E3"/>
+                      </a:solidFill>
+                      <a:prstDash val="solid"/>
+                      <a:round/>
+                      <a:headEnd type="none" w="med" len="med"/>
+                      <a:tailEnd type="none" w="med" len="med"/>
+                    </a:lnB>
+                    <a:solidFill>
+                      <a:schemeClr val="tx1"/>
+                    </a:solidFill>
+                  </a:tcPr>
+                </a:tc>
+              </a:tr>
+              <a:tr h="502920">
+                <a:tc>
+                  <a:txBody>
+                    <a:bodyPr/>
+                    <a:lstStyle/>
+                    <a:p>
+                      <a:pPr algn="l" indent="0" marL="0">
+                        <a:buNone/>
+                      </a:pPr>
+                      <a:r>
+                        <a:rPr lang="en-US" sz="1400" dirty="0">
+                          <a:solidFill>
+                            <a:schemeClr val="tx1"/>
+                          </a:solidFill>
+                        </a:rPr>
+                        <a:t>Right intent</a:t>
+                      </a:r>
+                      <a:endParaRPr lang="en-US" sz="1400" dirty="0"/>
+                    </a:p>
+                  </a:txBody>
+                  <a:tcPr marL="91440" marR="91440" marT="45720" marB="45720" anchor="ctr">
+                    <a:lnL w="9525" cap="flat" cmpd="sng" algn="ctr">
+                      <a:solidFill>
+                        <a:srgbClr val="C9D6E3"/>
+                      </a:solidFill>
+                      <a:prstDash val="solid"/>
+                      <a:round/>
+                      <a:headEnd type="none" w="med" len="med"/>
+                      <a:tailEnd type="none" w="med" len="med"/>
+                    </a:lnL>
+                    <a:lnR w="9525" cap="flat" cmpd="sng" algn="ctr">
+                      <a:solidFill>
+                        <a:srgbClr val="C9D6E3"/>
+                      </a:solidFill>
+                      <a:prstDash val="solid"/>
+                      <a:round/>
+                      <a:headEnd type="none" w="med" len="med"/>
+                      <a:tailEnd type="none" w="med" len="med"/>
+                    </a:lnR>
+                    <a:lnT w="9525" cap="flat" cmpd="sng" algn="ctr">
+                      <a:solidFill>
+                        <a:srgbClr val="C9D6E3"/>
+                      </a:solidFill>
+                      <a:prstDash val="solid"/>
+                      <a:round/>
+                      <a:headEnd type="none" w="med" len="med"/>
+                      <a:tailEnd type="none" w="med" len="med"/>
+                    </a:lnT>
+                    <a:lnB w="9525" cap="flat" cmpd="sng" algn="ctr">
+                      <a:solidFill>
+                        <a:srgbClr val="C9D6E3"/>
+                      </a:solidFill>
+                      <a:prstDash val="solid"/>
+                      <a:round/>
+                      <a:headEnd type="none" w="med" len="med"/>
+                      <a:tailEnd type="none" w="med" len="med"/>
+                    </a:lnB>
+                    <a:solidFill>
+                      <a:schemeClr val="bg2"/>
+                    </a:solidFill>
+                  </a:tcPr>
+                </a:tc>
+                <a:tc>
+                  <a:txBody>
+                    <a:bodyPr/>
+                    <a:lstStyle/>
+                    <a:p>
+                      <a:pPr algn="l" indent="0" marL="0">
+                        <a:buNone/>
+                      </a:pPr>
+                      <a:r>
+                        <a:rPr lang="en-US" sz="1400" dirty="0">
+                          <a:solidFill>
+                            <a:schemeClr val="tx1"/>
+                          </a:solidFill>
+                        </a:rPr>
+                        <a:t>61.1%</a:t>
+                      </a:r>
+                      <a:endParaRPr lang="en-US" sz="1400" dirty="0"/>
+                    </a:p>
+                  </a:txBody>
+                  <a:tcPr marL="91440" marR="91440" marT="45720" marB="45720" anchor="ctr">
+                    <a:lnL w="9525" cap="flat" cmpd="sng" algn="ctr">
+                      <a:solidFill>
+                        <a:srgbClr val="C9D6E3"/>
+                      </a:solidFill>
+                      <a:prstDash val="solid"/>
+                      <a:round/>
+                      <a:headEnd type="none" w="med" len="med"/>
+                      <a:tailEnd type="none" w="med" len="med"/>
+                    </a:lnL>
+                    <a:lnR w="9525" cap="flat" cmpd="sng" algn="ctr">
+                      <a:solidFill>
+                        <a:srgbClr val="C9D6E3"/>
+                      </a:solidFill>
+                      <a:prstDash val="solid"/>
+                      <a:round/>
+                      <a:headEnd type="none" w="med" len="med"/>
+                      <a:tailEnd type="none" w="med" len="med"/>
+                    </a:lnR>
+                    <a:lnT w="9525" cap="flat" cmpd="sng" algn="ctr">
+                      <a:solidFill>
+                        <a:srgbClr val="C9D6E3"/>
+                      </a:solidFill>
+                      <a:prstDash val="solid"/>
+                      <a:round/>
+                      <a:headEnd type="none" w="med" len="med"/>
+                      <a:tailEnd type="none" w="med" len="med"/>
+                    </a:lnT>
+                    <a:lnB w="9525" cap="flat" cmpd="sng" algn="ctr">
+                      <a:solidFill>
+                        <a:srgbClr val="C9D6E3"/>
+                      </a:solidFill>
+                      <a:prstDash val="solid"/>
+                      <a:round/>
+                      <a:headEnd type="none" w="med" len="med"/>
+                      <a:tailEnd type="none" w="med" len="med"/>
+                    </a:lnB>
+                    <a:solidFill>
+                      <a:schemeClr val="bg2"/>
+                    </a:solidFill>
+                  </a:tcPr>
+                </a:tc>
+                <a:tc>
+                  <a:txBody>
+                    <a:bodyPr/>
+                    <a:lstStyle/>
+                    <a:p>
+                      <a:pPr algn="l" indent="0" marL="0">
+                        <a:buNone/>
+                      </a:pPr>
+                      <a:r>
+                        <a:rPr lang="en-US" sz="1400" b="1" dirty="0">
+                          <a:solidFill>
+                            <a:schemeClr val="accent1"/>
+                          </a:solidFill>
+                        </a:rPr>
+                        <a:t>88.5%</a:t>
+                      </a:r>
+                      <a:endParaRPr lang="en-US" sz="1400" dirty="0"/>
+                    </a:p>
+                  </a:txBody>
+                  <a:tcPr marL="91440" marR="91440" marT="45720" marB="45720" anchor="ctr">
+                    <a:lnL w="9525" cap="flat" cmpd="sng" algn="ctr">
+                      <a:solidFill>
+                        <a:srgbClr val="C9D6E3"/>
+                      </a:solidFill>
+                      <a:prstDash val="solid"/>
+                      <a:round/>
+                      <a:headEnd type="none" w="med" len="med"/>
+                      <a:tailEnd type="none" w="med" len="med"/>
+                    </a:lnL>
+                    <a:lnR w="9525" cap="flat" cmpd="sng" algn="ctr">
+                      <a:solidFill>
+                        <a:srgbClr val="C9D6E3"/>
+                      </a:solidFill>
+                      <a:prstDash val="solid"/>
+                      <a:round/>
+                      <a:headEnd type="none" w="med" len="med"/>
+                      <a:tailEnd type="none" w="med" len="med"/>
+                    </a:lnR>
+                    <a:lnT w="9525" cap="flat" cmpd="sng" algn="ctr">
+                      <a:solidFill>
+                        <a:srgbClr val="C9D6E3"/>
+                      </a:solidFill>
+                      <a:prstDash val="solid"/>
+                      <a:round/>
+                      <a:headEnd type="none" w="med" len="med"/>
+                      <a:tailEnd type="none" w="med" len="med"/>
+                    </a:lnT>
+                    <a:lnB w="9525" cap="flat" cmpd="sng" algn="ctr">
+                      <a:solidFill>
+                        <a:srgbClr val="C9D6E3"/>
+                      </a:solidFill>
+                      <a:prstDash val="solid"/>
+                      <a:round/>
+                      <a:headEnd type="none" w="med" len="med"/>
+                      <a:tailEnd type="none" w="med" len="med"/>
+                    </a:lnB>
+                    <a:solidFill>
+                      <a:schemeClr val="bg2"/>
+                    </a:solidFill>
+                  </a:tcPr>
+                </a:tc>
+              </a:tr>
+              <a:tr h="502920">
+                <a:tc>
+                  <a:txBody>
+                    <a:bodyPr/>
+                    <a:lstStyle/>
+                    <a:p>
+                      <a:pPr algn="l" indent="0" marL="0">
+                        <a:buNone/>
+                      </a:pPr>
+                      <a:r>
+                        <a:rPr lang="en-US" sz="1400" dirty="0">
+                          <a:solidFill>
+                            <a:schemeClr val="tx1"/>
+                          </a:solidFill>
+                        </a:rPr>
+                        <a:t>Plan read exactly</a:t>
+                      </a:r>
+                      <a:endParaRPr lang="en-US" sz="1400" dirty="0"/>
+                    </a:p>
+                  </a:txBody>
+                  <a:tcPr marL="91440" marR="91440" marT="45720" marB="45720" anchor="ctr">
+                    <a:lnL w="9525" cap="flat" cmpd="sng" algn="ctr">
+                      <a:solidFill>
+                        <a:srgbClr val="C9D6E3"/>
+                      </a:solidFill>
+                      <a:prstDash val="solid"/>
+                      <a:round/>
+                      <a:headEnd type="none" w="med" len="med"/>
+                      <a:tailEnd type="none" w="med" len="med"/>
+                    </a:lnL>
+                    <a:lnR w="9525" cap="flat" cmpd="sng" algn="ctr">
+                      <a:solidFill>
+                        <a:srgbClr val="C9D6E3"/>
+                      </a:solidFill>
+                      <a:prstDash val="solid"/>
+                      <a:round/>
+                      <a:headEnd type="none" w="med" len="med"/>
+                      <a:tailEnd type="none" w="med" len="med"/>
+                    </a:lnR>
+                    <a:lnT w="9525" cap="flat" cmpd="sng" algn="ctr">
+                      <a:solidFill>
+                        <a:srgbClr val="C9D6E3"/>
+                      </a:solidFill>
+                      <a:prstDash val="solid"/>
+                      <a:round/>
+                      <a:headEnd type="none" w="med" len="med"/>
+                      <a:tailEnd type="none" w="med" len="med"/>
+                    </a:lnT>
+                    <a:lnB w="9525" cap="flat" cmpd="sng" algn="ctr">
+                      <a:solidFill>
+                        <a:srgbClr val="C9D6E3"/>
+                      </a:solidFill>
+                      <a:prstDash val="solid"/>
+                      <a:round/>
+                      <a:headEnd type="none" w="med" len="med"/>
+                      <a:tailEnd type="none" w="med" len="med"/>
+                    </a:lnB>
+                  </a:tcPr>
+                </a:tc>
+                <a:tc>
+                  <a:txBody>
+                    <a:bodyPr/>
+                    <a:lstStyle/>
+                    <a:p>
+                      <a:pPr algn="l" indent="0" marL="0">
+                        <a:buNone/>
+                      </a:pPr>
+                      <a:r>
+                        <a:rPr lang="en-US" sz="1400" dirty="0">
+                          <a:solidFill>
+                            <a:schemeClr val="tx1"/>
+                          </a:solidFill>
+                        </a:rPr>
+                        <a:t>57.6%</a:t>
+                      </a:r>
+                      <a:endParaRPr lang="en-US" sz="1400" dirty="0"/>
+                    </a:p>
+                  </a:txBody>
+                  <a:tcPr marL="91440" marR="91440" marT="45720" marB="45720" anchor="ctr">
+                    <a:lnL w="9525" cap="flat" cmpd="sng" algn="ctr">
+                      <a:solidFill>
+                        <a:srgbClr val="C9D6E3"/>
+                      </a:solidFill>
+                      <a:prstDash val="solid"/>
+                      <a:round/>
+                      <a:headEnd type="none" w="med" len="med"/>
+                      <a:tailEnd type="none" w="med" len="med"/>
+                    </a:lnL>
+                    <a:lnR w="9525" cap="flat" cmpd="sng" algn="ctr">
+                      <a:solidFill>
+                        <a:srgbClr val="C9D6E3"/>
+                      </a:solidFill>
+                      <a:prstDash val="solid"/>
+                      <a:round/>
+                      <a:headEnd type="none" w="med" len="med"/>
+                      <a:tailEnd type="none" w="med" len="med"/>
+                    </a:lnR>
+                    <a:lnT w="9525" cap="flat" cmpd="sng" algn="ctr">
+                      <a:solidFill>
+                        <a:srgbClr val="C9D6E3"/>
+                      </a:solidFill>
+                      <a:prstDash val="solid"/>
+                      <a:round/>
+                      <a:headEnd type="none" w="med" len="med"/>
+                      <a:tailEnd type="none" w="med" len="med"/>
+                    </a:lnT>
+                    <a:lnB w="9525" cap="flat" cmpd="sng" algn="ctr">
+                      <a:solidFill>
+                        <a:srgbClr val="C9D6E3"/>
+                      </a:solidFill>
+                      <a:prstDash val="solid"/>
+                      <a:round/>
+                      <a:headEnd type="none" w="med" len="med"/>
+                      <a:tailEnd type="none" w="med" len="med"/>
+                    </a:lnB>
+                  </a:tcPr>
+                </a:tc>
+                <a:tc>
+                  <a:txBody>
+                    <a:bodyPr/>
+                    <a:lstStyle/>
+                    <a:p>
+                      <a:pPr algn="l" indent="0" marL="0">
+                        <a:buNone/>
+                      </a:pPr>
+                      <a:r>
+                        <a:rPr lang="en-US" sz="1400" b="1" dirty="0">
+                          <a:solidFill>
+                            <a:schemeClr val="accent1"/>
+                          </a:solidFill>
+                        </a:rPr>
+                        <a:t>100%</a:t>
+                      </a:r>
+                      <a:endParaRPr lang="en-US" sz="1400" dirty="0"/>
+                    </a:p>
+                  </a:txBody>
+                  <a:tcPr marL="91440" marR="91440" marT="45720" marB="45720" anchor="ctr">
+                    <a:lnL w="9525" cap="flat" cmpd="sng" algn="ctr">
+                      <a:solidFill>
+                        <a:srgbClr val="C9D6E3"/>
+                      </a:solidFill>
+                      <a:prstDash val="solid"/>
+                      <a:round/>
+                      <a:headEnd type="none" w="med" len="med"/>
+                      <a:tailEnd type="none" w="med" len="med"/>
+                    </a:lnL>
+                    <a:lnR w="9525" cap="flat" cmpd="sng" algn="ctr">
+                      <a:solidFill>
+                        <a:srgbClr val="C9D6E3"/>
+                      </a:solidFill>
+                      <a:prstDash val="solid"/>
+                      <a:round/>
+                      <a:headEnd type="none" w="med" len="med"/>
+                      <a:tailEnd type="none" w="med" len="med"/>
+                    </a:lnR>
+                    <a:lnT w="9525" cap="flat" cmpd="sng" algn="ctr">
+                      <a:solidFill>
+                        <a:srgbClr val="C9D6E3"/>
+                      </a:solidFill>
+                      <a:prstDash val="solid"/>
+                      <a:round/>
+                      <a:headEnd type="none" w="med" len="med"/>
+                      <a:tailEnd type="none" w="med" len="med"/>
+                    </a:lnT>
+                    <a:lnB w="9525" cap="flat" cmpd="sng" algn="ctr">
+                      <a:solidFill>
+                        <a:srgbClr val="C9D6E3"/>
+                      </a:solidFill>
+                      <a:prstDash val="solid"/>
+                      <a:round/>
+                      <a:headEnd type="none" w="med" len="med"/>
+                      <a:tailEnd type="none" w="med" len="med"/>
+                    </a:lnB>
+                  </a:tcPr>
+                </a:tc>
+              </a:tr>
+              <a:tr h="502920">
+                <a:tc>
+                  <a:txBody>
+                    <a:bodyPr/>
+                    <a:lstStyle/>
+                    <a:p>
+                      <a:pPr algn="l" indent="0" marL="0">
+                        <a:buNone/>
+                      </a:pPr>
+                      <a:r>
+                        <a:rPr lang="en-US" sz="1400" dirty="0">
+                          <a:solidFill>
+                            <a:schemeClr val="tx1"/>
+                          </a:solidFill>
+                        </a:rPr>
+                        <a:t>Attacks blocked</a:t>
+                      </a:r>
+                      <a:endParaRPr lang="en-US" sz="1400" dirty="0"/>
+                    </a:p>
+                  </a:txBody>
+                  <a:tcPr marL="91440" marR="91440" marT="45720" marB="45720" anchor="ctr">
+                    <a:lnL w="9525" cap="flat" cmpd="sng" algn="ctr">
+                      <a:solidFill>
+                        <a:srgbClr val="C9D6E3"/>
+                      </a:solidFill>
+                      <a:prstDash val="solid"/>
+                      <a:round/>
+                      <a:headEnd type="none" w="med" len="med"/>
+                      <a:tailEnd type="none" w="med" len="med"/>
+                    </a:lnL>
+                    <a:lnR w="9525" cap="flat" cmpd="sng" algn="ctr">
+                      <a:solidFill>
+                        <a:srgbClr val="C9D6E3"/>
+                      </a:solidFill>
+                      <a:prstDash val="solid"/>
+                      <a:round/>
+                      <a:headEnd type="none" w="med" len="med"/>
+                      <a:tailEnd type="none" w="med" len="med"/>
+                    </a:lnR>
+                    <a:lnT w="9525" cap="flat" cmpd="sng" algn="ctr">
+                      <a:solidFill>
+                        <a:srgbClr val="C9D6E3"/>
+                      </a:solidFill>
+                      <a:prstDash val="solid"/>
+                      <a:round/>
+                      <a:headEnd type="none" w="med" len="med"/>
+                      <a:tailEnd type="none" w="med" len="med"/>
+                    </a:lnT>
+                    <a:lnB w="9525" cap="flat" cmpd="sng" algn="ctr">
+                      <a:solidFill>
+                        <a:srgbClr val="C9D6E3"/>
+                      </a:solidFill>
+                      <a:prstDash val="solid"/>
+                      <a:round/>
+                      <a:headEnd type="none" w="med" len="med"/>
+                      <a:tailEnd type="none" w="med" len="med"/>
+                    </a:lnB>
+                    <a:solidFill>
+                      <a:schemeClr val="bg2"/>
+                    </a:solidFill>
+                  </a:tcPr>
+                </a:tc>
+                <a:tc>
+                  <a:txBody>
+                    <a:bodyPr/>
+                    <a:lstStyle/>
+                    <a:p>
+                      <a:pPr algn="l" indent="0" marL="0">
+                        <a:buNone/>
+                      </a:pPr>
+                      <a:r>
+                        <a:rPr lang="en-US" sz="1400" dirty="0">
+                          <a:solidFill>
+                            <a:schemeClr val="tx1"/>
+                          </a:solidFill>
+                        </a:rPr>
+                        <a:t>28.6%</a:t>
+                      </a:r>
+                      <a:endParaRPr lang="en-US" sz="1400" dirty="0"/>
+                    </a:p>
+                  </a:txBody>
+                  <a:tcPr marL="91440" marR="91440" marT="45720" marB="45720" anchor="ctr">
+                    <a:lnL w="9525" cap="flat" cmpd="sng" algn="ctr">
+                      <a:solidFill>
+                        <a:srgbClr val="C9D6E3"/>
+                      </a:solidFill>
+                      <a:prstDash val="solid"/>
+                      <a:round/>
+                      <a:headEnd type="none" w="med" len="med"/>
+                      <a:tailEnd type="none" w="med" len="med"/>
+                    </a:lnL>
+                    <a:lnR w="9525" cap="flat" cmpd="sng" algn="ctr">
+                      <a:solidFill>
+                        <a:srgbClr val="C9D6E3"/>
+                      </a:solidFill>
+                      <a:prstDash val="solid"/>
+                      <a:round/>
+                      <a:headEnd type="none" w="med" len="med"/>
+                      <a:tailEnd type="none" w="med" len="med"/>
+                    </a:lnR>
+                    <a:lnT w="9525" cap="flat" cmpd="sng" algn="ctr">
+                      <a:solidFill>
+                        <a:srgbClr val="C9D6E3"/>
+                      </a:solidFill>
+                      <a:prstDash val="solid"/>
+                      <a:round/>
+                      <a:headEnd type="none" w="med" len="med"/>
+                      <a:tailEnd type="none" w="med" len="med"/>
+                    </a:lnT>
+                    <a:lnB w="9525" cap="flat" cmpd="sng" algn="ctr">
+                      <a:solidFill>
+                        <a:srgbClr val="C9D6E3"/>
+                      </a:solidFill>
+                      <a:prstDash val="solid"/>
+                      <a:round/>
+                      <a:headEnd type="none" w="med" len="med"/>
+                      <a:tailEnd type="none" w="med" len="med"/>
+                    </a:lnB>
+                    <a:solidFill>
+                      <a:schemeClr val="bg2"/>
+                    </a:solidFill>
+                  </a:tcPr>
+                </a:tc>
+                <a:tc>
+                  <a:txBody>
+                    <a:bodyPr/>
+                    <a:lstStyle/>
+                    <a:p>
+                      <a:pPr algn="l" indent="0" marL="0">
+                        <a:buNone/>
+                      </a:pPr>
+                      <a:r>
+                        <a:rPr lang="en-US" sz="1400" b="1" dirty="0">
+                          <a:solidFill>
+                            <a:schemeClr val="accent1"/>
+                          </a:solidFill>
+                        </a:rPr>
+                        <a:t>92.9%</a:t>
+                      </a:r>
+                      <a:endParaRPr lang="en-US" sz="1400" dirty="0"/>
+                    </a:p>
+                  </a:txBody>
+                  <a:tcPr marL="91440" marR="91440" marT="45720" marB="45720" anchor="ctr">
+                    <a:lnL w="9525" cap="flat" cmpd="sng" algn="ctr">
+                      <a:solidFill>
+                        <a:srgbClr val="C9D6E3"/>
+                      </a:solidFill>
+                      <a:prstDash val="solid"/>
+                      <a:round/>
+                      <a:headEnd type="none" w="med" len="med"/>
+                      <a:tailEnd type="none" w="med" len="med"/>
+                    </a:lnL>
+                    <a:lnR w="9525" cap="flat" cmpd="sng" algn="ctr">
+                      <a:solidFill>
+                        <a:srgbClr val="C9D6E3"/>
+                      </a:solidFill>
+                      <a:prstDash val="solid"/>
+                      <a:round/>
+                      <a:headEnd type="none" w="med" len="med"/>
+                      <a:tailEnd type="none" w="med" len="med"/>
+                    </a:lnR>
+                    <a:lnT w="9525" cap="flat" cmpd="sng" algn="ctr">
+                      <a:solidFill>
+                        <a:srgbClr val="C9D6E3"/>
+                      </a:solidFill>
+                      <a:prstDash val="solid"/>
+                      <a:round/>
+                      <a:headEnd type="none" w="med" len="med"/>
+                      <a:tailEnd type="none" w="med" len="med"/>
+                    </a:lnT>
+                    <a:lnB w="9525" cap="flat" cmpd="sng" algn="ctr">
+                      <a:solidFill>
+                        <a:srgbClr val="C9D6E3"/>
+                      </a:solidFill>
+                      <a:prstDash val="solid"/>
+                      <a:round/>
+                      <a:headEnd type="none" w="med" len="med"/>
+                      <a:tailEnd type="none" w="med" len="med"/>
+                    </a:lnB>
+                    <a:solidFill>
+                      <a:schemeClr val="bg2"/>
+                    </a:solidFill>
+                  </a:tcPr>
+                </a:tc>
+              </a:tr>
+              <a:tr h="502920">
+                <a:tc>
+                  <a:txBody>
+                    <a:bodyPr/>
+                    <a:lstStyle/>
+                    <a:p>
+                      <a:pPr algn="l" indent="0" marL="0">
+                        <a:buNone/>
+                      </a:pPr>
+                      <a:r>
+                        <a:rPr lang="en-US" sz="1400" dirty="0">
+                          <a:solidFill>
+                            <a:schemeClr val="tx1"/>
+                          </a:solidFill>
+                        </a:rPr>
+                        <a:t>Harmless blocked</a:t>
+                      </a:r>
+                      <a:endParaRPr lang="en-US" sz="1400" dirty="0"/>
+                    </a:p>
+                  </a:txBody>
+                  <a:tcPr marL="91440" marR="91440" marT="45720" marB="45720" anchor="ctr">
+                    <a:lnL w="9525" cap="flat" cmpd="sng" algn="ctr">
+                      <a:solidFill>
+                        <a:srgbClr val="C9D6E3"/>
+                      </a:solidFill>
+                      <a:prstDash val="solid"/>
+                      <a:round/>
+                      <a:headEnd type="none" w="med" len="med"/>
+                      <a:tailEnd type="none" w="med" len="med"/>
+                    </a:lnL>
+                    <a:lnR w="9525" cap="flat" cmpd="sng" algn="ctr">
+                      <a:solidFill>
+                        <a:srgbClr val="C9D6E3"/>
+                      </a:solidFill>
+                      <a:prstDash val="solid"/>
+                      <a:round/>
+                      <a:headEnd type="none" w="med" len="med"/>
+                      <a:tailEnd type="none" w="med" len="med"/>
+                    </a:lnR>
+                    <a:lnT w="9525" cap="flat" cmpd="sng" algn="ctr">
+                      <a:solidFill>
+                        <a:srgbClr val="C9D6E3"/>
+                      </a:solidFill>
+                      <a:prstDash val="solid"/>
+                      <a:round/>
+                      <a:headEnd type="none" w="med" len="med"/>
+                      <a:tailEnd type="none" w="med" len="med"/>
+                    </a:lnT>
+                    <a:lnB w="9525" cap="flat" cmpd="sng" algn="ctr">
+                      <a:solidFill>
+                        <a:srgbClr val="C9D6E3"/>
+                      </a:solidFill>
+                      <a:prstDash val="solid"/>
+                      <a:round/>
+                      <a:headEnd type="none" w="med" len="med"/>
+                      <a:tailEnd type="none" w="med" len="med"/>
+                    </a:lnB>
+                  </a:tcPr>
+                </a:tc>
+                <a:tc>
+                  <a:txBody>
+                    <a:bodyPr/>
+                    <a:lstStyle/>
+                    <a:p>
+                      <a:pPr algn="l" indent="0" marL="0">
+                        <a:buNone/>
+                      </a:pPr>
+                      <a:r>
+                        <a:rPr lang="en-US" sz="1400" dirty="0">
+                          <a:solidFill>
+                            <a:schemeClr val="tx1"/>
+                          </a:solidFill>
+                        </a:rPr>
+                        <a:t>2%</a:t>
+                      </a:r>
+                      <a:endParaRPr lang="en-US" sz="1400" dirty="0"/>
+                    </a:p>
+                  </a:txBody>
+                  <a:tcPr marL="91440" marR="91440" marT="45720" marB="45720" anchor="ctr">
+                    <a:lnL w="9525" cap="flat" cmpd="sng" algn="ctr">
+                      <a:solidFill>
+                        <a:srgbClr val="C9D6E3"/>
+                      </a:solidFill>
+                      <a:prstDash val="solid"/>
+                      <a:round/>
+                      <a:headEnd type="none" w="med" len="med"/>
+                      <a:tailEnd type="none" w="med" len="med"/>
+                    </a:lnL>
+                    <a:lnR w="9525" cap="flat" cmpd="sng" algn="ctr">
+                      <a:solidFill>
+                        <a:srgbClr val="C9D6E3"/>
+                      </a:solidFill>
+                      <a:prstDash val="solid"/>
+                      <a:round/>
+                      <a:headEnd type="none" w="med" len="med"/>
+                      <a:tailEnd type="none" w="med" len="med"/>
+                    </a:lnR>
+                    <a:lnT w="9525" cap="flat" cmpd="sng" algn="ctr">
+                      <a:solidFill>
+                        <a:srgbClr val="C9D6E3"/>
+                      </a:solidFill>
+                      <a:prstDash val="solid"/>
+                      <a:round/>
+                      <a:headEnd type="none" w="med" len="med"/>
+                      <a:tailEnd type="none" w="med" len="med"/>
+                    </a:lnT>
+                    <a:lnB w="9525" cap="flat" cmpd="sng" algn="ctr">
+                      <a:solidFill>
+                        <a:srgbClr val="C9D6E3"/>
+                      </a:solidFill>
+                      <a:prstDash val="solid"/>
+                      <a:round/>
+                      <a:headEnd type="none" w="med" len="med"/>
+                      <a:tailEnd type="none" w="med" len="med"/>
+                    </a:lnB>
+                  </a:tcPr>
+                </a:tc>
+                <a:tc>
+                  <a:txBody>
+                    <a:bodyPr/>
+                    <a:lstStyle/>
+                    <a:p>
+                      <a:pPr algn="l" indent="0" marL="0">
+                        <a:buNone/>
+                      </a:pPr>
+                      <a:r>
+                        <a:rPr lang="en-US" sz="1400" b="1" dirty="0">
+                          <a:solidFill>
+                            <a:schemeClr val="tx1"/>
+                          </a:solidFill>
+                        </a:rPr>
+                        <a:t>2%</a:t>
+                      </a:r>
+                      <a:endParaRPr lang="en-US" sz="1400" dirty="0"/>
+                    </a:p>
+                  </a:txBody>
+                  <a:tcPr marL="91440" marR="91440" marT="45720" marB="45720" anchor="ctr">
+                    <a:lnL w="9525" cap="flat" cmpd="sng" algn="ctr">
+                      <a:solidFill>
+                        <a:srgbClr val="C9D6E3"/>
+                      </a:solidFill>
+                      <a:prstDash val="solid"/>
+                      <a:round/>
+                      <a:headEnd type="none" w="med" len="med"/>
+                      <a:tailEnd type="none" w="med" len="med"/>
+                    </a:lnL>
+                    <a:lnR w="9525" cap="flat" cmpd="sng" algn="ctr">
+                      <a:solidFill>
+                        <a:srgbClr val="C9D6E3"/>
+                      </a:solidFill>
+                      <a:prstDash val="solid"/>
+                      <a:round/>
+                      <a:headEnd type="none" w="med" len="med"/>
+                      <a:tailEnd type="none" w="med" len="med"/>
+                    </a:lnR>
+                    <a:lnT w="9525" cap="flat" cmpd="sng" algn="ctr">
+                      <a:solidFill>
+                        <a:srgbClr val="C9D6E3"/>
+                      </a:solidFill>
+                      <a:prstDash val="solid"/>
+                      <a:round/>
+                      <a:headEnd type="none" w="med" len="med"/>
+                      <a:tailEnd type="none" w="med" len="med"/>
+                    </a:lnT>
+                    <a:lnB w="9525" cap="flat" cmpd="sng" algn="ctr">
+                      <a:solidFill>
+                        <a:srgbClr val="C9D6E3"/>
+                      </a:solidFill>
+                      <a:prstDash val="solid"/>
+                      <a:round/>
+                      <a:headEnd type="none" w="med" len="med"/>
+                      <a:tailEnd type="none" w="med" len="med"/>
+                    </a:lnB>
+                  </a:tcPr>
+                </a:tc>
+              </a:tr>
+            </a:tbl>
+          </a:graphicData>
+        </a:graphic>
+      </p:graphicFrame>
+      <p:sp>
+        <p:nvSpPr>
+          <p:cNvPr id="4" name="content-9-text-2"/>
+          <p:cNvSpPr txBox="1"/>
+          <p:nvPr/>
+        </p:nvSpPr>
+        <p:spPr>
+          <a:xfrm>
+            <a:off x="457200" y="3931920"/>
+            <a:ext cx="4023360" cy="822960"/>
+          </a:xfrm>
+          <a:prstGeom prst="rect">
+            <a:avLst/>
+          </a:prstGeom>
+          <a:noFill/>
+          <a:ln/>
+        </p:spPr>
+        <p:txBody>
+          <a:bodyPr wrap="square" lIns="0" tIns="0" rIns="0" bIns="0" rtlCol="0" anchor="t"/>
+          <a:lstStyle/>
+          <a:p>
+            <a:pPr algn="l" indent="0" marL="0">
+              <a:buNone/>
+            </a:pPr>
+            <a:r>
+              <a:rPr lang="en-US" sz="1200" dirty="0">
+                <a:solidFill>
+                  <a:schemeClr val="tx2"/>
+                </a:solidFill>
+              </a:rPr>
+              <a:t>Written by hand after the model was frozen, scored once. A small sample: about plus or minus 7 points. Real bank questions: rules 40.1%, agent 95.1%.</a:t>
+            </a:r>
+            <a:endParaRPr lang="en-US" sz="1200" dirty="0"/>
+          </a:p>
+        </p:txBody>
+      </p:sp>
+      <p:sp>
+        <p:nvSpPr>
+          <p:cNvPr id="5" name="content-9-rect-3"/>
           <p:cNvSpPr/>
           <p:nvPr/>
         </p:nvSpPr>
         <p:spPr>
           <a:xfrm>
-            <a:off x="457200" y="1280160"/>
-            <a:ext cx="4023360" cy="402336"/>
+            <a:off x="4846320" y="1280160"/>
+            <a:ext cx="3840480" cy="1051560"/>
           </a:xfrm>
           <a:prstGeom prst="roundRect">
             <a:avLst>
-              <a:gd name="adj" fmla="val 13636"/>
+              <a:gd name="adj" fmla="val 6957"/>
             </a:avLst>
           </a:prstGeom>
           <a:solidFill>
@@ -9473,23 +11441,23 @@
       </p:sp>
       <p:sp>
         <p:nvSpPr>
-          <p:cNvPr id="4" name="content-9-text-2"/>
-          <p:cNvSpPr txBox="1"/>
-          <p:nvPr/>
-        </p:nvSpPr>
-        <p:spPr>
-          <a:xfrm>
-            <a:off x="594360" y="1280160"/>
-            <a:ext cx="3794760" cy="402336"/>
-          </a:xfrm>
-          <a:prstGeom prst="rect">
-            <a:avLst/>
-          </a:prstGeom>
-          <a:noFill/>
-          <a:ln/>
-        </p:spPr>
-        <p:txBody>
-          <a:bodyPr wrap="square" lIns="0" tIns="0" rIns="0" bIns="0" rtlCol="0" anchor="ctr"/>
+          <p:cNvPr id="6" name="content-9-text-4"/>
+          <p:cNvSpPr txBox="1"/>
+          <p:nvPr/>
+        </p:nvSpPr>
+        <p:spPr>
+          <a:xfrm>
+            <a:off x="4983480" y="1316736"/>
+            <a:ext cx="3566160" cy="274320"/>
+          </a:xfrm>
+          <a:prstGeom prst="rect">
+            <a:avLst/>
+          </a:prstGeom>
+          <a:noFill/>
+          <a:ln/>
+        </p:spPr>
+        <p:txBody>
+          <a:bodyPr wrap="square" lIns="0" tIns="0" rIns="0" bIns="0" rtlCol="0" anchor="t"/>
           <a:lstStyle/>
           <a:p>
             <a:pPr algn="l" indent="0" marL="0">
@@ -9498,40 +11466,65 @@
             <a:r>
               <a:rPr lang="en-US" sz="1400" b="1" dirty="0">
                 <a:solidFill>
+                  <a:schemeClr val="accent1"/>
+                </a:solidFill>
+              </a:rPr>
+              <a:t>What it does</a:t>
+            </a:r>
+            <a:endParaRPr lang="en-US" sz="1400" dirty="0"/>
+          </a:p>
+        </p:txBody>
+      </p:sp>
+      <p:sp>
+        <p:nvSpPr>
+          <p:cNvPr id="7" name="content-9-text-5"/>
+          <p:cNvSpPr txBox="1"/>
+          <p:nvPr/>
+        </p:nvSpPr>
+        <p:spPr>
+          <a:xfrm>
+            <a:off x="4983480" y="1609344"/>
+            <a:ext cx="3611880" cy="713232"/>
+          </a:xfrm>
+          <a:prstGeom prst="rect">
+            <a:avLst/>
+          </a:prstGeom>
+          <a:noFill/>
+          <a:ln/>
+        </p:spPr>
+        <p:txBody>
+          <a:bodyPr wrap="square" lIns="0" tIns="0" rIns="0" bIns="0" rtlCol="0" anchor="t"/>
+          <a:lstStyle/>
+          <a:p>
+            <a:pPr algn="l" indent="0" marL="0">
+              <a:buNone/>
+            </a:pPr>
+            <a:r>
+              <a:rPr lang="en-US" sz="1100" dirty="0">
+                <a:solidFill>
                   <a:schemeClr val="tx1"/>
                 </a:solidFill>
               </a:rPr>
-              <a:t>Public:</a:t>
-            </a:r>
-            <a:pPr algn="l" indent="0" marL="0">
-              <a:buNone/>
-            </a:pPr>
-            <a:r>
-              <a:rPr lang="en-US" sz="1400" dirty="0">
-                <a:solidFill>
-                  <a:schemeClr val="tx1"/>
-                </a:solidFill>
-              </a:rPr>
-              <a:t> sign in, health</a:t>
-            </a:r>
-            <a:endParaRPr lang="en-US" sz="1400" dirty="0"/>
-          </a:p>
-        </p:txBody>
-      </p:sp>
-      <p:sp>
-        <p:nvSpPr>
-          <p:cNvPr id="5" name="content-9-rect-3"/>
+              <a:t>Reads the intent and marks the words that carry an amount, a currency or a date. It proposes; plain code checks; the engine calculates.</a:t>
+            </a:r>
+            <a:endParaRPr lang="en-US" sz="1100" dirty="0"/>
+          </a:p>
+        </p:txBody>
+      </p:sp>
+      <p:sp>
+        <p:nvSpPr>
+          <p:cNvPr id="8" name="content-9-rect-6"/>
           <p:cNvSpPr/>
           <p:nvPr/>
         </p:nvSpPr>
         <p:spPr>
           <a:xfrm>
-            <a:off x="457200" y="1755648"/>
-            <a:ext cx="4023360" cy="402336"/>
+            <a:off x="4846320" y="2423160"/>
+            <a:ext cx="3840480" cy="1051560"/>
           </a:xfrm>
           <a:prstGeom prst="roundRect">
             <a:avLst>
-              <a:gd name="adj" fmla="val 13636"/>
+              <a:gd name="adj" fmla="val 6957"/>
             </a:avLst>
           </a:prstGeom>
           <a:solidFill>
@@ -9542,23 +11535,23 @@
       </p:sp>
       <p:sp>
         <p:nvSpPr>
-          <p:cNvPr id="6" name="content-9-text-4"/>
-          <p:cNvSpPr txBox="1"/>
-          <p:nvPr/>
-        </p:nvSpPr>
-        <p:spPr>
-          <a:xfrm>
-            <a:off x="594360" y="1755648"/>
-            <a:ext cx="3794760" cy="402336"/>
-          </a:xfrm>
-          <a:prstGeom prst="rect">
-            <a:avLst/>
-          </a:prstGeom>
-          <a:noFill/>
-          <a:ln/>
-        </p:spPr>
-        <p:txBody>
-          <a:bodyPr wrap="square" lIns="0" tIns="0" rIns="0" bIns="0" rtlCol="0" anchor="ctr"/>
+          <p:cNvPr id="9" name="content-9-text-7"/>
+          <p:cNvSpPr txBox="1"/>
+          <p:nvPr/>
+        </p:nvSpPr>
+        <p:spPr>
+          <a:xfrm>
+            <a:off x="4983480" y="2459736"/>
+            <a:ext cx="3566160" cy="274320"/>
+          </a:xfrm>
+          <a:prstGeom prst="rect">
+            <a:avLst/>
+          </a:prstGeom>
+          <a:noFill/>
+          <a:ln/>
+        </p:spPr>
+        <p:txBody>
+          <a:bodyPr wrap="square" lIns="0" tIns="0" rIns="0" bIns="0" rtlCol="0" anchor="t"/>
           <a:lstStyle/>
           <a:p>
             <a:pPr algn="l" indent="0" marL="0">
@@ -9567,40 +11560,65 @@
             <a:r>
               <a:rPr lang="en-US" sz="1400" b="1" dirty="0">
                 <a:solidFill>
+                  <a:schemeClr val="accent1"/>
+                </a:solidFill>
+              </a:rPr>
+              <a:t>How it was trained</a:t>
+            </a:r>
+            <a:endParaRPr lang="en-US" sz="1400" dirty="0"/>
+          </a:p>
+        </p:txBody>
+      </p:sp>
+      <p:sp>
+        <p:nvSpPr>
+          <p:cNvPr id="10" name="content-9-text-8"/>
+          <p:cNvSpPr txBox="1"/>
+          <p:nvPr/>
+        </p:nvSpPr>
+        <p:spPr>
+          <a:xfrm>
+            <a:off x="4983480" y="2752344"/>
+            <a:ext cx="3611880" cy="713232"/>
+          </a:xfrm>
+          <a:prstGeom prst="rect">
+            <a:avLst/>
+          </a:prstGeom>
+          <a:noFill/>
+          <a:ln/>
+        </p:spPr>
+        <p:txBody>
+          <a:bodyPr wrap="square" lIns="0" tIns="0" rIns="0" bIns="0" rtlCol="0" anchor="t"/>
+          <a:lstStyle/>
+          <a:p>
+            <a:pPr algn="l" indent="0" marL="0">
+              <a:buNone/>
+            </a:pPr>
+            <a:r>
+              <a:rPr lang="en-US" sz="1100" dirty="0">
+                <a:solidFill>
                   <a:schemeClr val="tx1"/>
                 </a:solidFill>
               </a:rPr>
-              <a:t>Read:</a:t>
-            </a:r>
-            <a:pPr algn="l" indent="0" marL="0">
-              <a:buNone/>
-            </a:pPr>
-            <a:r>
-              <a:rPr lang="en-US" sz="1400" dirty="0">
-                <a:solidFill>
-                  <a:schemeClr val="tx1"/>
-                </a:solidFill>
-              </a:rPr>
-              <a:t> own household only</a:t>
-            </a:r>
-            <a:endParaRPr lang="en-US" sz="1400" dirty="0"/>
-          </a:p>
-        </p:txBody>
-      </p:sp>
-      <p:sp>
-        <p:nvSpPr>
-          <p:cNvPr id="7" name="content-9-rect-5"/>
+              <a:t>A few minutes on an RTX 5060 Ti. 35,588 messages: generated ones plus real bank questions (Banking77). 34 MB, 7 ms on a CPU.</a:t>
+            </a:r>
+            <a:endParaRPr lang="en-US" sz="1100" dirty="0"/>
+          </a:p>
+        </p:txBody>
+      </p:sp>
+      <p:sp>
+        <p:nvSpPr>
+          <p:cNvPr id="11" name="content-9-rect-9"/>
           <p:cNvSpPr/>
           <p:nvPr/>
         </p:nvSpPr>
         <p:spPr>
           <a:xfrm>
-            <a:off x="457200" y="2231136"/>
-            <a:ext cx="4023360" cy="402336"/>
+            <a:off x="4846320" y="3566160"/>
+            <a:ext cx="3840480" cy="1051560"/>
           </a:xfrm>
           <a:prstGeom prst="roundRect">
             <a:avLst>
-              <a:gd name="adj" fmla="val 13636"/>
+              <a:gd name="adj" fmla="val 6957"/>
             </a:avLst>
           </a:prstGeom>
           <a:solidFill>
@@ -9611,23 +11629,23 @@
       </p:sp>
       <p:sp>
         <p:nvSpPr>
-          <p:cNvPr id="8" name="content-9-text-6"/>
-          <p:cNvSpPr txBox="1"/>
-          <p:nvPr/>
-        </p:nvSpPr>
-        <p:spPr>
-          <a:xfrm>
-            <a:off x="594360" y="2231136"/>
-            <a:ext cx="3794760" cy="402336"/>
-          </a:xfrm>
-          <a:prstGeom prst="rect">
-            <a:avLst/>
-          </a:prstGeom>
-          <a:noFill/>
-          <a:ln/>
-        </p:spPr>
-        <p:txBody>
-          <a:bodyPr wrap="square" lIns="0" tIns="0" rIns="0" bIns="0" rtlCol="0" anchor="ctr"/>
+          <p:cNvPr id="12" name="content-9-text-10"/>
+          <p:cNvSpPr txBox="1"/>
+          <p:nvPr/>
+        </p:nvSpPr>
+        <p:spPr>
+          <a:xfrm>
+            <a:off x="4983480" y="3602736"/>
+            <a:ext cx="3566160" cy="274320"/>
+          </a:xfrm>
+          <a:prstGeom prst="rect">
+            <a:avLst/>
+          </a:prstGeom>
+          <a:noFill/>
+          <a:ln/>
+        </p:spPr>
+        <p:txBody>
+          <a:bodyPr wrap="square" lIns="0" tIns="0" rIns="0" bIns="0" rtlCol="0" anchor="t"/>
           <a:lstStyle/>
           <a:p>
             <a:pPr algn="l" indent="0" marL="0">
@@ -9636,654 +11654,48 @@
             <a:r>
               <a:rPr lang="en-US" sz="1400" b="1" dirty="0">
                 <a:solidFill>
+                  <a:schemeClr val="accent1"/>
+                </a:solidFill>
+              </a:rPr>
+              <a:t>Honest limits</a:t>
+            </a:r>
+            <a:endParaRPr lang="en-US" sz="1400" dirty="0"/>
+          </a:p>
+        </p:txBody>
+      </p:sp>
+      <p:sp>
+        <p:nvSpPr>
+          <p:cNvPr id="13" name="content-9-text-11"/>
+          <p:cNvSpPr txBox="1"/>
+          <p:nvPr/>
+        </p:nvSpPr>
+        <p:spPr>
+          <a:xfrm>
+            <a:off x="4983480" y="3895344"/>
+            <a:ext cx="3611880" cy="713232"/>
+          </a:xfrm>
+          <a:prstGeom prst="rect">
+            <a:avLst/>
+          </a:prstGeom>
+          <a:noFill/>
+          <a:ln/>
+        </p:spPr>
+        <p:txBody>
+          <a:bodyPr wrap="square" lIns="0" tIns="0" rIns="0" bIns="0" rtlCol="0" anchor="t"/>
+          <a:lstStyle/>
+          <a:p>
+            <a:pPr algn="l" indent="0" marL="0">
+              <a:buNone/>
+            </a:pPr>
+            <a:r>
+              <a:rPr lang="en-US" sz="1100" dirty="0">
+                <a:solidFill>
                   <a:schemeClr val="tx1"/>
                 </a:solidFill>
               </a:rPr>
-              <a:t>Prepare:</a:t>
-            </a:r>
-            <a:pPr algn="l" indent="0" marL="0">
-              <a:buNone/>
-            </a:pPr>
-            <a:r>
-              <a:rPr lang="en-US" sz="1400" dirty="0">
-                <a:solidFill>
-                  <a:schemeClr val="tx1"/>
-                </a:solidFill>
-              </a:rPr>
-              <a:t> drafts, recipients, documents</a:t>
-            </a:r>
-            <a:endParaRPr lang="en-US" sz="1400" dirty="0"/>
-          </a:p>
-        </p:txBody>
-      </p:sp>
-      <p:sp>
-        <p:nvSpPr>
-          <p:cNvPr id="9" name="content-9-rect-7"/>
-          <p:cNvSpPr/>
-          <p:nvPr/>
-        </p:nvSpPr>
-        <p:spPr>
-          <a:xfrm>
-            <a:off x="457200" y="2706624"/>
-            <a:ext cx="4023360" cy="402336"/>
-          </a:xfrm>
-          <a:prstGeom prst="roundRect">
-            <a:avLst>
-              <a:gd name="adj" fmla="val 13636"/>
-            </a:avLst>
-          </a:prstGeom>
-          <a:solidFill>
-            <a:schemeClr val="accent1"/>
-          </a:solidFill>
-          <a:ln/>
-        </p:spPr>
-      </p:sp>
-      <p:sp>
-        <p:nvSpPr>
-          <p:cNvPr id="10" name="content-9-text-8"/>
-          <p:cNvSpPr txBox="1"/>
-          <p:nvPr/>
-        </p:nvSpPr>
-        <p:spPr>
-          <a:xfrm>
-            <a:off x="594360" y="2706624"/>
-            <a:ext cx="3794760" cy="402336"/>
-          </a:xfrm>
-          <a:prstGeom prst="rect">
-            <a:avLst/>
-          </a:prstGeom>
-          <a:noFill/>
-          <a:ln/>
-        </p:spPr>
-        <p:txBody>
-          <a:bodyPr wrap="square" lIns="0" tIns="0" rIns="0" bIns="0" rtlCol="0" anchor="ctr"/>
-          <a:lstStyle/>
-          <a:p>
-            <a:pPr algn="l" indent="0" marL="0">
-              <a:buNone/>
-            </a:pPr>
-            <a:r>
-              <a:rPr lang="en-US" sz="1400" b="1" dirty="0">
-                <a:solidFill>
-                  <a:schemeClr val="bg1"/>
-                </a:solidFill>
-              </a:rPr>
-              <a:t>Decide:</a:t>
-            </a:r>
-            <a:pPr algn="l" indent="0" marL="0">
-              <a:buNone/>
-            </a:pPr>
-            <a:r>
-              <a:rPr lang="en-US" sz="1400" dirty="0">
-                <a:solidFill>
-                  <a:schemeClr val="bg1"/>
-                </a:solidFill>
-              </a:rPr>
-              <a:t> human parent with fresh MFA</a:t>
-            </a:r>
-            <a:endParaRPr lang="en-US" sz="1400" dirty="0"/>
-          </a:p>
-        </p:txBody>
-      </p:sp>
-      <p:sp>
-        <p:nvSpPr>
-          <p:cNvPr id="11" name="content-9-rect-9"/>
-          <p:cNvSpPr/>
-          <p:nvPr/>
-        </p:nvSpPr>
-        <p:spPr>
-          <a:xfrm>
-            <a:off x="457200" y="3182112"/>
-            <a:ext cx="4023360" cy="402336"/>
-          </a:xfrm>
-          <a:prstGeom prst="roundRect">
-            <a:avLst>
-              <a:gd name="adj" fmla="val 13636"/>
-            </a:avLst>
-          </a:prstGeom>
-          <a:solidFill>
-            <a:schemeClr val="bg2"/>
-          </a:solidFill>
-          <a:ln/>
-        </p:spPr>
-      </p:sp>
-      <p:sp>
-        <p:nvSpPr>
-          <p:cNvPr id="12" name="content-9-text-10"/>
-          <p:cNvSpPr txBox="1"/>
-          <p:nvPr/>
-        </p:nvSpPr>
-        <p:spPr>
-          <a:xfrm>
-            <a:off x="594360" y="3182112"/>
-            <a:ext cx="3794760" cy="402336"/>
-          </a:xfrm>
-          <a:prstGeom prst="rect">
-            <a:avLst/>
-          </a:prstGeom>
-          <a:noFill/>
-          <a:ln/>
-        </p:spPr>
-        <p:txBody>
-          <a:bodyPr wrap="square" lIns="0" tIns="0" rIns="0" bIns="0" rtlCol="0" anchor="ctr"/>
-          <a:lstStyle/>
-          <a:p>
-            <a:pPr algn="l" indent="0" marL="0">
-              <a:buNone/>
-            </a:pPr>
-            <a:r>
-              <a:rPr lang="en-US" sz="1400" b="1" dirty="0">
-                <a:solidFill>
-                  <a:schemeClr val="tx1"/>
-                </a:solidFill>
-              </a:rPr>
-              <a:t>Administer:</a:t>
-            </a:r>
-            <a:pPr algn="l" indent="0" marL="0">
-              <a:buNone/>
-            </a:pPr>
-            <a:r>
-              <a:rPr lang="en-US" sz="1400" dirty="0">
-                <a:solidFill>
-                  <a:schemeClr val="tx1"/>
-                </a:solidFill>
-              </a:rPr>
-              <a:t> reviewer rules and Verify</a:t>
-            </a:r>
-            <a:endParaRPr lang="en-US" sz="1400" dirty="0"/>
-          </a:p>
-        </p:txBody>
-      </p:sp>
-      <p:sp>
-        <p:nvSpPr>
-          <p:cNvPr id="13" name="content-9-rect-11"/>
-          <p:cNvSpPr/>
-          <p:nvPr/>
-        </p:nvSpPr>
-        <p:spPr>
-          <a:xfrm>
-            <a:off x="457200" y="3657600"/>
-            <a:ext cx="4023360" cy="402336"/>
-          </a:xfrm>
-          <a:prstGeom prst="roundRect">
-            <a:avLst>
-              <a:gd name="adj" fmla="val 13636"/>
-            </a:avLst>
-          </a:prstGeom>
-          <a:solidFill>
-            <a:schemeClr val="accent3"/>
-          </a:solidFill>
-          <a:ln/>
-        </p:spPr>
-      </p:sp>
-      <p:sp>
-        <p:nvSpPr>
-          <p:cNvPr id="14" name="content-9-text-12"/>
-          <p:cNvSpPr txBox="1"/>
-          <p:nvPr/>
-        </p:nvSpPr>
-        <p:spPr>
-          <a:xfrm>
-            <a:off x="594360" y="3657600"/>
-            <a:ext cx="3794760" cy="402336"/>
-          </a:xfrm>
-          <a:prstGeom prst="rect">
-            <a:avLst/>
-          </a:prstGeom>
-          <a:noFill/>
-          <a:ln/>
-        </p:spPr>
-        <p:txBody>
-          <a:bodyPr wrap="square" lIns="0" tIns="0" rIns="0" bIns="0" rtlCol="0" anchor="ctr"/>
-          <a:lstStyle/>
-          <a:p>
-            <a:pPr algn="l" indent="0" marL="0">
-              <a:buNone/>
-            </a:pPr>
-            <a:r>
-              <a:rPr lang="en-US" sz="1400" b="1" dirty="0">
-                <a:solidFill>
-                  <a:schemeClr val="bg1"/>
-                </a:solidFill>
-              </a:rPr>
-              <a:t>Never for the AI:</a:t>
-            </a:r>
-            <a:pPr algn="l" indent="0" marL="0">
-              <a:buNone/>
-            </a:pPr>
-            <a:r>
-              <a:rPr lang="en-US" sz="1400" dirty="0">
-                <a:solidFill>
-                  <a:schemeClr val="bg1"/>
-                </a:solidFill>
-              </a:rPr>
-              <a:t> approve, cancel, limits</a:t>
-            </a:r>
-            <a:endParaRPr lang="en-US" sz="1400" dirty="0"/>
-          </a:p>
-        </p:txBody>
-      </p:sp>
-      <p:sp>
-        <p:nvSpPr>
-          <p:cNvPr id="15" name="content-9-rect-13"/>
-          <p:cNvSpPr/>
-          <p:nvPr/>
-        </p:nvSpPr>
-        <p:spPr>
-          <a:xfrm>
-            <a:off x="4663440" y="1280160"/>
-            <a:ext cx="1920240" cy="1188720"/>
-          </a:xfrm>
-          <a:prstGeom prst="roundRect">
-            <a:avLst>
-              <a:gd name="adj" fmla="val 6154"/>
-            </a:avLst>
-          </a:prstGeom>
-          <a:solidFill>
-            <a:schemeClr val="bg2"/>
-          </a:solidFill>
-          <a:ln/>
-        </p:spPr>
-      </p:sp>
-      <p:sp>
-        <p:nvSpPr>
-          <p:cNvPr id="16" name="content-9-text-14"/>
-          <p:cNvSpPr txBox="1"/>
-          <p:nvPr/>
-        </p:nvSpPr>
-        <p:spPr>
-          <a:xfrm>
-            <a:off x="4800600" y="1371600"/>
-            <a:ext cx="1645920" cy="594360"/>
-          </a:xfrm>
-          <a:prstGeom prst="rect">
-            <a:avLst/>
-          </a:prstGeom>
-          <a:noFill/>
-          <a:ln/>
-        </p:spPr>
-        <p:txBody>
-          <a:bodyPr wrap="square" lIns="0" tIns="0" rIns="0" bIns="0" rtlCol="0" anchor="ctr"/>
-          <a:lstStyle/>
-          <a:p>
-            <a:pPr algn="l" indent="0" marL="0">
-              <a:buNone/>
-            </a:pPr>
-            <a:r>
-              <a:rPr lang="en-US" sz="3200" b="1" dirty="0">
-                <a:solidFill>
-                  <a:schemeClr val="accent1"/>
-                </a:solidFill>
-                <a:latin typeface="+mj-lt" pitchFamily="34" charset="0"/>
-                <a:ea typeface="+mj-lt" pitchFamily="34" charset="-122"/>
-                <a:cs typeface="+mj-lt" pitchFamily="34" charset="-120"/>
-              </a:rPr>
-              <a:t>897</a:t>
-            </a:r>
-            <a:endParaRPr lang="en-US" sz="3200" dirty="0"/>
-          </a:p>
-        </p:txBody>
-      </p:sp>
-      <p:sp>
-        <p:nvSpPr>
-          <p:cNvPr id="17" name="content-9-text-15"/>
-          <p:cNvSpPr txBox="1"/>
-          <p:nvPr/>
-        </p:nvSpPr>
-        <p:spPr>
-          <a:xfrm>
-            <a:off x="4800600" y="1965960"/>
-            <a:ext cx="1645920" cy="457200"/>
-          </a:xfrm>
-          <a:prstGeom prst="rect">
-            <a:avLst/>
-          </a:prstGeom>
-          <a:noFill/>
-          <a:ln/>
-        </p:spPr>
-        <p:txBody>
-          <a:bodyPr wrap="square" lIns="0" tIns="0" rIns="0" bIns="0" rtlCol="0" anchor="t"/>
-          <a:lstStyle/>
-          <a:p>
-            <a:pPr algn="l" indent="0" marL="0">
-              <a:buNone/>
-            </a:pPr>
-            <a:r>
-              <a:rPr lang="en-US" sz="1200" dirty="0">
-                <a:solidFill>
-                  <a:schemeClr val="tx2"/>
-                </a:solidFill>
-              </a:rPr>
-              <a:t>backend tests, all passing</a:t>
-            </a:r>
-            <a:endParaRPr lang="en-US" sz="1200" dirty="0"/>
-          </a:p>
-        </p:txBody>
-      </p:sp>
-      <p:sp>
-        <p:nvSpPr>
-          <p:cNvPr id="18" name="content-9-rect-16"/>
-          <p:cNvSpPr/>
-          <p:nvPr/>
-        </p:nvSpPr>
-        <p:spPr>
-          <a:xfrm>
-            <a:off x="6766560" y="1280160"/>
-            <a:ext cx="1920240" cy="1188720"/>
-          </a:xfrm>
-          <a:prstGeom prst="roundRect">
-            <a:avLst>
-              <a:gd name="adj" fmla="val 6154"/>
-            </a:avLst>
-          </a:prstGeom>
-          <a:solidFill>
-            <a:schemeClr val="bg2"/>
-          </a:solidFill>
-          <a:ln/>
-        </p:spPr>
-      </p:sp>
-      <p:sp>
-        <p:nvSpPr>
-          <p:cNvPr id="19" name="content-9-text-17"/>
-          <p:cNvSpPr txBox="1"/>
-          <p:nvPr/>
-        </p:nvSpPr>
-        <p:spPr>
-          <a:xfrm>
-            <a:off x="6903720" y="1371600"/>
-            <a:ext cx="1645920" cy="594360"/>
-          </a:xfrm>
-          <a:prstGeom prst="rect">
-            <a:avLst/>
-          </a:prstGeom>
-          <a:noFill/>
-          <a:ln/>
-        </p:spPr>
-        <p:txBody>
-          <a:bodyPr wrap="square" lIns="0" tIns="0" rIns="0" bIns="0" rtlCol="0" anchor="ctr"/>
-          <a:lstStyle/>
-          <a:p>
-            <a:pPr algn="l" indent="0" marL="0">
-              <a:buNone/>
-            </a:pPr>
-            <a:r>
-              <a:rPr lang="en-US" sz="3200" b="1" dirty="0">
-                <a:solidFill>
-                  <a:schemeClr val="accent1"/>
-                </a:solidFill>
-                <a:latin typeface="+mj-lt" pitchFamily="34" charset="0"/>
-                <a:ea typeface="+mj-lt" pitchFamily="34" charset="-122"/>
-                <a:cs typeface="+mj-lt" pitchFamily="34" charset="-120"/>
-              </a:rPr>
-              <a:t>126</a:t>
-            </a:r>
-            <a:endParaRPr lang="en-US" sz="3200" dirty="0"/>
-          </a:p>
-        </p:txBody>
-      </p:sp>
-      <p:sp>
-        <p:nvSpPr>
-          <p:cNvPr id="20" name="content-9-text-18"/>
-          <p:cNvSpPr txBox="1"/>
-          <p:nvPr/>
-        </p:nvSpPr>
-        <p:spPr>
-          <a:xfrm>
-            <a:off x="6903720" y="1965960"/>
-            <a:ext cx="1645920" cy="457200"/>
-          </a:xfrm>
-          <a:prstGeom prst="rect">
-            <a:avLst/>
-          </a:prstGeom>
-          <a:noFill/>
-          <a:ln/>
-        </p:spPr>
-        <p:txBody>
-          <a:bodyPr wrap="square" lIns="0" tIns="0" rIns="0" bIns="0" rtlCol="0" anchor="t"/>
-          <a:lstStyle/>
-          <a:p>
-            <a:pPr algn="l" indent="0" marL="0">
-              <a:buNone/>
-            </a:pPr>
-            <a:r>
-              <a:rPr lang="en-US" sz="1200" dirty="0">
-                <a:solidFill>
-                  <a:schemeClr val="tx2"/>
-                </a:solidFill>
-              </a:rPr>
-              <a:t>frontend tests</a:t>
-            </a:r>
-            <a:endParaRPr lang="en-US" sz="1200" dirty="0"/>
-          </a:p>
-        </p:txBody>
-      </p:sp>
-      <p:sp>
-        <p:nvSpPr>
-          <p:cNvPr id="21" name="content-9-rect-19"/>
-          <p:cNvSpPr/>
-          <p:nvPr/>
-        </p:nvSpPr>
-        <p:spPr>
-          <a:xfrm>
-            <a:off x="4663440" y="2651760"/>
-            <a:ext cx="1920240" cy="1188720"/>
-          </a:xfrm>
-          <a:prstGeom prst="roundRect">
-            <a:avLst>
-              <a:gd name="adj" fmla="val 6154"/>
-            </a:avLst>
-          </a:prstGeom>
-          <a:solidFill>
-            <a:schemeClr val="bg2"/>
-          </a:solidFill>
-          <a:ln/>
-        </p:spPr>
-      </p:sp>
-      <p:sp>
-        <p:nvSpPr>
-          <p:cNvPr id="22" name="content-9-text-20"/>
-          <p:cNvSpPr txBox="1"/>
-          <p:nvPr/>
-        </p:nvSpPr>
-        <p:spPr>
-          <a:xfrm>
-            <a:off x="4800600" y="2743200"/>
-            <a:ext cx="1645920" cy="594360"/>
-          </a:xfrm>
-          <a:prstGeom prst="rect">
-            <a:avLst/>
-          </a:prstGeom>
-          <a:noFill/>
-          <a:ln/>
-        </p:spPr>
-        <p:txBody>
-          <a:bodyPr wrap="square" lIns="0" tIns="0" rIns="0" bIns="0" rtlCol="0" anchor="ctr"/>
-          <a:lstStyle/>
-          <a:p>
-            <a:pPr algn="l" indent="0" marL="0">
-              <a:buNone/>
-            </a:pPr>
-            <a:r>
-              <a:rPr lang="en-US" sz="3200" b="1" dirty="0">
-                <a:solidFill>
-                  <a:schemeClr val="accent1"/>
-                </a:solidFill>
-                <a:latin typeface="+mj-lt" pitchFamily="34" charset="0"/>
-                <a:ea typeface="+mj-lt" pitchFamily="34" charset="-122"/>
-                <a:cs typeface="+mj-lt" pitchFamily="34" charset="-120"/>
-              </a:rPr>
-              <a:t>24 of 24</a:t>
-            </a:r>
-            <a:endParaRPr lang="en-US" sz="3200" dirty="0"/>
-          </a:p>
-        </p:txBody>
-      </p:sp>
-      <p:sp>
-        <p:nvSpPr>
-          <p:cNvPr id="23" name="content-9-text-21"/>
-          <p:cNvSpPr txBox="1"/>
-          <p:nvPr/>
-        </p:nvSpPr>
-        <p:spPr>
-          <a:xfrm>
-            <a:off x="4800600" y="3337560"/>
-            <a:ext cx="1645920" cy="457200"/>
-          </a:xfrm>
-          <a:prstGeom prst="rect">
-            <a:avLst/>
-          </a:prstGeom>
-          <a:noFill/>
-          <a:ln/>
-        </p:spPr>
-        <p:txBody>
-          <a:bodyPr wrap="square" lIns="0" tIns="0" rIns="0" bIns="0" rtlCol="0" anchor="t"/>
-          <a:lstStyle/>
-          <a:p>
-            <a:pPr algn="l" indent="0" marL="0">
-              <a:buNone/>
-            </a:pPr>
-            <a:r>
-              <a:rPr lang="en-US" sz="1200" dirty="0">
-                <a:solidFill>
-                  <a:schemeClr val="tx2"/>
-                </a:solidFill>
-              </a:rPr>
-              <a:t>blueprint scenarios mapped to tests</a:t>
-            </a:r>
-            <a:endParaRPr lang="en-US" sz="1200" dirty="0"/>
-          </a:p>
-        </p:txBody>
-      </p:sp>
-      <p:sp>
-        <p:nvSpPr>
-          <p:cNvPr id="24" name="content-9-rect-22"/>
-          <p:cNvSpPr/>
-          <p:nvPr/>
-        </p:nvSpPr>
-        <p:spPr>
-          <a:xfrm>
-            <a:off x="6766560" y="2651760"/>
-            <a:ext cx="1920240" cy="1188720"/>
-          </a:xfrm>
-          <a:prstGeom prst="roundRect">
-            <a:avLst>
-              <a:gd name="adj" fmla="val 6154"/>
-            </a:avLst>
-          </a:prstGeom>
-          <a:solidFill>
-            <a:schemeClr val="bg2"/>
-          </a:solidFill>
-          <a:ln/>
-        </p:spPr>
-      </p:sp>
-      <p:sp>
-        <p:nvSpPr>
-          <p:cNvPr id="25" name="content-9-text-23"/>
-          <p:cNvSpPr txBox="1"/>
-          <p:nvPr/>
-        </p:nvSpPr>
-        <p:spPr>
-          <a:xfrm>
-            <a:off x="6903720" y="2743200"/>
-            <a:ext cx="1645920" cy="594360"/>
-          </a:xfrm>
-          <a:prstGeom prst="rect">
-            <a:avLst/>
-          </a:prstGeom>
-          <a:noFill/>
-          <a:ln/>
-        </p:spPr>
-        <p:txBody>
-          <a:bodyPr wrap="square" lIns="0" tIns="0" rIns="0" bIns="0" rtlCol="0" anchor="ctr"/>
-          <a:lstStyle/>
-          <a:p>
-            <a:pPr algn="l" indent="0" marL="0">
-              <a:buNone/>
-            </a:pPr>
-            <a:r>
-              <a:rPr lang="en-US" sz="3200" b="1" dirty="0">
-                <a:solidFill>
-                  <a:schemeClr val="accent1"/>
-                </a:solidFill>
-                <a:latin typeface="+mj-lt" pitchFamily="34" charset="0"/>
-                <a:ea typeface="+mj-lt" pitchFamily="34" charset="-122"/>
-                <a:cs typeface="+mj-lt" pitchFamily="34" charset="-120"/>
-              </a:rPr>
-              <a:t>31</a:t>
-            </a:r>
-            <a:endParaRPr lang="en-US" sz="3200" dirty="0"/>
-          </a:p>
-        </p:txBody>
-      </p:sp>
-      <p:sp>
-        <p:nvSpPr>
-          <p:cNvPr id="26" name="content-9-text-24"/>
-          <p:cNvSpPr txBox="1"/>
-          <p:nvPr/>
-        </p:nvSpPr>
-        <p:spPr>
-          <a:xfrm>
-            <a:off x="6903720" y="3337560"/>
-            <a:ext cx="1645920" cy="457200"/>
-          </a:xfrm>
-          <a:prstGeom prst="rect">
-            <a:avLst/>
-          </a:prstGeom>
-          <a:noFill/>
-          <a:ln/>
-        </p:spPr>
-        <p:txBody>
-          <a:bodyPr wrap="square" lIns="0" tIns="0" rIns="0" bIns="0" rtlCol="0" anchor="t"/>
-          <a:lstStyle/>
-          <a:p>
-            <a:pPr algn="l" indent="0" marL="0">
-              <a:buNone/>
-            </a:pPr>
-            <a:r>
-              <a:rPr lang="en-US" sz="1200" dirty="0">
-                <a:solidFill>
-                  <a:schemeClr val="tx2"/>
-                </a:solidFill>
-              </a:rPr>
-              <a:t>known risks listed openly</a:t>
-            </a:r>
-            <a:endParaRPr lang="en-US" sz="1200" dirty="0"/>
-          </a:p>
-        </p:txBody>
-      </p:sp>
-      <p:sp>
-        <p:nvSpPr>
-          <p:cNvPr id="27" name="content-9-text-25"/>
-          <p:cNvSpPr txBox="1"/>
-          <p:nvPr/>
-        </p:nvSpPr>
-        <p:spPr>
-          <a:xfrm>
-            <a:off x="4663440" y="4069080"/>
-            <a:ext cx="4023360" cy="685800"/>
-          </a:xfrm>
-          <a:prstGeom prst="rect">
-            <a:avLst/>
-          </a:prstGeom>
-          <a:noFill/>
-          <a:ln/>
-        </p:spPr>
-        <p:txBody>
-          <a:bodyPr wrap="square" lIns="0" tIns="0" rIns="0" bIns="0" rtlCol="0" anchor="t"/>
-          <a:lstStyle/>
-          <a:p>
-            <a:pPr algn="l" indent="0" marL="0">
-              <a:buNone/>
-            </a:pPr>
-            <a:r>
-              <a:rPr lang="en-US" sz="1200" dirty="0">
-                <a:solidFill>
-                  <a:schemeClr val="tx2"/>
-                </a:solidFill>
-              </a:rPr>
-              <a:t>Each payment has a compliance report with a hash your browser can check. Every threat has a test: docs/SECURITY.md</a:t>
-            </a:r>
-            <a:endParaRPr lang="en-US" sz="1200" dirty="0"/>
+              <a:t>Synthetic data, English, no real users yet. About 1 attack in 14 still slips past it; permissions and MFA remain the real defence.</a:t>
+            </a:r>
+            <a:endParaRPr lang="en-US" sz="1100" dirty="0"/>
           </a:p>
         </p:txBody>
       </p:sp>

--- a/submission/StudyRoute_Deck.pptx
+++ b/submission/StudyRoute_Deck.pptx
@@ -118,26 +118,26 @@
   <p:extLst>
     <p:ext uri="{521415D9-36F7-43E2-AB2F-B90AF26B5E84}">
       <p14:sectionLst xmlns:p14="http://schemas.microsoft.com/office/powerpoint/2010/main">
-        <p14:section name="Opening" id="{8f6a7cd2-70c4-350e-9924-854036d52042}">
+        <p14:section name="Opening" id="{b8849ef0-d384-9aac-207f-8239189deb38}">
           <p14:sldIdLst>
             <p14:sldId id="256"/>
             <p14:sldId id="257"/>
           </p14:sldIdLst>
         </p14:section>
-        <p14:section name="The problem" id="{43005f60-b882-30b3-a560-8157e69fa7f6}">
+        <p14:section name="The problem" id="{888f1308-67e3-30bc-9bc1-25e3a64486d2}">
           <p14:sldIdLst>
             <p14:sldId id="258"/>
             <p14:sldId id="259"/>
           </p14:sldIdLst>
         </p14:section>
-        <p14:section name="The solution" id="{43ad35d3-fe50-63ff-5e7e-5a739d8338fc}">
+        <p14:section name="The solution" id="{f75df6a3-7d26-61fc-a649-bbb27864e513}">
           <p14:sldIdLst>
             <p14:sldId id="260"/>
             <p14:sldId id="261"/>
             <p14:sldId id="262"/>
           </p14:sldIdLst>
         </p14:section>
-        <p14:section name="Trust" id="{774c281b-b571-e099-1a59-21f1af5e227c}">
+        <p14:section name="Trust" id="{6021900e-8c7b-7d66-8c09-d26b89a8561d}">
           <p14:sldIdLst>
             <p14:sldId id="263"/>
             <p14:sldId id="264"/>
@@ -145,7 +145,7 @@
             <p14:sldId id="266"/>
           </p14:sldIdLst>
         </p14:section>
-        <p14:section name="Close" id="{c6a16924-4fb5-be79-a393-d14675917a89}">
+        <p14:section name="Close" id="{1fa45d36-0841-7015-2e64-0fde905e705a}">
           <p14:sldIdLst>
             <p14:sldId id="267"/>
           </p14:sldIdLst>
@@ -939,7 +939,7 @@
           <a:p>
             <a:r>
               <a:rPr lang="en-US" dirty="0"/>
-              <a:t>Security and compliance is thirty percent of the score, so we made it checkable. On the left are the permission tiers, enforced in the domain layer, not just in the screens. Public, read, prepare, decide, and administer. Deciding, meaning approving a payment, is only for a human parent with a fresh MFA proof bound to that payment and to the hash of the summary they saw. The AI has no approve, cancel, limit or config permission at all. On the right, the numbers: 897 backend and 126 frontend tests, all 24 blueprint scenarios mapped to tests, and 37 known risks that we list openly in the self-assessment. The audit log is hash-chained: Verify passes, we edit one row behind the application's back, and Verify fails at exactly that event.</a:t>
+              <a:t>Security and compliance is thirty percent of the score, so we made it checkable. On the left are the permission tiers, enforced in the domain layer, not just in the screens. Public, read, prepare, decide, and administer. Deciding, meaning approving a payment, is only for a human parent with a fresh MFA proof bound to that payment and to the hash of the summary they saw. The AI has no approve, cancel, limit or config permission at all. On the right, the numbers: 1043 backend and 128 frontend tests, all 24 blueprint scenarios mapped to tests, and 38 known risks that we list openly in the self-assessment. The audit log is hash-chained: Verify passes, we edit one row behind the application's back, and Verify fails at exactly that event.</a:t>
             </a:r>
             <a:endParaRPr lang="en-US" dirty="0"/>
           </a:p>
@@ -3246,7 +3246,7 @@
                 <a:ea typeface="+mj-lt" pitchFamily="34" charset="-122"/>
                 <a:cs typeface="+mj-lt" pitchFamily="34" charset="-120"/>
               </a:rPr>
-              <a:t>897</a:t>
+              <a:t>1043</a:t>
             </a:r>
             <a:endParaRPr lang="en-US" sz="3200" dirty="0"/>
           </a:p>
@@ -3343,7 +3343,7 @@
                 <a:ea typeface="+mj-lt" pitchFamily="34" charset="-122"/>
                 <a:cs typeface="+mj-lt" pitchFamily="34" charset="-120"/>
               </a:rPr>
-              <a:t>126</a:t>
+              <a:t>128</a:t>
             </a:r>
             <a:endParaRPr lang="en-US" sz="3200" dirty="0"/>
           </a:p>
@@ -3537,7 +3537,7 @@
                 <a:ea typeface="+mj-lt" pitchFamily="34" charset="-122"/>
                 <a:cs typeface="+mj-lt" pitchFamily="34" charset="-120"/>
               </a:rPr>
-              <a:t>37</a:t>
+              <a:t>38</a:t>
             </a:r>
             <a:endParaRPr lang="en-US" sz="3200" dirty="0"/>
           </a:p>

--- a/submission/StudyRoute_Deck.pptx
+++ b/submission/StudyRoute_Deck.pptx
@@ -118,26 +118,26 @@
   <p:extLst>
     <p:ext uri="{521415D9-36F7-43E2-AB2F-B90AF26B5E84}">
       <p14:sectionLst xmlns:p14="http://schemas.microsoft.com/office/powerpoint/2010/main">
-        <p14:section name="Opening" id="{b8849ef0-d384-9aac-207f-8239189deb38}">
+        <p14:section name="Opening" id="{9a0440f0-a414-76bd-2b8a-51c9be519fc3}">
           <p14:sldIdLst>
             <p14:sldId id="256"/>
             <p14:sldId id="257"/>
           </p14:sldIdLst>
         </p14:section>
-        <p14:section name="The problem" id="{888f1308-67e3-30bc-9bc1-25e3a64486d2}">
+        <p14:section name="The problem" id="{76628aeb-7fec-0644-c920-28a933d870a6}">
           <p14:sldIdLst>
             <p14:sldId id="258"/>
             <p14:sldId id="259"/>
           </p14:sldIdLst>
         </p14:section>
-        <p14:section name="The solution" id="{f75df6a3-7d26-61fc-a649-bbb27864e513}">
+        <p14:section name="The solution" id="{2a55f567-1c34-ad58-0b1b-bedab5014e64}">
           <p14:sldIdLst>
             <p14:sldId id="260"/>
             <p14:sldId id="261"/>
             <p14:sldId id="262"/>
           </p14:sldIdLst>
         </p14:section>
-        <p14:section name="Trust" id="{6021900e-8c7b-7d66-8c09-d26b89a8561d}">
+        <p14:section name="Trust" id="{af8424e7-bcad-5800-c663-c21b897a75b8}">
           <p14:sldIdLst>
             <p14:sldId id="263"/>
             <p14:sldId id="264"/>
@@ -145,7 +145,7 @@
             <p14:sldId id="266"/>
           </p14:sldIdLst>
         </p14:section>
-        <p14:section name="Close" id="{1fa45d36-0841-7015-2e64-0fde905e705a}">
+        <p14:section name="Close" id="{fe912722-e639-d1ed-0b9c-7fdf7acca985}">
           <p14:sldIdLst>
             <p14:sldId id="267"/>
           </p14:sldIdLst>
@@ -939,7 +939,7 @@
           <a:p>
             <a:r>
               <a:rPr lang="en-US" dirty="0"/>
-              <a:t>Security and compliance is thirty percent of the score, so we made it checkable. On the left are the permission tiers, enforced in the domain layer, not just in the screens. Public, read, prepare, decide, and administer. Deciding, meaning approving a payment, is only for a human parent with a fresh MFA proof bound to that payment and to the hash of the summary they saw. The AI has no approve, cancel, limit or config permission at all. On the right, the numbers: 1043 backend and 128 frontend tests, all 24 blueprint scenarios mapped to tests, and 38 known risks that we list openly in the self-assessment. The audit log is hash-chained: Verify passes, we edit one row behind the application's back, and Verify fails at exactly that event.</a:t>
+              <a:t>Security and compliance is thirty percent of the score, so we made it checkable. On the left are the permission tiers, enforced in the domain layer, not just in the screens. Public, read, prepare, decide, and administer. Deciding, meaning approving a payment, is only for a human parent with a fresh MFA proof bound to that payment and to the hash of the summary they saw. The AI has no approve, cancel, limit or config permission at all. On the right, the numbers: 1079 backend and 130 frontend tests, all 24 blueprint scenarios mapped to tests, and 40 known risks that we list openly in the self-assessment. The audit log is hash-chained: Verify passes, we edit one row behind the application's back, and Verify fails at exactly that event.</a:t>
             </a:r>
             <a:endParaRPr lang="en-US" dirty="0"/>
           </a:p>
@@ -1819,7 +1819,7 @@
           <a:p>
             <a:r>
               <a:rPr lang="en-US" dirty="0"/>
-              <a:t>The assistant has a trained component, and we measured it. A small language model, fine-tuned on a gaming-class GPU in a few minutes, reads what a parent types: the intent, and the exact words that carry an amount, a currency or a date. It never produces a number. Plain code turns those words into values and refuses what it cannot read exactly, and if the old rules and the model disagree, the assistant asks. On messages we wrote by hand after the model was frozen, it chose the right intent 88.5% of the time against 61.1% for the old rules, read a plan request completely and exactly 100% against 57.6%, and blocked 92.9% of attacks against 28.6%. The sample is small and the training data is synthetic, and we say so on the slide.</a:t>
+              <a:t>The assistant has a trained component, and we measured it. A small language model, fine-tuned on a gaming-class GPU in a few minutes, reads what a parent types: the intent, and the exact words that carry an amount, a currency or a date. It never produces a number; plain code turns those words into values, and when the old rules and the model disagree, the assistant asks. On messages we wrote by hand after the model was frozen, it chose the right intent 88.5% of the time against 61.1% for the old rules, read a plan request exactly 100% against 57.6%, and blocked 92.9% of attacks against 28.6%. The sample is small and the data is synthetic. A second small policy, trained with reinforcement learning, chooses whether to ask, read back or plan: on simulated parents, wrong plans fell from 2.8% to 0.8%. Plain code limits its legal moves, and the parents are our assumption.</a:t>
             </a:r>
             <a:endParaRPr lang="en-US" dirty="0"/>
           </a:p>
@@ -3246,7 +3246,7 @@
                 <a:ea typeface="+mj-lt" pitchFamily="34" charset="-122"/>
                 <a:cs typeface="+mj-lt" pitchFamily="34" charset="-120"/>
               </a:rPr>
-              <a:t>1043</a:t>
+              <a:t>1079</a:t>
             </a:r>
             <a:endParaRPr lang="en-US" sz="3200" dirty="0"/>
           </a:p>
@@ -3343,7 +3343,7 @@
                 <a:ea typeface="+mj-lt" pitchFamily="34" charset="-122"/>
                 <a:cs typeface="+mj-lt" pitchFamily="34" charset="-120"/>
               </a:rPr>
-              <a:t>128</a:t>
+              <a:t>130</a:t>
             </a:r>
             <a:endParaRPr lang="en-US" sz="3200" dirty="0"/>
           </a:p>
@@ -3537,7 +3537,7 @@
                 <a:ea typeface="+mj-lt" pitchFamily="34" charset="-122"/>
                 <a:cs typeface="+mj-lt" pitchFamily="34" charset="-120"/>
               </a:rPr>
-              <a:t>38</a:t>
+              <a:t>40</a:t>
             </a:r>
             <a:endParaRPr lang="en-US" sz="3200" dirty="0"/>
           </a:p>
@@ -11505,7 +11505,7 @@
                   <a:schemeClr val="tx1"/>
                 </a:solidFill>
               </a:rPr>
-              <a:t>Reads the intent and marks the words that carry an amount, a currency or a date. It proposes; plain code checks; the engine calculates.</a:t>
+              <a:t>Reads the intent and marks the words that carry an amount, a currency or a date. It proposes; plain code checks; the engine calculates. A GPU run of a few minutes on 35,588 messages; 34 MB, 7 ms on a CPU.</a:t>
             </a:r>
             <a:endParaRPr lang="en-US" sz="1100" dirty="0"/>
           </a:p>
@@ -11563,7 +11563,7 @@
                   <a:schemeClr val="accent1"/>
                 </a:solidFill>
               </a:rPr>
-              <a:t>How it was trained</a:t>
+              <a:t>Reinforcement learning</a:t>
             </a:r>
             <a:endParaRPr lang="en-US" sz="1400" dirty="0"/>
           </a:p>
@@ -11599,7 +11599,7 @@
                   <a:schemeClr val="tx1"/>
                 </a:solidFill>
               </a:rPr>
-              <a:t>A few minutes on an RTX 5060 Ti. 35,588 messages: generated ones plus real bank questions (Banking77). 34 MB, 7 ms on a CPU.</a:t>
+              <a:t>A policy trained by Double DQN decides when to ask, read back or plan. On simulated parents: wrong plans 0.8% against 2.8%, 1.17 questions against 0.44. Code limits its legal moves.</a:t>
             </a:r>
             <a:endParaRPr lang="en-US" sz="1100" dirty="0"/>
           </a:p>
@@ -11693,7 +11693,7 @@
                   <a:schemeClr val="tx1"/>
                 </a:solidFill>
               </a:rPr>
-              <a:t>Synthetic data, English, no real users yet. About 1 attack in 14 still slips past it; permissions and MFA remain the real defence.</a:t>
+              <a:t>Synthetic data, English, no real users yet. The simulated parents and rewards are our assumptions. About 1 attack in 14 still slips past; permissions and MFA remain the real defence.</a:t>
             </a:r>
             <a:endParaRPr lang="en-US" sz="1100" dirty="0"/>
           </a:p>

--- a/submission/StudyRoute_Deck.pptx
+++ b/submission/StudyRoute_Deck.pptx
@@ -118,26 +118,26 @@
   <p:extLst>
     <p:ext uri="{521415D9-36F7-43E2-AB2F-B90AF26B5E84}">
       <p14:sectionLst xmlns:p14="http://schemas.microsoft.com/office/powerpoint/2010/main">
-        <p14:section name="Opening" id="{9a0440f0-a414-76bd-2b8a-51c9be519fc3}">
+        <p14:section name="Opening" id="{f3c41b52-66d4-40b4-1653-8b3425c442c0}">
           <p14:sldIdLst>
             <p14:sldId id="256"/>
             <p14:sldId id="257"/>
           </p14:sldIdLst>
         </p14:section>
-        <p14:section name="The problem" id="{76628aeb-7fec-0644-c920-28a933d870a6}">
+        <p14:section name="The problem" id="{4f461096-a365-ec45-8259-18ee9ba9d5a6}">
           <p14:sldIdLst>
             <p14:sldId id="258"/>
             <p14:sldId id="259"/>
           </p14:sldIdLst>
         </p14:section>
-        <p14:section name="The solution" id="{2a55f567-1c34-ad58-0b1b-bedab5014e64}">
+        <p14:section name="The solution" id="{40f2088c-d6a8-2c90-d49d-aacfa1e55274}">
           <p14:sldIdLst>
             <p14:sldId id="260"/>
             <p14:sldId id="261"/>
             <p14:sldId id="262"/>
           </p14:sldIdLst>
         </p14:section>
-        <p14:section name="Trust" id="{af8424e7-bcad-5800-c663-c21b897a75b8}">
+        <p14:section name="Trust" id="{a75fb253-75d9-c23c-f526-ebd13a53b2a9}">
           <p14:sldIdLst>
             <p14:sldId id="263"/>
             <p14:sldId id="264"/>
@@ -145,7 +145,7 @@
             <p14:sldId id="266"/>
           </p14:sldIdLst>
         </p14:section>
-        <p14:section name="Close" id="{fe912722-e639-d1ed-0b9c-7fdf7acca985}">
+        <p14:section name="Close" id="{aa809496-c44f-efbb-eac1-740b6c01d5d5}">
           <p14:sldIdLst>
             <p14:sldId id="267"/>
           </p14:sldIdLst>
@@ -939,7 +939,7 @@
           <a:p>
             <a:r>
               <a:rPr lang="en-US" dirty="0"/>
-              <a:t>Security and compliance is thirty percent of the score, so we made it checkable. On the left are the permission tiers, enforced in the domain layer, not just in the screens. Public, read, prepare, decide, and administer. Deciding, meaning approving a payment, is only for a human parent with a fresh MFA proof bound to that payment and to the hash of the summary they saw. The AI has no approve, cancel, limit or config permission at all. On the right, the numbers: 1079 backend and 130 frontend tests, all 24 blueprint scenarios mapped to tests, and 40 known risks that we list openly in the self-assessment. The audit log is hash-chained: Verify passes, we edit one row behind the application's back, and Verify fails at exactly that event.</a:t>
+              <a:t>Security and compliance is thirty percent of the score, so we made it checkable. On the left are the permission tiers, enforced in the domain layer, not just in the screens. Public, read, prepare, decide, and administer. Deciding, meaning approving a payment, is only for a human parent with a fresh MFA proof bound to that payment and to the hash of the summary they saw. The AI has no approve, cancel, limit or config permission at all. On the right, the numbers: 1129 backend and 139 frontend tests, all 24 blueprint scenarios mapped to tests, and 41 known risks that we list openly in the self-assessment. The audit log is hash-chained: Verify passes, we edit one row behind the application's back, and Verify fails at exactly that event.</a:t>
             </a:r>
             <a:endParaRPr lang="en-US" dirty="0"/>
           </a:p>
@@ -1555,7 +1555,7 @@
           <a:p>
             <a:r>
               <a:rPr lang="en-US" dirty="0"/>
-              <a:t>Every number comes from a deterministic engine: integer minor units, decimal rates, no floats. For one provider, total cost is the FX margin plus the fixed fee, the SWIFT fee, any fees the sender pays under OUR, plus a shortfall when fees are deducted from the amount. We rank by that percentage. In our synthetic example, Provider B is first at 1.58 percent, Provider C looks cheap but it is quoted as SHA, so the university would receive 35 pounds less, and Provider A is third at 2.16 percent. On the right is where Provider B's 25,300 taka goes: 16,000 is the margin, 3,000 the fixed fee, 1,500 the SWIFT fee and 4,800 the fees we pay under OUR. The same engine powers the smart send plan. It does not predict exchange rates, and says so.</a:t>
+              <a:t>Every number comes from a deterministic engine: integer minor units, decimal rates, no floats. For one provider, total cost is the FX margin plus the fixed fee, the SWIFT fee, any fees the sender pays under OUR, plus a shortfall when fees are deducted from the amount. We rank by that percentage. In our synthetic example, Provider B is first at 1.58 percent, Provider C looks cheap but it is quoted as SHA, so the university would receive 35 pounds less, and Provider A is third at 2.16 percent. On the right is where Provider B's 25,300 taka goes: most of it is the margin. The same engine powers the smart send plan, names the cheapest provider that arrives before the due date, and can stress-test a quote if the taka weakens. It does not predict exchange rates, and says so.</a:t>
             </a:r>
             <a:endParaRPr lang="en-US" dirty="0"/>
           </a:p>
@@ -3246,7 +3246,7 @@
                 <a:ea typeface="+mj-lt" pitchFamily="34" charset="-122"/>
                 <a:cs typeface="+mj-lt" pitchFamily="34" charset="-120"/>
               </a:rPr>
-              <a:t>1079</a:t>
+              <a:t>1129</a:t>
             </a:r>
             <a:endParaRPr lang="en-US" sz="3200" dirty="0"/>
           </a:p>
@@ -3343,7 +3343,7 @@
                 <a:ea typeface="+mj-lt" pitchFamily="34" charset="-122"/>
                 <a:cs typeface="+mj-lt" pitchFamily="34" charset="-120"/>
               </a:rPr>
-              <a:t>130</a:t>
+              <a:t>139</a:t>
             </a:r>
             <a:endParaRPr lang="en-US" sz="3200" dirty="0"/>
           </a:p>
@@ -3537,7 +3537,7 @@
                 <a:ea typeface="+mj-lt" pitchFamily="34" charset="-122"/>
                 <a:cs typeface="+mj-lt" pitchFamily="34" charset="-120"/>
               </a:rPr>
-              <a:t>40</a:t>
+              <a:t>41</a:t>
             </a:r>
             <a:endParaRPr lang="en-US" sz="3200" dirty="0"/>
           </a:p>
@@ -8733,7 +8733,7 @@
                   <a:schemeClr val="tx1"/>
                 </a:solidFill>
               </a:rPr>
-              <a:t>Smart send plan: the same GBP 12,000 costs BDT 68,400 sent monthly and BDT 28,500 sent at once. Synthetic rates.</a:t>
+              <a:t>Smart send plan: the same GBP 12,000 costs BDT 68,400 sent monthly and BDT 28,500 sent at once. Also: the cheapest that arrives before the due date, and a currency-drop stress test. Synthetic rates.</a:t>
             </a:r>
             <a:endParaRPr lang="en-US" sz="1200" dirty="0"/>
           </a:p>

--- a/submission/StudyRoute_Deck.pptx
+++ b/submission/StudyRoute_Deck.pptx
@@ -118,26 +118,26 @@
   <p:extLst>
     <p:ext uri="{521415D9-36F7-43E2-AB2F-B90AF26B5E84}">
       <p14:sectionLst xmlns:p14="http://schemas.microsoft.com/office/powerpoint/2010/main">
-        <p14:section name="Opening" id="{f3c41b52-66d4-40b4-1653-8b3425c442c0}">
+        <p14:section name="Opening" id="{8554ba38-81da-7b51-5a47-74b33a14eaa2}">
           <p14:sldIdLst>
             <p14:sldId id="256"/>
             <p14:sldId id="257"/>
           </p14:sldIdLst>
         </p14:section>
-        <p14:section name="The problem" id="{4f461096-a365-ec45-8259-18ee9ba9d5a6}">
+        <p14:section name="The problem" id="{5f7f7138-7f2f-34f9-4e27-122c72f46470}">
           <p14:sldIdLst>
             <p14:sldId id="258"/>
             <p14:sldId id="259"/>
           </p14:sldIdLst>
         </p14:section>
-        <p14:section name="The solution" id="{40f2088c-d6a8-2c90-d49d-aacfa1e55274}">
+        <p14:section name="The solution" id="{f0370852-cd1e-d889-8875-19f2f1d7b33c}">
           <p14:sldIdLst>
             <p14:sldId id="260"/>
             <p14:sldId id="261"/>
             <p14:sldId id="262"/>
           </p14:sldIdLst>
         </p14:section>
-        <p14:section name="Trust" id="{a75fb253-75d9-c23c-f526-ebd13a53b2a9}">
+        <p14:section name="Trust" id="{14235634-10cb-12f2-3b3c-0caa9fb5b5f4}">
           <p14:sldIdLst>
             <p14:sldId id="263"/>
             <p14:sldId id="264"/>
@@ -145,7 +145,7 @@
             <p14:sldId id="266"/>
           </p14:sldIdLst>
         </p14:section>
-        <p14:section name="Close" id="{aa809496-c44f-efbb-eac1-740b6c01d5d5}">
+        <p14:section name="Close" id="{6d2fdd1d-3ebb-526f-792e-7227df826fa1}">
           <p14:sldIdLst>
             <p14:sldId id="267"/>
           </p14:sldIdLst>
@@ -939,7 +939,7 @@
           <a:p>
             <a:r>
               <a:rPr lang="en-US" dirty="0"/>
-              <a:t>Security and compliance is thirty percent of the score, so we made it checkable. On the left are the permission tiers, enforced in the domain layer, not just in the screens. Public, read, prepare, decide, and administer. Deciding, meaning approving a payment, is only for a human parent with a fresh MFA proof bound to that payment and to the hash of the summary they saw. The AI has no approve, cancel, limit or config permission at all. On the right, the numbers: 1129 backend and 139 frontend tests, all 24 blueprint scenarios mapped to tests, and 41 known risks that we list openly in the self-assessment. The audit log is hash-chained: Verify passes, we edit one row behind the application's back, and Verify fails at exactly that event.</a:t>
+              <a:t>Security and compliance is thirty percent of the score, so we made it checkable. On the left are the permission tiers, enforced in the domain layer, not just in the screens. Public, read, prepare, decide, and administer. Deciding, meaning approving a payment, is only for a human parent with a fresh MFA proof bound to that payment and to the hash of the summary they saw. The AI has no approve, cancel, limit or config permission at all. On the right, the numbers: 1130 backend and 139 frontend tests, all 24 blueprint scenarios mapped to tests, and 41 known risks that we list openly in the self-assessment. The audit log is hash-chained: Verify passes, we edit one row behind the application's back, and Verify fails at exactly that event.</a:t>
             </a:r>
             <a:endParaRPr lang="en-US" dirty="0"/>
           </a:p>
@@ -3246,7 +3246,7 @@
                 <a:ea typeface="+mj-lt" pitchFamily="34" charset="-122"/>
                 <a:cs typeface="+mj-lt" pitchFamily="34" charset="-120"/>
               </a:rPr>
-              <a:t>1129</a:t>
+              <a:t>1130</a:t>
             </a:r>
             <a:endParaRPr lang="en-US" sz="3200" dirty="0"/>
           </a:p>

--- a/submission/StudyRoute_Deck.pptx
+++ b/submission/StudyRoute_Deck.pptx
@@ -118,26 +118,26 @@
   <p:extLst>
     <p:ext uri="{521415D9-36F7-43E2-AB2F-B90AF26B5E84}">
       <p14:sectionLst xmlns:p14="http://schemas.microsoft.com/office/powerpoint/2010/main">
-        <p14:section name="Opening" id="{8554ba38-81da-7b51-5a47-74b33a14eaa2}">
+        <p14:section name="Opening" id="{18c8c211-b6f8-ac24-88f1-a6e889d25e0f}">
           <p14:sldIdLst>
             <p14:sldId id="256"/>
             <p14:sldId id="257"/>
           </p14:sldIdLst>
         </p14:section>
-        <p14:section name="The problem" id="{5f7f7138-7f2f-34f9-4e27-122c72f46470}">
+        <p14:section name="The problem" id="{6736a316-488a-6457-d845-bb02a5887701}">
           <p14:sldIdLst>
             <p14:sldId id="258"/>
             <p14:sldId id="259"/>
           </p14:sldIdLst>
         </p14:section>
-        <p14:section name="The solution" id="{f0370852-cd1e-d889-8875-19f2f1d7b33c}">
+        <p14:section name="The solution" id="{7211c3e0-69c0-9b3d-7554-9e523d595a4f}">
           <p14:sldIdLst>
             <p14:sldId id="260"/>
             <p14:sldId id="261"/>
             <p14:sldId id="262"/>
           </p14:sldIdLst>
         </p14:section>
-        <p14:section name="Trust" id="{14235634-10cb-12f2-3b3c-0caa9fb5b5f4}">
+        <p14:section name="Trust" id="{d6521bd4-000c-decd-7b58-e32cf313b3ed}">
           <p14:sldIdLst>
             <p14:sldId id="263"/>
             <p14:sldId id="264"/>
@@ -145,7 +145,7 @@
             <p14:sldId id="266"/>
           </p14:sldIdLst>
         </p14:section>
-        <p14:section name="Close" id="{6d2fdd1d-3ebb-526f-792e-7227df826fa1}">
+        <p14:section name="Close" id="{67eae655-fb72-c88a-3bcb-49c96da15be6}">
           <p14:sldIdLst>
             <p14:sldId id="267"/>
           </p14:sldIdLst>
@@ -939,7 +939,7 @@
           <a:p>
             <a:r>
               <a:rPr lang="en-US" dirty="0"/>
-              <a:t>Security and compliance is thirty percent of the score, so we made it checkable. On the left are the permission tiers, enforced in the domain layer, not just in the screens. Public, read, prepare, decide, and administer. Deciding, meaning approving a payment, is only for a human parent with a fresh MFA proof bound to that payment and to the hash of the summary they saw. The AI has no approve, cancel, limit or config permission at all. On the right, the numbers: 1130 backend and 139 frontend tests, all 24 blueprint scenarios mapped to tests, and 41 known risks that we list openly in the self-assessment. The audit log is hash-chained: Verify passes, we edit one row behind the application's back, and Verify fails at exactly that event.</a:t>
+              <a:t>Security and compliance is thirty percent of the score, so we made it checkable. On the left are the permission tiers, enforced in the domain layer, not just in the screens. Public, read, prepare, decide, and administer. Deciding, meaning approving a payment, is only for a human parent with a fresh MFA proof bound to that payment and to the hash of the summary they saw. The AI has no approve, cancel, limit or config permission at all. On the right, the numbers: 1135 backend and 360 frontend tests, all 24 blueprint scenarios mapped to tests, and 42 known risks that we list openly in the self-assessment. The audit log is hash-chained: Verify passes, we edit one row behind the application's back, and Verify fails at exactly that event.</a:t>
             </a:r>
             <a:endParaRPr lang="en-US" dirty="0"/>
           </a:p>
@@ -3246,7 +3246,7 @@
                 <a:ea typeface="+mj-lt" pitchFamily="34" charset="-122"/>
                 <a:cs typeface="+mj-lt" pitchFamily="34" charset="-120"/>
               </a:rPr>
-              <a:t>1130</a:t>
+              <a:t>1135</a:t>
             </a:r>
             <a:endParaRPr lang="en-US" sz="3200" dirty="0"/>
           </a:p>
@@ -3343,7 +3343,7 @@
                 <a:ea typeface="+mj-lt" pitchFamily="34" charset="-122"/>
                 <a:cs typeface="+mj-lt" pitchFamily="34" charset="-120"/>
               </a:rPr>
-              <a:t>139</a:t>
+              <a:t>360</a:t>
             </a:r>
             <a:endParaRPr lang="en-US" sz="3200" dirty="0"/>
           </a:p>
@@ -3537,7 +3537,7 @@
                 <a:ea typeface="+mj-lt" pitchFamily="34" charset="-122"/>
                 <a:cs typeface="+mj-lt" pitchFamily="34" charset="-120"/>
               </a:rPr>
-              <a:t>41</a:t>
+              <a:t>42</a:t>
             </a:r>
             <a:endParaRPr lang="en-US" sz="3200" dirty="0"/>
           </a:p>

--- a/submission/StudyRoute_Deck.pptx
+++ b/submission/StudyRoute_Deck.pptx
@@ -118,26 +118,26 @@
   <p:extLst>
     <p:ext uri="{521415D9-36F7-43E2-AB2F-B90AF26B5E84}">
       <p14:sectionLst xmlns:p14="http://schemas.microsoft.com/office/powerpoint/2010/main">
-        <p14:section name="Opening" id="{18c8c211-b6f8-ac24-88f1-a6e889d25e0f}">
+        <p14:section name="Opening" id="{65d2d77c-ee0b-9fc4-de1c-787d5f1b0452}">
           <p14:sldIdLst>
             <p14:sldId id="256"/>
             <p14:sldId id="257"/>
           </p14:sldIdLst>
         </p14:section>
-        <p14:section name="The problem" id="{6736a316-488a-6457-d845-bb02a5887701}">
+        <p14:section name="The problem" id="{58271b31-3f41-f8e0-0acc-fe7f2e95b9b1}">
           <p14:sldIdLst>
             <p14:sldId id="258"/>
             <p14:sldId id="259"/>
           </p14:sldIdLst>
         </p14:section>
-        <p14:section name="The solution" id="{7211c3e0-69c0-9b3d-7554-9e523d595a4f}">
+        <p14:section name="The solution" id="{23ccd0dc-f3e8-6940-e517-98846ffe7797}">
           <p14:sldIdLst>
             <p14:sldId id="260"/>
             <p14:sldId id="261"/>
             <p14:sldId id="262"/>
           </p14:sldIdLst>
         </p14:section>
-        <p14:section name="Trust" id="{d6521bd4-000c-decd-7b58-e32cf313b3ed}">
+        <p14:section name="Trust" id="{639e2041-e73a-ef4f-b420-e3483d49ca79}">
           <p14:sldIdLst>
             <p14:sldId id="263"/>
             <p14:sldId id="264"/>
@@ -145,7 +145,7 @@
             <p14:sldId id="266"/>
           </p14:sldIdLst>
         </p14:section>
-        <p14:section name="Close" id="{67eae655-fb72-c88a-3bcb-49c96da15be6}">
+        <p14:section name="Close" id="{8322b838-9098-0420-9d71-745deba1143d}">
           <p14:sldIdLst>
             <p14:sldId id="267"/>
           </p14:sldIdLst>
@@ -939,7 +939,7 @@
           <a:p>
             <a:r>
               <a:rPr lang="en-US" dirty="0"/>
-              <a:t>Security and compliance is thirty percent of the score, so we made it checkable. On the left are the permission tiers, enforced in the domain layer, not just in the screens. Public, read, prepare, decide, and administer. Deciding, meaning approving a payment, is only for a human parent with a fresh MFA proof bound to that payment and to the hash of the summary they saw. The AI has no approve, cancel, limit or config permission at all. On the right, the numbers: 1135 backend and 360 frontend tests, all 24 blueprint scenarios mapped to tests, and 42 known risks that we list openly in the self-assessment. The audit log is hash-chained: Verify passes, we edit one row behind the application's back, and Verify fails at exactly that event.</a:t>
+              <a:t>Security and compliance is thirty percent of the score, so we made it checkable. On the left are the permission tiers, enforced in the domain layer, not just in the screens. Public, read, prepare, decide, and administer. Deciding, meaning approving a payment, is only for a human parent with a fresh MFA proof bound to that payment and to the hash of the summary they saw. The AI has no approve, cancel, limit or config permission at all. On the right, the numbers: 1223 backend and 406 frontend tests, all 24 blueprint scenarios mapped to tests, and 44 known risks that we list openly in the self-assessment. The audit log is hash-chained: Verify passes, we edit one row behind the application's back, and Verify fails at exactly that event.</a:t>
             </a:r>
             <a:endParaRPr lang="en-US" dirty="0"/>
           </a:p>
@@ -1555,7 +1555,7 @@
           <a:p>
             <a:r>
               <a:rPr lang="en-US" dirty="0"/>
-              <a:t>Every number comes from a deterministic engine: integer minor units, decimal rates, no floats. For one provider, total cost is the FX margin plus the fixed fee, the SWIFT fee, any fees the sender pays under OUR, plus a shortfall when fees are deducted from the amount. We rank by that percentage. In our synthetic example, Provider B is first at 1.58 percent, Provider C looks cheap but it is quoted as SHA, so the university would receive 35 pounds less, and Provider A is third at 2.16 percent. On the right is where Provider B's 25,300 taka goes: most of it is the margin. The same engine powers the smart send plan, names the cheapest provider that arrives before the due date, and can stress-test a quote if the taka weakens. It does not predict exchange rates, and says so.</a:t>
+              <a:t>Every number comes from a deterministic engine: integer minor units, decimal rates, no floats. For one provider, total cost is the FX margin plus the fixed fee, the SWIFT fee, any fees the sender pays under OUR, plus a shortfall when fees are deducted from the amount. We rank by that percentage. In our synthetic example, Provider B is first at 1.58 percent, Provider C looks cheap but it is quoted as SHA, so the university would receive 35 pounds less, and Provider A is third at 2.16 percent. On the right is where Provider B's 25,300 taka goes: most of it is the margin. The same engine powers the smart send plan, names the cheapest provider that arrives before the due date, and can stress-test a quote if the taka weakens. A student guide shows which student cities a monthly budget covers, with invented figures marked not verified. It does not predict exchange rates, and says so.</a:t>
             </a:r>
             <a:endParaRPr lang="en-US" dirty="0"/>
           </a:p>
@@ -3246,7 +3246,7 @@
                 <a:ea typeface="+mj-lt" pitchFamily="34" charset="-122"/>
                 <a:cs typeface="+mj-lt" pitchFamily="34" charset="-120"/>
               </a:rPr>
-              <a:t>1135</a:t>
+              <a:t>1223</a:t>
             </a:r>
             <a:endParaRPr lang="en-US" sz="3200" dirty="0"/>
           </a:p>
@@ -3343,7 +3343,7 @@
                 <a:ea typeface="+mj-lt" pitchFamily="34" charset="-122"/>
                 <a:cs typeface="+mj-lt" pitchFamily="34" charset="-120"/>
               </a:rPr>
-              <a:t>360</a:t>
+              <a:t>406</a:t>
             </a:r>
             <a:endParaRPr lang="en-US" sz="3200" dirty="0"/>
           </a:p>
@@ -3537,7 +3537,7 @@
                 <a:ea typeface="+mj-lt" pitchFamily="34" charset="-122"/>
                 <a:cs typeface="+mj-lt" pitchFamily="34" charset="-120"/>
               </a:rPr>
-              <a:t>42</a:t>
+              <a:t>44</a:t>
             </a:r>
             <a:endParaRPr lang="en-US" sz="3200" dirty="0"/>
           </a:p>
@@ -11505,7 +11505,7 @@
                   <a:schemeClr val="tx1"/>
                 </a:solidFill>
               </a:rPr>
-              <a:t>Reads the intent and marks the words that carry an amount, a currency or a date. It proposes; plain code checks; the engine calculates. A GPU run of a few minutes on 35,588 messages; 34 MB, 7 ms on a CPU.</a:t>
+              <a:t>Reads the intent and marks the words that carry an amount, a currency or a date. It proposes; plain code checks; the engine calculates. A GPU run of a few minutes on 35,588 messages; 34 MB, 6 ms on a CPU.</a:t>
             </a:r>
             <a:endParaRPr lang="en-US" sz="1100" dirty="0"/>
           </a:p>

--- a/submission/StudyRoute_Deck.pptx
+++ b/submission/StudyRoute_Deck.pptx
@@ -118,34 +118,34 @@
   <p:extLst>
     <p:ext uri="{521415D9-36F7-43E2-AB2F-B90AF26B5E84}">
       <p14:sectionLst xmlns:p14="http://schemas.microsoft.com/office/powerpoint/2010/main">
-        <p14:section name="Opening" id="{65d2d77c-ee0b-9fc4-de1c-787d5f1b0452}">
+        <p14:section name="Opening" id="{7e613686-ad98-1f2f-8a67-16f3241feea5}">
           <p14:sldIdLst>
             <p14:sldId id="256"/>
             <p14:sldId id="257"/>
           </p14:sldIdLst>
         </p14:section>
-        <p14:section name="The problem" id="{58271b31-3f41-f8e0-0acc-fe7f2e95b9b1}">
+        <p14:section name="The problem" id="{e7d54294-e2e1-f1fc-d841-cb5910919810}">
           <p14:sldIdLst>
             <p14:sldId id="258"/>
             <p14:sldId id="259"/>
           </p14:sldIdLst>
         </p14:section>
-        <p14:section name="The solution" id="{23ccd0dc-f3e8-6940-e517-98846ffe7797}">
+        <p14:section name="The solution" id="{44e8819d-7d64-590a-8c57-0e72d00129ed}">
           <p14:sldIdLst>
             <p14:sldId id="260"/>
             <p14:sldId id="261"/>
-            <p14:sldId id="262"/>
           </p14:sldIdLst>
         </p14:section>
-        <p14:section name="Trust" id="{639e2041-e73a-ef4f-b420-e3483d49ca79}">
+        <p14:section name="Trust" id="{6cc4700c-ca03-a99c-c2ca-f04f4ca0c4bb}">
           <p14:sldIdLst>
+            <p14:sldId id="262"/>
             <p14:sldId id="263"/>
             <p14:sldId id="264"/>
             <p14:sldId id="265"/>
             <p14:sldId id="266"/>
           </p14:sldIdLst>
         </p14:section>
-        <p14:section name="Close" id="{8322b838-9098-0420-9d71-745deba1143d}">
+        <p14:section name="Close" id="{0939555f-555d-763a-0a3b-19c2722f4bc3}">
           <p14:sldIdLst>
             <p14:sldId id="267"/>
           </p14:sldIdLst>
@@ -851,7 +851,7 @@
           <a:p>
             <a:r>
               <a:rPr lang="en-US" dirty="0"/>
-              <a:t>Good morning. We are team [Team name], and this is StudyRoute, our entry for Topic C, the cross-border and student finance assistant. StudyRoute is a sandbox AI agent that helps a parent in Bangladesh pay a student's tuition abroad. Everything you will see is synthetic and no real money moves. Our design rule is on the slide, and the rest of the talk shows how we make each of those four sentences true and testable: the engine calculates, the AI explains, the human approves, and every step is logged.</a:t>
+              <a:t>Good morning. We are team TeamEkxin, and this is StudyRoute, our entry for Topic C, the cross-border and student finance assistant. StudyRoute is a sandbox AI agent that helps a parent in Bangladesh pay a student's tuition abroad. Everything you will see is synthetic and no real money moves. Our design rule is on the slide, and the rest of the talk shows how we make each of those four sentences true and testable: the engine calculates, the AI explains, the human approves, and every step is logged.</a:t>
             </a:r>
             <a:endParaRPr lang="en-US" dirty="0"/>
           </a:p>
@@ -1115,7 +1115,7 @@
           <a:p>
             <a:r>
               <a:rPr lang="en-US" dirty="0"/>
-              <a:t>Next steps. First, replace every placeholder rule with an official Bangladesh Bank source and add the moon-dependent holidays. Second, a partnership with an authorised dealer bank for real quotes and real KYC, and regulator-ready reports from the audit log. Third, the escrow contracts would move from our simulated chain to a permissioned one with a deposit token issued by a bank. Topic C also mentions credit building. We have not built it, and we would rather say so than pretend. We do show a household's money in every currency, but those are simulated accounts, not real ones. To close: StudyRoute is clear, cheap and safe, because the engine calculates, the AI explains, the human approves, and every step is logged. Thank you.</a:t>
+              <a:t>Next steps. First, replace every placeholder rule with an official Bangladesh Bank source and add the moon-dependent holidays. Second, a partnership with an authorised dealer bank for real quotes and real KYC, and regulator-ready reports from the audit log. Third, beyond tuition, the sandbox already has a smart escrow for living costs and a bank-network simulation; the escrow contracts would move from our simulated chain to a permissioned one with a deposit token issued by a bank. Topic C also mentions credit building. We have not built it, and we would rather say so than pretend. We do show a household's money in every currency, but those are simulated accounts, not real ones. To close: StudyRoute is clear, cheap and safe, because the engine calculates, the AI explains, the human approves, and every step is logged. Thank you.</a:t>
             </a:r>
             <a:endParaRPr lang="en-US" dirty="0"/>
           </a:p>
@@ -1643,7 +1643,7 @@
           <a:p>
             <a:r>
               <a:rPr lang="en-US" dirty="0"/>
-              <a:t>Living costs are different from tuition: they are a payment every month. Smart escrow lets the parent lock the money in a smart contract that pays on the dates they choose. Planning locks nothing, the schedule is shown first. Locking needs a fresh MFA proof from the parent, and then each payment is released on its date. A bank reviewer can freeze an escrow with a written reason but can never move the funds. Only amounts, dates and hashes go on the chain, never a name or an account number, and the AI has no permission here at all. The chain is simulated: an in-memory EVM running real Solidity contracts, and the tokens are not money. We also anchor the head of the audit log on it, so rewriting history leaves a trace that someone editing the database cannot reach.</a:t>
+              <a:t>Before the details, here is what we have shown and what we have not. What we have shown: every number comes from one deterministic engine, with 1223 backend tests covering all 24 scenarios. Only a human with a fresh MFA code can approve, and the AI has no such permission. Change one audit row and Verify fails at that event. And the stack starts from the zipped archive with one command. What we have not shown: the rates, fees and city costs are invented, and we have not yet compared them with real quotes. No real parent has used it. No outsider has reviewed its security. The Bangladesh Bank limits are placeholders, marked Not verified. Both lists are in the repository, because we would rather you hear the limits from us.</a:t>
             </a:r>
             <a:endParaRPr lang="en-US" dirty="0"/>
           </a:p>
@@ -2589,7 +2589,7 @@
                   <a:schemeClr val="accent5"/>
                 </a:solidFill>
               </a:rPr>
-              <a:t>[Team name]  ·  Sandbox: synthetic data, no real money moves</a:t>
+              <a:t>TeamEkxin  ·  Sandbox: synthetic data, no real money moves</a:t>
             </a:r>
             <a:endParaRPr lang="en-US" sz="1200" dirty="0"/>
           </a:p>
@@ -4341,7 +4341,7 @@
                   <a:schemeClr val="bg2"/>
                 </a:solidFill>
               </a:rPr>
-              <a:t>Run the escrow contracts on a permissioned chain with a bank-issued deposit token.</a:t>
+              <a:t>Escrow already runs in the sandbox. Next: a permissioned chain and a bank-issued token.</a:t>
             </a:r>
             <a:endParaRPr lang="en-US" sz="1400" dirty="0"/>
           </a:p>
@@ -4416,7 +4416,7 @@
                   <a:schemeClr val="accent5"/>
                 </a:solidFill>
               </a:rPr>
-              <a:t>[Team name]  ·  [repository link]  ·  Sandbox: no real money moves</a:t>
+              <a:t>TeamEkxin  ·  https://github.com/NoobCrow/StudyRoute  ·  Sandbox: no real money moves</a:t>
             </a:r>
             <a:endParaRPr lang="en-US" sz="1200" dirty="0"/>
           </a:p>
@@ -9111,7 +9111,7 @@
                 <a:ea typeface="+mj-lt" pitchFamily="34" charset="-122"/>
                 <a:cs typeface="+mj-lt" pitchFamily="34" charset="-120"/>
               </a:rPr>
-              <a:t>Smart escrow for living costs</a:t>
+              <a:t>Proven, and not proven yet</a:t>
             </a:r>
             <a:endParaRPr lang="en-US" sz="3600" dirty="0"/>
           </a:p>
@@ -9126,105 +9126,11 @@
         <p:spPr>
           <a:xfrm>
             <a:off x="457200" y="1234440"/>
-            <a:ext cx="4718304" cy="3218688"/>
+            <a:ext cx="4023360" cy="3154680"/>
           </a:xfrm>
           <a:prstGeom prst="roundRect">
             <a:avLst>
-              <a:gd name="adj" fmla="val 1705"/>
-            </a:avLst>
-          </a:prstGeom>
-          <a:solidFill>
-            <a:schemeClr val="bg1"/>
-          </a:solidFill>
-          <a:ln w="9525">
-            <a:solidFill>
-              <a:schemeClr val="accent5"/>
-            </a:solidFill>
-            <a:prstDash val="solid"/>
-          </a:ln>
-          <a:effectLst>
-            <a:outerShdw sx="100000" sy="100000" kx="0" ky="0" algn="bl" rotWithShape="0" blurRad="101600" dist="25400" dir="5400000">
-              <a:srgbClr val="0B2545">
-                <a:alpha val="18000"/>
-              </a:srgbClr>
-            </a:outerShdw>
-          </a:effectLst>
-        </p:spPr>
-      </p:sp>
-      <p:pic>
-        <p:nvPicPr>
-          <p:cNvPr id="4" name="content-7-image-2" descr="An escrow with three monthly payments and its on-chain proof">    </p:cNvPr>
-          <p:cNvPicPr>
-            <a:picLocks noChangeAspect="1"/>
-          </p:cNvPicPr>
-          <p:nvPr/>
-        </p:nvPicPr>
-        <p:blipFill>
-          <a:blip r:embed="rId1"/>
-          <a:stretch>
-            <a:fillRect/>
-          </a:stretch>
-        </p:blipFill>
-        <p:spPr>
-          <a:xfrm>
-            <a:off x="530352" y="1307592"/>
-            <a:ext cx="4572000" cy="3072384"/>
-          </a:xfrm>
-          <a:prstGeom prst="rect">
-            <a:avLst/>
-          </a:prstGeom>
-        </p:spPr>
-      </p:pic>
-      <p:sp>
-        <p:nvSpPr>
-          <p:cNvPr id="5" name="content-7-text-3"/>
-          <p:cNvSpPr txBox="1"/>
-          <p:nvPr/>
-        </p:nvSpPr>
-        <p:spPr>
-          <a:xfrm>
-            <a:off x="457200" y="4526280"/>
-            <a:ext cx="4754880" cy="274320"/>
-          </a:xfrm>
-          <a:prstGeom prst="rect">
-            <a:avLst/>
-          </a:prstGeom>
-          <a:noFill/>
-          <a:ln/>
-        </p:spPr>
-        <p:txBody>
-          <a:bodyPr wrap="square" lIns="0" tIns="0" rIns="0" bIns="0" rtlCol="0" anchor="t"/>
-          <a:lstStyle/>
-          <a:p>
-            <a:pPr algn="l" indent="0" marL="0">
-              <a:buNone/>
-            </a:pPr>
-            <a:r>
-              <a:rPr lang="en-US" sz="1100" dirty="0">
-                <a:solidFill>
-                  <a:schemeClr val="tx2"/>
-                </a:solidFill>
-              </a:rPr>
-              <a:t>Simulated chain: the tokens are not money. Synthetic data.</a:t>
-            </a:r>
-            <a:endParaRPr lang="en-US" sz="1100" dirty="0"/>
-          </a:p>
-        </p:txBody>
-      </p:sp>
-      <p:sp>
-        <p:nvSpPr>
-          <p:cNvPr id="6" name="content-7-rect-4"/>
-          <p:cNvSpPr/>
-          <p:nvPr/>
-        </p:nvSpPr>
-        <p:spPr>
-          <a:xfrm>
-            <a:off x="5486400" y="1280160"/>
-            <a:ext cx="3200400" cy="731520"/>
-          </a:xfrm>
-          <a:prstGeom prst="roundRect">
-            <a:avLst>
-              <a:gd name="adj" fmla="val 10000"/>
+              <a:gd name="adj" fmla="val 2319"/>
             </a:avLst>
           </a:prstGeom>
           <a:solidFill>
@@ -9235,14 +9141,70 @@
       </p:sp>
       <p:sp>
         <p:nvSpPr>
-          <p:cNvPr id="7" name="content-7-text-5"/>
+          <p:cNvPr id="4" name="content-7-rect-2"/>
+          <p:cNvSpPr/>
+          <p:nvPr/>
+        </p:nvSpPr>
+        <p:spPr>
+          <a:xfrm>
+            <a:off x="640080" y="1371600"/>
+            <a:ext cx="109728" cy="365760"/>
+          </a:xfrm>
+          <a:prstGeom prst="rect">
+            <a:avLst/>
+          </a:prstGeom>
+          <a:solidFill>
+            <a:schemeClr val="accent1"/>
+          </a:solidFill>
+          <a:ln/>
+        </p:spPr>
+      </p:sp>
+      <p:sp>
+        <p:nvSpPr>
+          <p:cNvPr id="5" name="content-7-text-3"/>
           <p:cNvSpPr txBox="1"/>
           <p:nvPr/>
         </p:nvSpPr>
         <p:spPr>
           <a:xfrm>
-            <a:off x="5623560" y="1316736"/>
-            <a:ext cx="2926080" cy="256032"/>
+            <a:off x="841248" y="1325880"/>
+            <a:ext cx="3474720" cy="457200"/>
+          </a:xfrm>
+          <a:prstGeom prst="rect">
+            <a:avLst/>
+          </a:prstGeom>
+          <a:noFill/>
+          <a:ln/>
+        </p:spPr>
+        <p:txBody>
+          <a:bodyPr wrap="square" lIns="0" tIns="0" rIns="0" bIns="0" rtlCol="0" anchor="ctr"/>
+          <a:lstStyle/>
+          <a:p>
+            <a:pPr algn="l" indent="0" marL="0">
+              <a:buNone/>
+            </a:pPr>
+            <a:r>
+              <a:rPr lang="en-US" sz="1800" b="1" dirty="0">
+                <a:solidFill>
+                  <a:schemeClr val="accent1"/>
+                </a:solidFill>
+              </a:rPr>
+              <a:t>Proven by tests and logs</a:t>
+            </a:r>
+            <a:endParaRPr lang="en-US" sz="1800" dirty="0"/>
+          </a:p>
+        </p:txBody>
+      </p:sp>
+      <p:sp>
+        <p:nvSpPr>
+          <p:cNvPr id="6" name="content-7-text-4"/>
+          <p:cNvSpPr txBox="1"/>
+          <p:nvPr/>
+        </p:nvSpPr>
+        <p:spPr>
+          <a:xfrm>
+            <a:off x="640080" y="1920240"/>
+            <a:ext cx="3657600" cy="2377440"/>
           </a:xfrm>
           <a:prstGeom prst="rect">
             <a:avLst/>
@@ -9254,71 +9216,93 @@
           <a:bodyPr wrap="square" lIns="0" tIns="0" rIns="0" bIns="0" rtlCol="0" anchor="t"/>
           <a:lstStyle/>
           <a:p>
-            <a:pPr algn="l" indent="0" marL="0">
-              <a:buNone/>
-            </a:pPr>
-            <a:r>
-              <a:rPr lang="en-US" sz="1400" b="1" dirty="0">
-                <a:solidFill>
-                  <a:schemeClr val="accent1"/>
-                </a:solidFill>
-              </a:rPr>
-              <a:t>Plan</a:t>
-            </a:r>
-            <a:endParaRPr lang="en-US" sz="1400" dirty="0"/>
-          </a:p>
-        </p:txBody>
-      </p:sp>
-      <p:sp>
-        <p:nvSpPr>
-          <p:cNvPr id="8" name="content-7-text-6"/>
-          <p:cNvSpPr txBox="1"/>
-          <p:nvPr/>
-        </p:nvSpPr>
-        <p:spPr>
-          <a:xfrm>
-            <a:off x="5623560" y="1572768"/>
-            <a:ext cx="2971800" cy="420624"/>
-          </a:xfrm>
-          <a:prstGeom prst="rect">
-            <a:avLst/>
-          </a:prstGeom>
-          <a:noFill/>
-          <a:ln/>
-        </p:spPr>
-        <p:txBody>
-          <a:bodyPr wrap="square" lIns="0" tIns="0" rIns="0" bIns="0" rtlCol="0" anchor="t"/>
-          <a:lstStyle/>
-          <a:p>
-            <a:pPr algn="l" indent="0" marL="0">
-              <a:buNone/>
-            </a:pPr>
-            <a:r>
-              <a:rPr lang="en-US" sz="1100" dirty="0">
+            <a:pPr algn="l" marL="342900" indent="-342900">
+              <a:spcAft>
+                <a:spcPts val="600"/>
+              </a:spcAft>
+              <a:buSzPct val="100000"/>
+              <a:buChar char="•"/>
+            </a:pPr>
+            <a:r>
+              <a:rPr lang="en-US" sz="1200" dirty="0">
                 <a:solidFill>
                   <a:schemeClr val="tx1"/>
                 </a:solidFill>
               </a:rPr>
-              <a:t>The schedule is shown first. Nothing is locked.</a:t>
-            </a:r>
-            <a:endParaRPr lang="en-US" sz="1100" dirty="0"/>
-          </a:p>
-        </p:txBody>
-      </p:sp>
-      <p:sp>
-        <p:nvSpPr>
-          <p:cNvPr id="9" name="content-7-rect-7"/>
+              <a:t>Every number comes from one engine, in integer money. 1223 backend tests cover all 24 scenarios.</a:t>
+            </a:r>
+            <a:endParaRPr lang="en-US" sz="1200" dirty="0"/>
+          </a:p>
+          <a:p>
+            <a:pPr algn="l" marL="342900" indent="-342900">
+              <a:spcAft>
+                <a:spcPts val="600"/>
+              </a:spcAft>
+              <a:buSzPct val="100000"/>
+              <a:buChar char="•"/>
+            </a:pPr>
+            <a:r>
+              <a:rPr lang="en-US" sz="1200" dirty="0">
+                <a:solidFill>
+                  <a:schemeClr val="tx1"/>
+                </a:solidFill>
+              </a:rPr>
+              <a:t>Only a human with a fresh MFA code can approve. The AI has no such permission, and a test enforces the table.</a:t>
+            </a:r>
+            <a:endParaRPr lang="en-US" sz="1200" dirty="0"/>
+          </a:p>
+          <a:p>
+            <a:pPr algn="l" marL="342900" indent="-342900">
+              <a:spcAft>
+                <a:spcPts val="600"/>
+              </a:spcAft>
+              <a:buSzPct val="100000"/>
+              <a:buChar char="•"/>
+            </a:pPr>
+            <a:r>
+              <a:rPr lang="en-US" sz="1200" dirty="0">
+                <a:solidFill>
+                  <a:schemeClr val="tx1"/>
+                </a:solidFill>
+              </a:rPr>
+              <a:t>Edit one audit row and Verify fails at that event. A rewritten chain is caught by the anchor.</a:t>
+            </a:r>
+            <a:endParaRPr lang="en-US" sz="1200" dirty="0"/>
+          </a:p>
+          <a:p>
+            <a:pPr algn="l" marL="342900" indent="-342900">
+              <a:spcAft>
+                <a:spcPts val="600"/>
+              </a:spcAft>
+              <a:buSzPct val="100000"/>
+              <a:buChar char="•"/>
+            </a:pPr>
+            <a:r>
+              <a:rPr lang="en-US" sz="1200" dirty="0">
+                <a:solidFill>
+                  <a:schemeClr val="tx1"/>
+                </a:solidFill>
+              </a:rPr>
+              <a:t>The whole stack starts from the zipped archive with docker compose, run for real on 15 and 17 October.</a:t>
+            </a:r>
+            <a:endParaRPr lang="en-US" sz="1200" dirty="0"/>
+          </a:p>
+        </p:txBody>
+      </p:sp>
+      <p:sp>
+        <p:nvSpPr>
+          <p:cNvPr id="7" name="content-7-rect-5"/>
           <p:cNvSpPr/>
           <p:nvPr/>
         </p:nvSpPr>
         <p:spPr>
           <a:xfrm>
-            <a:off x="5486400" y="2103120"/>
-            <a:ext cx="3200400" cy="731520"/>
+            <a:off x="4663440" y="1234440"/>
+            <a:ext cx="4023360" cy="3154680"/>
           </a:xfrm>
           <a:prstGeom prst="roundRect">
             <a:avLst>
-              <a:gd name="adj" fmla="val 10000"/>
+              <a:gd name="adj" fmla="val 2319"/>
             </a:avLst>
           </a:prstGeom>
           <a:solidFill>
@@ -9329,14 +9313,70 @@
       </p:sp>
       <p:sp>
         <p:nvSpPr>
+          <p:cNvPr id="8" name="content-7-rect-6"/>
+          <p:cNvSpPr/>
+          <p:nvPr/>
+        </p:nvSpPr>
+        <p:spPr>
+          <a:xfrm>
+            <a:off x="4846320" y="1371600"/>
+            <a:ext cx="109728" cy="365760"/>
+          </a:xfrm>
+          <a:prstGeom prst="rect">
+            <a:avLst/>
+          </a:prstGeom>
+          <a:solidFill>
+            <a:schemeClr val="accent3"/>
+          </a:solidFill>
+          <a:ln/>
+        </p:spPr>
+      </p:sp>
+      <p:sp>
+        <p:nvSpPr>
+          <p:cNvPr id="9" name="content-7-text-7"/>
+          <p:cNvSpPr txBox="1"/>
+          <p:nvPr/>
+        </p:nvSpPr>
+        <p:spPr>
+          <a:xfrm>
+            <a:off x="5047488" y="1325880"/>
+            <a:ext cx="3474720" cy="457200"/>
+          </a:xfrm>
+          <a:prstGeom prst="rect">
+            <a:avLst/>
+          </a:prstGeom>
+          <a:noFill/>
+          <a:ln/>
+        </p:spPr>
+        <p:txBody>
+          <a:bodyPr wrap="square" lIns="0" tIns="0" rIns="0" bIns="0" rtlCol="0" anchor="ctr"/>
+          <a:lstStyle/>
+          <a:p>
+            <a:pPr algn="l" indent="0" marL="0">
+              <a:buNone/>
+            </a:pPr>
+            <a:r>
+              <a:rPr lang="en-US" sz="1800" b="1" dirty="0">
+                <a:solidFill>
+                  <a:schemeClr val="accent3"/>
+                </a:solidFill>
+              </a:rPr>
+              <a:t>Not proven, and we say so</a:t>
+            </a:r>
+            <a:endParaRPr lang="en-US" sz="1800" dirty="0"/>
+          </a:p>
+        </p:txBody>
+      </p:sp>
+      <p:sp>
+        <p:nvSpPr>
           <p:cNvPr id="10" name="content-7-text-8"/>
           <p:cNvSpPr txBox="1"/>
           <p:nvPr/>
         </p:nvSpPr>
         <p:spPr>
           <a:xfrm>
-            <a:off x="5623560" y="2139696"/>
-            <a:ext cx="2926080" cy="256032"/>
+            <a:off x="4846320" y="1920240"/>
+            <a:ext cx="3657600" cy="2377440"/>
           </a:xfrm>
           <a:prstGeom prst="rect">
             <a:avLst/>
@@ -9348,18 +9388,76 @@
           <a:bodyPr wrap="square" lIns="0" tIns="0" rIns="0" bIns="0" rtlCol="0" anchor="t"/>
           <a:lstStyle/>
           <a:p>
-            <a:pPr algn="l" indent="0" marL="0">
-              <a:buNone/>
-            </a:pPr>
-            <a:r>
-              <a:rPr lang="en-US" sz="1400" b="1" dirty="0">
-                <a:solidFill>
-                  <a:schemeClr val="accent1"/>
-                </a:solidFill>
-              </a:rPr>
-              <a:t>Lock</a:t>
-            </a:r>
-            <a:endParaRPr lang="en-US" sz="1400" dirty="0"/>
+            <a:pPr algn="l" marL="342900" indent="-342900">
+              <a:spcAft>
+                <a:spcPts val="600"/>
+              </a:spcAft>
+              <a:buSzPct val="100000"/>
+              <a:buChar char="•"/>
+            </a:pPr>
+            <a:r>
+              <a:rPr lang="en-US" sz="1200" dirty="0">
+                <a:solidFill>
+                  <a:schemeClr val="tx1"/>
+                </a:solidFill>
+              </a:rPr>
+              <a:t>Rates, fees and city costs are invented. We have not compared them with real quotes yet.</a:t>
+            </a:r>
+            <a:endParaRPr lang="en-US" sz="1200" dirty="0"/>
+          </a:p>
+          <a:p>
+            <a:pPr algn="l" marL="342900" indent="-342900">
+              <a:spcAft>
+                <a:spcPts val="600"/>
+              </a:spcAft>
+              <a:buSzPct val="100000"/>
+              <a:buChar char="•"/>
+            </a:pPr>
+            <a:r>
+              <a:rPr lang="en-US" sz="1200" dirty="0">
+                <a:solidFill>
+                  <a:schemeClr val="tx1"/>
+                </a:solidFill>
+              </a:rPr>
+              <a:t>No real parent has used it. The trained models saw synthetic data.</a:t>
+            </a:r>
+            <a:endParaRPr lang="en-US" sz="1200" dirty="0"/>
+          </a:p>
+          <a:p>
+            <a:pPr algn="l" marL="342900" indent="-342900">
+              <a:spcAft>
+                <a:spcPts val="600"/>
+              </a:spcAft>
+              <a:buSzPct val="100000"/>
+              <a:buChar char="•"/>
+            </a:pPr>
+            <a:r>
+              <a:rPr lang="en-US" sz="1200" dirty="0">
+                <a:solidFill>
+                  <a:schemeClr val="tx1"/>
+                </a:solidFill>
+              </a:rPr>
+              <a:t>No outside security review or penetration test.</a:t>
+            </a:r>
+            <a:endParaRPr lang="en-US" sz="1200" dirty="0"/>
+          </a:p>
+          <a:p>
+            <a:pPr algn="l" marL="342900" indent="-342900">
+              <a:spcAft>
+                <a:spcPts val="600"/>
+              </a:spcAft>
+              <a:buSzPct val="100000"/>
+              <a:buChar char="•"/>
+            </a:pPr>
+            <a:r>
+              <a:rPr lang="en-US" sz="1200" dirty="0">
+                <a:solidFill>
+                  <a:schemeClr val="tx1"/>
+                </a:solidFill>
+              </a:rPr>
+              <a:t>Bangladesh Bank limits are placeholders, marked Not verified.</a:t>
+            </a:r>
+            <a:endParaRPr lang="en-US" sz="1200" dirty="0"/>
           </a:p>
         </p:txBody>
       </p:sp>
@@ -9371,8 +9469,8 @@
         </p:nvSpPr>
         <p:spPr>
           <a:xfrm>
-            <a:off x="5623560" y="2395728"/>
-            <a:ext cx="2971800" cy="420624"/>
+            <a:off x="457200" y="4526280"/>
+            <a:ext cx="8229600" cy="320040"/>
           </a:xfrm>
           <a:prstGeom prst="rect">
             <a:avLst/>
@@ -9388,202 +9486,14 @@
               <a:buNone/>
             </a:pPr>
             <a:r>
-              <a:rPr lang="en-US" sz="1100" dirty="0">
-                <a:solidFill>
-                  <a:schemeClr val="tx1"/>
-                </a:solidFill>
-              </a:rPr>
-              <a:t>A fresh MFA proof from the parent. The funds wait in the contract.</a:t>
-            </a:r>
-            <a:endParaRPr lang="en-US" sz="1100" dirty="0"/>
-          </a:p>
-        </p:txBody>
-      </p:sp>
-      <p:sp>
-        <p:nvSpPr>
-          <p:cNvPr id="12" name="content-7-rect-10"/>
-          <p:cNvSpPr/>
-          <p:nvPr/>
-        </p:nvSpPr>
-        <p:spPr>
-          <a:xfrm>
-            <a:off x="5486400" y="2926080"/>
-            <a:ext cx="3200400" cy="731520"/>
-          </a:xfrm>
-          <a:prstGeom prst="roundRect">
-            <a:avLst>
-              <a:gd name="adj" fmla="val 10000"/>
-            </a:avLst>
-          </a:prstGeom>
-          <a:solidFill>
-            <a:schemeClr val="bg2"/>
-          </a:solidFill>
-          <a:ln/>
-        </p:spPr>
-      </p:sp>
-      <p:sp>
-        <p:nvSpPr>
-          <p:cNvPr id="13" name="content-7-text-11"/>
-          <p:cNvSpPr txBox="1"/>
-          <p:nvPr/>
-        </p:nvSpPr>
-        <p:spPr>
-          <a:xfrm>
-            <a:off x="5623560" y="2962656"/>
-            <a:ext cx="2926080" cy="256032"/>
-          </a:xfrm>
-          <a:prstGeom prst="rect">
-            <a:avLst/>
-          </a:prstGeom>
-          <a:noFill/>
-          <a:ln/>
-        </p:spPr>
-        <p:txBody>
-          <a:bodyPr wrap="square" lIns="0" tIns="0" rIns="0" bIns="0" rtlCol="0" anchor="t"/>
-          <a:lstStyle/>
-          <a:p>
-            <a:pPr algn="l" indent="0" marL="0">
-              <a:buNone/>
-            </a:pPr>
-            <a:r>
-              <a:rPr lang="en-US" sz="1400" b="1" dirty="0">
-                <a:solidFill>
-                  <a:schemeClr val="accent1"/>
-                </a:solidFill>
-              </a:rPr>
-              <a:t>Release</a:t>
-            </a:r>
-            <a:endParaRPr lang="en-US" sz="1400" dirty="0"/>
-          </a:p>
-        </p:txBody>
-      </p:sp>
-      <p:sp>
-        <p:nvSpPr>
-          <p:cNvPr id="14" name="content-7-text-12"/>
-          <p:cNvSpPr txBox="1"/>
-          <p:nvPr/>
-        </p:nvSpPr>
-        <p:spPr>
-          <a:xfrm>
-            <a:off x="5623560" y="3218688"/>
-            <a:ext cx="2971800" cy="420624"/>
-          </a:xfrm>
-          <a:prstGeom prst="rect">
-            <a:avLst/>
-          </a:prstGeom>
-          <a:noFill/>
-          <a:ln/>
-        </p:spPr>
-        <p:txBody>
-          <a:bodyPr wrap="square" lIns="0" tIns="0" rIns="0" bIns="0" rtlCol="0" anchor="t"/>
-          <a:lstStyle/>
-          <a:p>
-            <a:pPr algn="l" indent="0" marL="0">
-              <a:buNone/>
-            </a:pPr>
-            <a:r>
-              <a:rPr lang="en-US" sz="1100" dirty="0">
-                <a:solidFill>
-                  <a:schemeClr val="tx1"/>
-                </a:solidFill>
-              </a:rPr>
-              <a:t>On the dates chosen. A reviewer can freeze it with a reason, never move the funds.</a:t>
-            </a:r>
-            <a:endParaRPr lang="en-US" sz="1100" dirty="0"/>
-          </a:p>
-        </p:txBody>
-      </p:sp>
-      <p:sp>
-        <p:nvSpPr>
-          <p:cNvPr id="15" name="content-7-rect-13"/>
-          <p:cNvSpPr/>
-          <p:nvPr/>
-        </p:nvSpPr>
-        <p:spPr>
-          <a:xfrm>
-            <a:off x="5486400" y="3749040"/>
-            <a:ext cx="3200400" cy="731520"/>
-          </a:xfrm>
-          <a:prstGeom prst="roundRect">
-            <a:avLst>
-              <a:gd name="adj" fmla="val 10000"/>
-            </a:avLst>
-          </a:prstGeom>
-          <a:solidFill>
-            <a:schemeClr val="bg2"/>
-          </a:solidFill>
-          <a:ln/>
-        </p:spPr>
-      </p:sp>
-      <p:sp>
-        <p:nvSpPr>
-          <p:cNvPr id="16" name="content-7-text-14"/>
-          <p:cNvSpPr txBox="1"/>
-          <p:nvPr/>
-        </p:nvSpPr>
-        <p:spPr>
-          <a:xfrm>
-            <a:off x="5623560" y="3785616"/>
-            <a:ext cx="2926080" cy="256032"/>
-          </a:xfrm>
-          <a:prstGeom prst="rect">
-            <a:avLst/>
-          </a:prstGeom>
-          <a:noFill/>
-          <a:ln/>
-        </p:spPr>
-        <p:txBody>
-          <a:bodyPr wrap="square" lIns="0" tIns="0" rIns="0" bIns="0" rtlCol="0" anchor="t"/>
-          <a:lstStyle/>
-          <a:p>
-            <a:pPr algn="l" indent="0" marL="0">
-              <a:buNone/>
-            </a:pPr>
-            <a:r>
-              <a:rPr lang="en-US" sz="1400" b="1" dirty="0">
-                <a:solidFill>
-                  <a:schemeClr val="accent1"/>
-                </a:solidFill>
-              </a:rPr>
-              <a:t>Privacy</a:t>
-            </a:r>
-            <a:endParaRPr lang="en-US" sz="1400" dirty="0"/>
-          </a:p>
-        </p:txBody>
-      </p:sp>
-      <p:sp>
-        <p:nvSpPr>
-          <p:cNvPr id="17" name="content-7-text-15"/>
-          <p:cNvSpPr txBox="1"/>
-          <p:nvPr/>
-        </p:nvSpPr>
-        <p:spPr>
-          <a:xfrm>
-            <a:off x="5623560" y="4041648"/>
-            <a:ext cx="2971800" cy="420624"/>
-          </a:xfrm>
-          <a:prstGeom prst="rect">
-            <a:avLst/>
-          </a:prstGeom>
-          <a:noFill/>
-          <a:ln/>
-        </p:spPr>
-        <p:txBody>
-          <a:bodyPr wrap="square" lIns="0" tIns="0" rIns="0" bIns="0" rtlCol="0" anchor="t"/>
-          <a:lstStyle/>
-          <a:p>
-            <a:pPr algn="l" indent="0" marL="0">
-              <a:buNone/>
-            </a:pPr>
-            <a:r>
-              <a:rPr lang="en-US" sz="1100" dirty="0">
-                <a:solidFill>
-                  <a:schemeClr val="tx1"/>
-                </a:solidFill>
-              </a:rPr>
-              <a:t>Only amounts, dates and hashes go on the chain. The AI has no access.</a:t>
-            </a:r>
-            <a:endParaRPr lang="en-US" sz="1100" dirty="0"/>
+              <a:rPr lang="en-US" sz="1200" dirty="0">
+                <a:solidFill>
+                  <a:schemeClr val="tx2"/>
+                </a:solidFill>
+              </a:rPr>
+              <a:t>Both lists are in the repository: docs/OPEN_QUESTIONS.md and docs/SECURITY_SELF_ASSESSMENT.md</a:t>
+            </a:r>
+            <a:endParaRPr lang="en-US" sz="1200" dirty="0"/>
           </a:p>
         </p:txBody>
       </p:sp>

--- a/submission/StudyRoute_Deck.pptx
+++ b/submission/StudyRoute_Deck.pptx
@@ -118,25 +118,25 @@
   <p:extLst>
     <p:ext uri="{521415D9-36F7-43E2-AB2F-B90AF26B5E84}">
       <p14:sectionLst xmlns:p14="http://schemas.microsoft.com/office/powerpoint/2010/main">
-        <p14:section name="Opening" id="{de4f31f0-bb16-3e14-210d-4beb323ca795}">
+        <p14:section name="Opening" id="{f86be450-ab88-73b1-c0d8-21b2b3123181}">
           <p14:sldIdLst>
             <p14:sldId id="256"/>
             <p14:sldId id="257"/>
           </p14:sldIdLst>
         </p14:section>
-        <p14:section name="The problem" id="{d19685a3-c468-bffe-528e-12ec3392dc8b}">
+        <p14:section name="The problem" id="{ad24fab0-93e7-0a1b-c64f-6700cdd586ca}">
           <p14:sldIdLst>
             <p14:sldId id="258"/>
             <p14:sldId id="259"/>
           </p14:sldIdLst>
         </p14:section>
-        <p14:section name="The solution" id="{2b6f4586-7f4a-3198-b336-61d3f1601ce0}">
+        <p14:section name="The solution" id="{13ad92fb-9fbe-8f21-092c-2575e2f41e88}">
           <p14:sldIdLst>
             <p14:sldId id="260"/>
             <p14:sldId id="261"/>
           </p14:sldIdLst>
         </p14:section>
-        <p14:section name="Trust" id="{7ecec6e3-c245-b81c-07db-53c60d9f8e45}">
+        <p14:section name="Trust" id="{96142a7a-868c-c77a-f6fa-91dbf6c72eee}">
           <p14:sldIdLst>
             <p14:sldId id="262"/>
             <p14:sldId id="263"/>
@@ -145,7 +145,7 @@
             <p14:sldId id="266"/>
           </p14:sldIdLst>
         </p14:section>
-        <p14:section name="Close" id="{b7f5cfe4-3db9-93c5-e321-445103f6c26b}">
+        <p14:section name="Close" id="{4d501253-3d1a-8409-96a5-a156a5f116bd}">
           <p14:sldIdLst>
             <p14:sldId id="267"/>
           </p14:sldIdLst>
@@ -939,7 +939,7 @@
           <a:p>
             <a:r>
               <a:rPr lang="en-US" dirty="0"/>
-              <a:t>Security and compliance is thirty percent of the score, so we made it checkable. On the left are the permission tiers, enforced in the domain layer, not just in the screens. Public, read, prepare, decide, and administer. Deciding, meaning approving a payment, is only for a human parent with a fresh MFA proof bound to that payment and to the hash of the summary they saw. The AI has no approve, cancel, limit or config permission at all. On the right, the numbers: 1494 backend and 422 frontend tests, all 24 blueprint scenarios mapped to tests, and 48 known risks that we list openly in the self-assessment. The audit log is hash-chained: Verify passes, we edit one row behind the application's back, and Verify fails at exactly that event.</a:t>
+              <a:t>Security and compliance is thirty percent of the score, so we made it checkable. On the left are the permission tiers, enforced in the domain layer, not just in the screens. Public, read, prepare, decide, and administer. Deciding, meaning approving a payment, is only for a human parent with a fresh MFA proof bound to that payment and to the hash of the summary they saw. The AI has no approve, cancel, limit or config permission at all. On the right, the numbers: 1534 backend and 439 frontend tests, all 24 blueprint scenarios mapped to tests, and 50 known risks that we list openly in the self-assessment. The audit log is hash-chained: Verify passes, we edit one row behind the application's back, and Verify fails at exactly that event.</a:t>
             </a:r>
             <a:endParaRPr lang="en-US" dirty="0"/>
           </a:p>
@@ -1643,7 +1643,7 @@
           <a:p>
             <a:r>
               <a:rPr lang="en-US" dirty="0"/>
-              <a:t>Before the details, here is what we have shown and what we have not. What we have shown: every number comes from one deterministic engine, with 1494 backend tests covering all 24 scenarios. Only a human with a fresh MFA code can approve, and the AI has no such permission. Change one audit row and Verify fails at that event. And the stack starts from the zipped archive with one command. What we have not shown: the rates, fees and city costs are invented, and we have not yet compared them with real quotes. No real parent has used it. No outsider has reviewed its security. The Bangladesh Bank limits are placeholders, marked Not verified. Both lists are in the repository, because we would rather you hear the limits from us.</a:t>
+              <a:t>Before the details, here is what we have shown and what we have not. What we have shown: every number comes from one deterministic engine, with 1534 backend tests covering all 24 scenarios. Only a human with a fresh MFA code can approve, and the AI has no such permission. Change one audit row and Verify fails at that event. And the stack starts from the zipped archive with one command. What we have not shown: the rates, fees and city costs are invented, and we have not yet compared them with real quotes. No real parent has used it. No outsider has reviewed its security. The Bangladesh Bank limits are placeholders, marked Not verified. Both lists are in the repository, because we would rather you hear the limits from us.</a:t>
             </a:r>
             <a:endParaRPr lang="en-US" dirty="0"/>
           </a:p>
@@ -3246,7 +3246,7 @@
                 <a:ea typeface="+mj-lt" pitchFamily="34" charset="-122"/>
                 <a:cs typeface="+mj-lt" pitchFamily="34" charset="-120"/>
               </a:rPr>
-              <a:t>1494</a:t>
+              <a:t>1534</a:t>
             </a:r>
             <a:endParaRPr lang="en-US" sz="3200" dirty="0"/>
           </a:p>
@@ -3343,7 +3343,7 @@
                 <a:ea typeface="+mj-lt" pitchFamily="34" charset="-122"/>
                 <a:cs typeface="+mj-lt" pitchFamily="34" charset="-120"/>
               </a:rPr>
-              <a:t>422</a:t>
+              <a:t>439</a:t>
             </a:r>
             <a:endParaRPr lang="en-US" sz="3200" dirty="0"/>
           </a:p>
@@ -3537,7 +3537,7 @@
                 <a:ea typeface="+mj-lt" pitchFamily="34" charset="-122"/>
                 <a:cs typeface="+mj-lt" pitchFamily="34" charset="-120"/>
               </a:rPr>
-              <a:t>48</a:t>
+              <a:t>50</a:t>
             </a:r>
             <a:endParaRPr lang="en-US" sz="3200" dirty="0"/>
           </a:p>
@@ -9229,7 +9229,7 @@
                   <a:schemeClr val="tx1"/>
                 </a:solidFill>
               </a:rPr>
-              <a:t>Every number comes from one engine, in integer money. 1494 backend tests cover all 24 scenarios.</a:t>
+              <a:t>Every number comes from one engine, in integer money. 1534 backend tests cover all 24 scenarios.</a:t>
             </a:r>
             <a:endParaRPr lang="en-US" sz="1200" dirty="0"/>
           </a:p>

--- a/submission/StudyRoute_Deck.pptx
+++ b/submission/StudyRoute_Deck.pptx
@@ -1774,91 +1774,91 @@
 </file>
 
 <file path=ppt/notesSlides/notesSlide9.xml><?xml version="1.0" encoding="utf-8"?>
-<p:notes xmlns:a="http://schemas.openxmlformats.org/drawingml/2006/main" xmlns:r="http://schemas.openxmlformats.org/officeDocument/2006/relationships" xmlns:p="http://schemas.openxmlformats.org/presentationml/2006/main">
-  <p:cSld>
-    <p:spTree>
-      <p:nvGrpSpPr>
-        <p:cNvPr id="1" name=""/>
-        <p:cNvGrpSpPr/>
-        <p:nvPr/>
-      </p:nvGrpSpPr>
-      <p:grpSpPr>
-        <a:xfrm>
-          <a:off x="0" y="0"/>
-          <a:ext cx="0" cy="0"/>
-          <a:chOff x="0" y="0"/>
-          <a:chExt cx="0" cy="0"/>
-        </a:xfrm>
-      </p:grpSpPr>
-      <p:sp>
-        <p:nvSpPr>
-          <p:cNvPr id="2" name="Slide Image Placeholder 1"/>
-          <p:cNvSpPr>
-            <a:spLocks noGrp="1" noRot="1" noChangeAspect="1"/>
-          </p:cNvSpPr>
-          <p:nvPr>
-            <p:ph type="sldImg"/>
-          </p:nvPr>
-        </p:nvSpPr>
-        <p:spPr/>
-      </p:sp>
-      <p:sp>
-        <p:nvSpPr>
-          <p:cNvPr id="3" name="Notes Placeholder 2"/>
-          <p:cNvSpPr>
-            <a:spLocks noGrp="1"/>
-          </p:cNvSpPr>
-          <p:nvPr>
-            <p:ph type="body" idx="1"/>
-          </p:nvPr>
-        </p:nvSpPr>
-        <p:spPr/>
-        <p:txBody>
-          <a:bodyPr/>
-          <a:lstStyle/>
-          <a:p>
-            <a:r>
-              <a:rPr lang="en-US" dirty="0"/>
-              <a:t>The assistant has a trained component, and we measured it. A small language model, fine-tuned on a gaming-class GPU in a few minutes, reads what a parent types: the intent, and the exact words that carry an amount, a currency or a date. It never produces a number; plain code turns those words into values, and when the old rules and the model disagree, the assistant asks. On messages we wrote by hand after the model was frozen, it chose the right intent 88.5% of the time against 61.1% for the old rules, read a plan request exactly 100% against 57.6%, and blocked 92.9% of attacks against 28.6%. The sample is small and the data is synthetic. A second small policy, trained with reinforcement learning, chooses whether to ask, read back or plan: on simulated parents, wrong plans fell from 2.8% to 0.8%. Plain code limits its legal moves, and the parents are our assumption.</a:t>
-            </a:r>
-            <a:endParaRPr lang="en-US" dirty="0"/>
-          </a:p>
-        </p:txBody>
-      </p:sp>
-      <p:sp>
-        <p:nvSpPr>
-          <p:cNvPr id="4" name="Slide Number Placeholder 3"/>
-          <p:cNvSpPr>
-            <a:spLocks noGrp="1"/>
-          </p:cNvSpPr>
-          <p:nvPr>
-            <p:ph type="sldNum" sz="quarter" idx="10"/>
-          </p:nvPr>
-        </p:nvSpPr>
-        <p:spPr/>
-        <p:txBody>
-          <a:bodyPr/>
-          <a:lstStyle/>
-          <a:p>
-            <a:fld id="{F7021451-1387-4CA6-816F-3879F97B5CBC}" type="slidenum">
-              <a:rPr lang="en-US"/>
-              <a:t>9</a:t>
-            </a:fld>
-            <a:endParaRPr lang="en-US"/>
-          </a:p>
-        </p:txBody>
-      </p:sp>
-    </p:spTree>
-    <p:extLst>
-      <p:ext uri="{BB962C8B-B14F-4D97-AF65-F5344CB8AC3E}">
-        <p14:creationId xmlns:p14="http://schemas.microsoft.com/office/powerpoint/2010/main" val="1024086991"/>
-      </p:ext>
-    </p:extLst>
-  </p:cSld>
-  <p:clrMapOvr>
-    <a:masterClrMapping/>
-  </p:clrMapOvr>
-</p:notes>
+<ns0:notes xmlns:ns0="http://schemas.openxmlformats.org/presentationml/2006/main" xmlns:ns1="http://schemas.openxmlformats.org/drawingml/2006/main" xmlns:ns2="http://schemas.microsoft.com/office/powerpoint/2010/main">
+  <ns0:cSld>
+    <ns0:spTree>
+      <ns0:nvGrpSpPr>
+        <ns0:cNvPr id="1" name=""/>
+        <ns0:cNvGrpSpPr/>
+        <ns0:nvPr/>
+      </ns0:nvGrpSpPr>
+      <ns0:grpSpPr>
+        <ns1:xfrm>
+          <ns1:off x="0" y="0"/>
+          <ns1:ext cx="0" cy="0"/>
+          <ns1:chOff x="0" y="0"/>
+          <ns1:chExt cx="0" cy="0"/>
+        </ns1:xfrm>
+      </ns0:grpSpPr>
+      <ns0:sp>
+        <ns0:nvSpPr>
+          <ns0:cNvPr id="2" name="Slide Image Placeholder 1"/>
+          <ns0:cNvSpPr>
+            <ns1:spLocks noGrp="1" noRot="1" noChangeAspect="1"/>
+          </ns0:cNvSpPr>
+          <ns0:nvPr>
+            <ns0:ph type="sldImg"/>
+          </ns0:nvPr>
+        </ns0:nvSpPr>
+        <ns0:spPr/>
+      </ns0:sp>
+      <ns0:sp>
+        <ns0:nvSpPr>
+          <ns0:cNvPr id="3" name="Notes Placeholder 2"/>
+          <ns0:cNvSpPr>
+            <ns1:spLocks noGrp="1"/>
+          </ns0:cNvSpPr>
+          <ns0:nvPr>
+            <ns0:ph type="body" idx="1"/>
+          </ns0:nvPr>
+        </ns0:nvSpPr>
+        <ns0:spPr/>
+        <ns0:txBody>
+          <ns1:bodyPr/>
+          <ns1:lstStyle/>
+          <ns1:p>
+            <ns1:r>
+              <ns1:rPr lang="en-US" dirty="0"/>
+              <ns1:t>The assistant has a trained component, and we measured it. A small language model, fine-tuned on a gaming-class GPU in a few minutes, reads what a parent types: the intent, and the exact words that carry an amount, a currency or a date. It never produces a number; plain code turns those words into values, and when the old rules and the model disagree, the assistant asks. On messages we wrote by hand after the model was frozen, it chose the right intent 88.5% of the time against 61.1% for the old rules, read a plan request exactly 100% against 57.6%, and blocked 92.9% of attacks against 28.6%. The sample is small and the data is synthetic. A second small policy, trained with reinforcement learning, chooses whether to ask, read back or plan: on simulated parents, wrong plans fell from 2.8% to 0.8%. Plain code limits its legal moves, and the parents are our assumption. Repair-release qualification: this frozen holdout has now been reused for reproduction, not a new blind study. These RL numbers describe the raw simulator policy, not the runtime review envelope. The default API now requires deterministic missing/conflicting-slot clarification and completed-value confirmation before planning, regardless of turn budget.</ns1:t>
+            </ns1:r>
+            <ns1:endParaRPr lang="en-US" dirty="0"/>
+          </ns1:p>
+        </ns0:txBody>
+      </ns0:sp>
+      <ns0:sp>
+        <ns0:nvSpPr>
+          <ns0:cNvPr id="4" name="Slide Number Placeholder 3"/>
+          <ns0:cNvSpPr>
+            <ns1:spLocks noGrp="1"/>
+          </ns0:cNvSpPr>
+          <ns0:nvPr>
+            <ns0:ph type="sldNum" sz="quarter" idx="10"/>
+          </ns0:nvPr>
+        </ns0:nvSpPr>
+        <ns0:spPr/>
+        <ns0:txBody>
+          <ns1:bodyPr/>
+          <ns1:lstStyle/>
+          <ns1:p>
+            <ns1:fld id="{F7021451-1387-4CA6-816F-3879F97B5CBC}" type="slidenum">
+              <ns1:rPr lang="en-US"/>
+              <ns1:t>9</ns1:t>
+            </ns1:fld>
+            <ns1:endParaRPr lang="en-US"/>
+          </ns1:p>
+        </ns0:txBody>
+      </ns0:sp>
+    </ns0:spTree>
+    <ns0:extLst>
+      <ns0:ext uri="{BB962C8B-B14F-4D97-AF65-F5344CB8AC3E}">
+        <ns2:creationId val="1024086991"/>
+      </ns0:ext>
+    </ns0:extLst>
+  </ns0:cSld>
+  <ns0:clrMapOvr>
+    <ns1:masterClrMapping/>
+  </ns0:clrMapOvr>
+</ns0:notes>
 </file>
 
 <file path=ppt/slideLayouts/slideLayout1.xml><?xml version="1.0" encoding="utf-8"?>
@@ -3246,7 +3246,7 @@
                 <a:ea typeface="+mj-lt" pitchFamily="34" charset="-122"/>
                 <a:cs typeface="+mj-lt" pitchFamily="34" charset="-120"/>
               </a:rPr>
-              <a:t>1534</a:t>
+              <a:t>See logs</a:t>
             </a:r>
             <a:endParaRPr lang="en-US" sz="3200" dirty="0"/>
           </a:p>
@@ -3282,7 +3282,7 @@
                   <a:schemeClr val="tx2"/>
                 </a:solidFill>
               </a:rPr>
-              <a:t>backend tests, all passing</a:t>
+              <a:t>current backend verification</a:t>
             </a:r>
             <a:endParaRPr lang="en-US" sz="1200" dirty="0"/>
           </a:p>
@@ -3609,7 +3609,7 @@
                   <a:schemeClr val="tx2"/>
                 </a:solidFill>
               </a:rPr>
-              <a:t>Each payment has a compliance report with a hash your browser can check. Every threat has a test: docs/SECURITY.md</a:t>
+              <a:t>Report hashes detect changes against a trusted hash, not provenance. Known gaps: docs/RELEASE_FIXES.md</a:t>
             </a:r>
             <a:endParaRPr lang="en-US" sz="1200" dirty="0"/>
           </a:p>
@@ -4380,7 +4380,7 @@
                 <a:ea typeface="+mj-lt" pitchFamily="34" charset="-122"/>
                 <a:cs typeface="+mj-lt" pitchFamily="34" charset="-120"/>
               </a:rPr>
-              <a:t>Clear, cheap and safe.</a:t>
+              <a:t>Clear costs. Human control.</a:t>
             </a:r>
             <a:endParaRPr lang="en-US" sz="2400" dirty="0"/>
           </a:p>
@@ -4416,7 +4416,7 @@
                   <a:schemeClr val="accent5"/>
                 </a:solidFill>
               </a:rPr>
-              <a:t>TeamEkxin  ·  https://github.com/NoobCrow/StudyRoute  ·  Sandbox: no real money moves</a:t>
+              <a:t>TeamEkxin  ·  https://github.com/redwan786/StudyRoute  ·  Sandbox: no real money moves</a:t>
             </a:r>
             <a:endParaRPr lang="en-US" sz="1200" dirty="0"/>
           </a:p>
@@ -9229,7 +9229,7 @@
                   <a:schemeClr val="tx1"/>
                 </a:solidFill>
               </a:rPr>
-              <a:t>Every number comes from one engine, in integer money. 1534 backend tests cover all 24 scenarios.</a:t>
+              <a:t>Money uses one deterministic integer engine. See release evidence for current tests and all 24 mapped scenarios.</a:t>
             </a:r>
             <a:endParaRPr lang="en-US" sz="1200" dirty="0"/>
           </a:p>
@@ -9265,7 +9265,7 @@
                   <a:schemeClr val="tx1"/>
                 </a:solidFill>
               </a:rPr>
-              <a:t>Edit one audit row and Verify fails at that event. A rewritten chain is caught by the anchor.</a:t>
+              <a:t>Local anchors detect audit-only rewrites, not a DB owner rewriting both logs. Checkpoints need separate protection.</a:t>
             </a:r>
             <a:endParaRPr lang="en-US" sz="1200" dirty="0"/>
           </a:p>
@@ -9283,7 +9283,7 @@
                   <a:schemeClr val="tx1"/>
                 </a:solidFill>
               </a:rPr>
-              <a:t>The whole stack starts from the zipped archive with docker compose, run for real on 15 and 17 October.</a:t>
+              <a:t>Fresh local API and UI checks are in release evidence. Docker logs are inherited, not rerun for this repair.</a:t>
             </a:r>
             <a:endParaRPr lang="en-US" sz="1200" dirty="0"/>
           </a:p>
@@ -9437,7 +9437,7 @@
                   <a:schemeClr val="tx1"/>
                 </a:solidFill>
               </a:rPr>
-              <a:t>No outside security review or penetration test.</a:t>
+              <a:t>Local code review and regression tests; no external penetration test.</a:t>
             </a:r>
             <a:endParaRPr lang="en-US" sz="1200" dirty="0"/>
           </a:p>
@@ -10395,7 +10395,7 @@
                             <a:schemeClr val="bg1"/>
                           </a:solidFill>
                         </a:rPr>
-                        <a:t>On 113 new messages</a:t>
+                        <a:t>On 113 frozen messages</a:t>
                       </a:r>
                       <a:endParaRPr lang="en-US" sz="1400" dirty="0"/>
                     </a:p>
@@ -11321,7 +11321,7 @@
                   <a:schemeClr val="tx2"/>
                 </a:solidFill>
               </a:rPr>
-              <a:t>Written by hand after the model was frozen, scored once. A small sample: about plus or minus 7 points. Real bank questions: rules 40.1%, agent 95.1%.</a:t>
+              <a:t>Frozen holdout, now re-evaluated; not a new blind study. Small sample. Banking77 routing: rules 40.1%, agent 95.1%.</a:t>
             </a:r>
             <a:endParaRPr lang="en-US" sz="1200" dirty="0"/>
           </a:p>
@@ -11509,7 +11509,7 @@
                   <a:schemeClr val="tx1"/>
                 </a:solidFill>
               </a:rPr>
-              <a:t>A policy trained by Double DQN decides when to ask, read back or plan. On simulated parents: wrong plans 0.8% against 2.8%, 1.17 questions against 0.44. Code limits its legal moves.</a:t>
+              <a:t>Raw DQN simulator: wrong plans 0.8% vs 2.8%. API now adds mandatory clarification and read-back; those simulator figures exclude it.</a:t>
             </a:r>
             <a:endParaRPr lang="en-US" sz="1100" dirty="0"/>
           </a:p>

--- a/submission/StudyRoute_Deck.pptx
+++ b/submission/StudyRoute_Deck.pptx
@@ -118,25 +118,25 @@
   <p:extLst>
     <p:ext uri="{521415D9-36F7-43E2-AB2F-B90AF26B5E84}">
       <p14:sectionLst xmlns:p14="http://schemas.microsoft.com/office/powerpoint/2010/main">
-        <p14:section name="Opening" id="{f86be450-ab88-73b1-c0d8-21b2b3123181}">
+        <p14:section name="Opening" id="{beef7f08-c5cb-bfca-ce2c-5b8bc06536d7}">
           <p14:sldIdLst>
             <p14:sldId id="256"/>
             <p14:sldId id="257"/>
           </p14:sldIdLst>
         </p14:section>
-        <p14:section name="The problem" id="{ad24fab0-93e7-0a1b-c64f-6700cdd586ca}">
+        <p14:section name="The problem" id="{b9061e67-4539-7806-b6e5-516f1d97ee74}">
           <p14:sldIdLst>
             <p14:sldId id="258"/>
             <p14:sldId id="259"/>
           </p14:sldIdLst>
         </p14:section>
-        <p14:section name="The solution" id="{13ad92fb-9fbe-8f21-092c-2575e2f41e88}">
+        <p14:section name="The solution" id="{f004a257-5e64-d913-37ba-0d805ac41ec8}">
           <p14:sldIdLst>
             <p14:sldId id="260"/>
             <p14:sldId id="261"/>
           </p14:sldIdLst>
         </p14:section>
-        <p14:section name="Trust" id="{96142a7a-868c-c77a-f6fa-91dbf6c72eee}">
+        <p14:section name="Trust" id="{0fa2022f-10a3-b8d1-11ac-ba28fecc79c8}">
           <p14:sldIdLst>
             <p14:sldId id="262"/>
             <p14:sldId id="263"/>
@@ -145,7 +145,7 @@
             <p14:sldId id="266"/>
           </p14:sldIdLst>
         </p14:section>
-        <p14:section name="Close" id="{4d501253-3d1a-8409-96a5-a156a5f116bd}">
+        <p14:section name="Close" id="{3ccf4cc8-c141-0bb0-d40d-cbdb178a7242}">
           <p14:sldIdLst>
             <p14:sldId id="267"/>
           </p14:sldIdLst>
@@ -851,7 +851,7 @@
           <a:p>
             <a:r>
               <a:rPr lang="en-US" dirty="0"/>
-              <a:t>Good morning. We are team TeamEkxin, and this is StudyRoute, our entry for Topic C, the cross-border and student finance assistant. StudyRoute is a sandbox AI agent that helps a parent in Bangladesh pay a student's tuition abroad. Everything you will see is synthetic and no real money moves. Our design rule is on the slide, and the rest of the talk shows how we make each of those four sentences true and testable: the engine calculates, the AI explains, the human approves, and every step is logged.</a:t>
+              <a:t>Good morning. We are team [Team name], and this is StudyRoute, our entry for Topic C, the cross-border and student finance assistant. StudyRoute is a sandbox AI agent that helps a parent in Bangladesh pay a student's tuition abroad. Everything you will see is synthetic and no real money moves. Our design rule is on the slide, and the rest of the talk shows how we make each of those four sentences true and testable: the engine calculates, the AI explains, the human approves, and every step is logged.</a:t>
             </a:r>
             <a:endParaRPr lang="en-US" dirty="0"/>
           </a:p>
@@ -939,7 +939,7 @@
           <a:p>
             <a:r>
               <a:rPr lang="en-US" dirty="0"/>
-              <a:t>Security and compliance is thirty percent of the score, so we made it checkable. On the left are the permission tiers, enforced in the domain layer, not just in the screens. Public, read, prepare, decide, and administer. Deciding, meaning approving a payment, is only for a human parent with a fresh MFA proof bound to that payment and to the hash of the summary they saw. The AI has no approve, cancel, limit or config permission at all. On the right, the numbers: 1534 backend and 439 frontend tests, all 24 blueprint scenarios mapped to tests, and 50 known risks that we list openly in the self-assessment. The audit log is hash-chained: Verify passes, we edit one row behind the application's back, and Verify fails at exactly that event.</a:t>
+              <a:t>Security and compliance is thirty percent of the score, so we made it checkable. On the left are the permission tiers, enforced in the domain layer, not just in the screens. Public, read, prepare, decide, and administer. Deciding, meaning approving a payment, is only for a human parent with a fresh MFA proof bound to that payment and to the hash of the summary they saw. The AI has no approve, cancel, limit or config permission at all. On the right, the numbers: 1652 backend and 462 frontend tests, all 24 blueprint scenarios mapped to tests, and 55 known risks that we list openly in the self-assessment. The audit log is hash-chained: Verify passes, we edit one row behind the application's back, and Verify fails at exactly that event.</a:t>
             </a:r>
             <a:endParaRPr lang="en-US" dirty="0"/>
           </a:p>
@@ -1643,7 +1643,7 @@
           <a:p>
             <a:r>
               <a:rPr lang="en-US" dirty="0"/>
-              <a:t>Before the details, here is what we have shown and what we have not. What we have shown: every number comes from one deterministic engine, with 1534 backend tests covering all 24 scenarios. Only a human with a fresh MFA code can approve, and the AI has no such permission. Change one audit row and Verify fails at that event. And the stack starts from the zipped archive with one command. What we have not shown: the rates, fees and city costs are invented, and we have not yet compared them with real quotes. No real parent has used it. No outsider has reviewed its security. The Bangladesh Bank limits are placeholders, marked Not verified. Both lists are in the repository, because we would rather you hear the limits from us.</a:t>
+              <a:t>Before the details, here is what we have shown and what we have not. What we have shown: every number comes from one deterministic engine, with 1652 backend tests covering all 24 scenarios. Only a human with a fresh MFA code can approve, and the AI has no such permission. Change one audit row and Verify fails at that event. And the stack starts from the zipped archive with one command. What we have not shown: the rates, fees and city costs are invented, and we have not yet compared them with real quotes. No real parent has used it. No outsider has reviewed its security. The Bangladesh Bank limits are placeholders, marked Not verified. Both lists are in the repository, because we would rather you hear the limits from us.</a:t>
             </a:r>
             <a:endParaRPr lang="en-US" dirty="0"/>
           </a:p>
@@ -1819,7 +1819,7 @@
           <a:p>
             <a:r>
               <a:rPr lang="en-US" dirty="0"/>
-              <a:t>The assistant has a trained component, and we measured it. A small language model, fine-tuned on a gaming-class GPU in a few minutes, reads what a parent types: the intent, and the exact words that carry an amount, a currency or a date. It never produces a number; plain code turns those words into values, and when the old rules and the model disagree, the assistant asks. On messages we wrote by hand after the model was frozen, it chose the right intent 88.5% of the time against 61.1% for the old rules, read a plan request exactly 100% against 57.6%, and blocked 92.9% of attacks against 28.6%. The sample is small and the data is synthetic. A second small policy, trained with reinforcement learning, chooses whether to ask, read back or plan: on simulated parents, wrong plans fell from 2.8% to 0.8%. Plain code limits its legal moves, and the parents are our assumption.</a:t>
+              <a:t>The assistant has a trained component, and we measured it. A small language model, fine-tuned on a gaming-class GPU in a few minutes, reads what a parent types: the intent, and the exact words that carry an amount, a currency or a date. It never produces a number; plain code turns those words into values, and when the old rules and the model disagree, the assistant asks. On messages we wrote by hand after the model was frozen, it chose the right intent 88.5% of the time against 61.1% for the old rules, read a plan request exactly 100% against 57.6%, and blocked 92.9% of attacks against 28.6%. The sample is small and the data is synthetic. A second small policy, trained with reinforcement learning, chooses whether to ask, read back or plan: on simulated parents, wrong plans fell from 2.8% to 0.8%. Plain code limits its legal moves, and the parents are our assumption. Two more small models are trained on the same GPU. A language model rewords the engine's answer on the user's own machine: on 700 held-out questions 80.9% of its answers pass every code check and the rest show the engine's own text; 99.8% of the figures it writes are the engine's. It mostly rewords. A risk model, trained on IBM's public synthetic transactions, gives each payment a score from four factors, amount, frequency, timeline and person: a low score shows no warning, a high one shows a warning and sends the payment to a person at the sandbox bank, and every payment needs a person's authorization whatever its score; on a later period it caught 56.5% of the flagged payments with 29.2% precision, and the data cannot support both above ninety. It routes; a person decides.</a:t>
             </a:r>
             <a:endParaRPr lang="en-US" dirty="0"/>
           </a:p>
@@ -2589,7 +2589,7 @@
                   <a:schemeClr val="accent5"/>
                 </a:solidFill>
               </a:rPr>
-              <a:t>TeamEkxin  ·  Sandbox: synthetic data, no real money moves</a:t>
+              <a:t>[Team name]  ·  Sandbox: synthetic data, no real money moves</a:t>
             </a:r>
             <a:endParaRPr lang="en-US" sz="1200" dirty="0"/>
           </a:p>
@@ -3246,7 +3246,7 @@
                 <a:ea typeface="+mj-lt" pitchFamily="34" charset="-122"/>
                 <a:cs typeface="+mj-lt" pitchFamily="34" charset="-120"/>
               </a:rPr>
-              <a:t>1534</a:t>
+              <a:t>1652</a:t>
             </a:r>
             <a:endParaRPr lang="en-US" sz="3200" dirty="0"/>
           </a:p>
@@ -3343,7 +3343,7 @@
                 <a:ea typeface="+mj-lt" pitchFamily="34" charset="-122"/>
                 <a:cs typeface="+mj-lt" pitchFamily="34" charset="-120"/>
               </a:rPr>
-              <a:t>439</a:t>
+              <a:t>462</a:t>
             </a:r>
             <a:endParaRPr lang="en-US" sz="3200" dirty="0"/>
           </a:p>
@@ -3537,7 +3537,7 @@
                 <a:ea typeface="+mj-lt" pitchFamily="34" charset="-122"/>
                 <a:cs typeface="+mj-lt" pitchFamily="34" charset="-120"/>
               </a:rPr>
-              <a:t>50</a:t>
+              <a:t>55</a:t>
             </a:r>
             <a:endParaRPr lang="en-US" sz="3200" dirty="0"/>
           </a:p>
@@ -4416,7 +4416,7 @@
                   <a:schemeClr val="accent5"/>
                 </a:solidFill>
               </a:rPr>
-              <a:t>TeamEkxin  ·  https://github.com/NoobCrow/StudyRoute  ·  Sandbox: no real money moves</a:t>
+              <a:t>[Team name]  ·  [repository link]  ·  Sandbox: no real money moves</a:t>
             </a:r>
             <a:endParaRPr lang="en-US" sz="1200" dirty="0"/>
           </a:p>
@@ -9229,7 +9229,7 @@
                   <a:schemeClr val="tx1"/>
                 </a:solidFill>
               </a:rPr>
-              <a:t>Every number comes from one engine, in integer money. 1534 backend tests cover all 24 scenarios.</a:t>
+              <a:t>Every number comes from one engine, in integer money. 1652 backend tests cover all 24 scenarios.</a:t>
             </a:r>
             <a:endParaRPr lang="en-US" sz="1200" dirty="0"/>
           </a:p>
@@ -10347,7 +10347,7 @@
                 <a:ea typeface="+mj-lt" pitchFamily="34" charset="-122"/>
                 <a:cs typeface="+mj-lt" pitchFamily="34" charset="-120"/>
               </a:rPr>
-              <a:t>A trained agent, measured</a:t>
+              <a:t>Trained agents, measured</a:t>
             </a:r>
             <a:endParaRPr lang="en-US" sz="3600" dirty="0"/>
           </a:p>
@@ -11567,7 +11567,7 @@
                   <a:schemeClr val="accent1"/>
                 </a:solidFill>
               </a:rPr>
-              <a:t>Honest limits</a:t>
+              <a:t>Also trained, and the limits</a:t>
             </a:r>
             <a:endParaRPr lang="en-US" sz="1400" dirty="0"/>
           </a:p>
@@ -11603,7 +11603,7 @@
                   <a:schemeClr val="tx1"/>
                 </a:solidFill>
               </a:rPr>
-              <a:t>Synthetic data, English, no real users yet. The simulated parents and rewards are our assumptions. About 1 attack in 14 still slips past; permissions and MFA remain the real defence.</a:t>
+              <a:t>A language model rewords answers (99.8% of its figures are the engine's; a failed check shows the engine's text). A risk model scores every payment (amount, frequency, timeline, person) and warns on a high one: precision 29.2%, recall 56.5%. Every payment needs a person's authorization anyway. Synthetic data, no real users.</a:t>
             </a:r>
             <a:endParaRPr lang="en-US" sz="1100" dirty="0"/>
           </a:p>

--- a/submission/StudyRoute_Deck.pptx
+++ b/submission/StudyRoute_Deck.pptx
@@ -118,25 +118,25 @@
   <p:extLst>
     <p:ext uri="{521415D9-36F7-43E2-AB2F-B90AF26B5E84}">
       <p14:sectionLst xmlns:p14="http://schemas.microsoft.com/office/powerpoint/2010/main">
-        <p14:section name="Opening" id="{8974faef-f38d-1118-cd70-6730b27bc152}">
+        <p14:section name="Opening" id="{acbe1e68-e342-1e8c-7df1-ccd258501cf1}">
           <p14:sldIdLst>
             <p14:sldId id="256"/>
             <p14:sldId id="257"/>
           </p14:sldIdLst>
         </p14:section>
-        <p14:section name="The problem" id="{e78b3180-e749-b805-8d52-c39897146366}">
+        <p14:section name="The problem" id="{b8a6905f-8da1-0600-1cda-e0a52aabc88f}">
           <p14:sldIdLst>
             <p14:sldId id="258"/>
             <p14:sldId id="259"/>
           </p14:sldIdLst>
         </p14:section>
-        <p14:section name="The solution" id="{13eaa297-9187-69aa-48ea-f00fce52adc8}">
+        <p14:section name="The solution" id="{8b749583-1ecb-c199-d17f-e5fbc34d0503}">
           <p14:sldIdLst>
             <p14:sldId id="260"/>
             <p14:sldId id="261"/>
           </p14:sldIdLst>
         </p14:section>
-        <p14:section name="Trust" id="{d73f7d3b-49f4-dcd2-981e-8d139a9e8eed}">
+        <p14:section name="Trust" id="{c5273d3f-ba8a-c82c-6641-5051c959b8d4}">
           <p14:sldIdLst>
             <p14:sldId id="262"/>
             <p14:sldId id="263"/>
@@ -145,7 +145,7 @@
             <p14:sldId id="266"/>
           </p14:sldIdLst>
         </p14:section>
-        <p14:section name="Close" id="{3d452f66-6a8b-a3a9-4b66-78370108684d}">
+        <p14:section name="Close" id="{f7595872-fd63-80e3-af81-5bde7636cb20}">
           <p14:sldIdLst>
             <p14:sldId id="267"/>
           </p14:sldIdLst>
@@ -851,7 +851,7 @@
           <a:p>
             <a:r>
               <a:rPr lang="en-US" dirty="0"/>
-              <a:t>Good morning. We are team [Team name], and this is StudyRoute, our entry for Topic C, the cross-border and student finance assistant. StudyRoute is a sandbox AI agent that helps a parent in Bangladesh pay a student's tuition abroad. Everything you will see is synthetic and no real money moves. Our design rule is on the slide, and the rest of the talk shows how we make each of those four sentences true and testable: the engine calculates, the AI explains, the human approves, and every step is logged.</a:t>
+              <a:t>Good morning. We are team TeamEkxin, and this is StudyRoute, our entry for Topic C, the cross-border and student finance assistant. StudyRoute is a sandbox AI agent that helps a parent in Bangladesh pay a student's tuition abroad. Everything you will see is synthetic and no real money moves. Our design rule is on the slide, and the rest of the talk shows how we make each of those four sentences true and testable: the engine calculates, the AI explains, the human approves, and every step is logged.</a:t>
             </a:r>
             <a:endParaRPr lang="en-US" dirty="0"/>
           </a:p>
@@ -2589,7 +2589,7 @@
                   <a:schemeClr val="accent5"/>
                 </a:solidFill>
               </a:rPr>
-              <a:t>[Team name]  ·  Sandbox: synthetic data, no real money moves</a:t>
+              <a:t>TeamEkxin  ·  Sandbox: synthetic data, no real money moves</a:t>
             </a:r>
             <a:endParaRPr lang="en-US" sz="1200" dirty="0"/>
           </a:p>
@@ -4416,7 +4416,7 @@
                   <a:schemeClr val="accent5"/>
                 </a:solidFill>
               </a:rPr>
-              <a:t>[Team name]  ·  [repository link]  ·  Sandbox: no real money moves</a:t>
+              <a:t>TeamEkxin  ·  https://github.com/NoobCrow/StudyRoute  ·  Sandbox: no real money moves</a:t>
             </a:r>
             <a:endParaRPr lang="en-US" sz="1200" dirty="0"/>
           </a:p>

--- a/submission/StudyRoute_Deck.pptx
+++ b/submission/StudyRoute_Deck.pptx
@@ -118,25 +118,25 @@
   <p:extLst>
     <p:ext uri="{521415D9-36F7-43E2-AB2F-B90AF26B5E84}">
       <p14:sectionLst xmlns:p14="http://schemas.microsoft.com/office/powerpoint/2010/main">
-        <p14:section name="Opening" id="{acbe1e68-e342-1e8c-7df1-ccd258501cf1}">
+        <p14:section name="Opening" id="{2af9f749-b477-203a-5500-b2c40577a772}">
           <p14:sldIdLst>
             <p14:sldId id="256"/>
             <p14:sldId id="257"/>
           </p14:sldIdLst>
         </p14:section>
-        <p14:section name="The problem" id="{b8a6905f-8da1-0600-1cda-e0a52aabc88f}">
+        <p14:section name="The problem" id="{2b70e03a-70f9-5d5e-9f6a-7b68c3517d6e}">
           <p14:sldIdLst>
             <p14:sldId id="258"/>
             <p14:sldId id="259"/>
           </p14:sldIdLst>
         </p14:section>
-        <p14:section name="The solution" id="{8b749583-1ecb-c199-d17f-e5fbc34d0503}">
+        <p14:section name="The solution" id="{c06ecc50-86bd-3509-ec2f-d2fee9173dad}">
           <p14:sldIdLst>
             <p14:sldId id="260"/>
             <p14:sldId id="261"/>
           </p14:sldIdLst>
         </p14:section>
-        <p14:section name="Trust" id="{c5273d3f-ba8a-c82c-6641-5051c959b8d4}">
+        <p14:section name="Trust" id="{6db940e4-a080-365f-d07c-928dff0b0a76}">
           <p14:sldIdLst>
             <p14:sldId id="262"/>
             <p14:sldId id="263"/>
@@ -145,7 +145,7 @@
             <p14:sldId id="266"/>
           </p14:sldIdLst>
         </p14:section>
-        <p14:section name="Close" id="{f7595872-fd63-80e3-af81-5bde7636cb20}">
+        <p14:section name="Close" id="{b115ae44-b577-669f-607b-6126ef7a6b1e}">
           <p14:sldIdLst>
             <p14:sldId id="267"/>
           </p14:sldIdLst>
@@ -851,7 +851,7 @@
           <a:p>
             <a:r>
               <a:rPr lang="en-US" dirty="0"/>
-              <a:t>Good morning. We are team TeamEkxin, and this is StudyRoute, our entry for Topic C, the cross-border and student finance assistant. StudyRoute is a sandbox AI agent that helps a parent in Bangladesh pay a student's tuition abroad. Everything you will see is synthetic and no real money moves. Our design rule is on the slide, and the rest of the talk shows how we make each of those four sentences true and testable: the engine calculates, the AI explains, the human approves, and every step is logged.</a:t>
+              <a:t>Good morning. We are team [Team name], and this is StudyRoute, our entry for Topic C, the cross-border and student finance assistant. StudyRoute is a sandbox AI agent that helps a parent in Bangladesh pay a student's tuition abroad. Everything you will see is synthetic and no real money moves. Our design rule is on the slide, and the rest of the talk shows how we make each of those four sentences true and testable: the engine calculates, the AI explains, the human approves, and every step is logged.</a:t>
             </a:r>
             <a:endParaRPr lang="en-US" dirty="0"/>
           </a:p>
@@ -939,7 +939,7 @@
           <a:p>
             <a:r>
               <a:rPr lang="en-US" dirty="0"/>
-              <a:t>Security and compliance is thirty percent of the score, so we made it checkable. On the left are the permission tiers, enforced in the domain layer, not just in the screens. Public, read, prepare, decide, and administer. Deciding, meaning approving a payment, is only for a human parent with a fresh MFA proof bound to that payment and to the hash of the summary they saw. The AI has no approve, cancel, limit or config permission at all. On the right, the numbers: 1676 backend and 463 frontend tests, all 24 blueprint scenarios mapped to tests, and 55 known risks that we list openly in the self-assessment. The audit log is hash-chained: Verify passes, we edit one row behind the application's back, and Verify fails at exactly that event.</a:t>
+              <a:t>Security and compliance is thirty percent of the score, so we made it checkable. On the left are the permission tiers, enforced in the domain layer, not just in the screens. Public, read, prepare, decide, and administer. Deciding, meaning approving a payment, is only for a human parent with a fresh MFA proof bound to that payment and to the hash of the summary they saw. The AI has no approve, cancel, limit or config permission at all. On the right, the numbers: 1677 backend and 463 frontend tests, all 24 blueprint scenarios mapped to tests, and 55 known risks that we list openly in the self-assessment. The audit log is hash-chained: Verify passes, we edit one row behind the application's back, and Verify fails at exactly that event.</a:t>
             </a:r>
             <a:endParaRPr lang="en-US" dirty="0"/>
           </a:p>
@@ -1643,7 +1643,7 @@
           <a:p>
             <a:r>
               <a:rPr lang="en-US" dirty="0"/>
-              <a:t>Before the details, here is what we have shown and what we have not. What we have shown: every number comes from one deterministic engine, with 1676 backend tests covering all 24 scenarios. Only a human with a fresh MFA code can approve, and the AI has no such permission. Change one audit row and Verify fails at that event. And the stack starts from the zipped archive with one command. What we have not shown: the rates, fees and city costs are invented, and we have not yet compared them with real quotes. No real parent has used it. A local review found trust-boundary limits; no external penetration test was run. The Bangladesh Bank limits are placeholders, marked Not verified. Both lists are in the repository, because we would rather you hear the limits from us.</a:t>
+              <a:t>Before the details, here is what we have shown and what we have not. What we have shown: every number comes from one deterministic engine, with 1677 backend tests covering all 24 scenarios. Only a human with a fresh MFA code can approve, and the AI has no such permission. Change one audit row and Verify fails at that event. And the stack starts from the zipped archive with one command. What we have not shown: the rates, fees and city costs are invented, and we have not yet compared them with real quotes. No real parent has used it. A local review found trust-boundary limits; no external penetration test was run. The Bangladesh Bank limits are placeholders, marked Not verified. Both lists are in the repository, because we would rather you hear the limits from us.</a:t>
             </a:r>
             <a:endParaRPr lang="en-US" dirty="0"/>
           </a:p>
@@ -2589,7 +2589,7 @@
                   <a:schemeClr val="accent5"/>
                 </a:solidFill>
               </a:rPr>
-              <a:t>TeamEkxin  ·  Sandbox: synthetic data, no real money moves</a:t>
+              <a:t>[Team name]  ·  Sandbox: synthetic data, no real money moves</a:t>
             </a:r>
             <a:endParaRPr lang="en-US" sz="1200" dirty="0"/>
           </a:p>
@@ -3246,7 +3246,7 @@
                 <a:ea typeface="+mj-lt" pitchFamily="34" charset="-122"/>
                 <a:cs typeface="+mj-lt" pitchFamily="34" charset="-120"/>
               </a:rPr>
-              <a:t>1676</a:t>
+              <a:t>1677</a:t>
             </a:r>
             <a:endParaRPr lang="en-US" sz="3200" dirty="0"/>
           </a:p>
@@ -4416,7 +4416,7 @@
                   <a:schemeClr val="accent5"/>
                 </a:solidFill>
               </a:rPr>
-              <a:t>TeamEkxin  ·  https://github.com/NoobCrow/StudyRoute  ·  Sandbox: no real money moves</a:t>
+              <a:t>[Team name]  ·  [repository link]  ·  Sandbox: no real money moves</a:t>
             </a:r>
             <a:endParaRPr lang="en-US" sz="1200" dirty="0"/>
           </a:p>
@@ -9229,7 +9229,7 @@
                   <a:schemeClr val="tx1"/>
                 </a:solidFill>
               </a:rPr>
-              <a:t>Every number comes from one engine, in integer money. 1676 backend tests cover all 24 scenarios.</a:t>
+              <a:t>Every number comes from one engine, in integer money. 1677 backend tests cover all 24 scenarios.</a:t>
             </a:r>
             <a:endParaRPr lang="en-US" sz="1200" dirty="0"/>
           </a:p>

--- a/submission/StudyRoute_Deck.pptx
+++ b/submission/StudyRoute_Deck.pptx
@@ -118,25 +118,25 @@
   <p:extLst>
     <p:ext uri="{521415D9-36F7-43E2-AB2F-B90AF26B5E84}">
       <p14:sectionLst xmlns:p14="http://schemas.microsoft.com/office/powerpoint/2010/main">
-        <p14:section name="Opening" id="{2af9f749-b477-203a-5500-b2c40577a772}">
+        <p14:section name="Opening" id="{6732bee5-cee3-b8f2-867c-9c4ff1af20e6}">
           <p14:sldIdLst>
             <p14:sldId id="256"/>
             <p14:sldId id="257"/>
           </p14:sldIdLst>
         </p14:section>
-        <p14:section name="The problem" id="{2b70e03a-70f9-5d5e-9f6a-7b68c3517d6e}">
+        <p14:section name="The problem" id="{50d6813c-c481-546b-5000-d3180ef06ff2}">
           <p14:sldIdLst>
             <p14:sldId id="258"/>
             <p14:sldId id="259"/>
           </p14:sldIdLst>
         </p14:section>
-        <p14:section name="The solution" id="{c06ecc50-86bd-3509-ec2f-d2fee9173dad}">
+        <p14:section name="The solution" id="{bc8f4b99-037e-9ac6-a6bb-efdffd373c79}">
           <p14:sldIdLst>
             <p14:sldId id="260"/>
             <p14:sldId id="261"/>
           </p14:sldIdLst>
         </p14:section>
-        <p14:section name="Trust" id="{6db940e4-a080-365f-d07c-928dff0b0a76}">
+        <p14:section name="Trust" id="{cb3f4872-503d-a353-e00b-2bc69b51d354}">
           <p14:sldIdLst>
             <p14:sldId id="262"/>
             <p14:sldId id="263"/>
@@ -145,7 +145,7 @@
             <p14:sldId id="266"/>
           </p14:sldIdLst>
         </p14:section>
-        <p14:section name="Close" id="{b115ae44-b577-669f-607b-6126ef7a6b1e}">
+        <p14:section name="Close" id="{7819aaed-7ec4-a109-b9c2-0e2ca5fd08d7}">
           <p14:sldIdLst>
             <p14:sldId id="267"/>
           </p14:sldIdLst>
@@ -939,7 +939,7 @@
           <a:p>
             <a:r>
               <a:rPr lang="en-US" dirty="0"/>
-              <a:t>Security and compliance is thirty percent of the score, so we made it checkable. On the left are the permission tiers, enforced in the domain layer, not just in the screens. Public, read, prepare, decide, and administer. Deciding, meaning approving a payment, is only for a human parent with a fresh MFA proof bound to that payment and to the hash of the summary they saw. The AI has no approve, cancel, limit or config permission at all. On the right, the numbers: 1677 backend and 463 frontend tests, all 24 blueprint scenarios mapped to tests, and 55 known risks that we list openly in the self-assessment. The audit log is hash-chained: Verify passes, we edit one row behind the application's back, and Verify fails at exactly that event.</a:t>
+              <a:t>Security and compliance is thirty percent of the score, so we made it checkable. On the left are the permission tiers, enforced in the domain layer, not just in the screens. Public, read, prepare, decide, and administer. Deciding, meaning approving a payment, is only for a human parent with a fresh MFA proof bound to that payment and to the hash of the summary they saw. The AI has no approve, cancel, limit or config permission at all. On the right, the numbers: 1678 backend and 463 frontend tests, all 24 blueprint scenarios mapped to tests, and 55 known risks that we list openly in the self-assessment. The audit log is hash-chained: Verify passes, we edit one row behind the application's back, and Verify fails at exactly that event.</a:t>
             </a:r>
             <a:endParaRPr lang="en-US" dirty="0"/>
           </a:p>
@@ -1643,7 +1643,7 @@
           <a:p>
             <a:r>
               <a:rPr lang="en-US" dirty="0"/>
-              <a:t>Before the details, here is what we have shown and what we have not. What we have shown: every number comes from one deterministic engine, with 1677 backend tests covering all 24 scenarios. Only a human with a fresh MFA code can approve, and the AI has no such permission. Change one audit row and Verify fails at that event. And the stack starts from the zipped archive with one command. What we have not shown: the rates, fees and city costs are invented, and we have not yet compared them with real quotes. No real parent has used it. A local review found trust-boundary limits; no external penetration test was run. The Bangladesh Bank limits are placeholders, marked Not verified. Both lists are in the repository, because we would rather you hear the limits from us.</a:t>
+              <a:t>Before the details, here is what we have shown and what we have not. What we have shown: every number comes from one deterministic engine, with 1678 backend tests covering all 24 scenarios. Only a human with a fresh MFA code can approve, and the AI has no such permission. Change one audit row and Verify fails at that event. And the stack starts from the zipped archive with one command. What we have not shown: the rates, fees and city costs are invented, and we have not yet compared them with real quotes. No real parent has used it. A local review found trust-boundary limits; no external penetration test was run. The Bangladesh Bank limits are placeholders, marked Not verified. Both lists are in the repository, because we would rather you hear the limits from us.</a:t>
             </a:r>
             <a:endParaRPr lang="en-US" dirty="0"/>
           </a:p>
@@ -3246,7 +3246,7 @@
                 <a:ea typeface="+mj-lt" pitchFamily="34" charset="-122"/>
                 <a:cs typeface="+mj-lt" pitchFamily="34" charset="-120"/>
               </a:rPr>
-              <a:t>1677</a:t>
+              <a:t>1678</a:t>
             </a:r>
             <a:endParaRPr lang="en-US" sz="3200" dirty="0"/>
           </a:p>
@@ -9229,7 +9229,7 @@
                   <a:schemeClr val="tx1"/>
                 </a:solidFill>
               </a:rPr>
-              <a:t>Every number comes from one engine, in integer money. 1677 backend tests cover all 24 scenarios.</a:t>
+              <a:t>Every number comes from one engine, in integer money. 1678 backend tests cover all 24 scenarios.</a:t>
             </a:r>
             <a:endParaRPr lang="en-US" sz="1200" dirty="0"/>
           </a:p>

--- a/submission/StudyRoute_Deck.pptx
+++ b/submission/StudyRoute_Deck.pptx
@@ -118,25 +118,25 @@
   <p:extLst>
     <p:ext uri="{521415D9-36F7-43E2-AB2F-B90AF26B5E84}">
       <p14:sectionLst xmlns:p14="http://schemas.microsoft.com/office/powerpoint/2010/main">
-        <p14:section name="Opening" id="{6732bee5-cee3-b8f2-867c-9c4ff1af20e6}">
+        <p14:section name="Opening" id="{804e59c2-1446-1d45-66a2-7dc4ef9e2925}">
           <p14:sldIdLst>
             <p14:sldId id="256"/>
             <p14:sldId id="257"/>
           </p14:sldIdLst>
         </p14:section>
-        <p14:section name="The problem" id="{50d6813c-c481-546b-5000-d3180ef06ff2}">
+        <p14:section name="The problem" id="{b38da6c5-0e69-1de4-24b9-1f1b09672032}">
           <p14:sldIdLst>
             <p14:sldId id="258"/>
             <p14:sldId id="259"/>
           </p14:sldIdLst>
         </p14:section>
-        <p14:section name="The solution" id="{bc8f4b99-037e-9ac6-a6bb-efdffd373c79}">
+        <p14:section name="The solution" id="{2b16bc72-9a6d-a822-079e-35cb5d524a8b}">
           <p14:sldIdLst>
             <p14:sldId id="260"/>
             <p14:sldId id="261"/>
           </p14:sldIdLst>
         </p14:section>
-        <p14:section name="Trust" id="{cb3f4872-503d-a353-e00b-2bc69b51d354}">
+        <p14:section name="Trust" id="{70dc36d3-6473-6065-a844-8603613edd4d}">
           <p14:sldIdLst>
             <p14:sldId id="262"/>
             <p14:sldId id="263"/>
@@ -145,7 +145,7 @@
             <p14:sldId id="266"/>
           </p14:sldIdLst>
         </p14:section>
-        <p14:section name="Close" id="{7819aaed-7ec4-a109-b9c2-0e2ca5fd08d7}">
+        <p14:section name="Close" id="{7bd81ea4-c7ba-ff59-a383-f2f72e5e706c}">
           <p14:sldIdLst>
             <p14:sldId id="267"/>
           </p14:sldIdLst>
@@ -851,7 +851,7 @@
           <a:p>
             <a:r>
               <a:rPr lang="en-US" dirty="0"/>
-              <a:t>Good morning. We are team [Team name], and this is StudyRoute, our entry for Topic C, the cross-border and student finance assistant. StudyRoute is a sandbox AI agent that helps a parent in Bangladesh pay a student's tuition abroad. Everything you will see is synthetic and no real money moves. Our design rule is on the slide, and the rest of the talk shows how we make each of those four sentences true and testable: the engine calculates, the AI explains, the human approves, and every step is logged.</a:t>
+              <a:t>Good morning. We are team TeamEkxin, and this is StudyRoute, our entry for Topic C, the cross-border and student finance assistant. StudyRoute is a sandbox AI agent that helps a parent in Bangladesh pay a student's tuition abroad. Everything you will see is synthetic and no real money moves. Our design rule is on the slide, and the rest of the talk shows how we make each of those four sentences true and testable: the engine calculates, the AI explains, the human approves, and every step is logged.</a:t>
             </a:r>
             <a:endParaRPr lang="en-US" dirty="0"/>
           </a:p>
@@ -2589,7 +2589,7 @@
                   <a:schemeClr val="accent5"/>
                 </a:solidFill>
               </a:rPr>
-              <a:t>[Team name]  ·  Sandbox: synthetic data, no real money moves</a:t>
+              <a:t>TeamEkxin  ·  Sandbox: synthetic data, no real money moves</a:t>
             </a:r>
             <a:endParaRPr lang="en-US" sz="1200" dirty="0"/>
           </a:p>
@@ -4416,7 +4416,7 @@
                   <a:schemeClr val="accent5"/>
                 </a:solidFill>
               </a:rPr>
-              <a:t>[Team name]  ·  [repository link]  ·  Sandbox: no real money moves</a:t>
+              <a:t>TeamEkxin  ·  https://github.com/NoobCrow/StudyRoute  ·  Sandbox: no real money moves</a:t>
             </a:r>
             <a:endParaRPr lang="en-US" sz="1200" dirty="0"/>
           </a:p>

--- a/submission/StudyRoute_Deck.pptx
+++ b/submission/StudyRoute_Deck.pptx
@@ -118,25 +118,25 @@
   <p:extLst>
     <p:ext uri="{521415D9-36F7-43E2-AB2F-B90AF26B5E84}">
       <p14:sectionLst xmlns:p14="http://schemas.microsoft.com/office/powerpoint/2010/main">
-        <p14:section name="Opening" id="{804e59c2-1446-1d45-66a2-7dc4ef9e2925}">
+        <p14:section name="Opening" id="{414fa2ab-2833-0a7a-8192-33738cc28b56}">
           <p14:sldIdLst>
             <p14:sldId id="256"/>
             <p14:sldId id="257"/>
           </p14:sldIdLst>
         </p14:section>
-        <p14:section name="The problem" id="{b38da6c5-0e69-1de4-24b9-1f1b09672032}">
+        <p14:section name="The problem" id="{6d50f98d-5687-44bc-51f6-5ee275047521}">
           <p14:sldIdLst>
             <p14:sldId id="258"/>
             <p14:sldId id="259"/>
           </p14:sldIdLst>
         </p14:section>
-        <p14:section name="The solution" id="{2b16bc72-9a6d-a822-079e-35cb5d524a8b}">
+        <p14:section name="The solution" id="{18b02456-c9d0-0521-c084-ab01a5b431e9}">
           <p14:sldIdLst>
             <p14:sldId id="260"/>
             <p14:sldId id="261"/>
           </p14:sldIdLst>
         </p14:section>
-        <p14:section name="Trust" id="{70dc36d3-6473-6065-a844-8603613edd4d}">
+        <p14:section name="Trust" id="{40373f78-e0ca-b5d5-3097-f09fc82c66cc}">
           <p14:sldIdLst>
             <p14:sldId id="262"/>
             <p14:sldId id="263"/>
@@ -145,7 +145,7 @@
             <p14:sldId id="266"/>
           </p14:sldIdLst>
         </p14:section>
-        <p14:section name="Close" id="{7bd81ea4-c7ba-ff59-a383-f2f72e5e706c}">
+        <p14:section name="Close" id="{b11ffb14-2419-bc2f-6b11-3b92356f51d2}">
           <p14:sldIdLst>
             <p14:sldId id="267"/>
           </p14:sldIdLst>
@@ -4341,7 +4341,7 @@
                   <a:schemeClr val="bg2"/>
                 </a:solidFill>
               </a:rPr>
-              <a:t>Escrow already runs in the sandbox. Next: a permissioned chain and a bank-issued token.</a:t>
+              <a:t>Today the escrow runs on a simulated chain inside the app, with no network. Next: a permissioned chain and a bank-issued token.</a:t>
             </a:r>
             <a:endParaRPr lang="en-US" sz="1400" dirty="0"/>
           </a:p>

--- a/submission/StudyRoute_Deck.pptx
+++ b/submission/StudyRoute_Deck.pptx
@@ -17,9 +17,10 @@
     <p:sldId id="265" r:id="rId11"/>
     <p:sldId id="266" r:id="rId12"/>
     <p:sldId id="267" r:id="rId13"/>
+    <p:sldId id="268" r:id="rId14"/>
   </p:sldIdLst>
   <p:notesMasterIdLst>
-    <p:notesMasterId r:id="rId14"/>
+    <p:notesMasterId r:id="rId15"/>
   </p:notesMasterIdLst>
   <p:sldSz cx="9144000" cy="5143500"/>
   <p:notesSz cx="5143500" cy="9144000"/>
@@ -118,25 +119,25 @@
   <p:extLst>
     <p:ext uri="{521415D9-36F7-43E2-AB2F-B90AF26B5E84}">
       <p14:sectionLst xmlns:p14="http://schemas.microsoft.com/office/powerpoint/2010/main">
-        <p14:section name="Opening" id="{414fa2ab-2833-0a7a-8192-33738cc28b56}">
+        <p14:section name="Opening" id="{07ced431-34e2-9db2-5c88-d8be44a3ce15}">
           <p14:sldIdLst>
             <p14:sldId id="256"/>
             <p14:sldId id="257"/>
           </p14:sldIdLst>
         </p14:section>
-        <p14:section name="The problem" id="{6d50f98d-5687-44bc-51f6-5ee275047521}">
+        <p14:section name="The problem" id="{96471444-b73f-d33d-e81d-1af2fc67e8b4}">
           <p14:sldIdLst>
             <p14:sldId id="258"/>
             <p14:sldId id="259"/>
           </p14:sldIdLst>
         </p14:section>
-        <p14:section name="The solution" id="{18b02456-c9d0-0521-c084-ab01a5b431e9}">
+        <p14:section name="The solution" id="{31cb1cf1-3d81-2803-591d-66f27aaf3ec9}">
           <p14:sldIdLst>
             <p14:sldId id="260"/>
             <p14:sldId id="261"/>
           </p14:sldIdLst>
         </p14:section>
-        <p14:section name="Trust" id="{40373f78-e0ca-b5d5-3097-f09fc82c66cc}">
+        <p14:section name="Trust" id="{85cfab69-d019-4786-b39a-23f4fb62ac01}">
           <p14:sldIdLst>
             <p14:sldId id="262"/>
             <p14:sldId id="263"/>
@@ -145,9 +146,10 @@
             <p14:sldId id="266"/>
           </p14:sldIdLst>
         </p14:section>
-        <p14:section name="Close" id="{b11ffb14-2419-bc2f-6b11-3b92356f51d2}">
+        <p14:section name="Close" id="{bee05f08-bf40-8cf5-4f74-d1f3bb12699f}">
           <p14:sldIdLst>
             <p14:sldId id="267"/>
+            <p14:sldId id="268"/>
           </p14:sldIdLst>
         </p14:section>
       </p14:sectionLst>
@@ -851,7 +853,7 @@
           <a:p>
             <a:r>
               <a:rPr lang="en-US" dirty="0"/>
-              <a:t>Good morning. We are team TeamEkxin, and this is StudyRoute, our entry for Topic C, the cross-border and student finance assistant. StudyRoute is a sandbox AI agent that helps a parent in Bangladesh pay a student's tuition abroad. Everything you will see is synthetic and no real money moves. Our design rule is on the slide, and the rest of the talk shows how we make each of those four sentences true and testable: the engine calculates, the AI explains, the human approves, and every step is logged.</a:t>
+              <a:t>Good morning. We are team TeamEkxin, and this is StudyRoute, our entry for Topic C, the cross-border and student finance assistant. It is a sandbox AI agent that helps a parent in Bangladesh pay a student's tuition abroad. Everything you will see is synthetic and no real money moves. Our rule is on the slide: the engine calculates, the AI explains, the human approves, and every step is logged.</a:t>
             </a:r>
             <a:endParaRPr lang="en-US" dirty="0"/>
           </a:p>
@@ -939,7 +941,7 @@
           <a:p>
             <a:r>
               <a:rPr lang="en-US" dirty="0"/>
-              <a:t>Security and compliance is thirty percent of the score, so we made it checkable. On the left are the permission tiers, enforced in the domain layer, not just in the screens. Public, read, prepare, decide, and administer. Deciding, meaning approving a payment, is only for a human parent with a fresh MFA proof bound to that payment and to the hash of the summary they saw. The AI has no approve, cancel, limit or config permission at all. On the right, the numbers: 1678 backend and 463 frontend tests, all 24 blueprint scenarios mapped to tests, and 55 known risks that we list openly in the self-assessment. The audit log is hash-chained: Verify passes, we edit one row behind the application's back, and Verify fails at exactly that event.</a:t>
+              <a:t>Security and compliance is thirty percent of the score, so we made it checkable. On the left are the permission tiers, enforced in the domain layer, not just the screens. Approving a payment is only for a human parent with a fresh MFA proof bound to that payment and to the hash of the summary they saw. The AI has no approve, cancel, limit or config permission at all. On the right: 1678 backend and 463 frontend tests, all 24 scenarios mapped to tests, and 55 known risks listed openly. We edit one audit row behind the application's back, and Verify fails at exactly that event.</a:t>
             </a:r>
             <a:endParaRPr lang="en-US" dirty="0"/>
           </a:p>
@@ -1027,7 +1029,7 @@
           <a:p>
             <a:r>
               <a:rPr lang="en-US" dirty="0"/>
-              <a:t>Honesty is a feature. A banner on every screen and an X-Sandbox header on every API response say this is a sandbox. The Sandbox screen on the left lists everything that is simulated and how to trigger the edge cases, such as a recipient named FAIL_TEST. Any rule that has not been checked against an official source carries a yellow Not verified badge and the sentence: indicative, confirm with your AD bank. On the right is a payment's compliance report: the parties, ten controls with their evidence, the approval proof and the audit trail, sealed with a hash that the browser recomputes. Change a copy and it says does not match.</a:t>
+              <a:t>Honesty is a feature. A banner on every screen and an X-Sandbox header on every response say this is a sandbox. The Sandbox screen lists everything simulated and how to trigger edge cases. Any rule not checked against an official source carries a yellow Not verified badge and the line: indicative, confirm with your AD bank. On the right is a payment's compliance report, sealed with a hash that the browser recomputes. Change a copy and it says does not match.</a:t>
             </a:r>
             <a:endParaRPr lang="en-US" dirty="0"/>
           </a:p>
@@ -1115,7 +1117,7 @@
           <a:p>
             <a:r>
               <a:rPr lang="en-US" dirty="0"/>
-              <a:t>Next steps. First, replace every placeholder rule with an official Bangladesh Bank source and add the moon-dependent holidays. Second, a partnership with an authorised dealer bank for real quotes and real KYC, and regulator-ready reports from the audit log. Third, beyond tuition, the sandbox already has a smart escrow for living costs and a bank-network simulation; the escrow contracts would move from our simulated chain to a permissioned one with a deposit token issued by a bank. Topic C also mentions credit building. We have not built it, and we would rather say so than pretend. We do show a household's money in every currency, but those are simulated accounts, not real ones. To close: StudyRoute is clear, cheap and safe, because the engine calculates, the AI explains, the human approves, and every step is logged. Thank you.</a:t>
+              <a:t>Why would this matter outside a competition? Bangladesh Bank data show 881.7 million dollars sent through banks for overseas education in the last fiscal year, a record, up 32 percent. The World Bank puts the average cost of sending small remittances near 6.4 percent, twice the 3 percent goal; tuition is priced differently, so that is context. If a comparison took one percentage point off that volume, families would keep about 8.8 million dollars a year: our arithmetic, not a forecast. A partner bank could pay a small service fee for pre-checked, risk-routed files. We have no partner, no pilot and no real users yet, so these are numbers to test.</a:t>
             </a:r>
             <a:endParaRPr lang="en-US" dirty="0"/>
           </a:p>
@@ -1139,6 +1141,94 @@
             <a:fld id="{F7021451-1387-4CA6-816F-3879F97B5CBC}" type="slidenum">
               <a:rPr lang="en-US"/>
               <a:t>12</a:t>
+            </a:fld>
+            <a:endParaRPr lang="en-US"/>
+          </a:p>
+        </p:txBody>
+      </p:sp>
+    </p:spTree>
+    <p:extLst>
+      <p:ext uri="{BB962C8B-B14F-4D97-AF65-F5344CB8AC3E}">
+        <p14:creationId xmlns:p14="http://schemas.microsoft.com/office/powerpoint/2010/main" val="1024086991"/>
+      </p:ext>
+    </p:extLst>
+  </p:cSld>
+  <p:clrMapOvr>
+    <a:masterClrMapping/>
+  </p:clrMapOvr>
+</p:notes>
+</file>
+
+<file path=ppt/notesSlides/notesSlide13.xml><?xml version="1.0" encoding="utf-8"?>
+<p:notes xmlns:a="http://schemas.openxmlformats.org/drawingml/2006/main" xmlns:r="http://schemas.openxmlformats.org/officeDocument/2006/relationships" xmlns:p="http://schemas.openxmlformats.org/presentationml/2006/main">
+  <p:cSld>
+    <p:spTree>
+      <p:nvGrpSpPr>
+        <p:cNvPr id="1" name=""/>
+        <p:cNvGrpSpPr/>
+        <p:nvPr/>
+      </p:nvGrpSpPr>
+      <p:grpSpPr>
+        <a:xfrm>
+          <a:off x="0" y="0"/>
+          <a:ext cx="0" cy="0"/>
+          <a:chOff x="0" y="0"/>
+          <a:chExt cx="0" cy="0"/>
+        </a:xfrm>
+      </p:grpSpPr>
+      <p:sp>
+        <p:nvSpPr>
+          <p:cNvPr id="2" name="Slide Image Placeholder 1"/>
+          <p:cNvSpPr>
+            <a:spLocks noGrp="1" noRot="1" noChangeAspect="1"/>
+          </p:cNvSpPr>
+          <p:nvPr>
+            <p:ph type="sldImg"/>
+          </p:nvPr>
+        </p:nvSpPr>
+        <p:spPr/>
+      </p:sp>
+      <p:sp>
+        <p:nvSpPr>
+          <p:cNvPr id="3" name="Notes Placeholder 2"/>
+          <p:cNvSpPr>
+            <a:spLocks noGrp="1"/>
+          </p:cNvSpPr>
+          <p:nvPr>
+            <p:ph type="body" idx="1"/>
+          </p:nvPr>
+        </p:nvSpPr>
+        <p:spPr/>
+        <p:txBody>
+          <a:bodyPr/>
+          <a:lstStyle/>
+          <a:p>
+            <a:r>
+              <a:rPr lang="en-US" dirty="0"/>
+              <a:t>Next steps. Replace every placeholder rule with an official Bangladesh Bank source; we have started with four study-abroad rules. Partner with an authorised dealer bank for real quotes and real KYC. Move the escrow from our simulated chain to a permissioned one with a bank-issued deposit token. Topic C also mentions credit building; we have not built it, and we would rather say so. To close: StudyRoute is clear, cheap and safe, because the engine calculates, the AI explains, the human approves, and every step is logged. Thank you.</a:t>
+            </a:r>
+            <a:endParaRPr lang="en-US" dirty="0"/>
+          </a:p>
+        </p:txBody>
+      </p:sp>
+      <p:sp>
+        <p:nvSpPr>
+          <p:cNvPr id="4" name="Slide Number Placeholder 3"/>
+          <p:cNvSpPr>
+            <a:spLocks noGrp="1"/>
+          </p:cNvSpPr>
+          <p:nvPr>
+            <p:ph type="sldNum" sz="quarter" idx="10"/>
+          </p:nvPr>
+        </p:nvSpPr>
+        <p:spPr/>
+        <p:txBody>
+          <a:bodyPr/>
+          <a:lstStyle/>
+          <a:p>
+            <a:fld id="{F7021451-1387-4CA6-816F-3879F97B5CBC}" type="slidenum">
+              <a:rPr lang="en-US"/>
+              <a:t>13</a:t>
             </a:fld>
             <a:endParaRPr lang="en-US"/>
           </a:p>
@@ -1291,7 +1381,7 @@
           <a:p>
             <a:r>
               <a:rPr lang="en-US" dirty="0"/>
-              <a:t>Two people feel this. The parent pays in taka, compares banks by the posted fee, approves a large transfer with little to check it against, and has to prove where the money came from. The student needs the university paid on time: if tuition arrives short or cannot be matched to the invoice, there are late fees and weeks of waiting with no status. StudyRoute gives both one plan. The parent decides. The student can see the plan, add recipient details and follow the status, but cannot approve.</a:t>
+              <a:t>Two people feel this. The parent pays in taka, compares banks by the posted fee, approves a large transfer with little to check it against, and must prove where the money came from. The student needs the university paid on time: a short or unmatched payment means late fees and weeks of waiting. StudyRoute gives both one plan. The parent decides; the student can see the plan and follow the status, but cannot approve.</a:t>
             </a:r>
             <a:endParaRPr lang="en-US" dirty="0"/>
           </a:p>
@@ -1379,7 +1469,7 @@
           <a:p>
             <a:r>
               <a:rPr lang="en-US" dirty="0"/>
-              <a:t>This is the real chain. The parent pays in taka to an authorised dealer bank, which sells foreign currency and sends a SWIFT instruction carrying a UETR and a charge code. A correspondent bank may take a lifting fee, the receiving bank may take another, and the university matches the payment by reference. Each step has a typical failure, shown in red. StudyRoute simulates this chain end to end with invented banks, a correspondent and a double-entry ledger where debits equal credits, and a failed payment is returned in full. It never moves real money.</a:t>
+              <a:t>This is the real chain. The parent pays in taka to an authorised dealer bank, which sells foreign currency and sends a SWIFT instruction. A correspondent bank may take a lifting fee, the receiving bank may take another, and the university matches the payment by reference. Each step has a typical failure, shown in red. StudyRoute simulates this chain with invented banks and a double-entry ledger, and returns a failed payment in full. It never moves real money.</a:t>
             </a:r>
             <a:endParaRPr lang="en-US" dirty="0"/>
           </a:p>
@@ -1467,7 +1557,7 @@
           <a:p>
             <a:r>
               <a:rPr lang="en-US" dirty="0"/>
-              <a:t>This is task completion. On the left, the parent typed one sentence into the chat: I need to pay ten thousand pounds of tuition by 28 October. The agent read it, made the quote, ranked the providers, planned the deadline and checked KYC, the recipient and the documents, and it built this plan card from the engine's output. The person creates the draft, chooses the recipient and approves with a fresh MFA code. The agent blocks the payment until KYC, the allowlist and the sandbox caps pass, then tracks it to settled and seals a compliance report. Look at what the agent did not do: it created no payment. It can propose a draft, but a person always clicks.</a:t>
+              <a:t>This is task completion. The parent typed one sentence: I need to pay ten thousand pounds of tuition by 28 October. The agent read it, made the quote, ranked the providers, planned the deadline, checked KYC and the documents, and built this plan card from the engine's output. The person creates the draft and approves with a fresh MFA code. The agent blocks the payment until KYC, the allowlist and the caps pass, then tracks it to settled and seals a compliance report. It created no payment itself: a person always clicks.</a:t>
             </a:r>
             <a:endParaRPr lang="en-US" dirty="0"/>
           </a:p>
@@ -1555,7 +1645,7 @@
           <a:p>
             <a:r>
               <a:rPr lang="en-US" dirty="0"/>
-              <a:t>Every number comes from a deterministic engine: integer minor units, decimal rates, no floats. For one provider, total cost is the FX margin plus the fixed fee, the SWIFT fee, any fees the sender pays under OUR, plus a shortfall when fees are deducted from the amount. We rank by that percentage. In our synthetic example, Provider B is first at 1.58 percent, Provider C looks cheap but it is quoted as SHA, so the university would receive 35 pounds less, and Provider A is third at 2.16 percent. On the right is where Provider B's 25,300 taka goes: most of it is the margin. The same engine powers the smart send plan, names the cheapest provider that arrives before the due date, and can stress-test a quote if the taka weakens. A student guide shows which student cities a monthly budget covers, with invented figures marked not verified. It does not predict exchange rates, and says so.</a:t>
+              <a:t>Every number comes from a deterministic engine: integer money, decimal rates, no floats. Total cost is the FX margin plus the fixed fee, the SWIFT fee, any fees the sender pays, plus a shortfall when fees are deducted from the amount. In our synthetic example Provider B is first at 1.58 percent. Provider C looks cheap, but it is quoted as SHA, so the university would receive 35 pounds less. Provider A is third at 2.16 percent. The same engine drives the smart send plan, the cheapest provider that arrives in time, and a stress test if the taka weakens. It does not predict exchange rates.</a:t>
             </a:r>
             <a:endParaRPr lang="en-US" dirty="0"/>
           </a:p>
@@ -1643,7 +1733,7 @@
           <a:p>
             <a:r>
               <a:rPr lang="en-US" dirty="0"/>
-              <a:t>Before the details, here is what we have shown and what we have not. What we have shown: every number comes from one deterministic engine, with 1678 backend tests covering all 24 scenarios. Only a human with a fresh MFA code can approve, and the AI has no such permission. Change one audit row and Verify fails at that event. And the stack starts from the zipped archive with one command. What we have not shown: the rates, fees and city costs are invented, and we have not yet compared them with real quotes. No real parent has used it. A local review found trust-boundary limits; no external penetration test was run. The Bangladesh Bank limits are placeholders, marked Not verified. Both lists are in the repository, because we would rather you hear the limits from us.</a:t>
+              <a:t>Here is what we have shown and what we have not. Shown: every number comes from one deterministic engine, with 1678 backend tests covering all 24 scenarios; only a human with a fresh MFA code can approve; change one audit row and Verify fails at that event; and the stack runs in Docker from the zipped archive. Not shown: the rates, fees and city costs are invented and not compared with real quotes, no real parent has used it, there was no outside penetration test, and most Bangladesh Bank figures are placeholders marked Not verified. Both lists are in the repository, because we would rather you hear the limits from us.</a:t>
             </a:r>
             <a:endParaRPr lang="en-US" dirty="0"/>
           </a:p>
@@ -1731,7 +1821,7 @@
           <a:p>
             <a:r>
               <a:rPr lang="en-US" dirty="0"/>
-              <a:t>The assistant follows a fixed pipeline. A policy check flags attempts to override rules, approve or reveal secrets, and a flagged message never reaches the model. Facts come only from the engine. Personal data is masked before any model call. The model is the only step that is not deterministic, and it is optional. Then a number guard checks every figure in the reply against the engine's facts and falls back to a template if anything is invented, a tool guard allows only proposals, and everything is audited. So: every number comes from the engine, the AI can only propose, and it works with no API key at all.</a:t>
+              <a:t>The assistant follows a fixed pipeline. A policy check flags attempts to override rules, approve or reveal secrets. Facts come only from the engine, and personal data is masked before any model call. The model is the one step that is not deterministic, and it is optional. A number guard then checks every figure in the reply against the engine's facts and falls back to a template if anything is invented; a tool guard allows only proposals; everything is audited. So the AI can only propose, and it works with no API key.</a:t>
             </a:r>
             <a:endParaRPr lang="en-US" dirty="0"/>
           </a:p>
@@ -1819,7 +1909,7 @@
           <a:p>
             <a:r>
               <a:rPr lang="en-US" dirty="0"/>
-              <a:t>The assistant has a trained component, and we measured it. A small language model, fine-tuned on a gaming-class GPU in a few minutes, reads what a parent types: the intent, and the exact words that carry an amount, a currency or a date. It never produces a number; plain code turns those words into values, and when the old rules and the model disagree, the assistant asks. On messages we wrote by hand after the model was frozen, it chose the right intent 88.5% of the time against 61.1% for the old rules, read a plan request exactly 100% against 57.6%, and blocked 92.9% of attacks against 28.6%. The sample is small and the data is synthetic. A second small policy, trained with reinforcement learning, chooses whether to ask, read back or plan: on simulated parents, wrong plans fell from 2.8% to 0.8%. The API adds mandatory review not measured here; the simulated parents are assumptions.Two more small models are trained on the same GPU. A language model rewords the engine's answer on the user's own machine: on 700 held-out questions 80.9% of its answers pass every code check and the rest show the engine's own text; 99.8% of the figures it writes are the engine's. It mostly rewords. A risk model, trained on IBM's public synthetic transactions, gives each payment a score from four factors, amount, frequency, timeline and person: a low score shows no warning, a high one shows a warning and sends the payment to a person at the sandbox bank, and every payment needs a person's authorization whatever its score; on a later period it caught 56.5% of the flagged payments with 29.2% precision, and the data cannot support both above ninety. It routes; a person decides.</a:t>
+              <a:t>The assistant has a trained part, and we measured it. A small language model reads what a parent types: the intent, and the exact words that carry an amount, a currency or a date. It never produces a number; plain code turns those words into values. On 113 messages written by hand after it was frozen, it chose the right intent 88.5% of the time against 61.1% for the old rules, and blocked 92.9% of attacks against 28.6%. The sample is small and the data is synthetic. A second small policy, trained with reinforcement learning, decides whether to ask, read back or plan: on simulated parents, wrong plans fell from 2.8% to 0.8%. Two more small models: one rewords the engine's answer, and a risk model scores each payment on amount, frequency, timeline and person. It caught 56.5% of flagged payments at 29.2% precision, and the data cannot support both above ninety. It routes; a person decides.</a:t>
             </a:r>
             <a:endParaRPr lang="en-US" dirty="0"/>
           </a:p>
@@ -3959,12 +4049,676 @@
             <a:r>
               <a:rPr lang="en-US" sz="3600" b="1" dirty="0">
                 <a:solidFill>
-                  <a:schemeClr val="bg1"/>
+                  <a:schemeClr val="tx1"/>
                 </a:solidFill>
                 <a:latin typeface="+mj-lt" pitchFamily="34" charset="0"/>
                 <a:ea typeface="+mj-lt" pitchFamily="34" charset="-122"/>
                 <a:cs typeface="+mj-lt" pitchFamily="34" charset="-120"/>
               </a:rPr>
+              <a:t>Why it can work</a:t>
+            </a:r>
+            <a:endParaRPr lang="en-US" sz="3600" dirty="0"/>
+          </a:p>
+        </p:txBody>
+      </p:sp>
+      <p:sp>
+        <p:nvSpPr>
+          <p:cNvPr id="3" name="content-12-rect-1"/>
+          <p:cNvSpPr/>
+          <p:nvPr/>
+        </p:nvSpPr>
+        <p:spPr>
+          <a:xfrm>
+            <a:off x="457200" y="1188720"/>
+            <a:ext cx="4846320" cy="1078992"/>
+          </a:xfrm>
+          <a:prstGeom prst="roundRect">
+            <a:avLst>
+              <a:gd name="adj" fmla="val 6780"/>
+            </a:avLst>
+          </a:prstGeom>
+          <a:solidFill>
+            <a:schemeClr val="bg2"/>
+          </a:solidFill>
+          <a:ln/>
+        </p:spPr>
+      </p:sp>
+      <p:sp>
+        <p:nvSpPr>
+          <p:cNvPr id="4" name="content-12-text-2"/>
+          <p:cNvSpPr txBox="1"/>
+          <p:nvPr/>
+        </p:nvSpPr>
+        <p:spPr>
+          <a:xfrm>
+            <a:off x="594360" y="1234440"/>
+            <a:ext cx="1783080" cy="987552"/>
+          </a:xfrm>
+          <a:prstGeom prst="rect">
+            <a:avLst/>
+          </a:prstGeom>
+          <a:noFill/>
+          <a:ln/>
+        </p:spPr>
+        <p:txBody>
+          <a:bodyPr wrap="square" lIns="0" tIns="0" rIns="0" bIns="0" rtlCol="0" anchor="ctr"/>
+          <a:lstStyle/>
+          <a:p>
+            <a:pPr algn="l" indent="0" marL="0">
+              <a:buNone/>
+            </a:pPr>
+            <a:r>
+              <a:rPr lang="en-US" sz="2100" b="1" dirty="0">
+                <a:solidFill>
+                  <a:schemeClr val="accent1"/>
+                </a:solidFill>
+                <a:latin typeface="+mj-lt" pitchFamily="34" charset="0"/>
+                <a:ea typeface="+mj-lt" pitchFamily="34" charset="-122"/>
+                <a:cs typeface="+mj-lt" pitchFamily="34" charset="-120"/>
+              </a:rPr>
+              <a:t>USD 881.7m</a:t>
+            </a:r>
+            <a:endParaRPr lang="en-US" sz="2100" dirty="0"/>
+          </a:p>
+        </p:txBody>
+      </p:sp>
+      <p:sp>
+        <p:nvSpPr>
+          <p:cNvPr id="5" name="content-12-text-3"/>
+          <p:cNvSpPr txBox="1"/>
+          <p:nvPr/>
+        </p:nvSpPr>
+        <p:spPr>
+          <a:xfrm>
+            <a:off x="2423160" y="1234440"/>
+            <a:ext cx="2788920" cy="987552"/>
+          </a:xfrm>
+          <a:prstGeom prst="rect">
+            <a:avLst/>
+          </a:prstGeom>
+          <a:noFill/>
+          <a:ln/>
+        </p:spPr>
+        <p:txBody>
+          <a:bodyPr wrap="square" lIns="0" tIns="0" rIns="0" bIns="0" rtlCol="0" anchor="ctr"/>
+          <a:lstStyle/>
+          <a:p>
+            <a:pPr algn="l" indent="0" marL="0">
+              <a:buNone/>
+            </a:pPr>
+            <a:r>
+              <a:rPr lang="en-US" sz="1100" dirty="0">
+                <a:solidFill>
+                  <a:schemeClr val="tx1"/>
+                </a:solidFill>
+              </a:rPr>
+              <a:t>sent through Bangladeshi banks for overseas education in FY2025-26: a record, up 32% in a year. Bangladesh Bank data, via The Observer, 24 Jul 2026.</a:t>
+            </a:r>
+            <a:endParaRPr lang="en-US" sz="1100" dirty="0"/>
+          </a:p>
+        </p:txBody>
+      </p:sp>
+      <p:sp>
+        <p:nvSpPr>
+          <p:cNvPr id="6" name="content-12-rect-4"/>
+          <p:cNvSpPr/>
+          <p:nvPr/>
+        </p:nvSpPr>
+        <p:spPr>
+          <a:xfrm>
+            <a:off x="457200" y="2359152"/>
+            <a:ext cx="4846320" cy="1078992"/>
+          </a:xfrm>
+          <a:prstGeom prst="roundRect">
+            <a:avLst>
+              <a:gd name="adj" fmla="val 6780"/>
+            </a:avLst>
+          </a:prstGeom>
+          <a:solidFill>
+            <a:schemeClr val="bg2"/>
+          </a:solidFill>
+          <a:ln/>
+        </p:spPr>
+      </p:sp>
+      <p:sp>
+        <p:nvSpPr>
+          <p:cNvPr id="7" name="content-12-text-5"/>
+          <p:cNvSpPr txBox="1"/>
+          <p:nvPr/>
+        </p:nvSpPr>
+        <p:spPr>
+          <a:xfrm>
+            <a:off x="594360" y="2404872"/>
+            <a:ext cx="1783080" cy="987552"/>
+          </a:xfrm>
+          <a:prstGeom prst="rect">
+            <a:avLst/>
+          </a:prstGeom>
+          <a:noFill/>
+          <a:ln/>
+        </p:spPr>
+        <p:txBody>
+          <a:bodyPr wrap="square" lIns="0" tIns="0" rIns="0" bIns="0" rtlCol="0" anchor="ctr"/>
+          <a:lstStyle/>
+          <a:p>
+            <a:pPr algn="l" indent="0" marL="0">
+              <a:buNone/>
+            </a:pPr>
+            <a:r>
+              <a:rPr lang="en-US" sz="2100" b="1" dirty="0">
+                <a:solidFill>
+                  <a:schemeClr val="accent1"/>
+                </a:solidFill>
+                <a:latin typeface="+mj-lt" pitchFamily="34" charset="0"/>
+                <a:ea typeface="+mj-lt" pitchFamily="34" charset="-122"/>
+                <a:cs typeface="+mj-lt" pitchFamily="34" charset="-120"/>
+              </a:rPr>
+              <a:t>6.4%</a:t>
+            </a:r>
+            <a:endParaRPr lang="en-US" sz="2100" dirty="0"/>
+          </a:p>
+        </p:txBody>
+      </p:sp>
+      <p:sp>
+        <p:nvSpPr>
+          <p:cNvPr id="8" name="content-12-text-6"/>
+          <p:cNvSpPr txBox="1"/>
+          <p:nvPr/>
+        </p:nvSpPr>
+        <p:spPr>
+          <a:xfrm>
+            <a:off x="2423160" y="2404872"/>
+            <a:ext cx="2788920" cy="987552"/>
+          </a:xfrm>
+          <a:prstGeom prst="rect">
+            <a:avLst/>
+          </a:prstGeom>
+          <a:noFill/>
+          <a:ln/>
+        </p:spPr>
+        <p:txBody>
+          <a:bodyPr wrap="square" lIns="0" tIns="0" rIns="0" bIns="0" rtlCol="0" anchor="ctr"/>
+          <a:lstStyle/>
+          <a:p>
+            <a:pPr algn="l" indent="0" marL="0">
+              <a:buNone/>
+            </a:pPr>
+            <a:r>
+              <a:rPr lang="en-US" sz="1100" dirty="0">
+                <a:solidFill>
+                  <a:schemeClr val="tx1"/>
+                </a:solidFill>
+              </a:rPr>
+              <a:t>average cost of sending USD 200 worldwide, Q3 2025, against a 3% goal (World Bank). Small remittances, not tuition: context only.</a:t>
+            </a:r>
+            <a:endParaRPr lang="en-US" sz="1100" dirty="0"/>
+          </a:p>
+        </p:txBody>
+      </p:sp>
+      <p:sp>
+        <p:nvSpPr>
+          <p:cNvPr id="9" name="content-12-rect-7"/>
+          <p:cNvSpPr/>
+          <p:nvPr/>
+        </p:nvSpPr>
+        <p:spPr>
+          <a:xfrm>
+            <a:off x="457200" y="3529584"/>
+            <a:ext cx="4846320" cy="1078992"/>
+          </a:xfrm>
+          <a:prstGeom prst="roundRect">
+            <a:avLst>
+              <a:gd name="adj" fmla="val 6780"/>
+            </a:avLst>
+          </a:prstGeom>
+          <a:solidFill>
+            <a:schemeClr val="bg2"/>
+          </a:solidFill>
+          <a:ln/>
+        </p:spPr>
+      </p:sp>
+      <p:sp>
+        <p:nvSpPr>
+          <p:cNvPr id="10" name="content-12-text-8"/>
+          <p:cNvSpPr txBox="1"/>
+          <p:nvPr/>
+        </p:nvSpPr>
+        <p:spPr>
+          <a:xfrm>
+            <a:off x="594360" y="3575304"/>
+            <a:ext cx="1783080" cy="987552"/>
+          </a:xfrm>
+          <a:prstGeom prst="rect">
+            <a:avLst/>
+          </a:prstGeom>
+          <a:noFill/>
+          <a:ln/>
+        </p:spPr>
+        <p:txBody>
+          <a:bodyPr wrap="square" lIns="0" tIns="0" rIns="0" bIns="0" rtlCol="0" anchor="ctr"/>
+          <a:lstStyle/>
+          <a:p>
+            <a:pPr algn="l" indent="0" marL="0">
+              <a:buNone/>
+            </a:pPr>
+            <a:r>
+              <a:rPr lang="en-US" sz="2100" b="1" dirty="0">
+                <a:solidFill>
+                  <a:schemeClr val="accent1"/>
+                </a:solidFill>
+                <a:latin typeface="+mj-lt" pitchFamily="34" charset="0"/>
+                <a:ea typeface="+mj-lt" pitchFamily="34" charset="-122"/>
+                <a:cs typeface="+mj-lt" pitchFamily="34" charset="-120"/>
+              </a:rPr>
+              <a:t>USD 8.8m</a:t>
+            </a:r>
+            <a:endParaRPr lang="en-US" sz="2100" dirty="0"/>
+          </a:p>
+        </p:txBody>
+      </p:sp>
+      <p:sp>
+        <p:nvSpPr>
+          <p:cNvPr id="11" name="content-12-text-9"/>
+          <p:cNvSpPr txBox="1"/>
+          <p:nvPr/>
+        </p:nvSpPr>
+        <p:spPr>
+          <a:xfrm>
+            <a:off x="2423160" y="3575304"/>
+            <a:ext cx="2788920" cy="987552"/>
+          </a:xfrm>
+          <a:prstGeom prst="rect">
+            <a:avLst/>
+          </a:prstGeom>
+          <a:noFill/>
+          <a:ln/>
+        </p:spPr>
+        <p:txBody>
+          <a:bodyPr wrap="square" lIns="0" tIns="0" rIns="0" bIns="0" rtlCol="0" anchor="ctr"/>
+          <a:lstStyle/>
+          <a:p>
+            <a:pPr algn="l" indent="0" marL="0">
+              <a:buNone/>
+            </a:pPr>
+            <a:r>
+              <a:rPr lang="en-US" sz="1100" dirty="0">
+                <a:solidFill>
+                  <a:schemeClr val="tx1"/>
+                </a:solidFill>
+              </a:rPr>
+              <a:t>a year stays with families for each 1 point of cost taken off that volume. Our arithmetic (1% of 881.7m), not a forecast.</a:t>
+            </a:r>
+            <a:endParaRPr lang="en-US" sz="1100" dirty="0"/>
+          </a:p>
+        </p:txBody>
+      </p:sp>
+      <p:sp>
+        <p:nvSpPr>
+          <p:cNvPr id="12" name="content-12-rect-10"/>
+          <p:cNvSpPr/>
+          <p:nvPr/>
+        </p:nvSpPr>
+        <p:spPr>
+          <a:xfrm>
+            <a:off x="5486400" y="1188720"/>
+            <a:ext cx="3200400" cy="3383280"/>
+          </a:xfrm>
+          <a:prstGeom prst="roundRect">
+            <a:avLst>
+              <a:gd name="adj" fmla="val 2286"/>
+            </a:avLst>
+          </a:prstGeom>
+          <a:solidFill>
+            <a:schemeClr val="bg2"/>
+          </a:solidFill>
+          <a:ln/>
+        </p:spPr>
+      </p:sp>
+      <p:sp>
+        <p:nvSpPr>
+          <p:cNvPr id="13" name="content-12-text-11"/>
+          <p:cNvSpPr txBox="1"/>
+          <p:nvPr/>
+        </p:nvSpPr>
+        <p:spPr>
+          <a:xfrm>
+            <a:off x="5669280" y="1261872"/>
+            <a:ext cx="2834640" cy="365760"/>
+          </a:xfrm>
+          <a:prstGeom prst="rect">
+            <a:avLst/>
+          </a:prstGeom>
+          <a:noFill/>
+          <a:ln/>
+        </p:spPr>
+        <p:txBody>
+          <a:bodyPr wrap="square" lIns="0" tIns="0" rIns="0" bIns="0" rtlCol="0" anchor="ctr"/>
+          <a:lstStyle/>
+          <a:p>
+            <a:pPr algn="l" indent="0" marL="0">
+              <a:buNone/>
+            </a:pPr>
+            <a:r>
+              <a:rPr lang="en-US" sz="1600" b="1" dirty="0">
+                <a:solidFill>
+                  <a:schemeClr val="accent1"/>
+                </a:solidFill>
+              </a:rPr>
+              <a:t>Who gains</a:t>
+            </a:r>
+            <a:endParaRPr lang="en-US" sz="1600" dirty="0"/>
+          </a:p>
+        </p:txBody>
+      </p:sp>
+      <p:sp>
+        <p:nvSpPr>
+          <p:cNvPr id="14" name="content-12-text-12"/>
+          <p:cNvSpPr txBox="1"/>
+          <p:nvPr/>
+        </p:nvSpPr>
+        <p:spPr>
+          <a:xfrm>
+            <a:off x="5669280" y="1691640"/>
+            <a:ext cx="2834640" cy="530352"/>
+          </a:xfrm>
+          <a:prstGeom prst="rect">
+            <a:avLst/>
+          </a:prstGeom>
+          <a:noFill/>
+          <a:ln/>
+        </p:spPr>
+        <p:txBody>
+          <a:bodyPr wrap="square" lIns="0" tIns="0" rIns="0" bIns="0" rtlCol="0" anchor="ctr"/>
+          <a:lstStyle/>
+          <a:p>
+            <a:pPr algn="l" indent="0" marL="0">
+              <a:buNone/>
+            </a:pPr>
+            <a:r>
+              <a:rPr lang="en-US" sz="1200" b="1" dirty="0">
+                <a:solidFill>
+                  <a:schemeClr val="tx1"/>
+                </a:solidFill>
+              </a:rPr>
+              <a:t>Family: </a:t>
+            </a:r>
+            <a:pPr algn="l" indent="0" marL="0">
+              <a:buNone/>
+            </a:pPr>
+            <a:r>
+              <a:rPr lang="en-US" sz="1200" dirty="0">
+                <a:solidFill>
+                  <a:schemeClr val="tx1"/>
+                </a:solidFill>
+              </a:rPr>
+              <a:t>Lower true cost, a safe deadline, one plan.</a:t>
+            </a:r>
+            <a:endParaRPr lang="en-US" sz="1200" dirty="0"/>
+          </a:p>
+        </p:txBody>
+      </p:sp>
+      <p:sp>
+        <p:nvSpPr>
+          <p:cNvPr id="15" name="content-12-text-13"/>
+          <p:cNvSpPr txBox="1"/>
+          <p:nvPr/>
+        </p:nvSpPr>
+        <p:spPr>
+          <a:xfrm>
+            <a:off x="5669280" y="2258568"/>
+            <a:ext cx="2834640" cy="530352"/>
+          </a:xfrm>
+          <a:prstGeom prst="rect">
+            <a:avLst/>
+          </a:prstGeom>
+          <a:noFill/>
+          <a:ln/>
+        </p:spPr>
+        <p:txBody>
+          <a:bodyPr wrap="square" lIns="0" tIns="0" rIns="0" bIns="0" rtlCol="0" anchor="ctr"/>
+          <a:lstStyle/>
+          <a:p>
+            <a:pPr algn="l" indent="0" marL="0">
+              <a:buNone/>
+            </a:pPr>
+            <a:r>
+              <a:rPr lang="en-US" sz="1200" b="1" dirty="0">
+                <a:solidFill>
+                  <a:schemeClr val="tx1"/>
+                </a:solidFill>
+              </a:rPr>
+              <a:t>Bank: </a:t>
+            </a:r>
+            <a:pPr algn="l" indent="0" marL="0">
+              <a:buNone/>
+            </a:pPr>
+            <a:r>
+              <a:rPr lang="en-US" sz="1200" dirty="0">
+                <a:solidFill>
+                  <a:schemeClr val="tx1"/>
+                </a:solidFill>
+              </a:rPr>
+              <a:t>Documents checked and risk-routed before a reviewer looks.</a:t>
+            </a:r>
+            <a:endParaRPr lang="en-US" sz="1200" dirty="0"/>
+          </a:p>
+        </p:txBody>
+      </p:sp>
+      <p:sp>
+        <p:nvSpPr>
+          <p:cNvPr id="16" name="content-12-text-14"/>
+          <p:cNvSpPr txBox="1"/>
+          <p:nvPr/>
+        </p:nvSpPr>
+        <p:spPr>
+          <a:xfrm>
+            <a:off x="5669280" y="2825496"/>
+            <a:ext cx="2834640" cy="530352"/>
+          </a:xfrm>
+          <a:prstGeom prst="rect">
+            <a:avLst/>
+          </a:prstGeom>
+          <a:noFill/>
+          <a:ln/>
+        </p:spPr>
+        <p:txBody>
+          <a:bodyPr wrap="square" lIns="0" tIns="0" rIns="0" bIns="0" rtlCol="0" anchor="ctr"/>
+          <a:lstStyle/>
+          <a:p>
+            <a:pPr algn="l" indent="0" marL="0">
+              <a:buNone/>
+            </a:pPr>
+            <a:r>
+              <a:rPr lang="en-US" sz="1200" b="1" dirty="0">
+                <a:solidFill>
+                  <a:schemeClr val="tx1"/>
+                </a:solidFill>
+              </a:rPr>
+              <a:t>University: </a:t>
+            </a:r>
+            <a:pPr algn="l" indent="0" marL="0">
+              <a:buNone/>
+            </a:pPr>
+            <a:r>
+              <a:rPr lang="en-US" sz="1200" dirty="0">
+                <a:solidFill>
+                  <a:schemeClr val="tx1"/>
+                </a:solidFill>
+              </a:rPr>
+              <a:t>Fewer short or unmatched payments.</a:t>
+            </a:r>
+            <a:endParaRPr lang="en-US" sz="1200" dirty="0"/>
+          </a:p>
+        </p:txBody>
+      </p:sp>
+      <p:sp>
+        <p:nvSpPr>
+          <p:cNvPr id="17" name="content-12-text-15"/>
+          <p:cNvSpPr txBox="1"/>
+          <p:nvPr/>
+        </p:nvSpPr>
+        <p:spPr>
+          <a:xfrm>
+            <a:off x="5669280" y="3429000"/>
+            <a:ext cx="2834640" cy="274320"/>
+          </a:xfrm>
+          <a:prstGeom prst="rect">
+            <a:avLst/>
+          </a:prstGeom>
+          <a:noFill/>
+          <a:ln/>
+        </p:spPr>
+        <p:txBody>
+          <a:bodyPr wrap="square" lIns="0" tIns="0" rIns="0" bIns="0" rtlCol="0" anchor="ctr"/>
+          <a:lstStyle/>
+          <a:p>
+            <a:pPr algn="l" indent="0" marL="0">
+              <a:buNone/>
+            </a:pPr>
+            <a:r>
+              <a:rPr lang="en-US" sz="1400" b="1" dirty="0">
+                <a:solidFill>
+                  <a:schemeClr val="accent1"/>
+                </a:solidFill>
+              </a:rPr>
+              <a:t>Who could pay (to test)</a:t>
+            </a:r>
+            <a:endParaRPr lang="en-US" sz="1400" dirty="0"/>
+          </a:p>
+        </p:txBody>
+      </p:sp>
+      <p:sp>
+        <p:nvSpPr>
+          <p:cNvPr id="18" name="content-12-text-16"/>
+          <p:cNvSpPr txBox="1"/>
+          <p:nvPr/>
+        </p:nvSpPr>
+        <p:spPr>
+          <a:xfrm>
+            <a:off x="5669280" y="3703320"/>
+            <a:ext cx="2834640" cy="822960"/>
+          </a:xfrm>
+          <a:prstGeom prst="rect">
+            <a:avLst/>
+          </a:prstGeom>
+          <a:noFill/>
+          <a:ln/>
+        </p:spPr>
+        <p:txBody>
+          <a:bodyPr wrap="square" lIns="0" tIns="0" rIns="0" bIns="0" rtlCol="0" anchor="t"/>
+          <a:lstStyle/>
+          <a:p>
+            <a:pPr algn="l" indent="0" marL="0">
+              <a:buNone/>
+            </a:pPr>
+            <a:r>
+              <a:rPr lang="en-US" sz="1100" dirty="0">
+                <a:solidFill>
+                  <a:schemeClr val="tx1"/>
+                </a:solidFill>
+              </a:rPr>
+              <a:t>A partner bank pays a small service fee per assisted payment. At 0.2% of the volume, a 5% share is about USD 88,000 a year: modest, and a number to test.</a:t>
+            </a:r>
+            <a:endParaRPr lang="en-US" sz="1100" dirty="0"/>
+          </a:p>
+        </p:txBody>
+      </p:sp>
+      <p:sp>
+        <p:nvSpPr>
+          <p:cNvPr id="19" name="content-12-text-17"/>
+          <p:cNvSpPr txBox="1"/>
+          <p:nvPr/>
+        </p:nvSpPr>
+        <p:spPr>
+          <a:xfrm>
+            <a:off x="457200" y="4636008"/>
+            <a:ext cx="8229600" cy="274320"/>
+          </a:xfrm>
+          <a:prstGeom prst="rect">
+            <a:avLst/>
+          </a:prstGeom>
+          <a:noFill/>
+          <a:ln/>
+        </p:spPr>
+        <p:txBody>
+          <a:bodyPr wrap="square" lIns="0" tIns="0" rIns="0" bIns="0" rtlCol="0" anchor="t"/>
+          <a:lstStyle/>
+          <a:p>
+            <a:pPr algn="l" indent="0" marL="0">
+              <a:buNone/>
+            </a:pPr>
+            <a:r>
+              <a:rPr lang="en-US" sz="1100" dirty="0">
+                <a:solidFill>
+                  <a:schemeClr val="tx2"/>
+                </a:solidFill>
+              </a:rPr>
+              <a:t>Illustrations, not forecasts. No partner, no pilot, no real users yet. Sources and sums: docs/BUSINESS_CASE.md</a:t>
+            </a:r>
+            <a:endParaRPr lang="en-US" sz="1100" dirty="0"/>
+          </a:p>
+        </p:txBody>
+      </p:sp>
+    </p:spTree>
+  </p:cSld>
+  <p:clrMapOvr>
+    <a:masterClrMapping/>
+  </p:clrMapOvr>
+</p:sld>
+</file>
+
+<file path=ppt/slides/slide13.xml><?xml version="1.0" encoding="utf-8"?>
+<p:sld xmlns:a="http://schemas.openxmlformats.org/drawingml/2006/main" xmlns:r="http://schemas.openxmlformats.org/officeDocument/2006/relationships" xmlns:p="http://schemas.openxmlformats.org/presentationml/2006/main">
+  <p:cSld name="Slide 13">
+    <p:spTree>
+      <p:nvGrpSpPr>
+        <p:cNvPr id="1" name=""/>
+        <p:cNvGrpSpPr/>
+        <p:nvPr/>
+      </p:nvGrpSpPr>
+      <p:grpSpPr>
+        <a:xfrm>
+          <a:off x="0" y="0"/>
+          <a:ext cx="0" cy="0"/>
+          <a:chOff x="0" y="0"/>
+          <a:chExt cx="0" cy="0"/>
+        </a:xfrm>
+      </p:grpSpPr>
+      <p:sp>
+        <p:nvSpPr>
+          <p:cNvPr id="2" name="Text 0"/>
+          <p:cNvSpPr/>
+          <p:nvPr>
+            <p:ph idx="100" type="title" hasCustomPrompt="1"/>
+          </p:nvPr>
+        </p:nvSpPr>
+        <p:spPr>
+          <a:xfrm>
+            <a:off x="457200" y="274320"/>
+            <a:ext cx="8229600" cy="777240"/>
+          </a:xfrm>
+          <a:prstGeom prst="rect">
+            <a:avLst/>
+          </a:prstGeom>
+          <a:noFill/>
+          <a:ln/>
+        </p:spPr>
+        <p:txBody>
+          <a:bodyPr wrap="square" lIns="0" tIns="0" rIns="0" bIns="0" rtlCol="0" anchor="ctr"/>
+          <a:lstStyle/>
+          <a:p>
+            <a:pPr algn="l" indent="0" marL="0">
+              <a:buNone/>
+            </a:pPr>
+            <a:r>
+              <a:rPr lang="en-US" sz="3600" b="1" dirty="0">
+                <a:solidFill>
+                  <a:schemeClr val="bg1"/>
+                </a:solidFill>
+                <a:latin typeface="+mj-lt" pitchFamily="34" charset="0"/>
+                <a:ea typeface="+mj-lt" pitchFamily="34" charset="-122"/>
+                <a:cs typeface="+mj-lt" pitchFamily="34" charset="-120"/>
+              </a:rPr>
               <a:t>What comes next</a:t>
             </a:r>
             <a:endParaRPr lang="en-US" sz="3600" dirty="0"/>
@@ -3973,7 +4727,7 @@
       </p:sp>
       <p:sp>
         <p:nvSpPr>
-          <p:cNvPr id="3" name="closing-12-rect-1"/>
+          <p:cNvPr id="3" name="closing-13-rect-1"/>
           <p:cNvSpPr/>
           <p:nvPr/>
         </p:nvSpPr>
@@ -3995,7 +4749,7 @@
       </p:sp>
       <p:sp>
         <p:nvSpPr>
-          <p:cNvPr id="4" name="closing-12-text-2"/>
+          <p:cNvPr id="4" name="closing-13-text-2"/>
           <p:cNvSpPr txBox="1"/>
           <p:nvPr/>
         </p:nvSpPr>
@@ -4031,7 +4785,7 @@
       </p:sp>
       <p:sp>
         <p:nvSpPr>
-          <p:cNvPr id="5" name="closing-12-text-3"/>
+          <p:cNvPr id="5" name="closing-13-text-3"/>
           <p:cNvSpPr txBox="1"/>
           <p:nvPr/>
         </p:nvSpPr>
@@ -4059,7 +4813,7 @@
                   <a:schemeClr val="bg2"/>
                 </a:solidFill>
               </a:rPr>
-              <a:t>Replace each placeholder rule with an official Bangladesh Bank source.</a:t>
+              <a:t>Four study-abroad rules now rest on Bangladesh Bank's circular. Verify the rest.</a:t>
             </a:r>
             <a:endParaRPr lang="en-US" sz="1400" dirty="0"/>
           </a:p>
@@ -4067,7 +4821,7 @@
       </p:sp>
       <p:sp>
         <p:nvSpPr>
-          <p:cNvPr id="6" name="closing-12-rect-4"/>
+          <p:cNvPr id="6" name="closing-13-rect-4"/>
           <p:cNvSpPr/>
           <p:nvPr/>
         </p:nvSpPr>
@@ -4089,7 +4843,7 @@
       </p:sp>
       <p:sp>
         <p:nvSpPr>
-          <p:cNvPr id="7" name="closing-12-text-5"/>
+          <p:cNvPr id="7" name="closing-13-text-5"/>
           <p:cNvSpPr txBox="1"/>
           <p:nvPr/>
         </p:nvSpPr>
@@ -4125,7 +4879,7 @@
       </p:sp>
       <p:sp>
         <p:nvSpPr>
-          <p:cNvPr id="8" name="closing-12-text-6"/>
+          <p:cNvPr id="8" name="closing-13-text-6"/>
           <p:cNvSpPr txBox="1"/>
           <p:nvPr/>
         </p:nvSpPr>
@@ -4161,7 +4915,7 @@
       </p:sp>
       <p:sp>
         <p:nvSpPr>
-          <p:cNvPr id="9" name="closing-12-rect-7"/>
+          <p:cNvPr id="9" name="closing-13-rect-7"/>
           <p:cNvSpPr/>
           <p:nvPr/>
         </p:nvSpPr>
@@ -4183,7 +4937,7 @@
       </p:sp>
       <p:sp>
         <p:nvSpPr>
-          <p:cNvPr id="10" name="closing-12-text-8"/>
+          <p:cNvPr id="10" name="closing-13-text-8"/>
           <p:cNvSpPr txBox="1"/>
           <p:nvPr/>
         </p:nvSpPr>
@@ -4219,7 +4973,7 @@
       </p:sp>
       <p:sp>
         <p:nvSpPr>
-          <p:cNvPr id="11" name="closing-12-text-9"/>
+          <p:cNvPr id="11" name="closing-13-text-9"/>
           <p:cNvSpPr txBox="1"/>
           <p:nvPr/>
         </p:nvSpPr>
@@ -4255,7 +5009,7 @@
       </p:sp>
       <p:sp>
         <p:nvSpPr>
-          <p:cNvPr id="12" name="closing-12-rect-10"/>
+          <p:cNvPr id="12" name="closing-13-rect-10"/>
           <p:cNvSpPr/>
           <p:nvPr/>
         </p:nvSpPr>
@@ -4277,7 +5031,7 @@
       </p:sp>
       <p:sp>
         <p:nvSpPr>
-          <p:cNvPr id="13" name="closing-12-text-11"/>
+          <p:cNvPr id="13" name="closing-13-text-11"/>
           <p:cNvSpPr txBox="1"/>
           <p:nvPr/>
         </p:nvSpPr>
@@ -4313,7 +5067,7 @@
       </p:sp>
       <p:sp>
         <p:nvSpPr>
-          <p:cNvPr id="14" name="closing-12-text-12"/>
+          <p:cNvPr id="14" name="closing-13-text-12"/>
           <p:cNvSpPr txBox="1"/>
           <p:nvPr/>
         </p:nvSpPr>
@@ -4341,7 +5095,7 @@
                   <a:schemeClr val="bg2"/>
                 </a:solidFill>
               </a:rPr>
-              <a:t>Today the escrow runs on a simulated chain inside the app, with no network. Next: a permissioned chain and a bank-issued token.</a:t>
+              <a:t>Today the escrow runs on a simulated chain, with no network. Next: a permissioned chain and a bank-issued token.</a:t>
             </a:r>
             <a:endParaRPr lang="en-US" sz="1400" dirty="0"/>
           </a:p>
@@ -4349,7 +5103,7 @@
       </p:sp>
       <p:sp>
         <p:nvSpPr>
-          <p:cNvPr id="15" name="closing-12-text-13"/>
+          <p:cNvPr id="15" name="closing-13-text-13"/>
           <p:cNvSpPr txBox="1"/>
           <p:nvPr/>
         </p:nvSpPr>
@@ -4388,7 +5142,7 @@
       </p:sp>
       <p:sp>
         <p:nvSpPr>
-          <p:cNvPr id="16" name="closing-12-text-14"/>
+          <p:cNvPr id="16" name="closing-13-text-14"/>
           <p:cNvSpPr txBox="1"/>
           <p:nvPr/>
         </p:nvSpPr>
@@ -9283,7 +10037,7 @@
                   <a:schemeClr val="tx1"/>
                 </a:solidFill>
               </a:rPr>
-              <a:t>Fresh local API/UI checks are in release evidence; Docker logs are inherited, not rerun for this repair.</a:t>
+              <a:t>The Docker stack passed its demo, 48 browser checks and the hardened overlay on 18 Oct; the attack probes defended 146 of 146.</a:t>
             </a:r>
             <a:endParaRPr lang="en-US" sz="1200" dirty="0"/>
           </a:p>
@@ -9455,7 +10209,7 @@
                   <a:schemeClr val="tx1"/>
                 </a:solidFill>
               </a:rPr>
-              <a:t>Bangladesh Bank limits are placeholders, marked Not verified.</a:t>
+              <a:t>Most Bangladesh Bank figures are placeholders marked Not verified; four rules were read in the official circular.</a:t>
             </a:r>
             <a:endParaRPr lang="en-US" sz="1200" dirty="0"/>
           </a:p>

--- a/submission/StudyRoute_Deck.pptx
+++ b/submission/StudyRoute_Deck.pptx
@@ -119,25 +119,25 @@
   <p:extLst>
     <p:ext uri="{521415D9-36F7-43E2-AB2F-B90AF26B5E84}">
       <p14:sectionLst xmlns:p14="http://schemas.microsoft.com/office/powerpoint/2010/main">
-        <p14:section name="Opening" id="{07ced431-34e2-9db2-5c88-d8be44a3ce15}">
+        <p14:section name="Opening" id="{02b223ea-fa72-7dfe-5b0b-b48e7c084e38}">
           <p14:sldIdLst>
             <p14:sldId id="256"/>
             <p14:sldId id="257"/>
           </p14:sldIdLst>
         </p14:section>
-        <p14:section name="The problem" id="{96471444-b73f-d33d-e81d-1af2fc67e8b4}">
+        <p14:section name="The problem" id="{94ac6a86-10c4-df08-7eb4-3f1a14e502b5}">
           <p14:sldIdLst>
             <p14:sldId id="258"/>
             <p14:sldId id="259"/>
           </p14:sldIdLst>
         </p14:section>
-        <p14:section name="The solution" id="{31cb1cf1-3d81-2803-591d-66f27aaf3ec9}">
+        <p14:section name="The solution" id="{2ff38c6c-05ec-29b9-b810-f6266049fb79}">
           <p14:sldIdLst>
             <p14:sldId id="260"/>
             <p14:sldId id="261"/>
           </p14:sldIdLst>
         </p14:section>
-        <p14:section name="Trust" id="{85cfab69-d019-4786-b39a-23f4fb62ac01}">
+        <p14:section name="Trust" id="{d7d438f2-ceca-290e-6bb9-a8ba6f1008e3}">
           <p14:sldIdLst>
             <p14:sldId id="262"/>
             <p14:sldId id="263"/>
@@ -146,7 +146,7 @@
             <p14:sldId id="266"/>
           </p14:sldIdLst>
         </p14:section>
-        <p14:section name="Close" id="{bee05f08-bf40-8cf5-4f74-d1f3bb12699f}">
+        <p14:section name="Close" id="{48bc7e93-5b24-a1d8-f1ba-8ee663a52494}">
           <p14:sldIdLst>
             <p14:sldId id="267"/>
             <p14:sldId id="268"/>
@@ -941,7 +941,7 @@
           <a:p>
             <a:r>
               <a:rPr lang="en-US" dirty="0"/>
-              <a:t>Security and compliance is thirty percent of the score, so we made it checkable. On the left are the permission tiers, enforced in the domain layer, not just the screens. Approving a payment is only for a human parent with a fresh MFA proof bound to that payment and to the hash of the summary they saw. The AI has no approve, cancel, limit or config permission at all. On the right: 1678 backend and 463 frontend tests, all 24 scenarios mapped to tests, and 55 known risks listed openly. We edit one audit row behind the application's back, and Verify fails at exactly that event.</a:t>
+              <a:t>Security and compliance is thirty percent of the score, so we made it checkable. On the left are the permission tiers, enforced in the domain layer, not just the screens. Approving a payment is only for a human parent with a fresh MFA proof bound to that payment and to the hash of the summary they saw. The AI has no approve, cancel, limit or config permission at all. On the right: 1679 backend and 463 frontend tests, all 24 scenarios mapped to tests, and 55 known risks listed openly. We edit one audit row behind the application's back, and Verify fails at exactly that event.</a:t>
             </a:r>
             <a:endParaRPr lang="en-US" dirty="0"/>
           </a:p>
@@ -1733,7 +1733,7 @@
           <a:p>
             <a:r>
               <a:rPr lang="en-US" dirty="0"/>
-              <a:t>Here is what we have shown and what we have not. Shown: every number comes from one deterministic engine, with 1678 backend tests covering all 24 scenarios; only a human with a fresh MFA code can approve; change one audit row and Verify fails at that event; and the stack runs in Docker from the zipped archive. Not shown: the rates, fees and city costs are invented and not compared with real quotes, no real parent has used it, there was no outside penetration test, and most Bangladesh Bank figures are placeholders marked Not verified. Both lists are in the repository, because we would rather you hear the limits from us.</a:t>
+              <a:t>Here is what we have shown and what we have not. Shown: every number comes from one deterministic engine, with 1679 backend tests covering all 24 scenarios; only a human with a fresh MFA code can approve; change one audit row and Verify fails at that event; and the stack runs in Docker from the zipped archive. Not shown: the rates, fees and city costs are invented and not compared with real quotes, no real parent has used it, there was no outside penetration test, and most Bangladesh Bank figures are placeholders marked Not verified. Both lists are in the repository, because we would rather you hear the limits from us.</a:t>
             </a:r>
             <a:endParaRPr lang="en-US" dirty="0"/>
           </a:p>
@@ -1909,7 +1909,7 @@
           <a:p>
             <a:r>
               <a:rPr lang="en-US" dirty="0"/>
-              <a:t>The assistant has a trained part, and we measured it. A small language model reads what a parent types: the intent, and the exact words that carry an amount, a currency or a date. It never produces a number; plain code turns those words into values. On 113 messages written by hand after it was frozen, it chose the right intent 88.5% of the time against 61.1% for the old rules, and blocked 92.9% of attacks against 28.6%. The sample is small and the data is synthetic. A second small policy, trained with reinforcement learning, decides whether to ask, read back or plan: on simulated parents, wrong plans fell from 2.8% to 0.8%. Two more small models: one rewords the engine's answer, and a risk model scores each payment on amount, frequency, timeline and person. It caught 56.5% of flagged payments at 29.2% precision, and the data cannot support both above ninety. It routes; a person decides.</a:t>
+              <a:t>The assistant has a trained part, and we measured it. A small language model reads what a parent types: the intent, and the exact words that carry an amount, a currency or a date. It never produces a number; plain code turns those words into values. On 113 messages written by hand after it was frozen, it chose the right intent 88.5% of the time against 61.1% for the old rules, and blocked 92.9% of attacks against 28.6%. The sample is small and the data is synthetic. A second small policy, trained with reinforcement learning, decides whether to ask, read back or plan: on simulated parents, wrong plans fell from 2.8% to 0.8%. Two more small models: one rewords the engine's answer, and a risk model scores each payment on amount, frequency, timeline and person. Its top one percent holds 63.2% of flagged payments; random order finds 1.2%. As a plain yes or no it is modest: flagging nothing is already 99.8% accurate. It routes; a person decides.</a:t>
             </a:r>
             <a:endParaRPr lang="en-US" dirty="0"/>
           </a:p>
@@ -3336,7 +3336,7 @@
                 <a:ea typeface="+mj-lt" pitchFamily="34" charset="-122"/>
                 <a:cs typeface="+mj-lt" pitchFamily="34" charset="-120"/>
               </a:rPr>
-              <a:t>1678</a:t>
+              <a:t>1679</a:t>
             </a:r>
             <a:endParaRPr lang="en-US" sz="3200" dirty="0"/>
           </a:p>
@@ -9983,7 +9983,7 @@
                   <a:schemeClr val="tx1"/>
                 </a:solidFill>
               </a:rPr>
-              <a:t>Every number comes from one engine, in integer money. 1678 backend tests cover all 24 scenarios.</a:t>
+              <a:t>Every number comes from one engine, in integer money. 1679 backend tests cover all 24 scenarios.</a:t>
             </a:r>
             <a:endParaRPr lang="en-US" sz="1200" dirty="0"/>
           </a:p>
@@ -12148,7 +12148,7 @@
         <p:spPr>
           <a:xfrm>
             <a:off x="4983480" y="1609344"/>
-            <a:ext cx="3611880" cy="713232"/>
+            <a:ext cx="3611880" cy="685800"/>
           </a:xfrm>
           <a:prstGeom prst="rect">
             <a:avLst/>
@@ -12242,7 +12242,7 @@
         <p:spPr>
           <a:xfrm>
             <a:off x="4983480" y="2752344"/>
-            <a:ext cx="3611880" cy="713232"/>
+            <a:ext cx="3611880" cy="685800"/>
           </a:xfrm>
           <a:prstGeom prst="rect">
             <a:avLst/>
@@ -12278,11 +12278,11 @@
         <p:spPr>
           <a:xfrm>
             <a:off x="4846320" y="3566160"/>
-            <a:ext cx="3840480" cy="1051560"/>
+            <a:ext cx="3840480" cy="1371600"/>
           </a:xfrm>
           <a:prstGeom prst="roundRect">
             <a:avLst>
-              <a:gd name="adj" fmla="val 6957"/>
+              <a:gd name="adj" fmla="val 5333"/>
             </a:avLst>
           </a:prstGeom>
           <a:solidFill>
@@ -12336,7 +12336,7 @@
         <p:spPr>
           <a:xfrm>
             <a:off x="4983480" y="3895344"/>
-            <a:ext cx="3611880" cy="713232"/>
+            <a:ext cx="3611880" cy="1005840"/>
           </a:xfrm>
           <a:prstGeom prst="rect">
             <a:avLst/>
@@ -12357,7 +12357,7 @@
                   <a:schemeClr val="tx1"/>
                 </a:solidFill>
               </a:rPr>
-              <a:t>A language model rewords answers (99.8% of its figures are the engine's; a failed check shows the engine's text). A risk model scores every payment (amount, frequency, timeline, person) and warns on a high one: precision 29.2%, recall 56.5%. Every payment needs a person's authorization anyway. Synthetic data, no real users.</a:t>
+              <a:t>A language model rewords answers: 99.8% of its figures are the engine's; a failed check shows the engine's text. A risk model puts 63.2% of flagged payments in its top 1% (random: 1.2%). A person authorizes every payment. Synthetic data.</a:t>
             </a:r>
             <a:endParaRPr lang="en-US" sz="1100" dirty="0"/>
           </a:p>

--- a/submission/StudyRoute_Deck.pptx
+++ b/submission/StudyRoute_Deck.pptx
@@ -25,9 +25,10 @@
     <p:sldId id="273" r:id="rId19"/>
     <p:sldId id="274" r:id="rId20"/>
     <p:sldId id="275" r:id="rId21"/>
+    <p:sldId id="276" r:id="rId22"/>
   </p:sldIdLst>
   <p:notesMasterIdLst>
-    <p:notesMasterId r:id="rId22"/>
+    <p:notesMasterId r:id="rId23"/>
   </p:notesMasterIdLst>
   <p:sldSz cx="9144000" cy="5143500"/>
   <p:notesSz cx="5143500" cy="9144000"/>
@@ -126,19 +127,19 @@
   <p:extLst>
     <p:ext uri="{521415D9-36F7-43E2-AB2F-B90AF26B5E84}">
       <p14:sectionLst xmlns:p14="http://schemas.microsoft.com/office/powerpoint/2010/main">
-        <p14:section name="Opening" id="{7e8acb7b-e3b7-75aa-c2a4-42d2793710a5}">
+        <p14:section name="Opening" id="{2c00df88-3e40-5746-fe8d-61f65578fd80}">
           <p14:sldIdLst>
             <p14:sldId id="256"/>
             <p14:sldId id="257"/>
           </p14:sldIdLst>
         </p14:section>
-        <p14:section name="The problem" id="{036d2cbc-0424-151a-66d5-3d4c401cf6a6}">
+        <p14:section name="The problem" id="{b357920c-b3c8-9236-4b8e-942ccf9fc092}">
           <p14:sldIdLst>
             <p14:sldId id="258"/>
             <p14:sldId id="259"/>
           </p14:sldIdLst>
         </p14:section>
-        <p14:section name="The solution" id="{5d640a63-e88c-daae-a58e-e46fce3aee8a}">
+        <p14:section name="The solution" id="{bc048424-a606-87ee-ca61-a6530e80ec7e}">
           <p14:sldIdLst>
             <p14:sldId id="260"/>
             <p14:sldId id="261"/>
@@ -146,7 +147,7 @@
             <p14:sldId id="263"/>
           </p14:sldIdLst>
         </p14:section>
-        <p14:section name="Trust" id="{a9f6e914-e263-80d9-14ff-e749b0e9f912}">
+        <p14:section name="Trust" id="{a897a298-e607-8699-ff4e-7b2dcfae49a2}">
           <p14:sldIdLst>
             <p14:sldId id="264"/>
             <p14:sldId id="265"/>
@@ -157,13 +158,14 @@
             <p14:sldId id="270"/>
             <p14:sldId id="271"/>
             <p14:sldId id="272"/>
+            <p14:sldId id="273"/>
           </p14:sldIdLst>
         </p14:section>
-        <p14:section name="Close" id="{2335e5a6-5bf5-6502-2df7-ffdfc58f4117}">
+        <p14:section name="Close" id="{7cffc45c-303b-d2af-3b70-3101f6c4ad0d}">
           <p14:sldIdLst>
-            <p14:sldId id="273"/>
             <p14:sldId id="274"/>
             <p14:sldId id="275"/>
+            <p14:sldId id="276"/>
           </p14:sldIdLst>
         </p14:section>
       </p14:sectionLst>
@@ -1131,7 +1133,7 @@
           <a:p>
             <a:r>
               <a:rPr lang="en-US" dirty="0"/>
-              <a:t>What we have shown: one engine for every number, a human-only approval, an audit log that fails Verify when one row is edited, a Docker run, and attack probes defended. What we have not shown: rates and costs are invented, no real parent has used it, there was no outside penetration test, and most Bangladesh Bank figures are placeholders. Both lists are in the repository.</a:t>
+              <a:t>Every payment gets an AI risk score out of 100 from four factors: amount, frequency, timeline and person. Low means no warning and nobody waits. Medium or high shows a warning and sends the payment to a person at the bank, who answers yes, ask for more, or no, with MFA. The score never approves; the parent still authorizes.</a:t>
             </a:r>
             <a:endParaRPr lang="en-US" dirty="0"/>
           </a:p>
@@ -1219,7 +1221,7 @@
           <a:p>
             <a:r>
               <a:rPr lang="en-US" dirty="0"/>
-              <a:t>Everything we ran: 1,679 backend tests, one skipped on Windows; 463 web tests; 24 browser tests; all 24 scenarios mapped; 314 security probe records. On the right is GitHub's own page for our latest commit: all six CI jobs green. These are our own tests; a fresh clone runs 1,672 of 1,673, and no outside party has tested it.</a:t>
+              <a:t>What we have shown: one engine for every number, a human-only approval, an audit log that fails Verify when one row is edited, a Docker run, and attack probes defended. What we have not shown: rates and costs are invented, no real parent has used it, there was no outside penetration test, and most Bangladesh Bank figures are placeholders. Both lists are in the repository.</a:t>
             </a:r>
             <a:endParaRPr lang="en-US" dirty="0"/>
           </a:p>
@@ -1307,7 +1309,7 @@
           <a:p>
             <a:r>
               <a:rPr lang="en-US" dirty="0"/>
-              <a:t>Security and compliance is thirty percent of the score, so we made it checkable. Permission tiers are enforced in the domain layer, not just the screens. Only a human parent with a fresh MFA proof, bound to that payment, can approve; the AI has no approve, cancel or limit permission. On the right, the live audit log says PASS, and one edited row makes it fail.</a:t>
+              <a:t>Everything we ran: 1,679 backend tests, one skipped on Windows; 463 web tests; 24 browser tests; all 24 scenarios mapped; 314 security probe records. On the right is GitHub's own page for our latest commit: all six CI jobs green. These are our own tests; a fresh clone runs 1,672 of 1,673, and no outside party has tested it.</a:t>
             </a:r>
             <a:endParaRPr lang="en-US" dirty="0"/>
           </a:p>
@@ -1395,7 +1397,7 @@
           <a:p>
             <a:r>
               <a:rPr lang="en-US" dirty="0"/>
-              <a:t>We attacked our own application with six tools: access control, browser and XSS, planted secrets, hostile prompts, man-in-the-middle and replay, and login guessing. 314 records, all pass or informational. The man-in-the-middle test is the honest one: altered approvals, swapped MFA proofs, a stolen token and replayed webhooks were refused. But on plain HTTP a listener reads the password and token, and a stolen token can cancel a draft. We do not call that safe.</a:t>
+              <a:t>Security and compliance is thirty percent of the score, so we made it checkable. Permission tiers are enforced in the domain layer, not just the screens. Only a human parent with a fresh MFA proof, bound to that payment, can approve; the AI has no approve, cancel or limit permission. On the right, the live audit log says PASS, and one edited row makes it fail.</a:t>
             </a:r>
             <a:endParaRPr lang="en-US" dirty="0"/>
           </a:p>
@@ -1483,7 +1485,7 @@
           <a:p>
             <a:r>
               <a:rPr lang="en-US" dirty="0"/>
-              <a:t>We list our security problems because hiding them would cost more. On plain HTTP a listener reads the password and token; the public site uses HTTPS with HSTS, but nobody else has tested that. A stolen token can read payments and cancel a draft, not approve. We fixed account guessing and a telemetry leak. Old document rows stay readable, development tools carry advisories, and no outside penetration test has been done.</a:t>
+              <a:t>We attacked our own application with six tools: access control, browser and XSS, planted secrets, hostile prompts, man-in-the-middle and replay, and login guessing. 314 records, all pass or informational. The man-in-the-middle test is the honest one: altered approvals, swapped MFA proofs, a stolen token and replayed webhooks were refused. But on plain HTTP a listener reads the password and token, and a stolen token can cancel a draft. We do not call that safe.</a:t>
             </a:r>
             <a:endParaRPr lang="en-US" dirty="0"/>
           </a:p>
@@ -1571,7 +1573,7 @@
           <a:p>
             <a:r>
               <a:rPr lang="en-US" dirty="0"/>
-              <a:t>Honesty is a feature. A banner on every screen and a sandbox header on every response say this is a sandbox. Any rule not checked against an official source carries a Not verified badge and the line: indicative, confirm with your AD bank. A payment's compliance report is sealed with a hash that the browser recomputes.</a:t>
+              <a:t>We list our security problems because hiding them would cost more. On plain HTTP a listener reads the password and token; the public site uses HTTPS with HSTS, but nobody else has tested that. A stolen token can read payments and cancel a draft, not approve. We fixed account guessing and a telemetry leak. Old document rows stay readable, development tools carry advisories, and no outside penetration test has been done.</a:t>
             </a:r>
             <a:endParaRPr lang="en-US" dirty="0"/>
           </a:p>
@@ -1659,7 +1661,7 @@
           <a:p>
             <a:r>
               <a:rPr lang="en-US" dirty="0"/>
-              <a:t>Bangladesh Bank data show 881.7 million dollars sent through banks for overseas education last year, a record, up 32 percent. If a comparison took one percentage point off that volume, families would keep about 8.8 million dollars: our arithmetic, not a forecast. A partner bank could pay a small fee for pre-checked, risk-routed files. We have no partner, pilot or real users yet; these are numbers to test.</a:t>
+              <a:t>Honesty is a feature. A banner on every screen and a sandbox header on every response say this is a sandbox. Any rule not checked against an official source carries a Not verified badge and the line: indicative, confirm with your AD bank. A payment's compliance report is sealed with a hash that the browser recomputes.</a:t>
             </a:r>
             <a:endParaRPr lang="en-US" dirty="0"/>
           </a:p>
@@ -1747,7 +1749,7 @@
           <a:p>
             <a:r>
               <a:rPr lang="en-US" dirty="0"/>
-              <a:t>Back to the brief. The technical documentation, this ten-minute deck, the source on a public repository with CI green, the security self-assessment and the execution evidence are all in. The narrated demo video is optional and still pending. Everything is a sandbox with synthetic data. And for the three scoring criteria, here are the slides that show each.</a:t>
+              <a:t>Bangladesh Bank data show 881.7 million dollars sent through banks for overseas education last year, a record, up 32 percent. If a comparison took one percentage point off that volume, families would keep about 8.8 million dollars: our arithmetic, not a forecast. We have no partner, pilot or real users yet; these are numbers to test.</a:t>
             </a:r>
             <a:endParaRPr lang="en-US" dirty="0"/>
           </a:p>
@@ -1923,7 +1925,7 @@
           <a:p>
             <a:r>
               <a:rPr lang="en-US" dirty="0"/>
-              <a:t>Next: replace placeholder rules with official Bangladesh Bank sources, partner with an authorised dealer bank for real quotes and KYC, and move the escrow from our simulated chain to a permissioned one. Credit building is in the brief and not built, and we would rather say so. To close: the engine calculates, the AI explains, the human approves, and every step is logged. Thank you.</a:t>
+              <a:t>Back to the brief. The technical documentation, this ten-minute deck, the source on a public repository with CI green, the security self-assessment and the execution evidence are all in. The narrated demo video is optional and still pending. Everything is a sandbox with synthetic data. And for the three scoring criteria, here are the slides that show each.</a:t>
             </a:r>
             <a:endParaRPr lang="en-US" dirty="0"/>
           </a:p>
@@ -1947,6 +1949,94 @@
             <a:fld id="{F7021451-1387-4CA6-816F-3879F97B5CBC}" type="slidenum">
               <a:rPr lang="en-US"/>
               <a:t>20</a:t>
+            </a:fld>
+            <a:endParaRPr lang="en-US"/>
+          </a:p>
+        </p:txBody>
+      </p:sp>
+    </p:spTree>
+    <p:extLst>
+      <p:ext uri="{BB962C8B-B14F-4D97-AF65-F5344CB8AC3E}">
+        <p14:creationId xmlns:p14="http://schemas.microsoft.com/office/powerpoint/2010/main" val="1024086991"/>
+      </p:ext>
+    </p:extLst>
+  </p:cSld>
+  <p:clrMapOvr>
+    <a:masterClrMapping/>
+  </p:clrMapOvr>
+</p:notes>
+</file>
+
+<file path=ppt/notesSlides/notesSlide21.xml><?xml version="1.0" encoding="utf-8"?>
+<p:notes xmlns:a="http://schemas.openxmlformats.org/drawingml/2006/main" xmlns:r="http://schemas.openxmlformats.org/officeDocument/2006/relationships" xmlns:p="http://schemas.openxmlformats.org/presentationml/2006/main">
+  <p:cSld>
+    <p:spTree>
+      <p:nvGrpSpPr>
+        <p:cNvPr id="1" name=""/>
+        <p:cNvGrpSpPr/>
+        <p:nvPr/>
+      </p:nvGrpSpPr>
+      <p:grpSpPr>
+        <a:xfrm>
+          <a:off x="0" y="0"/>
+          <a:ext cx="0" cy="0"/>
+          <a:chOff x="0" y="0"/>
+          <a:chExt cx="0" cy="0"/>
+        </a:xfrm>
+      </p:grpSpPr>
+      <p:sp>
+        <p:nvSpPr>
+          <p:cNvPr id="2" name="Slide Image Placeholder 1"/>
+          <p:cNvSpPr>
+            <a:spLocks noGrp="1" noRot="1" noChangeAspect="1"/>
+          </p:cNvSpPr>
+          <p:nvPr>
+            <p:ph type="sldImg"/>
+          </p:nvPr>
+        </p:nvSpPr>
+        <p:spPr/>
+      </p:sp>
+      <p:sp>
+        <p:nvSpPr>
+          <p:cNvPr id="3" name="Notes Placeholder 2"/>
+          <p:cNvSpPr>
+            <a:spLocks noGrp="1"/>
+          </p:cNvSpPr>
+          <p:nvPr>
+            <p:ph type="body" idx="1"/>
+          </p:nvPr>
+        </p:nvSpPr>
+        <p:spPr/>
+        <p:txBody>
+          <a:bodyPr/>
+          <a:lstStyle/>
+          <a:p>
+            <a:r>
+              <a:rPr lang="en-US" dirty="0"/>
+              <a:t>Next: replace placeholder rules with official Bangladesh Bank sources, partner with an authorised dealer bank for real quotes and KYC, and move the escrow from our simulated chain to a permissioned one. Credit building is in the brief and not built, and we would rather say so. To close: the engine calculates, the AI explains, the human approves, and every step is logged. Thank you.</a:t>
+            </a:r>
+            <a:endParaRPr lang="en-US" dirty="0"/>
+          </a:p>
+        </p:txBody>
+      </p:sp>
+      <p:sp>
+        <p:nvSpPr>
+          <p:cNvPr id="4" name="Slide Number Placeholder 3"/>
+          <p:cNvSpPr>
+            <a:spLocks noGrp="1"/>
+          </p:cNvSpPr>
+          <p:nvPr>
+            <p:ph type="sldNum" sz="quarter" idx="10"/>
+          </p:nvPr>
+        </p:nvSpPr>
+        <p:spPr/>
+        <p:txBody>
+          <a:bodyPr/>
+          <a:lstStyle/>
+          <a:p>
+            <a:fld id="{F7021451-1387-4CA6-816F-3879F97B5CBC}" type="slidenum">
+              <a:rPr lang="en-US"/>
+              <a:t>21</a:t>
             </a:fld>
             <a:endParaRPr lang="en-US"/>
           </a:p>
@@ -2363,7 +2453,7 @@
           <a:p>
             <a:r>
               <a:rPr lang="en-US" dirty="0"/>
-              <a:t>Every number comes from a deterministic engine: integer money, no floats. In our synthetic example Provider B is first at 1.58 percent. Provider C looks cheap but is quoted as SHA, so the university would receive 35 pounds less. Provider A is third at 2.16. The same engine drives the smart send plan, the cheapest provider that arrives in time, and a stress test if the taka weakens.</a:t>
+              <a:t>Every number comes from a deterministic engine: integer money, no floats. In our synthetic example Provider B is first at 1.58 percent. Provider C looks cheap but is quoted as SHA, so the university would receive 35 pounds less. Provider A is third at 2.16. The same engine drives the send plan and the currency stress test.</a:t>
             </a:r>
             <a:endParaRPr lang="en-US" dirty="0"/>
           </a:p>
@@ -2539,7 +2629,7 @@
           <a:p>
             <a:r>
               <a:rPr lang="en-US" dirty="0"/>
-              <a:t>The assistant follows a fixed pipeline: a policy check, engine facts, masking of personal data, an optional model, a number guard, a tool guard and the audit log. The model is the only step that is not deterministic, and any figure it invents is rejected, then a template answers. So the AI can only propose: it cannot approve, submit or cancel, and it works with no API key.</a:t>
+              <a:t>The assistant follows a fixed pipeline: policy check, engine facts, masking of personal data, an optional model, a number guard, a tool guard and the audit log. Any figure the model invents is rejected, then a template answers. So the AI can only propose: it cannot approve, submit or cancel, and it works with no API key.</a:t>
             </a:r>
             <a:endParaRPr lang="en-US" dirty="0"/>
           </a:p>
@@ -6199,7 +6289,7 @@
                 <a:ea typeface="+mj-lt" pitchFamily="34" charset="-122"/>
                 <a:cs typeface="+mj-lt" pitchFamily="34" charset="-120"/>
               </a:rPr>
-              <a:t>Proven, and not proven yet</a:t>
+              <a:t>Risk score, human decision</a:t>
             </a:r>
             <a:endParaRPr lang="en-US" sz="3600" dirty="0"/>
           </a:p>
@@ -6213,12 +6303,200 @@
         </p:nvSpPr>
         <p:spPr>
           <a:xfrm>
-            <a:off x="457200" y="1234440"/>
-            <a:ext cx="4023360" cy="3154680"/>
+            <a:off x="384048" y="1161288"/>
+            <a:ext cx="5266944" cy="1874520"/>
           </a:xfrm>
           <a:prstGeom prst="roundRect">
             <a:avLst>
-              <a:gd name="adj" fmla="val 2319"/>
+              <a:gd name="adj" fmla="val 2927"/>
+            </a:avLst>
+          </a:prstGeom>
+          <a:solidFill>
+            <a:schemeClr val="bg1"/>
+          </a:solidFill>
+          <a:ln w="9525">
+            <a:solidFill>
+              <a:schemeClr val="accent5"/>
+            </a:solidFill>
+            <a:prstDash val="solid"/>
+          </a:ln>
+          <a:effectLst>
+            <a:outerShdw sx="100000" sy="100000" kx="0" ky="0" algn="bl" rotWithShape="0" blurRad="101600" dist="25400" dir="5400000">
+              <a:srgbClr val="0B2545">
+                <a:alpha val="18000"/>
+              </a:srgbClr>
+            </a:outerShdw>
+          </a:effectLst>
+        </p:spPr>
+      </p:sp>
+      <p:pic>
+        <p:nvPicPr>
+          <p:cNvPr id="4" name="content-12-image-2" descr="The parent's view: AI risk score 99 out of 100 with the four factors">    </p:cNvPr>
+          <p:cNvPicPr>
+            <a:picLocks noChangeAspect="1"/>
+          </p:cNvPicPr>
+          <p:nvPr/>
+        </p:nvPicPr>
+        <p:blipFill>
+          <a:blip r:embed="rId1"/>
+          <a:stretch>
+            <a:fillRect/>
+          </a:stretch>
+        </p:blipFill>
+        <p:spPr>
+          <a:xfrm>
+            <a:off x="457200" y="1234440"/>
+            <a:ext cx="5120640" cy="1728216"/>
+          </a:xfrm>
+          <a:prstGeom prst="rect">
+            <a:avLst/>
+          </a:prstGeom>
+        </p:spPr>
+      </p:pic>
+      <p:sp>
+        <p:nvSpPr>
+          <p:cNvPr id="5" name="content-12-text-3"/>
+          <p:cNvSpPr txBox="1"/>
+          <p:nvPr/>
+        </p:nvSpPr>
+        <p:spPr>
+          <a:xfrm>
+            <a:off x="457200" y="3072384"/>
+            <a:ext cx="5120640" cy="274320"/>
+          </a:xfrm>
+          <a:prstGeom prst="rect">
+            <a:avLst/>
+          </a:prstGeom>
+          <a:noFill/>
+          <a:ln/>
+        </p:spPr>
+        <p:txBody>
+          <a:bodyPr wrap="square" lIns="0" tIns="0" rIns="0" bIns="0" rtlCol="0" anchor="t"/>
+          <a:lstStyle/>
+          <a:p>
+            <a:pPr algn="l" indent="0" marL="0">
+              <a:buNone/>
+            </a:pPr>
+            <a:r>
+              <a:rPr lang="en-US" sz="1000" dirty="0">
+                <a:solidFill>
+                  <a:schemeClr val="tx2"/>
+                </a:solidFill>
+              </a:rPr>
+              <a:t>The parent's view: score 99 of 100, medium risk, the four factors and a warning.</a:t>
+            </a:r>
+            <a:endParaRPr lang="en-US" sz="1000" dirty="0"/>
+          </a:p>
+        </p:txBody>
+      </p:sp>
+      <p:sp>
+        <p:nvSpPr>
+          <p:cNvPr id="6" name="content-12-rect-4"/>
+          <p:cNvSpPr/>
+          <p:nvPr/>
+        </p:nvSpPr>
+        <p:spPr>
+          <a:xfrm>
+            <a:off x="384048" y="3328416"/>
+            <a:ext cx="2615184" cy="1453896"/>
+          </a:xfrm>
+          <a:prstGeom prst="roundRect">
+            <a:avLst>
+              <a:gd name="adj" fmla="val 3774"/>
+            </a:avLst>
+          </a:prstGeom>
+          <a:solidFill>
+            <a:schemeClr val="bg1"/>
+          </a:solidFill>
+          <a:ln w="9525">
+            <a:solidFill>
+              <a:schemeClr val="accent5"/>
+            </a:solidFill>
+            <a:prstDash val="solid"/>
+          </a:ln>
+          <a:effectLst>
+            <a:outerShdw sx="100000" sy="100000" kx="0" ky="0" algn="bl" rotWithShape="0" blurRad="101600" dist="25400" dir="5400000">
+              <a:srgbClr val="0B2545">
+                <a:alpha val="18000"/>
+              </a:srgbClr>
+            </a:outerShdw>
+          </a:effectLst>
+        </p:spPr>
+      </p:sp>
+      <p:pic>
+        <p:nvPicPr>
+          <p:cNvPr id="7" name="content-12-image-5" descr="The bank reviewer's decision: yes, ask for more or no, signed with MFA">    </p:cNvPr>
+          <p:cNvPicPr>
+            <a:picLocks noChangeAspect="1"/>
+          </p:cNvPicPr>
+          <p:nvPr/>
+        </p:nvPicPr>
+        <p:blipFill>
+          <a:blip r:embed="rId2"/>
+          <a:stretch>
+            <a:fillRect/>
+          </a:stretch>
+        </p:blipFill>
+        <p:spPr>
+          <a:xfrm>
+            <a:off x="457200" y="3401568"/>
+            <a:ext cx="2468880" cy="1307592"/>
+          </a:xfrm>
+          <a:prstGeom prst="rect">
+            <a:avLst/>
+          </a:prstGeom>
+        </p:spPr>
+      </p:pic>
+      <p:sp>
+        <p:nvSpPr>
+          <p:cNvPr id="8" name="content-12-text-6"/>
+          <p:cNvSpPr txBox="1"/>
+          <p:nvPr/>
+        </p:nvSpPr>
+        <p:spPr>
+          <a:xfrm>
+            <a:off x="3154680" y="3474720"/>
+            <a:ext cx="2423160" cy="1188720"/>
+          </a:xfrm>
+          <a:prstGeom prst="rect">
+            <a:avLst/>
+          </a:prstGeom>
+          <a:noFill/>
+          <a:ln/>
+        </p:spPr>
+        <p:txBody>
+          <a:bodyPr wrap="square" lIns="0" tIns="0" rIns="0" bIns="0" rtlCol="0" anchor="t"/>
+          <a:lstStyle/>
+          <a:p>
+            <a:pPr algn="l" indent="0" marL="0">
+              <a:buNone/>
+            </a:pPr>
+            <a:r>
+              <a:rPr lang="en-US" sz="1000" dirty="0">
+                <a:solidFill>
+                  <a:schemeClr val="tx2"/>
+                </a:solidFill>
+              </a:rPr>
+              <a:t>The bank reviewer's view: three answers, signed with a fresh MFA code. The AI cannot choose for them.</a:t>
+            </a:r>
+            <a:endParaRPr lang="en-US" sz="1000" dirty="0"/>
+          </a:p>
+        </p:txBody>
+      </p:sp>
+      <p:sp>
+        <p:nvSpPr>
+          <p:cNvPr id="9" name="content-12-rect-7"/>
+          <p:cNvSpPr/>
+          <p:nvPr/>
+        </p:nvSpPr>
+        <p:spPr>
+          <a:xfrm>
+            <a:off x="5852160" y="1234440"/>
+            <a:ext cx="2834640" cy="813816"/>
+          </a:xfrm>
+          <a:prstGeom prst="roundRect">
+            <a:avLst>
+              <a:gd name="adj" fmla="val 8989"/>
             </a:avLst>
           </a:prstGeom>
           <a:solidFill>
@@ -6229,14 +6507,14 @@
       </p:sp>
       <p:sp>
         <p:nvSpPr>
-          <p:cNvPr id="4" name="content-12-rect-2"/>
+          <p:cNvPr id="10" name="content-12-rect-8"/>
           <p:cNvSpPr/>
           <p:nvPr/>
         </p:nvSpPr>
         <p:spPr>
           <a:xfrm>
-            <a:off x="640080" y="1371600"/>
-            <a:ext cx="109728" cy="365760"/>
+            <a:off x="5852160" y="1234440"/>
+            <a:ext cx="64008" cy="813816"/>
           </a:xfrm>
           <a:prstGeom prst="rect">
             <a:avLst/>
@@ -6249,14 +6527,14 @@
       </p:sp>
       <p:sp>
         <p:nvSpPr>
-          <p:cNvPr id="5" name="content-12-text-3"/>
-          <p:cNvSpPr txBox="1"/>
-          <p:nvPr/>
-        </p:nvSpPr>
-        <p:spPr>
-          <a:xfrm>
-            <a:off x="841248" y="1325880"/>
-            <a:ext cx="3474720" cy="457200"/>
+          <p:cNvPr id="11" name="content-12-text-9"/>
+          <p:cNvSpPr txBox="1"/>
+          <p:nvPr/>
+        </p:nvSpPr>
+        <p:spPr>
+          <a:xfrm>
+            <a:off x="6016752" y="1271016"/>
+            <a:ext cx="2606040" cy="237744"/>
           </a:xfrm>
           <a:prstGeom prst="rect">
             <a:avLst/>
@@ -6272,27 +6550,27 @@
               <a:buNone/>
             </a:pPr>
             <a:r>
-              <a:rPr lang="en-US" sz="1800" b="1" dirty="0">
-                <a:solidFill>
-                  <a:schemeClr val="accent1"/>
-                </a:solidFill>
-              </a:rPr>
-              <a:t>Proven by tests and logs</a:t>
-            </a:r>
-            <a:endParaRPr lang="en-US" sz="1800" dirty="0"/>
-          </a:p>
-        </p:txBody>
-      </p:sp>
-      <p:sp>
-        <p:nvSpPr>
-          <p:cNvPr id="6" name="content-12-text-4"/>
-          <p:cNvSpPr txBox="1"/>
-          <p:nvPr/>
-        </p:nvSpPr>
-        <p:spPr>
-          <a:xfrm>
-            <a:off x="640080" y="1847088"/>
-            <a:ext cx="3657600" cy="2487168"/>
+              <a:rPr lang="en-US" sz="1150" b="1" dirty="0">
+                <a:solidFill>
+                  <a:schemeClr val="tx1"/>
+                </a:solidFill>
+              </a:rPr>
+              <a:t>1  Score</a:t>
+            </a:r>
+            <a:endParaRPr lang="en-US" sz="1150" dirty="0"/>
+          </a:p>
+        </p:txBody>
+      </p:sp>
+      <p:sp>
+        <p:nvSpPr>
+          <p:cNvPr id="12" name="content-12-text-10"/>
+          <p:cNvSpPr txBox="1"/>
+          <p:nvPr/>
+        </p:nvSpPr>
+        <p:spPr>
+          <a:xfrm>
+            <a:off x="6016752" y="1508760"/>
+            <a:ext cx="2606040" cy="530352"/>
           </a:xfrm>
           <a:prstGeom prst="rect">
             <a:avLst/>
@@ -6304,93 +6582,35 @@
           <a:bodyPr wrap="square" lIns="0" tIns="0" rIns="0" bIns="0" rtlCol="0" anchor="t"/>
           <a:lstStyle/>
           <a:p>
-            <a:pPr algn="l" marL="342900" indent="-342900">
-              <a:spcAft>
-                <a:spcPts val="400"/>
-              </a:spcAft>
-              <a:buSzPct val="100000"/>
-              <a:buChar char="•"/>
-            </a:pPr>
-            <a:r>
-              <a:rPr lang="en-US" sz="1100" dirty="0">
-                <a:solidFill>
-                  <a:schemeClr val="tx1"/>
-                </a:solidFill>
-              </a:rPr>
-              <a:t>Every number comes from one engine, in integer money. All 24 blueprint scenarios are mapped to tests (counts on the next slides).</a:t>
-            </a:r>
-            <a:endParaRPr lang="en-US" sz="1100" dirty="0"/>
-          </a:p>
-          <a:p>
-            <a:pPr algn="l" marL="342900" indent="-342900">
-              <a:spcAft>
-                <a:spcPts val="400"/>
-              </a:spcAft>
-              <a:buSzPct val="100000"/>
-              <a:buChar char="•"/>
-            </a:pPr>
-            <a:r>
-              <a:rPr lang="en-US" sz="1100" dirty="0">
-                <a:solidFill>
-                  <a:schemeClr val="tx1"/>
-                </a:solidFill>
-              </a:rPr>
-              <a:t>Only a human with a fresh MFA code can approve. The AI has no such permission, and a test enforces the table.</a:t>
-            </a:r>
-            <a:endParaRPr lang="en-US" sz="1100" dirty="0"/>
-          </a:p>
-          <a:p>
-            <a:pPr algn="l" marL="342900" indent="-342900">
-              <a:spcAft>
-                <a:spcPts val="400"/>
-              </a:spcAft>
-              <a:buSzPct val="100000"/>
-              <a:buChar char="•"/>
-            </a:pPr>
-            <a:r>
-              <a:rPr lang="en-US" sz="1100" dirty="0">
-                <a:solidFill>
-                  <a:schemeClr val="tx1"/>
-                </a:solidFill>
-              </a:rPr>
-              <a:t>Edit one audit row and Verify fails at that event. Audit-only rewrites are detected; both logs share SQLite, so a DB owner can rewrite both.</a:t>
-            </a:r>
-            <a:endParaRPr lang="en-US" sz="1100" dirty="0"/>
-          </a:p>
-          <a:p>
-            <a:pPr algn="l" marL="342900" indent="-342900">
-              <a:spcAft>
-                <a:spcPts val="400"/>
-              </a:spcAft>
-              <a:buSzPct val="100000"/>
-              <a:buChar char="•"/>
-            </a:pPr>
-            <a:r>
-              <a:rPr lang="en-US" sz="1100" dirty="0">
-                <a:solidFill>
-                  <a:schemeClr val="tx1"/>
-                </a:solidFill>
-              </a:rPr>
-              <a:t>The Docker stack passed its demo, 48 browser checks and the hardened overlay on 18 Oct; the attack probes defended 146 of 146.</a:t>
-            </a:r>
-            <a:endParaRPr lang="en-US" sz="1100" dirty="0"/>
-          </a:p>
-        </p:txBody>
-      </p:sp>
-      <p:sp>
-        <p:nvSpPr>
-          <p:cNvPr id="7" name="content-12-rect-5"/>
+            <a:pPr algn="l" indent="0" marL="0">
+              <a:buNone/>
+            </a:pPr>
+            <a:r>
+              <a:rPr lang="en-US" sz="900" dirty="0">
+                <a:solidFill>
+                  <a:schemeClr val="tx2"/>
+                </a:solidFill>
+              </a:rPr>
+              <a:t>A small neural network rates each payment 0 to 100 from four factors: amount, frequency, timeline and person.</a:t>
+            </a:r>
+            <a:endParaRPr lang="en-US" sz="900" dirty="0"/>
+          </a:p>
+        </p:txBody>
+      </p:sp>
+      <p:sp>
+        <p:nvSpPr>
+          <p:cNvPr id="13" name="content-12-rect-11"/>
           <p:cNvSpPr/>
           <p:nvPr/>
         </p:nvSpPr>
         <p:spPr>
           <a:xfrm>
-            <a:off x="4663440" y="1234440"/>
-            <a:ext cx="4023360" cy="3154680"/>
+            <a:off x="5852160" y="2121408"/>
+            <a:ext cx="2834640" cy="813816"/>
           </a:xfrm>
           <a:prstGeom prst="roundRect">
             <a:avLst>
-              <a:gd name="adj" fmla="val 2319"/>
+              <a:gd name="adj" fmla="val 8989"/>
             </a:avLst>
           </a:prstGeom>
           <a:solidFill>
@@ -6401,14 +6621,242 @@
       </p:sp>
       <p:sp>
         <p:nvSpPr>
-          <p:cNvPr id="8" name="content-12-rect-6"/>
+          <p:cNvPr id="14" name="content-12-rect-12"/>
           <p:cNvSpPr/>
           <p:nvPr/>
         </p:nvSpPr>
         <p:spPr>
           <a:xfrm>
-            <a:off x="4846320" y="1371600"/>
-            <a:ext cx="109728" cy="365760"/>
+            <a:off x="5852160" y="2121408"/>
+            <a:ext cx="64008" cy="813816"/>
+          </a:xfrm>
+          <a:prstGeom prst="rect">
+            <a:avLst/>
+          </a:prstGeom>
+          <a:solidFill>
+            <a:schemeClr val="accent1"/>
+          </a:solidFill>
+          <a:ln/>
+        </p:spPr>
+      </p:sp>
+      <p:sp>
+        <p:nvSpPr>
+          <p:cNvPr id="15" name="content-12-text-13"/>
+          <p:cNvSpPr txBox="1"/>
+          <p:nvPr/>
+        </p:nvSpPr>
+        <p:spPr>
+          <a:xfrm>
+            <a:off x="6016752" y="2157984"/>
+            <a:ext cx="2606040" cy="237744"/>
+          </a:xfrm>
+          <a:prstGeom prst="rect">
+            <a:avLst/>
+          </a:prstGeom>
+          <a:noFill/>
+          <a:ln/>
+        </p:spPr>
+        <p:txBody>
+          <a:bodyPr wrap="square" lIns="0" tIns="0" rIns="0" bIns="0" rtlCol="0" anchor="ctr"/>
+          <a:lstStyle/>
+          <a:p>
+            <a:pPr algn="l" indent="0" marL="0">
+              <a:buNone/>
+            </a:pPr>
+            <a:r>
+              <a:rPr lang="en-US" sz="1150" b="1" dirty="0">
+                <a:solidFill>
+                  <a:schemeClr val="tx1"/>
+                </a:solidFill>
+              </a:rPr>
+              <a:t>2  Route</a:t>
+            </a:r>
+            <a:endParaRPr lang="en-US" sz="1150" dirty="0"/>
+          </a:p>
+        </p:txBody>
+      </p:sp>
+      <p:sp>
+        <p:nvSpPr>
+          <p:cNvPr id="16" name="content-12-text-14"/>
+          <p:cNvSpPr txBox="1"/>
+          <p:nvPr/>
+        </p:nvSpPr>
+        <p:spPr>
+          <a:xfrm>
+            <a:off x="6016752" y="2395728"/>
+            <a:ext cx="2606040" cy="530352"/>
+          </a:xfrm>
+          <a:prstGeom prst="rect">
+            <a:avLst/>
+          </a:prstGeom>
+          <a:noFill/>
+          <a:ln/>
+        </p:spPr>
+        <p:txBody>
+          <a:bodyPr wrap="square" lIns="0" tIns="0" rIns="0" bIns="0" rtlCol="0" anchor="t"/>
+          <a:lstStyle/>
+          <a:p>
+            <a:pPr algn="l" indent="0" marL="0">
+              <a:buNone/>
+            </a:pPr>
+            <a:r>
+              <a:rPr lang="en-US" sz="900" dirty="0">
+                <a:solidFill>
+                  <a:schemeClr val="tx2"/>
+                </a:solidFill>
+              </a:rPr>
+              <a:t>Low: no warning, nobody waits. Medium or high: a warning, and a person at the bank looks.</a:t>
+            </a:r>
+            <a:endParaRPr lang="en-US" sz="900" dirty="0"/>
+          </a:p>
+        </p:txBody>
+      </p:sp>
+      <p:sp>
+        <p:nvSpPr>
+          <p:cNvPr id="17" name="content-12-rect-15"/>
+          <p:cNvSpPr/>
+          <p:nvPr/>
+        </p:nvSpPr>
+        <p:spPr>
+          <a:xfrm>
+            <a:off x="5852160" y="3008376"/>
+            <a:ext cx="2834640" cy="813816"/>
+          </a:xfrm>
+          <a:prstGeom prst="roundRect">
+            <a:avLst>
+              <a:gd name="adj" fmla="val 8989"/>
+            </a:avLst>
+          </a:prstGeom>
+          <a:solidFill>
+            <a:schemeClr val="bg2"/>
+          </a:solidFill>
+          <a:ln/>
+        </p:spPr>
+      </p:sp>
+      <p:sp>
+        <p:nvSpPr>
+          <p:cNvPr id="18" name="content-12-rect-16"/>
+          <p:cNvSpPr/>
+          <p:nvPr/>
+        </p:nvSpPr>
+        <p:spPr>
+          <a:xfrm>
+            <a:off x="5852160" y="3008376"/>
+            <a:ext cx="64008" cy="813816"/>
+          </a:xfrm>
+          <a:prstGeom prst="rect">
+            <a:avLst/>
+          </a:prstGeom>
+          <a:solidFill>
+            <a:schemeClr val="accent1"/>
+          </a:solidFill>
+          <a:ln/>
+        </p:spPr>
+      </p:sp>
+      <p:sp>
+        <p:nvSpPr>
+          <p:cNvPr id="19" name="content-12-text-17"/>
+          <p:cNvSpPr txBox="1"/>
+          <p:nvPr/>
+        </p:nvSpPr>
+        <p:spPr>
+          <a:xfrm>
+            <a:off x="6016752" y="3044952"/>
+            <a:ext cx="2606040" cy="237744"/>
+          </a:xfrm>
+          <a:prstGeom prst="rect">
+            <a:avLst/>
+          </a:prstGeom>
+          <a:noFill/>
+          <a:ln/>
+        </p:spPr>
+        <p:txBody>
+          <a:bodyPr wrap="square" lIns="0" tIns="0" rIns="0" bIns="0" rtlCol="0" anchor="ctr"/>
+          <a:lstStyle/>
+          <a:p>
+            <a:pPr algn="l" indent="0" marL="0">
+              <a:buNone/>
+            </a:pPr>
+            <a:r>
+              <a:rPr lang="en-US" sz="1150" b="1" dirty="0">
+                <a:solidFill>
+                  <a:schemeClr val="tx1"/>
+                </a:solidFill>
+              </a:rPr>
+              <a:t>3  Decide</a:t>
+            </a:r>
+            <a:endParaRPr lang="en-US" sz="1150" dirty="0"/>
+          </a:p>
+        </p:txBody>
+      </p:sp>
+      <p:sp>
+        <p:nvSpPr>
+          <p:cNvPr id="20" name="content-12-text-18"/>
+          <p:cNvSpPr txBox="1"/>
+          <p:nvPr/>
+        </p:nvSpPr>
+        <p:spPr>
+          <a:xfrm>
+            <a:off x="6016752" y="3282696"/>
+            <a:ext cx="2606040" cy="530352"/>
+          </a:xfrm>
+          <a:prstGeom prst="rect">
+            <a:avLst/>
+          </a:prstGeom>
+          <a:noFill/>
+          <a:ln/>
+        </p:spPr>
+        <p:txBody>
+          <a:bodyPr wrap="square" lIns="0" tIns="0" rIns="0" bIns="0" rtlCol="0" anchor="t"/>
+          <a:lstStyle/>
+          <a:p>
+            <a:pPr algn="l" indent="0" marL="0">
+              <a:buNone/>
+            </a:pPr>
+            <a:r>
+              <a:rPr lang="en-US" sz="900" dirty="0">
+                <a:solidFill>
+                  <a:schemeClr val="tx2"/>
+                </a:solidFill>
+              </a:rPr>
+              <a:t>The reviewer answers yes, ask for more or no, signed with a fresh MFA code. The parent still authorizes.</a:t>
+            </a:r>
+            <a:endParaRPr lang="en-US" sz="900" dirty="0"/>
+          </a:p>
+        </p:txBody>
+      </p:sp>
+      <p:sp>
+        <p:nvSpPr>
+          <p:cNvPr id="21" name="content-12-rect-19"/>
+          <p:cNvSpPr/>
+          <p:nvPr/>
+        </p:nvSpPr>
+        <p:spPr>
+          <a:xfrm>
+            <a:off x="5852160" y="3895344"/>
+            <a:ext cx="2834640" cy="813816"/>
+          </a:xfrm>
+          <a:prstGeom prst="roundRect">
+            <a:avLst>
+              <a:gd name="adj" fmla="val 8989"/>
+            </a:avLst>
+          </a:prstGeom>
+          <a:solidFill>
+            <a:schemeClr val="bg2"/>
+          </a:solidFill>
+          <a:ln/>
+        </p:spPr>
+      </p:sp>
+      <p:sp>
+        <p:nvSpPr>
+          <p:cNvPr id="22" name="content-12-rect-20"/>
+          <p:cNvSpPr/>
+          <p:nvPr/>
+        </p:nvSpPr>
+        <p:spPr>
+          <a:xfrm>
+            <a:off x="5852160" y="3895344"/>
+            <a:ext cx="64008" cy="813816"/>
           </a:xfrm>
           <a:prstGeom prst="rect">
             <a:avLst/>
@@ -6421,14 +6869,14 @@
       </p:sp>
       <p:sp>
         <p:nvSpPr>
-          <p:cNvPr id="9" name="content-12-text-7"/>
-          <p:cNvSpPr txBox="1"/>
-          <p:nvPr/>
-        </p:nvSpPr>
-        <p:spPr>
-          <a:xfrm>
-            <a:off x="5047488" y="1325880"/>
-            <a:ext cx="3474720" cy="457200"/>
+          <p:cNvPr id="23" name="content-12-text-21"/>
+          <p:cNvSpPr txBox="1"/>
+          <p:nvPr/>
+        </p:nvSpPr>
+        <p:spPr>
+          <a:xfrm>
+            <a:off x="6016752" y="3931920"/>
+            <a:ext cx="2606040" cy="237744"/>
           </a:xfrm>
           <a:prstGeom prst="rect">
             <a:avLst/>
@@ -6444,27 +6892,27 @@
               <a:buNone/>
             </a:pPr>
             <a:r>
-              <a:rPr lang="en-US" sz="1800" b="1" dirty="0">
-                <a:solidFill>
-                  <a:schemeClr val="accent3"/>
-                </a:solidFill>
-              </a:rPr>
-              <a:t>Not proven, and we say so</a:t>
-            </a:r>
-            <a:endParaRPr lang="en-US" sz="1800" dirty="0"/>
-          </a:p>
-        </p:txBody>
-      </p:sp>
-      <p:sp>
-        <p:nvSpPr>
-          <p:cNvPr id="10" name="content-12-text-8"/>
-          <p:cNvSpPr txBox="1"/>
-          <p:nvPr/>
-        </p:nvSpPr>
-        <p:spPr>
-          <a:xfrm>
-            <a:off x="4846320" y="1920240"/>
-            <a:ext cx="3657600" cy="2377440"/>
+              <a:rPr lang="en-US" sz="1150" b="1" dirty="0">
+                <a:solidFill>
+                  <a:schemeClr val="tx1"/>
+                </a:solidFill>
+              </a:rPr>
+              <a:t>4  Limits</a:t>
+            </a:r>
+            <a:endParaRPr lang="en-US" sz="1150" dirty="0"/>
+          </a:p>
+        </p:txBody>
+      </p:sp>
+      <p:sp>
+        <p:nvSpPr>
+          <p:cNvPr id="24" name="content-12-text-22"/>
+          <p:cNvSpPr txBox="1"/>
+          <p:nvPr/>
+        </p:nvSpPr>
+        <p:spPr>
+          <a:xfrm>
+            <a:off x="6016752" y="4169664"/>
+            <a:ext cx="2606040" cy="530352"/>
           </a:xfrm>
           <a:prstGeom prst="rect">
             <a:avLst/>
@@ -6476,89 +6924,31 @@
           <a:bodyPr wrap="square" lIns="0" tIns="0" rIns="0" bIns="0" rtlCol="0" anchor="t"/>
           <a:lstStyle/>
           <a:p>
-            <a:pPr algn="l" marL="342900" indent="-342900">
-              <a:spcAft>
-                <a:spcPts val="600"/>
-              </a:spcAft>
-              <a:buSzPct val="100000"/>
-              <a:buChar char="•"/>
-            </a:pPr>
-            <a:r>
-              <a:rPr lang="en-US" sz="1200" dirty="0">
-                <a:solidFill>
-                  <a:schemeClr val="tx1"/>
-                </a:solidFill>
-              </a:rPr>
-              <a:t>Rates, fees and city costs are invented. We have not compared them with real quotes yet.</a:t>
-            </a:r>
-            <a:endParaRPr lang="en-US" sz="1200" dirty="0"/>
-          </a:p>
-          <a:p>
-            <a:pPr algn="l" marL="342900" indent="-342900">
-              <a:spcAft>
-                <a:spcPts val="600"/>
-              </a:spcAft>
-              <a:buSzPct val="100000"/>
-              <a:buChar char="•"/>
-            </a:pPr>
-            <a:r>
-              <a:rPr lang="en-US" sz="1200" dirty="0">
-                <a:solidFill>
-                  <a:schemeClr val="tx1"/>
-                </a:solidFill>
-              </a:rPr>
-              <a:t>No real parent has used it. The trained models saw synthetic data.</a:t>
-            </a:r>
-            <a:endParaRPr lang="en-US" sz="1200" dirty="0"/>
-          </a:p>
-          <a:p>
-            <a:pPr algn="l" marL="342900" indent="-342900">
-              <a:spcAft>
-                <a:spcPts val="600"/>
-              </a:spcAft>
-              <a:buSzPct val="100000"/>
-              <a:buChar char="•"/>
-            </a:pPr>
-            <a:r>
-              <a:rPr lang="en-US" sz="1200" dirty="0">
-                <a:solidFill>
-                  <a:schemeClr val="tx1"/>
-                </a:solidFill>
-              </a:rPr>
-              <a:t>Local code review and regression tests; no external penetration test.</a:t>
-            </a:r>
-            <a:endParaRPr lang="en-US" sz="1200" dirty="0"/>
-          </a:p>
-          <a:p>
-            <a:pPr algn="l" marL="342900" indent="-342900">
-              <a:spcAft>
-                <a:spcPts val="600"/>
-              </a:spcAft>
-              <a:buSzPct val="100000"/>
-              <a:buChar char="•"/>
-            </a:pPr>
-            <a:r>
-              <a:rPr lang="en-US" sz="1200" dirty="0">
-                <a:solidFill>
-                  <a:schemeClr val="tx1"/>
-                </a:solidFill>
-              </a:rPr>
-              <a:t>Most Bangladesh Bank figures are placeholders marked Not verified; four rules were read in the official circular.</a:t>
-            </a:r>
-            <a:endParaRPr lang="en-US" sz="1200" dirty="0"/>
-          </a:p>
-        </p:txBody>
-      </p:sp>
-      <p:sp>
-        <p:nvSpPr>
-          <p:cNvPr id="11" name="content-12-text-9"/>
-          <p:cNvSpPr txBox="1"/>
-          <p:nvPr/>
-        </p:nvSpPr>
-        <p:spPr>
-          <a:xfrm>
-            <a:off x="457200" y="4526280"/>
-            <a:ext cx="8229600" cy="320040"/>
+            <a:pPr algn="l" indent="0" marL="0">
+              <a:buNone/>
+            </a:pPr>
+            <a:r>
+              <a:rPr lang="en-US" sz="900" dirty="0">
+                <a:solidFill>
+                  <a:schemeClr val="tx2"/>
+                </a:solidFill>
+              </a:rPr>
+              <a:t>It never clears, declines or approves. Its top 1% holds 63.2% of flagged payments (random: 1.2%). Trained on public synthetic data.</a:t>
+            </a:r>
+            <a:endParaRPr lang="en-US" sz="900" dirty="0"/>
+          </a:p>
+        </p:txBody>
+      </p:sp>
+      <p:sp>
+        <p:nvSpPr>
+          <p:cNvPr id="25" name="content-12-text-23"/>
+          <p:cNvSpPr txBox="1"/>
+          <p:nvPr/>
+        </p:nvSpPr>
+        <p:spPr>
+          <a:xfrm>
+            <a:off x="457200" y="4846320"/>
+            <a:ext cx="8229600" cy="228600"/>
           </a:xfrm>
           <a:prstGeom prst="rect">
             <a:avLst/>
@@ -6574,50 +6964,14 @@
               <a:buNone/>
             </a:pPr>
             <a:r>
-              <a:rPr lang="en-US" sz="1100" dirty="0">
+              <a:rPr lang="en-US" sz="900" dirty="0">
                 <a:solidFill>
                   <a:schemeClr val="tx2"/>
                 </a:solidFill>
               </a:rPr>
-              <a:t>Both lists are in the repository: docs/OPEN_QUESTIONS.md and docs/SECURITY_SELF_ASSESSMENT.md</a:t>
-            </a:r>
-            <a:endParaRPr lang="en-US" sz="1100" dirty="0"/>
-          </a:p>
-        </p:txBody>
-      </p:sp>
-      <p:sp>
-        <p:nvSpPr>
-          <p:cNvPr id="12" name="content-12-text-10"/>
-          <p:cNvSpPr txBox="1"/>
-          <p:nvPr/>
-        </p:nvSpPr>
-        <p:spPr>
-          <a:xfrm>
-            <a:off x="457200" y="4864608"/>
-            <a:ext cx="8229600" cy="201168"/>
-          </a:xfrm>
-          <a:prstGeom prst="rect">
-            <a:avLst/>
-          </a:prstGeom>
-          <a:noFill/>
-          <a:ln/>
-        </p:spPr>
-        <p:txBody>
-          <a:bodyPr wrap="square" lIns="0" tIns="0" rIns="0" bIns="0" rtlCol="0" anchor="t"/>
-          <a:lstStyle/>
-          <a:p>
-            <a:pPr algn="l" indent="0" marL="0">
-              <a:buNone/>
-            </a:pPr>
-            <a:r>
-              <a:rPr lang="en-US" sz="1000" dirty="0">
-                <a:solidFill>
-                  <a:schemeClr val="tx2"/>
-                </a:solidFill>
-              </a:rPr>
-              <a:t>Raw logs and reproduction commands: submission/evidence/, docs/TEST_CASES.md.</a:t>
-            </a:r>
-            <a:endParaRPr lang="en-US" sz="1000" dirty="0"/>
+              <a:t>Local sandbox screenshots, synthetic data. Indicative. Confirm with your AD bank.</a:t>
+            </a:r>
+            <a:endParaRPr lang="en-US" sz="900" dirty="0"/>
           </a:p>
         </p:txBody>
       </p:sp>
@@ -6681,7 +7035,7 @@
                 <a:ea typeface="+mj-lt" pitchFamily="34" charset="-122"/>
                 <a:cs typeface="+mj-lt" pitchFamily="34" charset="-120"/>
               </a:rPr>
-              <a:t>Every test we ran</a:t>
+              <a:t>Proven, and not proven yet</a:t>
             </a:r>
             <a:endParaRPr lang="en-US" sz="3600" dirty="0"/>
           </a:p>
@@ -6696,11 +7050,11 @@
         <p:spPr>
           <a:xfrm>
             <a:off x="457200" y="1234440"/>
-            <a:ext cx="2103120" cy="960120"/>
+            <a:ext cx="4023360" cy="3154680"/>
           </a:xfrm>
           <a:prstGeom prst="roundRect">
             <a:avLst>
-              <a:gd name="adj" fmla="val 7619"/>
+              <a:gd name="adj" fmla="val 2319"/>
             </a:avLst>
           </a:prstGeom>
           <a:solidFill>
@@ -6711,14 +7065,34 @@
       </p:sp>
       <p:sp>
         <p:nvSpPr>
-          <p:cNvPr id="4" name="content-13-text-2"/>
-          <p:cNvSpPr txBox="1"/>
-          <p:nvPr/>
-        </p:nvSpPr>
-        <p:spPr>
-          <a:xfrm>
-            <a:off x="566928" y="1261872"/>
-            <a:ext cx="1883664" cy="457200"/>
+          <p:cNvPr id="4" name="content-13-rect-2"/>
+          <p:cNvSpPr/>
+          <p:nvPr/>
+        </p:nvSpPr>
+        <p:spPr>
+          <a:xfrm>
+            <a:off x="640080" y="1371600"/>
+            <a:ext cx="109728" cy="365760"/>
+          </a:xfrm>
+          <a:prstGeom prst="rect">
+            <a:avLst/>
+          </a:prstGeom>
+          <a:solidFill>
+            <a:schemeClr val="accent1"/>
+          </a:solidFill>
+          <a:ln/>
+        </p:spPr>
+      </p:sp>
+      <p:sp>
+        <p:nvSpPr>
+          <p:cNvPr id="5" name="content-13-text-3"/>
+          <p:cNvSpPr txBox="1"/>
+          <p:nvPr/>
+        </p:nvSpPr>
+        <p:spPr>
+          <a:xfrm>
+            <a:off x="841248" y="1325880"/>
+            <a:ext cx="3474720" cy="457200"/>
           </a:xfrm>
           <a:prstGeom prst="rect">
             <a:avLst/>
@@ -6734,30 +7108,27 @@
               <a:buNone/>
             </a:pPr>
             <a:r>
-              <a:rPr lang="en-US" sz="2400" b="1" dirty="0">
+              <a:rPr lang="en-US" sz="1800" b="1" dirty="0">
                 <a:solidFill>
                   <a:schemeClr val="accent1"/>
                 </a:solidFill>
-                <a:latin typeface="+mj-lt" pitchFamily="34" charset="0"/>
-                <a:ea typeface="+mj-lt" pitchFamily="34" charset="-122"/>
-                <a:cs typeface="+mj-lt" pitchFamily="34" charset="-120"/>
-              </a:rPr>
-              <a:t>1,679</a:t>
-            </a:r>
-            <a:endParaRPr lang="en-US" sz="2400" dirty="0"/>
-          </a:p>
-        </p:txBody>
-      </p:sp>
-      <p:sp>
-        <p:nvSpPr>
-          <p:cNvPr id="5" name="content-13-text-3"/>
-          <p:cNvSpPr txBox="1"/>
-          <p:nvPr/>
-        </p:nvSpPr>
-        <p:spPr>
-          <a:xfrm>
-            <a:off x="566928" y="1737360"/>
-            <a:ext cx="1883664" cy="420624"/>
+              </a:rPr>
+              <a:t>Proven by tests and logs</a:t>
+            </a:r>
+            <a:endParaRPr lang="en-US" sz="1800" dirty="0"/>
+          </a:p>
+        </p:txBody>
+      </p:sp>
+      <p:sp>
+        <p:nvSpPr>
+          <p:cNvPr id="6" name="content-13-text-4"/>
+          <p:cNvSpPr txBox="1"/>
+          <p:nvPr/>
+        </p:nvSpPr>
+        <p:spPr>
+          <a:xfrm>
+            <a:off x="640080" y="1847088"/>
+            <a:ext cx="3657600" cy="2487168"/>
           </a:xfrm>
           <a:prstGeom prst="rect">
             <a:avLst/>
@@ -6769,35 +7140,93 @@
           <a:bodyPr wrap="square" lIns="0" tIns="0" rIns="0" bIns="0" rtlCol="0" anchor="t"/>
           <a:lstStyle/>
           <a:p>
-            <a:pPr algn="l" indent="0" marL="0">
-              <a:buNone/>
-            </a:pPr>
-            <a:r>
-              <a:rPr lang="en-US" sz="1050" dirty="0">
-                <a:solidFill>
-                  <a:schemeClr val="tx2"/>
-                </a:solidFill>
-              </a:rPr>
-              <a:t>backend tests (1,678 pass, 1 skipped)</a:t>
-            </a:r>
-            <a:endParaRPr lang="en-US" sz="1050" dirty="0"/>
-          </a:p>
-        </p:txBody>
-      </p:sp>
-      <p:sp>
-        <p:nvSpPr>
-          <p:cNvPr id="6" name="content-13-rect-4"/>
+            <a:pPr algn="l" marL="342900" indent="-342900">
+              <a:spcAft>
+                <a:spcPts val="400"/>
+              </a:spcAft>
+              <a:buSzPct val="100000"/>
+              <a:buChar char="•"/>
+            </a:pPr>
+            <a:r>
+              <a:rPr lang="en-US" sz="1100" dirty="0">
+                <a:solidFill>
+                  <a:schemeClr val="tx1"/>
+                </a:solidFill>
+              </a:rPr>
+              <a:t>Every number comes from one engine, in integer money. All 24 blueprint scenarios are mapped to tests (counts on the next slides).</a:t>
+            </a:r>
+            <a:endParaRPr lang="en-US" sz="1100" dirty="0"/>
+          </a:p>
+          <a:p>
+            <a:pPr algn="l" marL="342900" indent="-342900">
+              <a:spcAft>
+                <a:spcPts val="400"/>
+              </a:spcAft>
+              <a:buSzPct val="100000"/>
+              <a:buChar char="•"/>
+            </a:pPr>
+            <a:r>
+              <a:rPr lang="en-US" sz="1100" dirty="0">
+                <a:solidFill>
+                  <a:schemeClr val="tx1"/>
+                </a:solidFill>
+              </a:rPr>
+              <a:t>Only a human with a fresh MFA code can approve. The AI has no such permission, and a test enforces the table.</a:t>
+            </a:r>
+            <a:endParaRPr lang="en-US" sz="1100" dirty="0"/>
+          </a:p>
+          <a:p>
+            <a:pPr algn="l" marL="342900" indent="-342900">
+              <a:spcAft>
+                <a:spcPts val="400"/>
+              </a:spcAft>
+              <a:buSzPct val="100000"/>
+              <a:buChar char="•"/>
+            </a:pPr>
+            <a:r>
+              <a:rPr lang="en-US" sz="1100" dirty="0">
+                <a:solidFill>
+                  <a:schemeClr val="tx1"/>
+                </a:solidFill>
+              </a:rPr>
+              <a:t>Edit one audit row and Verify fails at that event. Audit-only rewrites are detected; both logs share SQLite, so a DB owner can rewrite both.</a:t>
+            </a:r>
+            <a:endParaRPr lang="en-US" sz="1100" dirty="0"/>
+          </a:p>
+          <a:p>
+            <a:pPr algn="l" marL="342900" indent="-342900">
+              <a:spcAft>
+                <a:spcPts val="400"/>
+              </a:spcAft>
+              <a:buSzPct val="100000"/>
+              <a:buChar char="•"/>
+            </a:pPr>
+            <a:r>
+              <a:rPr lang="en-US" sz="1100" dirty="0">
+                <a:solidFill>
+                  <a:schemeClr val="tx1"/>
+                </a:solidFill>
+              </a:rPr>
+              <a:t>The Docker stack passed its demo, 48 browser checks and the hardened overlay on 18 Oct; the attack probes defended 146 of 146.</a:t>
+            </a:r>
+            <a:endParaRPr lang="en-US" sz="1100" dirty="0"/>
+          </a:p>
+        </p:txBody>
+      </p:sp>
+      <p:sp>
+        <p:nvSpPr>
+          <p:cNvPr id="7" name="content-13-rect-5"/>
           <p:cNvSpPr/>
           <p:nvPr/>
         </p:nvSpPr>
         <p:spPr>
           <a:xfrm>
-            <a:off x="2651760" y="1234440"/>
-            <a:ext cx="2103120" cy="960120"/>
+            <a:off x="4663440" y="1234440"/>
+            <a:ext cx="4023360" cy="3154680"/>
           </a:xfrm>
           <a:prstGeom prst="roundRect">
             <a:avLst>
-              <a:gd name="adj" fmla="val 7619"/>
+              <a:gd name="adj" fmla="val 2319"/>
             </a:avLst>
           </a:prstGeom>
           <a:solidFill>
@@ -6808,14 +7237,34 @@
       </p:sp>
       <p:sp>
         <p:nvSpPr>
-          <p:cNvPr id="7" name="content-13-text-5"/>
-          <p:cNvSpPr txBox="1"/>
-          <p:nvPr/>
-        </p:nvSpPr>
-        <p:spPr>
-          <a:xfrm>
-            <a:off x="2761488" y="1261872"/>
-            <a:ext cx="1883664" cy="457200"/>
+          <p:cNvPr id="8" name="content-13-rect-6"/>
+          <p:cNvSpPr/>
+          <p:nvPr/>
+        </p:nvSpPr>
+        <p:spPr>
+          <a:xfrm>
+            <a:off x="4846320" y="1371600"/>
+            <a:ext cx="109728" cy="365760"/>
+          </a:xfrm>
+          <a:prstGeom prst="rect">
+            <a:avLst/>
+          </a:prstGeom>
+          <a:solidFill>
+            <a:schemeClr val="accent3"/>
+          </a:solidFill>
+          <a:ln/>
+        </p:spPr>
+      </p:sp>
+      <p:sp>
+        <p:nvSpPr>
+          <p:cNvPr id="9" name="content-13-text-7"/>
+          <p:cNvSpPr txBox="1"/>
+          <p:nvPr/>
+        </p:nvSpPr>
+        <p:spPr>
+          <a:xfrm>
+            <a:off x="5047488" y="1325880"/>
+            <a:ext cx="3474720" cy="457200"/>
           </a:xfrm>
           <a:prstGeom prst="rect">
             <a:avLst/>
@@ -6831,30 +7280,27 @@
               <a:buNone/>
             </a:pPr>
             <a:r>
-              <a:rPr lang="en-US" sz="2400" b="1" dirty="0">
-                <a:solidFill>
-                  <a:schemeClr val="accent1"/>
-                </a:solidFill>
-                <a:latin typeface="+mj-lt" pitchFamily="34" charset="0"/>
-                <a:ea typeface="+mj-lt" pitchFamily="34" charset="-122"/>
-                <a:cs typeface="+mj-lt" pitchFamily="34" charset="-120"/>
-              </a:rPr>
-              <a:t>463</a:t>
-            </a:r>
-            <a:endParaRPr lang="en-US" sz="2400" dirty="0"/>
-          </a:p>
-        </p:txBody>
-      </p:sp>
-      <p:sp>
-        <p:nvSpPr>
-          <p:cNvPr id="8" name="content-13-text-6"/>
-          <p:cNvSpPr txBox="1"/>
-          <p:nvPr/>
-        </p:nvSpPr>
-        <p:spPr>
-          <a:xfrm>
-            <a:off x="2761488" y="1737360"/>
-            <a:ext cx="1883664" cy="420624"/>
+              <a:rPr lang="en-US" sz="1800" b="1" dirty="0">
+                <a:solidFill>
+                  <a:schemeClr val="accent3"/>
+                </a:solidFill>
+              </a:rPr>
+              <a:t>Not proven, and we say so</a:t>
+            </a:r>
+            <a:endParaRPr lang="en-US" sz="1800" dirty="0"/>
+          </a:p>
+        </p:txBody>
+      </p:sp>
+      <p:sp>
+        <p:nvSpPr>
+          <p:cNvPr id="10" name="content-13-text-8"/>
+          <p:cNvSpPr txBox="1"/>
+          <p:nvPr/>
+        </p:nvSpPr>
+        <p:spPr>
+          <a:xfrm>
+            <a:off x="4846320" y="1920240"/>
+            <a:ext cx="3657600" cy="2377440"/>
           </a:xfrm>
           <a:prstGeom prst="rect">
             <a:avLst/>
@@ -6866,92 +7312,125 @@
           <a:bodyPr wrap="square" lIns="0" tIns="0" rIns="0" bIns="0" rtlCol="0" anchor="t"/>
           <a:lstStyle/>
           <a:p>
-            <a:pPr algn="l" indent="0" marL="0">
-              <a:buNone/>
-            </a:pPr>
-            <a:r>
-              <a:rPr lang="en-US" sz="1050" dirty="0">
+            <a:pPr algn="l" marL="342900" indent="-342900">
+              <a:spcAft>
+                <a:spcPts val="600"/>
+              </a:spcAft>
+              <a:buSzPct val="100000"/>
+              <a:buChar char="•"/>
+            </a:pPr>
+            <a:r>
+              <a:rPr lang="en-US" sz="1200" dirty="0">
+                <a:solidFill>
+                  <a:schemeClr val="tx1"/>
+                </a:solidFill>
+              </a:rPr>
+              <a:t>Rates, fees and city costs are invented. We have not compared them with real quotes yet.</a:t>
+            </a:r>
+            <a:endParaRPr lang="en-US" sz="1200" dirty="0"/>
+          </a:p>
+          <a:p>
+            <a:pPr algn="l" marL="342900" indent="-342900">
+              <a:spcAft>
+                <a:spcPts val="600"/>
+              </a:spcAft>
+              <a:buSzPct val="100000"/>
+              <a:buChar char="•"/>
+            </a:pPr>
+            <a:r>
+              <a:rPr lang="en-US" sz="1200" dirty="0">
+                <a:solidFill>
+                  <a:schemeClr val="tx1"/>
+                </a:solidFill>
+              </a:rPr>
+              <a:t>No real parent has used it. The trained models saw synthetic data.</a:t>
+            </a:r>
+            <a:endParaRPr lang="en-US" sz="1200" dirty="0"/>
+          </a:p>
+          <a:p>
+            <a:pPr algn="l" marL="342900" indent="-342900">
+              <a:spcAft>
+                <a:spcPts val="600"/>
+              </a:spcAft>
+              <a:buSzPct val="100000"/>
+              <a:buChar char="•"/>
+            </a:pPr>
+            <a:r>
+              <a:rPr lang="en-US" sz="1200" dirty="0">
+                <a:solidFill>
+                  <a:schemeClr val="tx1"/>
+                </a:solidFill>
+              </a:rPr>
+              <a:t>Local code review and regression tests; no external penetration test.</a:t>
+            </a:r>
+            <a:endParaRPr lang="en-US" sz="1200" dirty="0"/>
+          </a:p>
+          <a:p>
+            <a:pPr algn="l" marL="342900" indent="-342900">
+              <a:spcAft>
+                <a:spcPts val="600"/>
+              </a:spcAft>
+              <a:buSzPct val="100000"/>
+              <a:buChar char="•"/>
+            </a:pPr>
+            <a:r>
+              <a:rPr lang="en-US" sz="1200" dirty="0">
+                <a:solidFill>
+                  <a:schemeClr val="tx1"/>
+                </a:solidFill>
+              </a:rPr>
+              <a:t>Most Bangladesh Bank figures are placeholders marked Not verified; four rules were read in the official circular.</a:t>
+            </a:r>
+            <a:endParaRPr lang="en-US" sz="1200" dirty="0"/>
+          </a:p>
+        </p:txBody>
+      </p:sp>
+      <p:sp>
+        <p:nvSpPr>
+          <p:cNvPr id="11" name="content-13-text-9"/>
+          <p:cNvSpPr txBox="1"/>
+          <p:nvPr/>
+        </p:nvSpPr>
+        <p:spPr>
+          <a:xfrm>
+            <a:off x="457200" y="4526280"/>
+            <a:ext cx="8229600" cy="320040"/>
+          </a:xfrm>
+          <a:prstGeom prst="rect">
+            <a:avLst/>
+          </a:prstGeom>
+          <a:noFill/>
+          <a:ln/>
+        </p:spPr>
+        <p:txBody>
+          <a:bodyPr wrap="square" lIns="0" tIns="0" rIns="0" bIns="0" rtlCol="0" anchor="t"/>
+          <a:lstStyle/>
+          <a:p>
+            <a:pPr algn="l" indent="0" marL="0">
+              <a:buNone/>
+            </a:pPr>
+            <a:r>
+              <a:rPr lang="en-US" sz="1100" dirty="0">
                 <a:solidFill>
                   <a:schemeClr val="tx2"/>
                 </a:solidFill>
               </a:rPr>
-              <a:t>web tests</a:t>
-            </a:r>
-            <a:endParaRPr lang="en-US" sz="1050" dirty="0"/>
-          </a:p>
-        </p:txBody>
-      </p:sp>
-      <p:sp>
-        <p:nvSpPr>
-          <p:cNvPr id="9" name="content-13-rect-7"/>
-          <p:cNvSpPr/>
-          <p:nvPr/>
-        </p:nvSpPr>
-        <p:spPr>
-          <a:xfrm>
-            <a:off x="457200" y="2286000"/>
-            <a:ext cx="2103120" cy="960120"/>
-          </a:xfrm>
-          <a:prstGeom prst="roundRect">
-            <a:avLst>
-              <a:gd name="adj" fmla="val 7619"/>
-            </a:avLst>
-          </a:prstGeom>
-          <a:solidFill>
-            <a:schemeClr val="bg2"/>
-          </a:solidFill>
-          <a:ln/>
-        </p:spPr>
-      </p:sp>
-      <p:sp>
-        <p:nvSpPr>
-          <p:cNvPr id="10" name="content-13-text-8"/>
-          <p:cNvSpPr txBox="1"/>
-          <p:nvPr/>
-        </p:nvSpPr>
-        <p:spPr>
-          <a:xfrm>
-            <a:off x="566928" y="2313432"/>
-            <a:ext cx="1883664" cy="457200"/>
-          </a:xfrm>
-          <a:prstGeom prst="rect">
-            <a:avLst/>
-          </a:prstGeom>
-          <a:noFill/>
-          <a:ln/>
-        </p:spPr>
-        <p:txBody>
-          <a:bodyPr wrap="square" lIns="0" tIns="0" rIns="0" bIns="0" rtlCol="0" anchor="ctr"/>
-          <a:lstStyle/>
-          <a:p>
-            <a:pPr algn="l" indent="0" marL="0">
-              <a:buNone/>
-            </a:pPr>
-            <a:r>
-              <a:rPr lang="en-US" sz="2400" b="1" dirty="0">
-                <a:solidFill>
-                  <a:schemeClr val="accent1"/>
-                </a:solidFill>
-                <a:latin typeface="+mj-lt" pitchFamily="34" charset="0"/>
-                <a:ea typeface="+mj-lt" pitchFamily="34" charset="-122"/>
-                <a:cs typeface="+mj-lt" pitchFamily="34" charset="-120"/>
-              </a:rPr>
-              <a:t>24</a:t>
-            </a:r>
-            <a:endParaRPr lang="en-US" sz="2400" dirty="0"/>
-          </a:p>
-        </p:txBody>
-      </p:sp>
-      <p:sp>
-        <p:nvSpPr>
-          <p:cNvPr id="11" name="content-13-text-9"/>
-          <p:cNvSpPr txBox="1"/>
-          <p:nvPr/>
-        </p:nvSpPr>
-        <p:spPr>
-          <a:xfrm>
-            <a:off x="566928" y="2788920"/>
-            <a:ext cx="1883664" cy="420624"/>
+              <a:t>Both lists are in the repository: docs/OPEN_QUESTIONS.md and docs/SECURITY_SELF_ASSESSMENT.md</a:t>
+            </a:r>
+            <a:endParaRPr lang="en-US" sz="1100" dirty="0"/>
+          </a:p>
+        </p:txBody>
+      </p:sp>
+      <p:sp>
+        <p:nvSpPr>
+          <p:cNvPr id="12" name="content-13-text-10"/>
+          <p:cNvSpPr txBox="1"/>
+          <p:nvPr/>
+        </p:nvSpPr>
+        <p:spPr>
+          <a:xfrm>
+            <a:off x="457200" y="4864608"/>
+            <a:ext cx="8229600" cy="201168"/>
           </a:xfrm>
           <a:prstGeom prst="rect">
             <a:avLst/>
@@ -6967,435 +7446,14 @@
               <a:buNone/>
             </a:pPr>
             <a:r>
-              <a:rPr lang="en-US" sz="1050" dirty="0">
+              <a:rPr lang="en-US" sz="1000" dirty="0">
                 <a:solidFill>
                   <a:schemeClr val="tx2"/>
                 </a:solidFill>
               </a:rPr>
-              <a:t>browser tests</a:t>
-            </a:r>
-            <a:endParaRPr lang="en-US" sz="1050" dirty="0"/>
-          </a:p>
-        </p:txBody>
-      </p:sp>
-      <p:sp>
-        <p:nvSpPr>
-          <p:cNvPr id="12" name="content-13-rect-10"/>
-          <p:cNvSpPr/>
-          <p:nvPr/>
-        </p:nvSpPr>
-        <p:spPr>
-          <a:xfrm>
-            <a:off x="2651760" y="2286000"/>
-            <a:ext cx="2103120" cy="960120"/>
-          </a:xfrm>
-          <a:prstGeom prst="roundRect">
-            <a:avLst>
-              <a:gd name="adj" fmla="val 7619"/>
-            </a:avLst>
-          </a:prstGeom>
-          <a:solidFill>
-            <a:schemeClr val="bg2"/>
-          </a:solidFill>
-          <a:ln/>
-        </p:spPr>
-      </p:sp>
-      <p:sp>
-        <p:nvSpPr>
-          <p:cNvPr id="13" name="content-13-text-11"/>
-          <p:cNvSpPr txBox="1"/>
-          <p:nvPr/>
-        </p:nvSpPr>
-        <p:spPr>
-          <a:xfrm>
-            <a:off x="2761488" y="2313432"/>
-            <a:ext cx="1883664" cy="457200"/>
-          </a:xfrm>
-          <a:prstGeom prst="rect">
-            <a:avLst/>
-          </a:prstGeom>
-          <a:noFill/>
-          <a:ln/>
-        </p:spPr>
-        <p:txBody>
-          <a:bodyPr wrap="square" lIns="0" tIns="0" rIns="0" bIns="0" rtlCol="0" anchor="ctr"/>
-          <a:lstStyle/>
-          <a:p>
-            <a:pPr algn="l" indent="0" marL="0">
-              <a:buNone/>
-            </a:pPr>
-            <a:r>
-              <a:rPr lang="en-US" sz="2400" b="1" dirty="0">
-                <a:solidFill>
-                  <a:schemeClr val="accent1"/>
-                </a:solidFill>
-                <a:latin typeface="+mj-lt" pitchFamily="34" charset="0"/>
-                <a:ea typeface="+mj-lt" pitchFamily="34" charset="-122"/>
-                <a:cs typeface="+mj-lt" pitchFamily="34" charset="-120"/>
-              </a:rPr>
-              <a:t>314</a:t>
-            </a:r>
-            <a:endParaRPr lang="en-US" sz="2400" dirty="0"/>
-          </a:p>
-        </p:txBody>
-      </p:sp>
-      <p:sp>
-        <p:nvSpPr>
-          <p:cNvPr id="14" name="content-13-text-12"/>
-          <p:cNvSpPr txBox="1"/>
-          <p:nvPr/>
-        </p:nvSpPr>
-        <p:spPr>
-          <a:xfrm>
-            <a:off x="2761488" y="2788920"/>
-            <a:ext cx="1883664" cy="420624"/>
-          </a:xfrm>
-          <a:prstGeom prst="rect">
-            <a:avLst/>
-          </a:prstGeom>
-          <a:noFill/>
-          <a:ln/>
-        </p:spPr>
-        <p:txBody>
-          <a:bodyPr wrap="square" lIns="0" tIns="0" rIns="0" bIns="0" rtlCol="0" anchor="t"/>
-          <a:lstStyle/>
-          <a:p>
-            <a:pPr algn="l" indent="0" marL="0">
-              <a:buNone/>
-            </a:pPr>
-            <a:r>
-              <a:rPr lang="en-US" sz="1050" dirty="0">
-                <a:solidFill>
-                  <a:schemeClr val="tx2"/>
-                </a:solidFill>
-              </a:rPr>
-              <a:t>security probe records (308 PASS, 6 INFO)</a:t>
-            </a:r>
-            <a:endParaRPr lang="en-US" sz="1050" dirty="0"/>
-          </a:p>
-        </p:txBody>
-      </p:sp>
-      <p:sp>
-        <p:nvSpPr>
-          <p:cNvPr id="15" name="content-13-rect-13"/>
-          <p:cNvSpPr/>
-          <p:nvPr/>
-        </p:nvSpPr>
-        <p:spPr>
-          <a:xfrm>
-            <a:off x="457200" y="3337560"/>
-            <a:ext cx="2103120" cy="960120"/>
-          </a:xfrm>
-          <a:prstGeom prst="roundRect">
-            <a:avLst>
-              <a:gd name="adj" fmla="val 7619"/>
-            </a:avLst>
-          </a:prstGeom>
-          <a:solidFill>
-            <a:schemeClr val="bg2"/>
-          </a:solidFill>
-          <a:ln/>
-        </p:spPr>
-      </p:sp>
-      <p:sp>
-        <p:nvSpPr>
-          <p:cNvPr id="16" name="content-13-text-14"/>
-          <p:cNvSpPr txBox="1"/>
-          <p:nvPr/>
-        </p:nvSpPr>
-        <p:spPr>
-          <a:xfrm>
-            <a:off x="566928" y="3364992"/>
-            <a:ext cx="1883664" cy="457200"/>
-          </a:xfrm>
-          <a:prstGeom prst="rect">
-            <a:avLst/>
-          </a:prstGeom>
-          <a:noFill/>
-          <a:ln/>
-        </p:spPr>
-        <p:txBody>
-          <a:bodyPr wrap="square" lIns="0" tIns="0" rIns="0" bIns="0" rtlCol="0" anchor="ctr"/>
-          <a:lstStyle/>
-          <a:p>
-            <a:pPr algn="l" indent="0" marL="0">
-              <a:buNone/>
-            </a:pPr>
-            <a:r>
-              <a:rPr lang="en-US" sz="2400" b="1" dirty="0">
-                <a:solidFill>
-                  <a:schemeClr val="accent1"/>
-                </a:solidFill>
-                <a:latin typeface="+mj-lt" pitchFamily="34" charset="0"/>
-                <a:ea typeface="+mj-lt" pitchFamily="34" charset="-122"/>
-                <a:cs typeface="+mj-lt" pitchFamily="34" charset="-120"/>
-              </a:rPr>
-              <a:t>24 of 24</a:t>
-            </a:r>
-            <a:endParaRPr lang="en-US" sz="2400" dirty="0"/>
-          </a:p>
-        </p:txBody>
-      </p:sp>
-      <p:sp>
-        <p:nvSpPr>
-          <p:cNvPr id="17" name="content-13-text-15"/>
-          <p:cNvSpPr txBox="1"/>
-          <p:nvPr/>
-        </p:nvSpPr>
-        <p:spPr>
-          <a:xfrm>
-            <a:off x="566928" y="3840480"/>
-            <a:ext cx="1883664" cy="420624"/>
-          </a:xfrm>
-          <a:prstGeom prst="rect">
-            <a:avLst/>
-          </a:prstGeom>
-          <a:noFill/>
-          <a:ln/>
-        </p:spPr>
-        <p:txBody>
-          <a:bodyPr wrap="square" lIns="0" tIns="0" rIns="0" bIns="0" rtlCol="0" anchor="t"/>
-          <a:lstStyle/>
-          <a:p>
-            <a:pPr algn="l" indent="0" marL="0">
-              <a:buNone/>
-            </a:pPr>
-            <a:r>
-              <a:rPr lang="en-US" sz="1050" dirty="0">
-                <a:solidFill>
-                  <a:schemeClr val="tx2"/>
-                </a:solidFill>
-              </a:rPr>
-              <a:t>blueprint scenarios mapped to tests</a:t>
-            </a:r>
-            <a:endParaRPr lang="en-US" sz="1050" dirty="0"/>
-          </a:p>
-        </p:txBody>
-      </p:sp>
-      <p:sp>
-        <p:nvSpPr>
-          <p:cNvPr id="18" name="content-13-rect-16"/>
-          <p:cNvSpPr/>
-          <p:nvPr/>
-        </p:nvSpPr>
-        <p:spPr>
-          <a:xfrm>
-            <a:off x="2651760" y="3337560"/>
-            <a:ext cx="2103120" cy="960120"/>
-          </a:xfrm>
-          <a:prstGeom prst="roundRect">
-            <a:avLst>
-              <a:gd name="adj" fmla="val 7619"/>
-            </a:avLst>
-          </a:prstGeom>
-          <a:solidFill>
-            <a:schemeClr val="bg2"/>
-          </a:solidFill>
-          <a:ln/>
-        </p:spPr>
-      </p:sp>
-      <p:sp>
-        <p:nvSpPr>
-          <p:cNvPr id="19" name="content-13-text-17"/>
-          <p:cNvSpPr txBox="1"/>
-          <p:nvPr/>
-        </p:nvSpPr>
-        <p:spPr>
-          <a:xfrm>
-            <a:off x="2761488" y="3364992"/>
-            <a:ext cx="1883664" cy="457200"/>
-          </a:xfrm>
-          <a:prstGeom prst="rect">
-            <a:avLst/>
-          </a:prstGeom>
-          <a:noFill/>
-          <a:ln/>
-        </p:spPr>
-        <p:txBody>
-          <a:bodyPr wrap="square" lIns="0" tIns="0" rIns="0" bIns="0" rtlCol="0" anchor="ctr"/>
-          <a:lstStyle/>
-          <a:p>
-            <a:pPr algn="l" indent="0" marL="0">
-              <a:buNone/>
-            </a:pPr>
-            <a:r>
-              <a:rPr lang="en-US" sz="2400" b="1" dirty="0">
-                <a:solidFill>
-                  <a:schemeClr val="accent1"/>
-                </a:solidFill>
-                <a:latin typeface="+mj-lt" pitchFamily="34" charset="0"/>
-                <a:ea typeface="+mj-lt" pitchFamily="34" charset="-122"/>
-                <a:cs typeface="+mj-lt" pitchFamily="34" charset="-120"/>
-              </a:rPr>
-              <a:t>6 of 6</a:t>
-            </a:r>
-            <a:endParaRPr lang="en-US" sz="2400" dirty="0"/>
-          </a:p>
-        </p:txBody>
-      </p:sp>
-      <p:sp>
-        <p:nvSpPr>
-          <p:cNvPr id="20" name="content-13-text-18"/>
-          <p:cNvSpPr txBox="1"/>
-          <p:nvPr/>
-        </p:nvSpPr>
-        <p:spPr>
-          <a:xfrm>
-            <a:off x="2761488" y="3840480"/>
-            <a:ext cx="1883664" cy="420624"/>
-          </a:xfrm>
-          <a:prstGeom prst="rect">
-            <a:avLst/>
-          </a:prstGeom>
-          <a:noFill/>
-          <a:ln/>
-        </p:spPr>
-        <p:txBody>
-          <a:bodyPr wrap="square" lIns="0" tIns="0" rIns="0" bIns="0" rtlCol="0" anchor="t"/>
-          <a:lstStyle/>
-          <a:p>
-            <a:pPr algn="l" indent="0" marL="0">
-              <a:buNone/>
-            </a:pPr>
-            <a:r>
-              <a:rPr lang="en-US" sz="1050" dirty="0">
-                <a:solidFill>
-                  <a:schemeClr val="tx2"/>
-                </a:solidFill>
-              </a:rPr>
-              <a:t>CI jobs green on GitHub</a:t>
-            </a:r>
-            <a:endParaRPr lang="en-US" sz="1050" dirty="0"/>
-          </a:p>
-        </p:txBody>
-      </p:sp>
-      <p:sp>
-        <p:nvSpPr>
-          <p:cNvPr id="21" name="content-13-rect-19"/>
-          <p:cNvSpPr/>
-          <p:nvPr/>
-        </p:nvSpPr>
-        <p:spPr>
-          <a:xfrm>
-            <a:off x="5001768" y="1161288"/>
-            <a:ext cx="3758184" cy="2403729"/>
-          </a:xfrm>
-          <a:prstGeom prst="roundRect">
-            <a:avLst>
-              <a:gd name="adj" fmla="val 2282"/>
-            </a:avLst>
-          </a:prstGeom>
-          <a:solidFill>
-            <a:schemeClr val="bg1"/>
-          </a:solidFill>
-          <a:ln w="9525">
-            <a:solidFill>
-              <a:schemeClr val="accent5"/>
-            </a:solidFill>
-            <a:prstDash val="solid"/>
-          </a:ln>
-          <a:effectLst>
-            <a:outerShdw sx="100000" sy="100000" kx="0" ky="0" algn="bl" rotWithShape="0" blurRad="101600" dist="25400" dir="5400000">
-              <a:srgbClr val="0B2545">
-                <a:alpha val="18000"/>
-              </a:srgbClr>
-            </a:outerShdw>
-          </a:effectLst>
-        </p:spPr>
-      </p:sp>
-      <p:pic>
-        <p:nvPicPr>
-          <p:cNvPr id="22" name="content-13-image-20" descr="GitHub Actions: all six CI jobs green on the latest commit">    </p:cNvPr>
-          <p:cNvPicPr>
-            <a:picLocks noChangeAspect="1"/>
-          </p:cNvPicPr>
-          <p:nvPr/>
-        </p:nvPicPr>
-        <p:blipFill>
-          <a:blip r:embed="rId1"/>
-          <a:stretch>
-            <a:fillRect/>
-          </a:stretch>
-        </p:blipFill>
-        <p:spPr>
-          <a:xfrm>
-            <a:off x="5074920" y="1234440"/>
-            <a:ext cx="3611880" cy="2257425"/>
-          </a:xfrm>
-          <a:prstGeom prst="rect">
-            <a:avLst/>
-          </a:prstGeom>
-        </p:spPr>
-      </p:pic>
-      <p:sp>
-        <p:nvSpPr>
-          <p:cNvPr id="23" name="content-13-text-21"/>
-          <p:cNvSpPr txBox="1"/>
-          <p:nvPr/>
-        </p:nvSpPr>
-        <p:spPr>
-          <a:xfrm>
-            <a:off x="5074920" y="3619881"/>
-            <a:ext cx="3611880" cy="548640"/>
-          </a:xfrm>
-          <a:prstGeom prst="rect">
-            <a:avLst/>
-          </a:prstGeom>
-          <a:noFill/>
-          <a:ln/>
-        </p:spPr>
-        <p:txBody>
-          <a:bodyPr wrap="square" lIns="0" tIns="0" rIns="0" bIns="0" rtlCol="0" anchor="t"/>
-          <a:lstStyle/>
-          <a:p>
-            <a:pPr algn="l" indent="0" marL="0">
-              <a:buNone/>
-            </a:pPr>
-            <a:r>
-              <a:rPr lang="en-US" sz="1000" dirty="0">
-                <a:solidFill>
-                  <a:schemeClr val="tx2"/>
-                </a:solidFill>
-              </a:rPr>
-              <a:t>GitHub Actions, latest commit: backend, web, contracts, secret-scan, dependency-audit and docker all green.</a:t>
+              <a:t>Raw logs and reproduction commands: submission/evidence/, docs/TEST_CASES.md.</a:t>
             </a:r>
             <a:endParaRPr lang="en-US" sz="1000" dirty="0"/>
-          </a:p>
-        </p:txBody>
-      </p:sp>
-      <p:sp>
-        <p:nvSpPr>
-          <p:cNvPr id="24" name="content-13-text-22"/>
-          <p:cNvSpPr txBox="1"/>
-          <p:nvPr/>
-        </p:nvSpPr>
-        <p:spPr>
-          <a:xfrm>
-            <a:off x="457200" y="4526280"/>
-            <a:ext cx="8229600" cy="457200"/>
-          </a:xfrm>
-          <a:prstGeom prst="rect">
-            <a:avLst/>
-          </a:prstGeom>
-          <a:noFill/>
-          <a:ln/>
-        </p:spPr>
-        <p:txBody>
-          <a:bodyPr wrap="square" lIns="0" tIns="0" rIns="0" bIns="0" rtlCol="0" anchor="t"/>
-          <a:lstStyle/>
-          <a:p>
-            <a:pPr algn="l" indent="0" marL="0">
-              <a:buNone/>
-            </a:pPr>
-            <a:r>
-              <a:rPr lang="en-US" sz="1100" dirty="0">
-                <a:solidFill>
-                  <a:schemeClr val="tx2"/>
-                </a:solidFill>
-              </a:rPr>
-              <a:t>Our own tests. A fresh clone runs 1,672 of 1,673 (one module needs an excluded fixture). No independent test yet.</a:t>
-            </a:r>
-            <a:endParaRPr lang="en-US" sz="1100" dirty="0"/>
           </a:p>
         </p:txBody>
       </p:sp>
@@ -7459,7 +7517,7 @@
                 <a:ea typeface="+mj-lt" pitchFamily="34" charset="-122"/>
                 <a:cs typeface="+mj-lt" pitchFamily="34" charset="-120"/>
               </a:rPr>
-              <a:t>Security you can verify</a:t>
+              <a:t>Every test we ran</a:t>
             </a:r>
             <a:endParaRPr lang="en-US" sz="3600" dirty="0"/>
           </a:p>
@@ -7473,12 +7531,12 @@
         </p:nvSpPr>
         <p:spPr>
           <a:xfrm>
-            <a:off x="457200" y="1280160"/>
-            <a:ext cx="4023360" cy="402336"/>
+            <a:off x="457200" y="1234440"/>
+            <a:ext cx="2103120" cy="960120"/>
           </a:xfrm>
           <a:prstGeom prst="roundRect">
             <a:avLst>
-              <a:gd name="adj" fmla="val 13636"/>
+              <a:gd name="adj" fmla="val 7619"/>
             </a:avLst>
           </a:prstGeom>
           <a:solidFill>
@@ -7495,8 +7553,8 @@
         </p:nvSpPr>
         <p:spPr>
           <a:xfrm>
-            <a:off x="594360" y="1280160"/>
-            <a:ext cx="3794760" cy="402336"/>
+            <a:off x="566928" y="1261872"/>
+            <a:ext cx="1883664" cy="457200"/>
           </a:xfrm>
           <a:prstGeom prst="rect">
             <a:avLst/>
@@ -7512,42 +7570,70 @@
               <a:buNone/>
             </a:pPr>
             <a:r>
-              <a:rPr lang="en-US" sz="1400" b="1" dirty="0">
-                <a:solidFill>
-                  <a:schemeClr val="tx1"/>
-                </a:solidFill>
-              </a:rPr>
-              <a:t>Public:</a:t>
-            </a:r>
-            <a:pPr algn="l" indent="0" marL="0">
-              <a:buNone/>
-            </a:pPr>
-            <a:r>
-              <a:rPr lang="en-US" sz="1400" dirty="0">
-                <a:solidFill>
-                  <a:schemeClr val="tx1"/>
-                </a:solidFill>
-              </a:rPr>
-              <a:t> sign in, health</a:t>
-            </a:r>
-            <a:endParaRPr lang="en-US" sz="1400" dirty="0"/>
-          </a:p>
-        </p:txBody>
-      </p:sp>
-      <p:sp>
-        <p:nvSpPr>
-          <p:cNvPr id="5" name="content-14-rect-3"/>
+              <a:rPr lang="en-US" sz="2400" b="1" dirty="0">
+                <a:solidFill>
+                  <a:schemeClr val="accent1"/>
+                </a:solidFill>
+                <a:latin typeface="+mj-lt" pitchFamily="34" charset="0"/>
+                <a:ea typeface="+mj-lt" pitchFamily="34" charset="-122"/>
+                <a:cs typeface="+mj-lt" pitchFamily="34" charset="-120"/>
+              </a:rPr>
+              <a:t>1,679</a:t>
+            </a:r>
+            <a:endParaRPr lang="en-US" sz="2400" dirty="0"/>
+          </a:p>
+        </p:txBody>
+      </p:sp>
+      <p:sp>
+        <p:nvSpPr>
+          <p:cNvPr id="5" name="content-14-text-3"/>
+          <p:cNvSpPr txBox="1"/>
+          <p:nvPr/>
+        </p:nvSpPr>
+        <p:spPr>
+          <a:xfrm>
+            <a:off x="566928" y="1737360"/>
+            <a:ext cx="1883664" cy="420624"/>
+          </a:xfrm>
+          <a:prstGeom prst="rect">
+            <a:avLst/>
+          </a:prstGeom>
+          <a:noFill/>
+          <a:ln/>
+        </p:spPr>
+        <p:txBody>
+          <a:bodyPr wrap="square" lIns="0" tIns="0" rIns="0" bIns="0" rtlCol="0" anchor="t"/>
+          <a:lstStyle/>
+          <a:p>
+            <a:pPr algn="l" indent="0" marL="0">
+              <a:buNone/>
+            </a:pPr>
+            <a:r>
+              <a:rPr lang="en-US" sz="1050" dirty="0">
+                <a:solidFill>
+                  <a:schemeClr val="tx2"/>
+                </a:solidFill>
+              </a:rPr>
+              <a:t>backend tests (1,678 pass, 1 skipped)</a:t>
+            </a:r>
+            <a:endParaRPr lang="en-US" sz="1050" dirty="0"/>
+          </a:p>
+        </p:txBody>
+      </p:sp>
+      <p:sp>
+        <p:nvSpPr>
+          <p:cNvPr id="6" name="content-14-rect-4"/>
           <p:cNvSpPr/>
           <p:nvPr/>
         </p:nvSpPr>
         <p:spPr>
           <a:xfrm>
-            <a:off x="457200" y="1755648"/>
-            <a:ext cx="4023360" cy="402336"/>
+            <a:off x="2651760" y="1234440"/>
+            <a:ext cx="2103120" cy="960120"/>
           </a:xfrm>
           <a:prstGeom prst="roundRect">
             <a:avLst>
-              <a:gd name="adj" fmla="val 13636"/>
+              <a:gd name="adj" fmla="val 7619"/>
             </a:avLst>
           </a:prstGeom>
           <a:solidFill>
@@ -7558,14 +7644,14 @@
       </p:sp>
       <p:sp>
         <p:nvSpPr>
-          <p:cNvPr id="6" name="content-14-text-4"/>
-          <p:cNvSpPr txBox="1"/>
-          <p:nvPr/>
-        </p:nvSpPr>
-        <p:spPr>
-          <a:xfrm>
-            <a:off x="594360" y="1755648"/>
-            <a:ext cx="3794760" cy="402336"/>
+          <p:cNvPr id="7" name="content-14-text-5"/>
+          <p:cNvSpPr txBox="1"/>
+          <p:nvPr/>
+        </p:nvSpPr>
+        <p:spPr>
+          <a:xfrm>
+            <a:off x="2761488" y="1261872"/>
+            <a:ext cx="1883664" cy="457200"/>
           </a:xfrm>
           <a:prstGeom prst="rect">
             <a:avLst/>
@@ -7581,42 +7667,70 @@
               <a:buNone/>
             </a:pPr>
             <a:r>
-              <a:rPr lang="en-US" sz="1400" b="1" dirty="0">
-                <a:solidFill>
-                  <a:schemeClr val="tx1"/>
-                </a:solidFill>
-              </a:rPr>
-              <a:t>Read:</a:t>
-            </a:r>
-            <a:pPr algn="l" indent="0" marL="0">
-              <a:buNone/>
-            </a:pPr>
-            <a:r>
-              <a:rPr lang="en-US" sz="1400" dirty="0">
-                <a:solidFill>
-                  <a:schemeClr val="tx1"/>
-                </a:solidFill>
-              </a:rPr>
-              <a:t> own household only</a:t>
-            </a:r>
-            <a:endParaRPr lang="en-US" sz="1400" dirty="0"/>
-          </a:p>
-        </p:txBody>
-      </p:sp>
-      <p:sp>
-        <p:nvSpPr>
-          <p:cNvPr id="7" name="content-14-rect-5"/>
+              <a:rPr lang="en-US" sz="2400" b="1" dirty="0">
+                <a:solidFill>
+                  <a:schemeClr val="accent1"/>
+                </a:solidFill>
+                <a:latin typeface="+mj-lt" pitchFamily="34" charset="0"/>
+                <a:ea typeface="+mj-lt" pitchFamily="34" charset="-122"/>
+                <a:cs typeface="+mj-lt" pitchFamily="34" charset="-120"/>
+              </a:rPr>
+              <a:t>463</a:t>
+            </a:r>
+            <a:endParaRPr lang="en-US" sz="2400" dirty="0"/>
+          </a:p>
+        </p:txBody>
+      </p:sp>
+      <p:sp>
+        <p:nvSpPr>
+          <p:cNvPr id="8" name="content-14-text-6"/>
+          <p:cNvSpPr txBox="1"/>
+          <p:nvPr/>
+        </p:nvSpPr>
+        <p:spPr>
+          <a:xfrm>
+            <a:off x="2761488" y="1737360"/>
+            <a:ext cx="1883664" cy="420624"/>
+          </a:xfrm>
+          <a:prstGeom prst="rect">
+            <a:avLst/>
+          </a:prstGeom>
+          <a:noFill/>
+          <a:ln/>
+        </p:spPr>
+        <p:txBody>
+          <a:bodyPr wrap="square" lIns="0" tIns="0" rIns="0" bIns="0" rtlCol="0" anchor="t"/>
+          <a:lstStyle/>
+          <a:p>
+            <a:pPr algn="l" indent="0" marL="0">
+              <a:buNone/>
+            </a:pPr>
+            <a:r>
+              <a:rPr lang="en-US" sz="1050" dirty="0">
+                <a:solidFill>
+                  <a:schemeClr val="tx2"/>
+                </a:solidFill>
+              </a:rPr>
+              <a:t>web tests</a:t>
+            </a:r>
+            <a:endParaRPr lang="en-US" sz="1050" dirty="0"/>
+          </a:p>
+        </p:txBody>
+      </p:sp>
+      <p:sp>
+        <p:nvSpPr>
+          <p:cNvPr id="9" name="content-14-rect-7"/>
           <p:cNvSpPr/>
           <p:nvPr/>
         </p:nvSpPr>
         <p:spPr>
           <a:xfrm>
-            <a:off x="457200" y="2231136"/>
-            <a:ext cx="4023360" cy="402336"/>
+            <a:off x="457200" y="2286000"/>
+            <a:ext cx="2103120" cy="960120"/>
           </a:xfrm>
           <a:prstGeom prst="roundRect">
             <a:avLst>
-              <a:gd name="adj" fmla="val 13636"/>
+              <a:gd name="adj" fmla="val 7619"/>
             </a:avLst>
           </a:prstGeom>
           <a:solidFill>
@@ -7627,14 +7741,14 @@
       </p:sp>
       <p:sp>
         <p:nvSpPr>
-          <p:cNvPr id="8" name="content-14-text-6"/>
-          <p:cNvSpPr txBox="1"/>
-          <p:nvPr/>
-        </p:nvSpPr>
-        <p:spPr>
-          <a:xfrm>
-            <a:off x="594360" y="2231136"/>
-            <a:ext cx="3794760" cy="402336"/>
+          <p:cNvPr id="10" name="content-14-text-8"/>
+          <p:cNvSpPr txBox="1"/>
+          <p:nvPr/>
+        </p:nvSpPr>
+        <p:spPr>
+          <a:xfrm>
+            <a:off x="566928" y="2313432"/>
+            <a:ext cx="1883664" cy="457200"/>
           </a:xfrm>
           <a:prstGeom prst="rect">
             <a:avLst/>
@@ -7650,111 +7764,70 @@
               <a:buNone/>
             </a:pPr>
             <a:r>
-              <a:rPr lang="en-US" sz="1400" b="1" dirty="0">
-                <a:solidFill>
-                  <a:schemeClr val="tx1"/>
-                </a:solidFill>
-              </a:rPr>
-              <a:t>Prepare:</a:t>
-            </a:r>
-            <a:pPr algn="l" indent="0" marL="0">
-              <a:buNone/>
-            </a:pPr>
-            <a:r>
-              <a:rPr lang="en-US" sz="1400" dirty="0">
-                <a:solidFill>
-                  <a:schemeClr val="tx1"/>
-                </a:solidFill>
-              </a:rPr>
-              <a:t> drafts, recipients, documents</a:t>
-            </a:r>
-            <a:endParaRPr lang="en-US" sz="1400" dirty="0"/>
-          </a:p>
-        </p:txBody>
-      </p:sp>
-      <p:sp>
-        <p:nvSpPr>
-          <p:cNvPr id="9" name="content-14-rect-7"/>
+              <a:rPr lang="en-US" sz="2400" b="1" dirty="0">
+                <a:solidFill>
+                  <a:schemeClr val="accent1"/>
+                </a:solidFill>
+                <a:latin typeface="+mj-lt" pitchFamily="34" charset="0"/>
+                <a:ea typeface="+mj-lt" pitchFamily="34" charset="-122"/>
+                <a:cs typeface="+mj-lt" pitchFamily="34" charset="-120"/>
+              </a:rPr>
+              <a:t>24</a:t>
+            </a:r>
+            <a:endParaRPr lang="en-US" sz="2400" dirty="0"/>
+          </a:p>
+        </p:txBody>
+      </p:sp>
+      <p:sp>
+        <p:nvSpPr>
+          <p:cNvPr id="11" name="content-14-text-9"/>
+          <p:cNvSpPr txBox="1"/>
+          <p:nvPr/>
+        </p:nvSpPr>
+        <p:spPr>
+          <a:xfrm>
+            <a:off x="566928" y="2788920"/>
+            <a:ext cx="1883664" cy="420624"/>
+          </a:xfrm>
+          <a:prstGeom prst="rect">
+            <a:avLst/>
+          </a:prstGeom>
+          <a:noFill/>
+          <a:ln/>
+        </p:spPr>
+        <p:txBody>
+          <a:bodyPr wrap="square" lIns="0" tIns="0" rIns="0" bIns="0" rtlCol="0" anchor="t"/>
+          <a:lstStyle/>
+          <a:p>
+            <a:pPr algn="l" indent="0" marL="0">
+              <a:buNone/>
+            </a:pPr>
+            <a:r>
+              <a:rPr lang="en-US" sz="1050" dirty="0">
+                <a:solidFill>
+                  <a:schemeClr val="tx2"/>
+                </a:solidFill>
+              </a:rPr>
+              <a:t>browser tests</a:t>
+            </a:r>
+            <a:endParaRPr lang="en-US" sz="1050" dirty="0"/>
+          </a:p>
+        </p:txBody>
+      </p:sp>
+      <p:sp>
+        <p:nvSpPr>
+          <p:cNvPr id="12" name="content-14-rect-10"/>
           <p:cNvSpPr/>
           <p:nvPr/>
         </p:nvSpPr>
         <p:spPr>
           <a:xfrm>
-            <a:off x="457200" y="2706624"/>
-            <a:ext cx="4023360" cy="402336"/>
+            <a:off x="2651760" y="2286000"/>
+            <a:ext cx="2103120" cy="960120"/>
           </a:xfrm>
           <a:prstGeom prst="roundRect">
             <a:avLst>
-              <a:gd name="adj" fmla="val 13636"/>
-            </a:avLst>
-          </a:prstGeom>
-          <a:solidFill>
-            <a:schemeClr val="accent1"/>
-          </a:solidFill>
-          <a:ln/>
-        </p:spPr>
-      </p:sp>
-      <p:sp>
-        <p:nvSpPr>
-          <p:cNvPr id="10" name="content-14-text-8"/>
-          <p:cNvSpPr txBox="1"/>
-          <p:nvPr/>
-        </p:nvSpPr>
-        <p:spPr>
-          <a:xfrm>
-            <a:off x="594360" y="2706624"/>
-            <a:ext cx="3794760" cy="402336"/>
-          </a:xfrm>
-          <a:prstGeom prst="rect">
-            <a:avLst/>
-          </a:prstGeom>
-          <a:noFill/>
-          <a:ln/>
-        </p:spPr>
-        <p:txBody>
-          <a:bodyPr wrap="square" lIns="0" tIns="0" rIns="0" bIns="0" rtlCol="0" anchor="ctr"/>
-          <a:lstStyle/>
-          <a:p>
-            <a:pPr algn="l" indent="0" marL="0">
-              <a:buNone/>
-            </a:pPr>
-            <a:r>
-              <a:rPr lang="en-US" sz="1400" b="1" dirty="0">
-                <a:solidFill>
-                  <a:schemeClr val="bg1"/>
-                </a:solidFill>
-              </a:rPr>
-              <a:t>Decide:</a:t>
-            </a:r>
-            <a:pPr algn="l" indent="0" marL="0">
-              <a:buNone/>
-            </a:pPr>
-            <a:r>
-              <a:rPr lang="en-US" sz="1400" dirty="0">
-                <a:solidFill>
-                  <a:schemeClr val="bg1"/>
-                </a:solidFill>
-              </a:rPr>
-              <a:t> human parent with fresh MFA</a:t>
-            </a:r>
-            <a:endParaRPr lang="en-US" sz="1400" dirty="0"/>
-          </a:p>
-        </p:txBody>
-      </p:sp>
-      <p:sp>
-        <p:nvSpPr>
-          <p:cNvPr id="11" name="content-14-rect-9"/>
-          <p:cNvSpPr/>
-          <p:nvPr/>
-        </p:nvSpPr>
-        <p:spPr>
-          <a:xfrm>
-            <a:off x="457200" y="3182112"/>
-            <a:ext cx="4023360" cy="402336"/>
-          </a:xfrm>
-          <a:prstGeom prst="roundRect">
-            <a:avLst>
-              <a:gd name="adj" fmla="val 13636"/>
+              <a:gd name="adj" fmla="val 7619"/>
             </a:avLst>
           </a:prstGeom>
           <a:solidFill>
@@ -7765,14 +7838,14 @@
       </p:sp>
       <p:sp>
         <p:nvSpPr>
-          <p:cNvPr id="12" name="content-14-text-10"/>
-          <p:cNvSpPr txBox="1"/>
-          <p:nvPr/>
-        </p:nvSpPr>
-        <p:spPr>
-          <a:xfrm>
-            <a:off x="594360" y="3182112"/>
-            <a:ext cx="3794760" cy="402336"/>
+          <p:cNvPr id="13" name="content-14-text-11"/>
+          <p:cNvSpPr txBox="1"/>
+          <p:nvPr/>
+        </p:nvSpPr>
+        <p:spPr>
+          <a:xfrm>
+            <a:off x="2761488" y="2313432"/>
+            <a:ext cx="1883664" cy="457200"/>
           </a:xfrm>
           <a:prstGeom prst="rect">
             <a:avLst/>
@@ -7788,60 +7861,88 @@
               <a:buNone/>
             </a:pPr>
             <a:r>
-              <a:rPr lang="en-US" sz="1400" b="1" dirty="0">
-                <a:solidFill>
-                  <a:schemeClr val="tx1"/>
-                </a:solidFill>
-              </a:rPr>
-              <a:t>Administer:</a:t>
-            </a:r>
-            <a:pPr algn="l" indent="0" marL="0">
-              <a:buNone/>
-            </a:pPr>
-            <a:r>
-              <a:rPr lang="en-US" sz="1400" dirty="0">
-                <a:solidFill>
-                  <a:schemeClr val="tx1"/>
-                </a:solidFill>
-              </a:rPr>
-              <a:t> reviewer rules and Verify</a:t>
-            </a:r>
-            <a:endParaRPr lang="en-US" sz="1400" dirty="0"/>
-          </a:p>
-        </p:txBody>
-      </p:sp>
-      <p:sp>
-        <p:nvSpPr>
-          <p:cNvPr id="13" name="content-14-rect-11"/>
+              <a:rPr lang="en-US" sz="2400" b="1" dirty="0">
+                <a:solidFill>
+                  <a:schemeClr val="accent1"/>
+                </a:solidFill>
+                <a:latin typeface="+mj-lt" pitchFamily="34" charset="0"/>
+                <a:ea typeface="+mj-lt" pitchFamily="34" charset="-122"/>
+                <a:cs typeface="+mj-lt" pitchFamily="34" charset="-120"/>
+              </a:rPr>
+              <a:t>314</a:t>
+            </a:r>
+            <a:endParaRPr lang="en-US" sz="2400" dirty="0"/>
+          </a:p>
+        </p:txBody>
+      </p:sp>
+      <p:sp>
+        <p:nvSpPr>
+          <p:cNvPr id="14" name="content-14-text-12"/>
+          <p:cNvSpPr txBox="1"/>
+          <p:nvPr/>
+        </p:nvSpPr>
+        <p:spPr>
+          <a:xfrm>
+            <a:off x="2761488" y="2788920"/>
+            <a:ext cx="1883664" cy="420624"/>
+          </a:xfrm>
+          <a:prstGeom prst="rect">
+            <a:avLst/>
+          </a:prstGeom>
+          <a:noFill/>
+          <a:ln/>
+        </p:spPr>
+        <p:txBody>
+          <a:bodyPr wrap="square" lIns="0" tIns="0" rIns="0" bIns="0" rtlCol="0" anchor="t"/>
+          <a:lstStyle/>
+          <a:p>
+            <a:pPr algn="l" indent="0" marL="0">
+              <a:buNone/>
+            </a:pPr>
+            <a:r>
+              <a:rPr lang="en-US" sz="1050" dirty="0">
+                <a:solidFill>
+                  <a:schemeClr val="tx2"/>
+                </a:solidFill>
+              </a:rPr>
+              <a:t>security probe records (308 PASS, 6 INFO)</a:t>
+            </a:r>
+            <a:endParaRPr lang="en-US" sz="1050" dirty="0"/>
+          </a:p>
+        </p:txBody>
+      </p:sp>
+      <p:sp>
+        <p:nvSpPr>
+          <p:cNvPr id="15" name="content-14-rect-13"/>
           <p:cNvSpPr/>
           <p:nvPr/>
         </p:nvSpPr>
         <p:spPr>
           <a:xfrm>
-            <a:off x="457200" y="3657600"/>
-            <a:ext cx="4023360" cy="402336"/>
+            <a:off x="457200" y="3337560"/>
+            <a:ext cx="2103120" cy="960120"/>
           </a:xfrm>
           <a:prstGeom prst="roundRect">
             <a:avLst>
-              <a:gd name="adj" fmla="val 13636"/>
+              <a:gd name="adj" fmla="val 7619"/>
             </a:avLst>
           </a:prstGeom>
           <a:solidFill>
-            <a:schemeClr val="accent3"/>
+            <a:schemeClr val="bg2"/>
           </a:solidFill>
           <a:ln/>
         </p:spPr>
       </p:sp>
       <p:sp>
         <p:nvSpPr>
-          <p:cNvPr id="14" name="content-14-text-12"/>
-          <p:cNvSpPr txBox="1"/>
-          <p:nvPr/>
-        </p:nvSpPr>
-        <p:spPr>
-          <a:xfrm>
-            <a:off x="594360" y="3657600"/>
-            <a:ext cx="3794760" cy="402336"/>
+          <p:cNvPr id="16" name="content-14-text-14"/>
+          <p:cNvSpPr txBox="1"/>
+          <p:nvPr/>
+        </p:nvSpPr>
+        <p:spPr>
+          <a:xfrm>
+            <a:off x="566928" y="3364992"/>
+            <a:ext cx="1883664" cy="457200"/>
           </a:xfrm>
           <a:prstGeom prst="rect">
             <a:avLst/>
@@ -7857,42 +7958,167 @@
               <a:buNone/>
             </a:pPr>
             <a:r>
-              <a:rPr lang="en-US" sz="1400" b="1" dirty="0">
-                <a:solidFill>
-                  <a:schemeClr val="bg1"/>
-                </a:solidFill>
-              </a:rPr>
-              <a:t>Never for the AI:</a:t>
-            </a:r>
-            <a:pPr algn="l" indent="0" marL="0">
-              <a:buNone/>
-            </a:pPr>
-            <a:r>
-              <a:rPr lang="en-US" sz="1400" dirty="0">
-                <a:solidFill>
-                  <a:schemeClr val="bg1"/>
-                </a:solidFill>
-              </a:rPr>
-              <a:t> approve, cancel, limits</a:t>
-            </a:r>
-            <a:endParaRPr lang="en-US" sz="1400" dirty="0"/>
-          </a:p>
-        </p:txBody>
-      </p:sp>
-      <p:sp>
-        <p:nvSpPr>
-          <p:cNvPr id="15" name="content-14-rect-13"/>
+              <a:rPr lang="en-US" sz="2400" b="1" dirty="0">
+                <a:solidFill>
+                  <a:schemeClr val="accent1"/>
+                </a:solidFill>
+                <a:latin typeface="+mj-lt" pitchFamily="34" charset="0"/>
+                <a:ea typeface="+mj-lt" pitchFamily="34" charset="-122"/>
+                <a:cs typeface="+mj-lt" pitchFamily="34" charset="-120"/>
+              </a:rPr>
+              <a:t>24 of 24</a:t>
+            </a:r>
+            <a:endParaRPr lang="en-US" sz="2400" dirty="0"/>
+          </a:p>
+        </p:txBody>
+      </p:sp>
+      <p:sp>
+        <p:nvSpPr>
+          <p:cNvPr id="17" name="content-14-text-15"/>
+          <p:cNvSpPr txBox="1"/>
+          <p:nvPr/>
+        </p:nvSpPr>
+        <p:spPr>
+          <a:xfrm>
+            <a:off x="566928" y="3840480"/>
+            <a:ext cx="1883664" cy="420624"/>
+          </a:xfrm>
+          <a:prstGeom prst="rect">
+            <a:avLst/>
+          </a:prstGeom>
+          <a:noFill/>
+          <a:ln/>
+        </p:spPr>
+        <p:txBody>
+          <a:bodyPr wrap="square" lIns="0" tIns="0" rIns="0" bIns="0" rtlCol="0" anchor="t"/>
+          <a:lstStyle/>
+          <a:p>
+            <a:pPr algn="l" indent="0" marL="0">
+              <a:buNone/>
+            </a:pPr>
+            <a:r>
+              <a:rPr lang="en-US" sz="1050" dirty="0">
+                <a:solidFill>
+                  <a:schemeClr val="tx2"/>
+                </a:solidFill>
+              </a:rPr>
+              <a:t>blueprint scenarios mapped to tests</a:t>
+            </a:r>
+            <a:endParaRPr lang="en-US" sz="1050" dirty="0"/>
+          </a:p>
+        </p:txBody>
+      </p:sp>
+      <p:sp>
+        <p:nvSpPr>
+          <p:cNvPr id="18" name="content-14-rect-16"/>
           <p:cNvSpPr/>
           <p:nvPr/>
         </p:nvSpPr>
         <p:spPr>
           <a:xfrm>
-            <a:off x="4590288" y="1207008"/>
-            <a:ext cx="4169664" cy="1375664"/>
+            <a:off x="2651760" y="3337560"/>
+            <a:ext cx="2103120" cy="960120"/>
           </a:xfrm>
           <a:prstGeom prst="roundRect">
             <a:avLst>
-              <a:gd name="adj" fmla="val 3988"/>
+              <a:gd name="adj" fmla="val 7619"/>
+            </a:avLst>
+          </a:prstGeom>
+          <a:solidFill>
+            <a:schemeClr val="bg2"/>
+          </a:solidFill>
+          <a:ln/>
+        </p:spPr>
+      </p:sp>
+      <p:sp>
+        <p:nvSpPr>
+          <p:cNvPr id="19" name="content-14-text-17"/>
+          <p:cNvSpPr txBox="1"/>
+          <p:nvPr/>
+        </p:nvSpPr>
+        <p:spPr>
+          <a:xfrm>
+            <a:off x="2761488" y="3364992"/>
+            <a:ext cx="1883664" cy="457200"/>
+          </a:xfrm>
+          <a:prstGeom prst="rect">
+            <a:avLst/>
+          </a:prstGeom>
+          <a:noFill/>
+          <a:ln/>
+        </p:spPr>
+        <p:txBody>
+          <a:bodyPr wrap="square" lIns="0" tIns="0" rIns="0" bIns="0" rtlCol="0" anchor="ctr"/>
+          <a:lstStyle/>
+          <a:p>
+            <a:pPr algn="l" indent="0" marL="0">
+              <a:buNone/>
+            </a:pPr>
+            <a:r>
+              <a:rPr lang="en-US" sz="2400" b="1" dirty="0">
+                <a:solidFill>
+                  <a:schemeClr val="accent1"/>
+                </a:solidFill>
+                <a:latin typeface="+mj-lt" pitchFamily="34" charset="0"/>
+                <a:ea typeface="+mj-lt" pitchFamily="34" charset="-122"/>
+                <a:cs typeface="+mj-lt" pitchFamily="34" charset="-120"/>
+              </a:rPr>
+              <a:t>6 of 6</a:t>
+            </a:r>
+            <a:endParaRPr lang="en-US" sz="2400" dirty="0"/>
+          </a:p>
+        </p:txBody>
+      </p:sp>
+      <p:sp>
+        <p:nvSpPr>
+          <p:cNvPr id="20" name="content-14-text-18"/>
+          <p:cNvSpPr txBox="1"/>
+          <p:nvPr/>
+        </p:nvSpPr>
+        <p:spPr>
+          <a:xfrm>
+            <a:off x="2761488" y="3840480"/>
+            <a:ext cx="1883664" cy="420624"/>
+          </a:xfrm>
+          <a:prstGeom prst="rect">
+            <a:avLst/>
+          </a:prstGeom>
+          <a:noFill/>
+          <a:ln/>
+        </p:spPr>
+        <p:txBody>
+          <a:bodyPr wrap="square" lIns="0" tIns="0" rIns="0" bIns="0" rtlCol="0" anchor="t"/>
+          <a:lstStyle/>
+          <a:p>
+            <a:pPr algn="l" indent="0" marL="0">
+              <a:buNone/>
+            </a:pPr>
+            <a:r>
+              <a:rPr lang="en-US" sz="1050" dirty="0">
+                <a:solidFill>
+                  <a:schemeClr val="tx2"/>
+                </a:solidFill>
+              </a:rPr>
+              <a:t>CI jobs green on GitHub</a:t>
+            </a:r>
+            <a:endParaRPr lang="en-US" sz="1050" dirty="0"/>
+          </a:p>
+        </p:txBody>
+      </p:sp>
+      <p:sp>
+        <p:nvSpPr>
+          <p:cNvPr id="21" name="content-14-rect-19"/>
+          <p:cNvSpPr/>
+          <p:nvPr/>
+        </p:nvSpPr>
+        <p:spPr>
+          <a:xfrm>
+            <a:off x="5001768" y="1161288"/>
+            <a:ext cx="3758184" cy="2403729"/>
+          </a:xfrm>
+          <a:prstGeom prst="roundRect">
+            <a:avLst>
+              <a:gd name="adj" fmla="val 2282"/>
             </a:avLst>
           </a:prstGeom>
           <a:solidFill>
@@ -7915,7 +8141,7 @@
       </p:sp>
       <p:pic>
         <p:nvPicPr>
-          <p:cNvPr id="16" name="content-14-image-14" descr="The live audit log: Verify the hash chain says PASS">    </p:cNvPr>
+          <p:cNvPr id="22" name="content-14-image-20" descr="GitHub Actions: all six CI jobs green on the latest commit">    </p:cNvPr>
           <p:cNvPicPr>
             <a:picLocks noChangeAspect="1"/>
           </p:cNvPicPr>
@@ -7929,8 +8155,8 @@
         </p:blipFill>
         <p:spPr>
           <a:xfrm>
-            <a:off x="4663440" y="1280160"/>
-            <a:ext cx="4023360" cy="1229360"/>
+            <a:off x="5074920" y="1234440"/>
+            <a:ext cx="3611880" cy="2257425"/>
           </a:xfrm>
           <a:prstGeom prst="rect">
             <a:avLst/>
@@ -7939,14 +8165,14 @@
       </p:pic>
       <p:sp>
         <p:nvSpPr>
-          <p:cNvPr id="17" name="content-14-text-15"/>
-          <p:cNvSpPr txBox="1"/>
-          <p:nvPr/>
-        </p:nvSpPr>
-        <p:spPr>
-          <a:xfrm>
-            <a:off x="4663440" y="2637536"/>
-            <a:ext cx="4023360" cy="411480"/>
+          <p:cNvPr id="23" name="content-14-text-21"/>
+          <p:cNvSpPr txBox="1"/>
+          <p:nvPr/>
+        </p:nvSpPr>
+        <p:spPr>
+          <a:xfrm>
+            <a:off x="5074920" y="3619881"/>
+            <a:ext cx="3611880" cy="548640"/>
           </a:xfrm>
           <a:prstGeom prst="rect">
             <a:avLst/>
@@ -7962,188 +8188,50 @@
               <a:buNone/>
             </a:pPr>
             <a:r>
-              <a:rPr lang="en-US" sz="1050" dirty="0">
+              <a:rPr lang="en-US" sz="1000" dirty="0">
                 <a:solidFill>
                   <a:schemeClr val="tx2"/>
                 </a:solidFill>
               </a:rPr>
-              <a:t>Live, studyroute.bot-keep.xyz, 19 Oct 2026: Verify the hash chain gives PASS on 40 events.</a:t>
-            </a:r>
-            <a:endParaRPr lang="en-US" sz="1050" dirty="0"/>
-          </a:p>
-        </p:txBody>
-      </p:sp>
-      <p:sp>
-        <p:nvSpPr>
-          <p:cNvPr id="18" name="content-14-rect-16"/>
-          <p:cNvSpPr/>
-          <p:nvPr/>
-        </p:nvSpPr>
-        <p:spPr>
-          <a:xfrm>
-            <a:off x="4663440" y="3063240"/>
-            <a:ext cx="4023360" cy="777240"/>
-          </a:xfrm>
-          <a:prstGeom prst="roundRect">
-            <a:avLst>
-              <a:gd name="adj" fmla="val 9412"/>
-            </a:avLst>
-          </a:prstGeom>
-          <a:solidFill>
-            <a:schemeClr val="bg2"/>
-          </a:solidFill>
-          <a:ln/>
-        </p:spPr>
-      </p:sp>
-      <p:sp>
-        <p:nvSpPr>
-          <p:cNvPr id="19" name="content-14-text-17"/>
-          <p:cNvSpPr txBox="1"/>
-          <p:nvPr/>
-        </p:nvSpPr>
-        <p:spPr>
-          <a:xfrm>
-            <a:off x="4800600" y="3108960"/>
-            <a:ext cx="3749040" cy="685800"/>
-          </a:xfrm>
-          <a:prstGeom prst="rect">
-            <a:avLst/>
-          </a:prstGeom>
-          <a:noFill/>
-          <a:ln/>
-        </p:spPr>
-        <p:txBody>
-          <a:bodyPr wrap="square" lIns="0" tIns="0" rIns="0" bIns="0" rtlCol="0" anchor="ctr"/>
-          <a:lstStyle/>
-          <a:p>
-            <a:pPr algn="l" indent="0" marL="0">
-              <a:buNone/>
-            </a:pPr>
-            <a:r>
-              <a:rPr lang="en-US" sz="1100" b="1" dirty="0">
-                <a:solidFill>
-                  <a:schemeClr val="tx1"/>
-                </a:solidFill>
-              </a:rPr>
-              <a:t>Tamper test: </a:t>
-            </a:r>
+              <a:t>GitHub Actions, latest commit: backend, web, contracts, secret-scan, dependency-audit and docker all green.</a:t>
+            </a:r>
+            <a:endParaRPr lang="en-US" sz="1000" dirty="0"/>
+          </a:p>
+        </p:txBody>
+      </p:sp>
+      <p:sp>
+        <p:nvSpPr>
+          <p:cNvPr id="24" name="content-14-text-22"/>
+          <p:cNvSpPr txBox="1"/>
+          <p:nvPr/>
+        </p:nvSpPr>
+        <p:spPr>
+          <a:xfrm>
+            <a:off x="457200" y="4526280"/>
+            <a:ext cx="8229600" cy="457200"/>
+          </a:xfrm>
+          <a:prstGeom prst="rect">
+            <a:avLst/>
+          </a:prstGeom>
+          <a:noFill/>
+          <a:ln/>
+        </p:spPr>
+        <p:txBody>
+          <a:bodyPr wrap="square" lIns="0" tIns="0" rIns="0" bIns="0" rtlCol="0" anchor="t"/>
+          <a:lstStyle/>
+          <a:p>
             <a:pPr algn="l" indent="0" marL="0">
               <a:buNone/>
             </a:pPr>
             <a:r>
               <a:rPr lang="en-US" sz="1100" dirty="0">
                 <a:solidFill>
-                  <a:schemeClr val="tx1"/>
-                </a:solidFill>
-              </a:rPr>
-              <a:t>edit one audit row behind the app's back and Verify fails at that event; restore it and Verify passes.</a:t>
+                  <a:schemeClr val="tx2"/>
+                </a:solidFill>
+              </a:rPr>
+              <a:t>Our own tests. A fresh clone runs 1,672 of 1,673 (one module needs an excluded fixture). No independent test yet.</a:t>
             </a:r>
             <a:endParaRPr lang="en-US" sz="1100" dirty="0"/>
-          </a:p>
-        </p:txBody>
-      </p:sp>
-      <p:sp>
-        <p:nvSpPr>
-          <p:cNvPr id="20" name="content-14-rect-18"/>
-          <p:cNvSpPr/>
-          <p:nvPr/>
-        </p:nvSpPr>
-        <p:spPr>
-          <a:xfrm>
-            <a:off x="4663440" y="3931920"/>
-            <a:ext cx="4023360" cy="777240"/>
-          </a:xfrm>
-          <a:prstGeom prst="roundRect">
-            <a:avLst>
-              <a:gd name="adj" fmla="val 9412"/>
-            </a:avLst>
-          </a:prstGeom>
-          <a:solidFill>
-            <a:schemeClr val="bg2"/>
-          </a:solidFill>
-          <a:ln/>
-        </p:spPr>
-      </p:sp>
-      <p:sp>
-        <p:nvSpPr>
-          <p:cNvPr id="21" name="content-14-text-19"/>
-          <p:cNvSpPr txBox="1"/>
-          <p:nvPr/>
-        </p:nvSpPr>
-        <p:spPr>
-          <a:xfrm>
-            <a:off x="4800600" y="3977640"/>
-            <a:ext cx="3749040" cy="685800"/>
-          </a:xfrm>
-          <a:prstGeom prst="rect">
-            <a:avLst/>
-          </a:prstGeom>
-          <a:noFill/>
-          <a:ln/>
-        </p:spPr>
-        <p:txBody>
-          <a:bodyPr wrap="square" lIns="0" tIns="0" rIns="0" bIns="0" rtlCol="0" anchor="ctr"/>
-          <a:lstStyle/>
-          <a:p>
-            <a:pPr algn="l" indent="0" marL="0">
-              <a:buNone/>
-            </a:pPr>
-            <a:r>
-              <a:rPr lang="en-US" sz="1100" b="1" dirty="0">
-                <a:solidFill>
-                  <a:schemeClr val="tx1"/>
-                </a:solidFill>
-              </a:rPr>
-              <a:t>Also: </a:t>
-            </a:r>
-            <a:pPr algn="l" indent="0" marL="0">
-              <a:buNone/>
-            </a:pPr>
-            <a:r>
-              <a:rPr lang="en-US" sz="1100" dirty="0">
-                <a:solidFill>
-                  <a:schemeClr val="tx1"/>
-                </a:solidFill>
-              </a:rPr>
-              <a:t>each payment's compliance report carries a hash your browser can recompute. Every threat has a test: docs/SECURITY.md.</a:t>
-            </a:r>
-            <a:endParaRPr lang="en-US" sz="1100" dirty="0"/>
-          </a:p>
-        </p:txBody>
-      </p:sp>
-      <p:sp>
-        <p:nvSpPr>
-          <p:cNvPr id="22" name="content-14-text-20"/>
-          <p:cNvSpPr txBox="1"/>
-          <p:nvPr/>
-        </p:nvSpPr>
-        <p:spPr>
-          <a:xfrm>
-            <a:off x="457200" y="4864608"/>
-            <a:ext cx="8229600" cy="201168"/>
-          </a:xfrm>
-          <a:prstGeom prst="rect">
-            <a:avLst/>
-          </a:prstGeom>
-          <a:noFill/>
-          <a:ln/>
-        </p:spPr>
-        <p:txBody>
-          <a:bodyPr wrap="square" lIns="0" tIns="0" rIns="0" bIns="0" rtlCol="0" anchor="t"/>
-          <a:lstStyle/>
-          <a:p>
-            <a:pPr algn="l" indent="0" marL="0">
-              <a:buNone/>
-            </a:pPr>
-            <a:r>
-              <a:rPr lang="en-US" sz="1000" dirty="0">
-                <a:solidFill>
-                  <a:schemeClr val="tx2"/>
-                </a:solidFill>
-              </a:rPr>
-              <a:t>Raw logs: submission/evidence/.</a:t>
-            </a:r>
-            <a:endParaRPr lang="en-US" sz="1000" dirty="0"/>
           </a:p>
         </p:txBody>
       </p:sp>
@@ -8207,7 +8295,7 @@
                 <a:ea typeface="+mj-lt" pitchFamily="34" charset="-122"/>
                 <a:cs typeface="+mj-lt" pitchFamily="34" charset="-120"/>
               </a:rPr>
-              <a:t>Attacking our own app</a:t>
+              <a:t>Security you can verify</a:t>
             </a:r>
             <a:endParaRPr lang="en-US" sz="3600" dirty="0"/>
           </a:p>
@@ -8221,12 +8309,12 @@
         </p:nvSpPr>
         <p:spPr>
           <a:xfrm>
-            <a:off x="457200" y="1234440"/>
-            <a:ext cx="4754880" cy="3200400"/>
+            <a:off x="457200" y="1280160"/>
+            <a:ext cx="4023360" cy="402336"/>
           </a:xfrm>
           <a:prstGeom prst="roundRect">
             <a:avLst>
-              <a:gd name="adj" fmla="val 2286"/>
+              <a:gd name="adj" fmla="val 13636"/>
             </a:avLst>
           </a:prstGeom>
           <a:solidFill>
@@ -8243,8 +8331,8 @@
         </p:nvSpPr>
         <p:spPr>
           <a:xfrm>
-            <a:off x="640080" y="1298448"/>
-            <a:ext cx="4389120" cy="365760"/>
+            <a:off x="594360" y="1280160"/>
+            <a:ext cx="3794760" cy="402336"/>
           </a:xfrm>
           <a:prstGeom prst="rect">
             <a:avLst/>
@@ -8260,67 +8348,180 @@
               <a:buNone/>
             </a:pPr>
             <a:r>
-              <a:rPr lang="en-US" sz="1300" b="1" dirty="0">
+              <a:rPr lang="en-US" sz="1400" b="1" dirty="0">
                 <a:solidFill>
                   <a:schemeClr val="tx1"/>
                 </a:solidFill>
               </a:rPr>
-              <a:t>Recorded checks by tool (all pass)</a:t>
-            </a:r>
-            <a:endParaRPr lang="en-US" sz="1300" dirty="0"/>
-          </a:p>
-        </p:txBody>
-      </p:sp>
-      <p:sp>
-        <p:nvSpPr>
-          <p:cNvPr id="5" name="content-15-text-3"/>
-          <p:cNvSpPr txBox="1"/>
-          <p:nvPr/>
-        </p:nvSpPr>
-        <p:spPr>
-          <a:xfrm>
-            <a:off x="640080" y="1737360"/>
-            <a:ext cx="1874520" cy="393192"/>
-          </a:xfrm>
-          <a:prstGeom prst="rect">
-            <a:avLst/>
-          </a:prstGeom>
-          <a:noFill/>
-          <a:ln/>
-        </p:spPr>
-        <p:txBody>
-          <a:bodyPr wrap="square" lIns="0" tIns="0" rIns="0" bIns="0" rtlCol="0" anchor="ctr"/>
-          <a:lstStyle/>
-          <a:p>
-            <a:pPr algn="l" indent="0" marL="0">
-              <a:buNone/>
-            </a:pPr>
-            <a:r>
-              <a:rPr lang="en-US" sz="1100" dirty="0">
+              <a:t>Public:</a:t>
+            </a:r>
+            <a:pPr algn="l" indent="0" marL="0">
+              <a:buNone/>
+            </a:pPr>
+            <a:r>
+              <a:rPr lang="en-US" sz="1400" dirty="0">
                 <a:solidFill>
                   <a:schemeClr val="tx1"/>
                 </a:solidFill>
               </a:rPr>
-              <a:t>Access control, injection</a:t>
-            </a:r>
-            <a:endParaRPr lang="en-US" sz="1100" dirty="0"/>
-          </a:p>
-        </p:txBody>
-      </p:sp>
-      <p:sp>
-        <p:nvSpPr>
-          <p:cNvPr id="6" name="content-15-rect-4"/>
+              <a:t> sign in, health</a:t>
+            </a:r>
+            <a:endParaRPr lang="en-US" sz="1400" dirty="0"/>
+          </a:p>
+        </p:txBody>
+      </p:sp>
+      <p:sp>
+        <p:nvSpPr>
+          <p:cNvPr id="5" name="content-15-rect-3"/>
           <p:cNvSpPr/>
           <p:nvPr/>
         </p:nvSpPr>
         <p:spPr>
           <a:xfrm>
-            <a:off x="2606040" y="1824228"/>
-            <a:ext cx="1920240" cy="219456"/>
+            <a:off x="457200" y="1755648"/>
+            <a:ext cx="4023360" cy="402336"/>
           </a:xfrm>
           <a:prstGeom prst="roundRect">
             <a:avLst>
-              <a:gd name="adj" fmla="val 12500"/>
+              <a:gd name="adj" fmla="val 13636"/>
+            </a:avLst>
+          </a:prstGeom>
+          <a:solidFill>
+            <a:schemeClr val="bg2"/>
+          </a:solidFill>
+          <a:ln/>
+        </p:spPr>
+      </p:sp>
+      <p:sp>
+        <p:nvSpPr>
+          <p:cNvPr id="6" name="content-15-text-4"/>
+          <p:cNvSpPr txBox="1"/>
+          <p:nvPr/>
+        </p:nvSpPr>
+        <p:spPr>
+          <a:xfrm>
+            <a:off x="594360" y="1755648"/>
+            <a:ext cx="3794760" cy="402336"/>
+          </a:xfrm>
+          <a:prstGeom prst="rect">
+            <a:avLst/>
+          </a:prstGeom>
+          <a:noFill/>
+          <a:ln/>
+        </p:spPr>
+        <p:txBody>
+          <a:bodyPr wrap="square" lIns="0" tIns="0" rIns="0" bIns="0" rtlCol="0" anchor="ctr"/>
+          <a:lstStyle/>
+          <a:p>
+            <a:pPr algn="l" indent="0" marL="0">
+              <a:buNone/>
+            </a:pPr>
+            <a:r>
+              <a:rPr lang="en-US" sz="1400" b="1" dirty="0">
+                <a:solidFill>
+                  <a:schemeClr val="tx1"/>
+                </a:solidFill>
+              </a:rPr>
+              <a:t>Read:</a:t>
+            </a:r>
+            <a:pPr algn="l" indent="0" marL="0">
+              <a:buNone/>
+            </a:pPr>
+            <a:r>
+              <a:rPr lang="en-US" sz="1400" dirty="0">
+                <a:solidFill>
+                  <a:schemeClr val="tx1"/>
+                </a:solidFill>
+              </a:rPr>
+              <a:t> own household only</a:t>
+            </a:r>
+            <a:endParaRPr lang="en-US" sz="1400" dirty="0"/>
+          </a:p>
+        </p:txBody>
+      </p:sp>
+      <p:sp>
+        <p:nvSpPr>
+          <p:cNvPr id="7" name="content-15-rect-5"/>
+          <p:cNvSpPr/>
+          <p:nvPr/>
+        </p:nvSpPr>
+        <p:spPr>
+          <a:xfrm>
+            <a:off x="457200" y="2231136"/>
+            <a:ext cx="4023360" cy="402336"/>
+          </a:xfrm>
+          <a:prstGeom prst="roundRect">
+            <a:avLst>
+              <a:gd name="adj" fmla="val 13636"/>
+            </a:avLst>
+          </a:prstGeom>
+          <a:solidFill>
+            <a:schemeClr val="bg2"/>
+          </a:solidFill>
+          <a:ln/>
+        </p:spPr>
+      </p:sp>
+      <p:sp>
+        <p:nvSpPr>
+          <p:cNvPr id="8" name="content-15-text-6"/>
+          <p:cNvSpPr txBox="1"/>
+          <p:nvPr/>
+        </p:nvSpPr>
+        <p:spPr>
+          <a:xfrm>
+            <a:off x="594360" y="2231136"/>
+            <a:ext cx="3794760" cy="402336"/>
+          </a:xfrm>
+          <a:prstGeom prst="rect">
+            <a:avLst/>
+          </a:prstGeom>
+          <a:noFill/>
+          <a:ln/>
+        </p:spPr>
+        <p:txBody>
+          <a:bodyPr wrap="square" lIns="0" tIns="0" rIns="0" bIns="0" rtlCol="0" anchor="ctr"/>
+          <a:lstStyle/>
+          <a:p>
+            <a:pPr algn="l" indent="0" marL="0">
+              <a:buNone/>
+            </a:pPr>
+            <a:r>
+              <a:rPr lang="en-US" sz="1400" b="1" dirty="0">
+                <a:solidFill>
+                  <a:schemeClr val="tx1"/>
+                </a:solidFill>
+              </a:rPr>
+              <a:t>Prepare:</a:t>
+            </a:r>
+            <a:pPr algn="l" indent="0" marL="0">
+              <a:buNone/>
+            </a:pPr>
+            <a:r>
+              <a:rPr lang="en-US" sz="1400" dirty="0">
+                <a:solidFill>
+                  <a:schemeClr val="tx1"/>
+                </a:solidFill>
+              </a:rPr>
+              <a:t> drafts, recipients, documents</a:t>
+            </a:r>
+            <a:endParaRPr lang="en-US" sz="1400" dirty="0"/>
+          </a:p>
+        </p:txBody>
+      </p:sp>
+      <p:sp>
+        <p:nvSpPr>
+          <p:cNvPr id="9" name="content-15-rect-7"/>
+          <p:cNvSpPr/>
+          <p:nvPr/>
+        </p:nvSpPr>
+        <p:spPr>
+          <a:xfrm>
+            <a:off x="457200" y="2706624"/>
+            <a:ext cx="4023360" cy="402336"/>
+          </a:xfrm>
+          <a:prstGeom prst="roundRect">
+            <a:avLst>
+              <a:gd name="adj" fmla="val 13636"/>
             </a:avLst>
           </a:prstGeom>
           <a:solidFill>
@@ -8331,14 +8532,14 @@
       </p:sp>
       <p:sp>
         <p:nvSpPr>
-          <p:cNvPr id="7" name="content-15-text-5"/>
-          <p:cNvSpPr txBox="1"/>
-          <p:nvPr/>
-        </p:nvSpPr>
-        <p:spPr>
-          <a:xfrm>
-            <a:off x="4599432" y="1824228"/>
-            <a:ext cx="685800" cy="219456"/>
+          <p:cNvPr id="10" name="content-15-text-8"/>
+          <p:cNvSpPr txBox="1"/>
+          <p:nvPr/>
+        </p:nvSpPr>
+        <p:spPr>
+          <a:xfrm>
+            <a:off x="594360" y="2706624"/>
+            <a:ext cx="3794760" cy="402336"/>
           </a:xfrm>
           <a:prstGeom prst="rect">
             <a:avLst/>
@@ -8354,537 +8555,42 @@
               <a:buNone/>
             </a:pPr>
             <a:r>
-              <a:rPr lang="en-US" sz="1000" b="1" dirty="0">
-                <a:solidFill>
-                  <a:schemeClr val="tx1"/>
-                </a:solidFill>
-              </a:rPr>
-              <a:t>146</a:t>
-            </a:r>
-            <a:endParaRPr lang="en-US" sz="1000" dirty="0"/>
-          </a:p>
-        </p:txBody>
-      </p:sp>
-      <p:sp>
-        <p:nvSpPr>
-          <p:cNvPr id="8" name="content-15-text-6"/>
-          <p:cNvSpPr txBox="1"/>
-          <p:nvPr/>
-        </p:nvSpPr>
-        <p:spPr>
-          <a:xfrm>
-            <a:off x="640080" y="2130552"/>
-            <a:ext cx="1874520" cy="393192"/>
-          </a:xfrm>
-          <a:prstGeom prst="rect">
-            <a:avLst/>
-          </a:prstGeom>
-          <a:noFill/>
-          <a:ln/>
-        </p:spPr>
-        <p:txBody>
-          <a:bodyPr wrap="square" lIns="0" tIns="0" rIns="0" bIns="0" rtlCol="0" anchor="ctr"/>
-          <a:lstStyle/>
-          <a:p>
-            <a:pPr algn="l" indent="0" marL="0">
-              <a:buNone/>
-            </a:pPr>
-            <a:r>
-              <a:rPr lang="en-US" sz="1100" dirty="0">
-                <a:solidFill>
-                  <a:schemeClr val="tx1"/>
-                </a:solidFill>
-              </a:rPr>
-              <a:t>Browser, CSP, XSS</a:t>
-            </a:r>
-            <a:endParaRPr lang="en-US" sz="1100" dirty="0"/>
-          </a:p>
-        </p:txBody>
-      </p:sp>
-      <p:sp>
-        <p:nvSpPr>
-          <p:cNvPr id="9" name="content-15-rect-7"/>
+              <a:rPr lang="en-US" sz="1400" b="1" dirty="0">
+                <a:solidFill>
+                  <a:schemeClr val="bg1"/>
+                </a:solidFill>
+              </a:rPr>
+              <a:t>Decide:</a:t>
+            </a:r>
+            <a:pPr algn="l" indent="0" marL="0">
+              <a:buNone/>
+            </a:pPr>
+            <a:r>
+              <a:rPr lang="en-US" sz="1400" dirty="0">
+                <a:solidFill>
+                  <a:schemeClr val="bg1"/>
+                </a:solidFill>
+              </a:rPr>
+              <a:t> human parent with fresh MFA</a:t>
+            </a:r>
+            <a:endParaRPr lang="en-US" sz="1400" dirty="0"/>
+          </a:p>
+        </p:txBody>
+      </p:sp>
+      <p:sp>
+        <p:nvSpPr>
+          <p:cNvPr id="11" name="content-15-rect-9"/>
           <p:cNvSpPr/>
           <p:nvPr/>
         </p:nvSpPr>
         <p:spPr>
           <a:xfrm>
-            <a:off x="2606040" y="2217420"/>
-            <a:ext cx="631312" cy="219456"/>
+            <a:off x="457200" y="3182112"/>
+            <a:ext cx="4023360" cy="402336"/>
           </a:xfrm>
           <a:prstGeom prst="roundRect">
             <a:avLst>
-              <a:gd name="adj" fmla="val 12500"/>
-            </a:avLst>
-          </a:prstGeom>
-          <a:solidFill>
-            <a:schemeClr val="accent1"/>
-          </a:solidFill>
-          <a:ln/>
-        </p:spPr>
-      </p:sp>
-      <p:sp>
-        <p:nvSpPr>
-          <p:cNvPr id="10" name="content-15-text-8"/>
-          <p:cNvSpPr txBox="1"/>
-          <p:nvPr/>
-        </p:nvSpPr>
-        <p:spPr>
-          <a:xfrm>
-            <a:off x="3310504" y="2217420"/>
-            <a:ext cx="685800" cy="219456"/>
-          </a:xfrm>
-          <a:prstGeom prst="rect">
-            <a:avLst/>
-          </a:prstGeom>
-          <a:noFill/>
-          <a:ln/>
-        </p:spPr>
-        <p:txBody>
-          <a:bodyPr wrap="square" lIns="0" tIns="0" rIns="0" bIns="0" rtlCol="0" anchor="ctr"/>
-          <a:lstStyle/>
-          <a:p>
-            <a:pPr algn="l" indent="0" marL="0">
-              <a:buNone/>
-            </a:pPr>
-            <a:r>
-              <a:rPr lang="en-US" sz="1000" b="1" dirty="0">
-                <a:solidFill>
-                  <a:schemeClr val="tx1"/>
-                </a:solidFill>
-              </a:rPr>
-              <a:t>48</a:t>
-            </a:r>
-            <a:endParaRPr lang="en-US" sz="1000" dirty="0"/>
-          </a:p>
-        </p:txBody>
-      </p:sp>
-      <p:sp>
-        <p:nvSpPr>
-          <p:cNvPr id="11" name="content-15-text-9"/>
-          <p:cNvSpPr txBox="1"/>
-          <p:nvPr/>
-        </p:nvSpPr>
-        <p:spPr>
-          <a:xfrm>
-            <a:off x="640080" y="2523744"/>
-            <a:ext cx="1874520" cy="393192"/>
-          </a:xfrm>
-          <a:prstGeom prst="rect">
-            <a:avLst/>
-          </a:prstGeom>
-          <a:noFill/>
-          <a:ln/>
-        </p:spPr>
-        <p:txBody>
-          <a:bodyPr wrap="square" lIns="0" tIns="0" rIns="0" bIns="0" rtlCol="0" anchor="ctr"/>
-          <a:lstStyle/>
-          <a:p>
-            <a:pPr algn="l" indent="0" marL="0">
-              <a:buNone/>
-            </a:pPr>
-            <a:r>
-              <a:rPr lang="en-US" sz="1100" dirty="0">
-                <a:solidFill>
-                  <a:schemeClr val="tx1"/>
-                </a:solidFill>
-              </a:rPr>
-              <a:t>Leak canaries (+2 info)</a:t>
-            </a:r>
-            <a:endParaRPr lang="en-US" sz="1100" dirty="0"/>
-          </a:p>
-        </p:txBody>
-      </p:sp>
-      <p:sp>
-        <p:nvSpPr>
-          <p:cNvPr id="12" name="content-15-rect-10"/>
-          <p:cNvSpPr/>
-          <p:nvPr/>
-        </p:nvSpPr>
-        <p:spPr>
-          <a:xfrm>
-            <a:off x="2606040" y="2610612"/>
-            <a:ext cx="657616" cy="219456"/>
-          </a:xfrm>
-          <a:prstGeom prst="roundRect">
-            <a:avLst>
-              <a:gd name="adj" fmla="val 12500"/>
-            </a:avLst>
-          </a:prstGeom>
-          <a:solidFill>
-            <a:schemeClr val="accent1"/>
-          </a:solidFill>
-          <a:ln/>
-        </p:spPr>
-      </p:sp>
-      <p:sp>
-        <p:nvSpPr>
-          <p:cNvPr id="13" name="content-15-text-11"/>
-          <p:cNvSpPr txBox="1"/>
-          <p:nvPr/>
-        </p:nvSpPr>
-        <p:spPr>
-          <a:xfrm>
-            <a:off x="3336808" y="2610612"/>
-            <a:ext cx="685800" cy="219456"/>
-          </a:xfrm>
-          <a:prstGeom prst="rect">
-            <a:avLst/>
-          </a:prstGeom>
-          <a:noFill/>
-          <a:ln/>
-        </p:spPr>
-        <p:txBody>
-          <a:bodyPr wrap="square" lIns="0" tIns="0" rIns="0" bIns="0" rtlCol="0" anchor="ctr"/>
-          <a:lstStyle/>
-          <a:p>
-            <a:pPr algn="l" indent="0" marL="0">
-              <a:buNone/>
-            </a:pPr>
-            <a:r>
-              <a:rPr lang="en-US" sz="1000" b="1" dirty="0">
-                <a:solidFill>
-                  <a:schemeClr val="tx1"/>
-                </a:solidFill>
-              </a:rPr>
-              <a:t>50</a:t>
-            </a:r>
-            <a:endParaRPr lang="en-US" sz="1000" dirty="0"/>
-          </a:p>
-        </p:txBody>
-      </p:sp>
-      <p:sp>
-        <p:nvSpPr>
-          <p:cNvPr id="14" name="content-15-text-12"/>
-          <p:cNvSpPr txBox="1"/>
-          <p:nvPr/>
-        </p:nvSpPr>
-        <p:spPr>
-          <a:xfrm>
-            <a:off x="640080" y="2916936"/>
-            <a:ext cx="1874520" cy="393192"/>
-          </a:xfrm>
-          <a:prstGeom prst="rect">
-            <a:avLst/>
-          </a:prstGeom>
-          <a:noFill/>
-          <a:ln/>
-        </p:spPr>
-        <p:txBody>
-          <a:bodyPr wrap="square" lIns="0" tIns="0" rIns="0" bIns="0" rtlCol="0" anchor="ctr"/>
-          <a:lstStyle/>
-          <a:p>
-            <a:pPr algn="l" indent="0" marL="0">
-              <a:buNone/>
-            </a:pPr>
-            <a:r>
-              <a:rPr lang="en-US" sz="1100" dirty="0">
-                <a:solidFill>
-                  <a:schemeClr val="tx1"/>
-                </a:solidFill>
-              </a:rPr>
-              <a:t>Hostile assistant prompts</a:t>
-            </a:r>
-            <a:endParaRPr lang="en-US" sz="1100" dirty="0"/>
-          </a:p>
-        </p:txBody>
-      </p:sp>
-      <p:sp>
-        <p:nvSpPr>
-          <p:cNvPr id="15" name="content-15-rect-13"/>
-          <p:cNvSpPr/>
-          <p:nvPr/>
-        </p:nvSpPr>
-        <p:spPr>
-          <a:xfrm>
-            <a:off x="2606040" y="3003804"/>
-            <a:ext cx="552398" cy="219456"/>
-          </a:xfrm>
-          <a:prstGeom prst="roundRect">
-            <a:avLst>
-              <a:gd name="adj" fmla="val 12500"/>
-            </a:avLst>
-          </a:prstGeom>
-          <a:solidFill>
-            <a:schemeClr val="accent1"/>
-          </a:solidFill>
-          <a:ln/>
-        </p:spPr>
-      </p:sp>
-      <p:sp>
-        <p:nvSpPr>
-          <p:cNvPr id="16" name="content-15-text-14"/>
-          <p:cNvSpPr txBox="1"/>
-          <p:nvPr/>
-        </p:nvSpPr>
-        <p:spPr>
-          <a:xfrm>
-            <a:off x="3231590" y="3003804"/>
-            <a:ext cx="685800" cy="219456"/>
-          </a:xfrm>
-          <a:prstGeom prst="rect">
-            <a:avLst/>
-          </a:prstGeom>
-          <a:noFill/>
-          <a:ln/>
-        </p:spPr>
-        <p:txBody>
-          <a:bodyPr wrap="square" lIns="0" tIns="0" rIns="0" bIns="0" rtlCol="0" anchor="ctr"/>
-          <a:lstStyle/>
-          <a:p>
-            <a:pPr algn="l" indent="0" marL="0">
-              <a:buNone/>
-            </a:pPr>
-            <a:r>
-              <a:rPr lang="en-US" sz="1000" b="1" dirty="0">
-                <a:solidFill>
-                  <a:schemeClr val="tx1"/>
-                </a:solidFill>
-              </a:rPr>
-              <a:t>42</a:t>
-            </a:r>
-            <a:endParaRPr lang="en-US" sz="1000" dirty="0"/>
-          </a:p>
-        </p:txBody>
-      </p:sp>
-      <p:sp>
-        <p:nvSpPr>
-          <p:cNvPr id="17" name="content-15-text-15"/>
-          <p:cNvSpPr txBox="1"/>
-          <p:nvPr/>
-        </p:nvSpPr>
-        <p:spPr>
-          <a:xfrm>
-            <a:off x="640080" y="3310128"/>
-            <a:ext cx="1874520" cy="393192"/>
-          </a:xfrm>
-          <a:prstGeom prst="rect">
-            <a:avLst/>
-          </a:prstGeom>
-          <a:noFill/>
-          <a:ln/>
-        </p:spPr>
-        <p:txBody>
-          <a:bodyPr wrap="square" lIns="0" tIns="0" rIns="0" bIns="0" rtlCol="0" anchor="ctr"/>
-          <a:lstStyle/>
-          <a:p>
-            <a:pPr algn="l" indent="0" marL="0">
-              <a:buNone/>
-            </a:pPr>
-            <a:r>
-              <a:rPr lang="en-US" sz="1100" dirty="0">
-                <a:solidFill>
-                  <a:schemeClr val="tx1"/>
-                </a:solidFill>
-              </a:rPr>
-              <a:t>Man-in-the-middle (+4 info)</a:t>
-            </a:r>
-            <a:endParaRPr lang="en-US" sz="1100" dirty="0"/>
-          </a:p>
-        </p:txBody>
-      </p:sp>
-      <p:sp>
-        <p:nvSpPr>
-          <p:cNvPr id="18" name="content-15-rect-16"/>
-          <p:cNvSpPr/>
-          <p:nvPr/>
-        </p:nvSpPr>
-        <p:spPr>
-          <a:xfrm>
-            <a:off x="2606040" y="3396996"/>
-            <a:ext cx="184133" cy="219456"/>
-          </a:xfrm>
-          <a:prstGeom prst="roundRect">
-            <a:avLst>
-              <a:gd name="adj" fmla="val 14898"/>
-            </a:avLst>
-          </a:prstGeom>
-          <a:solidFill>
-            <a:schemeClr val="accent1"/>
-          </a:solidFill>
-          <a:ln/>
-        </p:spPr>
-      </p:sp>
-      <p:sp>
-        <p:nvSpPr>
-          <p:cNvPr id="19" name="content-15-text-17"/>
-          <p:cNvSpPr txBox="1"/>
-          <p:nvPr/>
-        </p:nvSpPr>
-        <p:spPr>
-          <a:xfrm>
-            <a:off x="2863325" y="3396996"/>
-            <a:ext cx="685800" cy="219456"/>
-          </a:xfrm>
-          <a:prstGeom prst="rect">
-            <a:avLst/>
-          </a:prstGeom>
-          <a:noFill/>
-          <a:ln/>
-        </p:spPr>
-        <p:txBody>
-          <a:bodyPr wrap="square" lIns="0" tIns="0" rIns="0" bIns="0" rtlCol="0" anchor="ctr"/>
-          <a:lstStyle/>
-          <a:p>
-            <a:pPr algn="l" indent="0" marL="0">
-              <a:buNone/>
-            </a:pPr>
-            <a:r>
-              <a:rPr lang="en-US" sz="1000" b="1" dirty="0">
-                <a:solidFill>
-                  <a:schemeClr val="tx1"/>
-                </a:solidFill>
-              </a:rPr>
-              <a:t>14</a:t>
-            </a:r>
-            <a:endParaRPr lang="en-US" sz="1000" dirty="0"/>
-          </a:p>
-        </p:txBody>
-      </p:sp>
-      <p:sp>
-        <p:nvSpPr>
-          <p:cNvPr id="20" name="content-15-text-18"/>
-          <p:cNvSpPr txBox="1"/>
-          <p:nvPr/>
-        </p:nvSpPr>
-        <p:spPr>
-          <a:xfrm>
-            <a:off x="640080" y="3703320"/>
-            <a:ext cx="1874520" cy="393192"/>
-          </a:xfrm>
-          <a:prstGeom prst="rect">
-            <a:avLst/>
-          </a:prstGeom>
-          <a:noFill/>
-          <a:ln/>
-        </p:spPr>
-        <p:txBody>
-          <a:bodyPr wrap="square" lIns="0" tIns="0" rIns="0" bIns="0" rtlCol="0" anchor="ctr"/>
-          <a:lstStyle/>
-          <a:p>
-            <a:pPr algn="l" indent="0" marL="0">
-              <a:buNone/>
-            </a:pPr>
-            <a:r>
-              <a:rPr lang="en-US" sz="1100" dirty="0">
-                <a:solidFill>
-                  <a:schemeClr val="tx1"/>
-                </a:solidFill>
-              </a:rPr>
-              <a:t>Login and MFA guessing</a:t>
-            </a:r>
-            <a:endParaRPr lang="en-US" sz="1100" dirty="0"/>
-          </a:p>
-        </p:txBody>
-      </p:sp>
-      <p:sp>
-        <p:nvSpPr>
-          <p:cNvPr id="21" name="content-15-rect-19"/>
-          <p:cNvSpPr/>
-          <p:nvPr/>
-        </p:nvSpPr>
-        <p:spPr>
-          <a:xfrm>
-            <a:off x="2606040" y="3790188"/>
-            <a:ext cx="105219" cy="219456"/>
-          </a:xfrm>
-          <a:prstGeom prst="roundRect">
-            <a:avLst>
-              <a:gd name="adj" fmla="val 26071"/>
-            </a:avLst>
-          </a:prstGeom>
-          <a:solidFill>
-            <a:schemeClr val="accent1"/>
-          </a:solidFill>
-          <a:ln/>
-        </p:spPr>
-      </p:sp>
-      <p:sp>
-        <p:nvSpPr>
-          <p:cNvPr id="22" name="content-15-text-20"/>
-          <p:cNvSpPr txBox="1"/>
-          <p:nvPr/>
-        </p:nvSpPr>
-        <p:spPr>
-          <a:xfrm>
-            <a:off x="2784411" y="3790188"/>
-            <a:ext cx="685800" cy="219456"/>
-          </a:xfrm>
-          <a:prstGeom prst="rect">
-            <a:avLst/>
-          </a:prstGeom>
-          <a:noFill/>
-          <a:ln/>
-        </p:spPr>
-        <p:txBody>
-          <a:bodyPr wrap="square" lIns="0" tIns="0" rIns="0" bIns="0" rtlCol="0" anchor="ctr"/>
-          <a:lstStyle/>
-          <a:p>
-            <a:pPr algn="l" indent="0" marL="0">
-              <a:buNone/>
-            </a:pPr>
-            <a:r>
-              <a:rPr lang="en-US" sz="1000" b="1" dirty="0">
-                <a:solidFill>
-                  <a:schemeClr val="tx1"/>
-                </a:solidFill>
-              </a:rPr>
-              <a:t>8</a:t>
-            </a:r>
-            <a:endParaRPr lang="en-US" sz="1000" dirty="0"/>
-          </a:p>
-        </p:txBody>
-      </p:sp>
-      <p:sp>
-        <p:nvSpPr>
-          <p:cNvPr id="23" name="content-15-text-21"/>
-          <p:cNvSpPr txBox="1"/>
-          <p:nvPr/>
-        </p:nvSpPr>
-        <p:spPr>
-          <a:xfrm>
-            <a:off x="640080" y="4114800"/>
-            <a:ext cx="4389120" cy="274320"/>
-          </a:xfrm>
-          <a:prstGeom prst="rect">
-            <a:avLst/>
-          </a:prstGeom>
-          <a:noFill/>
-          <a:ln/>
-        </p:spPr>
-        <p:txBody>
-          <a:bodyPr wrap="square" lIns="0" tIns="0" rIns="0" bIns="0" rtlCol="0" anchor="t"/>
-          <a:lstStyle/>
-          <a:p>
-            <a:pPr algn="l" indent="0" marL="0">
-              <a:buNone/>
-            </a:pPr>
-            <a:r>
-              <a:rPr lang="en-US" sz="1000" dirty="0">
-                <a:solidFill>
-                  <a:schemeClr val="tx2"/>
-                </a:solidFill>
-              </a:rPr>
-              <a:t>314 records: 308 PASS, 6 INFO. Team-run lab results; not 314 different attacks.</a:t>
-            </a:r>
-            <a:endParaRPr lang="en-US" sz="1000" dirty="0"/>
-          </a:p>
-        </p:txBody>
-      </p:sp>
-      <p:sp>
-        <p:nvSpPr>
-          <p:cNvPr id="24" name="content-15-rect-22"/>
-          <p:cNvSpPr/>
-          <p:nvPr/>
-        </p:nvSpPr>
-        <p:spPr>
-          <a:xfrm>
-            <a:off x="5394960" y="1234440"/>
-            <a:ext cx="3291840" cy="3200400"/>
-          </a:xfrm>
-          <a:prstGeom prst="roundRect">
-            <a:avLst>
-              <a:gd name="adj" fmla="val 2286"/>
+              <a:gd name="adj" fmla="val 13636"/>
             </a:avLst>
           </a:prstGeom>
           <a:solidFill>
@@ -8895,14 +8601,14 @@
       </p:sp>
       <p:sp>
         <p:nvSpPr>
-          <p:cNvPr id="25" name="content-15-text-23"/>
-          <p:cNvSpPr txBox="1"/>
-          <p:nvPr/>
-        </p:nvSpPr>
-        <p:spPr>
-          <a:xfrm>
-            <a:off x="5532120" y="1298448"/>
-            <a:ext cx="3017520" cy="365760"/>
+          <p:cNvPr id="12" name="content-15-text-10"/>
+          <p:cNvSpPr txBox="1"/>
+          <p:nvPr/>
+        </p:nvSpPr>
+        <p:spPr>
+          <a:xfrm>
+            <a:off x="594360" y="3182112"/>
+            <a:ext cx="3794760" cy="402336"/>
           </a:xfrm>
           <a:prstGeom prst="rect">
             <a:avLst/>
@@ -8918,27 +8624,165 @@
               <a:buNone/>
             </a:pPr>
             <a:r>
-              <a:rPr lang="en-US" sz="1300" b="1" dirty="0">
+              <a:rPr lang="en-US" sz="1400" b="1" dirty="0">
                 <a:solidFill>
                   <a:schemeClr val="tx1"/>
                 </a:solidFill>
               </a:rPr>
-              <a:t>The man-in-the-middle test</a:t>
-            </a:r>
-            <a:endParaRPr lang="en-US" sz="1300" dirty="0"/>
-          </a:p>
-        </p:txBody>
-      </p:sp>
-      <p:sp>
-        <p:nvSpPr>
-          <p:cNvPr id="26" name="content-15-text-24"/>
-          <p:cNvSpPr txBox="1"/>
-          <p:nvPr/>
-        </p:nvSpPr>
-        <p:spPr>
-          <a:xfrm>
-            <a:off x="5532120" y="1691640"/>
-            <a:ext cx="3017520" cy="274320"/>
+              <a:t>Administer:</a:t>
+            </a:r>
+            <a:pPr algn="l" indent="0" marL="0">
+              <a:buNone/>
+            </a:pPr>
+            <a:r>
+              <a:rPr lang="en-US" sz="1400" dirty="0">
+                <a:solidFill>
+                  <a:schemeClr val="tx1"/>
+                </a:solidFill>
+              </a:rPr>
+              <a:t> reviewer rules and Verify</a:t>
+            </a:r>
+            <a:endParaRPr lang="en-US" sz="1400" dirty="0"/>
+          </a:p>
+        </p:txBody>
+      </p:sp>
+      <p:sp>
+        <p:nvSpPr>
+          <p:cNvPr id="13" name="content-15-rect-11"/>
+          <p:cNvSpPr/>
+          <p:nvPr/>
+        </p:nvSpPr>
+        <p:spPr>
+          <a:xfrm>
+            <a:off x="457200" y="3657600"/>
+            <a:ext cx="4023360" cy="402336"/>
+          </a:xfrm>
+          <a:prstGeom prst="roundRect">
+            <a:avLst>
+              <a:gd name="adj" fmla="val 13636"/>
+            </a:avLst>
+          </a:prstGeom>
+          <a:solidFill>
+            <a:schemeClr val="accent3"/>
+          </a:solidFill>
+          <a:ln/>
+        </p:spPr>
+      </p:sp>
+      <p:sp>
+        <p:nvSpPr>
+          <p:cNvPr id="14" name="content-15-text-12"/>
+          <p:cNvSpPr txBox="1"/>
+          <p:nvPr/>
+        </p:nvSpPr>
+        <p:spPr>
+          <a:xfrm>
+            <a:off x="594360" y="3657600"/>
+            <a:ext cx="3794760" cy="402336"/>
+          </a:xfrm>
+          <a:prstGeom prst="rect">
+            <a:avLst/>
+          </a:prstGeom>
+          <a:noFill/>
+          <a:ln/>
+        </p:spPr>
+        <p:txBody>
+          <a:bodyPr wrap="square" lIns="0" tIns="0" rIns="0" bIns="0" rtlCol="0" anchor="ctr"/>
+          <a:lstStyle/>
+          <a:p>
+            <a:pPr algn="l" indent="0" marL="0">
+              <a:buNone/>
+            </a:pPr>
+            <a:r>
+              <a:rPr lang="en-US" sz="1400" b="1" dirty="0">
+                <a:solidFill>
+                  <a:schemeClr val="bg1"/>
+                </a:solidFill>
+              </a:rPr>
+              <a:t>Never for the AI:</a:t>
+            </a:r>
+            <a:pPr algn="l" indent="0" marL="0">
+              <a:buNone/>
+            </a:pPr>
+            <a:r>
+              <a:rPr lang="en-US" sz="1400" dirty="0">
+                <a:solidFill>
+                  <a:schemeClr val="bg1"/>
+                </a:solidFill>
+              </a:rPr>
+              <a:t> approve, cancel, limits</a:t>
+            </a:r>
+            <a:endParaRPr lang="en-US" sz="1400" dirty="0"/>
+          </a:p>
+        </p:txBody>
+      </p:sp>
+      <p:sp>
+        <p:nvSpPr>
+          <p:cNvPr id="15" name="content-15-rect-13"/>
+          <p:cNvSpPr/>
+          <p:nvPr/>
+        </p:nvSpPr>
+        <p:spPr>
+          <a:xfrm>
+            <a:off x="4590288" y="1207008"/>
+            <a:ext cx="4169664" cy="1375664"/>
+          </a:xfrm>
+          <a:prstGeom prst="roundRect">
+            <a:avLst>
+              <a:gd name="adj" fmla="val 3988"/>
+            </a:avLst>
+          </a:prstGeom>
+          <a:solidFill>
+            <a:schemeClr val="bg1"/>
+          </a:solidFill>
+          <a:ln w="9525">
+            <a:solidFill>
+              <a:schemeClr val="accent5"/>
+            </a:solidFill>
+            <a:prstDash val="solid"/>
+          </a:ln>
+          <a:effectLst>
+            <a:outerShdw sx="100000" sy="100000" kx="0" ky="0" algn="bl" rotWithShape="0" blurRad="101600" dist="25400" dir="5400000">
+              <a:srgbClr val="0B2545">
+                <a:alpha val="18000"/>
+              </a:srgbClr>
+            </a:outerShdw>
+          </a:effectLst>
+        </p:spPr>
+      </p:sp>
+      <p:pic>
+        <p:nvPicPr>
+          <p:cNvPr id="16" name="content-15-image-14" descr="The live audit log: Verify the hash chain says PASS">    </p:cNvPr>
+          <p:cNvPicPr>
+            <a:picLocks noChangeAspect="1"/>
+          </p:cNvPicPr>
+          <p:nvPr/>
+        </p:nvPicPr>
+        <p:blipFill>
+          <a:blip r:embed="rId1"/>
+          <a:stretch>
+            <a:fillRect/>
+          </a:stretch>
+        </p:blipFill>
+        <p:spPr>
+          <a:xfrm>
+            <a:off x="4663440" y="1280160"/>
+            <a:ext cx="4023360" cy="1229360"/>
+          </a:xfrm>
+          <a:prstGeom prst="rect">
+            <a:avLst/>
+          </a:prstGeom>
+        </p:spPr>
+      </p:pic>
+      <p:sp>
+        <p:nvSpPr>
+          <p:cNvPr id="17" name="content-15-text-15"/>
+          <p:cNvSpPr txBox="1"/>
+          <p:nvPr/>
+        </p:nvSpPr>
+        <p:spPr>
+          <a:xfrm>
+            <a:off x="4663440" y="2637536"/>
+            <a:ext cx="4023360" cy="411480"/>
           </a:xfrm>
           <a:prstGeom prst="rect">
             <a:avLst/>
@@ -8954,27 +8798,165 @@
               <a:buNone/>
             </a:pPr>
             <a:r>
-              <a:rPr lang="en-US" sz="1200" b="1" dirty="0">
-                <a:solidFill>
-                  <a:schemeClr val="accent6"/>
-                </a:solidFill>
-              </a:rPr>
-              <a:t>Held (14 of 14)</a:t>
-            </a:r>
-            <a:endParaRPr lang="en-US" sz="1200" dirty="0"/>
-          </a:p>
-        </p:txBody>
-      </p:sp>
-      <p:sp>
-        <p:nvSpPr>
-          <p:cNvPr id="27" name="content-15-text-25"/>
-          <p:cNvSpPr txBox="1"/>
-          <p:nvPr/>
-        </p:nvSpPr>
-        <p:spPr>
-          <a:xfrm>
-            <a:off x="5532120" y="1965960"/>
-            <a:ext cx="3017520" cy="1280160"/>
+              <a:rPr lang="en-US" sz="1050" dirty="0">
+                <a:solidFill>
+                  <a:schemeClr val="tx2"/>
+                </a:solidFill>
+              </a:rPr>
+              <a:t>Live, studyroute.bot-keep.xyz, 19 Oct 2026: Verify the hash chain gives PASS on 40 events.</a:t>
+            </a:r>
+            <a:endParaRPr lang="en-US" sz="1050" dirty="0"/>
+          </a:p>
+        </p:txBody>
+      </p:sp>
+      <p:sp>
+        <p:nvSpPr>
+          <p:cNvPr id="18" name="content-15-rect-16"/>
+          <p:cNvSpPr/>
+          <p:nvPr/>
+        </p:nvSpPr>
+        <p:spPr>
+          <a:xfrm>
+            <a:off x="4663440" y="3063240"/>
+            <a:ext cx="4023360" cy="777240"/>
+          </a:xfrm>
+          <a:prstGeom prst="roundRect">
+            <a:avLst>
+              <a:gd name="adj" fmla="val 9412"/>
+            </a:avLst>
+          </a:prstGeom>
+          <a:solidFill>
+            <a:schemeClr val="bg2"/>
+          </a:solidFill>
+          <a:ln/>
+        </p:spPr>
+      </p:sp>
+      <p:sp>
+        <p:nvSpPr>
+          <p:cNvPr id="19" name="content-15-text-17"/>
+          <p:cNvSpPr txBox="1"/>
+          <p:nvPr/>
+        </p:nvSpPr>
+        <p:spPr>
+          <a:xfrm>
+            <a:off x="4800600" y="3108960"/>
+            <a:ext cx="3749040" cy="685800"/>
+          </a:xfrm>
+          <a:prstGeom prst="rect">
+            <a:avLst/>
+          </a:prstGeom>
+          <a:noFill/>
+          <a:ln/>
+        </p:spPr>
+        <p:txBody>
+          <a:bodyPr wrap="square" lIns="0" tIns="0" rIns="0" bIns="0" rtlCol="0" anchor="ctr"/>
+          <a:lstStyle/>
+          <a:p>
+            <a:pPr algn="l" indent="0" marL="0">
+              <a:buNone/>
+            </a:pPr>
+            <a:r>
+              <a:rPr lang="en-US" sz="1100" b="1" dirty="0">
+                <a:solidFill>
+                  <a:schemeClr val="tx1"/>
+                </a:solidFill>
+              </a:rPr>
+              <a:t>Tamper test: </a:t>
+            </a:r>
+            <a:pPr algn="l" indent="0" marL="0">
+              <a:buNone/>
+            </a:pPr>
+            <a:r>
+              <a:rPr lang="en-US" sz="1100" dirty="0">
+                <a:solidFill>
+                  <a:schemeClr val="tx1"/>
+                </a:solidFill>
+              </a:rPr>
+              <a:t>edit one audit row behind the app's back and Verify fails at that event; restore it and Verify passes.</a:t>
+            </a:r>
+            <a:endParaRPr lang="en-US" sz="1100" dirty="0"/>
+          </a:p>
+        </p:txBody>
+      </p:sp>
+      <p:sp>
+        <p:nvSpPr>
+          <p:cNvPr id="20" name="content-15-rect-18"/>
+          <p:cNvSpPr/>
+          <p:nvPr/>
+        </p:nvSpPr>
+        <p:spPr>
+          <a:xfrm>
+            <a:off x="4663440" y="3931920"/>
+            <a:ext cx="4023360" cy="777240"/>
+          </a:xfrm>
+          <a:prstGeom prst="roundRect">
+            <a:avLst>
+              <a:gd name="adj" fmla="val 9412"/>
+            </a:avLst>
+          </a:prstGeom>
+          <a:solidFill>
+            <a:schemeClr val="bg2"/>
+          </a:solidFill>
+          <a:ln/>
+        </p:spPr>
+      </p:sp>
+      <p:sp>
+        <p:nvSpPr>
+          <p:cNvPr id="21" name="content-15-text-19"/>
+          <p:cNvSpPr txBox="1"/>
+          <p:nvPr/>
+        </p:nvSpPr>
+        <p:spPr>
+          <a:xfrm>
+            <a:off x="4800600" y="3977640"/>
+            <a:ext cx="3749040" cy="685800"/>
+          </a:xfrm>
+          <a:prstGeom prst="rect">
+            <a:avLst/>
+          </a:prstGeom>
+          <a:noFill/>
+          <a:ln/>
+        </p:spPr>
+        <p:txBody>
+          <a:bodyPr wrap="square" lIns="0" tIns="0" rIns="0" bIns="0" rtlCol="0" anchor="ctr"/>
+          <a:lstStyle/>
+          <a:p>
+            <a:pPr algn="l" indent="0" marL="0">
+              <a:buNone/>
+            </a:pPr>
+            <a:r>
+              <a:rPr lang="en-US" sz="1100" b="1" dirty="0">
+                <a:solidFill>
+                  <a:schemeClr val="tx1"/>
+                </a:solidFill>
+              </a:rPr>
+              <a:t>Also: </a:t>
+            </a:r>
+            <a:pPr algn="l" indent="0" marL="0">
+              <a:buNone/>
+            </a:pPr>
+            <a:r>
+              <a:rPr lang="en-US" sz="1100" dirty="0">
+                <a:solidFill>
+                  <a:schemeClr val="tx1"/>
+                </a:solidFill>
+              </a:rPr>
+              <a:t>each payment's compliance report carries a hash your browser can recompute. Every threat has a test: docs/SECURITY.md.</a:t>
+            </a:r>
+            <a:endParaRPr lang="en-US" sz="1100" dirty="0"/>
+          </a:p>
+        </p:txBody>
+      </p:sp>
+      <p:sp>
+        <p:nvSpPr>
+          <p:cNvPr id="22" name="content-15-text-20"/>
+          <p:cNvSpPr txBox="1"/>
+          <p:nvPr/>
+        </p:nvSpPr>
+        <p:spPr>
+          <a:xfrm>
+            <a:off x="457200" y="4864608"/>
+            <a:ext cx="8229600" cy="201168"/>
           </a:xfrm>
           <a:prstGeom prst="rect">
             <a:avLst/>
@@ -8986,194 +8968,6 @@
           <a:bodyPr wrap="square" lIns="0" tIns="0" rIns="0" bIns="0" rtlCol="0" anchor="t"/>
           <a:lstStyle/>
           <a:p>
-            <a:pPr algn="l" marL="342900" indent="-342900">
-              <a:spcAft>
-                <a:spcPts val="200"/>
-              </a:spcAft>
-              <a:buSzPct val="100000"/>
-              <a:buChar char="•"/>
-            </a:pPr>
-            <a:r>
-              <a:rPr lang="en-US" sz="1050" dirty="0">
-                <a:solidFill>
-                  <a:schemeClr val="tx1"/>
-                </a:solidFill>
-              </a:rPr>
-              <a:t>Altered or redirected approval: refused</a:t>
-            </a:r>
-            <a:endParaRPr lang="en-US" sz="1050" dirty="0"/>
-          </a:p>
-          <a:p>
-            <a:pPr algn="l" marL="342900" indent="-342900">
-              <a:spcAft>
-                <a:spcPts val="200"/>
-              </a:spcAft>
-              <a:buSzPct val="100000"/>
-              <a:buChar char="•"/>
-            </a:pPr>
-            <a:r>
-              <a:rPr lang="en-US" sz="1050" dirty="0">
-                <a:solidFill>
-                  <a:schemeClr val="tx1"/>
-                </a:solidFill>
-              </a:rPr>
-              <a:t>Stripped or swapped MFA proof: refused</a:t>
-            </a:r>
-            <a:endParaRPr lang="en-US" sz="1050" dirty="0"/>
-          </a:p>
-          <a:p>
-            <a:pPr algn="l" marL="342900" indent="-342900">
-              <a:spcAft>
-                <a:spcPts val="200"/>
-              </a:spcAft>
-              <a:buSzPct val="100000"/>
-              <a:buChar char="•"/>
-            </a:pPr>
-            <a:r>
-              <a:rPr lang="en-US" sz="1050" dirty="0">
-                <a:solidFill>
-                  <a:schemeClr val="tx1"/>
-                </a:solidFill>
-              </a:rPr>
-              <a:t>Stolen token cannot approve or allowlist</a:t>
-            </a:r>
-            <a:endParaRPr lang="en-US" sz="1050" dirty="0"/>
-          </a:p>
-          <a:p>
-            <a:pPr algn="l" marL="342900" indent="-342900">
-              <a:spcAft>
-                <a:spcPts val="200"/>
-              </a:spcAft>
-              <a:buSzPct val="100000"/>
-              <a:buChar char="•"/>
-            </a:pPr>
-            <a:r>
-              <a:rPr lang="en-US" sz="1050" dirty="0">
-                <a:solidFill>
-                  <a:schemeClr val="tx1"/>
-                </a:solidFill>
-              </a:rPr>
-              <a:t>Webhook tamper and replay: refused</a:t>
-            </a:r>
-            <a:endParaRPr lang="en-US" sz="1050" dirty="0"/>
-          </a:p>
-        </p:txBody>
-      </p:sp>
-      <p:sp>
-        <p:nvSpPr>
-          <p:cNvPr id="28" name="content-15-text-26"/>
-          <p:cNvSpPr txBox="1"/>
-          <p:nvPr/>
-        </p:nvSpPr>
-        <p:spPr>
-          <a:xfrm>
-            <a:off x="5532120" y="3200400"/>
-            <a:ext cx="3017520" cy="274320"/>
-          </a:xfrm>
-          <a:prstGeom prst="rect">
-            <a:avLst/>
-          </a:prstGeom>
-          <a:noFill/>
-          <a:ln/>
-        </p:spPr>
-        <p:txBody>
-          <a:bodyPr wrap="square" lIns="0" tIns="0" rIns="0" bIns="0" rtlCol="0" anchor="t"/>
-          <a:lstStyle/>
-          <a:p>
-            <a:pPr algn="l" indent="0" marL="0">
-              <a:buNone/>
-            </a:pPr>
-            <a:r>
-              <a:rPr lang="en-US" sz="1200" b="1" dirty="0">
-                <a:solidFill>
-                  <a:schemeClr val="accent3"/>
-                </a:solidFill>
-              </a:rPr>
-              <a:t>Did not hold</a:t>
-            </a:r>
-            <a:endParaRPr lang="en-US" sz="1200" dirty="0"/>
-          </a:p>
-        </p:txBody>
-      </p:sp>
-      <p:sp>
-        <p:nvSpPr>
-          <p:cNvPr id="29" name="content-15-text-27"/>
-          <p:cNvSpPr txBox="1"/>
-          <p:nvPr/>
-        </p:nvSpPr>
-        <p:spPr>
-          <a:xfrm>
-            <a:off x="5532120" y="3474720"/>
-            <a:ext cx="3017520" cy="914400"/>
-          </a:xfrm>
-          <a:prstGeom prst="rect">
-            <a:avLst/>
-          </a:prstGeom>
-          <a:noFill/>
-          <a:ln/>
-        </p:spPr>
-        <p:txBody>
-          <a:bodyPr wrap="square" lIns="0" tIns="0" rIns="0" bIns="0" rtlCol="0" anchor="t"/>
-          <a:lstStyle/>
-          <a:p>
-            <a:pPr algn="l" marL="342900" indent="-342900">
-              <a:spcAft>
-                <a:spcPts val="200"/>
-              </a:spcAft>
-              <a:buSzPct val="100000"/>
-              <a:buChar char="•"/>
-            </a:pPr>
-            <a:r>
-              <a:rPr lang="en-US" sz="1050" dirty="0">
-                <a:solidFill>
-                  <a:schemeClr val="tx1"/>
-                </a:solidFill>
-              </a:rPr>
-              <a:t>Plain HTTP: a listener reads the password and token</a:t>
-            </a:r>
-            <a:endParaRPr lang="en-US" sz="1050" dirty="0"/>
-          </a:p>
-          <a:p>
-            <a:pPr algn="l" marL="342900" indent="-342900">
-              <a:spcAft>
-                <a:spcPts val="200"/>
-              </a:spcAft>
-              <a:buSzPct val="100000"/>
-              <a:buChar char="•"/>
-            </a:pPr>
-            <a:r>
-              <a:rPr lang="en-US" sz="1050" dirty="0">
-                <a:solidFill>
-                  <a:schemeClr val="tx1"/>
-                </a:solidFill>
-              </a:rPr>
-              <a:t>A stolen token reads payments and cancels a draft for 15 minutes</a:t>
-            </a:r>
-            <a:endParaRPr lang="en-US" sz="1050" dirty="0"/>
-          </a:p>
-        </p:txBody>
-      </p:sp>
-      <p:sp>
-        <p:nvSpPr>
-          <p:cNvPr id="30" name="content-15-text-28"/>
-          <p:cNvSpPr txBox="1"/>
-          <p:nvPr/>
-        </p:nvSpPr>
-        <p:spPr>
-          <a:xfrm>
-            <a:off x="457200" y="4526280"/>
-            <a:ext cx="8229600" cy="274320"/>
-          </a:xfrm>
-          <a:prstGeom prst="rect">
-            <a:avLst/>
-          </a:prstGeom>
-          <a:noFill/>
-          <a:ln/>
-        </p:spPr>
-        <p:txBody>
-          <a:bodyPr wrap="square" lIns="0" tIns="0" rIns="0" bIns="0" rtlCol="0" anchor="t"/>
-          <a:lstStyle/>
-          <a:p>
             <a:pPr algn="l" indent="0" marL="0">
               <a:buNone/>
             </a:pPr>
@@ -9183,7 +8977,7 @@
                   <a:schemeClr val="tx2"/>
                 </a:solidFill>
               </a:rPr>
-              <a:t>Raw logs and hashes: submission/evidence/security_2026-10-18/ and the security self-assessment, sections 13 and 14.</a:t>
+              <a:t>Raw logs: submission/evidence/.</a:t>
             </a:r>
             <a:endParaRPr lang="en-US" sz="1000" dirty="0"/>
           </a:p>
@@ -9249,6 +9043,1048 @@
                 <a:ea typeface="+mj-lt" pitchFamily="34" charset="-122"/>
                 <a:cs typeface="+mj-lt" pitchFamily="34" charset="-120"/>
               </a:rPr>
+              <a:t>Attacking our own app</a:t>
+            </a:r>
+            <a:endParaRPr lang="en-US" sz="3600" dirty="0"/>
+          </a:p>
+        </p:txBody>
+      </p:sp>
+      <p:sp>
+        <p:nvSpPr>
+          <p:cNvPr id="3" name="content-16-rect-1"/>
+          <p:cNvSpPr/>
+          <p:nvPr/>
+        </p:nvSpPr>
+        <p:spPr>
+          <a:xfrm>
+            <a:off x="457200" y="1234440"/>
+            <a:ext cx="4754880" cy="3200400"/>
+          </a:xfrm>
+          <a:prstGeom prst="roundRect">
+            <a:avLst>
+              <a:gd name="adj" fmla="val 2286"/>
+            </a:avLst>
+          </a:prstGeom>
+          <a:solidFill>
+            <a:schemeClr val="bg2"/>
+          </a:solidFill>
+          <a:ln/>
+        </p:spPr>
+      </p:sp>
+      <p:sp>
+        <p:nvSpPr>
+          <p:cNvPr id="4" name="content-16-text-2"/>
+          <p:cNvSpPr txBox="1"/>
+          <p:nvPr/>
+        </p:nvSpPr>
+        <p:spPr>
+          <a:xfrm>
+            <a:off x="640080" y="1298448"/>
+            <a:ext cx="4389120" cy="365760"/>
+          </a:xfrm>
+          <a:prstGeom prst="rect">
+            <a:avLst/>
+          </a:prstGeom>
+          <a:noFill/>
+          <a:ln/>
+        </p:spPr>
+        <p:txBody>
+          <a:bodyPr wrap="square" lIns="0" tIns="0" rIns="0" bIns="0" rtlCol="0" anchor="ctr"/>
+          <a:lstStyle/>
+          <a:p>
+            <a:pPr algn="l" indent="0" marL="0">
+              <a:buNone/>
+            </a:pPr>
+            <a:r>
+              <a:rPr lang="en-US" sz="1300" b="1" dirty="0">
+                <a:solidFill>
+                  <a:schemeClr val="tx1"/>
+                </a:solidFill>
+              </a:rPr>
+              <a:t>Recorded checks by tool (all pass)</a:t>
+            </a:r>
+            <a:endParaRPr lang="en-US" sz="1300" dirty="0"/>
+          </a:p>
+        </p:txBody>
+      </p:sp>
+      <p:sp>
+        <p:nvSpPr>
+          <p:cNvPr id="5" name="content-16-text-3"/>
+          <p:cNvSpPr txBox="1"/>
+          <p:nvPr/>
+        </p:nvSpPr>
+        <p:spPr>
+          <a:xfrm>
+            <a:off x="640080" y="1737360"/>
+            <a:ext cx="1874520" cy="393192"/>
+          </a:xfrm>
+          <a:prstGeom prst="rect">
+            <a:avLst/>
+          </a:prstGeom>
+          <a:noFill/>
+          <a:ln/>
+        </p:spPr>
+        <p:txBody>
+          <a:bodyPr wrap="square" lIns="0" tIns="0" rIns="0" bIns="0" rtlCol="0" anchor="ctr"/>
+          <a:lstStyle/>
+          <a:p>
+            <a:pPr algn="l" indent="0" marL="0">
+              <a:buNone/>
+            </a:pPr>
+            <a:r>
+              <a:rPr lang="en-US" sz="1100" dirty="0">
+                <a:solidFill>
+                  <a:schemeClr val="tx1"/>
+                </a:solidFill>
+              </a:rPr>
+              <a:t>Access control, injection</a:t>
+            </a:r>
+            <a:endParaRPr lang="en-US" sz="1100" dirty="0"/>
+          </a:p>
+        </p:txBody>
+      </p:sp>
+      <p:sp>
+        <p:nvSpPr>
+          <p:cNvPr id="6" name="content-16-rect-4"/>
+          <p:cNvSpPr/>
+          <p:nvPr/>
+        </p:nvSpPr>
+        <p:spPr>
+          <a:xfrm>
+            <a:off x="2606040" y="1824228"/>
+            <a:ext cx="1920240" cy="219456"/>
+          </a:xfrm>
+          <a:prstGeom prst="roundRect">
+            <a:avLst>
+              <a:gd name="adj" fmla="val 12500"/>
+            </a:avLst>
+          </a:prstGeom>
+          <a:solidFill>
+            <a:schemeClr val="accent1"/>
+          </a:solidFill>
+          <a:ln/>
+        </p:spPr>
+      </p:sp>
+      <p:sp>
+        <p:nvSpPr>
+          <p:cNvPr id="7" name="content-16-text-5"/>
+          <p:cNvSpPr txBox="1"/>
+          <p:nvPr/>
+        </p:nvSpPr>
+        <p:spPr>
+          <a:xfrm>
+            <a:off x="4599432" y="1824228"/>
+            <a:ext cx="685800" cy="219456"/>
+          </a:xfrm>
+          <a:prstGeom prst="rect">
+            <a:avLst/>
+          </a:prstGeom>
+          <a:noFill/>
+          <a:ln/>
+        </p:spPr>
+        <p:txBody>
+          <a:bodyPr wrap="square" lIns="0" tIns="0" rIns="0" bIns="0" rtlCol="0" anchor="ctr"/>
+          <a:lstStyle/>
+          <a:p>
+            <a:pPr algn="l" indent="0" marL="0">
+              <a:buNone/>
+            </a:pPr>
+            <a:r>
+              <a:rPr lang="en-US" sz="1000" b="1" dirty="0">
+                <a:solidFill>
+                  <a:schemeClr val="tx1"/>
+                </a:solidFill>
+              </a:rPr>
+              <a:t>146</a:t>
+            </a:r>
+            <a:endParaRPr lang="en-US" sz="1000" dirty="0"/>
+          </a:p>
+        </p:txBody>
+      </p:sp>
+      <p:sp>
+        <p:nvSpPr>
+          <p:cNvPr id="8" name="content-16-text-6"/>
+          <p:cNvSpPr txBox="1"/>
+          <p:nvPr/>
+        </p:nvSpPr>
+        <p:spPr>
+          <a:xfrm>
+            <a:off x="640080" y="2130552"/>
+            <a:ext cx="1874520" cy="393192"/>
+          </a:xfrm>
+          <a:prstGeom prst="rect">
+            <a:avLst/>
+          </a:prstGeom>
+          <a:noFill/>
+          <a:ln/>
+        </p:spPr>
+        <p:txBody>
+          <a:bodyPr wrap="square" lIns="0" tIns="0" rIns="0" bIns="0" rtlCol="0" anchor="ctr"/>
+          <a:lstStyle/>
+          <a:p>
+            <a:pPr algn="l" indent="0" marL="0">
+              <a:buNone/>
+            </a:pPr>
+            <a:r>
+              <a:rPr lang="en-US" sz="1100" dirty="0">
+                <a:solidFill>
+                  <a:schemeClr val="tx1"/>
+                </a:solidFill>
+              </a:rPr>
+              <a:t>Browser, CSP, XSS</a:t>
+            </a:r>
+            <a:endParaRPr lang="en-US" sz="1100" dirty="0"/>
+          </a:p>
+        </p:txBody>
+      </p:sp>
+      <p:sp>
+        <p:nvSpPr>
+          <p:cNvPr id="9" name="content-16-rect-7"/>
+          <p:cNvSpPr/>
+          <p:nvPr/>
+        </p:nvSpPr>
+        <p:spPr>
+          <a:xfrm>
+            <a:off x="2606040" y="2217420"/>
+            <a:ext cx="631312" cy="219456"/>
+          </a:xfrm>
+          <a:prstGeom prst="roundRect">
+            <a:avLst>
+              <a:gd name="adj" fmla="val 12500"/>
+            </a:avLst>
+          </a:prstGeom>
+          <a:solidFill>
+            <a:schemeClr val="accent1"/>
+          </a:solidFill>
+          <a:ln/>
+        </p:spPr>
+      </p:sp>
+      <p:sp>
+        <p:nvSpPr>
+          <p:cNvPr id="10" name="content-16-text-8"/>
+          <p:cNvSpPr txBox="1"/>
+          <p:nvPr/>
+        </p:nvSpPr>
+        <p:spPr>
+          <a:xfrm>
+            <a:off x="3310504" y="2217420"/>
+            <a:ext cx="685800" cy="219456"/>
+          </a:xfrm>
+          <a:prstGeom prst="rect">
+            <a:avLst/>
+          </a:prstGeom>
+          <a:noFill/>
+          <a:ln/>
+        </p:spPr>
+        <p:txBody>
+          <a:bodyPr wrap="square" lIns="0" tIns="0" rIns="0" bIns="0" rtlCol="0" anchor="ctr"/>
+          <a:lstStyle/>
+          <a:p>
+            <a:pPr algn="l" indent="0" marL="0">
+              <a:buNone/>
+            </a:pPr>
+            <a:r>
+              <a:rPr lang="en-US" sz="1000" b="1" dirty="0">
+                <a:solidFill>
+                  <a:schemeClr val="tx1"/>
+                </a:solidFill>
+              </a:rPr>
+              <a:t>48</a:t>
+            </a:r>
+            <a:endParaRPr lang="en-US" sz="1000" dirty="0"/>
+          </a:p>
+        </p:txBody>
+      </p:sp>
+      <p:sp>
+        <p:nvSpPr>
+          <p:cNvPr id="11" name="content-16-text-9"/>
+          <p:cNvSpPr txBox="1"/>
+          <p:nvPr/>
+        </p:nvSpPr>
+        <p:spPr>
+          <a:xfrm>
+            <a:off x="640080" y="2523744"/>
+            <a:ext cx="1874520" cy="393192"/>
+          </a:xfrm>
+          <a:prstGeom prst="rect">
+            <a:avLst/>
+          </a:prstGeom>
+          <a:noFill/>
+          <a:ln/>
+        </p:spPr>
+        <p:txBody>
+          <a:bodyPr wrap="square" lIns="0" tIns="0" rIns="0" bIns="0" rtlCol="0" anchor="ctr"/>
+          <a:lstStyle/>
+          <a:p>
+            <a:pPr algn="l" indent="0" marL="0">
+              <a:buNone/>
+            </a:pPr>
+            <a:r>
+              <a:rPr lang="en-US" sz="1100" dirty="0">
+                <a:solidFill>
+                  <a:schemeClr val="tx1"/>
+                </a:solidFill>
+              </a:rPr>
+              <a:t>Leak canaries (+2 info)</a:t>
+            </a:r>
+            <a:endParaRPr lang="en-US" sz="1100" dirty="0"/>
+          </a:p>
+        </p:txBody>
+      </p:sp>
+      <p:sp>
+        <p:nvSpPr>
+          <p:cNvPr id="12" name="content-16-rect-10"/>
+          <p:cNvSpPr/>
+          <p:nvPr/>
+        </p:nvSpPr>
+        <p:spPr>
+          <a:xfrm>
+            <a:off x="2606040" y="2610612"/>
+            <a:ext cx="657616" cy="219456"/>
+          </a:xfrm>
+          <a:prstGeom prst="roundRect">
+            <a:avLst>
+              <a:gd name="adj" fmla="val 12500"/>
+            </a:avLst>
+          </a:prstGeom>
+          <a:solidFill>
+            <a:schemeClr val="accent1"/>
+          </a:solidFill>
+          <a:ln/>
+        </p:spPr>
+      </p:sp>
+      <p:sp>
+        <p:nvSpPr>
+          <p:cNvPr id="13" name="content-16-text-11"/>
+          <p:cNvSpPr txBox="1"/>
+          <p:nvPr/>
+        </p:nvSpPr>
+        <p:spPr>
+          <a:xfrm>
+            <a:off x="3336808" y="2610612"/>
+            <a:ext cx="685800" cy="219456"/>
+          </a:xfrm>
+          <a:prstGeom prst="rect">
+            <a:avLst/>
+          </a:prstGeom>
+          <a:noFill/>
+          <a:ln/>
+        </p:spPr>
+        <p:txBody>
+          <a:bodyPr wrap="square" lIns="0" tIns="0" rIns="0" bIns="0" rtlCol="0" anchor="ctr"/>
+          <a:lstStyle/>
+          <a:p>
+            <a:pPr algn="l" indent="0" marL="0">
+              <a:buNone/>
+            </a:pPr>
+            <a:r>
+              <a:rPr lang="en-US" sz="1000" b="1" dirty="0">
+                <a:solidFill>
+                  <a:schemeClr val="tx1"/>
+                </a:solidFill>
+              </a:rPr>
+              <a:t>50</a:t>
+            </a:r>
+            <a:endParaRPr lang="en-US" sz="1000" dirty="0"/>
+          </a:p>
+        </p:txBody>
+      </p:sp>
+      <p:sp>
+        <p:nvSpPr>
+          <p:cNvPr id="14" name="content-16-text-12"/>
+          <p:cNvSpPr txBox="1"/>
+          <p:nvPr/>
+        </p:nvSpPr>
+        <p:spPr>
+          <a:xfrm>
+            <a:off x="640080" y="2916936"/>
+            <a:ext cx="1874520" cy="393192"/>
+          </a:xfrm>
+          <a:prstGeom prst="rect">
+            <a:avLst/>
+          </a:prstGeom>
+          <a:noFill/>
+          <a:ln/>
+        </p:spPr>
+        <p:txBody>
+          <a:bodyPr wrap="square" lIns="0" tIns="0" rIns="0" bIns="0" rtlCol="0" anchor="ctr"/>
+          <a:lstStyle/>
+          <a:p>
+            <a:pPr algn="l" indent="0" marL="0">
+              <a:buNone/>
+            </a:pPr>
+            <a:r>
+              <a:rPr lang="en-US" sz="1100" dirty="0">
+                <a:solidFill>
+                  <a:schemeClr val="tx1"/>
+                </a:solidFill>
+              </a:rPr>
+              <a:t>Hostile assistant prompts</a:t>
+            </a:r>
+            <a:endParaRPr lang="en-US" sz="1100" dirty="0"/>
+          </a:p>
+        </p:txBody>
+      </p:sp>
+      <p:sp>
+        <p:nvSpPr>
+          <p:cNvPr id="15" name="content-16-rect-13"/>
+          <p:cNvSpPr/>
+          <p:nvPr/>
+        </p:nvSpPr>
+        <p:spPr>
+          <a:xfrm>
+            <a:off x="2606040" y="3003804"/>
+            <a:ext cx="552398" cy="219456"/>
+          </a:xfrm>
+          <a:prstGeom prst="roundRect">
+            <a:avLst>
+              <a:gd name="adj" fmla="val 12500"/>
+            </a:avLst>
+          </a:prstGeom>
+          <a:solidFill>
+            <a:schemeClr val="accent1"/>
+          </a:solidFill>
+          <a:ln/>
+        </p:spPr>
+      </p:sp>
+      <p:sp>
+        <p:nvSpPr>
+          <p:cNvPr id="16" name="content-16-text-14"/>
+          <p:cNvSpPr txBox="1"/>
+          <p:nvPr/>
+        </p:nvSpPr>
+        <p:spPr>
+          <a:xfrm>
+            <a:off x="3231590" y="3003804"/>
+            <a:ext cx="685800" cy="219456"/>
+          </a:xfrm>
+          <a:prstGeom prst="rect">
+            <a:avLst/>
+          </a:prstGeom>
+          <a:noFill/>
+          <a:ln/>
+        </p:spPr>
+        <p:txBody>
+          <a:bodyPr wrap="square" lIns="0" tIns="0" rIns="0" bIns="0" rtlCol="0" anchor="ctr"/>
+          <a:lstStyle/>
+          <a:p>
+            <a:pPr algn="l" indent="0" marL="0">
+              <a:buNone/>
+            </a:pPr>
+            <a:r>
+              <a:rPr lang="en-US" sz="1000" b="1" dirty="0">
+                <a:solidFill>
+                  <a:schemeClr val="tx1"/>
+                </a:solidFill>
+              </a:rPr>
+              <a:t>42</a:t>
+            </a:r>
+            <a:endParaRPr lang="en-US" sz="1000" dirty="0"/>
+          </a:p>
+        </p:txBody>
+      </p:sp>
+      <p:sp>
+        <p:nvSpPr>
+          <p:cNvPr id="17" name="content-16-text-15"/>
+          <p:cNvSpPr txBox="1"/>
+          <p:nvPr/>
+        </p:nvSpPr>
+        <p:spPr>
+          <a:xfrm>
+            <a:off x="640080" y="3310128"/>
+            <a:ext cx="1874520" cy="393192"/>
+          </a:xfrm>
+          <a:prstGeom prst="rect">
+            <a:avLst/>
+          </a:prstGeom>
+          <a:noFill/>
+          <a:ln/>
+        </p:spPr>
+        <p:txBody>
+          <a:bodyPr wrap="square" lIns="0" tIns="0" rIns="0" bIns="0" rtlCol="0" anchor="ctr"/>
+          <a:lstStyle/>
+          <a:p>
+            <a:pPr algn="l" indent="0" marL="0">
+              <a:buNone/>
+            </a:pPr>
+            <a:r>
+              <a:rPr lang="en-US" sz="1100" dirty="0">
+                <a:solidFill>
+                  <a:schemeClr val="tx1"/>
+                </a:solidFill>
+              </a:rPr>
+              <a:t>Man-in-the-middle (+4 info)</a:t>
+            </a:r>
+            <a:endParaRPr lang="en-US" sz="1100" dirty="0"/>
+          </a:p>
+        </p:txBody>
+      </p:sp>
+      <p:sp>
+        <p:nvSpPr>
+          <p:cNvPr id="18" name="content-16-rect-16"/>
+          <p:cNvSpPr/>
+          <p:nvPr/>
+        </p:nvSpPr>
+        <p:spPr>
+          <a:xfrm>
+            <a:off x="2606040" y="3396996"/>
+            <a:ext cx="184133" cy="219456"/>
+          </a:xfrm>
+          <a:prstGeom prst="roundRect">
+            <a:avLst>
+              <a:gd name="adj" fmla="val 14898"/>
+            </a:avLst>
+          </a:prstGeom>
+          <a:solidFill>
+            <a:schemeClr val="accent1"/>
+          </a:solidFill>
+          <a:ln/>
+        </p:spPr>
+      </p:sp>
+      <p:sp>
+        <p:nvSpPr>
+          <p:cNvPr id="19" name="content-16-text-17"/>
+          <p:cNvSpPr txBox="1"/>
+          <p:nvPr/>
+        </p:nvSpPr>
+        <p:spPr>
+          <a:xfrm>
+            <a:off x="2863325" y="3396996"/>
+            <a:ext cx="685800" cy="219456"/>
+          </a:xfrm>
+          <a:prstGeom prst="rect">
+            <a:avLst/>
+          </a:prstGeom>
+          <a:noFill/>
+          <a:ln/>
+        </p:spPr>
+        <p:txBody>
+          <a:bodyPr wrap="square" lIns="0" tIns="0" rIns="0" bIns="0" rtlCol="0" anchor="ctr"/>
+          <a:lstStyle/>
+          <a:p>
+            <a:pPr algn="l" indent="0" marL="0">
+              <a:buNone/>
+            </a:pPr>
+            <a:r>
+              <a:rPr lang="en-US" sz="1000" b="1" dirty="0">
+                <a:solidFill>
+                  <a:schemeClr val="tx1"/>
+                </a:solidFill>
+              </a:rPr>
+              <a:t>14</a:t>
+            </a:r>
+            <a:endParaRPr lang="en-US" sz="1000" dirty="0"/>
+          </a:p>
+        </p:txBody>
+      </p:sp>
+      <p:sp>
+        <p:nvSpPr>
+          <p:cNvPr id="20" name="content-16-text-18"/>
+          <p:cNvSpPr txBox="1"/>
+          <p:nvPr/>
+        </p:nvSpPr>
+        <p:spPr>
+          <a:xfrm>
+            <a:off x="640080" y="3703320"/>
+            <a:ext cx="1874520" cy="393192"/>
+          </a:xfrm>
+          <a:prstGeom prst="rect">
+            <a:avLst/>
+          </a:prstGeom>
+          <a:noFill/>
+          <a:ln/>
+        </p:spPr>
+        <p:txBody>
+          <a:bodyPr wrap="square" lIns="0" tIns="0" rIns="0" bIns="0" rtlCol="0" anchor="ctr"/>
+          <a:lstStyle/>
+          <a:p>
+            <a:pPr algn="l" indent="0" marL="0">
+              <a:buNone/>
+            </a:pPr>
+            <a:r>
+              <a:rPr lang="en-US" sz="1100" dirty="0">
+                <a:solidFill>
+                  <a:schemeClr val="tx1"/>
+                </a:solidFill>
+              </a:rPr>
+              <a:t>Login and MFA guessing</a:t>
+            </a:r>
+            <a:endParaRPr lang="en-US" sz="1100" dirty="0"/>
+          </a:p>
+        </p:txBody>
+      </p:sp>
+      <p:sp>
+        <p:nvSpPr>
+          <p:cNvPr id="21" name="content-16-rect-19"/>
+          <p:cNvSpPr/>
+          <p:nvPr/>
+        </p:nvSpPr>
+        <p:spPr>
+          <a:xfrm>
+            <a:off x="2606040" y="3790188"/>
+            <a:ext cx="105219" cy="219456"/>
+          </a:xfrm>
+          <a:prstGeom prst="roundRect">
+            <a:avLst>
+              <a:gd name="adj" fmla="val 26071"/>
+            </a:avLst>
+          </a:prstGeom>
+          <a:solidFill>
+            <a:schemeClr val="accent1"/>
+          </a:solidFill>
+          <a:ln/>
+        </p:spPr>
+      </p:sp>
+      <p:sp>
+        <p:nvSpPr>
+          <p:cNvPr id="22" name="content-16-text-20"/>
+          <p:cNvSpPr txBox="1"/>
+          <p:nvPr/>
+        </p:nvSpPr>
+        <p:spPr>
+          <a:xfrm>
+            <a:off x="2784411" y="3790188"/>
+            <a:ext cx="685800" cy="219456"/>
+          </a:xfrm>
+          <a:prstGeom prst="rect">
+            <a:avLst/>
+          </a:prstGeom>
+          <a:noFill/>
+          <a:ln/>
+        </p:spPr>
+        <p:txBody>
+          <a:bodyPr wrap="square" lIns="0" tIns="0" rIns="0" bIns="0" rtlCol="0" anchor="ctr"/>
+          <a:lstStyle/>
+          <a:p>
+            <a:pPr algn="l" indent="0" marL="0">
+              <a:buNone/>
+            </a:pPr>
+            <a:r>
+              <a:rPr lang="en-US" sz="1000" b="1" dirty="0">
+                <a:solidFill>
+                  <a:schemeClr val="tx1"/>
+                </a:solidFill>
+              </a:rPr>
+              <a:t>8</a:t>
+            </a:r>
+            <a:endParaRPr lang="en-US" sz="1000" dirty="0"/>
+          </a:p>
+        </p:txBody>
+      </p:sp>
+      <p:sp>
+        <p:nvSpPr>
+          <p:cNvPr id="23" name="content-16-text-21"/>
+          <p:cNvSpPr txBox="1"/>
+          <p:nvPr/>
+        </p:nvSpPr>
+        <p:spPr>
+          <a:xfrm>
+            <a:off x="640080" y="4114800"/>
+            <a:ext cx="4389120" cy="274320"/>
+          </a:xfrm>
+          <a:prstGeom prst="rect">
+            <a:avLst/>
+          </a:prstGeom>
+          <a:noFill/>
+          <a:ln/>
+        </p:spPr>
+        <p:txBody>
+          <a:bodyPr wrap="square" lIns="0" tIns="0" rIns="0" bIns="0" rtlCol="0" anchor="t"/>
+          <a:lstStyle/>
+          <a:p>
+            <a:pPr algn="l" indent="0" marL="0">
+              <a:buNone/>
+            </a:pPr>
+            <a:r>
+              <a:rPr lang="en-US" sz="1000" dirty="0">
+                <a:solidFill>
+                  <a:schemeClr val="tx2"/>
+                </a:solidFill>
+              </a:rPr>
+              <a:t>314 records: 308 PASS, 6 INFO. Team-run lab results; not 314 different attacks.</a:t>
+            </a:r>
+            <a:endParaRPr lang="en-US" sz="1000" dirty="0"/>
+          </a:p>
+        </p:txBody>
+      </p:sp>
+      <p:sp>
+        <p:nvSpPr>
+          <p:cNvPr id="24" name="content-16-rect-22"/>
+          <p:cNvSpPr/>
+          <p:nvPr/>
+        </p:nvSpPr>
+        <p:spPr>
+          <a:xfrm>
+            <a:off x="5394960" y="1234440"/>
+            <a:ext cx="3291840" cy="3200400"/>
+          </a:xfrm>
+          <a:prstGeom prst="roundRect">
+            <a:avLst>
+              <a:gd name="adj" fmla="val 2286"/>
+            </a:avLst>
+          </a:prstGeom>
+          <a:solidFill>
+            <a:schemeClr val="bg2"/>
+          </a:solidFill>
+          <a:ln/>
+        </p:spPr>
+      </p:sp>
+      <p:sp>
+        <p:nvSpPr>
+          <p:cNvPr id="25" name="content-16-text-23"/>
+          <p:cNvSpPr txBox="1"/>
+          <p:nvPr/>
+        </p:nvSpPr>
+        <p:spPr>
+          <a:xfrm>
+            <a:off x="5532120" y="1298448"/>
+            <a:ext cx="3017520" cy="365760"/>
+          </a:xfrm>
+          <a:prstGeom prst="rect">
+            <a:avLst/>
+          </a:prstGeom>
+          <a:noFill/>
+          <a:ln/>
+        </p:spPr>
+        <p:txBody>
+          <a:bodyPr wrap="square" lIns="0" tIns="0" rIns="0" bIns="0" rtlCol="0" anchor="ctr"/>
+          <a:lstStyle/>
+          <a:p>
+            <a:pPr algn="l" indent="0" marL="0">
+              <a:buNone/>
+            </a:pPr>
+            <a:r>
+              <a:rPr lang="en-US" sz="1300" b="1" dirty="0">
+                <a:solidFill>
+                  <a:schemeClr val="tx1"/>
+                </a:solidFill>
+              </a:rPr>
+              <a:t>The man-in-the-middle test</a:t>
+            </a:r>
+            <a:endParaRPr lang="en-US" sz="1300" dirty="0"/>
+          </a:p>
+        </p:txBody>
+      </p:sp>
+      <p:sp>
+        <p:nvSpPr>
+          <p:cNvPr id="26" name="content-16-text-24"/>
+          <p:cNvSpPr txBox="1"/>
+          <p:nvPr/>
+        </p:nvSpPr>
+        <p:spPr>
+          <a:xfrm>
+            <a:off x="5532120" y="1691640"/>
+            <a:ext cx="3017520" cy="274320"/>
+          </a:xfrm>
+          <a:prstGeom prst="rect">
+            <a:avLst/>
+          </a:prstGeom>
+          <a:noFill/>
+          <a:ln/>
+        </p:spPr>
+        <p:txBody>
+          <a:bodyPr wrap="square" lIns="0" tIns="0" rIns="0" bIns="0" rtlCol="0" anchor="t"/>
+          <a:lstStyle/>
+          <a:p>
+            <a:pPr algn="l" indent="0" marL="0">
+              <a:buNone/>
+            </a:pPr>
+            <a:r>
+              <a:rPr lang="en-US" sz="1200" b="1" dirty="0">
+                <a:solidFill>
+                  <a:schemeClr val="accent6"/>
+                </a:solidFill>
+              </a:rPr>
+              <a:t>Held (14 of 14)</a:t>
+            </a:r>
+            <a:endParaRPr lang="en-US" sz="1200" dirty="0"/>
+          </a:p>
+        </p:txBody>
+      </p:sp>
+      <p:sp>
+        <p:nvSpPr>
+          <p:cNvPr id="27" name="content-16-text-25"/>
+          <p:cNvSpPr txBox="1"/>
+          <p:nvPr/>
+        </p:nvSpPr>
+        <p:spPr>
+          <a:xfrm>
+            <a:off x="5532120" y="1965960"/>
+            <a:ext cx="3017520" cy="1280160"/>
+          </a:xfrm>
+          <a:prstGeom prst="rect">
+            <a:avLst/>
+          </a:prstGeom>
+          <a:noFill/>
+          <a:ln/>
+        </p:spPr>
+        <p:txBody>
+          <a:bodyPr wrap="square" lIns="0" tIns="0" rIns="0" bIns="0" rtlCol="0" anchor="t"/>
+          <a:lstStyle/>
+          <a:p>
+            <a:pPr algn="l" marL="342900" indent="-342900">
+              <a:spcAft>
+                <a:spcPts val="200"/>
+              </a:spcAft>
+              <a:buSzPct val="100000"/>
+              <a:buChar char="•"/>
+            </a:pPr>
+            <a:r>
+              <a:rPr lang="en-US" sz="1050" dirty="0">
+                <a:solidFill>
+                  <a:schemeClr val="tx1"/>
+                </a:solidFill>
+              </a:rPr>
+              <a:t>Altered or redirected approval: refused</a:t>
+            </a:r>
+            <a:endParaRPr lang="en-US" sz="1050" dirty="0"/>
+          </a:p>
+          <a:p>
+            <a:pPr algn="l" marL="342900" indent="-342900">
+              <a:spcAft>
+                <a:spcPts val="200"/>
+              </a:spcAft>
+              <a:buSzPct val="100000"/>
+              <a:buChar char="•"/>
+            </a:pPr>
+            <a:r>
+              <a:rPr lang="en-US" sz="1050" dirty="0">
+                <a:solidFill>
+                  <a:schemeClr val="tx1"/>
+                </a:solidFill>
+              </a:rPr>
+              <a:t>Stripped or swapped MFA proof: refused</a:t>
+            </a:r>
+            <a:endParaRPr lang="en-US" sz="1050" dirty="0"/>
+          </a:p>
+          <a:p>
+            <a:pPr algn="l" marL="342900" indent="-342900">
+              <a:spcAft>
+                <a:spcPts val="200"/>
+              </a:spcAft>
+              <a:buSzPct val="100000"/>
+              <a:buChar char="•"/>
+            </a:pPr>
+            <a:r>
+              <a:rPr lang="en-US" sz="1050" dirty="0">
+                <a:solidFill>
+                  <a:schemeClr val="tx1"/>
+                </a:solidFill>
+              </a:rPr>
+              <a:t>Stolen token cannot approve or allowlist</a:t>
+            </a:r>
+            <a:endParaRPr lang="en-US" sz="1050" dirty="0"/>
+          </a:p>
+          <a:p>
+            <a:pPr algn="l" marL="342900" indent="-342900">
+              <a:spcAft>
+                <a:spcPts val="200"/>
+              </a:spcAft>
+              <a:buSzPct val="100000"/>
+              <a:buChar char="•"/>
+            </a:pPr>
+            <a:r>
+              <a:rPr lang="en-US" sz="1050" dirty="0">
+                <a:solidFill>
+                  <a:schemeClr val="tx1"/>
+                </a:solidFill>
+              </a:rPr>
+              <a:t>Webhook tamper and replay: refused</a:t>
+            </a:r>
+            <a:endParaRPr lang="en-US" sz="1050" dirty="0"/>
+          </a:p>
+        </p:txBody>
+      </p:sp>
+      <p:sp>
+        <p:nvSpPr>
+          <p:cNvPr id="28" name="content-16-text-26"/>
+          <p:cNvSpPr txBox="1"/>
+          <p:nvPr/>
+        </p:nvSpPr>
+        <p:spPr>
+          <a:xfrm>
+            <a:off x="5532120" y="3200400"/>
+            <a:ext cx="3017520" cy="274320"/>
+          </a:xfrm>
+          <a:prstGeom prst="rect">
+            <a:avLst/>
+          </a:prstGeom>
+          <a:noFill/>
+          <a:ln/>
+        </p:spPr>
+        <p:txBody>
+          <a:bodyPr wrap="square" lIns="0" tIns="0" rIns="0" bIns="0" rtlCol="0" anchor="t"/>
+          <a:lstStyle/>
+          <a:p>
+            <a:pPr algn="l" indent="0" marL="0">
+              <a:buNone/>
+            </a:pPr>
+            <a:r>
+              <a:rPr lang="en-US" sz="1200" b="1" dirty="0">
+                <a:solidFill>
+                  <a:schemeClr val="accent3"/>
+                </a:solidFill>
+              </a:rPr>
+              <a:t>Did not hold</a:t>
+            </a:r>
+            <a:endParaRPr lang="en-US" sz="1200" dirty="0"/>
+          </a:p>
+        </p:txBody>
+      </p:sp>
+      <p:sp>
+        <p:nvSpPr>
+          <p:cNvPr id="29" name="content-16-text-27"/>
+          <p:cNvSpPr txBox="1"/>
+          <p:nvPr/>
+        </p:nvSpPr>
+        <p:spPr>
+          <a:xfrm>
+            <a:off x="5532120" y="3474720"/>
+            <a:ext cx="3017520" cy="914400"/>
+          </a:xfrm>
+          <a:prstGeom prst="rect">
+            <a:avLst/>
+          </a:prstGeom>
+          <a:noFill/>
+          <a:ln/>
+        </p:spPr>
+        <p:txBody>
+          <a:bodyPr wrap="square" lIns="0" tIns="0" rIns="0" bIns="0" rtlCol="0" anchor="t"/>
+          <a:lstStyle/>
+          <a:p>
+            <a:pPr algn="l" marL="342900" indent="-342900">
+              <a:spcAft>
+                <a:spcPts val="200"/>
+              </a:spcAft>
+              <a:buSzPct val="100000"/>
+              <a:buChar char="•"/>
+            </a:pPr>
+            <a:r>
+              <a:rPr lang="en-US" sz="1050" dirty="0">
+                <a:solidFill>
+                  <a:schemeClr val="tx1"/>
+                </a:solidFill>
+              </a:rPr>
+              <a:t>Plain HTTP: a listener reads the password and token</a:t>
+            </a:r>
+            <a:endParaRPr lang="en-US" sz="1050" dirty="0"/>
+          </a:p>
+          <a:p>
+            <a:pPr algn="l" marL="342900" indent="-342900">
+              <a:spcAft>
+                <a:spcPts val="200"/>
+              </a:spcAft>
+              <a:buSzPct val="100000"/>
+              <a:buChar char="•"/>
+            </a:pPr>
+            <a:r>
+              <a:rPr lang="en-US" sz="1050" dirty="0">
+                <a:solidFill>
+                  <a:schemeClr val="tx1"/>
+                </a:solidFill>
+              </a:rPr>
+              <a:t>A stolen token reads payments and cancels a draft for 15 minutes</a:t>
+            </a:r>
+            <a:endParaRPr lang="en-US" sz="1050" dirty="0"/>
+          </a:p>
+        </p:txBody>
+      </p:sp>
+      <p:sp>
+        <p:nvSpPr>
+          <p:cNvPr id="30" name="content-16-text-28"/>
+          <p:cNvSpPr txBox="1"/>
+          <p:nvPr/>
+        </p:nvSpPr>
+        <p:spPr>
+          <a:xfrm>
+            <a:off x="457200" y="4526280"/>
+            <a:ext cx="8229600" cy="274320"/>
+          </a:xfrm>
+          <a:prstGeom prst="rect">
+            <a:avLst/>
+          </a:prstGeom>
+          <a:noFill/>
+          <a:ln/>
+        </p:spPr>
+        <p:txBody>
+          <a:bodyPr wrap="square" lIns="0" tIns="0" rIns="0" bIns="0" rtlCol="0" anchor="t"/>
+          <a:lstStyle/>
+          <a:p>
+            <a:pPr algn="l" indent="0" marL="0">
+              <a:buNone/>
+            </a:pPr>
+            <a:r>
+              <a:rPr lang="en-US" sz="1000" dirty="0">
+                <a:solidFill>
+                  <a:schemeClr val="tx2"/>
+                </a:solidFill>
+              </a:rPr>
+              <a:t>Raw logs and hashes: submission/evidence/security_2026-10-18/ and the security self-assessment, sections 13 and 14.</a:t>
+            </a:r>
+            <a:endParaRPr lang="en-US" sz="1000" dirty="0"/>
+          </a:p>
+        </p:txBody>
+      </p:sp>
+    </p:spTree>
+  </p:cSld>
+  <p:clrMapOvr>
+    <a:masterClrMapping/>
+  </p:clrMapOvr>
+</p:sld>
+</file>
+
+<file path=ppt/slides/slide17.xml><?xml version="1.0" encoding="utf-8"?>
+<p:sld xmlns:a="http://schemas.openxmlformats.org/drawingml/2006/main" xmlns:r="http://schemas.openxmlformats.org/officeDocument/2006/relationships" xmlns:p="http://schemas.openxmlformats.org/presentationml/2006/main">
+  <p:cSld name="Slide 17">
+    <p:spTree>
+      <p:nvGrpSpPr>
+        <p:cNvPr id="1" name=""/>
+        <p:cNvGrpSpPr/>
+        <p:nvPr/>
+      </p:nvGrpSpPr>
+      <p:grpSpPr>
+        <a:xfrm>
+          <a:off x="0" y="0"/>
+          <a:ext cx="0" cy="0"/>
+          <a:chOff x="0" y="0"/>
+          <a:chExt cx="0" cy="0"/>
+        </a:xfrm>
+      </p:grpSpPr>
+      <p:sp>
+        <p:nvSpPr>
+          <p:cNvPr id="2" name="Text 0"/>
+          <p:cNvSpPr/>
+          <p:nvPr>
+            <p:ph idx="100" type="title" hasCustomPrompt="1"/>
+          </p:nvPr>
+        </p:nvSpPr>
+        <p:spPr>
+          <a:xfrm>
+            <a:off x="457200" y="274320"/>
+            <a:ext cx="8229600" cy="777240"/>
+          </a:xfrm>
+          <a:prstGeom prst="rect">
+            <a:avLst/>
+          </a:prstGeom>
+          <a:noFill/>
+          <a:ln/>
+        </p:spPr>
+        <p:txBody>
+          <a:bodyPr wrap="square" lIns="0" tIns="0" rIns="0" bIns="0" rtlCol="0" anchor="ctr"/>
+          <a:lstStyle/>
+          <a:p>
+            <a:pPr algn="l" indent="0" marL="0">
+              <a:buNone/>
+            </a:pPr>
+            <a:r>
+              <a:rPr lang="en-US" sz="3600" b="1" dirty="0">
+                <a:solidFill>
+                  <a:schemeClr val="tx1"/>
+                </a:solidFill>
+                <a:latin typeface="+mj-lt" pitchFamily="34" charset="0"/>
+                <a:ea typeface="+mj-lt" pitchFamily="34" charset="-122"/>
+                <a:cs typeface="+mj-lt" pitchFamily="34" charset="-120"/>
+              </a:rPr>
               <a:t>Security problems we found</a:t>
             </a:r>
             <a:endParaRPr lang="en-US" sz="3600" dirty="0"/>
@@ -9257,7 +10093,7 @@
       </p:sp>
       <p:graphicFrame>
         <p:nvGraphicFramePr>
-          <p:cNvPr id="17" name="content-16-table-1"/>
+          <p:cNvPr id="18" name="content-17-table-1"/>
           <p:cNvGraphicFramePr>
             <a:graphicFrameLocks noGrp="1"/>
           </p:cNvGraphicFramePr>
@@ -10741,7 +11577,7 @@
       </p:graphicFrame>
       <p:sp>
         <p:nvSpPr>
-          <p:cNvPr id="4" name="content-16-text-2"/>
+          <p:cNvPr id="4" name="content-17-text-2"/>
           <p:cNvSpPr txBox="1"/>
           <p:nvPr/>
         </p:nvSpPr>
@@ -10772,296 +11608,6 @@
               <a:t>Source: security self-assessment, edition 1.2, sections 13 and 14: every record, the raw-log hashes and what each fix did and did not show.</a:t>
             </a:r>
             <a:endParaRPr lang="en-US" sz="1000" dirty="0"/>
-          </a:p>
-        </p:txBody>
-      </p:sp>
-    </p:spTree>
-  </p:cSld>
-  <p:clrMapOvr>
-    <a:masterClrMapping/>
-  </p:clrMapOvr>
-</p:sld>
-</file>
-
-<file path=ppt/slides/slide17.xml><?xml version="1.0" encoding="utf-8"?>
-<p:sld xmlns:a="http://schemas.openxmlformats.org/drawingml/2006/main" xmlns:r="http://schemas.openxmlformats.org/officeDocument/2006/relationships" xmlns:p="http://schemas.openxmlformats.org/presentationml/2006/main">
-  <p:cSld name="Slide 17">
-    <p:spTree>
-      <p:nvGrpSpPr>
-        <p:cNvPr id="1" name=""/>
-        <p:cNvGrpSpPr/>
-        <p:nvPr/>
-      </p:nvGrpSpPr>
-      <p:grpSpPr>
-        <a:xfrm>
-          <a:off x="0" y="0"/>
-          <a:ext cx="0" cy="0"/>
-          <a:chOff x="0" y="0"/>
-          <a:chExt cx="0" cy="0"/>
-        </a:xfrm>
-      </p:grpSpPr>
-      <p:sp>
-        <p:nvSpPr>
-          <p:cNvPr id="2" name="Text 0"/>
-          <p:cNvSpPr/>
-          <p:nvPr>
-            <p:ph idx="100" type="title" hasCustomPrompt="1"/>
-          </p:nvPr>
-        </p:nvSpPr>
-        <p:spPr>
-          <a:xfrm>
-            <a:off x="457200" y="274320"/>
-            <a:ext cx="8229600" cy="777240"/>
-          </a:xfrm>
-          <a:prstGeom prst="rect">
-            <a:avLst/>
-          </a:prstGeom>
-          <a:noFill/>
-          <a:ln/>
-        </p:spPr>
-        <p:txBody>
-          <a:bodyPr wrap="square" lIns="0" tIns="0" rIns="0" bIns="0" rtlCol="0" anchor="ctr"/>
-          <a:lstStyle/>
-          <a:p>
-            <a:pPr algn="l" indent="0" marL="0">
-              <a:buNone/>
-            </a:pPr>
-            <a:r>
-              <a:rPr lang="en-US" sz="3600" b="1" dirty="0">
-                <a:solidFill>
-                  <a:schemeClr val="tx1"/>
-                </a:solidFill>
-                <a:latin typeface="+mj-lt" pitchFamily="34" charset="0"/>
-                <a:ea typeface="+mj-lt" pitchFamily="34" charset="-122"/>
-                <a:cs typeface="+mj-lt" pitchFamily="34" charset="-120"/>
-              </a:rPr>
-              <a:t>Honest by design</a:t>
-            </a:r>
-            <a:endParaRPr lang="en-US" sz="3600" dirty="0"/>
-          </a:p>
-        </p:txBody>
-      </p:sp>
-      <p:sp>
-        <p:nvSpPr>
-          <p:cNvPr id="3" name="content-17-text-1"/>
-          <p:cNvSpPr txBox="1"/>
-          <p:nvPr/>
-        </p:nvSpPr>
-        <p:spPr>
-          <a:xfrm>
-            <a:off x="457200" y="1097280"/>
-            <a:ext cx="8229600" cy="365760"/>
-          </a:xfrm>
-          <a:prstGeom prst="rect">
-            <a:avLst/>
-          </a:prstGeom>
-          <a:noFill/>
-          <a:ln/>
-        </p:spPr>
-        <p:txBody>
-          <a:bodyPr wrap="square" lIns="0" tIns="0" rIns="0" bIns="0" rtlCol="0" anchor="ctr"/>
-          <a:lstStyle/>
-          <a:p>
-            <a:pPr algn="l" indent="0" marL="0">
-              <a:buNone/>
-            </a:pPr>
-            <a:r>
-              <a:rPr lang="en-US" sz="1600" b="1" dirty="0">
-                <a:solidFill>
-                  <a:schemeClr val="tx1"/>
-                </a:solidFill>
-              </a:rPr>
-              <a:t>Every simulated part is labelled. Every unverified rule carries a badge.</a:t>
-            </a:r>
-            <a:endParaRPr lang="en-US" sz="1600" dirty="0"/>
-          </a:p>
-        </p:txBody>
-      </p:sp>
-      <p:sp>
-        <p:nvSpPr>
-          <p:cNvPr id="4" name="content-17-rect-2"/>
-          <p:cNvSpPr/>
-          <p:nvPr/>
-        </p:nvSpPr>
-        <p:spPr>
-          <a:xfrm>
-            <a:off x="457200" y="1554480"/>
-            <a:ext cx="3803904" cy="2999232"/>
-          </a:xfrm>
-          <a:prstGeom prst="roundRect">
-            <a:avLst>
-              <a:gd name="adj" fmla="val 1829"/>
-            </a:avLst>
-          </a:prstGeom>
-          <a:solidFill>
-            <a:schemeClr val="bg1"/>
-          </a:solidFill>
-          <a:ln w="9525">
-            <a:solidFill>
-              <a:schemeClr val="accent5"/>
-            </a:solidFill>
-            <a:prstDash val="solid"/>
-          </a:ln>
-          <a:effectLst>
-            <a:outerShdw sx="100000" sy="100000" kx="0" ky="0" algn="bl" rotWithShape="0" blurRad="101600" dist="25400" dir="5400000">
-              <a:srgbClr val="0B2545">
-                <a:alpha val="18000"/>
-              </a:srgbClr>
-            </a:outerShdw>
-          </a:effectLst>
-        </p:spPr>
-      </p:sp>
-      <p:pic>
-        <p:nvPicPr>
-          <p:cNvPr id="5" name="content-17-image-3" descr="Sandbox screen listing what is simulated">    </p:cNvPr>
-          <p:cNvPicPr>
-            <a:picLocks noChangeAspect="1"/>
-          </p:cNvPicPr>
-          <p:nvPr/>
-        </p:nvPicPr>
-        <p:blipFill>
-          <a:blip r:embed="rId1"/>
-          <a:stretch>
-            <a:fillRect/>
-          </a:stretch>
-        </p:blipFill>
-        <p:spPr>
-          <a:xfrm>
-            <a:off x="530352" y="1627632"/>
-            <a:ext cx="3657600" cy="2852928"/>
-          </a:xfrm>
-          <a:prstGeom prst="rect">
-            <a:avLst/>
-          </a:prstGeom>
-        </p:spPr>
-      </p:pic>
-      <p:sp>
-        <p:nvSpPr>
-          <p:cNvPr id="6" name="content-17-rect-4"/>
-          <p:cNvSpPr/>
-          <p:nvPr/>
-        </p:nvSpPr>
-        <p:spPr>
-          <a:xfrm>
-            <a:off x="4882896" y="1554480"/>
-            <a:ext cx="3803904" cy="2999232"/>
-          </a:xfrm>
-          <a:prstGeom prst="roundRect">
-            <a:avLst>
-              <a:gd name="adj" fmla="val 1829"/>
-            </a:avLst>
-          </a:prstGeom>
-          <a:solidFill>
-            <a:schemeClr val="bg1"/>
-          </a:solidFill>
-          <a:ln w="9525">
-            <a:solidFill>
-              <a:schemeClr val="accent5"/>
-            </a:solidFill>
-            <a:prstDash val="solid"/>
-          </a:ln>
-          <a:effectLst>
-            <a:outerShdw sx="100000" sy="100000" kx="0" ky="0" algn="bl" rotWithShape="0" blurRad="101600" dist="25400" dir="5400000">
-              <a:srgbClr val="0B2545">
-                <a:alpha val="18000"/>
-              </a:srgbClr>
-            </a:outerShdw>
-          </a:effectLst>
-        </p:spPr>
-      </p:sp>
-      <p:pic>
-        <p:nvPicPr>
-          <p:cNvPr id="7" name="content-17-image-5" descr="Compliance report whose hash verifies in the browser">    </p:cNvPr>
-          <p:cNvPicPr>
-            <a:picLocks noChangeAspect="1"/>
-          </p:cNvPicPr>
-          <p:nvPr/>
-        </p:nvPicPr>
-        <p:blipFill>
-          <a:blip r:embed="rId2"/>
-          <a:stretch>
-            <a:fillRect/>
-          </a:stretch>
-        </p:blipFill>
-        <p:spPr>
-          <a:xfrm>
-            <a:off x="4956048" y="1627632"/>
-            <a:ext cx="3657600" cy="2852928"/>
-          </a:xfrm>
-          <a:prstGeom prst="rect">
-            <a:avLst/>
-          </a:prstGeom>
-        </p:spPr>
-      </p:pic>
-      <p:sp>
-        <p:nvSpPr>
-          <p:cNvPr id="8" name="content-17-text-6"/>
-          <p:cNvSpPr txBox="1"/>
-          <p:nvPr/>
-        </p:nvSpPr>
-        <p:spPr>
-          <a:xfrm>
-            <a:off x="457200" y="4590288"/>
-            <a:ext cx="3803904" cy="274320"/>
-          </a:xfrm>
-          <a:prstGeom prst="rect">
-            <a:avLst/>
-          </a:prstGeom>
-          <a:noFill/>
-          <a:ln/>
-        </p:spPr>
-        <p:txBody>
-          <a:bodyPr wrap="square" lIns="0" tIns="0" rIns="0" bIns="0" rtlCol="0" anchor="t"/>
-          <a:lstStyle/>
-          <a:p>
-            <a:pPr algn="l" indent="0" marL="0">
-              <a:buNone/>
-            </a:pPr>
-            <a:r>
-              <a:rPr lang="en-US" sz="1100" dirty="0">
-                <a:solidFill>
-                  <a:schemeClr val="tx2"/>
-                </a:solidFill>
-              </a:rPr>
-              <a:t>Sandbox screen: what is simulated, how to test it</a:t>
-            </a:r>
-            <a:endParaRPr lang="en-US" sz="1100" dirty="0"/>
-          </a:p>
-        </p:txBody>
-      </p:sp>
-      <p:sp>
-        <p:nvSpPr>
-          <p:cNvPr id="9" name="content-17-text-7"/>
-          <p:cNvSpPr txBox="1"/>
-          <p:nvPr/>
-        </p:nvSpPr>
-        <p:spPr>
-          <a:xfrm>
-            <a:off x="4882896" y="4590288"/>
-            <a:ext cx="3803904" cy="274320"/>
-          </a:xfrm>
-          <a:prstGeom prst="rect">
-            <a:avLst/>
-          </a:prstGeom>
-          <a:noFill/>
-          <a:ln/>
-        </p:spPr>
-        <p:txBody>
-          <a:bodyPr wrap="square" lIns="0" tIns="0" rIns="0" bIns="0" rtlCol="0" anchor="t"/>
-          <a:lstStyle/>
-          <a:p>
-            <a:pPr algn="l" indent="0" marL="0">
-              <a:buNone/>
-            </a:pPr>
-            <a:r>
-              <a:rPr lang="en-US" sz="1100" dirty="0">
-                <a:solidFill>
-                  <a:schemeClr val="tx2"/>
-                </a:solidFill>
-              </a:rPr>
-              <a:t>Compliance report: the hash verifies in the browser</a:t>
-            </a:r>
-            <a:endParaRPr lang="en-US" sz="1100" dirty="0"/>
           </a:p>
         </p:txBody>
       </p:sp>
@@ -11125,7 +11671,7 @@
                 <a:ea typeface="+mj-lt" pitchFamily="34" charset="-122"/>
                 <a:cs typeface="+mj-lt" pitchFamily="34" charset="-120"/>
               </a:rPr>
-              <a:t>Why it can work</a:t>
+              <a:t>Honest by design</a:t>
             </a:r>
             <a:endParaRPr lang="en-US" sz="3600" dirty="0"/>
           </a:p>
@@ -11133,101 +11679,98 @@
       </p:sp>
       <p:sp>
         <p:nvSpPr>
-          <p:cNvPr id="3" name="content-18-rect-1"/>
+          <p:cNvPr id="3" name="content-18-text-1"/>
+          <p:cNvSpPr txBox="1"/>
+          <p:nvPr/>
+        </p:nvSpPr>
+        <p:spPr>
+          <a:xfrm>
+            <a:off x="457200" y="1097280"/>
+            <a:ext cx="8229600" cy="365760"/>
+          </a:xfrm>
+          <a:prstGeom prst="rect">
+            <a:avLst/>
+          </a:prstGeom>
+          <a:noFill/>
+          <a:ln/>
+        </p:spPr>
+        <p:txBody>
+          <a:bodyPr wrap="square" lIns="0" tIns="0" rIns="0" bIns="0" rtlCol="0" anchor="ctr"/>
+          <a:lstStyle/>
+          <a:p>
+            <a:pPr algn="l" indent="0" marL="0">
+              <a:buNone/>
+            </a:pPr>
+            <a:r>
+              <a:rPr lang="en-US" sz="1600" b="1" dirty="0">
+                <a:solidFill>
+                  <a:schemeClr val="tx1"/>
+                </a:solidFill>
+              </a:rPr>
+              <a:t>Every simulated part is labelled. Every unverified rule carries a badge.</a:t>
+            </a:r>
+            <a:endParaRPr lang="en-US" sz="1600" dirty="0"/>
+          </a:p>
+        </p:txBody>
+      </p:sp>
+      <p:sp>
+        <p:nvSpPr>
+          <p:cNvPr id="4" name="content-18-rect-2"/>
           <p:cNvSpPr/>
           <p:nvPr/>
         </p:nvSpPr>
         <p:spPr>
           <a:xfrm>
-            <a:off x="457200" y="1188720"/>
-            <a:ext cx="4846320" cy="1078992"/>
+            <a:off x="457200" y="1554480"/>
+            <a:ext cx="3803904" cy="2999232"/>
           </a:xfrm>
           <a:prstGeom prst="roundRect">
             <a:avLst>
-              <a:gd name="adj" fmla="val 6780"/>
+              <a:gd name="adj" fmla="val 1829"/>
             </a:avLst>
           </a:prstGeom>
           <a:solidFill>
-            <a:schemeClr val="bg2"/>
+            <a:schemeClr val="bg1"/>
           </a:solidFill>
-          <a:ln/>
-        </p:spPr>
-      </p:sp>
-      <p:sp>
-        <p:nvSpPr>
-          <p:cNvPr id="4" name="content-18-text-2"/>
-          <p:cNvSpPr txBox="1"/>
-          <p:nvPr/>
-        </p:nvSpPr>
-        <p:spPr>
-          <a:xfrm>
-            <a:off x="594360" y="1234440"/>
-            <a:ext cx="1783080" cy="987552"/>
-          </a:xfrm>
-          <a:prstGeom prst="rect">
-            <a:avLst/>
-          </a:prstGeom>
-          <a:noFill/>
-          <a:ln/>
-        </p:spPr>
-        <p:txBody>
-          <a:bodyPr wrap="square" lIns="0" tIns="0" rIns="0" bIns="0" rtlCol="0" anchor="ctr"/>
-          <a:lstStyle/>
-          <a:p>
-            <a:pPr algn="l" indent="0" marL="0">
-              <a:buNone/>
-            </a:pPr>
-            <a:r>
-              <a:rPr lang="en-US" sz="2100" b="1" dirty="0">
-                <a:solidFill>
-                  <a:schemeClr val="accent1"/>
-                </a:solidFill>
-                <a:latin typeface="+mj-lt" pitchFamily="34" charset="0"/>
-                <a:ea typeface="+mj-lt" pitchFamily="34" charset="-122"/>
-                <a:cs typeface="+mj-lt" pitchFamily="34" charset="-120"/>
-              </a:rPr>
-              <a:t>USD 881.7m</a:t>
-            </a:r>
-            <a:endParaRPr lang="en-US" sz="2100" dirty="0"/>
-          </a:p>
-        </p:txBody>
-      </p:sp>
-      <p:sp>
-        <p:nvSpPr>
-          <p:cNvPr id="5" name="content-18-text-3"/>
-          <p:cNvSpPr txBox="1"/>
-          <p:nvPr/>
-        </p:nvSpPr>
-        <p:spPr>
-          <a:xfrm>
-            <a:off x="2423160" y="1234440"/>
-            <a:ext cx="2788920" cy="987552"/>
-          </a:xfrm>
-          <a:prstGeom prst="rect">
-            <a:avLst/>
-          </a:prstGeom>
-          <a:noFill/>
-          <a:ln/>
-        </p:spPr>
-        <p:txBody>
-          <a:bodyPr wrap="square" lIns="0" tIns="0" rIns="0" bIns="0" rtlCol="0" anchor="ctr"/>
-          <a:lstStyle/>
-          <a:p>
-            <a:pPr algn="l" indent="0" marL="0">
-              <a:buNone/>
-            </a:pPr>
-            <a:r>
-              <a:rPr lang="en-US" sz="1100" dirty="0">
-                <a:solidFill>
-                  <a:schemeClr val="tx1"/>
-                </a:solidFill>
-              </a:rPr>
-              <a:t>sent through Bangladeshi banks for overseas education in FY2025-26: a record, up 32% in a year. Bangladesh Bank data, via The Observer, 24 Jul 2026.</a:t>
-            </a:r>
-            <a:endParaRPr lang="en-US" sz="1100" dirty="0"/>
-          </a:p>
-        </p:txBody>
-      </p:sp>
+          <a:ln w="9525">
+            <a:solidFill>
+              <a:schemeClr val="accent5"/>
+            </a:solidFill>
+            <a:prstDash val="solid"/>
+          </a:ln>
+          <a:effectLst>
+            <a:outerShdw sx="100000" sy="100000" kx="0" ky="0" algn="bl" rotWithShape="0" blurRad="101600" dist="25400" dir="5400000">
+              <a:srgbClr val="0B2545">
+                <a:alpha val="18000"/>
+              </a:srgbClr>
+            </a:outerShdw>
+          </a:effectLst>
+        </p:spPr>
+      </p:sp>
+      <p:pic>
+        <p:nvPicPr>
+          <p:cNvPr id="5" name="content-18-image-3" descr="Sandbox screen listing what is simulated">    </p:cNvPr>
+          <p:cNvPicPr>
+            <a:picLocks noChangeAspect="1"/>
+          </p:cNvPicPr>
+          <p:nvPr/>
+        </p:nvPicPr>
+        <p:blipFill>
+          <a:blip r:embed="rId1"/>
+          <a:stretch>
+            <a:fillRect/>
+          </a:stretch>
+        </p:blipFill>
+        <p:spPr>
+          <a:xfrm>
+            <a:off x="530352" y="1627632"/>
+            <a:ext cx="3657600" cy="2852928"/>
+          </a:xfrm>
+          <a:prstGeom prst="rect">
+            <a:avLst/>
+          </a:prstGeom>
+        </p:spPr>
+      </p:pic>
       <p:sp>
         <p:nvSpPr>
           <p:cNvPr id="6" name="content-18-rect-4"/>
@@ -11236,59 +11779,56 @@
         </p:nvSpPr>
         <p:spPr>
           <a:xfrm>
-            <a:off x="457200" y="2359152"/>
-            <a:ext cx="4846320" cy="1078992"/>
+            <a:off x="4882896" y="1554480"/>
+            <a:ext cx="3803904" cy="2999232"/>
           </a:xfrm>
           <a:prstGeom prst="roundRect">
             <a:avLst>
-              <a:gd name="adj" fmla="val 6780"/>
+              <a:gd name="adj" fmla="val 1829"/>
             </a:avLst>
           </a:prstGeom>
           <a:solidFill>
-            <a:schemeClr val="bg2"/>
+            <a:schemeClr val="bg1"/>
           </a:solidFill>
-          <a:ln/>
-        </p:spPr>
-      </p:sp>
-      <p:sp>
-        <p:nvSpPr>
-          <p:cNvPr id="7" name="content-18-text-5"/>
-          <p:cNvSpPr txBox="1"/>
-          <p:nvPr/>
-        </p:nvSpPr>
-        <p:spPr>
-          <a:xfrm>
-            <a:off x="594360" y="2404872"/>
-            <a:ext cx="1783080" cy="987552"/>
-          </a:xfrm>
-          <a:prstGeom prst="rect">
-            <a:avLst/>
-          </a:prstGeom>
-          <a:noFill/>
-          <a:ln/>
-        </p:spPr>
-        <p:txBody>
-          <a:bodyPr wrap="square" lIns="0" tIns="0" rIns="0" bIns="0" rtlCol="0" anchor="ctr"/>
-          <a:lstStyle/>
-          <a:p>
-            <a:pPr algn="l" indent="0" marL="0">
-              <a:buNone/>
-            </a:pPr>
-            <a:r>
-              <a:rPr lang="en-US" sz="2100" b="1" dirty="0">
-                <a:solidFill>
-                  <a:schemeClr val="accent1"/>
-                </a:solidFill>
-                <a:latin typeface="+mj-lt" pitchFamily="34" charset="0"/>
-                <a:ea typeface="+mj-lt" pitchFamily="34" charset="-122"/>
-                <a:cs typeface="+mj-lt" pitchFamily="34" charset="-120"/>
-              </a:rPr>
-              <a:t>6.4%</a:t>
-            </a:r>
-            <a:endParaRPr lang="en-US" sz="2100" dirty="0"/>
-          </a:p>
-        </p:txBody>
-      </p:sp>
+          <a:ln w="9525">
+            <a:solidFill>
+              <a:schemeClr val="accent5"/>
+            </a:solidFill>
+            <a:prstDash val="solid"/>
+          </a:ln>
+          <a:effectLst>
+            <a:outerShdw sx="100000" sy="100000" kx="0" ky="0" algn="bl" rotWithShape="0" blurRad="101600" dist="25400" dir="5400000">
+              <a:srgbClr val="0B2545">
+                <a:alpha val="18000"/>
+              </a:srgbClr>
+            </a:outerShdw>
+          </a:effectLst>
+        </p:spPr>
+      </p:sp>
+      <p:pic>
+        <p:nvPicPr>
+          <p:cNvPr id="7" name="content-18-image-5" descr="Compliance report whose hash verifies in the browser">    </p:cNvPr>
+          <p:cNvPicPr>
+            <a:picLocks noChangeAspect="1"/>
+          </p:cNvPicPr>
+          <p:nvPr/>
+        </p:nvPicPr>
+        <p:blipFill>
+          <a:blip r:embed="rId2"/>
+          <a:stretch>
+            <a:fillRect/>
+          </a:stretch>
+        </p:blipFill>
+        <p:spPr>
+          <a:xfrm>
+            <a:off x="4956048" y="1627632"/>
+            <a:ext cx="3657600" cy="2852928"/>
+          </a:xfrm>
+          <a:prstGeom prst="rect">
+            <a:avLst/>
+          </a:prstGeom>
+        </p:spPr>
+      </p:pic>
       <p:sp>
         <p:nvSpPr>
           <p:cNvPr id="8" name="content-18-text-6"/>
@@ -11297,17 +11837,17 @@
         </p:nvSpPr>
         <p:spPr>
           <a:xfrm>
-            <a:off x="2423160" y="2404872"/>
-            <a:ext cx="2788920" cy="987552"/>
-          </a:xfrm>
-          <a:prstGeom prst="rect">
-            <a:avLst/>
-          </a:prstGeom>
-          <a:noFill/>
-          <a:ln/>
-        </p:spPr>
-        <p:txBody>
-          <a:bodyPr wrap="square" lIns="0" tIns="0" rIns="0" bIns="0" rtlCol="0" anchor="ctr"/>
+            <a:off x="457200" y="4590288"/>
+            <a:ext cx="3803904" cy="274320"/>
+          </a:xfrm>
+          <a:prstGeom prst="rect">
+            <a:avLst/>
+          </a:prstGeom>
+          <a:noFill/>
+          <a:ln/>
+        </p:spPr>
+        <p:txBody>
+          <a:bodyPr wrap="square" lIns="0" tIns="0" rIns="0" bIns="0" rtlCol="0" anchor="t"/>
           <a:lstStyle/>
           <a:p>
             <a:pPr algn="l" indent="0" marL="0">
@@ -11316,10 +11856,10 @@
             <a:r>
               <a:rPr lang="en-US" sz="1100" dirty="0">
                 <a:solidFill>
-                  <a:schemeClr val="tx1"/>
-                </a:solidFill>
-              </a:rPr>
-              <a:t>average cost of sending USD 200 worldwide, Q3 2025, against a 3% goal (World Bank). Small remittances, not tuition: context only.</a:t>
+                  <a:schemeClr val="tx2"/>
+                </a:solidFill>
+              </a:rPr>
+              <a:t>Sandbox screen: what is simulated, how to test it</a:t>
             </a:r>
             <a:endParaRPr lang="en-US" sz="1100" dirty="0"/>
           </a:p>
@@ -11327,84 +11867,23 @@
       </p:sp>
       <p:sp>
         <p:nvSpPr>
-          <p:cNvPr id="9" name="content-18-rect-7"/>
-          <p:cNvSpPr/>
-          <p:nvPr/>
-        </p:nvSpPr>
-        <p:spPr>
-          <a:xfrm>
-            <a:off x="457200" y="3529584"/>
-            <a:ext cx="4846320" cy="1078992"/>
-          </a:xfrm>
-          <a:prstGeom prst="roundRect">
-            <a:avLst>
-              <a:gd name="adj" fmla="val 6780"/>
-            </a:avLst>
-          </a:prstGeom>
-          <a:solidFill>
-            <a:schemeClr val="bg2"/>
-          </a:solidFill>
-          <a:ln/>
-        </p:spPr>
-      </p:sp>
-      <p:sp>
-        <p:nvSpPr>
-          <p:cNvPr id="10" name="content-18-text-8"/>
-          <p:cNvSpPr txBox="1"/>
-          <p:nvPr/>
-        </p:nvSpPr>
-        <p:spPr>
-          <a:xfrm>
-            <a:off x="594360" y="3575304"/>
-            <a:ext cx="1783080" cy="987552"/>
-          </a:xfrm>
-          <a:prstGeom prst="rect">
-            <a:avLst/>
-          </a:prstGeom>
-          <a:noFill/>
-          <a:ln/>
-        </p:spPr>
-        <p:txBody>
-          <a:bodyPr wrap="square" lIns="0" tIns="0" rIns="0" bIns="0" rtlCol="0" anchor="ctr"/>
-          <a:lstStyle/>
-          <a:p>
-            <a:pPr algn="l" indent="0" marL="0">
-              <a:buNone/>
-            </a:pPr>
-            <a:r>
-              <a:rPr lang="en-US" sz="2100" b="1" dirty="0">
-                <a:solidFill>
-                  <a:schemeClr val="accent1"/>
-                </a:solidFill>
-                <a:latin typeface="+mj-lt" pitchFamily="34" charset="0"/>
-                <a:ea typeface="+mj-lt" pitchFamily="34" charset="-122"/>
-                <a:cs typeface="+mj-lt" pitchFamily="34" charset="-120"/>
-              </a:rPr>
-              <a:t>USD 8.8m</a:t>
-            </a:r>
-            <a:endParaRPr lang="en-US" sz="2100" dirty="0"/>
-          </a:p>
-        </p:txBody>
-      </p:sp>
-      <p:sp>
-        <p:nvSpPr>
-          <p:cNvPr id="11" name="content-18-text-9"/>
-          <p:cNvSpPr txBox="1"/>
-          <p:nvPr/>
-        </p:nvSpPr>
-        <p:spPr>
-          <a:xfrm>
-            <a:off x="2423160" y="3575304"/>
-            <a:ext cx="2788920" cy="987552"/>
-          </a:xfrm>
-          <a:prstGeom prst="rect">
-            <a:avLst/>
-          </a:prstGeom>
-          <a:noFill/>
-          <a:ln/>
-        </p:spPr>
-        <p:txBody>
-          <a:bodyPr wrap="square" lIns="0" tIns="0" rIns="0" bIns="0" rtlCol="0" anchor="ctr"/>
+          <p:cNvPr id="9" name="content-18-text-7"/>
+          <p:cNvSpPr txBox="1"/>
+          <p:nvPr/>
+        </p:nvSpPr>
+        <p:spPr>
+          <a:xfrm>
+            <a:off x="4882896" y="4590288"/>
+            <a:ext cx="3803904" cy="274320"/>
+          </a:xfrm>
+          <a:prstGeom prst="rect">
+            <a:avLst/>
+          </a:prstGeom>
+          <a:noFill/>
+          <a:ln/>
+        </p:spPr>
+        <p:txBody>
+          <a:bodyPr wrap="square" lIns="0" tIns="0" rIns="0" bIns="0" rtlCol="0" anchor="t"/>
           <a:lstStyle/>
           <a:p>
             <a:pPr algn="l" indent="0" marL="0">
@@ -11413,355 +11892,12 @@
             <a:r>
               <a:rPr lang="en-US" sz="1100" dirty="0">
                 <a:solidFill>
-                  <a:schemeClr val="tx1"/>
-                </a:solidFill>
-              </a:rPr>
-              <a:t>a year stays with families for each 1 point of cost taken off that volume. Our arithmetic (1% of 881.7m), not a forecast.</a:t>
+                  <a:schemeClr val="tx2"/>
+                </a:solidFill>
+              </a:rPr>
+              <a:t>Compliance report: the hash verifies in the browser</a:t>
             </a:r>
             <a:endParaRPr lang="en-US" sz="1100" dirty="0"/>
-          </a:p>
-        </p:txBody>
-      </p:sp>
-      <p:sp>
-        <p:nvSpPr>
-          <p:cNvPr id="12" name="content-18-rect-10"/>
-          <p:cNvSpPr/>
-          <p:nvPr/>
-        </p:nvSpPr>
-        <p:spPr>
-          <a:xfrm>
-            <a:off x="5486400" y="1188720"/>
-            <a:ext cx="3200400" cy="3383280"/>
-          </a:xfrm>
-          <a:prstGeom prst="roundRect">
-            <a:avLst>
-              <a:gd name="adj" fmla="val 2286"/>
-            </a:avLst>
-          </a:prstGeom>
-          <a:solidFill>
-            <a:schemeClr val="bg2"/>
-          </a:solidFill>
-          <a:ln/>
-        </p:spPr>
-      </p:sp>
-      <p:sp>
-        <p:nvSpPr>
-          <p:cNvPr id="13" name="content-18-text-11"/>
-          <p:cNvSpPr txBox="1"/>
-          <p:nvPr/>
-        </p:nvSpPr>
-        <p:spPr>
-          <a:xfrm>
-            <a:off x="5669280" y="1261872"/>
-            <a:ext cx="2834640" cy="365760"/>
-          </a:xfrm>
-          <a:prstGeom prst="rect">
-            <a:avLst/>
-          </a:prstGeom>
-          <a:noFill/>
-          <a:ln/>
-        </p:spPr>
-        <p:txBody>
-          <a:bodyPr wrap="square" lIns="0" tIns="0" rIns="0" bIns="0" rtlCol="0" anchor="ctr"/>
-          <a:lstStyle/>
-          <a:p>
-            <a:pPr algn="l" indent="0" marL="0">
-              <a:buNone/>
-            </a:pPr>
-            <a:r>
-              <a:rPr lang="en-US" sz="1600" b="1" dirty="0">
-                <a:solidFill>
-                  <a:schemeClr val="accent1"/>
-                </a:solidFill>
-              </a:rPr>
-              <a:t>Who gains</a:t>
-            </a:r>
-            <a:endParaRPr lang="en-US" sz="1600" dirty="0"/>
-          </a:p>
-        </p:txBody>
-      </p:sp>
-      <p:sp>
-        <p:nvSpPr>
-          <p:cNvPr id="14" name="content-18-text-12"/>
-          <p:cNvSpPr txBox="1"/>
-          <p:nvPr/>
-        </p:nvSpPr>
-        <p:spPr>
-          <a:xfrm>
-            <a:off x="5669280" y="1691640"/>
-            <a:ext cx="2834640" cy="530352"/>
-          </a:xfrm>
-          <a:prstGeom prst="rect">
-            <a:avLst/>
-          </a:prstGeom>
-          <a:noFill/>
-          <a:ln/>
-        </p:spPr>
-        <p:txBody>
-          <a:bodyPr wrap="square" lIns="0" tIns="0" rIns="0" bIns="0" rtlCol="0" anchor="ctr"/>
-          <a:lstStyle/>
-          <a:p>
-            <a:pPr algn="l" indent="0" marL="0">
-              <a:buNone/>
-            </a:pPr>
-            <a:r>
-              <a:rPr lang="en-US" sz="1200" b="1" dirty="0">
-                <a:solidFill>
-                  <a:schemeClr val="tx1"/>
-                </a:solidFill>
-              </a:rPr>
-              <a:t>Family: </a:t>
-            </a:r>
-            <a:pPr algn="l" indent="0" marL="0">
-              <a:buNone/>
-            </a:pPr>
-            <a:r>
-              <a:rPr lang="en-US" sz="1200" dirty="0">
-                <a:solidFill>
-                  <a:schemeClr val="tx1"/>
-                </a:solidFill>
-              </a:rPr>
-              <a:t>Lower true cost, a safe deadline, one plan.</a:t>
-            </a:r>
-            <a:endParaRPr lang="en-US" sz="1200" dirty="0"/>
-          </a:p>
-        </p:txBody>
-      </p:sp>
-      <p:sp>
-        <p:nvSpPr>
-          <p:cNvPr id="15" name="content-18-text-13"/>
-          <p:cNvSpPr txBox="1"/>
-          <p:nvPr/>
-        </p:nvSpPr>
-        <p:spPr>
-          <a:xfrm>
-            <a:off x="5669280" y="2258568"/>
-            <a:ext cx="2834640" cy="530352"/>
-          </a:xfrm>
-          <a:prstGeom prst="rect">
-            <a:avLst/>
-          </a:prstGeom>
-          <a:noFill/>
-          <a:ln/>
-        </p:spPr>
-        <p:txBody>
-          <a:bodyPr wrap="square" lIns="0" tIns="0" rIns="0" bIns="0" rtlCol="0" anchor="ctr"/>
-          <a:lstStyle/>
-          <a:p>
-            <a:pPr algn="l" indent="0" marL="0">
-              <a:buNone/>
-            </a:pPr>
-            <a:r>
-              <a:rPr lang="en-US" sz="1200" b="1" dirty="0">
-                <a:solidFill>
-                  <a:schemeClr val="tx1"/>
-                </a:solidFill>
-              </a:rPr>
-              <a:t>Bank: </a:t>
-            </a:r>
-            <a:pPr algn="l" indent="0" marL="0">
-              <a:buNone/>
-            </a:pPr>
-            <a:r>
-              <a:rPr lang="en-US" sz="1200" dirty="0">
-                <a:solidFill>
-                  <a:schemeClr val="tx1"/>
-                </a:solidFill>
-              </a:rPr>
-              <a:t>Documents checked and risk-routed before a reviewer looks.</a:t>
-            </a:r>
-            <a:endParaRPr lang="en-US" sz="1200" dirty="0"/>
-          </a:p>
-        </p:txBody>
-      </p:sp>
-      <p:sp>
-        <p:nvSpPr>
-          <p:cNvPr id="16" name="content-18-text-14"/>
-          <p:cNvSpPr txBox="1"/>
-          <p:nvPr/>
-        </p:nvSpPr>
-        <p:spPr>
-          <a:xfrm>
-            <a:off x="5669280" y="2825496"/>
-            <a:ext cx="2834640" cy="530352"/>
-          </a:xfrm>
-          <a:prstGeom prst="rect">
-            <a:avLst/>
-          </a:prstGeom>
-          <a:noFill/>
-          <a:ln/>
-        </p:spPr>
-        <p:txBody>
-          <a:bodyPr wrap="square" lIns="0" tIns="0" rIns="0" bIns="0" rtlCol="0" anchor="ctr"/>
-          <a:lstStyle/>
-          <a:p>
-            <a:pPr algn="l" indent="0" marL="0">
-              <a:buNone/>
-            </a:pPr>
-            <a:r>
-              <a:rPr lang="en-US" sz="1200" b="1" dirty="0">
-                <a:solidFill>
-                  <a:schemeClr val="tx1"/>
-                </a:solidFill>
-              </a:rPr>
-              <a:t>University: </a:t>
-            </a:r>
-            <a:pPr algn="l" indent="0" marL="0">
-              <a:buNone/>
-            </a:pPr>
-            <a:r>
-              <a:rPr lang="en-US" sz="1200" dirty="0">
-                <a:solidFill>
-                  <a:schemeClr val="tx1"/>
-                </a:solidFill>
-              </a:rPr>
-              <a:t>Fewer short or unmatched payments.</a:t>
-            </a:r>
-            <a:endParaRPr lang="en-US" sz="1200" dirty="0"/>
-          </a:p>
-        </p:txBody>
-      </p:sp>
-      <p:sp>
-        <p:nvSpPr>
-          <p:cNvPr id="17" name="content-18-text-15"/>
-          <p:cNvSpPr txBox="1"/>
-          <p:nvPr/>
-        </p:nvSpPr>
-        <p:spPr>
-          <a:xfrm>
-            <a:off x="5669280" y="3429000"/>
-            <a:ext cx="2834640" cy="274320"/>
-          </a:xfrm>
-          <a:prstGeom prst="rect">
-            <a:avLst/>
-          </a:prstGeom>
-          <a:noFill/>
-          <a:ln/>
-        </p:spPr>
-        <p:txBody>
-          <a:bodyPr wrap="square" lIns="0" tIns="0" rIns="0" bIns="0" rtlCol="0" anchor="ctr"/>
-          <a:lstStyle/>
-          <a:p>
-            <a:pPr algn="l" indent="0" marL="0">
-              <a:buNone/>
-            </a:pPr>
-            <a:r>
-              <a:rPr lang="en-US" sz="1400" b="1" dirty="0">
-                <a:solidFill>
-                  <a:schemeClr val="accent1"/>
-                </a:solidFill>
-              </a:rPr>
-              <a:t>Who could pay (to test)</a:t>
-            </a:r>
-            <a:endParaRPr lang="en-US" sz="1400" dirty="0"/>
-          </a:p>
-        </p:txBody>
-      </p:sp>
-      <p:sp>
-        <p:nvSpPr>
-          <p:cNvPr id="18" name="content-18-text-16"/>
-          <p:cNvSpPr txBox="1"/>
-          <p:nvPr/>
-        </p:nvSpPr>
-        <p:spPr>
-          <a:xfrm>
-            <a:off x="5669280" y="3703320"/>
-            <a:ext cx="2834640" cy="822960"/>
-          </a:xfrm>
-          <a:prstGeom prst="rect">
-            <a:avLst/>
-          </a:prstGeom>
-          <a:noFill/>
-          <a:ln/>
-        </p:spPr>
-        <p:txBody>
-          <a:bodyPr wrap="square" lIns="0" tIns="0" rIns="0" bIns="0" rtlCol="0" anchor="t"/>
-          <a:lstStyle/>
-          <a:p>
-            <a:pPr algn="l" indent="0" marL="0">
-              <a:buNone/>
-            </a:pPr>
-            <a:r>
-              <a:rPr lang="en-US" sz="1100" dirty="0">
-                <a:solidFill>
-                  <a:schemeClr val="tx1"/>
-                </a:solidFill>
-              </a:rPr>
-              <a:t>A partner bank pays a small service fee per assisted payment. At 0.2% of the volume, a 5% share is about USD 88,000 a year: modest, and a number to test.</a:t>
-            </a:r>
-            <a:endParaRPr lang="en-US" sz="1100" dirty="0"/>
-          </a:p>
-        </p:txBody>
-      </p:sp>
-      <p:sp>
-        <p:nvSpPr>
-          <p:cNvPr id="19" name="content-18-text-17"/>
-          <p:cNvSpPr txBox="1"/>
-          <p:nvPr/>
-        </p:nvSpPr>
-        <p:spPr>
-          <a:xfrm>
-            <a:off x="457200" y="4864608"/>
-            <a:ext cx="8229600" cy="201168"/>
-          </a:xfrm>
-          <a:prstGeom prst="rect">
-            <a:avLst/>
-          </a:prstGeom>
-          <a:noFill/>
-          <a:ln/>
-        </p:spPr>
-        <p:txBody>
-          <a:bodyPr wrap="square" lIns="0" tIns="0" rIns="0" bIns="0" rtlCol="0" anchor="t"/>
-          <a:lstStyle/>
-          <a:p>
-            <a:pPr algn="l" indent="0" marL="0">
-              <a:buNone/>
-            </a:pPr>
-            <a:r>
-              <a:rPr lang="en-US" sz="1000" dirty="0">
-                <a:solidFill>
-                  <a:schemeClr val="tx2"/>
-                </a:solidFill>
-              </a:rPr>
-              <a:t>Illustrations, not forecasts. No partner, no pilot, no real users yet. Sources and sums: docs/BUSINESS_CASE.md</a:t>
-            </a:r>
-            <a:endParaRPr lang="en-US" sz="1000" dirty="0"/>
-          </a:p>
-        </p:txBody>
-      </p:sp>
-      <p:sp>
-        <p:nvSpPr>
-          <p:cNvPr id="20" name="content-18-text-18"/>
-          <p:cNvSpPr txBox="1"/>
-          <p:nvPr/>
-        </p:nvSpPr>
-        <p:spPr>
-          <a:xfrm>
-            <a:off x="457200" y="4626864"/>
-            <a:ext cx="8229600" cy="219456"/>
-          </a:xfrm>
-          <a:prstGeom prst="rect">
-            <a:avLst/>
-          </a:prstGeom>
-          <a:noFill/>
-          <a:ln/>
-        </p:spPr>
-        <p:txBody>
-          <a:bodyPr wrap="square" lIns="0" tIns="0" rIns="0" bIns="0" rtlCol="0" anchor="t"/>
-          <a:lstStyle/>
-          <a:p>
-            <a:pPr algn="l" indent="0" marL="0">
-              <a:buNone/>
-            </a:pPr>
-            <a:r>
-              <a:rPr lang="en-US" sz="950" dirty="0">
-                <a:solidFill>
-                  <a:schemeClr val="tx2"/>
-                </a:solidFill>
-              </a:rPr>
-              <a:t>Volume is real (Bangladesh Bank, via The Observer). Rates, fees, city costs and the 8.8m figure are our arithmetic or invented for the sandbox.</a:t>
-            </a:r>
-            <a:endParaRPr lang="en-US" sz="950" dirty="0"/>
           </a:p>
         </p:txBody>
       </p:sp>
@@ -11825,6 +11961,1420 @@
                 <a:ea typeface="+mj-lt" pitchFamily="34" charset="-122"/>
                 <a:cs typeface="+mj-lt" pitchFamily="34" charset="-120"/>
               </a:rPr>
+              <a:t>Why it can work</a:t>
+            </a:r>
+            <a:endParaRPr lang="en-US" sz="3600" dirty="0"/>
+          </a:p>
+        </p:txBody>
+      </p:sp>
+      <p:sp>
+        <p:nvSpPr>
+          <p:cNvPr id="3" name="content-19-rect-1"/>
+          <p:cNvSpPr/>
+          <p:nvPr/>
+        </p:nvSpPr>
+        <p:spPr>
+          <a:xfrm>
+            <a:off x="457200" y="1188720"/>
+            <a:ext cx="4846320" cy="1078992"/>
+          </a:xfrm>
+          <a:prstGeom prst="roundRect">
+            <a:avLst>
+              <a:gd name="adj" fmla="val 6780"/>
+            </a:avLst>
+          </a:prstGeom>
+          <a:solidFill>
+            <a:schemeClr val="bg2"/>
+          </a:solidFill>
+          <a:ln/>
+        </p:spPr>
+      </p:sp>
+      <p:sp>
+        <p:nvSpPr>
+          <p:cNvPr id="4" name="content-19-text-2"/>
+          <p:cNvSpPr txBox="1"/>
+          <p:nvPr/>
+        </p:nvSpPr>
+        <p:spPr>
+          <a:xfrm>
+            <a:off x="594360" y="1234440"/>
+            <a:ext cx="1783080" cy="987552"/>
+          </a:xfrm>
+          <a:prstGeom prst="rect">
+            <a:avLst/>
+          </a:prstGeom>
+          <a:noFill/>
+          <a:ln/>
+        </p:spPr>
+        <p:txBody>
+          <a:bodyPr wrap="square" lIns="0" tIns="0" rIns="0" bIns="0" rtlCol="0" anchor="ctr"/>
+          <a:lstStyle/>
+          <a:p>
+            <a:pPr algn="l" indent="0" marL="0">
+              <a:buNone/>
+            </a:pPr>
+            <a:r>
+              <a:rPr lang="en-US" sz="2100" b="1" dirty="0">
+                <a:solidFill>
+                  <a:schemeClr val="accent1"/>
+                </a:solidFill>
+                <a:latin typeface="+mj-lt" pitchFamily="34" charset="0"/>
+                <a:ea typeface="+mj-lt" pitchFamily="34" charset="-122"/>
+                <a:cs typeface="+mj-lt" pitchFamily="34" charset="-120"/>
+              </a:rPr>
+              <a:t>USD 881.7m</a:t>
+            </a:r>
+            <a:endParaRPr lang="en-US" sz="2100" dirty="0"/>
+          </a:p>
+        </p:txBody>
+      </p:sp>
+      <p:sp>
+        <p:nvSpPr>
+          <p:cNvPr id="5" name="content-19-text-3"/>
+          <p:cNvSpPr txBox="1"/>
+          <p:nvPr/>
+        </p:nvSpPr>
+        <p:spPr>
+          <a:xfrm>
+            <a:off x="2423160" y="1234440"/>
+            <a:ext cx="2788920" cy="987552"/>
+          </a:xfrm>
+          <a:prstGeom prst="rect">
+            <a:avLst/>
+          </a:prstGeom>
+          <a:noFill/>
+          <a:ln/>
+        </p:spPr>
+        <p:txBody>
+          <a:bodyPr wrap="square" lIns="0" tIns="0" rIns="0" bIns="0" rtlCol="0" anchor="ctr"/>
+          <a:lstStyle/>
+          <a:p>
+            <a:pPr algn="l" indent="0" marL="0">
+              <a:buNone/>
+            </a:pPr>
+            <a:r>
+              <a:rPr lang="en-US" sz="1100" dirty="0">
+                <a:solidFill>
+                  <a:schemeClr val="tx1"/>
+                </a:solidFill>
+              </a:rPr>
+              <a:t>sent through Bangladeshi banks for overseas education in FY2025-26: a record, up 32% in a year. Bangladesh Bank data, via The Observer, 24 Jul 2026.</a:t>
+            </a:r>
+            <a:endParaRPr lang="en-US" sz="1100" dirty="0"/>
+          </a:p>
+        </p:txBody>
+      </p:sp>
+      <p:sp>
+        <p:nvSpPr>
+          <p:cNvPr id="6" name="content-19-rect-4"/>
+          <p:cNvSpPr/>
+          <p:nvPr/>
+        </p:nvSpPr>
+        <p:spPr>
+          <a:xfrm>
+            <a:off x="457200" y="2359152"/>
+            <a:ext cx="4846320" cy="1078992"/>
+          </a:xfrm>
+          <a:prstGeom prst="roundRect">
+            <a:avLst>
+              <a:gd name="adj" fmla="val 6780"/>
+            </a:avLst>
+          </a:prstGeom>
+          <a:solidFill>
+            <a:schemeClr val="bg2"/>
+          </a:solidFill>
+          <a:ln/>
+        </p:spPr>
+      </p:sp>
+      <p:sp>
+        <p:nvSpPr>
+          <p:cNvPr id="7" name="content-19-text-5"/>
+          <p:cNvSpPr txBox="1"/>
+          <p:nvPr/>
+        </p:nvSpPr>
+        <p:spPr>
+          <a:xfrm>
+            <a:off x="594360" y="2404872"/>
+            <a:ext cx="1783080" cy="987552"/>
+          </a:xfrm>
+          <a:prstGeom prst="rect">
+            <a:avLst/>
+          </a:prstGeom>
+          <a:noFill/>
+          <a:ln/>
+        </p:spPr>
+        <p:txBody>
+          <a:bodyPr wrap="square" lIns="0" tIns="0" rIns="0" bIns="0" rtlCol="0" anchor="ctr"/>
+          <a:lstStyle/>
+          <a:p>
+            <a:pPr algn="l" indent="0" marL="0">
+              <a:buNone/>
+            </a:pPr>
+            <a:r>
+              <a:rPr lang="en-US" sz="2100" b="1" dirty="0">
+                <a:solidFill>
+                  <a:schemeClr val="accent1"/>
+                </a:solidFill>
+                <a:latin typeface="+mj-lt" pitchFamily="34" charset="0"/>
+                <a:ea typeface="+mj-lt" pitchFamily="34" charset="-122"/>
+                <a:cs typeface="+mj-lt" pitchFamily="34" charset="-120"/>
+              </a:rPr>
+              <a:t>6.4%</a:t>
+            </a:r>
+            <a:endParaRPr lang="en-US" sz="2100" dirty="0"/>
+          </a:p>
+        </p:txBody>
+      </p:sp>
+      <p:sp>
+        <p:nvSpPr>
+          <p:cNvPr id="8" name="content-19-text-6"/>
+          <p:cNvSpPr txBox="1"/>
+          <p:nvPr/>
+        </p:nvSpPr>
+        <p:spPr>
+          <a:xfrm>
+            <a:off x="2423160" y="2404872"/>
+            <a:ext cx="2788920" cy="987552"/>
+          </a:xfrm>
+          <a:prstGeom prst="rect">
+            <a:avLst/>
+          </a:prstGeom>
+          <a:noFill/>
+          <a:ln/>
+        </p:spPr>
+        <p:txBody>
+          <a:bodyPr wrap="square" lIns="0" tIns="0" rIns="0" bIns="0" rtlCol="0" anchor="ctr"/>
+          <a:lstStyle/>
+          <a:p>
+            <a:pPr algn="l" indent="0" marL="0">
+              <a:buNone/>
+            </a:pPr>
+            <a:r>
+              <a:rPr lang="en-US" sz="1100" dirty="0">
+                <a:solidFill>
+                  <a:schemeClr val="tx1"/>
+                </a:solidFill>
+              </a:rPr>
+              <a:t>average cost of sending USD 200 worldwide, Q3 2025, against a 3% goal (World Bank). Small remittances, not tuition: context only.</a:t>
+            </a:r>
+            <a:endParaRPr lang="en-US" sz="1100" dirty="0"/>
+          </a:p>
+        </p:txBody>
+      </p:sp>
+      <p:sp>
+        <p:nvSpPr>
+          <p:cNvPr id="9" name="content-19-rect-7"/>
+          <p:cNvSpPr/>
+          <p:nvPr/>
+        </p:nvSpPr>
+        <p:spPr>
+          <a:xfrm>
+            <a:off x="457200" y="3529584"/>
+            <a:ext cx="4846320" cy="1078992"/>
+          </a:xfrm>
+          <a:prstGeom prst="roundRect">
+            <a:avLst>
+              <a:gd name="adj" fmla="val 6780"/>
+            </a:avLst>
+          </a:prstGeom>
+          <a:solidFill>
+            <a:schemeClr val="bg2"/>
+          </a:solidFill>
+          <a:ln/>
+        </p:spPr>
+      </p:sp>
+      <p:sp>
+        <p:nvSpPr>
+          <p:cNvPr id="10" name="content-19-text-8"/>
+          <p:cNvSpPr txBox="1"/>
+          <p:nvPr/>
+        </p:nvSpPr>
+        <p:spPr>
+          <a:xfrm>
+            <a:off x="594360" y="3575304"/>
+            <a:ext cx="1783080" cy="987552"/>
+          </a:xfrm>
+          <a:prstGeom prst="rect">
+            <a:avLst/>
+          </a:prstGeom>
+          <a:noFill/>
+          <a:ln/>
+        </p:spPr>
+        <p:txBody>
+          <a:bodyPr wrap="square" lIns="0" tIns="0" rIns="0" bIns="0" rtlCol="0" anchor="ctr"/>
+          <a:lstStyle/>
+          <a:p>
+            <a:pPr algn="l" indent="0" marL="0">
+              <a:buNone/>
+            </a:pPr>
+            <a:r>
+              <a:rPr lang="en-US" sz="2100" b="1" dirty="0">
+                <a:solidFill>
+                  <a:schemeClr val="accent1"/>
+                </a:solidFill>
+                <a:latin typeface="+mj-lt" pitchFamily="34" charset="0"/>
+                <a:ea typeface="+mj-lt" pitchFamily="34" charset="-122"/>
+                <a:cs typeface="+mj-lt" pitchFamily="34" charset="-120"/>
+              </a:rPr>
+              <a:t>USD 8.8m</a:t>
+            </a:r>
+            <a:endParaRPr lang="en-US" sz="2100" dirty="0"/>
+          </a:p>
+        </p:txBody>
+      </p:sp>
+      <p:sp>
+        <p:nvSpPr>
+          <p:cNvPr id="11" name="content-19-text-9"/>
+          <p:cNvSpPr txBox="1"/>
+          <p:nvPr/>
+        </p:nvSpPr>
+        <p:spPr>
+          <a:xfrm>
+            <a:off x="2423160" y="3575304"/>
+            <a:ext cx="2788920" cy="987552"/>
+          </a:xfrm>
+          <a:prstGeom prst="rect">
+            <a:avLst/>
+          </a:prstGeom>
+          <a:noFill/>
+          <a:ln/>
+        </p:spPr>
+        <p:txBody>
+          <a:bodyPr wrap="square" lIns="0" tIns="0" rIns="0" bIns="0" rtlCol="0" anchor="ctr"/>
+          <a:lstStyle/>
+          <a:p>
+            <a:pPr algn="l" indent="0" marL="0">
+              <a:buNone/>
+            </a:pPr>
+            <a:r>
+              <a:rPr lang="en-US" sz="1100" dirty="0">
+                <a:solidFill>
+                  <a:schemeClr val="tx1"/>
+                </a:solidFill>
+              </a:rPr>
+              <a:t>a year stays with families for each 1 point of cost taken off that volume. Our arithmetic (1% of 881.7m), not a forecast.</a:t>
+            </a:r>
+            <a:endParaRPr lang="en-US" sz="1100" dirty="0"/>
+          </a:p>
+        </p:txBody>
+      </p:sp>
+      <p:sp>
+        <p:nvSpPr>
+          <p:cNvPr id="12" name="content-19-rect-10"/>
+          <p:cNvSpPr/>
+          <p:nvPr/>
+        </p:nvSpPr>
+        <p:spPr>
+          <a:xfrm>
+            <a:off x="5486400" y="1188720"/>
+            <a:ext cx="3200400" cy="3383280"/>
+          </a:xfrm>
+          <a:prstGeom prst="roundRect">
+            <a:avLst>
+              <a:gd name="adj" fmla="val 2286"/>
+            </a:avLst>
+          </a:prstGeom>
+          <a:solidFill>
+            <a:schemeClr val="bg2"/>
+          </a:solidFill>
+          <a:ln/>
+        </p:spPr>
+      </p:sp>
+      <p:sp>
+        <p:nvSpPr>
+          <p:cNvPr id="13" name="content-19-text-11"/>
+          <p:cNvSpPr txBox="1"/>
+          <p:nvPr/>
+        </p:nvSpPr>
+        <p:spPr>
+          <a:xfrm>
+            <a:off x="5669280" y="1261872"/>
+            <a:ext cx="2834640" cy="365760"/>
+          </a:xfrm>
+          <a:prstGeom prst="rect">
+            <a:avLst/>
+          </a:prstGeom>
+          <a:noFill/>
+          <a:ln/>
+        </p:spPr>
+        <p:txBody>
+          <a:bodyPr wrap="square" lIns="0" tIns="0" rIns="0" bIns="0" rtlCol="0" anchor="ctr"/>
+          <a:lstStyle/>
+          <a:p>
+            <a:pPr algn="l" indent="0" marL="0">
+              <a:buNone/>
+            </a:pPr>
+            <a:r>
+              <a:rPr lang="en-US" sz="1600" b="1" dirty="0">
+                <a:solidFill>
+                  <a:schemeClr val="accent1"/>
+                </a:solidFill>
+              </a:rPr>
+              <a:t>Who gains</a:t>
+            </a:r>
+            <a:endParaRPr lang="en-US" sz="1600" dirty="0"/>
+          </a:p>
+        </p:txBody>
+      </p:sp>
+      <p:sp>
+        <p:nvSpPr>
+          <p:cNvPr id="14" name="content-19-text-12"/>
+          <p:cNvSpPr txBox="1"/>
+          <p:nvPr/>
+        </p:nvSpPr>
+        <p:spPr>
+          <a:xfrm>
+            <a:off x="5669280" y="1691640"/>
+            <a:ext cx="2834640" cy="530352"/>
+          </a:xfrm>
+          <a:prstGeom prst="rect">
+            <a:avLst/>
+          </a:prstGeom>
+          <a:noFill/>
+          <a:ln/>
+        </p:spPr>
+        <p:txBody>
+          <a:bodyPr wrap="square" lIns="0" tIns="0" rIns="0" bIns="0" rtlCol="0" anchor="ctr"/>
+          <a:lstStyle/>
+          <a:p>
+            <a:pPr algn="l" indent="0" marL="0">
+              <a:buNone/>
+            </a:pPr>
+            <a:r>
+              <a:rPr lang="en-US" sz="1200" b="1" dirty="0">
+                <a:solidFill>
+                  <a:schemeClr val="tx1"/>
+                </a:solidFill>
+              </a:rPr>
+              <a:t>Family: </a:t>
+            </a:r>
+            <a:pPr algn="l" indent="0" marL="0">
+              <a:buNone/>
+            </a:pPr>
+            <a:r>
+              <a:rPr lang="en-US" sz="1200" dirty="0">
+                <a:solidFill>
+                  <a:schemeClr val="tx1"/>
+                </a:solidFill>
+              </a:rPr>
+              <a:t>Lower true cost, a safe deadline, one plan.</a:t>
+            </a:r>
+            <a:endParaRPr lang="en-US" sz="1200" dirty="0"/>
+          </a:p>
+        </p:txBody>
+      </p:sp>
+      <p:sp>
+        <p:nvSpPr>
+          <p:cNvPr id="15" name="content-19-text-13"/>
+          <p:cNvSpPr txBox="1"/>
+          <p:nvPr/>
+        </p:nvSpPr>
+        <p:spPr>
+          <a:xfrm>
+            <a:off x="5669280" y="2258568"/>
+            <a:ext cx="2834640" cy="530352"/>
+          </a:xfrm>
+          <a:prstGeom prst="rect">
+            <a:avLst/>
+          </a:prstGeom>
+          <a:noFill/>
+          <a:ln/>
+        </p:spPr>
+        <p:txBody>
+          <a:bodyPr wrap="square" lIns="0" tIns="0" rIns="0" bIns="0" rtlCol="0" anchor="ctr"/>
+          <a:lstStyle/>
+          <a:p>
+            <a:pPr algn="l" indent="0" marL="0">
+              <a:buNone/>
+            </a:pPr>
+            <a:r>
+              <a:rPr lang="en-US" sz="1200" b="1" dirty="0">
+                <a:solidFill>
+                  <a:schemeClr val="tx1"/>
+                </a:solidFill>
+              </a:rPr>
+              <a:t>Bank: </a:t>
+            </a:r>
+            <a:pPr algn="l" indent="0" marL="0">
+              <a:buNone/>
+            </a:pPr>
+            <a:r>
+              <a:rPr lang="en-US" sz="1200" dirty="0">
+                <a:solidFill>
+                  <a:schemeClr val="tx1"/>
+                </a:solidFill>
+              </a:rPr>
+              <a:t>Documents checked and risk-routed before a reviewer looks.</a:t>
+            </a:r>
+            <a:endParaRPr lang="en-US" sz="1200" dirty="0"/>
+          </a:p>
+        </p:txBody>
+      </p:sp>
+      <p:sp>
+        <p:nvSpPr>
+          <p:cNvPr id="16" name="content-19-text-14"/>
+          <p:cNvSpPr txBox="1"/>
+          <p:nvPr/>
+        </p:nvSpPr>
+        <p:spPr>
+          <a:xfrm>
+            <a:off x="5669280" y="2825496"/>
+            <a:ext cx="2834640" cy="530352"/>
+          </a:xfrm>
+          <a:prstGeom prst="rect">
+            <a:avLst/>
+          </a:prstGeom>
+          <a:noFill/>
+          <a:ln/>
+        </p:spPr>
+        <p:txBody>
+          <a:bodyPr wrap="square" lIns="0" tIns="0" rIns="0" bIns="0" rtlCol="0" anchor="ctr"/>
+          <a:lstStyle/>
+          <a:p>
+            <a:pPr algn="l" indent="0" marL="0">
+              <a:buNone/>
+            </a:pPr>
+            <a:r>
+              <a:rPr lang="en-US" sz="1200" b="1" dirty="0">
+                <a:solidFill>
+                  <a:schemeClr val="tx1"/>
+                </a:solidFill>
+              </a:rPr>
+              <a:t>University: </a:t>
+            </a:r>
+            <a:pPr algn="l" indent="0" marL="0">
+              <a:buNone/>
+            </a:pPr>
+            <a:r>
+              <a:rPr lang="en-US" sz="1200" dirty="0">
+                <a:solidFill>
+                  <a:schemeClr val="tx1"/>
+                </a:solidFill>
+              </a:rPr>
+              <a:t>Fewer short or unmatched payments.</a:t>
+            </a:r>
+            <a:endParaRPr lang="en-US" sz="1200" dirty="0"/>
+          </a:p>
+        </p:txBody>
+      </p:sp>
+      <p:sp>
+        <p:nvSpPr>
+          <p:cNvPr id="17" name="content-19-text-15"/>
+          <p:cNvSpPr txBox="1"/>
+          <p:nvPr/>
+        </p:nvSpPr>
+        <p:spPr>
+          <a:xfrm>
+            <a:off x="5669280" y="3429000"/>
+            <a:ext cx="2834640" cy="274320"/>
+          </a:xfrm>
+          <a:prstGeom prst="rect">
+            <a:avLst/>
+          </a:prstGeom>
+          <a:noFill/>
+          <a:ln/>
+        </p:spPr>
+        <p:txBody>
+          <a:bodyPr wrap="square" lIns="0" tIns="0" rIns="0" bIns="0" rtlCol="0" anchor="ctr"/>
+          <a:lstStyle/>
+          <a:p>
+            <a:pPr algn="l" indent="0" marL="0">
+              <a:buNone/>
+            </a:pPr>
+            <a:r>
+              <a:rPr lang="en-US" sz="1400" b="1" dirty="0">
+                <a:solidFill>
+                  <a:schemeClr val="accent1"/>
+                </a:solidFill>
+              </a:rPr>
+              <a:t>Who could pay (to test)</a:t>
+            </a:r>
+            <a:endParaRPr lang="en-US" sz="1400" dirty="0"/>
+          </a:p>
+        </p:txBody>
+      </p:sp>
+      <p:sp>
+        <p:nvSpPr>
+          <p:cNvPr id="18" name="content-19-text-16"/>
+          <p:cNvSpPr txBox="1"/>
+          <p:nvPr/>
+        </p:nvSpPr>
+        <p:spPr>
+          <a:xfrm>
+            <a:off x="5669280" y="3703320"/>
+            <a:ext cx="2834640" cy="822960"/>
+          </a:xfrm>
+          <a:prstGeom prst="rect">
+            <a:avLst/>
+          </a:prstGeom>
+          <a:noFill/>
+          <a:ln/>
+        </p:spPr>
+        <p:txBody>
+          <a:bodyPr wrap="square" lIns="0" tIns="0" rIns="0" bIns="0" rtlCol="0" anchor="t"/>
+          <a:lstStyle/>
+          <a:p>
+            <a:pPr algn="l" indent="0" marL="0">
+              <a:buNone/>
+            </a:pPr>
+            <a:r>
+              <a:rPr lang="en-US" sz="1100" dirty="0">
+                <a:solidFill>
+                  <a:schemeClr val="tx1"/>
+                </a:solidFill>
+              </a:rPr>
+              <a:t>A partner bank pays a small service fee per assisted payment. At 0.2% of the volume, a 5% share is about USD 88,000 a year: modest, and a number to test.</a:t>
+            </a:r>
+            <a:endParaRPr lang="en-US" sz="1100" dirty="0"/>
+          </a:p>
+        </p:txBody>
+      </p:sp>
+      <p:sp>
+        <p:nvSpPr>
+          <p:cNvPr id="19" name="content-19-text-17"/>
+          <p:cNvSpPr txBox="1"/>
+          <p:nvPr/>
+        </p:nvSpPr>
+        <p:spPr>
+          <a:xfrm>
+            <a:off x="457200" y="4864608"/>
+            <a:ext cx="8229600" cy="201168"/>
+          </a:xfrm>
+          <a:prstGeom prst="rect">
+            <a:avLst/>
+          </a:prstGeom>
+          <a:noFill/>
+          <a:ln/>
+        </p:spPr>
+        <p:txBody>
+          <a:bodyPr wrap="square" lIns="0" tIns="0" rIns="0" bIns="0" rtlCol="0" anchor="t"/>
+          <a:lstStyle/>
+          <a:p>
+            <a:pPr algn="l" indent="0" marL="0">
+              <a:buNone/>
+            </a:pPr>
+            <a:r>
+              <a:rPr lang="en-US" sz="1000" dirty="0">
+                <a:solidFill>
+                  <a:schemeClr val="tx2"/>
+                </a:solidFill>
+              </a:rPr>
+              <a:t>Illustrations, not forecasts. No partner, no pilot, no real users yet. Sources and sums: docs/BUSINESS_CASE.md</a:t>
+            </a:r>
+            <a:endParaRPr lang="en-US" sz="1000" dirty="0"/>
+          </a:p>
+        </p:txBody>
+      </p:sp>
+      <p:sp>
+        <p:nvSpPr>
+          <p:cNvPr id="20" name="content-19-text-18"/>
+          <p:cNvSpPr txBox="1"/>
+          <p:nvPr/>
+        </p:nvSpPr>
+        <p:spPr>
+          <a:xfrm>
+            <a:off x="457200" y="4626864"/>
+            <a:ext cx="8229600" cy="219456"/>
+          </a:xfrm>
+          <a:prstGeom prst="rect">
+            <a:avLst/>
+          </a:prstGeom>
+          <a:noFill/>
+          <a:ln/>
+        </p:spPr>
+        <p:txBody>
+          <a:bodyPr wrap="square" lIns="0" tIns="0" rIns="0" bIns="0" rtlCol="0" anchor="t"/>
+          <a:lstStyle/>
+          <a:p>
+            <a:pPr algn="l" indent="0" marL="0">
+              <a:buNone/>
+            </a:pPr>
+            <a:r>
+              <a:rPr lang="en-US" sz="950" dirty="0">
+                <a:solidFill>
+                  <a:schemeClr val="tx2"/>
+                </a:solidFill>
+              </a:rPr>
+              <a:t>Volume is real (Bangladesh Bank, via The Observer). Rates, fees, city costs and the 8.8m figure are our arithmetic or invented for the sandbox.</a:t>
+            </a:r>
+            <a:endParaRPr lang="en-US" sz="950" dirty="0"/>
+          </a:p>
+        </p:txBody>
+      </p:sp>
+    </p:spTree>
+  </p:cSld>
+  <p:clrMapOvr>
+    <a:masterClrMapping/>
+  </p:clrMapOvr>
+</p:sld>
+</file>
+
+<file path=ppt/slides/slide2.xml><?xml version="1.0" encoding="utf-8"?>
+<p:sld xmlns:a="http://schemas.openxmlformats.org/drawingml/2006/main" xmlns:r="http://schemas.openxmlformats.org/officeDocument/2006/relationships" xmlns:p="http://schemas.openxmlformats.org/presentationml/2006/main">
+  <p:cSld name="Slide 2">
+    <p:spTree>
+      <p:nvGrpSpPr>
+        <p:cNvPr id="1" name=""/>
+        <p:cNvGrpSpPr/>
+        <p:nvPr/>
+      </p:nvGrpSpPr>
+      <p:grpSpPr>
+        <a:xfrm>
+          <a:off x="0" y="0"/>
+          <a:ext cx="0" cy="0"/>
+          <a:chOff x="0" y="0"/>
+          <a:chExt cx="0" cy="0"/>
+        </a:xfrm>
+      </p:grpSpPr>
+      <p:sp>
+        <p:nvSpPr>
+          <p:cNvPr id="2" name="Text 0"/>
+          <p:cNvSpPr/>
+          <p:nvPr>
+            <p:ph idx="100" type="title" hasCustomPrompt="1"/>
+          </p:nvPr>
+        </p:nvSpPr>
+        <p:spPr>
+          <a:xfrm>
+            <a:off x="457200" y="274320"/>
+            <a:ext cx="8229600" cy="777240"/>
+          </a:xfrm>
+          <a:prstGeom prst="rect">
+            <a:avLst/>
+          </a:prstGeom>
+          <a:noFill/>
+          <a:ln/>
+        </p:spPr>
+        <p:txBody>
+          <a:bodyPr wrap="square" lIns="0" tIns="0" rIns="0" bIns="0" rtlCol="0" anchor="ctr"/>
+          <a:lstStyle/>
+          <a:p>
+            <a:pPr algn="l" indent="0" marL="0">
+              <a:buNone/>
+            </a:pPr>
+            <a:r>
+              <a:rPr lang="en-US" sz="3600" b="1" dirty="0">
+                <a:solidFill>
+                  <a:schemeClr val="tx1"/>
+                </a:solidFill>
+                <a:latin typeface="+mj-lt" pitchFamily="34" charset="0"/>
+                <a:ea typeface="+mj-lt" pitchFamily="34" charset="-122"/>
+                <a:cs typeface="+mj-lt" pitchFamily="34" charset="-120"/>
+              </a:rPr>
+              <a:t>The posted fee is not the price</a:t>
+            </a:r>
+            <a:endParaRPr lang="en-US" sz="3600" dirty="0"/>
+          </a:p>
+        </p:txBody>
+      </p:sp>
+      <p:sp>
+        <p:nvSpPr>
+          <p:cNvPr id="3" name="content-2-rect-1"/>
+          <p:cNvSpPr/>
+          <p:nvPr/>
+        </p:nvSpPr>
+        <p:spPr>
+          <a:xfrm>
+            <a:off x="457200" y="1234440"/>
+            <a:ext cx="3017520" cy="3429000"/>
+          </a:xfrm>
+          <a:prstGeom prst="roundRect">
+            <a:avLst>
+              <a:gd name="adj" fmla="val 2424"/>
+            </a:avLst>
+          </a:prstGeom>
+          <a:solidFill>
+            <a:schemeClr val="bg2"/>
+          </a:solidFill>
+          <a:ln/>
+        </p:spPr>
+      </p:sp>
+      <p:sp>
+        <p:nvSpPr>
+          <p:cNvPr id="4" name="content-2-text-2"/>
+          <p:cNvSpPr txBox="1"/>
+          <p:nvPr/>
+        </p:nvSpPr>
+        <p:spPr>
+          <a:xfrm>
+            <a:off x="640080" y="1371600"/>
+            <a:ext cx="2651760" cy="1097280"/>
+          </a:xfrm>
+          <a:prstGeom prst="rect">
+            <a:avLst/>
+          </a:prstGeom>
+          <a:noFill/>
+          <a:ln/>
+        </p:spPr>
+        <p:txBody>
+          <a:bodyPr wrap="square" lIns="0" tIns="0" rIns="0" bIns="0" rtlCol="0" anchor="ctr"/>
+          <a:lstStyle/>
+          <a:p>
+            <a:pPr algn="l" indent="0" marL="0">
+              <a:buNone/>
+            </a:pPr>
+            <a:r>
+              <a:rPr lang="en-US" sz="6600" b="1" dirty="0">
+                <a:solidFill>
+                  <a:schemeClr val="accent1"/>
+                </a:solidFill>
+                <a:latin typeface="+mj-lt" pitchFamily="34" charset="0"/>
+                <a:ea typeface="+mj-lt" pitchFamily="34" charset="-122"/>
+                <a:cs typeface="+mj-lt" pitchFamily="34" charset="-120"/>
+              </a:rPr>
+              <a:t>63%</a:t>
+            </a:r>
+            <a:endParaRPr lang="en-US" sz="6600" dirty="0"/>
+          </a:p>
+        </p:txBody>
+      </p:sp>
+      <p:sp>
+        <p:nvSpPr>
+          <p:cNvPr id="5" name="content-2-text-3"/>
+          <p:cNvSpPr txBox="1"/>
+          <p:nvPr/>
+        </p:nvSpPr>
+        <p:spPr>
+          <a:xfrm>
+            <a:off x="640080" y="2560320"/>
+            <a:ext cx="2651760" cy="1005840"/>
+          </a:xfrm>
+          <a:prstGeom prst="rect">
+            <a:avLst/>
+          </a:prstGeom>
+          <a:noFill/>
+          <a:ln/>
+        </p:spPr>
+        <p:txBody>
+          <a:bodyPr wrap="square" lIns="0" tIns="0" rIns="0" bIns="0" rtlCol="0" anchor="t"/>
+          <a:lstStyle/>
+          <a:p>
+            <a:pPr algn="l" indent="0" marL="0">
+              <a:buNone/>
+            </a:pPr>
+            <a:r>
+              <a:rPr lang="en-US" sz="1600" b="1" dirty="0">
+                <a:solidFill>
+                  <a:schemeClr val="tx1"/>
+                </a:solidFill>
+              </a:rPr>
+              <a:t>of the real cost is the hidden exchange-rate margin</a:t>
+            </a:r>
+            <a:endParaRPr lang="en-US" sz="1600" dirty="0"/>
+          </a:p>
+        </p:txBody>
+      </p:sp>
+      <p:sp>
+        <p:nvSpPr>
+          <p:cNvPr id="6" name="content-2-text-4"/>
+          <p:cNvSpPr txBox="1"/>
+          <p:nvPr/>
+        </p:nvSpPr>
+        <p:spPr>
+          <a:xfrm>
+            <a:off x="640080" y="4023360"/>
+            <a:ext cx="2651760" cy="502920"/>
+          </a:xfrm>
+          <a:prstGeom prst="rect">
+            <a:avLst/>
+          </a:prstGeom>
+          <a:noFill/>
+          <a:ln/>
+        </p:spPr>
+        <p:txBody>
+          <a:bodyPr wrap="square" lIns="0" tIns="0" rIns="0" bIns="0" rtlCol="0" anchor="t"/>
+          <a:lstStyle/>
+          <a:p>
+            <a:pPr algn="l" indent="0" marL="0">
+              <a:buNone/>
+            </a:pPr>
+            <a:r>
+              <a:rPr lang="en-US" sz="1100" dirty="0">
+                <a:solidFill>
+                  <a:schemeClr val="tx2"/>
+                </a:solidFill>
+              </a:rPr>
+              <a:t>Provider B, GBP 10,000. Synthetic rates and fees.</a:t>
+            </a:r>
+            <a:endParaRPr lang="en-US" sz="1100" dirty="0"/>
+          </a:p>
+        </p:txBody>
+      </p:sp>
+      <p:sp>
+        <p:nvSpPr>
+          <p:cNvPr id="7" name="content-2-oval-5"/>
+          <p:cNvSpPr/>
+          <p:nvPr/>
+        </p:nvSpPr>
+        <p:spPr>
+          <a:xfrm>
+            <a:off x="3749040" y="1280160"/>
+            <a:ext cx="329184" cy="329184"/>
+          </a:xfrm>
+          <a:prstGeom prst="ellipse">
+            <a:avLst/>
+          </a:prstGeom>
+          <a:solidFill>
+            <a:schemeClr val="accent1"/>
+          </a:solidFill>
+          <a:ln/>
+        </p:spPr>
+      </p:sp>
+      <p:sp>
+        <p:nvSpPr>
+          <p:cNvPr id="8" name="content-2-text-6"/>
+          <p:cNvSpPr txBox="1"/>
+          <p:nvPr/>
+        </p:nvSpPr>
+        <p:spPr>
+          <a:xfrm>
+            <a:off x="3749040" y="1280160"/>
+            <a:ext cx="329184" cy="329184"/>
+          </a:xfrm>
+          <a:prstGeom prst="rect">
+            <a:avLst/>
+          </a:prstGeom>
+          <a:noFill/>
+          <a:ln/>
+        </p:spPr>
+        <p:txBody>
+          <a:bodyPr wrap="square" lIns="0" tIns="0" rIns="0" bIns="0" rtlCol="0" anchor="ctr"/>
+          <a:lstStyle/>
+          <a:p>
+            <a:pPr algn="ctr" indent="0" marL="0">
+              <a:buNone/>
+            </a:pPr>
+            <a:r>
+              <a:rPr lang="en-US" sz="1400" b="1" dirty="0">
+                <a:solidFill>
+                  <a:schemeClr val="bg1"/>
+                </a:solidFill>
+              </a:rPr>
+              <a:t>1</a:t>
+            </a:r>
+            <a:endParaRPr lang="en-US" sz="1400" dirty="0"/>
+          </a:p>
+        </p:txBody>
+      </p:sp>
+      <p:sp>
+        <p:nvSpPr>
+          <p:cNvPr id="9" name="content-2-text-7"/>
+          <p:cNvSpPr txBox="1"/>
+          <p:nvPr/>
+        </p:nvSpPr>
+        <p:spPr>
+          <a:xfrm>
+            <a:off x="4251960" y="1234440"/>
+            <a:ext cx="4434840" cy="658368"/>
+          </a:xfrm>
+          <a:prstGeom prst="rect">
+            <a:avLst/>
+          </a:prstGeom>
+          <a:noFill/>
+          <a:ln/>
+        </p:spPr>
+        <p:txBody>
+          <a:bodyPr wrap="square" lIns="0" tIns="0" rIns="0" bIns="0" rtlCol="0" anchor="ctr"/>
+          <a:lstStyle/>
+          <a:p>
+            <a:pPr algn="l" indent="0" marL="0">
+              <a:buNone/>
+            </a:pPr>
+            <a:r>
+              <a:rPr lang="en-US" sz="1400" b="1" dirty="0">
+                <a:solidFill>
+                  <a:schemeClr val="tx1"/>
+                </a:solidFill>
+              </a:rPr>
+              <a:t>Hidden margin.</a:t>
+            </a:r>
+            <a:pPr algn="l" indent="0" marL="0">
+              <a:buNone/>
+            </a:pPr>
+            <a:r>
+              <a:rPr lang="en-US" sz="1400" dirty="0">
+                <a:solidFill>
+                  <a:schemeClr val="tx2"/>
+                </a:solidFill>
+              </a:rPr>
+              <a:t> The rate sits above mid-market, and banks show a fee, not the margin.</a:t>
+            </a:r>
+            <a:endParaRPr lang="en-US" sz="1400" dirty="0"/>
+          </a:p>
+        </p:txBody>
+      </p:sp>
+      <p:sp>
+        <p:nvSpPr>
+          <p:cNvPr id="10" name="content-2-oval-8"/>
+          <p:cNvSpPr/>
+          <p:nvPr/>
+        </p:nvSpPr>
+        <p:spPr>
+          <a:xfrm>
+            <a:off x="3749040" y="1975104"/>
+            <a:ext cx="329184" cy="329184"/>
+          </a:xfrm>
+          <a:prstGeom prst="ellipse">
+            <a:avLst/>
+          </a:prstGeom>
+          <a:solidFill>
+            <a:schemeClr val="accent1"/>
+          </a:solidFill>
+          <a:ln/>
+        </p:spPr>
+      </p:sp>
+      <p:sp>
+        <p:nvSpPr>
+          <p:cNvPr id="11" name="content-2-text-9"/>
+          <p:cNvSpPr txBox="1"/>
+          <p:nvPr/>
+        </p:nvSpPr>
+        <p:spPr>
+          <a:xfrm>
+            <a:off x="3749040" y="1975104"/>
+            <a:ext cx="329184" cy="329184"/>
+          </a:xfrm>
+          <a:prstGeom prst="rect">
+            <a:avLst/>
+          </a:prstGeom>
+          <a:noFill/>
+          <a:ln/>
+        </p:spPr>
+        <p:txBody>
+          <a:bodyPr wrap="square" lIns="0" tIns="0" rIns="0" bIns="0" rtlCol="0" anchor="ctr"/>
+          <a:lstStyle/>
+          <a:p>
+            <a:pPr algn="ctr" indent="0" marL="0">
+              <a:buNone/>
+            </a:pPr>
+            <a:r>
+              <a:rPr lang="en-US" sz="1400" b="1" dirty="0">
+                <a:solidFill>
+                  <a:schemeClr val="bg1"/>
+                </a:solidFill>
+              </a:rPr>
+              <a:t>2</a:t>
+            </a:r>
+            <a:endParaRPr lang="en-US" sz="1400" dirty="0"/>
+          </a:p>
+        </p:txBody>
+      </p:sp>
+      <p:sp>
+        <p:nvSpPr>
+          <p:cNvPr id="12" name="content-2-text-10"/>
+          <p:cNvSpPr txBox="1"/>
+          <p:nvPr/>
+        </p:nvSpPr>
+        <p:spPr>
+          <a:xfrm>
+            <a:off x="4251960" y="1929384"/>
+            <a:ext cx="4434840" cy="658368"/>
+          </a:xfrm>
+          <a:prstGeom prst="rect">
+            <a:avLst/>
+          </a:prstGeom>
+          <a:noFill/>
+          <a:ln/>
+        </p:spPr>
+        <p:txBody>
+          <a:bodyPr wrap="square" lIns="0" tIns="0" rIns="0" bIns="0" rtlCol="0" anchor="ctr"/>
+          <a:lstStyle/>
+          <a:p>
+            <a:pPr algn="l" indent="0" marL="0">
+              <a:buNone/>
+            </a:pPr>
+            <a:r>
+              <a:rPr lang="en-US" sz="1400" b="1" dirty="0">
+                <a:solidFill>
+                  <a:schemeClr val="tx1"/>
+                </a:solidFill>
+              </a:rPr>
+              <a:t>Fees on the way.</a:t>
+            </a:r>
+            <a:pPr algn="l" indent="0" marL="0">
+              <a:buNone/>
+            </a:pPr>
+            <a:r>
+              <a:rPr lang="en-US" sz="1400" dirty="0">
+                <a:solidFill>
+                  <a:schemeClr val="tx2"/>
+                </a:solidFill>
+              </a:rPr>
+              <a:t> Correspondent and receiving banks deduct from the amount.</a:t>
+            </a:r>
+            <a:endParaRPr lang="en-US" sz="1400" dirty="0"/>
+          </a:p>
+        </p:txBody>
+      </p:sp>
+      <p:sp>
+        <p:nvSpPr>
+          <p:cNvPr id="13" name="content-2-oval-11"/>
+          <p:cNvSpPr/>
+          <p:nvPr/>
+        </p:nvSpPr>
+        <p:spPr>
+          <a:xfrm>
+            <a:off x="3749040" y="2670048"/>
+            <a:ext cx="329184" cy="329184"/>
+          </a:xfrm>
+          <a:prstGeom prst="ellipse">
+            <a:avLst/>
+          </a:prstGeom>
+          <a:solidFill>
+            <a:schemeClr val="accent1"/>
+          </a:solidFill>
+          <a:ln/>
+        </p:spPr>
+      </p:sp>
+      <p:sp>
+        <p:nvSpPr>
+          <p:cNvPr id="14" name="content-2-text-12"/>
+          <p:cNvSpPr txBox="1"/>
+          <p:nvPr/>
+        </p:nvSpPr>
+        <p:spPr>
+          <a:xfrm>
+            <a:off x="3749040" y="2670048"/>
+            <a:ext cx="329184" cy="329184"/>
+          </a:xfrm>
+          <a:prstGeom prst="rect">
+            <a:avLst/>
+          </a:prstGeom>
+          <a:noFill/>
+          <a:ln/>
+        </p:spPr>
+        <p:txBody>
+          <a:bodyPr wrap="square" lIns="0" tIns="0" rIns="0" bIns="0" rtlCol="0" anchor="ctr"/>
+          <a:lstStyle/>
+          <a:p>
+            <a:pPr algn="ctr" indent="0" marL="0">
+              <a:buNone/>
+            </a:pPr>
+            <a:r>
+              <a:rPr lang="en-US" sz="1400" b="1" dirty="0">
+                <a:solidFill>
+                  <a:schemeClr val="bg1"/>
+                </a:solidFill>
+              </a:rPr>
+              <a:t>3</a:t>
+            </a:r>
+            <a:endParaRPr lang="en-US" sz="1400" dirty="0"/>
+          </a:p>
+        </p:txBody>
+      </p:sp>
+      <p:sp>
+        <p:nvSpPr>
+          <p:cNvPr id="15" name="content-2-text-13"/>
+          <p:cNvSpPr txBox="1"/>
+          <p:nvPr/>
+        </p:nvSpPr>
+        <p:spPr>
+          <a:xfrm>
+            <a:off x="4251960" y="2624328"/>
+            <a:ext cx="4434840" cy="658368"/>
+          </a:xfrm>
+          <a:prstGeom prst="rect">
+            <a:avLst/>
+          </a:prstGeom>
+          <a:noFill/>
+          <a:ln/>
+        </p:spPr>
+        <p:txBody>
+          <a:bodyPr wrap="square" lIns="0" tIns="0" rIns="0" bIns="0" rtlCol="0" anchor="ctr"/>
+          <a:lstStyle/>
+          <a:p>
+            <a:pPr algn="l" indent="0" marL="0">
+              <a:buNone/>
+            </a:pPr>
+            <a:r>
+              <a:rPr lang="en-US" sz="1400" b="1" dirty="0">
+                <a:solidFill>
+                  <a:schemeClr val="tx1"/>
+                </a:solidFill>
+              </a:rPr>
+              <a:t>Short payment.</a:t>
+            </a:r>
+            <a:pPr algn="l" indent="0" marL="0">
+              <a:buNone/>
+            </a:pPr>
+            <a:r>
+              <a:rPr lang="en-US" sz="1400" dirty="0">
+                <a:solidFill>
+                  <a:schemeClr val="tx2"/>
+                </a:solidFill>
+              </a:rPr>
+              <a:t> The university gets less than invoiced and may add a late fee.</a:t>
+            </a:r>
+            <a:endParaRPr lang="en-US" sz="1400" dirty="0"/>
+          </a:p>
+        </p:txBody>
+      </p:sp>
+      <p:sp>
+        <p:nvSpPr>
+          <p:cNvPr id="16" name="content-2-oval-14"/>
+          <p:cNvSpPr/>
+          <p:nvPr/>
+        </p:nvSpPr>
+        <p:spPr>
+          <a:xfrm>
+            <a:off x="3749040" y="3364992"/>
+            <a:ext cx="329184" cy="329184"/>
+          </a:xfrm>
+          <a:prstGeom prst="ellipse">
+            <a:avLst/>
+          </a:prstGeom>
+          <a:solidFill>
+            <a:schemeClr val="accent1"/>
+          </a:solidFill>
+          <a:ln/>
+        </p:spPr>
+      </p:sp>
+      <p:sp>
+        <p:nvSpPr>
+          <p:cNvPr id="17" name="content-2-text-15"/>
+          <p:cNvSpPr txBox="1"/>
+          <p:nvPr/>
+        </p:nvSpPr>
+        <p:spPr>
+          <a:xfrm>
+            <a:off x="3749040" y="3364992"/>
+            <a:ext cx="329184" cy="329184"/>
+          </a:xfrm>
+          <a:prstGeom prst="rect">
+            <a:avLst/>
+          </a:prstGeom>
+          <a:noFill/>
+          <a:ln/>
+        </p:spPr>
+        <p:txBody>
+          <a:bodyPr wrap="square" lIns="0" tIns="0" rIns="0" bIns="0" rtlCol="0" anchor="ctr"/>
+          <a:lstStyle/>
+          <a:p>
+            <a:pPr algn="ctr" indent="0" marL="0">
+              <a:buNone/>
+            </a:pPr>
+            <a:r>
+              <a:rPr lang="en-US" sz="1400" b="1" dirty="0">
+                <a:solidFill>
+                  <a:schemeClr val="bg1"/>
+                </a:solidFill>
+              </a:rPr>
+              <a:t>4</a:t>
+            </a:r>
+            <a:endParaRPr lang="en-US" sz="1400" dirty="0"/>
+          </a:p>
+        </p:txBody>
+      </p:sp>
+      <p:sp>
+        <p:nvSpPr>
+          <p:cNvPr id="18" name="content-2-text-16"/>
+          <p:cNvSpPr txBox="1"/>
+          <p:nvPr/>
+        </p:nvSpPr>
+        <p:spPr>
+          <a:xfrm>
+            <a:off x="4251960" y="3319272"/>
+            <a:ext cx="4434840" cy="658368"/>
+          </a:xfrm>
+          <a:prstGeom prst="rect">
+            <a:avLst/>
+          </a:prstGeom>
+          <a:noFill/>
+          <a:ln/>
+        </p:spPr>
+        <p:txBody>
+          <a:bodyPr wrap="square" lIns="0" tIns="0" rIns="0" bIns="0" rtlCol="0" anchor="ctr"/>
+          <a:lstStyle/>
+          <a:p>
+            <a:pPr algn="l" indent="0" marL="0">
+              <a:buNone/>
+            </a:pPr>
+            <a:r>
+              <a:rPr lang="en-US" sz="1400" b="1" dirty="0">
+                <a:solidFill>
+                  <a:schemeClr val="tx1"/>
+                </a:solidFill>
+              </a:rPr>
+              <a:t>Missed deadlines.</a:t>
+            </a:r>
+            <a:pPr algn="l" indent="0" marL="0">
+              <a:buNone/>
+            </a:pPr>
+            <a:r>
+              <a:rPr lang="en-US" sz="1400" dirty="0">
+                <a:solidFill>
+                  <a:schemeClr val="tx2"/>
+                </a:solidFill>
+              </a:rPr>
+              <a:t> Two calendars: Friday and Saturday off in Bangladesh, plus the host country.</a:t>
+            </a:r>
+            <a:endParaRPr lang="en-US" sz="1400" dirty="0"/>
+          </a:p>
+        </p:txBody>
+      </p:sp>
+      <p:sp>
+        <p:nvSpPr>
+          <p:cNvPr id="19" name="content-2-oval-17"/>
+          <p:cNvSpPr/>
+          <p:nvPr/>
+        </p:nvSpPr>
+        <p:spPr>
+          <a:xfrm>
+            <a:off x="3749040" y="4059936"/>
+            <a:ext cx="329184" cy="329184"/>
+          </a:xfrm>
+          <a:prstGeom prst="ellipse">
+            <a:avLst/>
+          </a:prstGeom>
+          <a:solidFill>
+            <a:schemeClr val="accent1"/>
+          </a:solidFill>
+          <a:ln/>
+        </p:spPr>
+      </p:sp>
+      <p:sp>
+        <p:nvSpPr>
+          <p:cNvPr id="20" name="content-2-text-18"/>
+          <p:cNvSpPr txBox="1"/>
+          <p:nvPr/>
+        </p:nvSpPr>
+        <p:spPr>
+          <a:xfrm>
+            <a:off x="3749040" y="4059936"/>
+            <a:ext cx="329184" cy="329184"/>
+          </a:xfrm>
+          <a:prstGeom prst="rect">
+            <a:avLst/>
+          </a:prstGeom>
+          <a:noFill/>
+          <a:ln/>
+        </p:spPr>
+        <p:txBody>
+          <a:bodyPr wrap="square" lIns="0" tIns="0" rIns="0" bIns="0" rtlCol="0" anchor="ctr"/>
+          <a:lstStyle/>
+          <a:p>
+            <a:pPr algn="ctr" indent="0" marL="0">
+              <a:buNone/>
+            </a:pPr>
+            <a:r>
+              <a:rPr lang="en-US" sz="1400" b="1" dirty="0">
+                <a:solidFill>
+                  <a:schemeClr val="bg1"/>
+                </a:solidFill>
+              </a:rPr>
+              <a:t>5</a:t>
+            </a:r>
+            <a:endParaRPr lang="en-US" sz="1400" dirty="0"/>
+          </a:p>
+        </p:txBody>
+      </p:sp>
+      <p:sp>
+        <p:nvSpPr>
+          <p:cNvPr id="21" name="content-2-text-19"/>
+          <p:cNvSpPr txBox="1"/>
+          <p:nvPr/>
+        </p:nvSpPr>
+        <p:spPr>
+          <a:xfrm>
+            <a:off x="4251960" y="4014216"/>
+            <a:ext cx="4434840" cy="658368"/>
+          </a:xfrm>
+          <a:prstGeom prst="rect">
+            <a:avLst/>
+          </a:prstGeom>
+          <a:noFill/>
+          <a:ln/>
+        </p:spPr>
+        <p:txBody>
+          <a:bodyPr wrap="square" lIns="0" tIns="0" rIns="0" bIns="0" rtlCol="0" anchor="ctr"/>
+          <a:lstStyle/>
+          <a:p>
+            <a:pPr algn="l" indent="0" marL="0">
+              <a:buNone/>
+            </a:pPr>
+            <a:r>
+              <a:rPr lang="en-US" sz="1400" b="1" dirty="0">
+                <a:solidFill>
+                  <a:schemeClr val="tx1"/>
+                </a:solidFill>
+              </a:rPr>
+              <a:t>Paperwork.</a:t>
+            </a:r>
+            <a:pPr algn="l" indent="0" marL="0">
+              <a:buNone/>
+            </a:pPr>
+            <a:r>
+              <a:rPr lang="en-US" sz="1400" dirty="0">
+                <a:solidFill>
+                  <a:schemeClr val="tx2"/>
+                </a:solidFill>
+              </a:rPr>
+              <a:t> An unclear document list and weeks of back and forth.</a:t>
+            </a:r>
+            <a:endParaRPr lang="en-US" sz="1400" dirty="0"/>
+          </a:p>
+        </p:txBody>
+      </p:sp>
+    </p:spTree>
+  </p:cSld>
+  <p:clrMapOvr>
+    <a:masterClrMapping/>
+  </p:clrMapOvr>
+</p:sld>
+</file>
+
+<file path=ppt/slides/slide20.xml><?xml version="1.0" encoding="utf-8"?>
+<p:sld xmlns:a="http://schemas.openxmlformats.org/drawingml/2006/main" xmlns:r="http://schemas.openxmlformats.org/officeDocument/2006/relationships" xmlns:p="http://schemas.openxmlformats.org/presentationml/2006/main">
+  <p:cSld name="Slide 20">
+    <p:spTree>
+      <p:nvGrpSpPr>
+        <p:cNvPr id="1" name=""/>
+        <p:cNvGrpSpPr/>
+        <p:nvPr/>
+      </p:nvGrpSpPr>
+      <p:grpSpPr>
+        <a:xfrm>
+          <a:off x="0" y="0"/>
+          <a:ext cx="0" cy="0"/>
+          <a:chOff x="0" y="0"/>
+          <a:chExt cx="0" cy="0"/>
+        </a:xfrm>
+      </p:grpSpPr>
+      <p:sp>
+        <p:nvSpPr>
+          <p:cNvPr id="2" name="Text 0"/>
+          <p:cNvSpPr/>
+          <p:nvPr>
+            <p:ph idx="100" type="title" hasCustomPrompt="1"/>
+          </p:nvPr>
+        </p:nvSpPr>
+        <p:spPr>
+          <a:xfrm>
+            <a:off x="457200" y="274320"/>
+            <a:ext cx="8229600" cy="777240"/>
+          </a:xfrm>
+          <a:prstGeom prst="rect">
+            <a:avLst/>
+          </a:prstGeom>
+          <a:noFill/>
+          <a:ln/>
+        </p:spPr>
+        <p:txBody>
+          <a:bodyPr wrap="square" lIns="0" tIns="0" rIns="0" bIns="0" rtlCol="0" anchor="ctr"/>
+          <a:lstStyle/>
+          <a:p>
+            <a:pPr algn="l" indent="0" marL="0">
+              <a:buNone/>
+            </a:pPr>
+            <a:r>
+              <a:rPr lang="en-US" sz="3600" b="1" dirty="0">
+                <a:solidFill>
+                  <a:schemeClr val="tx1"/>
+                </a:solidFill>
+                <a:latin typeface="+mj-lt" pitchFamily="34" charset="0"/>
+                <a:ea typeface="+mj-lt" pitchFamily="34" charset="-122"/>
+                <a:cs typeface="+mj-lt" pitchFamily="34" charset="-120"/>
+              </a:rPr>
               <a:t>What the brief asked</a:t>
             </a:r>
             <a:endParaRPr lang="en-US" sz="3600" dirty="0"/>
@@ -11833,7 +13383,7 @@
       </p:sp>
       <p:graphicFrame>
         <p:nvGraphicFramePr>
-          <p:cNvPr id="20" name="content-19-table-1"/>
+          <p:cNvPr id="21" name="content-20-table-1"/>
           <p:cNvGraphicFramePr>
             <a:graphicFrameLocks noGrp="1"/>
           </p:cNvGraphicFramePr>
@@ -12301,7 +13851,7 @@
                             <a:schemeClr val="tx1"/>
                           </a:solidFill>
                         </a:rPr>
-                        <a:t>This deck: 20 slides, speaker notes about 9 minutes</a:t>
+                        <a:t>This deck: 21 slides, speaker notes about 9 minutes</a:t>
                       </a:r>
                       <a:endParaRPr lang="en-US" sz="1050" dirty="0"/>
                     </a:p>
@@ -13317,7 +14867,7 @@
       </p:graphicFrame>
       <p:sp>
         <p:nvSpPr>
-          <p:cNvPr id="4" name="content-19-rect-2"/>
+          <p:cNvPr id="4" name="content-20-rect-2"/>
           <p:cNvSpPr/>
           <p:nvPr/>
         </p:nvSpPr>
@@ -13339,7 +14889,7 @@
       </p:sp>
       <p:sp>
         <p:nvSpPr>
-          <p:cNvPr id="5" name="content-19-text-3"/>
+          <p:cNvPr id="5" name="content-20-text-3"/>
           <p:cNvSpPr txBox="1"/>
           <p:nvPr/>
         </p:nvSpPr>
@@ -13378,7 +14928,7 @@
       </p:sp>
       <p:sp>
         <p:nvSpPr>
-          <p:cNvPr id="6" name="content-19-text-4"/>
+          <p:cNvPr id="6" name="content-20-text-4"/>
           <p:cNvSpPr txBox="1"/>
           <p:nvPr/>
         </p:nvSpPr>
@@ -13414,7 +14964,7 @@
       </p:sp>
       <p:sp>
         <p:nvSpPr>
-          <p:cNvPr id="7" name="content-19-text-5"/>
+          <p:cNvPr id="7" name="content-20-text-5"/>
           <p:cNvSpPr txBox="1"/>
           <p:nvPr/>
         </p:nvSpPr>
@@ -13442,7 +14992,7 @@
                   <a:schemeClr val="tx2"/>
                 </a:solidFill>
               </a:rPr>
-              <a:t>Slides 5 to 8 and 13</a:t>
+              <a:t>Slides 5 to 8 and 14</a:t>
             </a:r>
             <a:endParaRPr lang="en-US" sz="1000" dirty="0"/>
           </a:p>
@@ -13450,7 +15000,7 @@
       </p:sp>
       <p:sp>
         <p:nvSpPr>
-          <p:cNvPr id="8" name="content-19-rect-6"/>
+          <p:cNvPr id="8" name="content-20-rect-6"/>
           <p:cNvSpPr/>
           <p:nvPr/>
         </p:nvSpPr>
@@ -13472,7 +15022,7 @@
       </p:sp>
       <p:sp>
         <p:nvSpPr>
-          <p:cNvPr id="9" name="content-19-text-7"/>
+          <p:cNvPr id="9" name="content-20-text-7"/>
           <p:cNvSpPr txBox="1"/>
           <p:nvPr/>
         </p:nvSpPr>
@@ -13511,7 +15061,7 @@
       </p:sp>
       <p:sp>
         <p:nvSpPr>
-          <p:cNvPr id="10" name="content-19-text-8"/>
+          <p:cNvPr id="10" name="content-20-text-8"/>
           <p:cNvSpPr txBox="1"/>
           <p:nvPr/>
         </p:nvSpPr>
@@ -13547,7 +15097,7 @@
       </p:sp>
       <p:sp>
         <p:nvSpPr>
-          <p:cNvPr id="11" name="content-19-text-9"/>
+          <p:cNvPr id="11" name="content-20-text-9"/>
           <p:cNvSpPr txBox="1"/>
           <p:nvPr/>
         </p:nvSpPr>
@@ -13575,7 +15125,7 @@
                   <a:schemeClr val="tx2"/>
                 </a:solidFill>
               </a:rPr>
-              <a:t>Slides 9 and 14 to 17</a:t>
+              <a:t>Slides 9 and 15 to 18</a:t>
             </a:r>
             <a:endParaRPr lang="en-US" sz="1000" dirty="0"/>
           </a:p>
@@ -13583,7 +15133,7 @@
       </p:sp>
       <p:sp>
         <p:nvSpPr>
-          <p:cNvPr id="12" name="content-19-rect-10"/>
+          <p:cNvPr id="12" name="content-20-rect-10"/>
           <p:cNvSpPr/>
           <p:nvPr/>
         </p:nvSpPr>
@@ -13605,7 +15155,7 @@
       </p:sp>
       <p:sp>
         <p:nvSpPr>
-          <p:cNvPr id="13" name="content-19-text-11"/>
+          <p:cNvPr id="13" name="content-20-text-11"/>
           <p:cNvSpPr txBox="1"/>
           <p:nvPr/>
         </p:nvSpPr>
@@ -13644,7 +15194,7 @@
       </p:sp>
       <p:sp>
         <p:nvSpPr>
-          <p:cNvPr id="14" name="content-19-text-12"/>
+          <p:cNvPr id="14" name="content-20-text-12"/>
           <p:cNvSpPr txBox="1"/>
           <p:nvPr/>
         </p:nvSpPr>
@@ -13680,7 +15230,7 @@
       </p:sp>
       <p:sp>
         <p:nvSpPr>
-          <p:cNvPr id="15" name="content-19-text-13"/>
+          <p:cNvPr id="15" name="content-20-text-13"/>
           <p:cNvSpPr txBox="1"/>
           <p:nvPr/>
         </p:nvSpPr>
@@ -13708,7 +15258,7 @@
                   <a:schemeClr val="tx2"/>
                 </a:solidFill>
               </a:rPr>
-              <a:t>Slides 8 to 11 and 18</a:t>
+              <a:t>Slides 8 to 12 and 19</a:t>
             </a:r>
             <a:endParaRPr lang="en-US" sz="1000" dirty="0"/>
           </a:p>
@@ -13716,7 +15266,7 @@
       </p:sp>
       <p:sp>
         <p:nvSpPr>
-          <p:cNvPr id="16" name="content-19-text-14"/>
+          <p:cNvPr id="16" name="content-20-text-14"/>
           <p:cNvSpPr txBox="1"/>
           <p:nvPr/>
         </p:nvSpPr>
@@ -13758,9 +15308,9 @@
 </p:sld>
 </file>
 
-<file path=ppt/slides/slide2.xml><?xml version="1.0" encoding="utf-8"?>
+<file path=ppt/slides/slide21.xml><?xml version="1.0" encoding="utf-8"?>
 <p:sld xmlns:a="http://schemas.openxmlformats.org/drawingml/2006/main" xmlns:r="http://schemas.openxmlformats.org/officeDocument/2006/relationships" xmlns:p="http://schemas.openxmlformats.org/presentationml/2006/main">
-  <p:cSld name="Slide 2">
+  <p:cSld name="Slide 21">
     <p:spTree>
       <p:nvGrpSpPr>
         <p:cNvPr id="1" name=""/>
@@ -13804,13 +15354,13 @@
             <a:r>
               <a:rPr lang="en-US" sz="3600" b="1" dirty="0">
                 <a:solidFill>
-                  <a:schemeClr val="tx1"/>
+                  <a:schemeClr val="bg1"/>
                 </a:solidFill>
                 <a:latin typeface="+mj-lt" pitchFamily="34" charset="0"/>
                 <a:ea typeface="+mj-lt" pitchFamily="34" charset="-122"/>
                 <a:cs typeface="+mj-lt" pitchFamily="34" charset="-120"/>
               </a:rPr>
-              <a:t>The posted fee is not the price</a:t>
+              <a:t>What comes next</a:t>
             </a:r>
             <a:endParaRPr lang="en-US" sz="3600" dirty="0"/>
           </a:p>
@@ -13818,721 +15368,7 @@
       </p:sp>
       <p:sp>
         <p:nvSpPr>
-          <p:cNvPr id="3" name="content-2-rect-1"/>
-          <p:cNvSpPr/>
-          <p:nvPr/>
-        </p:nvSpPr>
-        <p:spPr>
-          <a:xfrm>
-            <a:off x="457200" y="1234440"/>
-            <a:ext cx="3017520" cy="3429000"/>
-          </a:xfrm>
-          <a:prstGeom prst="roundRect">
-            <a:avLst>
-              <a:gd name="adj" fmla="val 2424"/>
-            </a:avLst>
-          </a:prstGeom>
-          <a:solidFill>
-            <a:schemeClr val="bg2"/>
-          </a:solidFill>
-          <a:ln/>
-        </p:spPr>
-      </p:sp>
-      <p:sp>
-        <p:nvSpPr>
-          <p:cNvPr id="4" name="content-2-text-2"/>
-          <p:cNvSpPr txBox="1"/>
-          <p:nvPr/>
-        </p:nvSpPr>
-        <p:spPr>
-          <a:xfrm>
-            <a:off x="640080" y="1371600"/>
-            <a:ext cx="2651760" cy="1097280"/>
-          </a:xfrm>
-          <a:prstGeom prst="rect">
-            <a:avLst/>
-          </a:prstGeom>
-          <a:noFill/>
-          <a:ln/>
-        </p:spPr>
-        <p:txBody>
-          <a:bodyPr wrap="square" lIns="0" tIns="0" rIns="0" bIns="0" rtlCol="0" anchor="ctr"/>
-          <a:lstStyle/>
-          <a:p>
-            <a:pPr algn="l" indent="0" marL="0">
-              <a:buNone/>
-            </a:pPr>
-            <a:r>
-              <a:rPr lang="en-US" sz="6600" b="1" dirty="0">
-                <a:solidFill>
-                  <a:schemeClr val="accent1"/>
-                </a:solidFill>
-                <a:latin typeface="+mj-lt" pitchFamily="34" charset="0"/>
-                <a:ea typeface="+mj-lt" pitchFamily="34" charset="-122"/>
-                <a:cs typeface="+mj-lt" pitchFamily="34" charset="-120"/>
-              </a:rPr>
-              <a:t>63%</a:t>
-            </a:r>
-            <a:endParaRPr lang="en-US" sz="6600" dirty="0"/>
-          </a:p>
-        </p:txBody>
-      </p:sp>
-      <p:sp>
-        <p:nvSpPr>
-          <p:cNvPr id="5" name="content-2-text-3"/>
-          <p:cNvSpPr txBox="1"/>
-          <p:nvPr/>
-        </p:nvSpPr>
-        <p:spPr>
-          <a:xfrm>
-            <a:off x="640080" y="2560320"/>
-            <a:ext cx="2651760" cy="1005840"/>
-          </a:xfrm>
-          <a:prstGeom prst="rect">
-            <a:avLst/>
-          </a:prstGeom>
-          <a:noFill/>
-          <a:ln/>
-        </p:spPr>
-        <p:txBody>
-          <a:bodyPr wrap="square" lIns="0" tIns="0" rIns="0" bIns="0" rtlCol="0" anchor="t"/>
-          <a:lstStyle/>
-          <a:p>
-            <a:pPr algn="l" indent="0" marL="0">
-              <a:buNone/>
-            </a:pPr>
-            <a:r>
-              <a:rPr lang="en-US" sz="1600" b="1" dirty="0">
-                <a:solidFill>
-                  <a:schemeClr val="tx1"/>
-                </a:solidFill>
-              </a:rPr>
-              <a:t>of the real cost is the hidden exchange-rate margin</a:t>
-            </a:r>
-            <a:endParaRPr lang="en-US" sz="1600" dirty="0"/>
-          </a:p>
-        </p:txBody>
-      </p:sp>
-      <p:sp>
-        <p:nvSpPr>
-          <p:cNvPr id="6" name="content-2-text-4"/>
-          <p:cNvSpPr txBox="1"/>
-          <p:nvPr/>
-        </p:nvSpPr>
-        <p:spPr>
-          <a:xfrm>
-            <a:off x="640080" y="4023360"/>
-            <a:ext cx="2651760" cy="502920"/>
-          </a:xfrm>
-          <a:prstGeom prst="rect">
-            <a:avLst/>
-          </a:prstGeom>
-          <a:noFill/>
-          <a:ln/>
-        </p:spPr>
-        <p:txBody>
-          <a:bodyPr wrap="square" lIns="0" tIns="0" rIns="0" bIns="0" rtlCol="0" anchor="t"/>
-          <a:lstStyle/>
-          <a:p>
-            <a:pPr algn="l" indent="0" marL="0">
-              <a:buNone/>
-            </a:pPr>
-            <a:r>
-              <a:rPr lang="en-US" sz="1100" dirty="0">
-                <a:solidFill>
-                  <a:schemeClr val="tx2"/>
-                </a:solidFill>
-              </a:rPr>
-              <a:t>Provider B, GBP 10,000. Synthetic rates and fees.</a:t>
-            </a:r>
-            <a:endParaRPr lang="en-US" sz="1100" dirty="0"/>
-          </a:p>
-        </p:txBody>
-      </p:sp>
-      <p:sp>
-        <p:nvSpPr>
-          <p:cNvPr id="7" name="content-2-oval-5"/>
-          <p:cNvSpPr/>
-          <p:nvPr/>
-        </p:nvSpPr>
-        <p:spPr>
-          <a:xfrm>
-            <a:off x="3749040" y="1280160"/>
-            <a:ext cx="329184" cy="329184"/>
-          </a:xfrm>
-          <a:prstGeom prst="ellipse">
-            <a:avLst/>
-          </a:prstGeom>
-          <a:solidFill>
-            <a:schemeClr val="accent1"/>
-          </a:solidFill>
-          <a:ln/>
-        </p:spPr>
-      </p:sp>
-      <p:sp>
-        <p:nvSpPr>
-          <p:cNvPr id="8" name="content-2-text-6"/>
-          <p:cNvSpPr txBox="1"/>
-          <p:nvPr/>
-        </p:nvSpPr>
-        <p:spPr>
-          <a:xfrm>
-            <a:off x="3749040" y="1280160"/>
-            <a:ext cx="329184" cy="329184"/>
-          </a:xfrm>
-          <a:prstGeom prst="rect">
-            <a:avLst/>
-          </a:prstGeom>
-          <a:noFill/>
-          <a:ln/>
-        </p:spPr>
-        <p:txBody>
-          <a:bodyPr wrap="square" lIns="0" tIns="0" rIns="0" bIns="0" rtlCol="0" anchor="ctr"/>
-          <a:lstStyle/>
-          <a:p>
-            <a:pPr algn="ctr" indent="0" marL="0">
-              <a:buNone/>
-            </a:pPr>
-            <a:r>
-              <a:rPr lang="en-US" sz="1400" b="1" dirty="0">
-                <a:solidFill>
-                  <a:schemeClr val="bg1"/>
-                </a:solidFill>
-              </a:rPr>
-              <a:t>1</a:t>
-            </a:r>
-            <a:endParaRPr lang="en-US" sz="1400" dirty="0"/>
-          </a:p>
-        </p:txBody>
-      </p:sp>
-      <p:sp>
-        <p:nvSpPr>
-          <p:cNvPr id="9" name="content-2-text-7"/>
-          <p:cNvSpPr txBox="1"/>
-          <p:nvPr/>
-        </p:nvSpPr>
-        <p:spPr>
-          <a:xfrm>
-            <a:off x="4251960" y="1234440"/>
-            <a:ext cx="4434840" cy="658368"/>
-          </a:xfrm>
-          <a:prstGeom prst="rect">
-            <a:avLst/>
-          </a:prstGeom>
-          <a:noFill/>
-          <a:ln/>
-        </p:spPr>
-        <p:txBody>
-          <a:bodyPr wrap="square" lIns="0" tIns="0" rIns="0" bIns="0" rtlCol="0" anchor="ctr"/>
-          <a:lstStyle/>
-          <a:p>
-            <a:pPr algn="l" indent="0" marL="0">
-              <a:buNone/>
-            </a:pPr>
-            <a:r>
-              <a:rPr lang="en-US" sz="1400" b="1" dirty="0">
-                <a:solidFill>
-                  <a:schemeClr val="tx1"/>
-                </a:solidFill>
-              </a:rPr>
-              <a:t>Hidden margin.</a:t>
-            </a:r>
-            <a:pPr algn="l" indent="0" marL="0">
-              <a:buNone/>
-            </a:pPr>
-            <a:r>
-              <a:rPr lang="en-US" sz="1400" dirty="0">
-                <a:solidFill>
-                  <a:schemeClr val="tx2"/>
-                </a:solidFill>
-              </a:rPr>
-              <a:t> The rate sits above mid-market, and banks show a fee, not the margin.</a:t>
-            </a:r>
-            <a:endParaRPr lang="en-US" sz="1400" dirty="0"/>
-          </a:p>
-        </p:txBody>
-      </p:sp>
-      <p:sp>
-        <p:nvSpPr>
-          <p:cNvPr id="10" name="content-2-oval-8"/>
-          <p:cNvSpPr/>
-          <p:nvPr/>
-        </p:nvSpPr>
-        <p:spPr>
-          <a:xfrm>
-            <a:off x="3749040" y="1975104"/>
-            <a:ext cx="329184" cy="329184"/>
-          </a:xfrm>
-          <a:prstGeom prst="ellipse">
-            <a:avLst/>
-          </a:prstGeom>
-          <a:solidFill>
-            <a:schemeClr val="accent1"/>
-          </a:solidFill>
-          <a:ln/>
-        </p:spPr>
-      </p:sp>
-      <p:sp>
-        <p:nvSpPr>
-          <p:cNvPr id="11" name="content-2-text-9"/>
-          <p:cNvSpPr txBox="1"/>
-          <p:nvPr/>
-        </p:nvSpPr>
-        <p:spPr>
-          <a:xfrm>
-            <a:off x="3749040" y="1975104"/>
-            <a:ext cx="329184" cy="329184"/>
-          </a:xfrm>
-          <a:prstGeom prst="rect">
-            <a:avLst/>
-          </a:prstGeom>
-          <a:noFill/>
-          <a:ln/>
-        </p:spPr>
-        <p:txBody>
-          <a:bodyPr wrap="square" lIns="0" tIns="0" rIns="0" bIns="0" rtlCol="0" anchor="ctr"/>
-          <a:lstStyle/>
-          <a:p>
-            <a:pPr algn="ctr" indent="0" marL="0">
-              <a:buNone/>
-            </a:pPr>
-            <a:r>
-              <a:rPr lang="en-US" sz="1400" b="1" dirty="0">
-                <a:solidFill>
-                  <a:schemeClr val="bg1"/>
-                </a:solidFill>
-              </a:rPr>
-              <a:t>2</a:t>
-            </a:r>
-            <a:endParaRPr lang="en-US" sz="1400" dirty="0"/>
-          </a:p>
-        </p:txBody>
-      </p:sp>
-      <p:sp>
-        <p:nvSpPr>
-          <p:cNvPr id="12" name="content-2-text-10"/>
-          <p:cNvSpPr txBox="1"/>
-          <p:nvPr/>
-        </p:nvSpPr>
-        <p:spPr>
-          <a:xfrm>
-            <a:off x="4251960" y="1929384"/>
-            <a:ext cx="4434840" cy="658368"/>
-          </a:xfrm>
-          <a:prstGeom prst="rect">
-            <a:avLst/>
-          </a:prstGeom>
-          <a:noFill/>
-          <a:ln/>
-        </p:spPr>
-        <p:txBody>
-          <a:bodyPr wrap="square" lIns="0" tIns="0" rIns="0" bIns="0" rtlCol="0" anchor="ctr"/>
-          <a:lstStyle/>
-          <a:p>
-            <a:pPr algn="l" indent="0" marL="0">
-              <a:buNone/>
-            </a:pPr>
-            <a:r>
-              <a:rPr lang="en-US" sz="1400" b="1" dirty="0">
-                <a:solidFill>
-                  <a:schemeClr val="tx1"/>
-                </a:solidFill>
-              </a:rPr>
-              <a:t>Fees on the way.</a:t>
-            </a:r>
-            <a:pPr algn="l" indent="0" marL="0">
-              <a:buNone/>
-            </a:pPr>
-            <a:r>
-              <a:rPr lang="en-US" sz="1400" dirty="0">
-                <a:solidFill>
-                  <a:schemeClr val="tx2"/>
-                </a:solidFill>
-              </a:rPr>
-              <a:t> Correspondent and receiving banks deduct from the amount.</a:t>
-            </a:r>
-            <a:endParaRPr lang="en-US" sz="1400" dirty="0"/>
-          </a:p>
-        </p:txBody>
-      </p:sp>
-      <p:sp>
-        <p:nvSpPr>
-          <p:cNvPr id="13" name="content-2-oval-11"/>
-          <p:cNvSpPr/>
-          <p:nvPr/>
-        </p:nvSpPr>
-        <p:spPr>
-          <a:xfrm>
-            <a:off x="3749040" y="2670048"/>
-            <a:ext cx="329184" cy="329184"/>
-          </a:xfrm>
-          <a:prstGeom prst="ellipse">
-            <a:avLst/>
-          </a:prstGeom>
-          <a:solidFill>
-            <a:schemeClr val="accent1"/>
-          </a:solidFill>
-          <a:ln/>
-        </p:spPr>
-      </p:sp>
-      <p:sp>
-        <p:nvSpPr>
-          <p:cNvPr id="14" name="content-2-text-12"/>
-          <p:cNvSpPr txBox="1"/>
-          <p:nvPr/>
-        </p:nvSpPr>
-        <p:spPr>
-          <a:xfrm>
-            <a:off x="3749040" y="2670048"/>
-            <a:ext cx="329184" cy="329184"/>
-          </a:xfrm>
-          <a:prstGeom prst="rect">
-            <a:avLst/>
-          </a:prstGeom>
-          <a:noFill/>
-          <a:ln/>
-        </p:spPr>
-        <p:txBody>
-          <a:bodyPr wrap="square" lIns="0" tIns="0" rIns="0" bIns="0" rtlCol="0" anchor="ctr"/>
-          <a:lstStyle/>
-          <a:p>
-            <a:pPr algn="ctr" indent="0" marL="0">
-              <a:buNone/>
-            </a:pPr>
-            <a:r>
-              <a:rPr lang="en-US" sz="1400" b="1" dirty="0">
-                <a:solidFill>
-                  <a:schemeClr val="bg1"/>
-                </a:solidFill>
-              </a:rPr>
-              <a:t>3</a:t>
-            </a:r>
-            <a:endParaRPr lang="en-US" sz="1400" dirty="0"/>
-          </a:p>
-        </p:txBody>
-      </p:sp>
-      <p:sp>
-        <p:nvSpPr>
-          <p:cNvPr id="15" name="content-2-text-13"/>
-          <p:cNvSpPr txBox="1"/>
-          <p:nvPr/>
-        </p:nvSpPr>
-        <p:spPr>
-          <a:xfrm>
-            <a:off x="4251960" y="2624328"/>
-            <a:ext cx="4434840" cy="658368"/>
-          </a:xfrm>
-          <a:prstGeom prst="rect">
-            <a:avLst/>
-          </a:prstGeom>
-          <a:noFill/>
-          <a:ln/>
-        </p:spPr>
-        <p:txBody>
-          <a:bodyPr wrap="square" lIns="0" tIns="0" rIns="0" bIns="0" rtlCol="0" anchor="ctr"/>
-          <a:lstStyle/>
-          <a:p>
-            <a:pPr algn="l" indent="0" marL="0">
-              <a:buNone/>
-            </a:pPr>
-            <a:r>
-              <a:rPr lang="en-US" sz="1400" b="1" dirty="0">
-                <a:solidFill>
-                  <a:schemeClr val="tx1"/>
-                </a:solidFill>
-              </a:rPr>
-              <a:t>Short payment.</a:t>
-            </a:r>
-            <a:pPr algn="l" indent="0" marL="0">
-              <a:buNone/>
-            </a:pPr>
-            <a:r>
-              <a:rPr lang="en-US" sz="1400" dirty="0">
-                <a:solidFill>
-                  <a:schemeClr val="tx2"/>
-                </a:solidFill>
-              </a:rPr>
-              <a:t> The university gets less than invoiced and may add a late fee.</a:t>
-            </a:r>
-            <a:endParaRPr lang="en-US" sz="1400" dirty="0"/>
-          </a:p>
-        </p:txBody>
-      </p:sp>
-      <p:sp>
-        <p:nvSpPr>
-          <p:cNvPr id="16" name="content-2-oval-14"/>
-          <p:cNvSpPr/>
-          <p:nvPr/>
-        </p:nvSpPr>
-        <p:spPr>
-          <a:xfrm>
-            <a:off x="3749040" y="3364992"/>
-            <a:ext cx="329184" cy="329184"/>
-          </a:xfrm>
-          <a:prstGeom prst="ellipse">
-            <a:avLst/>
-          </a:prstGeom>
-          <a:solidFill>
-            <a:schemeClr val="accent1"/>
-          </a:solidFill>
-          <a:ln/>
-        </p:spPr>
-      </p:sp>
-      <p:sp>
-        <p:nvSpPr>
-          <p:cNvPr id="17" name="content-2-text-15"/>
-          <p:cNvSpPr txBox="1"/>
-          <p:nvPr/>
-        </p:nvSpPr>
-        <p:spPr>
-          <a:xfrm>
-            <a:off x="3749040" y="3364992"/>
-            <a:ext cx="329184" cy="329184"/>
-          </a:xfrm>
-          <a:prstGeom prst="rect">
-            <a:avLst/>
-          </a:prstGeom>
-          <a:noFill/>
-          <a:ln/>
-        </p:spPr>
-        <p:txBody>
-          <a:bodyPr wrap="square" lIns="0" tIns="0" rIns="0" bIns="0" rtlCol="0" anchor="ctr"/>
-          <a:lstStyle/>
-          <a:p>
-            <a:pPr algn="ctr" indent="0" marL="0">
-              <a:buNone/>
-            </a:pPr>
-            <a:r>
-              <a:rPr lang="en-US" sz="1400" b="1" dirty="0">
-                <a:solidFill>
-                  <a:schemeClr val="bg1"/>
-                </a:solidFill>
-              </a:rPr>
-              <a:t>4</a:t>
-            </a:r>
-            <a:endParaRPr lang="en-US" sz="1400" dirty="0"/>
-          </a:p>
-        </p:txBody>
-      </p:sp>
-      <p:sp>
-        <p:nvSpPr>
-          <p:cNvPr id="18" name="content-2-text-16"/>
-          <p:cNvSpPr txBox="1"/>
-          <p:nvPr/>
-        </p:nvSpPr>
-        <p:spPr>
-          <a:xfrm>
-            <a:off x="4251960" y="3319272"/>
-            <a:ext cx="4434840" cy="658368"/>
-          </a:xfrm>
-          <a:prstGeom prst="rect">
-            <a:avLst/>
-          </a:prstGeom>
-          <a:noFill/>
-          <a:ln/>
-        </p:spPr>
-        <p:txBody>
-          <a:bodyPr wrap="square" lIns="0" tIns="0" rIns="0" bIns="0" rtlCol="0" anchor="ctr"/>
-          <a:lstStyle/>
-          <a:p>
-            <a:pPr algn="l" indent="0" marL="0">
-              <a:buNone/>
-            </a:pPr>
-            <a:r>
-              <a:rPr lang="en-US" sz="1400" b="1" dirty="0">
-                <a:solidFill>
-                  <a:schemeClr val="tx1"/>
-                </a:solidFill>
-              </a:rPr>
-              <a:t>Missed deadlines.</a:t>
-            </a:r>
-            <a:pPr algn="l" indent="0" marL="0">
-              <a:buNone/>
-            </a:pPr>
-            <a:r>
-              <a:rPr lang="en-US" sz="1400" dirty="0">
-                <a:solidFill>
-                  <a:schemeClr val="tx2"/>
-                </a:solidFill>
-              </a:rPr>
-              <a:t> Two calendars: Friday and Saturday off in Bangladesh, plus the host country.</a:t>
-            </a:r>
-            <a:endParaRPr lang="en-US" sz="1400" dirty="0"/>
-          </a:p>
-        </p:txBody>
-      </p:sp>
-      <p:sp>
-        <p:nvSpPr>
-          <p:cNvPr id="19" name="content-2-oval-17"/>
-          <p:cNvSpPr/>
-          <p:nvPr/>
-        </p:nvSpPr>
-        <p:spPr>
-          <a:xfrm>
-            <a:off x="3749040" y="4059936"/>
-            <a:ext cx="329184" cy="329184"/>
-          </a:xfrm>
-          <a:prstGeom prst="ellipse">
-            <a:avLst/>
-          </a:prstGeom>
-          <a:solidFill>
-            <a:schemeClr val="accent1"/>
-          </a:solidFill>
-          <a:ln/>
-        </p:spPr>
-      </p:sp>
-      <p:sp>
-        <p:nvSpPr>
-          <p:cNvPr id="20" name="content-2-text-18"/>
-          <p:cNvSpPr txBox="1"/>
-          <p:nvPr/>
-        </p:nvSpPr>
-        <p:spPr>
-          <a:xfrm>
-            <a:off x="3749040" y="4059936"/>
-            <a:ext cx="329184" cy="329184"/>
-          </a:xfrm>
-          <a:prstGeom prst="rect">
-            <a:avLst/>
-          </a:prstGeom>
-          <a:noFill/>
-          <a:ln/>
-        </p:spPr>
-        <p:txBody>
-          <a:bodyPr wrap="square" lIns="0" tIns="0" rIns="0" bIns="0" rtlCol="0" anchor="ctr"/>
-          <a:lstStyle/>
-          <a:p>
-            <a:pPr algn="ctr" indent="0" marL="0">
-              <a:buNone/>
-            </a:pPr>
-            <a:r>
-              <a:rPr lang="en-US" sz="1400" b="1" dirty="0">
-                <a:solidFill>
-                  <a:schemeClr val="bg1"/>
-                </a:solidFill>
-              </a:rPr>
-              <a:t>5</a:t>
-            </a:r>
-            <a:endParaRPr lang="en-US" sz="1400" dirty="0"/>
-          </a:p>
-        </p:txBody>
-      </p:sp>
-      <p:sp>
-        <p:nvSpPr>
-          <p:cNvPr id="21" name="content-2-text-19"/>
-          <p:cNvSpPr txBox="1"/>
-          <p:nvPr/>
-        </p:nvSpPr>
-        <p:spPr>
-          <a:xfrm>
-            <a:off x="4251960" y="4014216"/>
-            <a:ext cx="4434840" cy="658368"/>
-          </a:xfrm>
-          <a:prstGeom prst="rect">
-            <a:avLst/>
-          </a:prstGeom>
-          <a:noFill/>
-          <a:ln/>
-        </p:spPr>
-        <p:txBody>
-          <a:bodyPr wrap="square" lIns="0" tIns="0" rIns="0" bIns="0" rtlCol="0" anchor="ctr"/>
-          <a:lstStyle/>
-          <a:p>
-            <a:pPr algn="l" indent="0" marL="0">
-              <a:buNone/>
-            </a:pPr>
-            <a:r>
-              <a:rPr lang="en-US" sz="1400" b="1" dirty="0">
-                <a:solidFill>
-                  <a:schemeClr val="tx1"/>
-                </a:solidFill>
-              </a:rPr>
-              <a:t>Paperwork.</a:t>
-            </a:r>
-            <a:pPr algn="l" indent="0" marL="0">
-              <a:buNone/>
-            </a:pPr>
-            <a:r>
-              <a:rPr lang="en-US" sz="1400" dirty="0">
-                <a:solidFill>
-                  <a:schemeClr val="tx2"/>
-                </a:solidFill>
-              </a:rPr>
-              <a:t> An unclear document list and weeks of back and forth.</a:t>
-            </a:r>
-            <a:endParaRPr lang="en-US" sz="1400" dirty="0"/>
-          </a:p>
-        </p:txBody>
-      </p:sp>
-    </p:spTree>
-  </p:cSld>
-  <p:clrMapOvr>
-    <a:masterClrMapping/>
-  </p:clrMapOvr>
-</p:sld>
-</file>
-
-<file path=ppt/slides/slide20.xml><?xml version="1.0" encoding="utf-8"?>
-<p:sld xmlns:a="http://schemas.openxmlformats.org/drawingml/2006/main" xmlns:r="http://schemas.openxmlformats.org/officeDocument/2006/relationships" xmlns:p="http://schemas.openxmlformats.org/presentationml/2006/main">
-  <p:cSld name="Slide 20">
-    <p:spTree>
-      <p:nvGrpSpPr>
-        <p:cNvPr id="1" name=""/>
-        <p:cNvGrpSpPr/>
-        <p:nvPr/>
-      </p:nvGrpSpPr>
-      <p:grpSpPr>
-        <a:xfrm>
-          <a:off x="0" y="0"/>
-          <a:ext cx="0" cy="0"/>
-          <a:chOff x="0" y="0"/>
-          <a:chExt cx="0" cy="0"/>
-        </a:xfrm>
-      </p:grpSpPr>
-      <p:sp>
-        <p:nvSpPr>
-          <p:cNvPr id="2" name="Text 0"/>
-          <p:cNvSpPr/>
-          <p:nvPr>
-            <p:ph idx="100" type="title" hasCustomPrompt="1"/>
-          </p:nvPr>
-        </p:nvSpPr>
-        <p:spPr>
-          <a:xfrm>
-            <a:off x="457200" y="274320"/>
-            <a:ext cx="8229600" cy="777240"/>
-          </a:xfrm>
-          <a:prstGeom prst="rect">
-            <a:avLst/>
-          </a:prstGeom>
-          <a:noFill/>
-          <a:ln/>
-        </p:spPr>
-        <p:txBody>
-          <a:bodyPr wrap="square" lIns="0" tIns="0" rIns="0" bIns="0" rtlCol="0" anchor="ctr"/>
-          <a:lstStyle/>
-          <a:p>
-            <a:pPr algn="l" indent="0" marL="0">
-              <a:buNone/>
-            </a:pPr>
-            <a:r>
-              <a:rPr lang="en-US" sz="3600" b="1" dirty="0">
-                <a:solidFill>
-                  <a:schemeClr val="bg1"/>
-                </a:solidFill>
-                <a:latin typeface="+mj-lt" pitchFamily="34" charset="0"/>
-                <a:ea typeface="+mj-lt" pitchFamily="34" charset="-122"/>
-                <a:cs typeface="+mj-lt" pitchFamily="34" charset="-120"/>
-              </a:rPr>
-              <a:t>What comes next</a:t>
-            </a:r>
-            <a:endParaRPr lang="en-US" sz="3600" dirty="0"/>
-          </a:p>
-        </p:txBody>
-      </p:sp>
-      <p:sp>
-        <p:nvSpPr>
-          <p:cNvPr id="3" name="closing-20-rect-1"/>
+          <p:cNvPr id="3" name="closing-21-rect-1"/>
           <p:cNvSpPr/>
           <p:nvPr/>
         </p:nvSpPr>
@@ -14554,7 +15390,7 @@
       </p:sp>
       <p:sp>
         <p:nvSpPr>
-          <p:cNvPr id="4" name="closing-20-text-2"/>
+          <p:cNvPr id="4" name="closing-21-text-2"/>
           <p:cNvSpPr txBox="1"/>
           <p:nvPr/>
         </p:nvSpPr>
@@ -14590,7 +15426,7 @@
       </p:sp>
       <p:sp>
         <p:nvSpPr>
-          <p:cNvPr id="5" name="closing-20-text-3"/>
+          <p:cNvPr id="5" name="closing-21-text-3"/>
           <p:cNvSpPr txBox="1"/>
           <p:nvPr/>
         </p:nvSpPr>
@@ -14626,7 +15462,7 @@
       </p:sp>
       <p:sp>
         <p:nvSpPr>
-          <p:cNvPr id="6" name="closing-20-rect-4"/>
+          <p:cNvPr id="6" name="closing-21-rect-4"/>
           <p:cNvSpPr/>
           <p:nvPr/>
         </p:nvSpPr>
@@ -14648,7 +15484,7 @@
       </p:sp>
       <p:sp>
         <p:nvSpPr>
-          <p:cNvPr id="7" name="closing-20-text-5"/>
+          <p:cNvPr id="7" name="closing-21-text-5"/>
           <p:cNvSpPr txBox="1"/>
           <p:nvPr/>
         </p:nvSpPr>
@@ -14684,7 +15520,7 @@
       </p:sp>
       <p:sp>
         <p:nvSpPr>
-          <p:cNvPr id="8" name="closing-20-text-6"/>
+          <p:cNvPr id="8" name="closing-21-text-6"/>
           <p:cNvSpPr txBox="1"/>
           <p:nvPr/>
         </p:nvSpPr>
@@ -14720,7 +15556,7 @@
       </p:sp>
       <p:sp>
         <p:nvSpPr>
-          <p:cNvPr id="9" name="closing-20-rect-7"/>
+          <p:cNvPr id="9" name="closing-21-rect-7"/>
           <p:cNvSpPr/>
           <p:nvPr/>
         </p:nvSpPr>
@@ -14742,7 +15578,7 @@
       </p:sp>
       <p:sp>
         <p:nvSpPr>
-          <p:cNvPr id="10" name="closing-20-text-8"/>
+          <p:cNvPr id="10" name="closing-21-text-8"/>
           <p:cNvSpPr txBox="1"/>
           <p:nvPr/>
         </p:nvSpPr>
@@ -14778,7 +15614,7 @@
       </p:sp>
       <p:sp>
         <p:nvSpPr>
-          <p:cNvPr id="11" name="closing-20-text-9"/>
+          <p:cNvPr id="11" name="closing-21-text-9"/>
           <p:cNvSpPr txBox="1"/>
           <p:nvPr/>
         </p:nvSpPr>
@@ -14814,7 +15650,7 @@
       </p:sp>
       <p:sp>
         <p:nvSpPr>
-          <p:cNvPr id="12" name="closing-20-rect-10"/>
+          <p:cNvPr id="12" name="closing-21-rect-10"/>
           <p:cNvSpPr/>
           <p:nvPr/>
         </p:nvSpPr>
@@ -14836,7 +15672,7 @@
       </p:sp>
       <p:sp>
         <p:nvSpPr>
-          <p:cNvPr id="13" name="closing-20-text-11"/>
+          <p:cNvPr id="13" name="closing-21-text-11"/>
           <p:cNvSpPr txBox="1"/>
           <p:nvPr/>
         </p:nvSpPr>
@@ -14872,7 +15708,7 @@
       </p:sp>
       <p:sp>
         <p:nvSpPr>
-          <p:cNvPr id="14" name="closing-20-text-12"/>
+          <p:cNvPr id="14" name="closing-21-text-12"/>
           <p:cNvSpPr txBox="1"/>
           <p:nvPr/>
         </p:nvSpPr>
@@ -14908,7 +15744,7 @@
       </p:sp>
       <p:sp>
         <p:nvSpPr>
-          <p:cNvPr id="15" name="closing-20-text-13"/>
+          <p:cNvPr id="15" name="closing-21-text-13"/>
           <p:cNvSpPr txBox="1"/>
           <p:nvPr/>
         </p:nvSpPr>
@@ -14947,7 +15783,7 @@
       </p:sp>
       <p:sp>
         <p:nvSpPr>
-          <p:cNvPr id="16" name="closing-20-text-14"/>
+          <p:cNvPr id="16" name="closing-21-text-14"/>
           <p:cNvSpPr txBox="1"/>
           <p:nvPr/>
         </p:nvSpPr>

--- a/submission/StudyRoute_Deck.pptx
+++ b/submission/StudyRoute_Deck.pptx
@@ -25,10 +25,9 @@
     <p:sldId id="273" r:id="rId19"/>
     <p:sldId id="274" r:id="rId20"/>
     <p:sldId id="275" r:id="rId21"/>
-    <p:sldId id="276" r:id="rId22"/>
   </p:sldIdLst>
   <p:notesMasterIdLst>
-    <p:notesMasterId r:id="rId23"/>
+    <p:notesMasterId r:id="rId22"/>
   </p:notesMasterIdLst>
   <p:sldSz cx="9144000" cy="5143500"/>
   <p:notesSz cx="5143500" cy="9144000"/>
@@ -127,19 +126,19 @@
   <p:extLst>
     <p:ext uri="{521415D9-36F7-43E2-AB2F-B90AF26B5E84}">
       <p14:sectionLst xmlns:p14="http://schemas.microsoft.com/office/powerpoint/2010/main">
-        <p14:section name="Opening" id="{2c00df88-3e40-5746-fe8d-61f65578fd80}">
+        <p14:section name="Opening" id="{41d31ac0-0ea8-74ef-1832-d43a76621859}">
           <p14:sldIdLst>
             <p14:sldId id="256"/>
             <p14:sldId id="257"/>
           </p14:sldIdLst>
         </p14:section>
-        <p14:section name="The problem" id="{b357920c-b3c8-9236-4b8e-942ccf9fc092}">
+        <p14:section name="The problem" id="{0b5d19aa-4d38-e4fc-6440-f0434cbf518d}">
           <p14:sldIdLst>
             <p14:sldId id="258"/>
             <p14:sldId id="259"/>
           </p14:sldIdLst>
         </p14:section>
-        <p14:section name="The solution" id="{bc048424-a606-87ee-ca61-a6530e80ec7e}">
+        <p14:section name="The solution" id="{b19af7d6-6fd0-d0dc-7238-b5a5e06b72be}">
           <p14:sldIdLst>
             <p14:sldId id="260"/>
             <p14:sldId id="261"/>
@@ -147,7 +146,7 @@
             <p14:sldId id="263"/>
           </p14:sldIdLst>
         </p14:section>
-        <p14:section name="Trust" id="{a897a298-e607-8699-ff4e-7b2dcfae49a2}">
+        <p14:section name="Trust" id="{2b1ecca8-c892-cb9c-e2f7-196628c1fa99}">
           <p14:sldIdLst>
             <p14:sldId id="264"/>
             <p14:sldId id="265"/>
@@ -161,11 +160,10 @@
             <p14:sldId id="273"/>
           </p14:sldIdLst>
         </p14:section>
-        <p14:section name="Close" id="{7cffc45c-303b-d2af-3b70-3101f6c4ad0d}">
+        <p14:section name="Close" id="{07bc6671-a836-ecc0-4ea6-fbb768ef0779}">
           <p14:sldIdLst>
             <p14:sldId id="274"/>
             <p14:sldId id="275"/>
-            <p14:sldId id="276"/>
           </p14:sldIdLst>
         </p14:section>
       </p14:sectionLst>
@@ -1925,7 +1923,7 @@
           <a:p>
             <a:r>
               <a:rPr lang="en-US" dirty="0"/>
-              <a:t>Back to the brief. The technical documentation, this ten-minute deck, the source on a public repository with CI green, the security self-assessment and the execution evidence are all in. The narrated demo video is optional and still pending. Everything is a sandbox with synthetic data. And for the three scoring criteria, here are the slides that show each.</a:t>
+              <a:t>Next: replace placeholder rules with official Bangladesh Bank sources, partner with an authorised dealer bank for real quotes and KYC, and move the escrow from our simulated chain to a permissioned one. Credit building is in the brief and not built, and we would rather say so. To close: the engine calculates, the AI explains, the human approves, and every step is logged. Thank you.</a:t>
             </a:r>
             <a:endParaRPr lang="en-US" dirty="0"/>
           </a:p>
@@ -1949,94 +1947,6 @@
             <a:fld id="{F7021451-1387-4CA6-816F-3879F97B5CBC}" type="slidenum">
               <a:rPr lang="en-US"/>
               <a:t>20</a:t>
-            </a:fld>
-            <a:endParaRPr lang="en-US"/>
-          </a:p>
-        </p:txBody>
-      </p:sp>
-    </p:spTree>
-    <p:extLst>
-      <p:ext uri="{BB962C8B-B14F-4D97-AF65-F5344CB8AC3E}">
-        <p14:creationId xmlns:p14="http://schemas.microsoft.com/office/powerpoint/2010/main" val="1024086991"/>
-      </p:ext>
-    </p:extLst>
-  </p:cSld>
-  <p:clrMapOvr>
-    <a:masterClrMapping/>
-  </p:clrMapOvr>
-</p:notes>
-</file>
-
-<file path=ppt/notesSlides/notesSlide21.xml><?xml version="1.0" encoding="utf-8"?>
-<p:notes xmlns:a="http://schemas.openxmlformats.org/drawingml/2006/main" xmlns:r="http://schemas.openxmlformats.org/officeDocument/2006/relationships" xmlns:p="http://schemas.openxmlformats.org/presentationml/2006/main">
-  <p:cSld>
-    <p:spTree>
-      <p:nvGrpSpPr>
-        <p:cNvPr id="1" name=""/>
-        <p:cNvGrpSpPr/>
-        <p:nvPr/>
-      </p:nvGrpSpPr>
-      <p:grpSpPr>
-        <a:xfrm>
-          <a:off x="0" y="0"/>
-          <a:ext cx="0" cy="0"/>
-          <a:chOff x="0" y="0"/>
-          <a:chExt cx="0" cy="0"/>
-        </a:xfrm>
-      </p:grpSpPr>
-      <p:sp>
-        <p:nvSpPr>
-          <p:cNvPr id="2" name="Slide Image Placeholder 1"/>
-          <p:cNvSpPr>
-            <a:spLocks noGrp="1" noRot="1" noChangeAspect="1"/>
-          </p:cNvSpPr>
-          <p:nvPr>
-            <p:ph type="sldImg"/>
-          </p:nvPr>
-        </p:nvSpPr>
-        <p:spPr/>
-      </p:sp>
-      <p:sp>
-        <p:nvSpPr>
-          <p:cNvPr id="3" name="Notes Placeholder 2"/>
-          <p:cNvSpPr>
-            <a:spLocks noGrp="1"/>
-          </p:cNvSpPr>
-          <p:nvPr>
-            <p:ph type="body" idx="1"/>
-          </p:nvPr>
-        </p:nvSpPr>
-        <p:spPr/>
-        <p:txBody>
-          <a:bodyPr/>
-          <a:lstStyle/>
-          <a:p>
-            <a:r>
-              <a:rPr lang="en-US" dirty="0"/>
-              <a:t>Next: replace placeholder rules with official Bangladesh Bank sources, partner with an authorised dealer bank for real quotes and KYC, and move the escrow from our simulated chain to a permissioned one. Credit building is in the brief and not built, and we would rather say so. To close: the engine calculates, the AI explains, the human approves, and every step is logged. Thank you.</a:t>
-            </a:r>
-            <a:endParaRPr lang="en-US" dirty="0"/>
-          </a:p>
-        </p:txBody>
-      </p:sp>
-      <p:sp>
-        <p:nvSpPr>
-          <p:cNvPr id="4" name="Slide Number Placeholder 3"/>
-          <p:cNvSpPr>
-            <a:spLocks noGrp="1"/>
-          </p:cNvSpPr>
-          <p:nvPr>
-            <p:ph type="sldNum" sz="quarter" idx="10"/>
-          </p:nvPr>
-        </p:nvSpPr>
-        <p:spPr/>
-        <p:txBody>
-          <a:bodyPr/>
-          <a:lstStyle/>
-          <a:p>
-            <a:fld id="{F7021451-1387-4CA6-816F-3879F97B5CBC}" type="slidenum">
-              <a:rPr lang="en-US"/>
-              <a:t>21</a:t>
             </a:fld>
             <a:endParaRPr lang="en-US"/>
           </a:p>
@@ -13369,2006 +13279,21 @@
             <a:r>
               <a:rPr lang="en-US" sz="3600" b="1" dirty="0">
                 <a:solidFill>
-                  <a:schemeClr val="tx1"/>
+                  <a:schemeClr val="bg1"/>
                 </a:solidFill>
                 <a:latin typeface="+mj-lt" pitchFamily="34" charset="0"/>
                 <a:ea typeface="+mj-lt" pitchFamily="34" charset="-122"/>
                 <a:cs typeface="+mj-lt" pitchFamily="34" charset="-120"/>
               </a:rPr>
-              <a:t>What the brief asked</a:t>
+              <a:t>What comes next</a:t>
             </a:r>
             <a:endParaRPr lang="en-US" sz="3600" dirty="0"/>
           </a:p>
         </p:txBody>
       </p:sp>
-      <p:graphicFrame>
-        <p:nvGraphicFramePr>
-          <p:cNvPr id="21" name="content-20-table-1"/>
-          <p:cNvGraphicFramePr>
-            <a:graphicFrameLocks noGrp="1"/>
-          </p:cNvGraphicFramePr>
-          <p:nvPr>
-            <p:extLst>
-              <p:ext uri="{D42A27DB-BD31-4B8C-83A1-F6EECF244321}">
-                <p14:modId xmlns:p14="http://schemas.microsoft.com/office/powerpoint/2010/main" val="1579011935"/>
-              </p:ext>
-            </p:extLst>
-          </p:nvPr>
-        </p:nvGraphicFramePr>
-        <p:xfrm>
-          <a:off x="457200" y="1188720"/>
-          <a:ext cx="5760720" cy="914400"/>
-        </p:xfrm>
-        <a:graphic>
-          <a:graphicData uri="http://schemas.openxmlformats.org/drawingml/2006/table">
-            <a:tbl>
-              <a:tblPr/>
-              <a:tblGrid>
-                <a:gridCol w="2011680"/>
-                <a:gridCol w="3063240"/>
-                <a:gridCol w="685800"/>
-              </a:tblGrid>
-              <a:tr h="393192">
-                <a:tc>
-                  <a:txBody>
-                    <a:bodyPr/>
-                    <a:lstStyle/>
-                    <a:p>
-                      <a:pPr algn="l" indent="0" marL="0">
-                        <a:buNone/>
-                      </a:pPr>
-                      <a:r>
-                        <a:rPr lang="en-US" sz="1050" b="1" dirty="0">
-                          <a:solidFill>
-                            <a:schemeClr val="bg1"/>
-                          </a:solidFill>
-                        </a:rPr>
-                        <a:t>What the brief asked</a:t>
-                      </a:r>
-                      <a:endParaRPr lang="en-US" sz="1050" dirty="0"/>
-                    </a:p>
-                  </a:txBody>
-                  <a:tcPr marL="91440" marR="91440" marT="45720" marB="45720" anchor="ctr">
-                    <a:lnL w="9525" cap="flat" cmpd="sng" algn="ctr">
-                      <a:solidFill>
-                        <a:srgbClr val="C9D6E3"/>
-                      </a:solidFill>
-                      <a:prstDash val="solid"/>
-                      <a:round/>
-                      <a:headEnd type="none" w="med" len="med"/>
-                      <a:tailEnd type="none" w="med" len="med"/>
-                    </a:lnL>
-                    <a:lnR w="9525" cap="flat" cmpd="sng" algn="ctr">
-                      <a:solidFill>
-                        <a:srgbClr val="C9D6E3"/>
-                      </a:solidFill>
-                      <a:prstDash val="solid"/>
-                      <a:round/>
-                      <a:headEnd type="none" w="med" len="med"/>
-                      <a:tailEnd type="none" w="med" len="med"/>
-                    </a:lnR>
-                    <a:lnT w="9525" cap="flat" cmpd="sng" algn="ctr">
-                      <a:solidFill>
-                        <a:srgbClr val="C9D6E3"/>
-                      </a:solidFill>
-                      <a:prstDash val="solid"/>
-                      <a:round/>
-                      <a:headEnd type="none" w="med" len="med"/>
-                      <a:tailEnd type="none" w="med" len="med"/>
-                    </a:lnT>
-                    <a:lnB w="9525" cap="flat" cmpd="sng" algn="ctr">
-                      <a:solidFill>
-                        <a:srgbClr val="C9D6E3"/>
-                      </a:solidFill>
-                      <a:prstDash val="solid"/>
-                      <a:round/>
-                      <a:headEnd type="none" w="med" len="med"/>
-                      <a:tailEnd type="none" w="med" len="med"/>
-                    </a:lnB>
-                    <a:solidFill>
-                      <a:schemeClr val="tx1"/>
-                    </a:solidFill>
-                  </a:tcPr>
-                </a:tc>
-                <a:tc>
-                  <a:txBody>
-                    <a:bodyPr/>
-                    <a:lstStyle/>
-                    <a:p>
-                      <a:pPr algn="l" indent="0" marL="0">
-                        <a:buNone/>
-                      </a:pPr>
-                      <a:r>
-                        <a:rPr lang="en-US" sz="1050" b="1" dirty="0">
-                          <a:solidFill>
-                            <a:schemeClr val="bg1"/>
-                          </a:solidFill>
-                        </a:rPr>
-                        <a:t>Where it is</a:t>
-                      </a:r>
-                      <a:endParaRPr lang="en-US" sz="1050" dirty="0"/>
-                    </a:p>
-                  </a:txBody>
-                  <a:tcPr marL="91440" marR="91440" marT="45720" marB="45720" anchor="ctr">
-                    <a:lnL w="9525" cap="flat" cmpd="sng" algn="ctr">
-                      <a:solidFill>
-                        <a:srgbClr val="C9D6E3"/>
-                      </a:solidFill>
-                      <a:prstDash val="solid"/>
-                      <a:round/>
-                      <a:headEnd type="none" w="med" len="med"/>
-                      <a:tailEnd type="none" w="med" len="med"/>
-                    </a:lnL>
-                    <a:lnR w="9525" cap="flat" cmpd="sng" algn="ctr">
-                      <a:solidFill>
-                        <a:srgbClr val="C9D6E3"/>
-                      </a:solidFill>
-                      <a:prstDash val="solid"/>
-                      <a:round/>
-                      <a:headEnd type="none" w="med" len="med"/>
-                      <a:tailEnd type="none" w="med" len="med"/>
-                    </a:lnR>
-                    <a:lnT w="9525" cap="flat" cmpd="sng" algn="ctr">
-                      <a:solidFill>
-                        <a:srgbClr val="C9D6E3"/>
-                      </a:solidFill>
-                      <a:prstDash val="solid"/>
-                      <a:round/>
-                      <a:headEnd type="none" w="med" len="med"/>
-                      <a:tailEnd type="none" w="med" len="med"/>
-                    </a:lnT>
-                    <a:lnB w="9525" cap="flat" cmpd="sng" algn="ctr">
-                      <a:solidFill>
-                        <a:srgbClr val="C9D6E3"/>
-                      </a:solidFill>
-                      <a:prstDash val="solid"/>
-                      <a:round/>
-                      <a:headEnd type="none" w="med" len="med"/>
-                      <a:tailEnd type="none" w="med" len="med"/>
-                    </a:lnB>
-                    <a:solidFill>
-                      <a:schemeClr val="tx1"/>
-                    </a:solidFill>
-                  </a:tcPr>
-                </a:tc>
-                <a:tc>
-                  <a:txBody>
-                    <a:bodyPr/>
-                    <a:lstStyle/>
-                    <a:p>
-                      <a:pPr algn="l" indent="0" marL="0">
-                        <a:buNone/>
-                      </a:pPr>
-                      <a:r>
-                        <a:rPr lang="en-US" sz="1050" b="1" dirty="0">
-                          <a:solidFill>
-                            <a:schemeClr val="bg1"/>
-                          </a:solidFill>
-                        </a:rPr>
-                        <a:t>Status</a:t>
-                      </a:r>
-                      <a:endParaRPr lang="en-US" sz="1050" dirty="0"/>
-                    </a:p>
-                  </a:txBody>
-                  <a:tcPr marL="91440" marR="91440" marT="45720" marB="45720" anchor="ctr">
-                    <a:lnL w="9525" cap="flat" cmpd="sng" algn="ctr">
-                      <a:solidFill>
-                        <a:srgbClr val="C9D6E3"/>
-                      </a:solidFill>
-                      <a:prstDash val="solid"/>
-                      <a:round/>
-                      <a:headEnd type="none" w="med" len="med"/>
-                      <a:tailEnd type="none" w="med" len="med"/>
-                    </a:lnL>
-                    <a:lnR w="9525" cap="flat" cmpd="sng" algn="ctr">
-                      <a:solidFill>
-                        <a:srgbClr val="C9D6E3"/>
-                      </a:solidFill>
-                      <a:prstDash val="solid"/>
-                      <a:round/>
-                      <a:headEnd type="none" w="med" len="med"/>
-                      <a:tailEnd type="none" w="med" len="med"/>
-                    </a:lnR>
-                    <a:lnT w="9525" cap="flat" cmpd="sng" algn="ctr">
-                      <a:solidFill>
-                        <a:srgbClr val="C9D6E3"/>
-                      </a:solidFill>
-                      <a:prstDash val="solid"/>
-                      <a:round/>
-                      <a:headEnd type="none" w="med" len="med"/>
-                      <a:tailEnd type="none" w="med" len="med"/>
-                    </a:lnT>
-                    <a:lnB w="9525" cap="flat" cmpd="sng" algn="ctr">
-                      <a:solidFill>
-                        <a:srgbClr val="C9D6E3"/>
-                      </a:solidFill>
-                      <a:prstDash val="solid"/>
-                      <a:round/>
-                      <a:headEnd type="none" w="med" len="med"/>
-                      <a:tailEnd type="none" w="med" len="med"/>
-                    </a:lnB>
-                    <a:solidFill>
-                      <a:schemeClr val="tx1"/>
-                    </a:solidFill>
-                  </a:tcPr>
-                </a:tc>
-              </a:tr>
-              <a:tr h="393192">
-                <a:tc>
-                  <a:txBody>
-                    <a:bodyPr/>
-                    <a:lstStyle/>
-                    <a:p>
-                      <a:pPr algn="l" indent="0" marL="0">
-                        <a:buNone/>
-                      </a:pPr>
-                      <a:r>
-                        <a:rPr lang="en-US" sz="1050" b="1" dirty="0">
-                          <a:solidFill>
-                            <a:schemeClr val="tx1"/>
-                          </a:solidFill>
-                        </a:rPr>
-                        <a:t>Technical documentation</a:t>
-                      </a:r>
-                      <a:endParaRPr lang="en-US" sz="1050" dirty="0"/>
-                    </a:p>
-                  </a:txBody>
-                  <a:tcPr marL="91440" marR="91440" marT="45720" marB="45720" anchor="ctr">
-                    <a:lnL w="9525" cap="flat" cmpd="sng" algn="ctr">
-                      <a:solidFill>
-                        <a:srgbClr val="C9D6E3"/>
-                      </a:solidFill>
-                      <a:prstDash val="solid"/>
-                      <a:round/>
-                      <a:headEnd type="none" w="med" len="med"/>
-                      <a:tailEnd type="none" w="med" len="med"/>
-                    </a:lnL>
-                    <a:lnR w="9525" cap="flat" cmpd="sng" algn="ctr">
-                      <a:solidFill>
-                        <a:srgbClr val="C9D6E3"/>
-                      </a:solidFill>
-                      <a:prstDash val="solid"/>
-                      <a:round/>
-                      <a:headEnd type="none" w="med" len="med"/>
-                      <a:tailEnd type="none" w="med" len="med"/>
-                    </a:lnR>
-                    <a:lnT w="9525" cap="flat" cmpd="sng" algn="ctr">
-                      <a:solidFill>
-                        <a:srgbClr val="C9D6E3"/>
-                      </a:solidFill>
-                      <a:prstDash val="solid"/>
-                      <a:round/>
-                      <a:headEnd type="none" w="med" len="med"/>
-                      <a:tailEnd type="none" w="med" len="med"/>
-                    </a:lnT>
-                    <a:lnB w="9525" cap="flat" cmpd="sng" algn="ctr">
-                      <a:solidFill>
-                        <a:srgbClr val="C9D6E3"/>
-                      </a:solidFill>
-                      <a:prstDash val="solid"/>
-                      <a:round/>
-                      <a:headEnd type="none" w="med" len="med"/>
-                      <a:tailEnd type="none" w="med" len="med"/>
-                    </a:lnB>
-                    <a:solidFill>
-                      <a:schemeClr val="bg2"/>
-                    </a:solidFill>
-                  </a:tcPr>
-                </a:tc>
-                <a:tc>
-                  <a:txBody>
-                    <a:bodyPr/>
-                    <a:lstStyle/>
-                    <a:p>
-                      <a:pPr algn="l" indent="0" marL="0">
-                        <a:buNone/>
-                      </a:pPr>
-                      <a:r>
-                        <a:rPr lang="en-US" sz="1050" dirty="0">
-                          <a:solidFill>
-                            <a:schemeClr val="tx1"/>
-                          </a:solidFill>
-                        </a:rPr>
-                        <a:t>20-page PDF: architecture, algorithms, security design</a:t>
-                      </a:r>
-                      <a:endParaRPr lang="en-US" sz="1050" dirty="0"/>
-                    </a:p>
-                  </a:txBody>
-                  <a:tcPr marL="91440" marR="91440" marT="45720" marB="45720" anchor="ctr">
-                    <a:lnL w="9525" cap="flat" cmpd="sng" algn="ctr">
-                      <a:solidFill>
-                        <a:srgbClr val="C9D6E3"/>
-                      </a:solidFill>
-                      <a:prstDash val="solid"/>
-                      <a:round/>
-                      <a:headEnd type="none" w="med" len="med"/>
-                      <a:tailEnd type="none" w="med" len="med"/>
-                    </a:lnL>
-                    <a:lnR w="9525" cap="flat" cmpd="sng" algn="ctr">
-                      <a:solidFill>
-                        <a:srgbClr val="C9D6E3"/>
-                      </a:solidFill>
-                      <a:prstDash val="solid"/>
-                      <a:round/>
-                      <a:headEnd type="none" w="med" len="med"/>
-                      <a:tailEnd type="none" w="med" len="med"/>
-                    </a:lnR>
-                    <a:lnT w="9525" cap="flat" cmpd="sng" algn="ctr">
-                      <a:solidFill>
-                        <a:srgbClr val="C9D6E3"/>
-                      </a:solidFill>
-                      <a:prstDash val="solid"/>
-                      <a:round/>
-                      <a:headEnd type="none" w="med" len="med"/>
-                      <a:tailEnd type="none" w="med" len="med"/>
-                    </a:lnT>
-                    <a:lnB w="9525" cap="flat" cmpd="sng" algn="ctr">
-                      <a:solidFill>
-                        <a:srgbClr val="C9D6E3"/>
-                      </a:solidFill>
-                      <a:prstDash val="solid"/>
-                      <a:round/>
-                      <a:headEnd type="none" w="med" len="med"/>
-                      <a:tailEnd type="none" w="med" len="med"/>
-                    </a:lnB>
-                    <a:solidFill>
-                      <a:schemeClr val="bg2"/>
-                    </a:solidFill>
-                  </a:tcPr>
-                </a:tc>
-                <a:tc>
-                  <a:txBody>
-                    <a:bodyPr/>
-                    <a:lstStyle/>
-                    <a:p>
-                      <a:pPr algn="l" indent="0" marL="0">
-                        <a:buNone/>
-                      </a:pPr>
-                      <a:r>
-                        <a:rPr lang="en-US" sz="1050" b="1" dirty="0">
-                          <a:solidFill>
-                            <a:schemeClr val="accent6"/>
-                          </a:solidFill>
-                        </a:rPr>
-                        <a:t>Done</a:t>
-                      </a:r>
-                      <a:endParaRPr lang="en-US" sz="1050" dirty="0"/>
-                    </a:p>
-                  </a:txBody>
-                  <a:tcPr marL="91440" marR="91440" marT="45720" marB="45720" anchor="ctr">
-                    <a:lnL w="9525" cap="flat" cmpd="sng" algn="ctr">
-                      <a:solidFill>
-                        <a:srgbClr val="C9D6E3"/>
-                      </a:solidFill>
-                      <a:prstDash val="solid"/>
-                      <a:round/>
-                      <a:headEnd type="none" w="med" len="med"/>
-                      <a:tailEnd type="none" w="med" len="med"/>
-                    </a:lnL>
-                    <a:lnR w="9525" cap="flat" cmpd="sng" algn="ctr">
-                      <a:solidFill>
-                        <a:srgbClr val="C9D6E3"/>
-                      </a:solidFill>
-                      <a:prstDash val="solid"/>
-                      <a:round/>
-                      <a:headEnd type="none" w="med" len="med"/>
-                      <a:tailEnd type="none" w="med" len="med"/>
-                    </a:lnR>
-                    <a:lnT w="9525" cap="flat" cmpd="sng" algn="ctr">
-                      <a:solidFill>
-                        <a:srgbClr val="C9D6E3"/>
-                      </a:solidFill>
-                      <a:prstDash val="solid"/>
-                      <a:round/>
-                      <a:headEnd type="none" w="med" len="med"/>
-                      <a:tailEnd type="none" w="med" len="med"/>
-                    </a:lnT>
-                    <a:lnB w="9525" cap="flat" cmpd="sng" algn="ctr">
-                      <a:solidFill>
-                        <a:srgbClr val="C9D6E3"/>
-                      </a:solidFill>
-                      <a:prstDash val="solid"/>
-                      <a:round/>
-                      <a:headEnd type="none" w="med" len="med"/>
-                      <a:tailEnd type="none" w="med" len="med"/>
-                    </a:lnB>
-                    <a:solidFill>
-                      <a:schemeClr val="bg2"/>
-                    </a:solidFill>
-                  </a:tcPr>
-                </a:tc>
-              </a:tr>
-              <a:tr h="393192">
-                <a:tc>
-                  <a:txBody>
-                    <a:bodyPr/>
-                    <a:lstStyle/>
-                    <a:p>
-                      <a:pPr algn="l" indent="0" marL="0">
-                        <a:buNone/>
-                      </a:pPr>
-                      <a:r>
-                        <a:rPr lang="en-US" sz="1050" b="1" dirty="0">
-                          <a:solidFill>
-                            <a:schemeClr val="tx1"/>
-                          </a:solidFill>
-                        </a:rPr>
-                        <a:t>Deck of 10 minutes</a:t>
-                      </a:r>
-                      <a:endParaRPr lang="en-US" sz="1050" dirty="0"/>
-                    </a:p>
-                  </a:txBody>
-                  <a:tcPr marL="91440" marR="91440" marT="45720" marB="45720" anchor="ctr">
-                    <a:lnL w="9525" cap="flat" cmpd="sng" algn="ctr">
-                      <a:solidFill>
-                        <a:srgbClr val="C9D6E3"/>
-                      </a:solidFill>
-                      <a:prstDash val="solid"/>
-                      <a:round/>
-                      <a:headEnd type="none" w="med" len="med"/>
-                      <a:tailEnd type="none" w="med" len="med"/>
-                    </a:lnL>
-                    <a:lnR w="9525" cap="flat" cmpd="sng" algn="ctr">
-                      <a:solidFill>
-                        <a:srgbClr val="C9D6E3"/>
-                      </a:solidFill>
-                      <a:prstDash val="solid"/>
-                      <a:round/>
-                      <a:headEnd type="none" w="med" len="med"/>
-                      <a:tailEnd type="none" w="med" len="med"/>
-                    </a:lnR>
-                    <a:lnT w="9525" cap="flat" cmpd="sng" algn="ctr">
-                      <a:solidFill>
-                        <a:srgbClr val="C9D6E3"/>
-                      </a:solidFill>
-                      <a:prstDash val="solid"/>
-                      <a:round/>
-                      <a:headEnd type="none" w="med" len="med"/>
-                      <a:tailEnd type="none" w="med" len="med"/>
-                    </a:lnT>
-                    <a:lnB w="9525" cap="flat" cmpd="sng" algn="ctr">
-                      <a:solidFill>
-                        <a:srgbClr val="C9D6E3"/>
-                      </a:solidFill>
-                      <a:prstDash val="solid"/>
-                      <a:round/>
-                      <a:headEnd type="none" w="med" len="med"/>
-                      <a:tailEnd type="none" w="med" len="med"/>
-                    </a:lnB>
-                  </a:tcPr>
-                </a:tc>
-                <a:tc>
-                  <a:txBody>
-                    <a:bodyPr/>
-                    <a:lstStyle/>
-                    <a:p>
-                      <a:pPr algn="l" indent="0" marL="0">
-                        <a:buNone/>
-                      </a:pPr>
-                      <a:r>
-                        <a:rPr lang="en-US" sz="1050" dirty="0">
-                          <a:solidFill>
-                            <a:schemeClr val="tx1"/>
-                          </a:solidFill>
-                        </a:rPr>
-                        <a:t>This deck: 21 slides, speaker notes about 9 minutes</a:t>
-                      </a:r>
-                      <a:endParaRPr lang="en-US" sz="1050" dirty="0"/>
-                    </a:p>
-                  </a:txBody>
-                  <a:tcPr marL="91440" marR="91440" marT="45720" marB="45720" anchor="ctr">
-                    <a:lnL w="9525" cap="flat" cmpd="sng" algn="ctr">
-                      <a:solidFill>
-                        <a:srgbClr val="C9D6E3"/>
-                      </a:solidFill>
-                      <a:prstDash val="solid"/>
-                      <a:round/>
-                      <a:headEnd type="none" w="med" len="med"/>
-                      <a:tailEnd type="none" w="med" len="med"/>
-                    </a:lnL>
-                    <a:lnR w="9525" cap="flat" cmpd="sng" algn="ctr">
-                      <a:solidFill>
-                        <a:srgbClr val="C9D6E3"/>
-                      </a:solidFill>
-                      <a:prstDash val="solid"/>
-                      <a:round/>
-                      <a:headEnd type="none" w="med" len="med"/>
-                      <a:tailEnd type="none" w="med" len="med"/>
-                    </a:lnR>
-                    <a:lnT w="9525" cap="flat" cmpd="sng" algn="ctr">
-                      <a:solidFill>
-                        <a:srgbClr val="C9D6E3"/>
-                      </a:solidFill>
-                      <a:prstDash val="solid"/>
-                      <a:round/>
-                      <a:headEnd type="none" w="med" len="med"/>
-                      <a:tailEnd type="none" w="med" len="med"/>
-                    </a:lnT>
-                    <a:lnB w="9525" cap="flat" cmpd="sng" algn="ctr">
-                      <a:solidFill>
-                        <a:srgbClr val="C9D6E3"/>
-                      </a:solidFill>
-                      <a:prstDash val="solid"/>
-                      <a:round/>
-                      <a:headEnd type="none" w="med" len="med"/>
-                      <a:tailEnd type="none" w="med" len="med"/>
-                    </a:lnB>
-                  </a:tcPr>
-                </a:tc>
-                <a:tc>
-                  <a:txBody>
-                    <a:bodyPr/>
-                    <a:lstStyle/>
-                    <a:p>
-                      <a:pPr algn="l" indent="0" marL="0">
-                        <a:buNone/>
-                      </a:pPr>
-                      <a:r>
-                        <a:rPr lang="en-US" sz="1050" b="1" dirty="0">
-                          <a:solidFill>
-                            <a:schemeClr val="accent6"/>
-                          </a:solidFill>
-                        </a:rPr>
-                        <a:t>Done</a:t>
-                      </a:r>
-                      <a:endParaRPr lang="en-US" sz="1050" dirty="0"/>
-                    </a:p>
-                  </a:txBody>
-                  <a:tcPr marL="91440" marR="91440" marT="45720" marB="45720" anchor="ctr">
-                    <a:lnL w="9525" cap="flat" cmpd="sng" algn="ctr">
-                      <a:solidFill>
-                        <a:srgbClr val="C9D6E3"/>
-                      </a:solidFill>
-                      <a:prstDash val="solid"/>
-                      <a:round/>
-                      <a:headEnd type="none" w="med" len="med"/>
-                      <a:tailEnd type="none" w="med" len="med"/>
-                    </a:lnL>
-                    <a:lnR w="9525" cap="flat" cmpd="sng" algn="ctr">
-                      <a:solidFill>
-                        <a:srgbClr val="C9D6E3"/>
-                      </a:solidFill>
-                      <a:prstDash val="solid"/>
-                      <a:round/>
-                      <a:headEnd type="none" w="med" len="med"/>
-                      <a:tailEnd type="none" w="med" len="med"/>
-                    </a:lnR>
-                    <a:lnT w="9525" cap="flat" cmpd="sng" algn="ctr">
-                      <a:solidFill>
-                        <a:srgbClr val="C9D6E3"/>
-                      </a:solidFill>
-                      <a:prstDash val="solid"/>
-                      <a:round/>
-                      <a:headEnd type="none" w="med" len="med"/>
-                      <a:tailEnd type="none" w="med" len="med"/>
-                    </a:lnT>
-                    <a:lnB w="9525" cap="flat" cmpd="sng" algn="ctr">
-                      <a:solidFill>
-                        <a:srgbClr val="C9D6E3"/>
-                      </a:solidFill>
-                      <a:prstDash val="solid"/>
-                      <a:round/>
-                      <a:headEnd type="none" w="med" len="med"/>
-                      <a:tailEnd type="none" w="med" len="med"/>
-                    </a:lnB>
-                  </a:tcPr>
-                </a:tc>
-              </a:tr>
-              <a:tr h="393192">
-                <a:tc>
-                  <a:txBody>
-                    <a:bodyPr/>
-                    <a:lstStyle/>
-                    <a:p>
-                      <a:pPr algn="l" indent="0" marL="0">
-                        <a:buNone/>
-                      </a:pPr>
-                      <a:r>
-                        <a:rPr lang="en-US" sz="1050" b="1" dirty="0">
-                          <a:solidFill>
-                            <a:schemeClr val="tx1"/>
-                          </a:solidFill>
-                        </a:rPr>
-                        <a:t>Demo video, 5 minutes</a:t>
-                      </a:r>
-                      <a:endParaRPr lang="en-US" sz="1050" dirty="0"/>
-                    </a:p>
-                  </a:txBody>
-                  <a:tcPr marL="91440" marR="91440" marT="45720" marB="45720" anchor="ctr">
-                    <a:lnL w="9525" cap="flat" cmpd="sng" algn="ctr">
-                      <a:solidFill>
-                        <a:srgbClr val="C9D6E3"/>
-                      </a:solidFill>
-                      <a:prstDash val="solid"/>
-                      <a:round/>
-                      <a:headEnd type="none" w="med" len="med"/>
-                      <a:tailEnd type="none" w="med" len="med"/>
-                    </a:lnL>
-                    <a:lnR w="9525" cap="flat" cmpd="sng" algn="ctr">
-                      <a:solidFill>
-                        <a:srgbClr val="C9D6E3"/>
-                      </a:solidFill>
-                      <a:prstDash val="solid"/>
-                      <a:round/>
-                      <a:headEnd type="none" w="med" len="med"/>
-                      <a:tailEnd type="none" w="med" len="med"/>
-                    </a:lnR>
-                    <a:lnT w="9525" cap="flat" cmpd="sng" algn="ctr">
-                      <a:solidFill>
-                        <a:srgbClr val="C9D6E3"/>
-                      </a:solidFill>
-                      <a:prstDash val="solid"/>
-                      <a:round/>
-                      <a:headEnd type="none" w="med" len="med"/>
-                      <a:tailEnd type="none" w="med" len="med"/>
-                    </a:lnT>
-                    <a:lnB w="9525" cap="flat" cmpd="sng" algn="ctr">
-                      <a:solidFill>
-                        <a:srgbClr val="C9D6E3"/>
-                      </a:solidFill>
-                      <a:prstDash val="solid"/>
-                      <a:round/>
-                      <a:headEnd type="none" w="med" len="med"/>
-                      <a:tailEnd type="none" w="med" len="med"/>
-                    </a:lnB>
-                    <a:solidFill>
-                      <a:schemeClr val="bg2"/>
-                    </a:solidFill>
-                  </a:tcPr>
-                </a:tc>
-                <a:tc>
-                  <a:txBody>
-                    <a:bodyPr/>
-                    <a:lstStyle/>
-                    <a:p>
-                      <a:pPr algn="l" indent="0" marL="0">
-                        <a:buNone/>
-                      </a:pPr>
-                      <a:r>
-                        <a:rPr lang="en-US" sz="1050" dirty="0">
-                          <a:solidFill>
-                            <a:schemeClr val="tx1"/>
-                          </a:solidFill>
-                        </a:rPr>
-                        <a:t>Script and a silent recording; narrated video pending</a:t>
-                      </a:r>
-                      <a:endParaRPr lang="en-US" sz="1050" dirty="0"/>
-                    </a:p>
-                  </a:txBody>
-                  <a:tcPr marL="91440" marR="91440" marT="45720" marB="45720" anchor="ctr">
-                    <a:lnL w="9525" cap="flat" cmpd="sng" algn="ctr">
-                      <a:solidFill>
-                        <a:srgbClr val="C9D6E3"/>
-                      </a:solidFill>
-                      <a:prstDash val="solid"/>
-                      <a:round/>
-                      <a:headEnd type="none" w="med" len="med"/>
-                      <a:tailEnd type="none" w="med" len="med"/>
-                    </a:lnL>
-                    <a:lnR w="9525" cap="flat" cmpd="sng" algn="ctr">
-                      <a:solidFill>
-                        <a:srgbClr val="C9D6E3"/>
-                      </a:solidFill>
-                      <a:prstDash val="solid"/>
-                      <a:round/>
-                      <a:headEnd type="none" w="med" len="med"/>
-                      <a:tailEnd type="none" w="med" len="med"/>
-                    </a:lnR>
-                    <a:lnT w="9525" cap="flat" cmpd="sng" algn="ctr">
-                      <a:solidFill>
-                        <a:srgbClr val="C9D6E3"/>
-                      </a:solidFill>
-                      <a:prstDash val="solid"/>
-                      <a:round/>
-                      <a:headEnd type="none" w="med" len="med"/>
-                      <a:tailEnd type="none" w="med" len="med"/>
-                    </a:lnT>
-                    <a:lnB w="9525" cap="flat" cmpd="sng" algn="ctr">
-                      <a:solidFill>
-                        <a:srgbClr val="C9D6E3"/>
-                      </a:solidFill>
-                      <a:prstDash val="solid"/>
-                      <a:round/>
-                      <a:headEnd type="none" w="med" len="med"/>
-                      <a:tailEnd type="none" w="med" len="med"/>
-                    </a:lnB>
-                    <a:solidFill>
-                      <a:schemeClr val="bg2"/>
-                    </a:solidFill>
-                  </a:tcPr>
-                </a:tc>
-                <a:tc>
-                  <a:txBody>
-                    <a:bodyPr/>
-                    <a:lstStyle/>
-                    <a:p>
-                      <a:pPr algn="l" indent="0" marL="0">
-                        <a:buNone/>
-                      </a:pPr>
-                      <a:r>
-                        <a:rPr lang="en-US" sz="1050" b="1" dirty="0">
-                          <a:solidFill>
-                            <a:schemeClr val="accent3"/>
-                          </a:solidFill>
-                        </a:rPr>
-                        <a:t>Pending</a:t>
-                      </a:r>
-                      <a:endParaRPr lang="en-US" sz="1050" dirty="0"/>
-                    </a:p>
-                  </a:txBody>
-                  <a:tcPr marL="91440" marR="91440" marT="45720" marB="45720" anchor="ctr">
-                    <a:lnL w="9525" cap="flat" cmpd="sng" algn="ctr">
-                      <a:solidFill>
-                        <a:srgbClr val="C9D6E3"/>
-                      </a:solidFill>
-                      <a:prstDash val="solid"/>
-                      <a:round/>
-                      <a:headEnd type="none" w="med" len="med"/>
-                      <a:tailEnd type="none" w="med" len="med"/>
-                    </a:lnL>
-                    <a:lnR w="9525" cap="flat" cmpd="sng" algn="ctr">
-                      <a:solidFill>
-                        <a:srgbClr val="C9D6E3"/>
-                      </a:solidFill>
-                      <a:prstDash val="solid"/>
-                      <a:round/>
-                      <a:headEnd type="none" w="med" len="med"/>
-                      <a:tailEnd type="none" w="med" len="med"/>
-                    </a:lnR>
-                    <a:lnT w="9525" cap="flat" cmpd="sng" algn="ctr">
-                      <a:solidFill>
-                        <a:srgbClr val="C9D6E3"/>
-                      </a:solidFill>
-                      <a:prstDash val="solid"/>
-                      <a:round/>
-                      <a:headEnd type="none" w="med" len="med"/>
-                      <a:tailEnd type="none" w="med" len="med"/>
-                    </a:lnT>
-                    <a:lnB w="9525" cap="flat" cmpd="sng" algn="ctr">
-                      <a:solidFill>
-                        <a:srgbClr val="C9D6E3"/>
-                      </a:solidFill>
-                      <a:prstDash val="solid"/>
-                      <a:round/>
-                      <a:headEnd type="none" w="med" len="med"/>
-                      <a:tailEnd type="none" w="med" len="med"/>
-                    </a:lnB>
-                    <a:solidFill>
-                      <a:schemeClr val="bg2"/>
-                    </a:solidFill>
-                  </a:tcPr>
-                </a:tc>
-              </a:tr>
-              <a:tr h="393192">
-                <a:tc>
-                  <a:txBody>
-                    <a:bodyPr/>
-                    <a:lstStyle/>
-                    <a:p>
-                      <a:pPr algn="l" indent="0" marL="0">
-                        <a:buNone/>
-                      </a:pPr>
-                      <a:r>
-                        <a:rPr lang="en-US" sz="1050" b="1" dirty="0">
-                          <a:solidFill>
-                            <a:schemeClr val="tx1"/>
-                          </a:solidFill>
-                        </a:rPr>
-                        <a:t>Source, README, GitHub link</a:t>
-                      </a:r>
-                      <a:endParaRPr lang="en-US" sz="1050" dirty="0"/>
-                    </a:p>
-                  </a:txBody>
-                  <a:tcPr marL="91440" marR="91440" marT="45720" marB="45720" anchor="ctr">
-                    <a:lnL w="9525" cap="flat" cmpd="sng" algn="ctr">
-                      <a:solidFill>
-                        <a:srgbClr val="C9D6E3"/>
-                      </a:solidFill>
-                      <a:prstDash val="solid"/>
-                      <a:round/>
-                      <a:headEnd type="none" w="med" len="med"/>
-                      <a:tailEnd type="none" w="med" len="med"/>
-                    </a:lnL>
-                    <a:lnR w="9525" cap="flat" cmpd="sng" algn="ctr">
-                      <a:solidFill>
-                        <a:srgbClr val="C9D6E3"/>
-                      </a:solidFill>
-                      <a:prstDash val="solid"/>
-                      <a:round/>
-                      <a:headEnd type="none" w="med" len="med"/>
-                      <a:tailEnd type="none" w="med" len="med"/>
-                    </a:lnR>
-                    <a:lnT w="9525" cap="flat" cmpd="sng" algn="ctr">
-                      <a:solidFill>
-                        <a:srgbClr val="C9D6E3"/>
-                      </a:solidFill>
-                      <a:prstDash val="solid"/>
-                      <a:round/>
-                      <a:headEnd type="none" w="med" len="med"/>
-                      <a:tailEnd type="none" w="med" len="med"/>
-                    </a:lnT>
-                    <a:lnB w="9525" cap="flat" cmpd="sng" algn="ctr">
-                      <a:solidFill>
-                        <a:srgbClr val="C9D6E3"/>
-                      </a:solidFill>
-                      <a:prstDash val="solid"/>
-                      <a:round/>
-                      <a:headEnd type="none" w="med" len="med"/>
-                      <a:tailEnd type="none" w="med" len="med"/>
-                    </a:lnB>
-                  </a:tcPr>
-                </a:tc>
-                <a:tc>
-                  <a:txBody>
-                    <a:bodyPr/>
-                    <a:lstStyle/>
-                    <a:p>
-                      <a:pPr algn="l" indent="0" marL="0">
-                        <a:buNone/>
-                      </a:pPr>
-                      <a:r>
-                        <a:rPr lang="en-US" sz="1050" dirty="0">
-                          <a:solidFill>
-                            <a:schemeClr val="tx1"/>
-                          </a:solidFill>
-                        </a:rPr>
-                        <a:t>Public repository; docker compose up; CI green</a:t>
-                      </a:r>
-                      <a:endParaRPr lang="en-US" sz="1050" dirty="0"/>
-                    </a:p>
-                  </a:txBody>
-                  <a:tcPr marL="91440" marR="91440" marT="45720" marB="45720" anchor="ctr">
-                    <a:lnL w="9525" cap="flat" cmpd="sng" algn="ctr">
-                      <a:solidFill>
-                        <a:srgbClr val="C9D6E3"/>
-                      </a:solidFill>
-                      <a:prstDash val="solid"/>
-                      <a:round/>
-                      <a:headEnd type="none" w="med" len="med"/>
-                      <a:tailEnd type="none" w="med" len="med"/>
-                    </a:lnL>
-                    <a:lnR w="9525" cap="flat" cmpd="sng" algn="ctr">
-                      <a:solidFill>
-                        <a:srgbClr val="C9D6E3"/>
-                      </a:solidFill>
-                      <a:prstDash val="solid"/>
-                      <a:round/>
-                      <a:headEnd type="none" w="med" len="med"/>
-                      <a:tailEnd type="none" w="med" len="med"/>
-                    </a:lnR>
-                    <a:lnT w="9525" cap="flat" cmpd="sng" algn="ctr">
-                      <a:solidFill>
-                        <a:srgbClr val="C9D6E3"/>
-                      </a:solidFill>
-                      <a:prstDash val="solid"/>
-                      <a:round/>
-                      <a:headEnd type="none" w="med" len="med"/>
-                      <a:tailEnd type="none" w="med" len="med"/>
-                    </a:lnT>
-                    <a:lnB w="9525" cap="flat" cmpd="sng" algn="ctr">
-                      <a:solidFill>
-                        <a:srgbClr val="C9D6E3"/>
-                      </a:solidFill>
-                      <a:prstDash val="solid"/>
-                      <a:round/>
-                      <a:headEnd type="none" w="med" len="med"/>
-                      <a:tailEnd type="none" w="med" len="med"/>
-                    </a:lnB>
-                  </a:tcPr>
-                </a:tc>
-                <a:tc>
-                  <a:txBody>
-                    <a:bodyPr/>
-                    <a:lstStyle/>
-                    <a:p>
-                      <a:pPr algn="l" indent="0" marL="0">
-                        <a:buNone/>
-                      </a:pPr>
-                      <a:r>
-                        <a:rPr lang="en-US" sz="1050" b="1" dirty="0">
-                          <a:solidFill>
-                            <a:schemeClr val="accent6"/>
-                          </a:solidFill>
-                        </a:rPr>
-                        <a:t>Done</a:t>
-                      </a:r>
-                      <a:endParaRPr lang="en-US" sz="1050" dirty="0"/>
-                    </a:p>
-                  </a:txBody>
-                  <a:tcPr marL="91440" marR="91440" marT="45720" marB="45720" anchor="ctr">
-                    <a:lnL w="9525" cap="flat" cmpd="sng" algn="ctr">
-                      <a:solidFill>
-                        <a:srgbClr val="C9D6E3"/>
-                      </a:solidFill>
-                      <a:prstDash val="solid"/>
-                      <a:round/>
-                      <a:headEnd type="none" w="med" len="med"/>
-                      <a:tailEnd type="none" w="med" len="med"/>
-                    </a:lnL>
-                    <a:lnR w="9525" cap="flat" cmpd="sng" algn="ctr">
-                      <a:solidFill>
-                        <a:srgbClr val="C9D6E3"/>
-                      </a:solidFill>
-                      <a:prstDash val="solid"/>
-                      <a:round/>
-                      <a:headEnd type="none" w="med" len="med"/>
-                      <a:tailEnd type="none" w="med" len="med"/>
-                    </a:lnR>
-                    <a:lnT w="9525" cap="flat" cmpd="sng" algn="ctr">
-                      <a:solidFill>
-                        <a:srgbClr val="C9D6E3"/>
-                      </a:solidFill>
-                      <a:prstDash val="solid"/>
-                      <a:round/>
-                      <a:headEnd type="none" w="med" len="med"/>
-                      <a:tailEnd type="none" w="med" len="med"/>
-                    </a:lnT>
-                    <a:lnB w="9525" cap="flat" cmpd="sng" algn="ctr">
-                      <a:solidFill>
-                        <a:srgbClr val="C9D6E3"/>
-                      </a:solidFill>
-                      <a:prstDash val="solid"/>
-                      <a:round/>
-                      <a:headEnd type="none" w="med" len="med"/>
-                      <a:tailEnd type="none" w="med" len="med"/>
-                    </a:lnB>
-                  </a:tcPr>
-                </a:tc>
-              </a:tr>
-              <a:tr h="393192">
-                <a:tc>
-                  <a:txBody>
-                    <a:bodyPr/>
-                    <a:lstStyle/>
-                    <a:p>
-                      <a:pPr algn="l" indent="0" marL="0">
-                        <a:buNone/>
-                      </a:pPr>
-                      <a:r>
-                        <a:rPr lang="en-US" sz="1050" b="1" dirty="0">
-                          <a:solidFill>
-                            <a:schemeClr val="tx1"/>
-                          </a:solidFill>
-                        </a:rPr>
-                        <a:t>Security self-assessment</a:t>
-                      </a:r>
-                      <a:endParaRPr lang="en-US" sz="1050" dirty="0"/>
-                    </a:p>
-                  </a:txBody>
-                  <a:tcPr marL="91440" marR="91440" marT="45720" marB="45720" anchor="ctr">
-                    <a:lnL w="9525" cap="flat" cmpd="sng" algn="ctr">
-                      <a:solidFill>
-                        <a:srgbClr val="C9D6E3"/>
-                      </a:solidFill>
-                      <a:prstDash val="solid"/>
-                      <a:round/>
-                      <a:headEnd type="none" w="med" len="med"/>
-                      <a:tailEnd type="none" w="med" len="med"/>
-                    </a:lnL>
-                    <a:lnR w="9525" cap="flat" cmpd="sng" algn="ctr">
-                      <a:solidFill>
-                        <a:srgbClr val="C9D6E3"/>
-                      </a:solidFill>
-                      <a:prstDash val="solid"/>
-                      <a:round/>
-                      <a:headEnd type="none" w="med" len="med"/>
-                      <a:tailEnd type="none" w="med" len="med"/>
-                    </a:lnR>
-                    <a:lnT w="9525" cap="flat" cmpd="sng" algn="ctr">
-                      <a:solidFill>
-                        <a:srgbClr val="C9D6E3"/>
-                      </a:solidFill>
-                      <a:prstDash val="solid"/>
-                      <a:round/>
-                      <a:headEnd type="none" w="med" len="med"/>
-                      <a:tailEnd type="none" w="med" len="med"/>
-                    </a:lnT>
-                    <a:lnB w="9525" cap="flat" cmpd="sng" algn="ctr">
-                      <a:solidFill>
-                        <a:srgbClr val="C9D6E3"/>
-                      </a:solidFill>
-                      <a:prstDash val="solid"/>
-                      <a:round/>
-                      <a:headEnd type="none" w="med" len="med"/>
-                      <a:tailEnd type="none" w="med" len="med"/>
-                    </a:lnB>
-                    <a:solidFill>
-                      <a:schemeClr val="bg2"/>
-                    </a:solidFill>
-                  </a:tcPr>
-                </a:tc>
-                <a:tc>
-                  <a:txBody>
-                    <a:bodyPr/>
-                    <a:lstStyle/>
-                    <a:p>
-                      <a:pPr algn="l" indent="0" marL="0">
-                        <a:buNone/>
-                      </a:pPr>
-                      <a:r>
-                        <a:rPr lang="en-US" sz="1050" dirty="0">
-                          <a:solidFill>
-                            <a:schemeClr val="tx1"/>
-                          </a:solidFill>
-                        </a:rPr>
-                        <a:t>39 pages: 55 risks, 314 probe records, findings</a:t>
-                      </a:r>
-                      <a:endParaRPr lang="en-US" sz="1050" dirty="0"/>
-                    </a:p>
-                  </a:txBody>
-                  <a:tcPr marL="91440" marR="91440" marT="45720" marB="45720" anchor="ctr">
-                    <a:lnL w="9525" cap="flat" cmpd="sng" algn="ctr">
-                      <a:solidFill>
-                        <a:srgbClr val="C9D6E3"/>
-                      </a:solidFill>
-                      <a:prstDash val="solid"/>
-                      <a:round/>
-                      <a:headEnd type="none" w="med" len="med"/>
-                      <a:tailEnd type="none" w="med" len="med"/>
-                    </a:lnL>
-                    <a:lnR w="9525" cap="flat" cmpd="sng" algn="ctr">
-                      <a:solidFill>
-                        <a:srgbClr val="C9D6E3"/>
-                      </a:solidFill>
-                      <a:prstDash val="solid"/>
-                      <a:round/>
-                      <a:headEnd type="none" w="med" len="med"/>
-                      <a:tailEnd type="none" w="med" len="med"/>
-                    </a:lnR>
-                    <a:lnT w="9525" cap="flat" cmpd="sng" algn="ctr">
-                      <a:solidFill>
-                        <a:srgbClr val="C9D6E3"/>
-                      </a:solidFill>
-                      <a:prstDash val="solid"/>
-                      <a:round/>
-                      <a:headEnd type="none" w="med" len="med"/>
-                      <a:tailEnd type="none" w="med" len="med"/>
-                    </a:lnT>
-                    <a:lnB w="9525" cap="flat" cmpd="sng" algn="ctr">
-                      <a:solidFill>
-                        <a:srgbClr val="C9D6E3"/>
-                      </a:solidFill>
-                      <a:prstDash val="solid"/>
-                      <a:round/>
-                      <a:headEnd type="none" w="med" len="med"/>
-                      <a:tailEnd type="none" w="med" len="med"/>
-                    </a:lnB>
-                    <a:solidFill>
-                      <a:schemeClr val="bg2"/>
-                    </a:solidFill>
-                  </a:tcPr>
-                </a:tc>
-                <a:tc>
-                  <a:txBody>
-                    <a:bodyPr/>
-                    <a:lstStyle/>
-                    <a:p>
-                      <a:pPr algn="l" indent="0" marL="0">
-                        <a:buNone/>
-                      </a:pPr>
-                      <a:r>
-                        <a:rPr lang="en-US" sz="1050" b="1" dirty="0">
-                          <a:solidFill>
-                            <a:schemeClr val="accent6"/>
-                          </a:solidFill>
-                        </a:rPr>
-                        <a:t>Done</a:t>
-                      </a:r>
-                      <a:endParaRPr lang="en-US" sz="1050" dirty="0"/>
-                    </a:p>
-                  </a:txBody>
-                  <a:tcPr marL="91440" marR="91440" marT="45720" marB="45720" anchor="ctr">
-                    <a:lnL w="9525" cap="flat" cmpd="sng" algn="ctr">
-                      <a:solidFill>
-                        <a:srgbClr val="C9D6E3"/>
-                      </a:solidFill>
-                      <a:prstDash val="solid"/>
-                      <a:round/>
-                      <a:headEnd type="none" w="med" len="med"/>
-                      <a:tailEnd type="none" w="med" len="med"/>
-                    </a:lnL>
-                    <a:lnR w="9525" cap="flat" cmpd="sng" algn="ctr">
-                      <a:solidFill>
-                        <a:srgbClr val="C9D6E3"/>
-                      </a:solidFill>
-                      <a:prstDash val="solid"/>
-                      <a:round/>
-                      <a:headEnd type="none" w="med" len="med"/>
-                      <a:tailEnd type="none" w="med" len="med"/>
-                    </a:lnR>
-                    <a:lnT w="9525" cap="flat" cmpd="sng" algn="ctr">
-                      <a:solidFill>
-                        <a:srgbClr val="C9D6E3"/>
-                      </a:solidFill>
-                      <a:prstDash val="solid"/>
-                      <a:round/>
-                      <a:headEnd type="none" w="med" len="med"/>
-                      <a:tailEnd type="none" w="med" len="med"/>
-                    </a:lnT>
-                    <a:lnB w="9525" cap="flat" cmpd="sng" algn="ctr">
-                      <a:solidFill>
-                        <a:srgbClr val="C9D6E3"/>
-                      </a:solidFill>
-                      <a:prstDash val="solid"/>
-                      <a:round/>
-                      <a:headEnd type="none" w="med" len="med"/>
-                      <a:tailEnd type="none" w="med" len="med"/>
-                    </a:lnB>
-                    <a:solidFill>
-                      <a:schemeClr val="bg2"/>
-                    </a:solidFill>
-                  </a:tcPr>
-                </a:tc>
-              </a:tr>
-              <a:tr h="393192">
-                <a:tc>
-                  <a:txBody>
-                    <a:bodyPr/>
-                    <a:lstStyle/>
-                    <a:p>
-                      <a:pPr algn="l" indent="0" marL="0">
-                        <a:buNone/>
-                      </a:pPr>
-                      <a:r>
-                        <a:rPr lang="en-US" sz="1050" b="1" dirty="0">
-                          <a:solidFill>
-                            <a:schemeClr val="tx1"/>
-                          </a:solidFill>
-                        </a:rPr>
-                        <a:t>Execution evidence</a:t>
-                      </a:r>
-                      <a:endParaRPr lang="en-US" sz="1050" dirty="0"/>
-                    </a:p>
-                  </a:txBody>
-                  <a:tcPr marL="91440" marR="91440" marT="45720" marB="45720" anchor="ctr">
-                    <a:lnL w="9525" cap="flat" cmpd="sng" algn="ctr">
-                      <a:solidFill>
-                        <a:srgbClr val="C9D6E3"/>
-                      </a:solidFill>
-                      <a:prstDash val="solid"/>
-                      <a:round/>
-                      <a:headEnd type="none" w="med" len="med"/>
-                      <a:tailEnd type="none" w="med" len="med"/>
-                    </a:lnL>
-                    <a:lnR w="9525" cap="flat" cmpd="sng" algn="ctr">
-                      <a:solidFill>
-                        <a:srgbClr val="C9D6E3"/>
-                      </a:solidFill>
-                      <a:prstDash val="solid"/>
-                      <a:round/>
-                      <a:headEnd type="none" w="med" len="med"/>
-                      <a:tailEnd type="none" w="med" len="med"/>
-                    </a:lnR>
-                    <a:lnT w="9525" cap="flat" cmpd="sng" algn="ctr">
-                      <a:solidFill>
-                        <a:srgbClr val="C9D6E3"/>
-                      </a:solidFill>
-                      <a:prstDash val="solid"/>
-                      <a:round/>
-                      <a:headEnd type="none" w="med" len="med"/>
-                      <a:tailEnd type="none" w="med" len="med"/>
-                    </a:lnT>
-                    <a:lnB w="9525" cap="flat" cmpd="sng" algn="ctr">
-                      <a:solidFill>
-                        <a:srgbClr val="C9D6E3"/>
-                      </a:solidFill>
-                      <a:prstDash val="solid"/>
-                      <a:round/>
-                      <a:headEnd type="none" w="med" len="med"/>
-                      <a:tailEnd type="none" w="med" len="med"/>
-                    </a:lnB>
-                  </a:tcPr>
-                </a:tc>
-                <a:tc>
-                  <a:txBody>
-                    <a:bodyPr/>
-                    <a:lstStyle/>
-                    <a:p>
-                      <a:pPr algn="l" indent="0" marL="0">
-                        <a:buNone/>
-                      </a:pPr>
-                      <a:r>
-                        <a:rPr lang="en-US" sz="1050" dirty="0">
-                          <a:solidFill>
-                            <a:schemeClr val="tx1"/>
-                          </a:solidFill>
-                        </a:rPr>
-                        <a:t>Operation logs, audit verify, tamper and restore</a:t>
-                      </a:r>
-                      <a:endParaRPr lang="en-US" sz="1050" dirty="0"/>
-                    </a:p>
-                  </a:txBody>
-                  <a:tcPr marL="91440" marR="91440" marT="45720" marB="45720" anchor="ctr">
-                    <a:lnL w="9525" cap="flat" cmpd="sng" algn="ctr">
-                      <a:solidFill>
-                        <a:srgbClr val="C9D6E3"/>
-                      </a:solidFill>
-                      <a:prstDash val="solid"/>
-                      <a:round/>
-                      <a:headEnd type="none" w="med" len="med"/>
-                      <a:tailEnd type="none" w="med" len="med"/>
-                    </a:lnL>
-                    <a:lnR w="9525" cap="flat" cmpd="sng" algn="ctr">
-                      <a:solidFill>
-                        <a:srgbClr val="C9D6E3"/>
-                      </a:solidFill>
-                      <a:prstDash val="solid"/>
-                      <a:round/>
-                      <a:headEnd type="none" w="med" len="med"/>
-                      <a:tailEnd type="none" w="med" len="med"/>
-                    </a:lnR>
-                    <a:lnT w="9525" cap="flat" cmpd="sng" algn="ctr">
-                      <a:solidFill>
-                        <a:srgbClr val="C9D6E3"/>
-                      </a:solidFill>
-                      <a:prstDash val="solid"/>
-                      <a:round/>
-                      <a:headEnd type="none" w="med" len="med"/>
-                      <a:tailEnd type="none" w="med" len="med"/>
-                    </a:lnT>
-                    <a:lnB w="9525" cap="flat" cmpd="sng" algn="ctr">
-                      <a:solidFill>
-                        <a:srgbClr val="C9D6E3"/>
-                      </a:solidFill>
-                      <a:prstDash val="solid"/>
-                      <a:round/>
-                      <a:headEnd type="none" w="med" len="med"/>
-                      <a:tailEnd type="none" w="med" len="med"/>
-                    </a:lnB>
-                  </a:tcPr>
-                </a:tc>
-                <a:tc>
-                  <a:txBody>
-                    <a:bodyPr/>
-                    <a:lstStyle/>
-                    <a:p>
-                      <a:pPr algn="l" indent="0" marL="0">
-                        <a:buNone/>
-                      </a:pPr>
-                      <a:r>
-                        <a:rPr lang="en-US" sz="1050" b="1" dirty="0">
-                          <a:solidFill>
-                            <a:schemeClr val="accent6"/>
-                          </a:solidFill>
-                        </a:rPr>
-                        <a:t>Done</a:t>
-                      </a:r>
-                      <a:endParaRPr lang="en-US" sz="1050" dirty="0"/>
-                    </a:p>
-                  </a:txBody>
-                  <a:tcPr marL="91440" marR="91440" marT="45720" marB="45720" anchor="ctr">
-                    <a:lnL w="9525" cap="flat" cmpd="sng" algn="ctr">
-                      <a:solidFill>
-                        <a:srgbClr val="C9D6E3"/>
-                      </a:solidFill>
-                      <a:prstDash val="solid"/>
-                      <a:round/>
-                      <a:headEnd type="none" w="med" len="med"/>
-                      <a:tailEnd type="none" w="med" len="med"/>
-                    </a:lnL>
-                    <a:lnR w="9525" cap="flat" cmpd="sng" algn="ctr">
-                      <a:solidFill>
-                        <a:srgbClr val="C9D6E3"/>
-                      </a:solidFill>
-                      <a:prstDash val="solid"/>
-                      <a:round/>
-                      <a:headEnd type="none" w="med" len="med"/>
-                      <a:tailEnd type="none" w="med" len="med"/>
-                    </a:lnR>
-                    <a:lnT w="9525" cap="flat" cmpd="sng" algn="ctr">
-                      <a:solidFill>
-                        <a:srgbClr val="C9D6E3"/>
-                      </a:solidFill>
-                      <a:prstDash val="solid"/>
-                      <a:round/>
-                      <a:headEnd type="none" w="med" len="med"/>
-                      <a:tailEnd type="none" w="med" len="med"/>
-                    </a:lnT>
-                    <a:lnB w="9525" cap="flat" cmpd="sng" algn="ctr">
-                      <a:solidFill>
-                        <a:srgbClr val="C9D6E3"/>
-                      </a:solidFill>
-                      <a:prstDash val="solid"/>
-                      <a:round/>
-                      <a:headEnd type="none" w="med" len="med"/>
-                      <a:tailEnd type="none" w="med" len="med"/>
-                    </a:lnB>
-                  </a:tcPr>
-                </a:tc>
-              </a:tr>
-              <a:tr h="393192">
-                <a:tc>
-                  <a:txBody>
-                    <a:bodyPr/>
-                    <a:lstStyle/>
-                    <a:p>
-                      <a:pPr algn="l" indent="0" marL="0">
-                        <a:buNone/>
-                      </a:pPr>
-                      <a:r>
-                        <a:rPr lang="en-US" sz="1050" b="1" dirty="0">
-                          <a:solidFill>
-                            <a:schemeClr val="tx1"/>
-                          </a:solidFill>
-                        </a:rPr>
-                        <a:t>Sandbox, synthetic data, English</a:t>
-                      </a:r>
-                      <a:endParaRPr lang="en-US" sz="1050" dirty="0"/>
-                    </a:p>
-                  </a:txBody>
-                  <a:tcPr marL="91440" marR="91440" marT="45720" marB="45720" anchor="ctr">
-                    <a:lnL w="9525" cap="flat" cmpd="sng" algn="ctr">
-                      <a:solidFill>
-                        <a:srgbClr val="C9D6E3"/>
-                      </a:solidFill>
-                      <a:prstDash val="solid"/>
-                      <a:round/>
-                      <a:headEnd type="none" w="med" len="med"/>
-                      <a:tailEnd type="none" w="med" len="med"/>
-                    </a:lnL>
-                    <a:lnR w="9525" cap="flat" cmpd="sng" algn="ctr">
-                      <a:solidFill>
-                        <a:srgbClr val="C9D6E3"/>
-                      </a:solidFill>
-                      <a:prstDash val="solid"/>
-                      <a:round/>
-                      <a:headEnd type="none" w="med" len="med"/>
-                      <a:tailEnd type="none" w="med" len="med"/>
-                    </a:lnR>
-                    <a:lnT w="9525" cap="flat" cmpd="sng" algn="ctr">
-                      <a:solidFill>
-                        <a:srgbClr val="C9D6E3"/>
-                      </a:solidFill>
-                      <a:prstDash val="solid"/>
-                      <a:round/>
-                      <a:headEnd type="none" w="med" len="med"/>
-                      <a:tailEnd type="none" w="med" len="med"/>
-                    </a:lnT>
-                    <a:lnB w="9525" cap="flat" cmpd="sng" algn="ctr">
-                      <a:solidFill>
-                        <a:srgbClr val="C9D6E3"/>
-                      </a:solidFill>
-                      <a:prstDash val="solid"/>
-                      <a:round/>
-                      <a:headEnd type="none" w="med" len="med"/>
-                      <a:tailEnd type="none" w="med" len="med"/>
-                    </a:lnB>
-                    <a:solidFill>
-                      <a:schemeClr val="bg2"/>
-                    </a:solidFill>
-                  </a:tcPr>
-                </a:tc>
-                <a:tc>
-                  <a:txBody>
-                    <a:bodyPr/>
-                    <a:lstStyle/>
-                    <a:p>
-                      <a:pPr algn="l" indent="0" marL="0">
-                        <a:buNone/>
-                      </a:pPr>
-                      <a:r>
-                        <a:rPr lang="en-US" sz="1050" dirty="0">
-                          <a:solidFill>
-                            <a:schemeClr val="tx1"/>
-                          </a:solidFill>
-                        </a:rPr>
-                        <a:t>Banner on every screen; no real money moves</a:t>
-                      </a:r>
-                      <a:endParaRPr lang="en-US" sz="1050" dirty="0"/>
-                    </a:p>
-                  </a:txBody>
-                  <a:tcPr marL="91440" marR="91440" marT="45720" marB="45720" anchor="ctr">
-                    <a:lnL w="9525" cap="flat" cmpd="sng" algn="ctr">
-                      <a:solidFill>
-                        <a:srgbClr val="C9D6E3"/>
-                      </a:solidFill>
-                      <a:prstDash val="solid"/>
-                      <a:round/>
-                      <a:headEnd type="none" w="med" len="med"/>
-                      <a:tailEnd type="none" w="med" len="med"/>
-                    </a:lnL>
-                    <a:lnR w="9525" cap="flat" cmpd="sng" algn="ctr">
-                      <a:solidFill>
-                        <a:srgbClr val="C9D6E3"/>
-                      </a:solidFill>
-                      <a:prstDash val="solid"/>
-                      <a:round/>
-                      <a:headEnd type="none" w="med" len="med"/>
-                      <a:tailEnd type="none" w="med" len="med"/>
-                    </a:lnR>
-                    <a:lnT w="9525" cap="flat" cmpd="sng" algn="ctr">
-                      <a:solidFill>
-                        <a:srgbClr val="C9D6E3"/>
-                      </a:solidFill>
-                      <a:prstDash val="solid"/>
-                      <a:round/>
-                      <a:headEnd type="none" w="med" len="med"/>
-                      <a:tailEnd type="none" w="med" len="med"/>
-                    </a:lnT>
-                    <a:lnB w="9525" cap="flat" cmpd="sng" algn="ctr">
-                      <a:solidFill>
-                        <a:srgbClr val="C9D6E3"/>
-                      </a:solidFill>
-                      <a:prstDash val="solid"/>
-                      <a:round/>
-                      <a:headEnd type="none" w="med" len="med"/>
-                      <a:tailEnd type="none" w="med" len="med"/>
-                    </a:lnB>
-                    <a:solidFill>
-                      <a:schemeClr val="bg2"/>
-                    </a:solidFill>
-                  </a:tcPr>
-                </a:tc>
-                <a:tc>
-                  <a:txBody>
-                    <a:bodyPr/>
-                    <a:lstStyle/>
-                    <a:p>
-                      <a:pPr algn="l" indent="0" marL="0">
-                        <a:buNone/>
-                      </a:pPr>
-                      <a:r>
-                        <a:rPr lang="en-US" sz="1050" b="1" dirty="0">
-                          <a:solidFill>
-                            <a:schemeClr val="accent6"/>
-                          </a:solidFill>
-                        </a:rPr>
-                        <a:t>Done</a:t>
-                      </a:r>
-                      <a:endParaRPr lang="en-US" sz="1050" dirty="0"/>
-                    </a:p>
-                  </a:txBody>
-                  <a:tcPr marL="91440" marR="91440" marT="45720" marB="45720" anchor="ctr">
-                    <a:lnL w="9525" cap="flat" cmpd="sng" algn="ctr">
-                      <a:solidFill>
-                        <a:srgbClr val="C9D6E3"/>
-                      </a:solidFill>
-                      <a:prstDash val="solid"/>
-                      <a:round/>
-                      <a:headEnd type="none" w="med" len="med"/>
-                      <a:tailEnd type="none" w="med" len="med"/>
-                    </a:lnL>
-                    <a:lnR w="9525" cap="flat" cmpd="sng" algn="ctr">
-                      <a:solidFill>
-                        <a:srgbClr val="C9D6E3"/>
-                      </a:solidFill>
-                      <a:prstDash val="solid"/>
-                      <a:round/>
-                      <a:headEnd type="none" w="med" len="med"/>
-                      <a:tailEnd type="none" w="med" len="med"/>
-                    </a:lnR>
-                    <a:lnT w="9525" cap="flat" cmpd="sng" algn="ctr">
-                      <a:solidFill>
-                        <a:srgbClr val="C9D6E3"/>
-                      </a:solidFill>
-                      <a:prstDash val="solid"/>
-                      <a:round/>
-                      <a:headEnd type="none" w="med" len="med"/>
-                      <a:tailEnd type="none" w="med" len="med"/>
-                    </a:lnT>
-                    <a:lnB w="9525" cap="flat" cmpd="sng" algn="ctr">
-                      <a:solidFill>
-                        <a:srgbClr val="C9D6E3"/>
-                      </a:solidFill>
-                      <a:prstDash val="solid"/>
-                      <a:round/>
-                      <a:headEnd type="none" w="med" len="med"/>
-                      <a:tailEnd type="none" w="med" len="med"/>
-                    </a:lnB>
-                    <a:solidFill>
-                      <a:schemeClr val="bg2"/>
-                    </a:solidFill>
-                  </a:tcPr>
-                </a:tc>
-              </a:tr>
-            </a:tbl>
-          </a:graphicData>
-        </a:graphic>
-      </p:graphicFrame>
-      <p:sp>
-        <p:nvSpPr>
-          <p:cNvPr id="4" name="content-20-rect-2"/>
-          <p:cNvSpPr/>
-          <p:nvPr/>
-        </p:nvSpPr>
-        <p:spPr>
-          <a:xfrm>
-            <a:off x="6446520" y="1188720"/>
-            <a:ext cx="2240280" cy="1024128"/>
-          </a:xfrm>
-          <a:prstGeom prst="roundRect">
-            <a:avLst>
-              <a:gd name="adj" fmla="val 7143"/>
-            </a:avLst>
-          </a:prstGeom>
-          <a:solidFill>
-            <a:schemeClr val="bg2"/>
-          </a:solidFill>
-          <a:ln/>
-        </p:spPr>
-      </p:sp>
-      <p:sp>
-        <p:nvSpPr>
-          <p:cNvPr id="5" name="content-20-text-3"/>
-          <p:cNvSpPr txBox="1"/>
-          <p:nvPr/>
-        </p:nvSpPr>
-        <p:spPr>
-          <a:xfrm>
-            <a:off x="6583680" y="1234440"/>
-            <a:ext cx="1097280" cy="457200"/>
-          </a:xfrm>
-          <a:prstGeom prst="rect">
-            <a:avLst/>
-          </a:prstGeom>
-          <a:noFill/>
-          <a:ln/>
-        </p:spPr>
-        <p:txBody>
-          <a:bodyPr wrap="square" lIns="0" tIns="0" rIns="0" bIns="0" rtlCol="0" anchor="ctr"/>
-          <a:lstStyle/>
-          <a:p>
-            <a:pPr algn="l" indent="0" marL="0">
-              <a:buNone/>
-            </a:pPr>
-            <a:r>
-              <a:rPr lang="en-US" sz="2600" b="1" dirty="0">
-                <a:solidFill>
-                  <a:schemeClr val="accent1"/>
-                </a:solidFill>
-                <a:latin typeface="+mj-lt" pitchFamily="34" charset="0"/>
-                <a:ea typeface="+mj-lt" pitchFamily="34" charset="-122"/>
-                <a:cs typeface="+mj-lt" pitchFamily="34" charset="-120"/>
-              </a:rPr>
-              <a:t>40%</a:t>
-            </a:r>
-            <a:endParaRPr lang="en-US" sz="2600" dirty="0"/>
-          </a:p>
-        </p:txBody>
-      </p:sp>
-      <p:sp>
-        <p:nvSpPr>
-          <p:cNvPr id="6" name="content-20-text-4"/>
-          <p:cNvSpPr txBox="1"/>
-          <p:nvPr/>
-        </p:nvSpPr>
-        <p:spPr>
-          <a:xfrm>
-            <a:off x="6583680" y="1691640"/>
-            <a:ext cx="2011680" cy="256032"/>
-          </a:xfrm>
-          <a:prstGeom prst="rect">
-            <a:avLst/>
-          </a:prstGeom>
-          <a:noFill/>
-          <a:ln/>
-        </p:spPr>
-        <p:txBody>
-          <a:bodyPr wrap="square" lIns="0" tIns="0" rIns="0" bIns="0" rtlCol="0" anchor="t"/>
-          <a:lstStyle/>
-          <a:p>
-            <a:pPr algn="l" indent="0" marL="0">
-              <a:buNone/>
-            </a:pPr>
-            <a:r>
-              <a:rPr lang="en-US" sz="1100" b="1" dirty="0">
-                <a:solidFill>
-                  <a:schemeClr val="tx1"/>
-                </a:solidFill>
-              </a:rPr>
-              <a:t>Task completion</a:t>
-            </a:r>
-            <a:endParaRPr lang="en-US" sz="1100" dirty="0"/>
-          </a:p>
-        </p:txBody>
-      </p:sp>
-      <p:sp>
-        <p:nvSpPr>
-          <p:cNvPr id="7" name="content-20-text-5"/>
-          <p:cNvSpPr txBox="1"/>
-          <p:nvPr/>
-        </p:nvSpPr>
-        <p:spPr>
-          <a:xfrm>
-            <a:off x="6583680" y="1920240"/>
-            <a:ext cx="2011680" cy="256032"/>
-          </a:xfrm>
-          <a:prstGeom prst="rect">
-            <a:avLst/>
-          </a:prstGeom>
-          <a:noFill/>
-          <a:ln/>
-        </p:spPr>
-        <p:txBody>
-          <a:bodyPr wrap="square" lIns="0" tIns="0" rIns="0" bIns="0" rtlCol="0" anchor="t"/>
-          <a:lstStyle/>
-          <a:p>
-            <a:pPr algn="l" indent="0" marL="0">
-              <a:buNone/>
-            </a:pPr>
-            <a:r>
-              <a:rPr lang="en-US" sz="1000" dirty="0">
-                <a:solidFill>
-                  <a:schemeClr val="tx2"/>
-                </a:solidFill>
-              </a:rPr>
-              <a:t>Slides 5 to 8 and 14</a:t>
-            </a:r>
-            <a:endParaRPr lang="en-US" sz="1000" dirty="0"/>
-          </a:p>
-        </p:txBody>
-      </p:sp>
-      <p:sp>
-        <p:nvSpPr>
-          <p:cNvPr id="8" name="content-20-rect-6"/>
-          <p:cNvSpPr/>
-          <p:nvPr/>
-        </p:nvSpPr>
-        <p:spPr>
-          <a:xfrm>
-            <a:off x="6446520" y="2304288"/>
-            <a:ext cx="2240280" cy="1024128"/>
-          </a:xfrm>
-          <a:prstGeom prst="roundRect">
-            <a:avLst>
-              <a:gd name="adj" fmla="val 7143"/>
-            </a:avLst>
-          </a:prstGeom>
-          <a:solidFill>
-            <a:schemeClr val="bg2"/>
-          </a:solidFill>
-          <a:ln/>
-        </p:spPr>
-      </p:sp>
-      <p:sp>
-        <p:nvSpPr>
-          <p:cNvPr id="9" name="content-20-text-7"/>
-          <p:cNvSpPr txBox="1"/>
-          <p:nvPr/>
-        </p:nvSpPr>
-        <p:spPr>
-          <a:xfrm>
-            <a:off x="6583680" y="2350008"/>
-            <a:ext cx="1097280" cy="457200"/>
-          </a:xfrm>
-          <a:prstGeom prst="rect">
-            <a:avLst/>
-          </a:prstGeom>
-          <a:noFill/>
-          <a:ln/>
-        </p:spPr>
-        <p:txBody>
-          <a:bodyPr wrap="square" lIns="0" tIns="0" rIns="0" bIns="0" rtlCol="0" anchor="ctr"/>
-          <a:lstStyle/>
-          <a:p>
-            <a:pPr algn="l" indent="0" marL="0">
-              <a:buNone/>
-            </a:pPr>
-            <a:r>
-              <a:rPr lang="en-US" sz="2600" b="1" dirty="0">
-                <a:solidFill>
-                  <a:schemeClr val="accent1"/>
-                </a:solidFill>
-                <a:latin typeface="+mj-lt" pitchFamily="34" charset="0"/>
-                <a:ea typeface="+mj-lt" pitchFamily="34" charset="-122"/>
-                <a:cs typeface="+mj-lt" pitchFamily="34" charset="-120"/>
-              </a:rPr>
-              <a:t>30%</a:t>
-            </a:r>
-            <a:endParaRPr lang="en-US" sz="2600" dirty="0"/>
-          </a:p>
-        </p:txBody>
-      </p:sp>
-      <p:sp>
-        <p:nvSpPr>
-          <p:cNvPr id="10" name="content-20-text-8"/>
-          <p:cNvSpPr txBox="1"/>
-          <p:nvPr/>
-        </p:nvSpPr>
-        <p:spPr>
-          <a:xfrm>
-            <a:off x="6583680" y="2807208"/>
-            <a:ext cx="2011680" cy="256032"/>
-          </a:xfrm>
-          <a:prstGeom prst="rect">
-            <a:avLst/>
-          </a:prstGeom>
-          <a:noFill/>
-          <a:ln/>
-        </p:spPr>
-        <p:txBody>
-          <a:bodyPr wrap="square" lIns="0" tIns="0" rIns="0" bIns="0" rtlCol="0" anchor="t"/>
-          <a:lstStyle/>
-          <a:p>
-            <a:pPr algn="l" indent="0" marL="0">
-              <a:buNone/>
-            </a:pPr>
-            <a:r>
-              <a:rPr lang="en-US" sz="1100" b="1" dirty="0">
-                <a:solidFill>
-                  <a:schemeClr val="tx1"/>
-                </a:solidFill>
-              </a:rPr>
-              <a:t>Security and compliance</a:t>
-            </a:r>
-            <a:endParaRPr lang="en-US" sz="1100" dirty="0"/>
-          </a:p>
-        </p:txBody>
-      </p:sp>
-      <p:sp>
-        <p:nvSpPr>
-          <p:cNvPr id="11" name="content-20-text-9"/>
-          <p:cNvSpPr txBox="1"/>
-          <p:nvPr/>
-        </p:nvSpPr>
-        <p:spPr>
-          <a:xfrm>
-            <a:off x="6583680" y="3035808"/>
-            <a:ext cx="2011680" cy="256032"/>
-          </a:xfrm>
-          <a:prstGeom prst="rect">
-            <a:avLst/>
-          </a:prstGeom>
-          <a:noFill/>
-          <a:ln/>
-        </p:spPr>
-        <p:txBody>
-          <a:bodyPr wrap="square" lIns="0" tIns="0" rIns="0" bIns="0" rtlCol="0" anchor="t"/>
-          <a:lstStyle/>
-          <a:p>
-            <a:pPr algn="l" indent="0" marL="0">
-              <a:buNone/>
-            </a:pPr>
-            <a:r>
-              <a:rPr lang="en-US" sz="1000" dirty="0">
-                <a:solidFill>
-                  <a:schemeClr val="tx2"/>
-                </a:solidFill>
-              </a:rPr>
-              <a:t>Slides 9 and 15 to 18</a:t>
-            </a:r>
-            <a:endParaRPr lang="en-US" sz="1000" dirty="0"/>
-          </a:p>
-        </p:txBody>
-      </p:sp>
-      <p:sp>
-        <p:nvSpPr>
-          <p:cNvPr id="12" name="content-20-rect-10"/>
-          <p:cNvSpPr/>
-          <p:nvPr/>
-        </p:nvSpPr>
-        <p:spPr>
-          <a:xfrm>
-            <a:off x="6446520" y="3419856"/>
-            <a:ext cx="2240280" cy="1024128"/>
-          </a:xfrm>
-          <a:prstGeom prst="roundRect">
-            <a:avLst>
-              <a:gd name="adj" fmla="val 7143"/>
-            </a:avLst>
-          </a:prstGeom>
-          <a:solidFill>
-            <a:schemeClr val="bg2"/>
-          </a:solidFill>
-          <a:ln/>
-        </p:spPr>
-      </p:sp>
-      <p:sp>
-        <p:nvSpPr>
-          <p:cNvPr id="13" name="content-20-text-11"/>
-          <p:cNvSpPr txBox="1"/>
-          <p:nvPr/>
-        </p:nvSpPr>
-        <p:spPr>
-          <a:xfrm>
-            <a:off x="6583680" y="3465576"/>
-            <a:ext cx="1097280" cy="457200"/>
-          </a:xfrm>
-          <a:prstGeom prst="rect">
-            <a:avLst/>
-          </a:prstGeom>
-          <a:noFill/>
-          <a:ln/>
-        </p:spPr>
-        <p:txBody>
-          <a:bodyPr wrap="square" lIns="0" tIns="0" rIns="0" bIns="0" rtlCol="0" anchor="ctr"/>
-          <a:lstStyle/>
-          <a:p>
-            <a:pPr algn="l" indent="0" marL="0">
-              <a:buNone/>
-            </a:pPr>
-            <a:r>
-              <a:rPr lang="en-US" sz="2600" b="1" dirty="0">
-                <a:solidFill>
-                  <a:schemeClr val="accent1"/>
-                </a:solidFill>
-                <a:latin typeface="+mj-lt" pitchFamily="34" charset="0"/>
-                <a:ea typeface="+mj-lt" pitchFamily="34" charset="-122"/>
-                <a:cs typeface="+mj-lt" pitchFamily="34" charset="-120"/>
-              </a:rPr>
-              <a:t>30%</a:t>
-            </a:r>
-            <a:endParaRPr lang="en-US" sz="2600" dirty="0"/>
-          </a:p>
-        </p:txBody>
-      </p:sp>
-      <p:sp>
-        <p:nvSpPr>
-          <p:cNvPr id="14" name="content-20-text-12"/>
-          <p:cNvSpPr txBox="1"/>
-          <p:nvPr/>
-        </p:nvSpPr>
-        <p:spPr>
-          <a:xfrm>
-            <a:off x="6583680" y="3922776"/>
-            <a:ext cx="2011680" cy="256032"/>
-          </a:xfrm>
-          <a:prstGeom prst="rect">
-            <a:avLst/>
-          </a:prstGeom>
-          <a:noFill/>
-          <a:ln/>
-        </p:spPr>
-        <p:txBody>
-          <a:bodyPr wrap="square" lIns="0" tIns="0" rIns="0" bIns="0" rtlCol="0" anchor="t"/>
-          <a:lstStyle/>
-          <a:p>
-            <a:pPr algn="l" indent="0" marL="0">
-              <a:buNone/>
-            </a:pPr>
-            <a:r>
-              <a:rPr lang="en-US" sz="1100" b="1" dirty="0">
-                <a:solidFill>
-                  <a:schemeClr val="tx1"/>
-                </a:solidFill>
-              </a:rPr>
-              <a:t>Innovation and interaction</a:t>
-            </a:r>
-            <a:endParaRPr lang="en-US" sz="1100" dirty="0"/>
-          </a:p>
-        </p:txBody>
-      </p:sp>
-      <p:sp>
-        <p:nvSpPr>
-          <p:cNvPr id="15" name="content-20-text-13"/>
-          <p:cNvSpPr txBox="1"/>
-          <p:nvPr/>
-        </p:nvSpPr>
-        <p:spPr>
-          <a:xfrm>
-            <a:off x="6583680" y="4151376"/>
-            <a:ext cx="2011680" cy="256032"/>
-          </a:xfrm>
-          <a:prstGeom prst="rect">
-            <a:avLst/>
-          </a:prstGeom>
-          <a:noFill/>
-          <a:ln/>
-        </p:spPr>
-        <p:txBody>
-          <a:bodyPr wrap="square" lIns="0" tIns="0" rIns="0" bIns="0" rtlCol="0" anchor="t"/>
-          <a:lstStyle/>
-          <a:p>
-            <a:pPr algn="l" indent="0" marL="0">
-              <a:buNone/>
-            </a:pPr>
-            <a:r>
-              <a:rPr lang="en-US" sz="1000" dirty="0">
-                <a:solidFill>
-                  <a:schemeClr val="tx2"/>
-                </a:solidFill>
-              </a:rPr>
-              <a:t>Slides 8 to 12 and 19</a:t>
-            </a:r>
-            <a:endParaRPr lang="en-US" sz="1000" dirty="0"/>
-          </a:p>
-        </p:txBody>
-      </p:sp>
-      <p:sp>
-        <p:nvSpPr>
-          <p:cNvPr id="16" name="content-20-text-14"/>
-          <p:cNvSpPr txBox="1"/>
-          <p:nvPr/>
-        </p:nvSpPr>
-        <p:spPr>
-          <a:xfrm>
-            <a:off x="457200" y="4681728"/>
-            <a:ext cx="8229600" cy="274320"/>
-          </a:xfrm>
-          <a:prstGeom prst="rect">
-            <a:avLst/>
-          </a:prstGeom>
-          <a:noFill/>
-          <a:ln/>
-        </p:spPr>
-        <p:txBody>
-          <a:bodyPr wrap="square" lIns="0" tIns="0" rIns="0" bIns="0" rtlCol="0" anchor="t"/>
-          <a:lstStyle/>
-          <a:p>
-            <a:pPr algn="l" indent="0" marL="0">
-              <a:buNone/>
-            </a:pPr>
-            <a:r>
-              <a:rPr lang="en-US" sz="1000" dirty="0">
-                <a:solidFill>
-                  <a:schemeClr val="tx2"/>
-                </a:solidFill>
-              </a:rPr>
-              <a:t>Eligibility and registration are the team's to confirm with the organiser; nothing here certifies them.</a:t>
-            </a:r>
-            <a:endParaRPr lang="en-US" sz="1000" dirty="0"/>
-          </a:p>
-        </p:txBody>
-      </p:sp>
-    </p:spTree>
-  </p:cSld>
-  <p:clrMapOvr>
-    <a:masterClrMapping/>
-  </p:clrMapOvr>
-</p:sld>
-</file>
-
-<file path=ppt/slides/slide21.xml><?xml version="1.0" encoding="utf-8"?>
-<p:sld xmlns:a="http://schemas.openxmlformats.org/drawingml/2006/main" xmlns:r="http://schemas.openxmlformats.org/officeDocument/2006/relationships" xmlns:p="http://schemas.openxmlformats.org/presentationml/2006/main">
-  <p:cSld name="Slide 21">
-    <p:spTree>
-      <p:nvGrpSpPr>
-        <p:cNvPr id="1" name=""/>
-        <p:cNvGrpSpPr/>
-        <p:nvPr/>
-      </p:nvGrpSpPr>
-      <p:grpSpPr>
-        <a:xfrm>
-          <a:off x="0" y="0"/>
-          <a:ext cx="0" cy="0"/>
-          <a:chOff x="0" y="0"/>
-          <a:chExt cx="0" cy="0"/>
-        </a:xfrm>
-      </p:grpSpPr>
-      <p:sp>
-        <p:nvSpPr>
-          <p:cNvPr id="2" name="Text 0"/>
-          <p:cNvSpPr/>
-          <p:nvPr>
-            <p:ph idx="100" type="title" hasCustomPrompt="1"/>
-          </p:nvPr>
-        </p:nvSpPr>
-        <p:spPr>
-          <a:xfrm>
-            <a:off x="457200" y="274320"/>
-            <a:ext cx="8229600" cy="777240"/>
-          </a:xfrm>
-          <a:prstGeom prst="rect">
-            <a:avLst/>
-          </a:prstGeom>
-          <a:noFill/>
-          <a:ln/>
-        </p:spPr>
-        <p:txBody>
-          <a:bodyPr wrap="square" lIns="0" tIns="0" rIns="0" bIns="0" rtlCol="0" anchor="ctr"/>
-          <a:lstStyle/>
-          <a:p>
-            <a:pPr algn="l" indent="0" marL="0">
-              <a:buNone/>
-            </a:pPr>
-            <a:r>
-              <a:rPr lang="en-US" sz="3600" b="1" dirty="0">
-                <a:solidFill>
-                  <a:schemeClr val="bg1"/>
-                </a:solidFill>
-                <a:latin typeface="+mj-lt" pitchFamily="34" charset="0"/>
-                <a:ea typeface="+mj-lt" pitchFamily="34" charset="-122"/>
-                <a:cs typeface="+mj-lt" pitchFamily="34" charset="-120"/>
-              </a:rPr>
-              <a:t>What comes next</a:t>
-            </a:r>
-            <a:endParaRPr lang="en-US" sz="3600" dirty="0"/>
-          </a:p>
-        </p:txBody>
-      </p:sp>
-      <p:sp>
-        <p:nvSpPr>
-          <p:cNvPr id="3" name="closing-21-rect-1"/>
+      <p:sp>
+        <p:nvSpPr>
+          <p:cNvPr id="3" name="closing-20-rect-1"/>
           <p:cNvSpPr/>
           <p:nvPr/>
         </p:nvSpPr>
@@ -15390,7 +13315,7 @@
       </p:sp>
       <p:sp>
         <p:nvSpPr>
-          <p:cNvPr id="4" name="closing-21-text-2"/>
+          <p:cNvPr id="4" name="closing-20-text-2"/>
           <p:cNvSpPr txBox="1"/>
           <p:nvPr/>
         </p:nvSpPr>
@@ -15426,7 +13351,7 @@
       </p:sp>
       <p:sp>
         <p:nvSpPr>
-          <p:cNvPr id="5" name="closing-21-text-3"/>
+          <p:cNvPr id="5" name="closing-20-text-3"/>
           <p:cNvSpPr txBox="1"/>
           <p:nvPr/>
         </p:nvSpPr>
@@ -15462,7 +13387,7 @@
       </p:sp>
       <p:sp>
         <p:nvSpPr>
-          <p:cNvPr id="6" name="closing-21-rect-4"/>
+          <p:cNvPr id="6" name="closing-20-rect-4"/>
           <p:cNvSpPr/>
           <p:nvPr/>
         </p:nvSpPr>
@@ -15484,7 +13409,7 @@
       </p:sp>
       <p:sp>
         <p:nvSpPr>
-          <p:cNvPr id="7" name="closing-21-text-5"/>
+          <p:cNvPr id="7" name="closing-20-text-5"/>
           <p:cNvSpPr txBox="1"/>
           <p:nvPr/>
         </p:nvSpPr>
@@ -15520,7 +13445,7 @@
       </p:sp>
       <p:sp>
         <p:nvSpPr>
-          <p:cNvPr id="8" name="closing-21-text-6"/>
+          <p:cNvPr id="8" name="closing-20-text-6"/>
           <p:cNvSpPr txBox="1"/>
           <p:nvPr/>
         </p:nvSpPr>
@@ -15556,7 +13481,7 @@
       </p:sp>
       <p:sp>
         <p:nvSpPr>
-          <p:cNvPr id="9" name="closing-21-rect-7"/>
+          <p:cNvPr id="9" name="closing-20-rect-7"/>
           <p:cNvSpPr/>
           <p:nvPr/>
         </p:nvSpPr>
@@ -15578,7 +13503,7 @@
       </p:sp>
       <p:sp>
         <p:nvSpPr>
-          <p:cNvPr id="10" name="closing-21-text-8"/>
+          <p:cNvPr id="10" name="closing-20-text-8"/>
           <p:cNvSpPr txBox="1"/>
           <p:nvPr/>
         </p:nvSpPr>
@@ -15614,7 +13539,7 @@
       </p:sp>
       <p:sp>
         <p:nvSpPr>
-          <p:cNvPr id="11" name="closing-21-text-9"/>
+          <p:cNvPr id="11" name="closing-20-text-9"/>
           <p:cNvSpPr txBox="1"/>
           <p:nvPr/>
         </p:nvSpPr>
@@ -15650,7 +13575,7 @@
       </p:sp>
       <p:sp>
         <p:nvSpPr>
-          <p:cNvPr id="12" name="closing-21-rect-10"/>
+          <p:cNvPr id="12" name="closing-20-rect-10"/>
           <p:cNvSpPr/>
           <p:nvPr/>
         </p:nvSpPr>
@@ -15672,7 +13597,7 @@
       </p:sp>
       <p:sp>
         <p:nvSpPr>
-          <p:cNvPr id="13" name="closing-21-text-11"/>
+          <p:cNvPr id="13" name="closing-20-text-11"/>
           <p:cNvSpPr txBox="1"/>
           <p:nvPr/>
         </p:nvSpPr>
@@ -15708,7 +13633,7 @@
       </p:sp>
       <p:sp>
         <p:nvSpPr>
-          <p:cNvPr id="14" name="closing-21-text-12"/>
+          <p:cNvPr id="14" name="closing-20-text-12"/>
           <p:cNvSpPr txBox="1"/>
           <p:nvPr/>
         </p:nvSpPr>
@@ -15744,7 +13669,7 @@
       </p:sp>
       <p:sp>
         <p:nvSpPr>
-          <p:cNvPr id="15" name="closing-21-text-13"/>
+          <p:cNvPr id="15" name="closing-20-text-13"/>
           <p:cNvSpPr txBox="1"/>
           <p:nvPr/>
         </p:nvSpPr>
@@ -15783,7 +13708,7 @@
       </p:sp>
       <p:sp>
         <p:nvSpPr>
-          <p:cNvPr id="16" name="closing-21-text-14"/>
+          <p:cNvPr id="16" name="closing-20-text-14"/>
           <p:cNvSpPr txBox="1"/>
           <p:nvPr/>
         </p:nvSpPr>

--- a/submission/StudyRoute_Deck.pptx
+++ b/submission/StudyRoute_Deck.pptx
@@ -126,19 +126,19 @@
   <p:extLst>
     <p:ext uri="{521415D9-36F7-43E2-AB2F-B90AF26B5E84}">
       <p14:sectionLst xmlns:p14="http://schemas.microsoft.com/office/powerpoint/2010/main">
-        <p14:section name="Opening" id="{41d31ac0-0ea8-74ef-1832-d43a76621859}">
+        <p14:section name="Opening" id="{1500082e-aa91-477a-1105-2faebb79e682}">
           <p14:sldIdLst>
             <p14:sldId id="256"/>
             <p14:sldId id="257"/>
           </p14:sldIdLst>
         </p14:section>
-        <p14:section name="The problem" id="{0b5d19aa-4d38-e4fc-6440-f0434cbf518d}">
+        <p14:section name="The problem" id="{3e353e3a-efd3-941e-d542-86a6d28bbbe1}">
           <p14:sldIdLst>
             <p14:sldId id="258"/>
             <p14:sldId id="259"/>
           </p14:sldIdLst>
         </p14:section>
-        <p14:section name="The solution" id="{b19af7d6-6fd0-d0dc-7238-b5a5e06b72be}">
+        <p14:section name="The solution" id="{adef3268-bf21-da0a-7a43-54b44675b2e4}">
           <p14:sldIdLst>
             <p14:sldId id="260"/>
             <p14:sldId id="261"/>
@@ -146,7 +146,7 @@
             <p14:sldId id="263"/>
           </p14:sldIdLst>
         </p14:section>
-        <p14:section name="Trust" id="{2b1ecca8-c892-cb9c-e2f7-196628c1fa99}">
+        <p14:section name="Trust" id="{e8d10c3c-43f0-c76b-6cfa-08e0f6505429}">
           <p14:sldIdLst>
             <p14:sldId id="264"/>
             <p14:sldId id="265"/>
@@ -160,7 +160,7 @@
             <p14:sldId id="273"/>
           </p14:sldIdLst>
         </p14:section>
-        <p14:section name="Close" id="{07bc6671-a836-ecc0-4ea6-fbb768ef0779}">
+        <p14:section name="Close" id="{255e8ab2-79e4-b54e-a733-355c2b457e2a}">
           <p14:sldIdLst>
             <p14:sldId id="274"/>
             <p14:sldId id="275"/>
@@ -11515,7 +11515,7 @@
                   <a:schemeClr val="tx2"/>
                 </a:solidFill>
               </a:rPr>
-              <a:t>Source: security self-assessment, edition 1.2, sections 13 and 14: every record, the raw-log hashes and what each fix did and did not show.</a:t>
+              <a:t>Source: security self-assessment, sections 13 and 14: every record, the raw-log hashes and what each fix did and did not show.</a:t>
             </a:r>
             <a:endParaRPr lang="en-US" sz="1000" dirty="0"/>
           </a:p>

--- a/submission/StudyRoute_Deck.pptx
+++ b/submission/StudyRoute_Deck.pptx
@@ -126,19 +126,19 @@
   <p:extLst>
     <p:ext uri="{521415D9-36F7-43E2-AB2F-B90AF26B5E84}">
       <p14:sectionLst xmlns:p14="http://schemas.microsoft.com/office/powerpoint/2010/main">
-        <p14:section name="Opening" id="{1500082e-aa91-477a-1105-2faebb79e682}">
+        <p14:section name="Opening" id="{ab999c93-b502-8248-7518-5b49044415a1}">
           <p14:sldIdLst>
             <p14:sldId id="256"/>
             <p14:sldId id="257"/>
           </p14:sldIdLst>
         </p14:section>
-        <p14:section name="The problem" id="{3e353e3a-efd3-941e-d542-86a6d28bbbe1}">
+        <p14:section name="The problem" id="{7133b365-cac8-0e5d-e4b5-99baad3264dc}">
           <p14:sldIdLst>
             <p14:sldId id="258"/>
             <p14:sldId id="259"/>
           </p14:sldIdLst>
         </p14:section>
-        <p14:section name="The solution" id="{adef3268-bf21-da0a-7a43-54b44675b2e4}">
+        <p14:section name="The solution" id="{3212477e-8994-b27f-a8d4-a97733ce9d5b}">
           <p14:sldIdLst>
             <p14:sldId id="260"/>
             <p14:sldId id="261"/>
@@ -146,7 +146,7 @@
             <p14:sldId id="263"/>
           </p14:sldIdLst>
         </p14:section>
-        <p14:section name="Trust" id="{e8d10c3c-43f0-c76b-6cfa-08e0f6505429}">
+        <p14:section name="Trust" id="{ae9ddbdf-d48b-db66-39d3-e5adfd7bb4ab}">
           <p14:sldIdLst>
             <p14:sldId id="264"/>
             <p14:sldId id="265"/>
@@ -160,7 +160,7 @@
             <p14:sldId id="273"/>
           </p14:sldIdLst>
         </p14:section>
-        <p14:section name="Close" id="{255e8ab2-79e4-b54e-a733-355c2b457e2a}">
+        <p14:section name="Close" id="{e6810f57-d3df-f06c-4c72-ced27b6697b1}">
           <p14:sldIdLst>
             <p14:sldId id="274"/>
             <p14:sldId id="275"/>
@@ -1307,7 +1307,7 @@
           <a:p>
             <a:r>
               <a:rPr lang="en-US" dirty="0"/>
-              <a:t>Everything we ran: 1,679 backend tests, one skipped on Windows; 463 web tests; 24 browser tests; all 24 scenarios mapped; 314 security probe records. On the right is GitHub's own page for our latest commit: all six CI jobs green. These are our own tests; a fresh clone runs 1,672 of 1,673, and no outside party has tested it.</a:t>
+              <a:t>Everything we ran: 1,705 backend tests, one skipped on Windows, including 25 assistant prompts that all give the expected tool and safety outcome; 463 web tests; 24 browser tests; all 24 scenarios pass; 314 security probe records. On the right is GitHub's own page for our latest commit: all six CI jobs green. These are our own tests, and no outside party has tested it yet.</a:t>
             </a:r>
             <a:endParaRPr lang="en-US" dirty="0"/>
           </a:p>
@@ -7488,7 +7488,7 @@
                 <a:ea typeface="+mj-lt" pitchFamily="34" charset="-122"/>
                 <a:cs typeface="+mj-lt" pitchFamily="34" charset="-120"/>
               </a:rPr>
-              <a:t>1,679</a:t>
+              <a:t>1,705</a:t>
             </a:r>
             <a:endParaRPr lang="en-US" sz="2400" dirty="0"/>
           </a:p>
@@ -7524,7 +7524,7 @@
                   <a:schemeClr val="tx2"/>
                 </a:solidFill>
               </a:rPr>
-              <a:t>backend tests (1,678 pass, 1 skipped)</a:t>
+              <a:t>backend tests, incl. 25 assistant prompts (25 of 25 pass)</a:t>
             </a:r>
             <a:endParaRPr lang="en-US" sz="1050" dirty="0"/>
           </a:p>
@@ -8139,7 +8139,7 @@
                   <a:schemeClr val="tx2"/>
                 </a:solidFill>
               </a:rPr>
-              <a:t>Our own tests. A fresh clone runs 1,672 of 1,673 (one module needs an excluded fixture). No independent test yet.</a:t>
+              <a:t>Our own tests: a fresh clone runs the same 1,705. No independent test yet.</a:t>
             </a:r>
             <a:endParaRPr lang="en-US" sz="1100" dirty="0"/>
           </a:p>
